--- a/reference_content/Slides/pytorch_optimization.pptx
+++ b/reference_content/Slides/pytorch_optimization.pptx
@@ -28,64 +28,65 @@
     <p:sldId id="338" r:id="rId22"/>
     <p:sldId id="282" r:id="rId23"/>
     <p:sldId id="263" r:id="rId24"/>
-    <p:sldId id="271" r:id="rId25"/>
-    <p:sldId id="274" r:id="rId26"/>
-    <p:sldId id="272" r:id="rId27"/>
-    <p:sldId id="267" r:id="rId28"/>
-    <p:sldId id="273" r:id="rId29"/>
-    <p:sldId id="275" r:id="rId30"/>
-    <p:sldId id="268" r:id="rId31"/>
-    <p:sldId id="295" r:id="rId32"/>
-    <p:sldId id="294" r:id="rId33"/>
-    <p:sldId id="276" r:id="rId34"/>
-    <p:sldId id="283" r:id="rId35"/>
-    <p:sldId id="284" r:id="rId36"/>
-    <p:sldId id="286" r:id="rId37"/>
-    <p:sldId id="285" r:id="rId38"/>
-    <p:sldId id="288" r:id="rId39"/>
-    <p:sldId id="296" r:id="rId40"/>
-    <p:sldId id="269" r:id="rId41"/>
-    <p:sldId id="270" r:id="rId42"/>
-    <p:sldId id="298" r:id="rId43"/>
-    <p:sldId id="299" r:id="rId44"/>
-    <p:sldId id="300" r:id="rId45"/>
-    <p:sldId id="301" r:id="rId46"/>
-    <p:sldId id="302" r:id="rId47"/>
-    <p:sldId id="303" r:id="rId48"/>
-    <p:sldId id="304" r:id="rId49"/>
-    <p:sldId id="305" r:id="rId50"/>
-    <p:sldId id="306" r:id="rId51"/>
-    <p:sldId id="307" r:id="rId52"/>
-    <p:sldId id="308" r:id="rId53"/>
-    <p:sldId id="309" r:id="rId54"/>
-    <p:sldId id="310" r:id="rId55"/>
-    <p:sldId id="311" r:id="rId56"/>
-    <p:sldId id="312" r:id="rId57"/>
-    <p:sldId id="313" r:id="rId58"/>
-    <p:sldId id="314" r:id="rId59"/>
-    <p:sldId id="315" r:id="rId60"/>
-    <p:sldId id="316" r:id="rId61"/>
-    <p:sldId id="317" r:id="rId62"/>
-    <p:sldId id="318" r:id="rId63"/>
-    <p:sldId id="319" r:id="rId64"/>
-    <p:sldId id="320" r:id="rId65"/>
-    <p:sldId id="321" r:id="rId66"/>
-    <p:sldId id="322" r:id="rId67"/>
-    <p:sldId id="323" r:id="rId68"/>
-    <p:sldId id="324" r:id="rId69"/>
-    <p:sldId id="325" r:id="rId70"/>
-    <p:sldId id="326" r:id="rId71"/>
-    <p:sldId id="327" r:id="rId72"/>
-    <p:sldId id="328" r:id="rId73"/>
-    <p:sldId id="329" r:id="rId74"/>
-    <p:sldId id="330" r:id="rId75"/>
-    <p:sldId id="331" r:id="rId76"/>
-    <p:sldId id="332" r:id="rId77"/>
-    <p:sldId id="333" r:id="rId78"/>
-    <p:sldId id="334" r:id="rId79"/>
-    <p:sldId id="335" r:id="rId80"/>
-    <p:sldId id="336" r:id="rId81"/>
-    <p:sldId id="337" r:id="rId82"/>
+    <p:sldId id="339" r:id="rId25"/>
+    <p:sldId id="271" r:id="rId26"/>
+    <p:sldId id="274" r:id="rId27"/>
+    <p:sldId id="272" r:id="rId28"/>
+    <p:sldId id="267" r:id="rId29"/>
+    <p:sldId id="273" r:id="rId30"/>
+    <p:sldId id="275" r:id="rId31"/>
+    <p:sldId id="268" r:id="rId32"/>
+    <p:sldId id="295" r:id="rId33"/>
+    <p:sldId id="294" r:id="rId34"/>
+    <p:sldId id="276" r:id="rId35"/>
+    <p:sldId id="283" r:id="rId36"/>
+    <p:sldId id="284" r:id="rId37"/>
+    <p:sldId id="286" r:id="rId38"/>
+    <p:sldId id="285" r:id="rId39"/>
+    <p:sldId id="288" r:id="rId40"/>
+    <p:sldId id="296" r:id="rId41"/>
+    <p:sldId id="269" r:id="rId42"/>
+    <p:sldId id="270" r:id="rId43"/>
+    <p:sldId id="298" r:id="rId44"/>
+    <p:sldId id="299" r:id="rId45"/>
+    <p:sldId id="300" r:id="rId46"/>
+    <p:sldId id="301" r:id="rId47"/>
+    <p:sldId id="302" r:id="rId48"/>
+    <p:sldId id="303" r:id="rId49"/>
+    <p:sldId id="304" r:id="rId50"/>
+    <p:sldId id="305" r:id="rId51"/>
+    <p:sldId id="306" r:id="rId52"/>
+    <p:sldId id="307" r:id="rId53"/>
+    <p:sldId id="308" r:id="rId54"/>
+    <p:sldId id="309" r:id="rId55"/>
+    <p:sldId id="310" r:id="rId56"/>
+    <p:sldId id="311" r:id="rId57"/>
+    <p:sldId id="312" r:id="rId58"/>
+    <p:sldId id="313" r:id="rId59"/>
+    <p:sldId id="314" r:id="rId60"/>
+    <p:sldId id="315" r:id="rId61"/>
+    <p:sldId id="316" r:id="rId62"/>
+    <p:sldId id="317" r:id="rId63"/>
+    <p:sldId id="318" r:id="rId64"/>
+    <p:sldId id="319" r:id="rId65"/>
+    <p:sldId id="320" r:id="rId66"/>
+    <p:sldId id="321" r:id="rId67"/>
+    <p:sldId id="322" r:id="rId68"/>
+    <p:sldId id="323" r:id="rId69"/>
+    <p:sldId id="324" r:id="rId70"/>
+    <p:sldId id="325" r:id="rId71"/>
+    <p:sldId id="326" r:id="rId72"/>
+    <p:sldId id="327" r:id="rId73"/>
+    <p:sldId id="328" r:id="rId74"/>
+    <p:sldId id="329" r:id="rId75"/>
+    <p:sldId id="330" r:id="rId76"/>
+    <p:sldId id="331" r:id="rId77"/>
+    <p:sldId id="332" r:id="rId78"/>
+    <p:sldId id="333" r:id="rId79"/>
+    <p:sldId id="334" r:id="rId80"/>
+    <p:sldId id="335" r:id="rId81"/>
+    <p:sldId id="336" r:id="rId82"/>
+    <p:sldId id="337" r:id="rId83"/>
   </p:sldIdLst>
   <p:sldSz cx="12192000" cy="6858000"/>
   <p:notesSz cx="6858000" cy="9144000"/>
@@ -212,6 +213,7 @@
             <p14:sldId id="338"/>
             <p14:sldId id="282"/>
             <p14:sldId id="263"/>
+            <p14:sldId id="339"/>
             <p14:sldId id="271"/>
             <p14:sldId id="274"/>
             <p14:sldId id="272"/>
@@ -484,7 +486,7 @@
           <a:p>
             <a:fld id="{04AB04D2-159E-4A89-9D41-8FD3B2B47560}" type="datetimeFigureOut">
               <a:rPr lang="LID4096" smtClean="0"/>
-              <a:t>12/17/25</a:t>
+              <a:t>3/8/26</a:t>
             </a:fld>
             <a:endParaRPr lang="LID4096"/>
           </a:p>
@@ -695,7 +697,7 @@
           <a:p>
             <a:fld id="{04AB04D2-159E-4A89-9D41-8FD3B2B47560}" type="datetimeFigureOut">
               <a:rPr lang="LID4096" smtClean="0"/>
-              <a:t>12/17/25</a:t>
+              <a:t>3/8/26</a:t>
             </a:fld>
             <a:endParaRPr lang="LID4096"/>
           </a:p>
@@ -910,7 +912,7 @@
           <a:p>
             <a:fld id="{04AB04D2-159E-4A89-9D41-8FD3B2B47560}" type="datetimeFigureOut">
               <a:rPr lang="LID4096" smtClean="0"/>
-              <a:t>12/17/25</a:t>
+              <a:t>3/8/26</a:t>
             </a:fld>
             <a:endParaRPr lang="LID4096"/>
           </a:p>
@@ -1111,7 +1113,7 @@
           <a:p>
             <a:fld id="{04AB04D2-159E-4A89-9D41-8FD3B2B47560}" type="datetimeFigureOut">
               <a:rPr lang="LID4096" smtClean="0"/>
-              <a:t>12/17/25</a:t>
+              <a:t>3/8/26</a:t>
             </a:fld>
             <a:endParaRPr lang="LID4096"/>
           </a:p>
@@ -1390,7 +1392,7 @@
           <a:p>
             <a:fld id="{04AB04D2-159E-4A89-9D41-8FD3B2B47560}" type="datetimeFigureOut">
               <a:rPr lang="LID4096" smtClean="0"/>
-              <a:t>12/17/25</a:t>
+              <a:t>3/8/26</a:t>
             </a:fld>
             <a:endParaRPr lang="LID4096"/>
           </a:p>
@@ -1658,7 +1660,7 @@
           <a:p>
             <a:fld id="{04AB04D2-159E-4A89-9D41-8FD3B2B47560}" type="datetimeFigureOut">
               <a:rPr lang="LID4096" smtClean="0"/>
-              <a:t>12/17/25</a:t>
+              <a:t>3/8/26</a:t>
             </a:fld>
             <a:endParaRPr lang="LID4096"/>
           </a:p>
@@ -2074,7 +2076,7 @@
           <a:p>
             <a:fld id="{04AB04D2-159E-4A89-9D41-8FD3B2B47560}" type="datetimeFigureOut">
               <a:rPr lang="LID4096" smtClean="0"/>
-              <a:t>12/17/25</a:t>
+              <a:t>3/8/26</a:t>
             </a:fld>
             <a:endParaRPr lang="LID4096"/>
           </a:p>
@@ -2223,7 +2225,7 @@
           <a:p>
             <a:fld id="{04AB04D2-159E-4A89-9D41-8FD3B2B47560}" type="datetimeFigureOut">
               <a:rPr lang="LID4096" smtClean="0"/>
-              <a:t>12/17/25</a:t>
+              <a:t>3/8/26</a:t>
             </a:fld>
             <a:endParaRPr lang="LID4096"/>
           </a:p>
@@ -2349,7 +2351,7 @@
           <a:p>
             <a:fld id="{04AB04D2-159E-4A89-9D41-8FD3B2B47560}" type="datetimeFigureOut">
               <a:rPr lang="LID4096" smtClean="0"/>
-              <a:t>12/17/25</a:t>
+              <a:t>3/8/26</a:t>
             </a:fld>
             <a:endParaRPr lang="LID4096"/>
           </a:p>
@@ -2600,7 +2602,7 @@
           <a:p>
             <a:fld id="{04AB04D2-159E-4A89-9D41-8FD3B2B47560}" type="datetimeFigureOut">
               <a:rPr lang="LID4096" smtClean="0"/>
-              <a:t>12/17/25</a:t>
+              <a:t>3/8/26</a:t>
             </a:fld>
             <a:endParaRPr lang="LID4096"/>
           </a:p>
@@ -3045,7 +3047,7 @@
           <a:p>
             <a:fld id="{04AB04D2-159E-4A89-9D41-8FD3B2B47560}" type="datetimeFigureOut">
               <a:rPr lang="LID4096" smtClean="0"/>
-              <a:t>12/17/25</a:t>
+              <a:t>3/8/26</a:t>
             </a:fld>
             <a:endParaRPr lang="LID4096"/>
           </a:p>
@@ -3379,7 +3381,7 @@
           <a:p>
             <a:fld id="{04AB04D2-159E-4A89-9D41-8FD3B2B47560}" type="datetimeFigureOut">
               <a:rPr lang="LID4096" smtClean="0"/>
-              <a:t>12/17/25</a:t>
+              <a:t>3/8/26</a:t>
             </a:fld>
             <a:endParaRPr lang="LID4096"/>
           </a:p>
@@ -5414,7 +5416,7 @@
           <a:p>
             <a:r>
               <a:rPr lang="en-US" dirty="0"/>
-              <a:t>Scaling can often have large impacts:</a:t>
+              <a:t>Scaling numerical data can often have large impacts:</a:t>
             </a:r>
           </a:p>
           <a:p>
@@ -6413,30 +6415,6 @@
 <file path=ppt/slides/slide24.xml><?xml version="1.0" encoding="utf-8"?>
 <p:sld xmlns:a="http://schemas.openxmlformats.org/drawingml/2006/main" xmlns:r="http://schemas.openxmlformats.org/officeDocument/2006/relationships" xmlns:p="http://schemas.openxmlformats.org/presentationml/2006/main">
   <p:cSld>
-    <p:bg>
-      <p:bgPr>
-        <a:gradFill rotWithShape="1">
-          <a:gsLst>
-            <a:gs pos="0">
-              <a:schemeClr val="bg2">
-                <a:tint val="94000"/>
-                <a:satMod val="80000"/>
-                <a:lumMod val="106000"/>
-              </a:schemeClr>
-            </a:gs>
-            <a:gs pos="100000">
-              <a:schemeClr val="bg2">
-                <a:shade val="80000"/>
-              </a:schemeClr>
-            </a:gs>
-          </a:gsLst>
-          <a:path path="circle">
-            <a:fillToRect l="43000" r="43000" b="100000"/>
-          </a:path>
-        </a:gradFill>
-        <a:effectLst/>
-      </p:bgPr>
-    </p:bg>
     <p:spTree>
       <p:nvGrpSpPr>
         <p:cNvPr id="1" name=""/>
@@ -6456,7 +6434,7 @@
           <p:cNvPr id="2" name="Title 1">
             <a:extLst>
               <a:ext uri="{FF2B5EF4-FFF2-40B4-BE49-F238E27FC236}">
-                <a16:creationId xmlns:a16="http://schemas.microsoft.com/office/drawing/2014/main" id="{B84EE14E-690A-82ED-BE86-623C5E683DA4}"/>
+                <a16:creationId xmlns:a16="http://schemas.microsoft.com/office/drawing/2014/main" id="{FF8A3034-5991-1529-6F29-8F3B63495EE4}"/>
               </a:ext>
             </a:extLst>
           </p:cNvPr>
@@ -6467,21 +6445,14 @@
             <p:ph type="title"/>
           </p:nvPr>
         </p:nvSpPr>
-        <p:spPr>
-          <a:xfrm>
-            <a:off x="1451579" y="804519"/>
-            <a:ext cx="9603275" cy="1049235"/>
-          </a:xfrm>
-        </p:spPr>
-        <p:txBody>
-          <a:bodyPr>
-            <a:normAutofit/>
-          </a:bodyPr>
-          <a:lstStyle/>
-          <a:p>
-            <a:r>
-              <a:rPr lang="en-US" dirty="0"/>
-              <a:t>Vanishing Gradients</a:t>
+        <p:spPr/>
+        <p:txBody>
+          <a:bodyPr/>
+          <a:lstStyle/>
+          <a:p>
+            <a:r>
+              <a:rPr lang="en-US" dirty="0"/>
+              <a:t>Activation Issues</a:t>
             </a:r>
           </a:p>
         </p:txBody>
@@ -6491,7 +6462,7 @@
           <p:cNvPr id="3" name="Content Placeholder 2">
             <a:extLst>
               <a:ext uri="{FF2B5EF4-FFF2-40B4-BE49-F238E27FC236}">
-                <a16:creationId xmlns:a16="http://schemas.microsoft.com/office/drawing/2014/main" id="{97B86E47-D960-F541-FC0B-79C8E24010DE}"/>
+                <a16:creationId xmlns:a16="http://schemas.microsoft.com/office/drawing/2014/main" id="{146EEFCC-F71B-3CFB-602F-68CC82543778}"/>
               </a:ext>
             </a:extLst>
           </p:cNvPr>
@@ -6502,222 +6473,19 @@
             <p:ph idx="1"/>
           </p:nvPr>
         </p:nvSpPr>
-        <p:spPr>
-          <a:xfrm>
-            <a:off x="0" y="1853752"/>
-            <a:ext cx="6792685" cy="4199729"/>
-          </a:xfrm>
-        </p:spPr>
-        <p:txBody>
-          <a:bodyPr>
-            <a:normAutofit fontScale="92500" lnSpcReduction="10000"/>
-          </a:bodyPr>
-          <a:lstStyle/>
-          <a:p>
-            <a:pPr>
-              <a:lnSpc>
-                <a:spcPct val="110000"/>
-              </a:lnSpc>
-            </a:pPr>
-            <a:r>
-              <a:rPr lang="en-US" dirty="0"/>
-              <a:t>Recall – gradient descent attributes error to different weights using the gradient (slope of the cost cure </a:t>
-            </a:r>
-            <a:r>
-              <a:rPr lang="en-US" dirty="0" err="1"/>
-              <a:t>w.r.t.</a:t>
-            </a:r>
-            <a:r>
-              <a:rPr lang="en-US" dirty="0"/>
-              <a:t> that weight). </a:t>
-            </a:r>
-          </a:p>
-          <a:p>
-            <a:pPr>
-              <a:lnSpc>
-                <a:spcPct val="110000"/>
-              </a:lnSpc>
-            </a:pPr>
-            <a:r>
-              <a:rPr lang="en-US" dirty="0"/>
-              <a:t>Recall some neural network training facts:</a:t>
-            </a:r>
-          </a:p>
-          <a:p>
-            <a:pPr lvl="1">
-              <a:lnSpc>
-                <a:spcPct val="110000"/>
-              </a:lnSpc>
-            </a:pPr>
-            <a:r>
-              <a:rPr lang="en-US" dirty="0"/>
-              <a:t>They have many weights. </a:t>
-            </a:r>
-          </a:p>
-          <a:p>
-            <a:pPr lvl="1">
-              <a:lnSpc>
-                <a:spcPct val="110000"/>
-              </a:lnSpc>
-            </a:pPr>
-            <a:r>
-              <a:rPr lang="en-US" dirty="0"/>
-              <a:t>Propagate loss back through all layers, and there can be many. </a:t>
-            </a:r>
-          </a:p>
-          <a:p>
-            <a:pPr lvl="1">
-              <a:lnSpc>
-                <a:spcPct val="110000"/>
-              </a:lnSpc>
-            </a:pPr>
-            <a:r>
-              <a:rPr lang="en-US" dirty="0"/>
-              <a:t>Often train over many rounds, and get very accurate. </a:t>
-            </a:r>
-          </a:p>
-          <a:p>
-            <a:pPr>
-              <a:lnSpc>
-                <a:spcPct val="110000"/>
-              </a:lnSpc>
-            </a:pPr>
-            <a:r>
-              <a:rPr lang="en-US" dirty="0"/>
-              <a:t>We can encounter a problem that small changes to small numbers from small error split many ways yields tiny values. </a:t>
-            </a:r>
-          </a:p>
-          <a:p>
-            <a:pPr lvl="1">
-              <a:lnSpc>
-                <a:spcPct val="110000"/>
-              </a:lnSpc>
-            </a:pPr>
-            <a:r>
-              <a:rPr lang="en-US" dirty="0"/>
-              <a:t>The gradient can “vanish” if it is too small for the GD to work. </a:t>
-            </a:r>
-          </a:p>
-          <a:p>
-            <a:pPr lvl="1">
-              <a:lnSpc>
-                <a:spcPct val="110000"/>
-              </a:lnSpc>
-            </a:pPr>
-            <a:r>
-              <a:rPr lang="en-US" dirty="0"/>
-              <a:t>This can lead to ‘dead’ models, that can’t keep learning. </a:t>
-            </a:r>
-          </a:p>
-          <a:p>
-            <a:pPr>
-              <a:lnSpc>
-                <a:spcPct val="110000"/>
-              </a:lnSpc>
-            </a:pPr>
-            <a:r>
-              <a:rPr lang="en-US" dirty="0"/>
-              <a:t>Exploding gradient is opposite, more common with tanh and deep networks – things grow multiplicatively. </a:t>
-            </a:r>
-          </a:p>
-        </p:txBody>
-      </p:sp>
-      <p:pic>
-        <p:nvPicPr>
-          <p:cNvPr id="1026" name="Picture 2" descr="Vanishing and Exploding Gradients in Neural Network Models: Debugging,  Monitoring, and Fixing">
-            <a:extLst>
-              <a:ext uri="{FF2B5EF4-FFF2-40B4-BE49-F238E27FC236}">
-                <a16:creationId xmlns:a16="http://schemas.microsoft.com/office/drawing/2014/main" id="{0B1C0D94-352B-B9A4-3AB7-311DD11AC998}"/>
-              </a:ext>
-            </a:extLst>
-          </p:cNvPr>
-          <p:cNvPicPr>
-            <a:picLocks noChangeAspect="1" noChangeArrowheads="1"/>
-          </p:cNvPicPr>
-          <p:nvPr/>
-        </p:nvPicPr>
-        <p:blipFill rotWithShape="1">
-          <a:blip r:embed="rId2">
-            <a:extLst>
-              <a:ext uri="{28A0092B-C50C-407E-A947-70E740481C1C}">
-                <a14:useLocalDpi xmlns:a14="http://schemas.microsoft.com/office/drawing/2010/main" val="0"/>
-              </a:ext>
-            </a:extLst>
-          </a:blip>
-          <a:srcRect l="2545" t="3291" r="5732" b="-1"/>
-          <a:stretch/>
-        </p:blipFill>
-        <p:spPr bwMode="auto">
-          <a:xfrm>
-            <a:off x="8704533" y="37570"/>
-            <a:ext cx="3487467" cy="2873462"/>
-          </a:xfrm>
-          <a:prstGeom prst="rect">
-            <a:avLst/>
-          </a:prstGeom>
-          <a:noFill/>
-          <a:extLst>
-            <a:ext uri="{909E8E84-426E-40DD-AFC4-6F175D3DCCD1}">
-              <a14:hiddenFill xmlns:a14="http://schemas.microsoft.com/office/drawing/2010/main">
-                <a:solidFill>
-                  <a:srgbClr val="FFFFFF"/>
-                </a:solidFill>
-              </a14:hiddenFill>
-            </a:ext>
-          </a:extLst>
-        </p:spPr>
-      </p:pic>
-      <p:pic>
-        <p:nvPicPr>
-          <p:cNvPr id="11266" name="Picture 2" descr="Neural Network - Exponent">
-            <a:extLst>
-              <a:ext uri="{FF2B5EF4-FFF2-40B4-BE49-F238E27FC236}">
-                <a16:creationId xmlns:a16="http://schemas.microsoft.com/office/drawing/2014/main" id="{A5279CCD-97AE-28B3-1AAA-70AFF10ABB00}"/>
-              </a:ext>
-            </a:extLst>
-          </p:cNvPr>
-          <p:cNvPicPr>
-            <a:picLocks noChangeAspect="1" noChangeArrowheads="1"/>
-          </p:cNvPicPr>
-          <p:nvPr/>
-        </p:nvPicPr>
-        <p:blipFill>
-          <a:blip r:embed="rId3">
-            <a:extLst>
-              <a:ext uri="{28A0092B-C50C-407E-A947-70E740481C1C}">
-                <a14:useLocalDpi xmlns:a14="http://schemas.microsoft.com/office/drawing/2010/main" val="0"/>
-              </a:ext>
-            </a:extLst>
-          </a:blip>
-          <a:srcRect/>
-          <a:stretch>
-            <a:fillRect/>
-          </a:stretch>
-        </p:blipFill>
-        <p:spPr bwMode="auto">
-          <a:xfrm>
-            <a:off x="6354501" y="2911032"/>
-            <a:ext cx="5837499" cy="3417535"/>
-          </a:xfrm>
-          <a:prstGeom prst="rect">
-            <a:avLst/>
-          </a:prstGeom>
-          <a:noFill/>
-          <a:extLst>
-            <a:ext uri="{909E8E84-426E-40DD-AFC4-6F175D3DCCD1}">
-              <a14:hiddenFill xmlns:a14="http://schemas.microsoft.com/office/drawing/2010/main">
-                <a:solidFill>
-                  <a:srgbClr val="FFFFFF"/>
-                </a:solidFill>
-              </a14:hiddenFill>
-            </a:ext>
-          </a:extLst>
-        </p:spPr>
-      </p:pic>
+        <p:spPr/>
+        <p:txBody>
+          <a:bodyPr/>
+          <a:lstStyle/>
+          <a:p>
+            <a:endParaRPr lang="en-US"/>
+          </a:p>
+        </p:txBody>
+      </p:sp>
     </p:spTree>
     <p:extLst>
       <p:ext uri="{BB962C8B-B14F-4D97-AF65-F5344CB8AC3E}">
-        <p14:creationId xmlns:p14="http://schemas.microsoft.com/office/powerpoint/2010/main" val="3004196100"/>
+        <p14:creationId xmlns:p14="http://schemas.microsoft.com/office/powerpoint/2010/main" val="1901037290"/>
       </p:ext>
     </p:extLst>
   </p:cSld>
@@ -6728,301 +6496,6 @@
 </file>
 
 <file path=ppt/slides/slide25.xml><?xml version="1.0" encoding="utf-8"?>
-<p:sld xmlns:a="http://schemas.openxmlformats.org/drawingml/2006/main" xmlns:r="http://schemas.openxmlformats.org/officeDocument/2006/relationships" xmlns:p="http://schemas.openxmlformats.org/presentationml/2006/main">
-  <p:cSld>
-    <p:spTree>
-      <p:nvGrpSpPr>
-        <p:cNvPr id="1" name=""/>
-        <p:cNvGrpSpPr/>
-        <p:nvPr/>
-      </p:nvGrpSpPr>
-      <p:grpSpPr>
-        <a:xfrm>
-          <a:off x="0" y="0"/>
-          <a:ext cx="0" cy="0"/>
-          <a:chOff x="0" y="0"/>
-          <a:chExt cx="0" cy="0"/>
-        </a:xfrm>
-      </p:grpSpPr>
-      <p:sp>
-        <p:nvSpPr>
-          <p:cNvPr id="2" name="Title 1">
-            <a:extLst>
-              <a:ext uri="{FF2B5EF4-FFF2-40B4-BE49-F238E27FC236}">
-                <a16:creationId xmlns:a16="http://schemas.microsoft.com/office/drawing/2014/main" id="{F717414F-7377-6242-8523-2FD9689DAFAD}"/>
-              </a:ext>
-            </a:extLst>
-          </p:cNvPr>
-          <p:cNvSpPr>
-            <a:spLocks noGrp="1"/>
-          </p:cNvSpPr>
-          <p:nvPr>
-            <p:ph type="title"/>
-          </p:nvPr>
-        </p:nvSpPr>
-        <p:spPr/>
-        <p:txBody>
-          <a:bodyPr/>
-          <a:lstStyle/>
-          <a:p>
-            <a:r>
-              <a:rPr lang="en-US" dirty="0"/>
-              <a:t>Dying </a:t>
-            </a:r>
-            <a:r>
-              <a:rPr lang="en-US" dirty="0" err="1"/>
-              <a:t>relu</a:t>
-            </a:r>
-            <a:r>
-              <a:rPr lang="en-US" dirty="0"/>
-              <a:t> - Weight Updates</a:t>
-            </a:r>
-          </a:p>
-        </p:txBody>
-      </p:sp>
-      <p:sp>
-        <p:nvSpPr>
-          <p:cNvPr id="3" name="Content Placeholder 2">
-            <a:extLst>
-              <a:ext uri="{FF2B5EF4-FFF2-40B4-BE49-F238E27FC236}">
-                <a16:creationId xmlns:a16="http://schemas.microsoft.com/office/drawing/2014/main" id="{F0477A05-C767-02A8-870B-D9A48494471E}"/>
-              </a:ext>
-            </a:extLst>
-          </p:cNvPr>
-          <p:cNvSpPr>
-            <a:spLocks noGrp="1"/>
-          </p:cNvSpPr>
-          <p:nvPr>
-            <p:ph idx="1"/>
-          </p:nvPr>
-        </p:nvSpPr>
-        <p:spPr>
-          <a:xfrm>
-            <a:off x="7772400" y="2129742"/>
-            <a:ext cx="4419600" cy="3923739"/>
-          </a:xfrm>
-        </p:spPr>
-        <p:txBody>
-          <a:bodyPr>
-            <a:normAutofit/>
-          </a:bodyPr>
-          <a:lstStyle/>
-          <a:p>
-            <a:r>
-              <a:rPr lang="en-US" dirty="0" err="1"/>
-              <a:t>Relu</a:t>
-            </a:r>
-            <a:r>
-              <a:rPr lang="en-US" dirty="0"/>
-              <a:t> can suffer from ‘dying </a:t>
-            </a:r>
-            <a:r>
-              <a:rPr lang="en-US" dirty="0" err="1"/>
-              <a:t>relu</a:t>
-            </a:r>
-            <a:r>
-              <a:rPr lang="en-US" dirty="0"/>
-              <a:t>’. </a:t>
-            </a:r>
-          </a:p>
-          <a:p>
-            <a:r>
-              <a:rPr lang="en-US" dirty="0"/>
-              <a:t>It is less prone to this than others, that’s a strength. </a:t>
-            </a:r>
-          </a:p>
-          <a:p>
-            <a:r>
-              <a:rPr lang="en-US" dirty="0"/>
-              <a:t>Negative inputs yield 0 gradient</a:t>
-            </a:r>
-          </a:p>
-          <a:p>
-            <a:r>
-              <a:rPr lang="en-US" dirty="0"/>
-              <a:t>0 times anything is always 0. </a:t>
-            </a:r>
-          </a:p>
-          <a:p>
-            <a:r>
-              <a:rPr lang="en-US" dirty="0"/>
-              <a:t>If this happens for all inputs, the neuron may ‘die’, or become unable to ever ‘escape’. </a:t>
-            </a:r>
-          </a:p>
-        </p:txBody>
-      </p:sp>
-      <p:pic>
-        <p:nvPicPr>
-          <p:cNvPr id="4" name="Picture 3">
-            <a:extLst>
-              <a:ext uri="{FF2B5EF4-FFF2-40B4-BE49-F238E27FC236}">
-                <a16:creationId xmlns:a16="http://schemas.microsoft.com/office/drawing/2014/main" id="{1B5DD798-256E-60B2-E874-5AF3DAC6E4FC}"/>
-              </a:ext>
-            </a:extLst>
-          </p:cNvPr>
-          <p:cNvPicPr>
-            <a:picLocks noChangeAspect="1"/>
-          </p:cNvPicPr>
-          <p:nvPr/>
-        </p:nvPicPr>
-        <p:blipFill>
-          <a:blip r:embed="rId2"/>
-          <a:stretch>
-            <a:fillRect/>
-          </a:stretch>
-        </p:blipFill>
-        <p:spPr>
-          <a:xfrm>
-            <a:off x="0" y="2345917"/>
-            <a:ext cx="7772400" cy="3215400"/>
-          </a:xfrm>
-          <a:prstGeom prst="rect">
-            <a:avLst/>
-          </a:prstGeom>
-        </p:spPr>
-      </p:pic>
-    </p:spTree>
-    <p:extLst>
-      <p:ext uri="{BB962C8B-B14F-4D97-AF65-F5344CB8AC3E}">
-        <p14:creationId xmlns:p14="http://schemas.microsoft.com/office/powerpoint/2010/main" val="2324801087"/>
-      </p:ext>
-    </p:extLst>
-  </p:cSld>
-  <p:clrMapOvr>
-    <a:masterClrMapping/>
-  </p:clrMapOvr>
-</p:sld>
-</file>
-
-<file path=ppt/slides/slide26.xml><?xml version="1.0" encoding="utf-8"?>
-<p:sld xmlns:a="http://schemas.openxmlformats.org/drawingml/2006/main" xmlns:r="http://schemas.openxmlformats.org/officeDocument/2006/relationships" xmlns:p="http://schemas.openxmlformats.org/presentationml/2006/main">
-  <p:cSld>
-    <p:spTree>
-      <p:nvGrpSpPr>
-        <p:cNvPr id="1" name=""/>
-        <p:cNvGrpSpPr/>
-        <p:nvPr/>
-      </p:nvGrpSpPr>
-      <p:grpSpPr>
-        <a:xfrm>
-          <a:off x="0" y="0"/>
-          <a:ext cx="0" cy="0"/>
-          <a:chOff x="0" y="0"/>
-          <a:chExt cx="0" cy="0"/>
-        </a:xfrm>
-      </p:grpSpPr>
-      <p:sp>
-        <p:nvSpPr>
-          <p:cNvPr id="2" name="Title 1">
-            <a:extLst>
-              <a:ext uri="{FF2B5EF4-FFF2-40B4-BE49-F238E27FC236}">
-                <a16:creationId xmlns:a16="http://schemas.microsoft.com/office/drawing/2014/main" id="{F08B606A-6EBE-34A0-F1C2-6B3112E64BD0}"/>
-              </a:ext>
-            </a:extLst>
-          </p:cNvPr>
-          <p:cNvSpPr>
-            <a:spLocks noGrp="1"/>
-          </p:cNvSpPr>
-          <p:nvPr>
-            <p:ph type="title"/>
-          </p:nvPr>
-        </p:nvSpPr>
-        <p:spPr/>
-        <p:txBody>
-          <a:bodyPr/>
-          <a:lstStyle/>
-          <a:p>
-            <a:r>
-              <a:rPr lang="en-US" dirty="0"/>
-              <a:t>Keeping Gradients Graded</a:t>
-            </a:r>
-          </a:p>
-        </p:txBody>
-      </p:sp>
-      <p:sp>
-        <p:nvSpPr>
-          <p:cNvPr id="3" name="Content Placeholder 2">
-            <a:extLst>
-              <a:ext uri="{FF2B5EF4-FFF2-40B4-BE49-F238E27FC236}">
-                <a16:creationId xmlns:a16="http://schemas.microsoft.com/office/drawing/2014/main" id="{8944A8BE-5490-F52E-ADC1-D81B54680EEC}"/>
-              </a:ext>
-            </a:extLst>
-          </p:cNvPr>
-          <p:cNvSpPr>
-            <a:spLocks noGrp="1"/>
-          </p:cNvSpPr>
-          <p:nvPr>
-            <p:ph idx="1"/>
-          </p:nvPr>
-        </p:nvSpPr>
-        <p:spPr/>
-        <p:txBody>
-          <a:bodyPr/>
-          <a:lstStyle/>
-          <a:p>
-            <a:r>
-              <a:rPr lang="en-US" dirty="0"/>
-              <a:t>These issues would be seen in loss as the model stopping learning. </a:t>
-            </a:r>
-          </a:p>
-          <a:p>
-            <a:pPr lvl="1"/>
-            <a:r>
-              <a:rPr lang="en-US" dirty="0"/>
-              <a:t>This definitely isn’t the only reason!</a:t>
-            </a:r>
-          </a:p>
-          <a:p>
-            <a:r>
-              <a:rPr lang="en-US" dirty="0"/>
-              <a:t>There are several things that can combat this problem. </a:t>
-            </a:r>
-          </a:p>
-          <a:p>
-            <a:pPr lvl="1"/>
-            <a:r>
-              <a:rPr lang="en-US" dirty="0"/>
-              <a:t>Activation functions – the sigmoid gradients can flatten more than others, tanh can explode, </a:t>
-            </a:r>
-            <a:r>
-              <a:rPr lang="en-US" dirty="0" err="1"/>
-              <a:t>relu</a:t>
-            </a:r>
-            <a:r>
-              <a:rPr lang="en-US" dirty="0"/>
-              <a:t> can die. </a:t>
-            </a:r>
-          </a:p>
-          <a:p>
-            <a:pPr lvl="1"/>
-            <a:r>
-              <a:rPr lang="en-US" dirty="0"/>
-              <a:t>Batch normalization. </a:t>
-            </a:r>
-          </a:p>
-          <a:p>
-            <a:pPr lvl="2"/>
-            <a:r>
-              <a:rPr lang="en-US" dirty="0"/>
-              <a:t>Recenter each batch, to prevent being stuck in saturated areas. </a:t>
-            </a:r>
-          </a:p>
-        </p:txBody>
-      </p:sp>
-    </p:spTree>
-    <p:extLst>
-      <p:ext uri="{BB962C8B-B14F-4D97-AF65-F5344CB8AC3E}">
-        <p14:creationId xmlns:p14="http://schemas.microsoft.com/office/powerpoint/2010/main" val="4024298218"/>
-      </p:ext>
-    </p:extLst>
-  </p:cSld>
-  <p:clrMapOvr>
-    <a:masterClrMapping/>
-  </p:clrMapOvr>
-</p:sld>
-</file>
-
-<file path=ppt/slides/slide27.xml><?xml version="1.0" encoding="utf-8"?>
 <p:sld xmlns:a="http://schemas.openxmlformats.org/drawingml/2006/main" xmlns:r="http://schemas.openxmlformats.org/officeDocument/2006/relationships" xmlns:p="http://schemas.openxmlformats.org/presentationml/2006/main">
   <p:cSld>
     <p:bg>
@@ -7068,7 +6541,7 @@
           <p:cNvPr id="2" name="Title 1">
             <a:extLst>
               <a:ext uri="{FF2B5EF4-FFF2-40B4-BE49-F238E27FC236}">
-                <a16:creationId xmlns:a16="http://schemas.microsoft.com/office/drawing/2014/main" id="{545C478D-17F9-E44C-A19C-72ECD4713630}"/>
+                <a16:creationId xmlns:a16="http://schemas.microsoft.com/office/drawing/2014/main" id="{B84EE14E-690A-82ED-BE86-623C5E683DA4}"/>
               </a:ext>
             </a:extLst>
           </p:cNvPr>
@@ -7093,25 +6566,153 @@
           <a:p>
             <a:r>
               <a:rPr lang="en-US" dirty="0"/>
-              <a:t>Activation Functions – </a:t>
+              <a:t>Vanishing Gradients</a:t>
+            </a:r>
+          </a:p>
+        </p:txBody>
+      </p:sp>
+      <p:sp>
+        <p:nvSpPr>
+          <p:cNvPr id="3" name="Content Placeholder 2">
+            <a:extLst>
+              <a:ext uri="{FF2B5EF4-FFF2-40B4-BE49-F238E27FC236}">
+                <a16:creationId xmlns:a16="http://schemas.microsoft.com/office/drawing/2014/main" id="{97B86E47-D960-F541-FC0B-79C8E24010DE}"/>
+              </a:ext>
+            </a:extLst>
+          </p:cNvPr>
+          <p:cNvSpPr>
+            <a:spLocks noGrp="1"/>
+          </p:cNvSpPr>
+          <p:nvPr>
+            <p:ph idx="1"/>
+          </p:nvPr>
+        </p:nvSpPr>
+        <p:spPr>
+          <a:xfrm>
+            <a:off x="0" y="1853752"/>
+            <a:ext cx="6792685" cy="4199729"/>
+          </a:xfrm>
+        </p:spPr>
+        <p:txBody>
+          <a:bodyPr>
+            <a:normAutofit fontScale="92500" lnSpcReduction="10000"/>
+          </a:bodyPr>
+          <a:lstStyle/>
+          <a:p>
+            <a:pPr>
+              <a:lnSpc>
+                <a:spcPct val="110000"/>
+              </a:lnSpc>
+            </a:pPr>
+            <a:r>
+              <a:rPr lang="en-US" dirty="0"/>
+              <a:t>Recall – gradient descent attributes error to different weights using the gradient (slope of the cost cure </a:t>
             </a:r>
             <a:r>
               <a:rPr lang="en-US" dirty="0" err="1"/>
-              <a:t>Relu</a:t>
-            </a:r>
-            <a:r>
-              <a:rPr lang="en-US" dirty="0"/>
-              <a:t> Variations</a:t>
+              <a:t>w.r.t.</a:t>
+            </a:r>
+            <a:r>
+              <a:rPr lang="en-US" dirty="0"/>
+              <a:t> that weight). </a:t>
+            </a:r>
+          </a:p>
+          <a:p>
+            <a:pPr>
+              <a:lnSpc>
+                <a:spcPct val="110000"/>
+              </a:lnSpc>
+            </a:pPr>
+            <a:r>
+              <a:rPr lang="en-US" dirty="0"/>
+              <a:t>Recall some neural network training facts:</a:t>
+            </a:r>
+          </a:p>
+          <a:p>
+            <a:pPr lvl="1">
+              <a:lnSpc>
+                <a:spcPct val="110000"/>
+              </a:lnSpc>
+            </a:pPr>
+            <a:r>
+              <a:rPr lang="en-US" dirty="0"/>
+              <a:t>They have many weights. </a:t>
+            </a:r>
+          </a:p>
+          <a:p>
+            <a:pPr lvl="1">
+              <a:lnSpc>
+                <a:spcPct val="110000"/>
+              </a:lnSpc>
+            </a:pPr>
+            <a:r>
+              <a:rPr lang="en-US" dirty="0"/>
+              <a:t>Propagate loss back through all layers, and there can be many. </a:t>
+            </a:r>
+          </a:p>
+          <a:p>
+            <a:pPr lvl="1">
+              <a:lnSpc>
+                <a:spcPct val="110000"/>
+              </a:lnSpc>
+            </a:pPr>
+            <a:r>
+              <a:rPr lang="en-US" dirty="0"/>
+              <a:t>Often train over many rounds, and get very accurate. </a:t>
+            </a:r>
+          </a:p>
+          <a:p>
+            <a:pPr>
+              <a:lnSpc>
+                <a:spcPct val="110000"/>
+              </a:lnSpc>
+            </a:pPr>
+            <a:r>
+              <a:rPr lang="en-US" dirty="0"/>
+              <a:t>We can encounter a problem that small changes to small numbers from small error split many ways yields tiny values. </a:t>
+            </a:r>
+          </a:p>
+          <a:p>
+            <a:pPr lvl="1">
+              <a:lnSpc>
+                <a:spcPct val="110000"/>
+              </a:lnSpc>
+            </a:pPr>
+            <a:r>
+              <a:rPr lang="en-US" dirty="0"/>
+              <a:t>The gradient can “vanish” if it is too small for the GD to work. </a:t>
+            </a:r>
+          </a:p>
+          <a:p>
+            <a:pPr lvl="1">
+              <a:lnSpc>
+                <a:spcPct val="110000"/>
+              </a:lnSpc>
+            </a:pPr>
+            <a:r>
+              <a:rPr lang="en-US" dirty="0"/>
+              <a:t>This can lead to ‘dead’ models, that can’t keep learning. </a:t>
+            </a:r>
+          </a:p>
+          <a:p>
+            <a:pPr>
+              <a:lnSpc>
+                <a:spcPct val="110000"/>
+              </a:lnSpc>
+            </a:pPr>
+            <a:r>
+              <a:rPr lang="en-US" dirty="0"/>
+              <a:t>Exploding gradient is opposite, more common with tanh and deep networks – things grow multiplicatively. </a:t>
             </a:r>
           </a:p>
         </p:txBody>
       </p:sp>
       <p:pic>
         <p:nvPicPr>
-          <p:cNvPr id="4098" name="Picture 2" descr="8: Illustration of output of ELU vs ReLU vs Leaky ReLU function with... |  Download Scientific Diagram">
-            <a:extLst>
-              <a:ext uri="{FF2B5EF4-FFF2-40B4-BE49-F238E27FC236}">
-                <a16:creationId xmlns:a16="http://schemas.microsoft.com/office/drawing/2014/main" id="{28167D23-766C-0F49-9CF6-84F2EA8D7EC2}"/>
+          <p:cNvPr id="1026" name="Picture 2" descr="Vanishing and Exploding Gradients in Neural Network Models: Debugging,  Monitoring, and Fixing">
+            <a:extLst>
+              <a:ext uri="{FF2B5EF4-FFF2-40B4-BE49-F238E27FC236}">
+                <a16:creationId xmlns:a16="http://schemas.microsoft.com/office/drawing/2014/main" id="{0B1C0D94-352B-B9A4-3AB7-311DD11AC998}"/>
               </a:ext>
             </a:extLst>
           </p:cNvPr>
@@ -7128,13 +6729,13 @@
               </a:ext>
             </a:extLst>
           </a:blip>
-          <a:srcRect l="11058" r="6709"/>
+          <a:srcRect l="2545" t="3291" r="5732" b="-1"/>
           <a:stretch/>
         </p:blipFill>
         <p:spPr bwMode="auto">
           <a:xfrm>
-            <a:off x="0" y="1853754"/>
-            <a:ext cx="4610638" cy="4199727"/>
+            <a:off x="8704533" y="37570"/>
+            <a:ext cx="3487467" cy="2873462"/>
           </a:xfrm>
           <a:prstGeom prst="rect">
             <a:avLst/>
@@ -7151,12 +6752,125 @@
           </a:extLst>
         </p:spPr>
       </p:pic>
+      <p:pic>
+        <p:nvPicPr>
+          <p:cNvPr id="11266" name="Picture 2" descr="Neural Network - Exponent">
+            <a:extLst>
+              <a:ext uri="{FF2B5EF4-FFF2-40B4-BE49-F238E27FC236}">
+                <a16:creationId xmlns:a16="http://schemas.microsoft.com/office/drawing/2014/main" id="{A5279CCD-97AE-28B3-1AAA-70AFF10ABB00}"/>
+              </a:ext>
+            </a:extLst>
+          </p:cNvPr>
+          <p:cNvPicPr>
+            <a:picLocks noChangeAspect="1" noChangeArrowheads="1"/>
+          </p:cNvPicPr>
+          <p:nvPr/>
+        </p:nvPicPr>
+        <p:blipFill>
+          <a:blip r:embed="rId3">
+            <a:extLst>
+              <a:ext uri="{28A0092B-C50C-407E-A947-70E740481C1C}">
+                <a14:useLocalDpi xmlns:a14="http://schemas.microsoft.com/office/drawing/2010/main" val="0"/>
+              </a:ext>
+            </a:extLst>
+          </a:blip>
+          <a:srcRect/>
+          <a:stretch>
+            <a:fillRect/>
+          </a:stretch>
+        </p:blipFill>
+        <p:spPr bwMode="auto">
+          <a:xfrm>
+            <a:off x="6354501" y="2911032"/>
+            <a:ext cx="5837499" cy="3417535"/>
+          </a:xfrm>
+          <a:prstGeom prst="rect">
+            <a:avLst/>
+          </a:prstGeom>
+          <a:noFill/>
+          <a:extLst>
+            <a:ext uri="{909E8E84-426E-40DD-AFC4-6F175D3DCCD1}">
+              <a14:hiddenFill xmlns:a14="http://schemas.microsoft.com/office/drawing/2010/main">
+                <a:solidFill>
+                  <a:srgbClr val="FFFFFF"/>
+                </a:solidFill>
+              </a14:hiddenFill>
+            </a:ext>
+          </a:extLst>
+        </p:spPr>
+      </p:pic>
+    </p:spTree>
+    <p:extLst>
+      <p:ext uri="{BB962C8B-B14F-4D97-AF65-F5344CB8AC3E}">
+        <p14:creationId xmlns:p14="http://schemas.microsoft.com/office/powerpoint/2010/main" val="3004196100"/>
+      </p:ext>
+    </p:extLst>
+  </p:cSld>
+  <p:clrMapOvr>
+    <a:masterClrMapping/>
+  </p:clrMapOvr>
+</p:sld>
+</file>
+
+<file path=ppt/slides/slide26.xml><?xml version="1.0" encoding="utf-8"?>
+<p:sld xmlns:a="http://schemas.openxmlformats.org/drawingml/2006/main" xmlns:r="http://schemas.openxmlformats.org/officeDocument/2006/relationships" xmlns:p="http://schemas.openxmlformats.org/presentationml/2006/main">
+  <p:cSld>
+    <p:spTree>
+      <p:nvGrpSpPr>
+        <p:cNvPr id="1" name=""/>
+        <p:cNvGrpSpPr/>
+        <p:nvPr/>
+      </p:nvGrpSpPr>
+      <p:grpSpPr>
+        <a:xfrm>
+          <a:off x="0" y="0"/>
+          <a:ext cx="0" cy="0"/>
+          <a:chOff x="0" y="0"/>
+          <a:chExt cx="0" cy="0"/>
+        </a:xfrm>
+      </p:grpSpPr>
+      <p:sp>
+        <p:nvSpPr>
+          <p:cNvPr id="2" name="Title 1">
+            <a:extLst>
+              <a:ext uri="{FF2B5EF4-FFF2-40B4-BE49-F238E27FC236}">
+                <a16:creationId xmlns:a16="http://schemas.microsoft.com/office/drawing/2014/main" id="{F717414F-7377-6242-8523-2FD9689DAFAD}"/>
+              </a:ext>
+            </a:extLst>
+          </p:cNvPr>
+          <p:cNvSpPr>
+            <a:spLocks noGrp="1"/>
+          </p:cNvSpPr>
+          <p:nvPr>
+            <p:ph type="title"/>
+          </p:nvPr>
+        </p:nvSpPr>
+        <p:spPr/>
+        <p:txBody>
+          <a:bodyPr/>
+          <a:lstStyle/>
+          <a:p>
+            <a:r>
+              <a:rPr lang="en-US" dirty="0"/>
+              <a:t>Dying </a:t>
+            </a:r>
+            <a:r>
+              <a:rPr lang="en-US" dirty="0" err="1"/>
+              <a:t>relu</a:t>
+            </a:r>
+            <a:r>
+              <a:rPr lang="en-US" dirty="0"/>
+              <a:t> - Weight Updates</a:t>
+            </a:r>
+          </a:p>
+        </p:txBody>
+      </p:sp>
       <p:sp>
         <p:nvSpPr>
           <p:cNvPr id="3" name="Content Placeholder 2">
             <a:extLst>
               <a:ext uri="{FF2B5EF4-FFF2-40B4-BE49-F238E27FC236}">
-                <a16:creationId xmlns:a16="http://schemas.microsoft.com/office/drawing/2014/main" id="{0E5CABA0-1113-1546-ABF6-995CA6EE2352}"/>
+                <a16:creationId xmlns:a16="http://schemas.microsoft.com/office/drawing/2014/main" id="{F0477A05-C767-02A8-870B-D9A48494471E}"/>
               </a:ext>
             </a:extLst>
           </p:cNvPr>
@@ -7169,8 +6883,8 @@
         </p:nvSpPr>
         <p:spPr>
           <a:xfrm>
-            <a:off x="4606746" y="1853754"/>
-            <a:ext cx="7585254" cy="4280828"/>
+            <a:off x="7772400" y="2129742"/>
+            <a:ext cx="4419600" cy="3923739"/>
           </a:xfrm>
         </p:spPr>
         <p:txBody>
@@ -7180,97 +6894,210 @@
           <a:lstStyle/>
           <a:p>
             <a:r>
-              <a:rPr lang="en-US" dirty="0"/>
-              <a:t>To address those issues with </a:t>
-            </a:r>
-            <a:r>
               <a:rPr lang="en-US" dirty="0" err="1"/>
-              <a:t>ReLU</a:t>
-            </a:r>
-            <a:r>
-              <a:rPr lang="en-US" dirty="0"/>
-              <a:t>, alternatives were created:</a:t>
-            </a:r>
-          </a:p>
-          <a:p>
-            <a:pPr lvl="1"/>
-            <a:r>
-              <a:rPr lang="en-US" dirty="0"/>
-              <a:t>Notably – Leaky </a:t>
+              <a:t>Relu</a:t>
+            </a:r>
+            <a:r>
+              <a:rPr lang="en-US" dirty="0"/>
+              <a:t> can suffer from ‘dying </a:t>
             </a:r>
             <a:r>
               <a:rPr lang="en-US" dirty="0" err="1"/>
-              <a:t>ReLU</a:t>
-            </a:r>
-            <a:r>
-              <a:rPr lang="en-US" dirty="0"/>
-              <a:t> and ELU (exponential linear). </a:t>
-            </a:r>
-          </a:p>
-          <a:p>
-            <a:r>
-              <a:rPr lang="en-US" dirty="0"/>
-              <a:t>Each removes that 0-value range of the derivative. </a:t>
-            </a:r>
-          </a:p>
-          <a:p>
-            <a:pPr lvl="1"/>
-            <a:r>
-              <a:rPr lang="en-US" dirty="0"/>
-              <a:t>Removes the Dying </a:t>
-            </a:r>
-            <a:r>
-              <a:rPr lang="en-US" dirty="0" err="1"/>
-              <a:t>ReLU</a:t>
-            </a:r>
-            <a:r>
-              <a:rPr lang="en-US" dirty="0"/>
-              <a:t> issue, so gradients don’t vanish as much. </a:t>
-            </a:r>
-          </a:p>
-          <a:p>
-            <a:pPr lvl="1"/>
-            <a:r>
-              <a:rPr lang="en-US" dirty="0"/>
-              <a:t>Can help speed training, or even allow convergence at all. </a:t>
-            </a:r>
-          </a:p>
-          <a:p>
-            <a:r>
-              <a:rPr lang="en-US" dirty="0" err="1"/>
-              <a:t>ReLU</a:t>
-            </a:r>
-            <a:r>
-              <a:rPr lang="en-US" dirty="0"/>
-              <a:t> or a variation on it are our defaults, and normally good. </a:t>
-            </a:r>
-          </a:p>
-          <a:p>
-            <a:r>
-              <a:rPr lang="en-US" dirty="0"/>
-              <a:t>If using </a:t>
-            </a:r>
-            <a:r>
-              <a:rPr lang="en-US" dirty="0" err="1"/>
-              <a:t>ReLU</a:t>
-            </a:r>
-            <a:r>
-              <a:rPr lang="en-US" dirty="0"/>
-              <a:t> – reducing LR can also combat the dying issue. </a:t>
-            </a:r>
-          </a:p>
-          <a:p>
-            <a:r>
-              <a:rPr lang="en-US" dirty="0"/>
-              <a:t>Note – this isn’t the most likely thing to be a massive issue, the case specific defaults tend to perform well most of the type. </a:t>
-            </a:r>
-          </a:p>
-        </p:txBody>
-      </p:sp>
+              <a:t>relu</a:t>
+            </a:r>
+            <a:r>
+              <a:rPr lang="en-US" dirty="0"/>
+              <a:t>’. </a:t>
+            </a:r>
+          </a:p>
+          <a:p>
+            <a:r>
+              <a:rPr lang="en-US" dirty="0"/>
+              <a:t>It is less prone to this than others, that’s a strength. </a:t>
+            </a:r>
+          </a:p>
+          <a:p>
+            <a:r>
+              <a:rPr lang="en-US" dirty="0"/>
+              <a:t>Negative inputs yield 0 gradient</a:t>
+            </a:r>
+          </a:p>
+          <a:p>
+            <a:r>
+              <a:rPr lang="en-US" dirty="0"/>
+              <a:t>0 times anything is always 0. </a:t>
+            </a:r>
+          </a:p>
+          <a:p>
+            <a:r>
+              <a:rPr lang="en-US" dirty="0"/>
+              <a:t>If this happens for all inputs, the neuron may ‘die’, or become unable to ever ‘escape’. </a:t>
+            </a:r>
+          </a:p>
+        </p:txBody>
+      </p:sp>
+      <p:pic>
+        <p:nvPicPr>
+          <p:cNvPr id="4" name="Picture 3">
+            <a:extLst>
+              <a:ext uri="{FF2B5EF4-FFF2-40B4-BE49-F238E27FC236}">
+                <a16:creationId xmlns:a16="http://schemas.microsoft.com/office/drawing/2014/main" id="{1B5DD798-256E-60B2-E874-5AF3DAC6E4FC}"/>
+              </a:ext>
+            </a:extLst>
+          </p:cNvPr>
+          <p:cNvPicPr>
+            <a:picLocks noChangeAspect="1"/>
+          </p:cNvPicPr>
+          <p:nvPr/>
+        </p:nvPicPr>
+        <p:blipFill>
+          <a:blip r:embed="rId2"/>
+          <a:stretch>
+            <a:fillRect/>
+          </a:stretch>
+        </p:blipFill>
+        <p:spPr>
+          <a:xfrm>
+            <a:off x="0" y="2345917"/>
+            <a:ext cx="7772400" cy="3215400"/>
+          </a:xfrm>
+          <a:prstGeom prst="rect">
+            <a:avLst/>
+          </a:prstGeom>
+        </p:spPr>
+      </p:pic>
     </p:spTree>
     <p:extLst>
       <p:ext uri="{BB962C8B-B14F-4D97-AF65-F5344CB8AC3E}">
-        <p14:creationId xmlns:p14="http://schemas.microsoft.com/office/powerpoint/2010/main" val="587557089"/>
+        <p14:creationId xmlns:p14="http://schemas.microsoft.com/office/powerpoint/2010/main" val="2324801087"/>
+      </p:ext>
+    </p:extLst>
+  </p:cSld>
+  <p:clrMapOvr>
+    <a:masterClrMapping/>
+  </p:clrMapOvr>
+</p:sld>
+</file>
+
+<file path=ppt/slides/slide27.xml><?xml version="1.0" encoding="utf-8"?>
+<p:sld xmlns:a="http://schemas.openxmlformats.org/drawingml/2006/main" xmlns:r="http://schemas.openxmlformats.org/officeDocument/2006/relationships" xmlns:p="http://schemas.openxmlformats.org/presentationml/2006/main">
+  <p:cSld>
+    <p:spTree>
+      <p:nvGrpSpPr>
+        <p:cNvPr id="1" name=""/>
+        <p:cNvGrpSpPr/>
+        <p:nvPr/>
+      </p:nvGrpSpPr>
+      <p:grpSpPr>
+        <a:xfrm>
+          <a:off x="0" y="0"/>
+          <a:ext cx="0" cy="0"/>
+          <a:chOff x="0" y="0"/>
+          <a:chExt cx="0" cy="0"/>
+        </a:xfrm>
+      </p:grpSpPr>
+      <p:sp>
+        <p:nvSpPr>
+          <p:cNvPr id="2" name="Title 1">
+            <a:extLst>
+              <a:ext uri="{FF2B5EF4-FFF2-40B4-BE49-F238E27FC236}">
+                <a16:creationId xmlns:a16="http://schemas.microsoft.com/office/drawing/2014/main" id="{F08B606A-6EBE-34A0-F1C2-6B3112E64BD0}"/>
+              </a:ext>
+            </a:extLst>
+          </p:cNvPr>
+          <p:cNvSpPr>
+            <a:spLocks noGrp="1"/>
+          </p:cNvSpPr>
+          <p:nvPr>
+            <p:ph type="title"/>
+          </p:nvPr>
+        </p:nvSpPr>
+        <p:spPr/>
+        <p:txBody>
+          <a:bodyPr/>
+          <a:lstStyle/>
+          <a:p>
+            <a:r>
+              <a:rPr lang="en-US" dirty="0"/>
+              <a:t>Keeping Gradients Graded</a:t>
+            </a:r>
+          </a:p>
+        </p:txBody>
+      </p:sp>
+      <p:sp>
+        <p:nvSpPr>
+          <p:cNvPr id="3" name="Content Placeholder 2">
+            <a:extLst>
+              <a:ext uri="{FF2B5EF4-FFF2-40B4-BE49-F238E27FC236}">
+                <a16:creationId xmlns:a16="http://schemas.microsoft.com/office/drawing/2014/main" id="{8944A8BE-5490-F52E-ADC1-D81B54680EEC}"/>
+              </a:ext>
+            </a:extLst>
+          </p:cNvPr>
+          <p:cNvSpPr>
+            <a:spLocks noGrp="1"/>
+          </p:cNvSpPr>
+          <p:nvPr>
+            <p:ph idx="1"/>
+          </p:nvPr>
+        </p:nvSpPr>
+        <p:spPr/>
+        <p:txBody>
+          <a:bodyPr/>
+          <a:lstStyle/>
+          <a:p>
+            <a:r>
+              <a:rPr lang="en-US" dirty="0"/>
+              <a:t>These issues would be seen in loss as the model stopping learning. </a:t>
+            </a:r>
+          </a:p>
+          <a:p>
+            <a:pPr lvl="1"/>
+            <a:r>
+              <a:rPr lang="en-US" dirty="0"/>
+              <a:t>This definitely isn’t the only reason!</a:t>
+            </a:r>
+          </a:p>
+          <a:p>
+            <a:r>
+              <a:rPr lang="en-US" dirty="0"/>
+              <a:t>There are several things that can combat this problem. </a:t>
+            </a:r>
+          </a:p>
+          <a:p>
+            <a:pPr lvl="1"/>
+            <a:r>
+              <a:rPr lang="en-US" dirty="0"/>
+              <a:t>Activation functions – the sigmoid gradients can flatten more than others, tanh can explode, </a:t>
+            </a:r>
+            <a:r>
+              <a:rPr lang="en-US" dirty="0" err="1"/>
+              <a:t>relu</a:t>
+            </a:r>
+            <a:r>
+              <a:rPr lang="en-US" dirty="0"/>
+              <a:t> can die. </a:t>
+            </a:r>
+          </a:p>
+          <a:p>
+            <a:pPr lvl="1"/>
+            <a:r>
+              <a:rPr lang="en-US" dirty="0"/>
+              <a:t>Batch normalization. </a:t>
+            </a:r>
+          </a:p>
+          <a:p>
+            <a:pPr lvl="2"/>
+            <a:r>
+              <a:rPr lang="en-US" dirty="0"/>
+              <a:t>Recenter each batch, to prevent being stuck in saturated areas. </a:t>
+            </a:r>
+          </a:p>
+        </p:txBody>
+      </p:sp>
+    </p:spTree>
+    <p:extLst>
+      <p:ext uri="{BB962C8B-B14F-4D97-AF65-F5344CB8AC3E}">
+        <p14:creationId xmlns:p14="http://schemas.microsoft.com/office/powerpoint/2010/main" val="4024298218"/>
       </p:ext>
     </p:extLst>
   </p:cSld>
@@ -7326,7 +7153,7 @@
           <p:cNvPr id="2" name="Title 1">
             <a:extLst>
               <a:ext uri="{FF2B5EF4-FFF2-40B4-BE49-F238E27FC236}">
-                <a16:creationId xmlns:a16="http://schemas.microsoft.com/office/drawing/2014/main" id="{40507B04-F2DB-98A4-D942-BFC77170B7CC}"/>
+                <a16:creationId xmlns:a16="http://schemas.microsoft.com/office/drawing/2014/main" id="{545C478D-17F9-E44C-A19C-72ECD4713630}"/>
               </a:ext>
             </a:extLst>
           </p:cNvPr>
@@ -7351,17 +7178,25 @@
           <a:p>
             <a:r>
               <a:rPr lang="en-US" dirty="0"/>
-              <a:t>Batch Normalization</a:t>
+              <a:t>Activation Functions – </a:t>
+            </a:r>
+            <a:r>
+              <a:rPr lang="en-US" dirty="0" err="1"/>
+              <a:t>Relu</a:t>
+            </a:r>
+            <a:r>
+              <a:rPr lang="en-US" dirty="0"/>
+              <a:t> Variations</a:t>
             </a:r>
           </a:p>
         </p:txBody>
       </p:sp>
       <p:pic>
         <p:nvPicPr>
-          <p:cNvPr id="2050" name="Picture 2">
-            <a:extLst>
-              <a:ext uri="{FF2B5EF4-FFF2-40B4-BE49-F238E27FC236}">
-                <a16:creationId xmlns:a16="http://schemas.microsoft.com/office/drawing/2014/main" id="{DACB7CF9-B17A-78F0-88AC-6F1FA8C4D4E2}"/>
+          <p:cNvPr id="4098" name="Picture 2" descr="8: Illustration of output of ELU vs ReLU vs Leaky ReLU function with... |  Download Scientific Diagram">
+            <a:extLst>
+              <a:ext uri="{FF2B5EF4-FFF2-40B4-BE49-F238E27FC236}">
+                <a16:creationId xmlns:a16="http://schemas.microsoft.com/office/drawing/2014/main" id="{28167D23-766C-0F49-9CF6-84F2EA8D7EC2}"/>
               </a:ext>
             </a:extLst>
           </p:cNvPr>
@@ -7378,13 +7213,13 @@
               </a:ext>
             </a:extLst>
           </a:blip>
-          <a:srcRect l="15422"/>
+          <a:srcRect l="11058" r="6709"/>
           <a:stretch/>
         </p:blipFill>
         <p:spPr bwMode="auto">
           <a:xfrm>
-            <a:off x="1" y="1853754"/>
-            <a:ext cx="4902678" cy="2695444"/>
+            <a:off x="0" y="1853754"/>
+            <a:ext cx="4610638" cy="4199727"/>
           </a:xfrm>
           <a:prstGeom prst="rect">
             <a:avLst/>
@@ -7406,7 +7241,7 @@
           <p:cNvPr id="3" name="Content Placeholder 2">
             <a:extLst>
               <a:ext uri="{FF2B5EF4-FFF2-40B4-BE49-F238E27FC236}">
-                <a16:creationId xmlns:a16="http://schemas.microsoft.com/office/drawing/2014/main" id="{04C7B768-B788-7A3C-3953-7744E3C3FF4D}"/>
+                <a16:creationId xmlns:a16="http://schemas.microsoft.com/office/drawing/2014/main" id="{0E5CABA0-1113-1546-ABF6-995CA6EE2352}"/>
               </a:ext>
             </a:extLst>
           </p:cNvPr>
@@ -7419,8 +7254,8 @@
         </p:nvSpPr>
         <p:spPr>
           <a:xfrm>
-            <a:off x="5208609" y="1853754"/>
-            <a:ext cx="6983392" cy="4199727"/>
+            <a:off x="4606746" y="1853754"/>
+            <a:ext cx="7585254" cy="4280828"/>
           </a:xfrm>
         </p:spPr>
         <p:txBody>
@@ -7431,94 +7266,96 @@
           <a:p>
             <a:r>
               <a:rPr lang="en-US" dirty="0"/>
-              <a:t>Another gradient maintaining technique is batch normalization. </a:t>
-            </a:r>
-          </a:p>
-          <a:p>
-            <a:r>
-              <a:rPr lang="en-US" dirty="0"/>
-              <a:t>Batch normalization will shift the distribution back to “the middle”, where gradients exist. </a:t>
-            </a:r>
-          </a:p>
-          <a:p>
-            <a:pPr lvl="1"/>
-            <a:r>
-              <a:rPr lang="en-US" dirty="0"/>
-              <a:t>“Flat” gradients may vanish – near 0/1 with sigmoid. </a:t>
-            </a:r>
-          </a:p>
-          <a:p>
-            <a:pPr lvl="1"/>
-            <a:r>
-              <a:rPr lang="en-US" dirty="0"/>
-              <a:t>In </a:t>
+              <a:t>To address those issues with </a:t>
             </a:r>
             <a:r>
               <a:rPr lang="en-US" dirty="0" err="1"/>
-              <a:t>relu</a:t>
-            </a:r>
-            <a:r>
-              <a:rPr lang="en-US" dirty="0"/>
-              <a:t>, may die and go negative where there’s no gradient. </a:t>
-            </a:r>
-          </a:p>
-          <a:p>
-            <a:r>
-              <a:rPr lang="en-US" dirty="0"/>
-              <a:t>Usually applied after dense layer, but can vary. </a:t>
-            </a:r>
-          </a:p>
-          <a:p>
-            <a:r>
-              <a:rPr lang="en-US" dirty="0"/>
-              <a:t>Can often allow higher learning rates to work.</a:t>
-            </a:r>
-          </a:p>
-          <a:p>
-            <a:r>
-              <a:rPr lang="en-US" dirty="0"/>
-              <a:t>Note: we should normalize normally still. </a:t>
-            </a:r>
-          </a:p>
-          <a:p>
-            <a:endParaRPr lang="en-US" dirty="0"/>
-          </a:p>
-        </p:txBody>
-      </p:sp>
-      <p:pic>
-        <p:nvPicPr>
-          <p:cNvPr id="4" name="Picture 3">
-            <a:extLst>
-              <a:ext uri="{FF2B5EF4-FFF2-40B4-BE49-F238E27FC236}">
-                <a16:creationId xmlns:a16="http://schemas.microsoft.com/office/drawing/2014/main" id="{365C0691-8F19-F627-1CEB-290C78CF3C16}"/>
-              </a:ext>
-            </a:extLst>
-          </p:cNvPr>
-          <p:cNvPicPr>
-            <a:picLocks noChangeAspect="1"/>
-          </p:cNvPicPr>
-          <p:nvPr/>
-        </p:nvPicPr>
-        <p:blipFill>
-          <a:blip r:embed="rId3"/>
-          <a:stretch>
-            <a:fillRect/>
-          </a:stretch>
-        </p:blipFill>
-        <p:spPr>
-          <a:xfrm>
-            <a:off x="0" y="4549198"/>
-            <a:ext cx="4317357" cy="2308802"/>
-          </a:xfrm>
-          <a:prstGeom prst="rect">
-            <a:avLst/>
-          </a:prstGeom>
-        </p:spPr>
-      </p:pic>
+              <a:t>ReLU</a:t>
+            </a:r>
+            <a:r>
+              <a:rPr lang="en-US" dirty="0"/>
+              <a:t>, alternatives were created:</a:t>
+            </a:r>
+          </a:p>
+          <a:p>
+            <a:pPr lvl="1"/>
+            <a:r>
+              <a:rPr lang="en-US" dirty="0"/>
+              <a:t>Notably – Leaky </a:t>
+            </a:r>
+            <a:r>
+              <a:rPr lang="en-US" dirty="0" err="1"/>
+              <a:t>ReLU</a:t>
+            </a:r>
+            <a:r>
+              <a:rPr lang="en-US" dirty="0"/>
+              <a:t> and ELU (exponential linear). </a:t>
+            </a:r>
+          </a:p>
+          <a:p>
+            <a:r>
+              <a:rPr lang="en-US" dirty="0"/>
+              <a:t>Each removes that 0-value range of the derivative. </a:t>
+            </a:r>
+          </a:p>
+          <a:p>
+            <a:pPr lvl="1"/>
+            <a:r>
+              <a:rPr lang="en-US" dirty="0"/>
+              <a:t>Removes the Dying </a:t>
+            </a:r>
+            <a:r>
+              <a:rPr lang="en-US" dirty="0" err="1"/>
+              <a:t>ReLU</a:t>
+            </a:r>
+            <a:r>
+              <a:rPr lang="en-US" dirty="0"/>
+              <a:t> issue, so gradients don’t vanish as much. </a:t>
+            </a:r>
+          </a:p>
+          <a:p>
+            <a:pPr lvl="1"/>
+            <a:r>
+              <a:rPr lang="en-US" dirty="0"/>
+              <a:t>Can help speed training, or even allow convergence at all. </a:t>
+            </a:r>
+          </a:p>
+          <a:p>
+            <a:r>
+              <a:rPr lang="en-US" dirty="0" err="1"/>
+              <a:t>ReLU</a:t>
+            </a:r>
+            <a:r>
+              <a:rPr lang="en-US" dirty="0"/>
+              <a:t> or a variation on it are our defaults, and normally good. </a:t>
+            </a:r>
+          </a:p>
+          <a:p>
+            <a:r>
+              <a:rPr lang="en-US" dirty="0"/>
+              <a:t>If using </a:t>
+            </a:r>
+            <a:r>
+              <a:rPr lang="en-US" dirty="0" err="1"/>
+              <a:t>ReLU</a:t>
+            </a:r>
+            <a:r>
+              <a:rPr lang="en-US" dirty="0"/>
+              <a:t> – reducing LR can also combat the dying issue. </a:t>
+            </a:r>
+          </a:p>
+          <a:p>
+            <a:r>
+              <a:rPr lang="en-US" dirty="0"/>
+              <a:t>Note – this isn’t the most likely thing to be a massive issue, the case specific defaults tend to perform well most of the type. </a:t>
+            </a:r>
+          </a:p>
+        </p:txBody>
+      </p:sp>
     </p:spTree>
     <p:extLst>
       <p:ext uri="{BB962C8B-B14F-4D97-AF65-F5344CB8AC3E}">
-        <p14:creationId xmlns:p14="http://schemas.microsoft.com/office/powerpoint/2010/main" val="1687437132"/>
+        <p14:creationId xmlns:p14="http://schemas.microsoft.com/office/powerpoint/2010/main" val="587557089"/>
       </p:ext>
     </p:extLst>
   </p:cSld>
@@ -7529,1019 +7366,6 @@
 </file>
 
 <file path=ppt/slides/slide29.xml><?xml version="1.0" encoding="utf-8"?>
-<p:sld xmlns:a="http://schemas.openxmlformats.org/drawingml/2006/main" xmlns:r="http://schemas.openxmlformats.org/officeDocument/2006/relationships" xmlns:p="http://schemas.openxmlformats.org/presentationml/2006/main">
-  <p:cSld>
-    <p:spTree>
-      <p:nvGrpSpPr>
-        <p:cNvPr id="1" name=""/>
-        <p:cNvGrpSpPr/>
-        <p:nvPr/>
-      </p:nvGrpSpPr>
-      <p:grpSpPr>
-        <a:xfrm>
-          <a:off x="0" y="0"/>
-          <a:ext cx="0" cy="0"/>
-          <a:chOff x="0" y="0"/>
-          <a:chExt cx="0" cy="0"/>
-        </a:xfrm>
-      </p:grpSpPr>
-      <p:sp>
-        <p:nvSpPr>
-          <p:cNvPr id="2" name="Title 1">
-            <a:extLst>
-              <a:ext uri="{FF2B5EF4-FFF2-40B4-BE49-F238E27FC236}">
-                <a16:creationId xmlns:a16="http://schemas.microsoft.com/office/drawing/2014/main" id="{12EB02ED-4B2D-A4D0-9A1B-F5D886A1D4DA}"/>
-              </a:ext>
-            </a:extLst>
-          </p:cNvPr>
-          <p:cNvSpPr>
-            <a:spLocks noGrp="1"/>
-          </p:cNvSpPr>
-          <p:nvPr>
-            <p:ph type="title"/>
-          </p:nvPr>
-        </p:nvSpPr>
-        <p:spPr/>
-        <p:txBody>
-          <a:bodyPr/>
-          <a:lstStyle/>
-          <a:p>
-            <a:endParaRPr lang="en-US"/>
-          </a:p>
-        </p:txBody>
-      </p:sp>
-      <p:sp>
-        <p:nvSpPr>
-          <p:cNvPr id="3" name="Content Placeholder 2">
-            <a:extLst>
-              <a:ext uri="{FF2B5EF4-FFF2-40B4-BE49-F238E27FC236}">
-                <a16:creationId xmlns:a16="http://schemas.microsoft.com/office/drawing/2014/main" id="{79262A70-7FB5-F2DE-F3DF-7165887D447B}"/>
-              </a:ext>
-            </a:extLst>
-          </p:cNvPr>
-          <p:cNvSpPr>
-            <a:spLocks noGrp="1"/>
-          </p:cNvSpPr>
-          <p:nvPr>
-            <p:ph idx="1"/>
-          </p:nvPr>
-        </p:nvSpPr>
-        <p:spPr/>
-        <p:txBody>
-          <a:bodyPr/>
-          <a:lstStyle/>
-          <a:p>
-            <a:endParaRPr lang="en-US"/>
-          </a:p>
-        </p:txBody>
-      </p:sp>
-      <p:pic>
-        <p:nvPicPr>
-          <p:cNvPr id="4098" name="Picture 2">
-            <a:extLst>
-              <a:ext uri="{FF2B5EF4-FFF2-40B4-BE49-F238E27FC236}">
-                <a16:creationId xmlns:a16="http://schemas.microsoft.com/office/drawing/2014/main" id="{2C2DDD5C-391D-91D2-A435-8110CC33187B}"/>
-              </a:ext>
-            </a:extLst>
-          </p:cNvPr>
-          <p:cNvPicPr>
-            <a:picLocks noChangeAspect="1" noChangeArrowheads="1"/>
-          </p:cNvPicPr>
-          <p:nvPr/>
-        </p:nvPicPr>
-        <p:blipFill>
-          <a:blip r:embed="rId2">
-            <a:extLst>
-              <a:ext uri="{28A0092B-C50C-407E-A947-70E740481C1C}">
-                <a14:useLocalDpi xmlns:a14="http://schemas.microsoft.com/office/drawing/2010/main" val="0"/>
-              </a:ext>
-            </a:extLst>
-          </a:blip>
-          <a:srcRect/>
-          <a:stretch>
-            <a:fillRect/>
-          </a:stretch>
-        </p:blipFill>
-        <p:spPr bwMode="auto">
-          <a:xfrm>
-            <a:off x="0" y="1400175"/>
-            <a:ext cx="12192000" cy="4057650"/>
-          </a:xfrm>
-          <a:prstGeom prst="rect">
-            <a:avLst/>
-          </a:prstGeom>
-          <a:noFill/>
-          <a:extLst>
-            <a:ext uri="{909E8E84-426E-40DD-AFC4-6F175D3DCCD1}">
-              <a14:hiddenFill xmlns:a14="http://schemas.microsoft.com/office/drawing/2010/main">
-                <a:solidFill>
-                  <a:srgbClr val="FFFFFF"/>
-                </a:solidFill>
-              </a14:hiddenFill>
-            </a:ext>
-          </a:extLst>
-        </p:spPr>
-      </p:pic>
-    </p:spTree>
-    <p:extLst>
-      <p:ext uri="{BB962C8B-B14F-4D97-AF65-F5344CB8AC3E}">
-        <p14:creationId xmlns:p14="http://schemas.microsoft.com/office/powerpoint/2010/main" val="3011999725"/>
-      </p:ext>
-    </p:extLst>
-  </p:cSld>
-  <p:clrMapOvr>
-    <a:masterClrMapping/>
-  </p:clrMapOvr>
-</p:sld>
-</file>
-
-<file path=ppt/slides/slide3.xml><?xml version="1.0" encoding="utf-8"?>
-<p:sld xmlns:a="http://schemas.openxmlformats.org/drawingml/2006/main" xmlns:r="http://schemas.openxmlformats.org/officeDocument/2006/relationships" xmlns:p="http://schemas.openxmlformats.org/presentationml/2006/main">
-  <p:cSld>
-    <p:spTree>
-      <p:nvGrpSpPr>
-        <p:cNvPr id="1" name=""/>
-        <p:cNvGrpSpPr/>
-        <p:nvPr/>
-      </p:nvGrpSpPr>
-      <p:grpSpPr>
-        <a:xfrm>
-          <a:off x="0" y="0"/>
-          <a:ext cx="0" cy="0"/>
-          <a:chOff x="0" y="0"/>
-          <a:chExt cx="0" cy="0"/>
-        </a:xfrm>
-      </p:grpSpPr>
-      <p:sp>
-        <p:nvSpPr>
-          <p:cNvPr id="2" name="Title 1">
-            <a:extLst>
-              <a:ext uri="{FF2B5EF4-FFF2-40B4-BE49-F238E27FC236}">
-                <a16:creationId xmlns:a16="http://schemas.microsoft.com/office/drawing/2014/main" id="{C714B66D-AFB2-A3EE-5997-4D1F0B95FC89}"/>
-              </a:ext>
-            </a:extLst>
-          </p:cNvPr>
-          <p:cNvSpPr>
-            <a:spLocks noGrp="1"/>
-          </p:cNvSpPr>
-          <p:nvPr>
-            <p:ph type="title"/>
-          </p:nvPr>
-        </p:nvSpPr>
-        <p:spPr/>
-        <p:txBody>
-          <a:bodyPr/>
-          <a:lstStyle/>
-          <a:p>
-            <a:r>
-              <a:rPr lang="en-US" dirty="0"/>
-              <a:t>Project (Other Class) Stuff</a:t>
-            </a:r>
-          </a:p>
-        </p:txBody>
-      </p:sp>
-      <p:sp>
-        <p:nvSpPr>
-          <p:cNvPr id="3" name="Content Placeholder 2">
-            <a:extLst>
-              <a:ext uri="{FF2B5EF4-FFF2-40B4-BE49-F238E27FC236}">
-                <a16:creationId xmlns:a16="http://schemas.microsoft.com/office/drawing/2014/main" id="{20141979-88C3-CEA4-3B52-F2E898F296B1}"/>
-              </a:ext>
-            </a:extLst>
-          </p:cNvPr>
-          <p:cNvSpPr>
-            <a:spLocks noGrp="1"/>
-          </p:cNvSpPr>
-          <p:nvPr>
-            <p:ph idx="1"/>
-          </p:nvPr>
-        </p:nvSpPr>
-        <p:spPr>
-          <a:xfrm>
-            <a:off x="728663" y="1853754"/>
-            <a:ext cx="11058525" cy="4199727"/>
-          </a:xfrm>
-        </p:spPr>
-        <p:txBody>
-          <a:bodyPr>
-            <a:normAutofit/>
-          </a:bodyPr>
-          <a:lstStyle/>
-          <a:p>
-            <a:r>
-              <a:rPr lang="en-US" dirty="0"/>
-              <a:t>If you are still doing real estate, think about large scale feature construction. </a:t>
-            </a:r>
-          </a:p>
-          <a:p>
-            <a:r>
-              <a:rPr lang="en-US" dirty="0"/>
-              <a:t>You can make many features from latitude and longitude that may matter. </a:t>
-            </a:r>
-          </a:p>
-          <a:p>
-            <a:pPr lvl="1"/>
-            <a:r>
-              <a:rPr lang="en-US" dirty="0"/>
-              <a:t>I’d make a lot of them, since you have a lot of data, and let the model sort it out. </a:t>
-            </a:r>
-          </a:p>
-          <a:p>
-            <a:r>
-              <a:rPr lang="en-US" dirty="0"/>
-              <a:t>Directly calculable via spatial joins and spatial files you can find online (Google mapping/spatial/</a:t>
-            </a:r>
-            <a:r>
-              <a:rPr lang="en-US" dirty="0" err="1"/>
-              <a:t>gis</a:t>
-            </a:r>
-            <a:r>
-              <a:rPr lang="en-US" dirty="0"/>
-              <a:t>):</a:t>
-            </a:r>
-          </a:p>
-          <a:p>
-            <a:pPr lvl="1"/>
-            <a:r>
-              <a:rPr lang="en-US" dirty="0"/>
-              <a:t>Distance from almost anything – roads, schools, water, commerce, neighbors, etc.</a:t>
-            </a:r>
-          </a:p>
-          <a:p>
-            <a:pPr lvl="1"/>
-            <a:r>
-              <a:rPr lang="en-US" dirty="0"/>
-              <a:t>Stats – density, comparison to neighbors, trends, crime, construction, census data (wealth, education, etc.)</a:t>
-            </a:r>
-          </a:p>
-          <a:p>
-            <a:r>
-              <a:rPr lang="en-US" dirty="0"/>
-              <a:t>Calculable with potentially free services online – time to get places, real estate stuff, sun. </a:t>
-            </a:r>
-          </a:p>
-          <a:p>
-            <a:r>
-              <a:rPr lang="en-US" dirty="0"/>
-              <a:t>Possible with large scale scraping – real estate data, all kinds of other stuff. </a:t>
-            </a:r>
-          </a:p>
-          <a:p>
-            <a:r>
-              <a:rPr lang="en-US" dirty="0"/>
-              <a:t>I’d try to cast as wide a net as possible and get almost anything I could automate as a start. </a:t>
-            </a:r>
-          </a:p>
-        </p:txBody>
-      </p:sp>
-    </p:spTree>
-    <p:extLst>
-      <p:ext uri="{BB962C8B-B14F-4D97-AF65-F5344CB8AC3E}">
-        <p14:creationId xmlns:p14="http://schemas.microsoft.com/office/powerpoint/2010/main" val="3300512849"/>
-      </p:ext>
-    </p:extLst>
-  </p:cSld>
-  <p:clrMapOvr>
-    <a:masterClrMapping/>
-  </p:clrMapOvr>
-</p:sld>
-</file>
-
-<file path=ppt/slides/slide30.xml><?xml version="1.0" encoding="utf-8"?>
-<p:sld xmlns:a="http://schemas.openxmlformats.org/drawingml/2006/main" xmlns:r="http://schemas.openxmlformats.org/officeDocument/2006/relationships" xmlns:p="http://schemas.openxmlformats.org/presentationml/2006/main">
-  <p:cSld>
-    <p:spTree>
-      <p:nvGrpSpPr>
-        <p:cNvPr id="1" name=""/>
-        <p:cNvGrpSpPr/>
-        <p:nvPr/>
-      </p:nvGrpSpPr>
-      <p:grpSpPr>
-        <a:xfrm>
-          <a:off x="0" y="0"/>
-          <a:ext cx="0" cy="0"/>
-          <a:chOff x="0" y="0"/>
-          <a:chExt cx="0" cy="0"/>
-        </a:xfrm>
-      </p:grpSpPr>
-      <p:sp>
-        <p:nvSpPr>
-          <p:cNvPr id="2" name="Title 1">
-            <a:extLst>
-              <a:ext uri="{FF2B5EF4-FFF2-40B4-BE49-F238E27FC236}">
-                <a16:creationId xmlns:a16="http://schemas.microsoft.com/office/drawing/2014/main" id="{8AB3D8A8-1279-C44F-AB18-28BCD74E016C}"/>
-              </a:ext>
-            </a:extLst>
-          </p:cNvPr>
-          <p:cNvSpPr>
-            <a:spLocks noGrp="1"/>
-          </p:cNvSpPr>
-          <p:nvPr>
-            <p:ph type="title"/>
-          </p:nvPr>
-        </p:nvSpPr>
-        <p:spPr/>
-        <p:txBody>
-          <a:bodyPr/>
-          <a:lstStyle/>
-          <a:p>
-            <a:r>
-              <a:rPr lang="en-US" dirty="0"/>
-              <a:t>Initialization </a:t>
-            </a:r>
-          </a:p>
-        </p:txBody>
-      </p:sp>
-      <p:sp>
-        <p:nvSpPr>
-          <p:cNvPr id="3" name="Content Placeholder 2">
-            <a:extLst>
-              <a:ext uri="{FF2B5EF4-FFF2-40B4-BE49-F238E27FC236}">
-                <a16:creationId xmlns:a16="http://schemas.microsoft.com/office/drawing/2014/main" id="{E6932690-B733-C245-A962-ECCC4BCA3B54}"/>
-              </a:ext>
-            </a:extLst>
-          </p:cNvPr>
-          <p:cNvSpPr>
-            <a:spLocks noGrp="1"/>
-          </p:cNvSpPr>
-          <p:nvPr>
-            <p:ph idx="1"/>
-          </p:nvPr>
-        </p:nvSpPr>
-        <p:spPr>
-          <a:xfrm>
-            <a:off x="1451579" y="1853754"/>
-            <a:ext cx="9603275" cy="4199727"/>
-          </a:xfrm>
-        </p:spPr>
-        <p:txBody>
-          <a:bodyPr>
-            <a:normAutofit lnSpcReduction="10000"/>
-          </a:bodyPr>
-          <a:lstStyle/>
-          <a:p>
-            <a:r>
-              <a:rPr lang="en-US" dirty="0"/>
-              <a:t>Initialization controls how the weight and bias values start. </a:t>
-            </a:r>
-          </a:p>
-          <a:p>
-            <a:r>
-              <a:rPr lang="en-US" dirty="0"/>
-              <a:t>Can be controlled via a parameter for each layer:</a:t>
-            </a:r>
-          </a:p>
-          <a:p>
-            <a:pPr lvl="1"/>
-            <a:r>
-              <a:rPr lang="en-US" dirty="0"/>
-              <a:t>Weight initialization is by default is “</a:t>
-            </a:r>
-            <a:r>
-              <a:rPr lang="en-US" dirty="0" err="1"/>
-              <a:t>glorot_uniform</a:t>
-            </a:r>
-            <a:r>
-              <a:rPr lang="en-US" dirty="0"/>
-              <a:t>” – a variety of random. </a:t>
-            </a:r>
-          </a:p>
-          <a:p>
-            <a:pPr lvl="1"/>
-            <a:r>
-              <a:rPr lang="en-US" dirty="0"/>
-              <a:t>Bias initialization defaults to 0. </a:t>
-            </a:r>
-          </a:p>
-          <a:p>
-            <a:pPr lvl="1"/>
-            <a:r>
-              <a:rPr lang="en-US" dirty="0"/>
-              <a:t>We can preset the output layer with the log of the expectation (for logit). </a:t>
-            </a:r>
-          </a:p>
-          <a:p>
-            <a:r>
-              <a:rPr lang="en-US" dirty="0"/>
-              <a:t>This can help the model train – both in speed and potential for convergence. </a:t>
-            </a:r>
-          </a:p>
-          <a:p>
-            <a:r>
-              <a:rPr lang="en-US" dirty="0"/>
-              <a:t>Imbalanced data – the data has a “bias” to start with. </a:t>
-            </a:r>
-          </a:p>
-          <a:p>
-            <a:pPr lvl="1"/>
-            <a:r>
-              <a:rPr lang="en-US" dirty="0"/>
-              <a:t>Set bias on output layer to the bias in the data. </a:t>
-            </a:r>
-          </a:p>
-          <a:p>
-            <a:pPr lvl="1"/>
-            <a:r>
-              <a:rPr lang="en-US" dirty="0"/>
-              <a:t>Network doesn’t need to learn the massive shift in bias. </a:t>
-            </a:r>
-          </a:p>
-          <a:p>
-            <a:pPr lvl="1"/>
-            <a:r>
-              <a:rPr lang="en-US" dirty="0"/>
-              <a:t>Faster convergence and more accuracy. </a:t>
-            </a:r>
-          </a:p>
-          <a:p>
-            <a:endParaRPr lang="en-US" dirty="0"/>
-          </a:p>
-        </p:txBody>
-      </p:sp>
-    </p:spTree>
-    <p:extLst>
-      <p:ext uri="{BB962C8B-B14F-4D97-AF65-F5344CB8AC3E}">
-        <p14:creationId xmlns:p14="http://schemas.microsoft.com/office/powerpoint/2010/main" val="2996444863"/>
-      </p:ext>
-    </p:extLst>
-  </p:cSld>
-  <p:clrMapOvr>
-    <a:masterClrMapping/>
-  </p:clrMapOvr>
-</p:sld>
-</file>
-
-<file path=ppt/slides/slide31.xml><?xml version="1.0" encoding="utf-8"?>
-<p:sld xmlns:a="http://schemas.openxmlformats.org/drawingml/2006/main" xmlns:r="http://schemas.openxmlformats.org/officeDocument/2006/relationships" xmlns:p="http://schemas.openxmlformats.org/presentationml/2006/main">
-  <p:cSld>
-    <p:spTree>
-      <p:nvGrpSpPr>
-        <p:cNvPr id="1" name=""/>
-        <p:cNvGrpSpPr/>
-        <p:nvPr/>
-      </p:nvGrpSpPr>
-      <p:grpSpPr>
-        <a:xfrm>
-          <a:off x="0" y="0"/>
-          <a:ext cx="0" cy="0"/>
-          <a:chOff x="0" y="0"/>
-          <a:chExt cx="0" cy="0"/>
-        </a:xfrm>
-      </p:grpSpPr>
-      <p:sp>
-        <p:nvSpPr>
-          <p:cNvPr id="2" name="Title 1">
-            <a:extLst>
-              <a:ext uri="{FF2B5EF4-FFF2-40B4-BE49-F238E27FC236}">
-                <a16:creationId xmlns:a16="http://schemas.microsoft.com/office/drawing/2014/main" id="{8E701F95-B618-A7AB-FF6B-7AF73C21932E}"/>
-              </a:ext>
-            </a:extLst>
-          </p:cNvPr>
-          <p:cNvSpPr>
-            <a:spLocks noGrp="1"/>
-          </p:cNvSpPr>
-          <p:nvPr>
-            <p:ph type="title"/>
-          </p:nvPr>
-        </p:nvSpPr>
-        <p:spPr/>
-        <p:txBody>
-          <a:bodyPr/>
-          <a:lstStyle/>
-          <a:p>
-            <a:r>
-              <a:rPr lang="en-US" dirty="0"/>
-              <a:t>Refresher - regularization</a:t>
-            </a:r>
-          </a:p>
-        </p:txBody>
-      </p:sp>
-      <p:sp>
-        <p:nvSpPr>
-          <p:cNvPr id="3" name="Content Placeholder 2">
-            <a:extLst>
-              <a:ext uri="{FF2B5EF4-FFF2-40B4-BE49-F238E27FC236}">
-                <a16:creationId xmlns:a16="http://schemas.microsoft.com/office/drawing/2014/main" id="{2E156C3E-5CAF-F8A6-E7F0-120D8C6CAFA5}"/>
-              </a:ext>
-            </a:extLst>
-          </p:cNvPr>
-          <p:cNvSpPr>
-            <a:spLocks noGrp="1"/>
-          </p:cNvSpPr>
-          <p:nvPr>
-            <p:ph idx="1"/>
-          </p:nvPr>
-        </p:nvSpPr>
-        <p:spPr>
-          <a:xfrm>
-            <a:off x="1451579" y="1853755"/>
-            <a:ext cx="9603275" cy="2265242"/>
-          </a:xfrm>
-        </p:spPr>
-        <p:txBody>
-          <a:bodyPr/>
-          <a:lstStyle/>
-          <a:p>
-            <a:r>
-              <a:rPr lang="en-US" dirty="0"/>
-              <a:t>We frequently/typically use some regularization in our models. </a:t>
-            </a:r>
-          </a:p>
-          <a:p>
-            <a:pPr lvl="1"/>
-            <a:r>
-              <a:rPr lang="en-US" dirty="0"/>
-              <a:t>Semi-standard as neural networks are large and flexible, and this constrains overfit. </a:t>
-            </a:r>
-          </a:p>
-          <a:p>
-            <a:pPr lvl="1"/>
-            <a:r>
-              <a:rPr lang="en-US" dirty="0"/>
-              <a:t>L1/L2 – works just as in regression, can be applied in layer as a hyperparameter. </a:t>
-            </a:r>
-          </a:p>
-          <a:p>
-            <a:pPr lvl="1"/>
-            <a:r>
-              <a:rPr lang="en-US" dirty="0"/>
-              <a:t>Dropout – removes some percentage of neurons randomly each batch of </a:t>
-            </a:r>
-            <a:r>
-              <a:rPr lang="en-US" b="1" dirty="0"/>
-              <a:t>training</a:t>
-            </a:r>
-            <a:r>
-              <a:rPr lang="en-US" dirty="0"/>
-              <a:t>, forcing learning to occur on the remainder. Applied as a layer, typically round 20—40% to start. </a:t>
-            </a:r>
-          </a:p>
-        </p:txBody>
-      </p:sp>
-      <p:pic>
-        <p:nvPicPr>
-          <p:cNvPr id="12290" name="Picture 2" descr="An illustration of the dropout mechanism within a multi-layer neural... |  Download Scientific Diagram">
-            <a:extLst>
-              <a:ext uri="{FF2B5EF4-FFF2-40B4-BE49-F238E27FC236}">
-                <a16:creationId xmlns:a16="http://schemas.microsoft.com/office/drawing/2014/main" id="{2AB7688B-0AD0-F5E0-0253-193C85677D34}"/>
-              </a:ext>
-            </a:extLst>
-          </p:cNvPr>
-          <p:cNvPicPr>
-            <a:picLocks noChangeAspect="1" noChangeArrowheads="1"/>
-          </p:cNvPicPr>
-          <p:nvPr/>
-        </p:nvPicPr>
-        <p:blipFill>
-          <a:blip r:embed="rId2">
-            <a:extLst>
-              <a:ext uri="{28A0092B-C50C-407E-A947-70E740481C1C}">
-                <a14:useLocalDpi xmlns:a14="http://schemas.microsoft.com/office/drawing/2010/main" val="0"/>
-              </a:ext>
-            </a:extLst>
-          </a:blip>
-          <a:srcRect/>
-          <a:stretch>
-            <a:fillRect/>
-          </a:stretch>
-        </p:blipFill>
-        <p:spPr bwMode="auto">
-          <a:xfrm>
-            <a:off x="1621461" y="3838427"/>
-            <a:ext cx="8949078" cy="2905818"/>
-          </a:xfrm>
-          <a:prstGeom prst="rect">
-            <a:avLst/>
-          </a:prstGeom>
-          <a:noFill/>
-          <a:extLst>
-            <a:ext uri="{909E8E84-426E-40DD-AFC4-6F175D3DCCD1}">
-              <a14:hiddenFill xmlns:a14="http://schemas.microsoft.com/office/drawing/2010/main">
-                <a:solidFill>
-                  <a:srgbClr val="FFFFFF"/>
-                </a:solidFill>
-              </a14:hiddenFill>
-            </a:ext>
-          </a:extLst>
-        </p:spPr>
-      </p:pic>
-    </p:spTree>
-    <p:extLst>
-      <p:ext uri="{BB962C8B-B14F-4D97-AF65-F5344CB8AC3E}">
-        <p14:creationId xmlns:p14="http://schemas.microsoft.com/office/powerpoint/2010/main" val="3865647208"/>
-      </p:ext>
-    </p:extLst>
-  </p:cSld>
-  <p:clrMapOvr>
-    <a:masterClrMapping/>
-  </p:clrMapOvr>
-</p:sld>
-</file>
-
-<file path=ppt/slides/slide32.xml><?xml version="1.0" encoding="utf-8"?>
-<p:sld xmlns:a="http://schemas.openxmlformats.org/drawingml/2006/main" xmlns:r="http://schemas.openxmlformats.org/officeDocument/2006/relationships" xmlns:p="http://schemas.openxmlformats.org/presentationml/2006/main">
-  <p:cSld>
-    <p:spTree>
-      <p:nvGrpSpPr>
-        <p:cNvPr id="1" name=""/>
-        <p:cNvGrpSpPr/>
-        <p:nvPr/>
-      </p:nvGrpSpPr>
-      <p:grpSpPr>
-        <a:xfrm>
-          <a:off x="0" y="0"/>
-          <a:ext cx="0" cy="0"/>
-          <a:chOff x="0" y="0"/>
-          <a:chExt cx="0" cy="0"/>
-        </a:xfrm>
-      </p:grpSpPr>
-      <p:sp>
-        <p:nvSpPr>
-          <p:cNvPr id="2" name="Title 1">
-            <a:extLst>
-              <a:ext uri="{FF2B5EF4-FFF2-40B4-BE49-F238E27FC236}">
-                <a16:creationId xmlns:a16="http://schemas.microsoft.com/office/drawing/2014/main" id="{998811FD-FB04-14C3-51B0-20806479A3B8}"/>
-              </a:ext>
-            </a:extLst>
-          </p:cNvPr>
-          <p:cNvSpPr>
-            <a:spLocks noGrp="1"/>
-          </p:cNvSpPr>
-          <p:nvPr>
-            <p:ph type="title"/>
-          </p:nvPr>
-        </p:nvSpPr>
-        <p:spPr/>
-        <p:txBody>
-          <a:bodyPr/>
-          <a:lstStyle/>
-          <a:p>
-            <a:r>
-              <a:rPr lang="en-US" dirty="0"/>
-              <a:t>Neural Networks are Flexible</a:t>
-            </a:r>
-          </a:p>
-        </p:txBody>
-      </p:sp>
-      <p:sp>
-        <p:nvSpPr>
-          <p:cNvPr id="3" name="Content Placeholder 2">
-            <a:extLst>
-              <a:ext uri="{FF2B5EF4-FFF2-40B4-BE49-F238E27FC236}">
-                <a16:creationId xmlns:a16="http://schemas.microsoft.com/office/drawing/2014/main" id="{F27F93CB-38CB-BCDC-EB9C-1D1A84E32F49}"/>
-              </a:ext>
-            </a:extLst>
-          </p:cNvPr>
-          <p:cNvSpPr>
-            <a:spLocks noGrp="1"/>
-          </p:cNvSpPr>
-          <p:nvPr>
-            <p:ph idx="1"/>
-          </p:nvPr>
-        </p:nvSpPr>
-        <p:spPr>
-          <a:xfrm>
-            <a:off x="1451579" y="1853754"/>
-            <a:ext cx="9603275" cy="4199727"/>
-          </a:xfrm>
-        </p:spPr>
-        <p:txBody>
-          <a:bodyPr/>
-          <a:lstStyle/>
-          <a:p>
-            <a:r>
-              <a:rPr lang="en-US" dirty="0"/>
-              <a:t>This isn’t near all of the things that we can change in a neural network. </a:t>
-            </a:r>
-          </a:p>
-          <a:p>
-            <a:r>
-              <a:rPr lang="en-US" dirty="0"/>
-              <a:t>The flexibility in their learning as they grow means that a wide range of models that are ‘good enough’ will converge on a good solution. </a:t>
-            </a:r>
-          </a:p>
-          <a:p>
-            <a:pPr lvl="1"/>
-            <a:r>
-              <a:rPr lang="en-US" dirty="0"/>
-              <a:t>E.g. the image competition has models with widely different structures fighting for fractions of a percentage of accuracy in a task. </a:t>
-            </a:r>
-          </a:p>
-          <a:p>
-            <a:r>
-              <a:rPr lang="en-US" dirty="0"/>
-              <a:t>Mirror something that is known to work, unless experimenting (which is good). </a:t>
-            </a:r>
-          </a:p>
-          <a:p>
-            <a:r>
-              <a:rPr lang="en-US" dirty="0"/>
-              <a:t>Make reasonable choices, add some excess, regularization, and early stopping, let train. </a:t>
-            </a:r>
-          </a:p>
-          <a:p>
-            <a:pPr lvl="1"/>
-            <a:r>
-              <a:rPr lang="en-US" dirty="0"/>
-              <a:t>Adjust from here based on what you see. </a:t>
-            </a:r>
-          </a:p>
-          <a:p>
-            <a:r>
-              <a:rPr lang="en-US" dirty="0"/>
-              <a:t>Finding the perfect configuration as we did with a grid becomes time impractical quickly. </a:t>
-            </a:r>
-          </a:p>
-        </p:txBody>
-      </p:sp>
-    </p:spTree>
-    <p:extLst>
-      <p:ext uri="{BB962C8B-B14F-4D97-AF65-F5344CB8AC3E}">
-        <p14:creationId xmlns:p14="http://schemas.microsoft.com/office/powerpoint/2010/main" val="2910667997"/>
-      </p:ext>
-    </p:extLst>
-  </p:cSld>
-  <p:clrMapOvr>
-    <a:masterClrMapping/>
-  </p:clrMapOvr>
-</p:sld>
-</file>
-
-<file path=ppt/slides/slide33.xml><?xml version="1.0" encoding="utf-8"?>
-<p:sld xmlns:a="http://schemas.openxmlformats.org/drawingml/2006/main" xmlns:r="http://schemas.openxmlformats.org/officeDocument/2006/relationships" xmlns:p="http://schemas.openxmlformats.org/presentationml/2006/main" show="0">
-  <p:cSld>
-    <p:spTree>
-      <p:nvGrpSpPr>
-        <p:cNvPr id="1" name=""/>
-        <p:cNvGrpSpPr/>
-        <p:nvPr/>
-      </p:nvGrpSpPr>
-      <p:grpSpPr>
-        <a:xfrm>
-          <a:off x="0" y="0"/>
-          <a:ext cx="0" cy="0"/>
-          <a:chOff x="0" y="0"/>
-          <a:chExt cx="0" cy="0"/>
-        </a:xfrm>
-      </p:grpSpPr>
-      <p:sp>
-        <p:nvSpPr>
-          <p:cNvPr id="2" name="Title 1">
-            <a:extLst>
-              <a:ext uri="{FF2B5EF4-FFF2-40B4-BE49-F238E27FC236}">
-                <a16:creationId xmlns:a16="http://schemas.microsoft.com/office/drawing/2014/main" id="{EAF056FD-E697-5353-97FE-84FF67ABB289}"/>
-              </a:ext>
-            </a:extLst>
-          </p:cNvPr>
-          <p:cNvSpPr>
-            <a:spLocks noGrp="1"/>
-          </p:cNvSpPr>
-          <p:nvPr>
-            <p:ph type="title"/>
-          </p:nvPr>
-        </p:nvSpPr>
-        <p:spPr/>
-        <p:txBody>
-          <a:bodyPr/>
-          <a:lstStyle/>
-          <a:p>
-            <a:r>
-              <a:rPr lang="en-US" dirty="0"/>
-              <a:t>Other Tuning - Optimization</a:t>
-            </a:r>
-          </a:p>
-        </p:txBody>
-      </p:sp>
-      <p:sp>
-        <p:nvSpPr>
-          <p:cNvPr id="3" name="Content Placeholder 2">
-            <a:extLst>
-              <a:ext uri="{FF2B5EF4-FFF2-40B4-BE49-F238E27FC236}">
-                <a16:creationId xmlns:a16="http://schemas.microsoft.com/office/drawing/2014/main" id="{F044C5EC-E837-8A77-86C7-0C127E9A7BD8}"/>
-              </a:ext>
-            </a:extLst>
-          </p:cNvPr>
-          <p:cNvSpPr>
-            <a:spLocks noGrp="1"/>
-          </p:cNvSpPr>
-          <p:nvPr>
-            <p:ph idx="1"/>
-          </p:nvPr>
-        </p:nvSpPr>
-        <p:spPr>
-          <a:xfrm>
-            <a:off x="1451579" y="1853754"/>
-            <a:ext cx="9603275" cy="4199727"/>
-          </a:xfrm>
-        </p:spPr>
-        <p:txBody>
-          <a:bodyPr/>
-          <a:lstStyle/>
-          <a:p>
-            <a:r>
-              <a:rPr lang="en-US" dirty="0"/>
-              <a:t>There are a huge number of things that can be changed to tune a neural network model. </a:t>
-            </a:r>
-          </a:p>
-          <a:p>
-            <a:r>
-              <a:rPr lang="en-US" dirty="0"/>
-              <a:t>We are focusing mainly on the ‘structure’ type of things. </a:t>
-            </a:r>
-          </a:p>
-          <a:p>
-            <a:pPr lvl="1"/>
-            <a:r>
-              <a:rPr lang="en-US" dirty="0"/>
-              <a:t>Network size, layers, type, hyperparameters, regularizing (and similar) layers like normalization.</a:t>
-            </a:r>
-          </a:p>
-          <a:p>
-            <a:r>
-              <a:rPr lang="en-US" dirty="0"/>
-              <a:t>We are not really focusing on the optimization part - loss/gradient descent specific things. </a:t>
-            </a:r>
-          </a:p>
-          <a:p>
-            <a:pPr lvl="1"/>
-            <a:r>
-              <a:rPr lang="en-US" dirty="0"/>
-              <a:t>Learning rates, momentum, optimizers. </a:t>
-            </a:r>
-          </a:p>
-          <a:p>
-            <a:pPr lvl="1"/>
-            <a:r>
-              <a:rPr lang="en-US" dirty="0"/>
-              <a:t>This matters, but is more theoretical in theory, and scenario dependent in practice. </a:t>
-            </a:r>
-          </a:p>
-          <a:p>
-            <a:pPr lvl="1"/>
-            <a:r>
-              <a:rPr lang="en-US" dirty="0"/>
-              <a:t>Optimization is critical as problems get larger – converging quickly, or at all, can be hard. </a:t>
-            </a:r>
-          </a:p>
-          <a:p>
-            <a:r>
-              <a:rPr lang="en-US" dirty="0"/>
-              <a:t>For our usage, we can mainly try different learning rates, if needed. </a:t>
-            </a:r>
-          </a:p>
-        </p:txBody>
-      </p:sp>
-    </p:spTree>
-    <p:extLst>
-      <p:ext uri="{BB962C8B-B14F-4D97-AF65-F5344CB8AC3E}">
-        <p14:creationId xmlns:p14="http://schemas.microsoft.com/office/powerpoint/2010/main" val="1149088017"/>
-      </p:ext>
-    </p:extLst>
-  </p:cSld>
-  <p:clrMapOvr>
-    <a:masterClrMapping/>
-  </p:clrMapOvr>
-</p:sld>
-</file>
-
-<file path=ppt/slides/slide34.xml><?xml version="1.0" encoding="utf-8"?>
-<p:sld xmlns:a="http://schemas.openxmlformats.org/drawingml/2006/main" xmlns:r="http://schemas.openxmlformats.org/officeDocument/2006/relationships" xmlns:p="http://schemas.openxmlformats.org/presentationml/2006/main">
-  <p:cSld>
-    <p:spTree>
-      <p:nvGrpSpPr>
-        <p:cNvPr id="1" name=""/>
-        <p:cNvGrpSpPr/>
-        <p:nvPr/>
-      </p:nvGrpSpPr>
-      <p:grpSpPr>
-        <a:xfrm>
-          <a:off x="0" y="0"/>
-          <a:ext cx="0" cy="0"/>
-          <a:chOff x="0" y="0"/>
-          <a:chExt cx="0" cy="0"/>
-        </a:xfrm>
-      </p:grpSpPr>
-      <p:sp>
-        <p:nvSpPr>
-          <p:cNvPr id="2" name="Title 1">
-            <a:extLst>
-              <a:ext uri="{FF2B5EF4-FFF2-40B4-BE49-F238E27FC236}">
-                <a16:creationId xmlns:a16="http://schemas.microsoft.com/office/drawing/2014/main" id="{2D76F3B6-86DB-FFF0-6350-C1AA19E15476}"/>
-              </a:ext>
-            </a:extLst>
-          </p:cNvPr>
-          <p:cNvSpPr>
-            <a:spLocks noGrp="1"/>
-          </p:cNvSpPr>
-          <p:nvPr>
-            <p:ph type="title"/>
-          </p:nvPr>
-        </p:nvSpPr>
-        <p:spPr/>
-        <p:txBody>
-          <a:bodyPr/>
-          <a:lstStyle/>
-          <a:p>
-            <a:r>
-              <a:rPr lang="en-US" dirty="0"/>
-              <a:t>Tuning From A Loss Plot</a:t>
-            </a:r>
-          </a:p>
-        </p:txBody>
-      </p:sp>
-      <p:sp>
-        <p:nvSpPr>
-          <p:cNvPr id="3" name="Content Placeholder 2">
-            <a:extLst>
-              <a:ext uri="{FF2B5EF4-FFF2-40B4-BE49-F238E27FC236}">
-                <a16:creationId xmlns:a16="http://schemas.microsoft.com/office/drawing/2014/main" id="{915E008A-9A08-A25F-5145-ECD1F6B212D2}"/>
-              </a:ext>
-            </a:extLst>
-          </p:cNvPr>
-          <p:cNvSpPr>
-            <a:spLocks noGrp="1"/>
-          </p:cNvSpPr>
-          <p:nvPr>
-            <p:ph idx="1"/>
-          </p:nvPr>
-        </p:nvSpPr>
-        <p:spPr>
-          <a:xfrm>
-            <a:off x="1451579" y="1853754"/>
-            <a:ext cx="9603275" cy="4199727"/>
-          </a:xfrm>
-        </p:spPr>
-        <p:txBody>
-          <a:bodyPr/>
-          <a:lstStyle/>
-          <a:p>
-            <a:r>
-              <a:rPr lang="en-US" dirty="0"/>
-              <a:t>The loss plot is our main, but not only, tool to help tune a model. </a:t>
-            </a:r>
-          </a:p>
-          <a:p>
-            <a:r>
-              <a:rPr lang="en-US" dirty="0"/>
-              <a:t>None of these things are definitive, but there are things that happen often that we can look at first for a possible solution. </a:t>
-            </a:r>
-          </a:p>
-          <a:p>
-            <a:r>
-              <a:rPr lang="en-US" dirty="0"/>
-              <a:t>In neural networks, we must weigh against computation time – defaults are usually fast.</a:t>
-            </a:r>
-          </a:p>
-          <a:p>
-            <a:r>
-              <a:rPr lang="en-US" dirty="0"/>
-              <a:t>Some general things:</a:t>
-            </a:r>
-          </a:p>
-          <a:p>
-            <a:pPr lvl="1"/>
-            <a:r>
-              <a:rPr lang="en-US" dirty="0"/>
-              <a:t>Make sure that data is scaled. </a:t>
-            </a:r>
-          </a:p>
-          <a:p>
-            <a:pPr lvl="1"/>
-            <a:r>
-              <a:rPr lang="en-US" dirty="0"/>
-              <a:t>More complex relationships perform better with more layers. </a:t>
-            </a:r>
-          </a:p>
-          <a:p>
-            <a:pPr lvl="1"/>
-            <a:r>
-              <a:rPr lang="en-US" dirty="0"/>
-              <a:t>The more data you have, the larger a model you’ll be able to train well. </a:t>
-            </a:r>
-          </a:p>
-          <a:p>
-            <a:pPr lvl="1"/>
-            <a:r>
-              <a:rPr lang="en-US" dirty="0"/>
-              <a:t>Unless there’s a time constraint, let things go for lots of epochs and use early stopping. </a:t>
-            </a:r>
-          </a:p>
-        </p:txBody>
-      </p:sp>
-    </p:spTree>
-    <p:extLst>
-      <p:ext uri="{BB962C8B-B14F-4D97-AF65-F5344CB8AC3E}">
-        <p14:creationId xmlns:p14="http://schemas.microsoft.com/office/powerpoint/2010/main" val="545948356"/>
-      </p:ext>
-    </p:extLst>
-  </p:cSld>
-  <p:clrMapOvr>
-    <a:masterClrMapping/>
-  </p:clrMapOvr>
-</p:sld>
-</file>
-
-<file path=ppt/slides/slide35.xml><?xml version="1.0" encoding="utf-8"?>
 <p:sld xmlns:a="http://schemas.openxmlformats.org/drawingml/2006/main" xmlns:r="http://schemas.openxmlformats.org/officeDocument/2006/relationships" xmlns:p="http://schemas.openxmlformats.org/presentationml/2006/main">
   <p:cSld>
     <p:bg>
@@ -8587,6 +7411,1267 @@
           <p:cNvPr id="2" name="Title 1">
             <a:extLst>
               <a:ext uri="{FF2B5EF4-FFF2-40B4-BE49-F238E27FC236}">
+                <a16:creationId xmlns:a16="http://schemas.microsoft.com/office/drawing/2014/main" id="{40507B04-F2DB-98A4-D942-BFC77170B7CC}"/>
+              </a:ext>
+            </a:extLst>
+          </p:cNvPr>
+          <p:cNvSpPr>
+            <a:spLocks noGrp="1"/>
+          </p:cNvSpPr>
+          <p:nvPr>
+            <p:ph type="title"/>
+          </p:nvPr>
+        </p:nvSpPr>
+        <p:spPr>
+          <a:xfrm>
+            <a:off x="1451579" y="804519"/>
+            <a:ext cx="9603275" cy="1049235"/>
+          </a:xfrm>
+        </p:spPr>
+        <p:txBody>
+          <a:bodyPr>
+            <a:normAutofit/>
+          </a:bodyPr>
+          <a:lstStyle/>
+          <a:p>
+            <a:r>
+              <a:rPr lang="en-US" dirty="0"/>
+              <a:t>Batch Normalization</a:t>
+            </a:r>
+          </a:p>
+        </p:txBody>
+      </p:sp>
+      <p:pic>
+        <p:nvPicPr>
+          <p:cNvPr id="2050" name="Picture 2">
+            <a:extLst>
+              <a:ext uri="{FF2B5EF4-FFF2-40B4-BE49-F238E27FC236}">
+                <a16:creationId xmlns:a16="http://schemas.microsoft.com/office/drawing/2014/main" id="{DACB7CF9-B17A-78F0-88AC-6F1FA8C4D4E2}"/>
+              </a:ext>
+            </a:extLst>
+          </p:cNvPr>
+          <p:cNvPicPr>
+            <a:picLocks noChangeAspect="1" noChangeArrowheads="1"/>
+          </p:cNvPicPr>
+          <p:nvPr/>
+        </p:nvPicPr>
+        <p:blipFill rotWithShape="1">
+          <a:blip r:embed="rId2">
+            <a:extLst>
+              <a:ext uri="{28A0092B-C50C-407E-A947-70E740481C1C}">
+                <a14:useLocalDpi xmlns:a14="http://schemas.microsoft.com/office/drawing/2010/main" val="0"/>
+              </a:ext>
+            </a:extLst>
+          </a:blip>
+          <a:srcRect l="15422"/>
+          <a:stretch/>
+        </p:blipFill>
+        <p:spPr bwMode="auto">
+          <a:xfrm>
+            <a:off x="1" y="1853754"/>
+            <a:ext cx="4902678" cy="2695444"/>
+          </a:xfrm>
+          <a:prstGeom prst="rect">
+            <a:avLst/>
+          </a:prstGeom>
+          <a:noFill/>
+          <a:extLst>
+            <a:ext uri="{909E8E84-426E-40DD-AFC4-6F175D3DCCD1}">
+              <a14:hiddenFill xmlns:a14="http://schemas.microsoft.com/office/drawing/2010/main">
+                <a:solidFill>
+                  <a:srgbClr val="FFFFFF"/>
+                </a:solidFill>
+              </a14:hiddenFill>
+            </a:ext>
+          </a:extLst>
+        </p:spPr>
+      </p:pic>
+      <p:sp>
+        <p:nvSpPr>
+          <p:cNvPr id="3" name="Content Placeholder 2">
+            <a:extLst>
+              <a:ext uri="{FF2B5EF4-FFF2-40B4-BE49-F238E27FC236}">
+                <a16:creationId xmlns:a16="http://schemas.microsoft.com/office/drawing/2014/main" id="{04C7B768-B788-7A3C-3953-7744E3C3FF4D}"/>
+              </a:ext>
+            </a:extLst>
+          </p:cNvPr>
+          <p:cNvSpPr>
+            <a:spLocks noGrp="1"/>
+          </p:cNvSpPr>
+          <p:nvPr>
+            <p:ph idx="1"/>
+          </p:nvPr>
+        </p:nvSpPr>
+        <p:spPr>
+          <a:xfrm>
+            <a:off x="5208609" y="1853754"/>
+            <a:ext cx="6983392" cy="4199727"/>
+          </a:xfrm>
+        </p:spPr>
+        <p:txBody>
+          <a:bodyPr>
+            <a:normAutofit/>
+          </a:bodyPr>
+          <a:lstStyle/>
+          <a:p>
+            <a:r>
+              <a:rPr lang="en-US" dirty="0"/>
+              <a:t>Another gradient maintaining technique is batch normalization. </a:t>
+            </a:r>
+          </a:p>
+          <a:p>
+            <a:r>
+              <a:rPr lang="en-US" dirty="0"/>
+              <a:t>Batch normalization will shift the distribution back to “the middle”, where gradients exist. </a:t>
+            </a:r>
+          </a:p>
+          <a:p>
+            <a:pPr lvl="1"/>
+            <a:r>
+              <a:rPr lang="en-US" dirty="0"/>
+              <a:t>“Flat” gradients may vanish – near 0/1 with sigmoid. </a:t>
+            </a:r>
+          </a:p>
+          <a:p>
+            <a:pPr lvl="1"/>
+            <a:r>
+              <a:rPr lang="en-US" dirty="0"/>
+              <a:t>In </a:t>
+            </a:r>
+            <a:r>
+              <a:rPr lang="en-US" dirty="0" err="1"/>
+              <a:t>relu</a:t>
+            </a:r>
+            <a:r>
+              <a:rPr lang="en-US" dirty="0"/>
+              <a:t>, may die and go negative where there’s no gradient. </a:t>
+            </a:r>
+          </a:p>
+          <a:p>
+            <a:r>
+              <a:rPr lang="en-US" dirty="0"/>
+              <a:t>Usually applied after dense layer, but can vary. </a:t>
+            </a:r>
+          </a:p>
+          <a:p>
+            <a:r>
+              <a:rPr lang="en-US" dirty="0"/>
+              <a:t>Can often allow higher learning rates to work.</a:t>
+            </a:r>
+          </a:p>
+          <a:p>
+            <a:r>
+              <a:rPr lang="en-US" dirty="0"/>
+              <a:t>Note: we should normalize normally still. </a:t>
+            </a:r>
+          </a:p>
+          <a:p>
+            <a:endParaRPr lang="en-US" dirty="0"/>
+          </a:p>
+        </p:txBody>
+      </p:sp>
+      <p:pic>
+        <p:nvPicPr>
+          <p:cNvPr id="4" name="Picture 3">
+            <a:extLst>
+              <a:ext uri="{FF2B5EF4-FFF2-40B4-BE49-F238E27FC236}">
+                <a16:creationId xmlns:a16="http://schemas.microsoft.com/office/drawing/2014/main" id="{365C0691-8F19-F627-1CEB-290C78CF3C16}"/>
+              </a:ext>
+            </a:extLst>
+          </p:cNvPr>
+          <p:cNvPicPr>
+            <a:picLocks noChangeAspect="1"/>
+          </p:cNvPicPr>
+          <p:nvPr/>
+        </p:nvPicPr>
+        <p:blipFill>
+          <a:blip r:embed="rId3"/>
+          <a:stretch>
+            <a:fillRect/>
+          </a:stretch>
+        </p:blipFill>
+        <p:spPr>
+          <a:xfrm>
+            <a:off x="0" y="4549198"/>
+            <a:ext cx="4317357" cy="2308802"/>
+          </a:xfrm>
+          <a:prstGeom prst="rect">
+            <a:avLst/>
+          </a:prstGeom>
+        </p:spPr>
+      </p:pic>
+    </p:spTree>
+    <p:extLst>
+      <p:ext uri="{BB962C8B-B14F-4D97-AF65-F5344CB8AC3E}">
+        <p14:creationId xmlns:p14="http://schemas.microsoft.com/office/powerpoint/2010/main" val="1687437132"/>
+      </p:ext>
+    </p:extLst>
+  </p:cSld>
+  <p:clrMapOvr>
+    <a:masterClrMapping/>
+  </p:clrMapOvr>
+</p:sld>
+</file>
+
+<file path=ppt/slides/slide3.xml><?xml version="1.0" encoding="utf-8"?>
+<p:sld xmlns:a="http://schemas.openxmlformats.org/drawingml/2006/main" xmlns:r="http://schemas.openxmlformats.org/officeDocument/2006/relationships" xmlns:p="http://schemas.openxmlformats.org/presentationml/2006/main">
+  <p:cSld>
+    <p:spTree>
+      <p:nvGrpSpPr>
+        <p:cNvPr id="1" name=""/>
+        <p:cNvGrpSpPr/>
+        <p:nvPr/>
+      </p:nvGrpSpPr>
+      <p:grpSpPr>
+        <a:xfrm>
+          <a:off x="0" y="0"/>
+          <a:ext cx="0" cy="0"/>
+          <a:chOff x="0" y="0"/>
+          <a:chExt cx="0" cy="0"/>
+        </a:xfrm>
+      </p:grpSpPr>
+      <p:sp>
+        <p:nvSpPr>
+          <p:cNvPr id="2" name="Title 1">
+            <a:extLst>
+              <a:ext uri="{FF2B5EF4-FFF2-40B4-BE49-F238E27FC236}">
+                <a16:creationId xmlns:a16="http://schemas.microsoft.com/office/drawing/2014/main" id="{C714B66D-AFB2-A3EE-5997-4D1F0B95FC89}"/>
+              </a:ext>
+            </a:extLst>
+          </p:cNvPr>
+          <p:cNvSpPr>
+            <a:spLocks noGrp="1"/>
+          </p:cNvSpPr>
+          <p:nvPr>
+            <p:ph type="title"/>
+          </p:nvPr>
+        </p:nvSpPr>
+        <p:spPr/>
+        <p:txBody>
+          <a:bodyPr/>
+          <a:lstStyle/>
+          <a:p>
+            <a:r>
+              <a:rPr lang="en-US" dirty="0"/>
+              <a:t>Project (Other Class) Stuff</a:t>
+            </a:r>
+          </a:p>
+        </p:txBody>
+      </p:sp>
+      <p:sp>
+        <p:nvSpPr>
+          <p:cNvPr id="3" name="Content Placeholder 2">
+            <a:extLst>
+              <a:ext uri="{FF2B5EF4-FFF2-40B4-BE49-F238E27FC236}">
+                <a16:creationId xmlns:a16="http://schemas.microsoft.com/office/drawing/2014/main" id="{20141979-88C3-CEA4-3B52-F2E898F296B1}"/>
+              </a:ext>
+            </a:extLst>
+          </p:cNvPr>
+          <p:cNvSpPr>
+            <a:spLocks noGrp="1"/>
+          </p:cNvSpPr>
+          <p:nvPr>
+            <p:ph idx="1"/>
+          </p:nvPr>
+        </p:nvSpPr>
+        <p:spPr>
+          <a:xfrm>
+            <a:off x="728663" y="1853754"/>
+            <a:ext cx="11058525" cy="4199727"/>
+          </a:xfrm>
+        </p:spPr>
+        <p:txBody>
+          <a:bodyPr>
+            <a:normAutofit/>
+          </a:bodyPr>
+          <a:lstStyle/>
+          <a:p>
+            <a:r>
+              <a:rPr lang="en-US" dirty="0"/>
+              <a:t>If you are still doing real estate, think about large scale feature construction. </a:t>
+            </a:r>
+          </a:p>
+          <a:p>
+            <a:r>
+              <a:rPr lang="en-US" dirty="0"/>
+              <a:t>You can make many features from latitude and longitude that may matter. </a:t>
+            </a:r>
+          </a:p>
+          <a:p>
+            <a:pPr lvl="1"/>
+            <a:r>
+              <a:rPr lang="en-US" dirty="0"/>
+              <a:t>I’d make a lot of them, since you have a lot of data, and let the model sort it out. </a:t>
+            </a:r>
+          </a:p>
+          <a:p>
+            <a:r>
+              <a:rPr lang="en-US" dirty="0"/>
+              <a:t>Directly calculable via spatial joins and spatial files you can find online (Google mapping/spatial/</a:t>
+            </a:r>
+            <a:r>
+              <a:rPr lang="en-US" dirty="0" err="1"/>
+              <a:t>gis</a:t>
+            </a:r>
+            <a:r>
+              <a:rPr lang="en-US" dirty="0"/>
+              <a:t>):</a:t>
+            </a:r>
+          </a:p>
+          <a:p>
+            <a:pPr lvl="1"/>
+            <a:r>
+              <a:rPr lang="en-US" dirty="0"/>
+              <a:t>Distance from almost anything – roads, schools, water, commerce, neighbors, etc.</a:t>
+            </a:r>
+          </a:p>
+          <a:p>
+            <a:pPr lvl="1"/>
+            <a:r>
+              <a:rPr lang="en-US" dirty="0"/>
+              <a:t>Stats – density, comparison to neighbors, trends, crime, construction, census data (wealth, education, etc.)</a:t>
+            </a:r>
+          </a:p>
+          <a:p>
+            <a:r>
+              <a:rPr lang="en-US" dirty="0"/>
+              <a:t>Calculable with potentially free services online – time to get places, real estate stuff, sun. </a:t>
+            </a:r>
+          </a:p>
+          <a:p>
+            <a:r>
+              <a:rPr lang="en-US" dirty="0"/>
+              <a:t>Possible with large scale scraping – real estate data, all kinds of other stuff. </a:t>
+            </a:r>
+          </a:p>
+          <a:p>
+            <a:r>
+              <a:rPr lang="en-US" dirty="0"/>
+              <a:t>I’d try to cast as wide a net as possible and get almost anything I could automate as a start. </a:t>
+            </a:r>
+          </a:p>
+        </p:txBody>
+      </p:sp>
+    </p:spTree>
+    <p:extLst>
+      <p:ext uri="{BB962C8B-B14F-4D97-AF65-F5344CB8AC3E}">
+        <p14:creationId xmlns:p14="http://schemas.microsoft.com/office/powerpoint/2010/main" val="3300512849"/>
+      </p:ext>
+    </p:extLst>
+  </p:cSld>
+  <p:clrMapOvr>
+    <a:masterClrMapping/>
+  </p:clrMapOvr>
+</p:sld>
+</file>
+
+<file path=ppt/slides/slide30.xml><?xml version="1.0" encoding="utf-8"?>
+<p:sld xmlns:a="http://schemas.openxmlformats.org/drawingml/2006/main" xmlns:r="http://schemas.openxmlformats.org/officeDocument/2006/relationships" xmlns:p="http://schemas.openxmlformats.org/presentationml/2006/main">
+  <p:cSld>
+    <p:spTree>
+      <p:nvGrpSpPr>
+        <p:cNvPr id="1" name=""/>
+        <p:cNvGrpSpPr/>
+        <p:nvPr/>
+      </p:nvGrpSpPr>
+      <p:grpSpPr>
+        <a:xfrm>
+          <a:off x="0" y="0"/>
+          <a:ext cx="0" cy="0"/>
+          <a:chOff x="0" y="0"/>
+          <a:chExt cx="0" cy="0"/>
+        </a:xfrm>
+      </p:grpSpPr>
+      <p:sp>
+        <p:nvSpPr>
+          <p:cNvPr id="2" name="Title 1">
+            <a:extLst>
+              <a:ext uri="{FF2B5EF4-FFF2-40B4-BE49-F238E27FC236}">
+                <a16:creationId xmlns:a16="http://schemas.microsoft.com/office/drawing/2014/main" id="{12EB02ED-4B2D-A4D0-9A1B-F5D886A1D4DA}"/>
+              </a:ext>
+            </a:extLst>
+          </p:cNvPr>
+          <p:cNvSpPr>
+            <a:spLocks noGrp="1"/>
+          </p:cNvSpPr>
+          <p:nvPr>
+            <p:ph type="title"/>
+          </p:nvPr>
+        </p:nvSpPr>
+        <p:spPr/>
+        <p:txBody>
+          <a:bodyPr/>
+          <a:lstStyle/>
+          <a:p>
+            <a:endParaRPr lang="en-US"/>
+          </a:p>
+        </p:txBody>
+      </p:sp>
+      <p:sp>
+        <p:nvSpPr>
+          <p:cNvPr id="3" name="Content Placeholder 2">
+            <a:extLst>
+              <a:ext uri="{FF2B5EF4-FFF2-40B4-BE49-F238E27FC236}">
+                <a16:creationId xmlns:a16="http://schemas.microsoft.com/office/drawing/2014/main" id="{79262A70-7FB5-F2DE-F3DF-7165887D447B}"/>
+              </a:ext>
+            </a:extLst>
+          </p:cNvPr>
+          <p:cNvSpPr>
+            <a:spLocks noGrp="1"/>
+          </p:cNvSpPr>
+          <p:nvPr>
+            <p:ph idx="1"/>
+          </p:nvPr>
+        </p:nvSpPr>
+        <p:spPr/>
+        <p:txBody>
+          <a:bodyPr/>
+          <a:lstStyle/>
+          <a:p>
+            <a:endParaRPr lang="en-US"/>
+          </a:p>
+        </p:txBody>
+      </p:sp>
+      <p:pic>
+        <p:nvPicPr>
+          <p:cNvPr id="4098" name="Picture 2">
+            <a:extLst>
+              <a:ext uri="{FF2B5EF4-FFF2-40B4-BE49-F238E27FC236}">
+                <a16:creationId xmlns:a16="http://schemas.microsoft.com/office/drawing/2014/main" id="{2C2DDD5C-391D-91D2-A435-8110CC33187B}"/>
+              </a:ext>
+            </a:extLst>
+          </p:cNvPr>
+          <p:cNvPicPr>
+            <a:picLocks noChangeAspect="1" noChangeArrowheads="1"/>
+          </p:cNvPicPr>
+          <p:nvPr/>
+        </p:nvPicPr>
+        <p:blipFill>
+          <a:blip r:embed="rId2">
+            <a:extLst>
+              <a:ext uri="{28A0092B-C50C-407E-A947-70E740481C1C}">
+                <a14:useLocalDpi xmlns:a14="http://schemas.microsoft.com/office/drawing/2010/main" val="0"/>
+              </a:ext>
+            </a:extLst>
+          </a:blip>
+          <a:srcRect/>
+          <a:stretch>
+            <a:fillRect/>
+          </a:stretch>
+        </p:blipFill>
+        <p:spPr bwMode="auto">
+          <a:xfrm>
+            <a:off x="0" y="1400175"/>
+            <a:ext cx="12192000" cy="4057650"/>
+          </a:xfrm>
+          <a:prstGeom prst="rect">
+            <a:avLst/>
+          </a:prstGeom>
+          <a:noFill/>
+          <a:extLst>
+            <a:ext uri="{909E8E84-426E-40DD-AFC4-6F175D3DCCD1}">
+              <a14:hiddenFill xmlns:a14="http://schemas.microsoft.com/office/drawing/2010/main">
+                <a:solidFill>
+                  <a:srgbClr val="FFFFFF"/>
+                </a:solidFill>
+              </a14:hiddenFill>
+            </a:ext>
+          </a:extLst>
+        </p:spPr>
+      </p:pic>
+    </p:spTree>
+    <p:extLst>
+      <p:ext uri="{BB962C8B-B14F-4D97-AF65-F5344CB8AC3E}">
+        <p14:creationId xmlns:p14="http://schemas.microsoft.com/office/powerpoint/2010/main" val="3011999725"/>
+      </p:ext>
+    </p:extLst>
+  </p:cSld>
+  <p:clrMapOvr>
+    <a:masterClrMapping/>
+  </p:clrMapOvr>
+</p:sld>
+</file>
+
+<file path=ppt/slides/slide31.xml><?xml version="1.0" encoding="utf-8"?>
+<p:sld xmlns:a="http://schemas.openxmlformats.org/drawingml/2006/main" xmlns:r="http://schemas.openxmlformats.org/officeDocument/2006/relationships" xmlns:p="http://schemas.openxmlformats.org/presentationml/2006/main">
+  <p:cSld>
+    <p:spTree>
+      <p:nvGrpSpPr>
+        <p:cNvPr id="1" name=""/>
+        <p:cNvGrpSpPr/>
+        <p:nvPr/>
+      </p:nvGrpSpPr>
+      <p:grpSpPr>
+        <a:xfrm>
+          <a:off x="0" y="0"/>
+          <a:ext cx="0" cy="0"/>
+          <a:chOff x="0" y="0"/>
+          <a:chExt cx="0" cy="0"/>
+        </a:xfrm>
+      </p:grpSpPr>
+      <p:sp>
+        <p:nvSpPr>
+          <p:cNvPr id="2" name="Title 1">
+            <a:extLst>
+              <a:ext uri="{FF2B5EF4-FFF2-40B4-BE49-F238E27FC236}">
+                <a16:creationId xmlns:a16="http://schemas.microsoft.com/office/drawing/2014/main" id="{8AB3D8A8-1279-C44F-AB18-28BCD74E016C}"/>
+              </a:ext>
+            </a:extLst>
+          </p:cNvPr>
+          <p:cNvSpPr>
+            <a:spLocks noGrp="1"/>
+          </p:cNvSpPr>
+          <p:nvPr>
+            <p:ph type="title"/>
+          </p:nvPr>
+        </p:nvSpPr>
+        <p:spPr/>
+        <p:txBody>
+          <a:bodyPr/>
+          <a:lstStyle/>
+          <a:p>
+            <a:r>
+              <a:rPr lang="en-US" dirty="0"/>
+              <a:t>Initialization </a:t>
+            </a:r>
+          </a:p>
+        </p:txBody>
+      </p:sp>
+      <p:sp>
+        <p:nvSpPr>
+          <p:cNvPr id="3" name="Content Placeholder 2">
+            <a:extLst>
+              <a:ext uri="{FF2B5EF4-FFF2-40B4-BE49-F238E27FC236}">
+                <a16:creationId xmlns:a16="http://schemas.microsoft.com/office/drawing/2014/main" id="{E6932690-B733-C245-A962-ECCC4BCA3B54}"/>
+              </a:ext>
+            </a:extLst>
+          </p:cNvPr>
+          <p:cNvSpPr>
+            <a:spLocks noGrp="1"/>
+          </p:cNvSpPr>
+          <p:nvPr>
+            <p:ph idx="1"/>
+          </p:nvPr>
+        </p:nvSpPr>
+        <p:spPr>
+          <a:xfrm>
+            <a:off x="1451579" y="1853754"/>
+            <a:ext cx="9603275" cy="4199727"/>
+          </a:xfrm>
+        </p:spPr>
+        <p:txBody>
+          <a:bodyPr>
+            <a:normAutofit lnSpcReduction="10000"/>
+          </a:bodyPr>
+          <a:lstStyle/>
+          <a:p>
+            <a:r>
+              <a:rPr lang="en-US" dirty="0"/>
+              <a:t>Initialization controls how the weight and bias values start. </a:t>
+            </a:r>
+          </a:p>
+          <a:p>
+            <a:r>
+              <a:rPr lang="en-US" dirty="0"/>
+              <a:t>Can be controlled via a parameter for each layer:</a:t>
+            </a:r>
+          </a:p>
+          <a:p>
+            <a:pPr lvl="1"/>
+            <a:r>
+              <a:rPr lang="en-US" dirty="0"/>
+              <a:t>Weight initialization is by default is “</a:t>
+            </a:r>
+            <a:r>
+              <a:rPr lang="en-US" dirty="0" err="1"/>
+              <a:t>glorot_uniform</a:t>
+            </a:r>
+            <a:r>
+              <a:rPr lang="en-US" dirty="0"/>
+              <a:t>” – a variety of random. </a:t>
+            </a:r>
+          </a:p>
+          <a:p>
+            <a:pPr lvl="1"/>
+            <a:r>
+              <a:rPr lang="en-US" dirty="0"/>
+              <a:t>Bias initialization defaults to 0. </a:t>
+            </a:r>
+          </a:p>
+          <a:p>
+            <a:pPr lvl="1"/>
+            <a:r>
+              <a:rPr lang="en-US" dirty="0"/>
+              <a:t>We can preset the output layer with the log of the expectation (for logit). </a:t>
+            </a:r>
+          </a:p>
+          <a:p>
+            <a:r>
+              <a:rPr lang="en-US" dirty="0"/>
+              <a:t>This can help the model train – both in speed and potential for convergence. </a:t>
+            </a:r>
+          </a:p>
+          <a:p>
+            <a:r>
+              <a:rPr lang="en-US" dirty="0"/>
+              <a:t>Imbalanced data – the data has a “bias” to start with. </a:t>
+            </a:r>
+          </a:p>
+          <a:p>
+            <a:pPr lvl="1"/>
+            <a:r>
+              <a:rPr lang="en-US" dirty="0"/>
+              <a:t>Set bias on output layer to the bias in the data. </a:t>
+            </a:r>
+          </a:p>
+          <a:p>
+            <a:pPr lvl="1"/>
+            <a:r>
+              <a:rPr lang="en-US" dirty="0"/>
+              <a:t>Network doesn’t need to learn the massive shift in bias. </a:t>
+            </a:r>
+          </a:p>
+          <a:p>
+            <a:pPr lvl="1"/>
+            <a:r>
+              <a:rPr lang="en-US" dirty="0"/>
+              <a:t>Faster convergence and more accuracy. </a:t>
+            </a:r>
+          </a:p>
+          <a:p>
+            <a:endParaRPr lang="en-US" dirty="0"/>
+          </a:p>
+        </p:txBody>
+      </p:sp>
+    </p:spTree>
+    <p:extLst>
+      <p:ext uri="{BB962C8B-B14F-4D97-AF65-F5344CB8AC3E}">
+        <p14:creationId xmlns:p14="http://schemas.microsoft.com/office/powerpoint/2010/main" val="2996444863"/>
+      </p:ext>
+    </p:extLst>
+  </p:cSld>
+  <p:clrMapOvr>
+    <a:masterClrMapping/>
+  </p:clrMapOvr>
+</p:sld>
+</file>
+
+<file path=ppt/slides/slide32.xml><?xml version="1.0" encoding="utf-8"?>
+<p:sld xmlns:a="http://schemas.openxmlformats.org/drawingml/2006/main" xmlns:r="http://schemas.openxmlformats.org/officeDocument/2006/relationships" xmlns:p="http://schemas.openxmlformats.org/presentationml/2006/main">
+  <p:cSld>
+    <p:spTree>
+      <p:nvGrpSpPr>
+        <p:cNvPr id="1" name=""/>
+        <p:cNvGrpSpPr/>
+        <p:nvPr/>
+      </p:nvGrpSpPr>
+      <p:grpSpPr>
+        <a:xfrm>
+          <a:off x="0" y="0"/>
+          <a:ext cx="0" cy="0"/>
+          <a:chOff x="0" y="0"/>
+          <a:chExt cx="0" cy="0"/>
+        </a:xfrm>
+      </p:grpSpPr>
+      <p:sp>
+        <p:nvSpPr>
+          <p:cNvPr id="2" name="Title 1">
+            <a:extLst>
+              <a:ext uri="{FF2B5EF4-FFF2-40B4-BE49-F238E27FC236}">
+                <a16:creationId xmlns:a16="http://schemas.microsoft.com/office/drawing/2014/main" id="{8E701F95-B618-A7AB-FF6B-7AF73C21932E}"/>
+              </a:ext>
+            </a:extLst>
+          </p:cNvPr>
+          <p:cNvSpPr>
+            <a:spLocks noGrp="1"/>
+          </p:cNvSpPr>
+          <p:nvPr>
+            <p:ph type="title"/>
+          </p:nvPr>
+        </p:nvSpPr>
+        <p:spPr/>
+        <p:txBody>
+          <a:bodyPr/>
+          <a:lstStyle/>
+          <a:p>
+            <a:r>
+              <a:rPr lang="en-US" dirty="0"/>
+              <a:t>Refresher - regularization</a:t>
+            </a:r>
+          </a:p>
+        </p:txBody>
+      </p:sp>
+      <p:sp>
+        <p:nvSpPr>
+          <p:cNvPr id="3" name="Content Placeholder 2">
+            <a:extLst>
+              <a:ext uri="{FF2B5EF4-FFF2-40B4-BE49-F238E27FC236}">
+                <a16:creationId xmlns:a16="http://schemas.microsoft.com/office/drawing/2014/main" id="{2E156C3E-5CAF-F8A6-E7F0-120D8C6CAFA5}"/>
+              </a:ext>
+            </a:extLst>
+          </p:cNvPr>
+          <p:cNvSpPr>
+            <a:spLocks noGrp="1"/>
+          </p:cNvSpPr>
+          <p:nvPr>
+            <p:ph idx="1"/>
+          </p:nvPr>
+        </p:nvSpPr>
+        <p:spPr>
+          <a:xfrm>
+            <a:off x="1451579" y="1853755"/>
+            <a:ext cx="9603275" cy="2265242"/>
+          </a:xfrm>
+        </p:spPr>
+        <p:txBody>
+          <a:bodyPr/>
+          <a:lstStyle/>
+          <a:p>
+            <a:r>
+              <a:rPr lang="en-US" dirty="0"/>
+              <a:t>We frequently/typically use some regularization in our models. </a:t>
+            </a:r>
+          </a:p>
+          <a:p>
+            <a:pPr lvl="1"/>
+            <a:r>
+              <a:rPr lang="en-US" dirty="0"/>
+              <a:t>Semi-standard as neural networks are large and flexible, and this constrains overfit. </a:t>
+            </a:r>
+          </a:p>
+          <a:p>
+            <a:pPr lvl="1"/>
+            <a:r>
+              <a:rPr lang="en-US" dirty="0"/>
+              <a:t>L1/L2 – works just as in regression, can be applied in layer as a hyperparameter. </a:t>
+            </a:r>
+          </a:p>
+          <a:p>
+            <a:pPr lvl="1"/>
+            <a:r>
+              <a:rPr lang="en-US" dirty="0"/>
+              <a:t>Dropout – removes some percentage of neurons randomly each batch of </a:t>
+            </a:r>
+            <a:r>
+              <a:rPr lang="en-US" b="1" dirty="0"/>
+              <a:t>training</a:t>
+            </a:r>
+            <a:r>
+              <a:rPr lang="en-US" dirty="0"/>
+              <a:t>, forcing learning to occur on the remainder. Applied as a layer, typically round 20—40% to start. </a:t>
+            </a:r>
+          </a:p>
+        </p:txBody>
+      </p:sp>
+      <p:pic>
+        <p:nvPicPr>
+          <p:cNvPr id="12290" name="Picture 2" descr="An illustration of the dropout mechanism within a multi-layer neural... |  Download Scientific Diagram">
+            <a:extLst>
+              <a:ext uri="{FF2B5EF4-FFF2-40B4-BE49-F238E27FC236}">
+                <a16:creationId xmlns:a16="http://schemas.microsoft.com/office/drawing/2014/main" id="{2AB7688B-0AD0-F5E0-0253-193C85677D34}"/>
+              </a:ext>
+            </a:extLst>
+          </p:cNvPr>
+          <p:cNvPicPr>
+            <a:picLocks noChangeAspect="1" noChangeArrowheads="1"/>
+          </p:cNvPicPr>
+          <p:nvPr/>
+        </p:nvPicPr>
+        <p:blipFill>
+          <a:blip r:embed="rId2">
+            <a:extLst>
+              <a:ext uri="{28A0092B-C50C-407E-A947-70E740481C1C}">
+                <a14:useLocalDpi xmlns:a14="http://schemas.microsoft.com/office/drawing/2010/main" val="0"/>
+              </a:ext>
+            </a:extLst>
+          </a:blip>
+          <a:srcRect/>
+          <a:stretch>
+            <a:fillRect/>
+          </a:stretch>
+        </p:blipFill>
+        <p:spPr bwMode="auto">
+          <a:xfrm>
+            <a:off x="1621461" y="3838427"/>
+            <a:ext cx="8949078" cy="2905818"/>
+          </a:xfrm>
+          <a:prstGeom prst="rect">
+            <a:avLst/>
+          </a:prstGeom>
+          <a:noFill/>
+          <a:extLst>
+            <a:ext uri="{909E8E84-426E-40DD-AFC4-6F175D3DCCD1}">
+              <a14:hiddenFill xmlns:a14="http://schemas.microsoft.com/office/drawing/2010/main">
+                <a:solidFill>
+                  <a:srgbClr val="FFFFFF"/>
+                </a:solidFill>
+              </a14:hiddenFill>
+            </a:ext>
+          </a:extLst>
+        </p:spPr>
+      </p:pic>
+    </p:spTree>
+    <p:extLst>
+      <p:ext uri="{BB962C8B-B14F-4D97-AF65-F5344CB8AC3E}">
+        <p14:creationId xmlns:p14="http://schemas.microsoft.com/office/powerpoint/2010/main" val="3865647208"/>
+      </p:ext>
+    </p:extLst>
+  </p:cSld>
+  <p:clrMapOvr>
+    <a:masterClrMapping/>
+  </p:clrMapOvr>
+</p:sld>
+</file>
+
+<file path=ppt/slides/slide33.xml><?xml version="1.0" encoding="utf-8"?>
+<p:sld xmlns:a="http://schemas.openxmlformats.org/drawingml/2006/main" xmlns:r="http://schemas.openxmlformats.org/officeDocument/2006/relationships" xmlns:p="http://schemas.openxmlformats.org/presentationml/2006/main">
+  <p:cSld>
+    <p:spTree>
+      <p:nvGrpSpPr>
+        <p:cNvPr id="1" name=""/>
+        <p:cNvGrpSpPr/>
+        <p:nvPr/>
+      </p:nvGrpSpPr>
+      <p:grpSpPr>
+        <a:xfrm>
+          <a:off x="0" y="0"/>
+          <a:ext cx="0" cy="0"/>
+          <a:chOff x="0" y="0"/>
+          <a:chExt cx="0" cy="0"/>
+        </a:xfrm>
+      </p:grpSpPr>
+      <p:sp>
+        <p:nvSpPr>
+          <p:cNvPr id="2" name="Title 1">
+            <a:extLst>
+              <a:ext uri="{FF2B5EF4-FFF2-40B4-BE49-F238E27FC236}">
+                <a16:creationId xmlns:a16="http://schemas.microsoft.com/office/drawing/2014/main" id="{998811FD-FB04-14C3-51B0-20806479A3B8}"/>
+              </a:ext>
+            </a:extLst>
+          </p:cNvPr>
+          <p:cNvSpPr>
+            <a:spLocks noGrp="1"/>
+          </p:cNvSpPr>
+          <p:nvPr>
+            <p:ph type="title"/>
+          </p:nvPr>
+        </p:nvSpPr>
+        <p:spPr/>
+        <p:txBody>
+          <a:bodyPr/>
+          <a:lstStyle/>
+          <a:p>
+            <a:r>
+              <a:rPr lang="en-US" dirty="0"/>
+              <a:t>Neural Networks are Flexible</a:t>
+            </a:r>
+          </a:p>
+        </p:txBody>
+      </p:sp>
+      <p:sp>
+        <p:nvSpPr>
+          <p:cNvPr id="3" name="Content Placeholder 2">
+            <a:extLst>
+              <a:ext uri="{FF2B5EF4-FFF2-40B4-BE49-F238E27FC236}">
+                <a16:creationId xmlns:a16="http://schemas.microsoft.com/office/drawing/2014/main" id="{F27F93CB-38CB-BCDC-EB9C-1D1A84E32F49}"/>
+              </a:ext>
+            </a:extLst>
+          </p:cNvPr>
+          <p:cNvSpPr>
+            <a:spLocks noGrp="1"/>
+          </p:cNvSpPr>
+          <p:nvPr>
+            <p:ph idx="1"/>
+          </p:nvPr>
+        </p:nvSpPr>
+        <p:spPr>
+          <a:xfrm>
+            <a:off x="1451579" y="1853754"/>
+            <a:ext cx="9603275" cy="4199727"/>
+          </a:xfrm>
+        </p:spPr>
+        <p:txBody>
+          <a:bodyPr/>
+          <a:lstStyle/>
+          <a:p>
+            <a:r>
+              <a:rPr lang="en-US" dirty="0"/>
+              <a:t>This isn’t near all of the things that we can change in a neural network. </a:t>
+            </a:r>
+          </a:p>
+          <a:p>
+            <a:r>
+              <a:rPr lang="en-US" dirty="0"/>
+              <a:t>The flexibility in their learning as they grow means that a wide range of models that are ‘good enough’ will converge on a good solution. </a:t>
+            </a:r>
+          </a:p>
+          <a:p>
+            <a:pPr lvl="1"/>
+            <a:r>
+              <a:rPr lang="en-US" dirty="0"/>
+              <a:t>E.g. the image competition has models with widely different structures fighting for fractions of a percentage of accuracy in a task. </a:t>
+            </a:r>
+          </a:p>
+          <a:p>
+            <a:r>
+              <a:rPr lang="en-US" dirty="0"/>
+              <a:t>Mirror something that is known to work, unless experimenting (which is good). </a:t>
+            </a:r>
+          </a:p>
+          <a:p>
+            <a:r>
+              <a:rPr lang="en-US" dirty="0"/>
+              <a:t>Make reasonable choices, add some excess, regularization, and early stopping, let train. </a:t>
+            </a:r>
+          </a:p>
+          <a:p>
+            <a:pPr lvl="1"/>
+            <a:r>
+              <a:rPr lang="en-US" dirty="0"/>
+              <a:t>Adjust from here based on what you see. </a:t>
+            </a:r>
+          </a:p>
+          <a:p>
+            <a:r>
+              <a:rPr lang="en-US" dirty="0"/>
+              <a:t>Finding the perfect configuration as we did with a grid becomes time impractical quickly. </a:t>
+            </a:r>
+          </a:p>
+        </p:txBody>
+      </p:sp>
+    </p:spTree>
+    <p:extLst>
+      <p:ext uri="{BB962C8B-B14F-4D97-AF65-F5344CB8AC3E}">
+        <p14:creationId xmlns:p14="http://schemas.microsoft.com/office/powerpoint/2010/main" val="2910667997"/>
+      </p:ext>
+    </p:extLst>
+  </p:cSld>
+  <p:clrMapOvr>
+    <a:masterClrMapping/>
+  </p:clrMapOvr>
+</p:sld>
+</file>
+
+<file path=ppt/slides/slide34.xml><?xml version="1.0" encoding="utf-8"?>
+<p:sld xmlns:a="http://schemas.openxmlformats.org/drawingml/2006/main" xmlns:r="http://schemas.openxmlformats.org/officeDocument/2006/relationships" xmlns:p="http://schemas.openxmlformats.org/presentationml/2006/main" show="0">
+  <p:cSld>
+    <p:spTree>
+      <p:nvGrpSpPr>
+        <p:cNvPr id="1" name=""/>
+        <p:cNvGrpSpPr/>
+        <p:nvPr/>
+      </p:nvGrpSpPr>
+      <p:grpSpPr>
+        <a:xfrm>
+          <a:off x="0" y="0"/>
+          <a:ext cx="0" cy="0"/>
+          <a:chOff x="0" y="0"/>
+          <a:chExt cx="0" cy="0"/>
+        </a:xfrm>
+      </p:grpSpPr>
+      <p:sp>
+        <p:nvSpPr>
+          <p:cNvPr id="2" name="Title 1">
+            <a:extLst>
+              <a:ext uri="{FF2B5EF4-FFF2-40B4-BE49-F238E27FC236}">
+                <a16:creationId xmlns:a16="http://schemas.microsoft.com/office/drawing/2014/main" id="{EAF056FD-E697-5353-97FE-84FF67ABB289}"/>
+              </a:ext>
+            </a:extLst>
+          </p:cNvPr>
+          <p:cNvSpPr>
+            <a:spLocks noGrp="1"/>
+          </p:cNvSpPr>
+          <p:nvPr>
+            <p:ph type="title"/>
+          </p:nvPr>
+        </p:nvSpPr>
+        <p:spPr/>
+        <p:txBody>
+          <a:bodyPr/>
+          <a:lstStyle/>
+          <a:p>
+            <a:r>
+              <a:rPr lang="en-US" dirty="0"/>
+              <a:t>Other Tuning - Optimization</a:t>
+            </a:r>
+          </a:p>
+        </p:txBody>
+      </p:sp>
+      <p:sp>
+        <p:nvSpPr>
+          <p:cNvPr id="3" name="Content Placeholder 2">
+            <a:extLst>
+              <a:ext uri="{FF2B5EF4-FFF2-40B4-BE49-F238E27FC236}">
+                <a16:creationId xmlns:a16="http://schemas.microsoft.com/office/drawing/2014/main" id="{F044C5EC-E837-8A77-86C7-0C127E9A7BD8}"/>
+              </a:ext>
+            </a:extLst>
+          </p:cNvPr>
+          <p:cNvSpPr>
+            <a:spLocks noGrp="1"/>
+          </p:cNvSpPr>
+          <p:nvPr>
+            <p:ph idx="1"/>
+          </p:nvPr>
+        </p:nvSpPr>
+        <p:spPr>
+          <a:xfrm>
+            <a:off x="1451579" y="1853754"/>
+            <a:ext cx="9603275" cy="4199727"/>
+          </a:xfrm>
+        </p:spPr>
+        <p:txBody>
+          <a:bodyPr/>
+          <a:lstStyle/>
+          <a:p>
+            <a:r>
+              <a:rPr lang="en-US" dirty="0"/>
+              <a:t>There are a huge number of things that can be changed to tune a neural network model. </a:t>
+            </a:r>
+          </a:p>
+          <a:p>
+            <a:r>
+              <a:rPr lang="en-US" dirty="0"/>
+              <a:t>We are focusing mainly on the ‘structure’ type of things. </a:t>
+            </a:r>
+          </a:p>
+          <a:p>
+            <a:pPr lvl="1"/>
+            <a:r>
+              <a:rPr lang="en-US" dirty="0"/>
+              <a:t>Network size, layers, type, hyperparameters, regularizing (and similar) layers like normalization.</a:t>
+            </a:r>
+          </a:p>
+          <a:p>
+            <a:r>
+              <a:rPr lang="en-US" dirty="0"/>
+              <a:t>We are not really focusing on the optimization part - loss/gradient descent specific things. </a:t>
+            </a:r>
+          </a:p>
+          <a:p>
+            <a:pPr lvl="1"/>
+            <a:r>
+              <a:rPr lang="en-US" dirty="0"/>
+              <a:t>Learning rates, momentum, optimizers. </a:t>
+            </a:r>
+          </a:p>
+          <a:p>
+            <a:pPr lvl="1"/>
+            <a:r>
+              <a:rPr lang="en-US" dirty="0"/>
+              <a:t>This matters, but is more theoretical in theory, and scenario dependent in practice. </a:t>
+            </a:r>
+          </a:p>
+          <a:p>
+            <a:pPr lvl="1"/>
+            <a:r>
+              <a:rPr lang="en-US" dirty="0"/>
+              <a:t>Optimization is critical as problems get larger – converging quickly, or at all, can be hard. </a:t>
+            </a:r>
+          </a:p>
+          <a:p>
+            <a:r>
+              <a:rPr lang="en-US" dirty="0"/>
+              <a:t>For our usage, we can mainly try different learning rates, if needed. </a:t>
+            </a:r>
+          </a:p>
+        </p:txBody>
+      </p:sp>
+    </p:spTree>
+    <p:extLst>
+      <p:ext uri="{BB962C8B-B14F-4D97-AF65-F5344CB8AC3E}">
+        <p14:creationId xmlns:p14="http://schemas.microsoft.com/office/powerpoint/2010/main" val="1149088017"/>
+      </p:ext>
+    </p:extLst>
+  </p:cSld>
+  <p:clrMapOvr>
+    <a:masterClrMapping/>
+  </p:clrMapOvr>
+</p:sld>
+</file>
+
+<file path=ppt/slides/slide35.xml><?xml version="1.0" encoding="utf-8"?>
+<p:sld xmlns:a="http://schemas.openxmlformats.org/drawingml/2006/main" xmlns:r="http://schemas.openxmlformats.org/officeDocument/2006/relationships" xmlns:p="http://schemas.openxmlformats.org/presentationml/2006/main">
+  <p:cSld>
+    <p:spTree>
+      <p:nvGrpSpPr>
+        <p:cNvPr id="1" name=""/>
+        <p:cNvGrpSpPr/>
+        <p:nvPr/>
+      </p:nvGrpSpPr>
+      <p:grpSpPr>
+        <a:xfrm>
+          <a:off x="0" y="0"/>
+          <a:ext cx="0" cy="0"/>
+          <a:chOff x="0" y="0"/>
+          <a:chExt cx="0" cy="0"/>
+        </a:xfrm>
+      </p:grpSpPr>
+      <p:sp>
+        <p:nvSpPr>
+          <p:cNvPr id="2" name="Title 1">
+            <a:extLst>
+              <a:ext uri="{FF2B5EF4-FFF2-40B4-BE49-F238E27FC236}">
+                <a16:creationId xmlns:a16="http://schemas.microsoft.com/office/drawing/2014/main" id="{2D76F3B6-86DB-FFF0-6350-C1AA19E15476}"/>
+              </a:ext>
+            </a:extLst>
+          </p:cNvPr>
+          <p:cNvSpPr>
+            <a:spLocks noGrp="1"/>
+          </p:cNvSpPr>
+          <p:nvPr>
+            <p:ph type="title"/>
+          </p:nvPr>
+        </p:nvSpPr>
+        <p:spPr/>
+        <p:txBody>
+          <a:bodyPr/>
+          <a:lstStyle/>
+          <a:p>
+            <a:r>
+              <a:rPr lang="en-US" dirty="0"/>
+              <a:t>Tuning From A Loss Plot</a:t>
+            </a:r>
+          </a:p>
+        </p:txBody>
+      </p:sp>
+      <p:sp>
+        <p:nvSpPr>
+          <p:cNvPr id="3" name="Content Placeholder 2">
+            <a:extLst>
+              <a:ext uri="{FF2B5EF4-FFF2-40B4-BE49-F238E27FC236}">
+                <a16:creationId xmlns:a16="http://schemas.microsoft.com/office/drawing/2014/main" id="{915E008A-9A08-A25F-5145-ECD1F6B212D2}"/>
+              </a:ext>
+            </a:extLst>
+          </p:cNvPr>
+          <p:cNvSpPr>
+            <a:spLocks noGrp="1"/>
+          </p:cNvSpPr>
+          <p:nvPr>
+            <p:ph idx="1"/>
+          </p:nvPr>
+        </p:nvSpPr>
+        <p:spPr>
+          <a:xfrm>
+            <a:off x="1451579" y="1853754"/>
+            <a:ext cx="9603275" cy="4199727"/>
+          </a:xfrm>
+        </p:spPr>
+        <p:txBody>
+          <a:bodyPr/>
+          <a:lstStyle/>
+          <a:p>
+            <a:r>
+              <a:rPr lang="en-US" dirty="0"/>
+              <a:t>The loss plot is our main, but not only, tool to help tune a model. </a:t>
+            </a:r>
+          </a:p>
+          <a:p>
+            <a:r>
+              <a:rPr lang="en-US" dirty="0"/>
+              <a:t>None of these things are definitive, but there are things that happen often that we can look at first for a possible solution. </a:t>
+            </a:r>
+          </a:p>
+          <a:p>
+            <a:r>
+              <a:rPr lang="en-US" dirty="0"/>
+              <a:t>In neural networks, we must weigh against computation time – defaults are usually fast.</a:t>
+            </a:r>
+          </a:p>
+          <a:p>
+            <a:r>
+              <a:rPr lang="en-US" dirty="0"/>
+              <a:t>Some general things:</a:t>
+            </a:r>
+          </a:p>
+          <a:p>
+            <a:pPr lvl="1"/>
+            <a:r>
+              <a:rPr lang="en-US" dirty="0"/>
+              <a:t>Make sure that data is scaled. </a:t>
+            </a:r>
+          </a:p>
+          <a:p>
+            <a:pPr lvl="1"/>
+            <a:r>
+              <a:rPr lang="en-US" dirty="0"/>
+              <a:t>More complex relationships perform better with more layers. </a:t>
+            </a:r>
+          </a:p>
+          <a:p>
+            <a:pPr lvl="1"/>
+            <a:r>
+              <a:rPr lang="en-US" dirty="0"/>
+              <a:t>The more data you have, the larger a model you’ll be able to train well. </a:t>
+            </a:r>
+          </a:p>
+          <a:p>
+            <a:pPr lvl="1"/>
+            <a:r>
+              <a:rPr lang="en-US" dirty="0"/>
+              <a:t>Unless there’s a time constraint, let things go for lots of epochs and use early stopping. </a:t>
+            </a:r>
+          </a:p>
+        </p:txBody>
+      </p:sp>
+    </p:spTree>
+    <p:extLst>
+      <p:ext uri="{BB962C8B-B14F-4D97-AF65-F5344CB8AC3E}">
+        <p14:creationId xmlns:p14="http://schemas.microsoft.com/office/powerpoint/2010/main" val="545948356"/>
+      </p:ext>
+    </p:extLst>
+  </p:cSld>
+  <p:clrMapOvr>
+    <a:masterClrMapping/>
+  </p:clrMapOvr>
+</p:sld>
+</file>
+
+<file path=ppt/slides/slide36.xml><?xml version="1.0" encoding="utf-8"?>
+<p:sld xmlns:a="http://schemas.openxmlformats.org/drawingml/2006/main" xmlns:r="http://schemas.openxmlformats.org/officeDocument/2006/relationships" xmlns:p="http://schemas.openxmlformats.org/presentationml/2006/main">
+  <p:cSld>
+    <p:bg>
+      <p:bgPr>
+        <a:gradFill rotWithShape="1">
+          <a:gsLst>
+            <a:gs pos="0">
+              <a:schemeClr val="bg2">
+                <a:tint val="94000"/>
+                <a:satMod val="80000"/>
+                <a:lumMod val="106000"/>
+              </a:schemeClr>
+            </a:gs>
+            <a:gs pos="100000">
+              <a:schemeClr val="bg2">
+                <a:shade val="80000"/>
+              </a:schemeClr>
+            </a:gs>
+          </a:gsLst>
+          <a:path path="circle">
+            <a:fillToRect l="43000" r="43000" b="100000"/>
+          </a:path>
+        </a:gradFill>
+        <a:effectLst/>
+      </p:bgPr>
+    </p:bg>
+    <p:spTree>
+      <p:nvGrpSpPr>
+        <p:cNvPr id="1" name=""/>
+        <p:cNvGrpSpPr/>
+        <p:nvPr/>
+      </p:nvGrpSpPr>
+      <p:grpSpPr>
+        <a:xfrm>
+          <a:off x="0" y="0"/>
+          <a:ext cx="0" cy="0"/>
+          <a:chOff x="0" y="0"/>
+          <a:chExt cx="0" cy="0"/>
+        </a:xfrm>
+      </p:grpSpPr>
+      <p:sp>
+        <p:nvSpPr>
+          <p:cNvPr id="2" name="Title 1">
+            <a:extLst>
+              <a:ext uri="{FF2B5EF4-FFF2-40B4-BE49-F238E27FC236}">
                 <a16:creationId xmlns:a16="http://schemas.microsoft.com/office/drawing/2014/main" id="{3603C63F-9FB5-15B8-6A4B-1E81EE54DCA1}"/>
               </a:ext>
             </a:extLst>
@@ -8838,7 +8923,7 @@
 </p:sld>
 </file>
 
-<file path=ppt/slides/slide36.xml><?xml version="1.0" encoding="utf-8"?>
+<file path=ppt/slides/slide37.xml><?xml version="1.0" encoding="utf-8"?>
 <p:sld xmlns:a="http://schemas.openxmlformats.org/drawingml/2006/main" xmlns:r="http://schemas.openxmlformats.org/officeDocument/2006/relationships" xmlns:p="http://schemas.openxmlformats.org/presentationml/2006/main">
   <p:cSld>
     <p:spTree>
@@ -9097,7 +9182,7 @@
 </p:sld>
 </file>
 
-<file path=ppt/slides/slide37.xml><?xml version="1.0" encoding="utf-8"?>
+<file path=ppt/slides/slide38.xml><?xml version="1.0" encoding="utf-8"?>
 <p:sld xmlns:a="http://schemas.openxmlformats.org/drawingml/2006/main" xmlns:r="http://schemas.openxmlformats.org/officeDocument/2006/relationships" xmlns:p="http://schemas.openxmlformats.org/presentationml/2006/main">
   <p:cSld>
     <p:spTree>
@@ -9341,7 +9426,7 @@
 </p:sld>
 </file>
 
-<file path=ppt/slides/slide38.xml><?xml version="1.0" encoding="utf-8"?>
+<file path=ppt/slides/slide39.xml><?xml version="1.0" encoding="utf-8"?>
 <p:sld xmlns:a="http://schemas.openxmlformats.org/drawingml/2006/main" xmlns:r="http://schemas.openxmlformats.org/officeDocument/2006/relationships" xmlns:p="http://schemas.openxmlformats.org/presentationml/2006/main">
   <p:cSld>
     <p:spTree>
@@ -9502,7 +9587,153 @@
 </p:sld>
 </file>
 
-<file path=ppt/slides/slide39.xml><?xml version="1.0" encoding="utf-8"?>
+<file path=ppt/slides/slide4.xml><?xml version="1.0" encoding="utf-8"?>
+<p:sld xmlns:a="http://schemas.openxmlformats.org/drawingml/2006/main" xmlns:r="http://schemas.openxmlformats.org/officeDocument/2006/relationships" xmlns:p="http://schemas.openxmlformats.org/presentationml/2006/main" show="0">
+  <p:cSld>
+    <p:spTree>
+      <p:nvGrpSpPr>
+        <p:cNvPr id="1" name=""/>
+        <p:cNvGrpSpPr/>
+        <p:nvPr/>
+      </p:nvGrpSpPr>
+      <p:grpSpPr>
+        <a:xfrm>
+          <a:off x="0" y="0"/>
+          <a:ext cx="0" cy="0"/>
+          <a:chOff x="0" y="0"/>
+          <a:chExt cx="0" cy="0"/>
+        </a:xfrm>
+      </p:grpSpPr>
+      <p:sp>
+        <p:nvSpPr>
+          <p:cNvPr id="2" name="Title 1">
+            <a:extLst>
+              <a:ext uri="{FF2B5EF4-FFF2-40B4-BE49-F238E27FC236}">
+                <a16:creationId xmlns:a16="http://schemas.microsoft.com/office/drawing/2014/main" id="{22D1ADD2-D653-17DD-BCB3-0E44EAE7BF2D}"/>
+              </a:ext>
+            </a:extLst>
+          </p:cNvPr>
+          <p:cNvSpPr>
+            <a:spLocks noGrp="1"/>
+          </p:cNvSpPr>
+          <p:nvPr>
+            <p:ph type="title"/>
+          </p:nvPr>
+        </p:nvSpPr>
+        <p:spPr/>
+        <p:txBody>
+          <a:bodyPr/>
+          <a:lstStyle/>
+          <a:p>
+            <a:r>
+              <a:rPr lang="en-US" dirty="0"/>
+              <a:t>Cluster Assignment - Results</a:t>
+            </a:r>
+          </a:p>
+        </p:txBody>
+      </p:sp>
+      <p:sp>
+        <p:nvSpPr>
+          <p:cNvPr id="3" name="Content Placeholder 2">
+            <a:extLst>
+              <a:ext uri="{FF2B5EF4-FFF2-40B4-BE49-F238E27FC236}">
+                <a16:creationId xmlns:a16="http://schemas.microsoft.com/office/drawing/2014/main" id="{1FA8B9B4-BDA8-12EB-F5CF-5A987E111D33}"/>
+              </a:ext>
+            </a:extLst>
+          </p:cNvPr>
+          <p:cNvSpPr>
+            <a:spLocks noGrp="1"/>
+          </p:cNvSpPr>
+          <p:nvPr>
+            <p:ph idx="1"/>
+          </p:nvPr>
+        </p:nvSpPr>
+        <p:spPr>
+          <a:xfrm>
+            <a:off x="1451579" y="1853754"/>
+            <a:ext cx="9603275" cy="4199727"/>
+          </a:xfrm>
+        </p:spPr>
+        <p:txBody>
+          <a:bodyPr/>
+          <a:lstStyle/>
+          <a:p>
+            <a:r>
+              <a:rPr lang="en-US" dirty="0"/>
+              <a:t>The basic steps needed are:</a:t>
+            </a:r>
+          </a:p>
+          <a:p>
+            <a:pPr lvl="1"/>
+            <a:r>
+              <a:rPr lang="en-US" dirty="0"/>
+              <a:t>Cluster the original data to break the numbers into similar groups. (k-means, other…)</a:t>
+            </a:r>
+          </a:p>
+          <a:p>
+            <a:pPr lvl="1"/>
+            <a:r>
+              <a:rPr lang="en-US" dirty="0"/>
+              <a:t>Manually add a label – each group is similar, but we don’t know what it is a group of. </a:t>
+            </a:r>
+          </a:p>
+          <a:p>
+            <a:pPr lvl="1"/>
+            <a:r>
+              <a:rPr lang="en-US" dirty="0"/>
+              <a:t>Now you have labeled groups of digit images. </a:t>
+            </a:r>
+          </a:p>
+          <a:p>
+            <a:pPr lvl="1"/>
+            <a:r>
+              <a:rPr lang="en-US" dirty="0"/>
+              <a:t>Train 10 (or more) GMMs, one that ‘knows’ each number from the data used to train it. </a:t>
+            </a:r>
+          </a:p>
+          <a:p>
+            <a:pPr lvl="1"/>
+            <a:r>
+              <a:rPr lang="en-US" dirty="0"/>
+              <a:t>When asked for a printout, ask the right GMMs for a digit each, assemble. </a:t>
+            </a:r>
+          </a:p>
+          <a:p>
+            <a:r>
+              <a:rPr lang="en-US" dirty="0"/>
+              <a:t>Overall, the images tend to be OK at best, some improvements:</a:t>
+            </a:r>
+          </a:p>
+          <a:p>
+            <a:pPr lvl="1"/>
+            <a:r>
+              <a:rPr lang="en-US" dirty="0"/>
+              <a:t>Number of clusters can be &gt;10, to capture different digit variations. GMMs can as well. </a:t>
+            </a:r>
+          </a:p>
+          <a:p>
+            <a:pPr lvl="1"/>
+            <a:r>
+              <a:rPr lang="en-US" dirty="0"/>
+              <a:t>Some cleaning/processing (PCA, feature selection, etc..) may help, requires much tuning. </a:t>
+            </a:r>
+          </a:p>
+        </p:txBody>
+      </p:sp>
+    </p:spTree>
+    <p:extLst>
+      <p:ext uri="{BB962C8B-B14F-4D97-AF65-F5344CB8AC3E}">
+        <p14:creationId xmlns:p14="http://schemas.microsoft.com/office/powerpoint/2010/main" val="136210750"/>
+      </p:ext>
+    </p:extLst>
+  </p:cSld>
+  <p:clrMapOvr>
+    <a:masterClrMapping/>
+  </p:clrMapOvr>
+</p:sld>
+</file>
+
+<file path=ppt/slides/slide40.xml><?xml version="1.0" encoding="utf-8"?>
 <p:sld xmlns:a="http://schemas.openxmlformats.org/drawingml/2006/main" xmlns:r="http://schemas.openxmlformats.org/officeDocument/2006/relationships" xmlns:p="http://schemas.openxmlformats.org/presentationml/2006/main">
   <p:cSld>
     <p:spTree>
@@ -9717,7 +9948,7 @@
 </p:sld>
 </file>
 
-<file path=ppt/slides/slide4.xml><?xml version="1.0" encoding="utf-8"?>
+<file path=ppt/slides/slide41.xml><?xml version="1.0" encoding="utf-8"?>
 <p:sld xmlns:a="http://schemas.openxmlformats.org/drawingml/2006/main" xmlns:r="http://schemas.openxmlformats.org/officeDocument/2006/relationships" xmlns:p="http://schemas.openxmlformats.org/presentationml/2006/main" show="0">
   <p:cSld>
     <p:spTree>
@@ -9739,152 +9970,6 @@
           <p:cNvPr id="2" name="Title 1">
             <a:extLst>
               <a:ext uri="{FF2B5EF4-FFF2-40B4-BE49-F238E27FC236}">
-                <a16:creationId xmlns:a16="http://schemas.microsoft.com/office/drawing/2014/main" id="{22D1ADD2-D653-17DD-BCB3-0E44EAE7BF2D}"/>
-              </a:ext>
-            </a:extLst>
-          </p:cNvPr>
-          <p:cNvSpPr>
-            <a:spLocks noGrp="1"/>
-          </p:cNvSpPr>
-          <p:nvPr>
-            <p:ph type="title"/>
-          </p:nvPr>
-        </p:nvSpPr>
-        <p:spPr/>
-        <p:txBody>
-          <a:bodyPr/>
-          <a:lstStyle/>
-          <a:p>
-            <a:r>
-              <a:rPr lang="en-US" dirty="0"/>
-              <a:t>Cluster Assignment - Results</a:t>
-            </a:r>
-          </a:p>
-        </p:txBody>
-      </p:sp>
-      <p:sp>
-        <p:nvSpPr>
-          <p:cNvPr id="3" name="Content Placeholder 2">
-            <a:extLst>
-              <a:ext uri="{FF2B5EF4-FFF2-40B4-BE49-F238E27FC236}">
-                <a16:creationId xmlns:a16="http://schemas.microsoft.com/office/drawing/2014/main" id="{1FA8B9B4-BDA8-12EB-F5CF-5A987E111D33}"/>
-              </a:ext>
-            </a:extLst>
-          </p:cNvPr>
-          <p:cNvSpPr>
-            <a:spLocks noGrp="1"/>
-          </p:cNvSpPr>
-          <p:nvPr>
-            <p:ph idx="1"/>
-          </p:nvPr>
-        </p:nvSpPr>
-        <p:spPr>
-          <a:xfrm>
-            <a:off x="1451579" y="1853754"/>
-            <a:ext cx="9603275" cy="4199727"/>
-          </a:xfrm>
-        </p:spPr>
-        <p:txBody>
-          <a:bodyPr/>
-          <a:lstStyle/>
-          <a:p>
-            <a:r>
-              <a:rPr lang="en-US" dirty="0"/>
-              <a:t>The basic steps needed are:</a:t>
-            </a:r>
-          </a:p>
-          <a:p>
-            <a:pPr lvl="1"/>
-            <a:r>
-              <a:rPr lang="en-US" dirty="0"/>
-              <a:t>Cluster the original data to break the numbers into similar groups. (k-means, other…)</a:t>
-            </a:r>
-          </a:p>
-          <a:p>
-            <a:pPr lvl="1"/>
-            <a:r>
-              <a:rPr lang="en-US" dirty="0"/>
-              <a:t>Manually add a label – each group is similar, but we don’t know what it is a group of. </a:t>
-            </a:r>
-          </a:p>
-          <a:p>
-            <a:pPr lvl="1"/>
-            <a:r>
-              <a:rPr lang="en-US" dirty="0"/>
-              <a:t>Now you have labeled groups of digit images. </a:t>
-            </a:r>
-          </a:p>
-          <a:p>
-            <a:pPr lvl="1"/>
-            <a:r>
-              <a:rPr lang="en-US" dirty="0"/>
-              <a:t>Train 10 (or more) GMMs, one that ‘knows’ each number from the data used to train it. </a:t>
-            </a:r>
-          </a:p>
-          <a:p>
-            <a:pPr lvl="1"/>
-            <a:r>
-              <a:rPr lang="en-US" dirty="0"/>
-              <a:t>When asked for a printout, ask the right GMMs for a digit each, assemble. </a:t>
-            </a:r>
-          </a:p>
-          <a:p>
-            <a:r>
-              <a:rPr lang="en-US" dirty="0"/>
-              <a:t>Overall, the images tend to be OK at best, some improvements:</a:t>
-            </a:r>
-          </a:p>
-          <a:p>
-            <a:pPr lvl="1"/>
-            <a:r>
-              <a:rPr lang="en-US" dirty="0"/>
-              <a:t>Number of clusters can be &gt;10, to capture different digit variations. GMMs can as well. </a:t>
-            </a:r>
-          </a:p>
-          <a:p>
-            <a:pPr lvl="1"/>
-            <a:r>
-              <a:rPr lang="en-US" dirty="0"/>
-              <a:t>Some cleaning/processing (PCA, feature selection, etc..) may help, requires much tuning. </a:t>
-            </a:r>
-          </a:p>
-        </p:txBody>
-      </p:sp>
-    </p:spTree>
-    <p:extLst>
-      <p:ext uri="{BB962C8B-B14F-4D97-AF65-F5344CB8AC3E}">
-        <p14:creationId xmlns:p14="http://schemas.microsoft.com/office/powerpoint/2010/main" val="136210750"/>
-      </p:ext>
-    </p:extLst>
-  </p:cSld>
-  <p:clrMapOvr>
-    <a:masterClrMapping/>
-  </p:clrMapOvr>
-</p:sld>
-</file>
-
-<file path=ppt/slides/slide40.xml><?xml version="1.0" encoding="utf-8"?>
-<p:sld xmlns:a="http://schemas.openxmlformats.org/drawingml/2006/main" xmlns:r="http://schemas.openxmlformats.org/officeDocument/2006/relationships" xmlns:p="http://schemas.openxmlformats.org/presentationml/2006/main" show="0">
-  <p:cSld>
-    <p:spTree>
-      <p:nvGrpSpPr>
-        <p:cNvPr id="1" name=""/>
-        <p:cNvGrpSpPr/>
-        <p:nvPr/>
-      </p:nvGrpSpPr>
-      <p:grpSpPr>
-        <a:xfrm>
-          <a:off x="0" y="0"/>
-          <a:ext cx="0" cy="0"/>
-          <a:chOff x="0" y="0"/>
-          <a:chExt cx="0" cy="0"/>
-        </a:xfrm>
-      </p:grpSpPr>
-      <p:sp>
-        <p:nvSpPr>
-          <p:cNvPr id="2" name="Title 1">
-            <a:extLst>
-              <a:ext uri="{FF2B5EF4-FFF2-40B4-BE49-F238E27FC236}">
                 <a16:creationId xmlns:a16="http://schemas.microsoft.com/office/drawing/2014/main" id="{CBCB9964-3340-F14A-ACF7-EC8ED9BC8A5E}"/>
               </a:ext>
             </a:extLst>
@@ -10016,7 +10101,7 @@
 </p:sld>
 </file>
 
-<file path=ppt/slides/slide41.xml><?xml version="1.0" encoding="utf-8"?>
+<file path=ppt/slides/slide42.xml><?xml version="1.0" encoding="utf-8"?>
 <p:sld xmlns:a="http://schemas.openxmlformats.org/drawingml/2006/main" xmlns:r="http://schemas.openxmlformats.org/officeDocument/2006/relationships" xmlns:p="http://schemas.openxmlformats.org/presentationml/2006/main">
   <p:cSld>
     <p:spTree>
@@ -10184,8 +10269,8 @@
 </p:sld>
 </file>
 
-<file path=ppt/slides/slide42.xml><?xml version="1.0" encoding="utf-8"?>
-<p:sld xmlns:a="http://schemas.openxmlformats.org/drawingml/2006/main" xmlns:r="http://schemas.openxmlformats.org/officeDocument/2006/relationships" xmlns:p="http://schemas.openxmlformats.org/presentationml/2006/main">
+<file path=ppt/slides/slide43.xml><?xml version="1.0" encoding="utf-8"?>
+<p:sld xmlns:a="http://schemas.openxmlformats.org/drawingml/2006/main" xmlns:r="http://schemas.openxmlformats.org/officeDocument/2006/relationships" xmlns:p="http://schemas.openxmlformats.org/presentationml/2006/main" show="0">
   <p:cSld>
     <p:spTree>
       <p:nvGrpSpPr>
@@ -10369,8 +10454,8 @@
 </p:sld>
 </file>
 
-<file path=ppt/slides/slide43.xml><?xml version="1.0" encoding="utf-8"?>
-<p:sld xmlns:a="http://schemas.openxmlformats.org/drawingml/2006/main" xmlns:r="http://schemas.openxmlformats.org/officeDocument/2006/relationships" xmlns:p="http://schemas.openxmlformats.org/presentationml/2006/main">
+<file path=ppt/slides/slide44.xml><?xml version="1.0" encoding="utf-8"?>
+<p:sld xmlns:a="http://schemas.openxmlformats.org/drawingml/2006/main" xmlns:r="http://schemas.openxmlformats.org/officeDocument/2006/relationships" xmlns:p="http://schemas.openxmlformats.org/presentationml/2006/main" show="0">
   <p:cSld>
     <p:spTree>
       <p:nvGrpSpPr>
@@ -10485,8 +10570,8 @@
 </p:sld>
 </file>
 
-<file path=ppt/slides/slide44.xml><?xml version="1.0" encoding="utf-8"?>
-<p:sld xmlns:a="http://schemas.openxmlformats.org/drawingml/2006/main" xmlns:r="http://schemas.openxmlformats.org/officeDocument/2006/relationships" xmlns:p="http://schemas.openxmlformats.org/presentationml/2006/main">
+<file path=ppt/slides/slide45.xml><?xml version="1.0" encoding="utf-8"?>
+<p:sld xmlns:a="http://schemas.openxmlformats.org/drawingml/2006/main" xmlns:r="http://schemas.openxmlformats.org/officeDocument/2006/relationships" xmlns:p="http://schemas.openxmlformats.org/presentationml/2006/main" show="0">
   <p:cSld>
     <p:spTree>
       <p:nvGrpSpPr>
@@ -10643,7 +10728,7 @@
 </p:sld>
 </file>
 
-<file path=ppt/slides/slide45.xml><?xml version="1.0" encoding="utf-8"?>
+<file path=ppt/slides/slide46.xml><?xml version="1.0" encoding="utf-8"?>
 <p:sld xmlns:a="http://schemas.openxmlformats.org/drawingml/2006/main" xmlns:r="http://schemas.openxmlformats.org/officeDocument/2006/relationships" xmlns:p="http://schemas.openxmlformats.org/presentationml/2006/main" show="0">
   <p:cSld>
     <p:spTree>
@@ -10795,7 +10880,7 @@
 </p:sld>
 </file>
 
-<file path=ppt/slides/slide46.xml><?xml version="1.0" encoding="utf-8"?>
+<file path=ppt/slides/slide47.xml><?xml version="1.0" encoding="utf-8"?>
 <p:sld xmlns:a="http://schemas.openxmlformats.org/drawingml/2006/main" xmlns:r="http://schemas.openxmlformats.org/officeDocument/2006/relationships" xmlns:p="http://schemas.openxmlformats.org/presentationml/2006/main" show="0">
   <p:cSld>
     <p:spTree>
@@ -10933,8 +11018,8 @@
 </p:sld>
 </file>
 
-<file path=ppt/slides/slide47.xml><?xml version="1.0" encoding="utf-8"?>
-<p:sld xmlns:a="http://schemas.openxmlformats.org/drawingml/2006/main" xmlns:r="http://schemas.openxmlformats.org/officeDocument/2006/relationships" xmlns:p="http://schemas.openxmlformats.org/presentationml/2006/main">
+<file path=ppt/slides/slide48.xml><?xml version="1.0" encoding="utf-8"?>
+<p:sld xmlns:a="http://schemas.openxmlformats.org/drawingml/2006/main" xmlns:r="http://schemas.openxmlformats.org/officeDocument/2006/relationships" xmlns:p="http://schemas.openxmlformats.org/presentationml/2006/main" show="0">
   <p:cSld>
     <p:spTree>
       <p:nvGrpSpPr>
@@ -11037,8 +11122,8 @@
 </p:sld>
 </file>
 
-<file path=ppt/slides/slide48.xml><?xml version="1.0" encoding="utf-8"?>
-<p:sld xmlns:a="http://schemas.openxmlformats.org/drawingml/2006/main" xmlns:r="http://schemas.openxmlformats.org/officeDocument/2006/relationships" xmlns:p="http://schemas.openxmlformats.org/presentationml/2006/main">
+<file path=ppt/slides/slide49.xml><?xml version="1.0" encoding="utf-8"?>
+<p:sld xmlns:a="http://schemas.openxmlformats.org/drawingml/2006/main" xmlns:r="http://schemas.openxmlformats.org/officeDocument/2006/relationships" xmlns:p="http://schemas.openxmlformats.org/presentationml/2006/main" show="0">
   <p:cSld>
     <p:spTree>
       <p:nvGrpSpPr>
@@ -11189,8 +11274,140 @@
 </p:sld>
 </file>
 
-<file path=ppt/slides/slide49.xml><?xml version="1.0" encoding="utf-8"?>
-<p:sld xmlns:a="http://schemas.openxmlformats.org/drawingml/2006/main" xmlns:r="http://schemas.openxmlformats.org/officeDocument/2006/relationships" xmlns:p="http://schemas.openxmlformats.org/presentationml/2006/main">
+<file path=ppt/slides/slide5.xml><?xml version="1.0" encoding="utf-8"?>
+<p:sld xmlns:a="http://schemas.openxmlformats.org/drawingml/2006/main" xmlns:r="http://schemas.openxmlformats.org/officeDocument/2006/relationships" xmlns:p="http://schemas.openxmlformats.org/presentationml/2006/main" show="0">
+  <p:cSld>
+    <p:spTree>
+      <p:nvGrpSpPr>
+        <p:cNvPr id="1" name=""/>
+        <p:cNvGrpSpPr/>
+        <p:nvPr/>
+      </p:nvGrpSpPr>
+      <p:grpSpPr>
+        <a:xfrm>
+          <a:off x="0" y="0"/>
+          <a:ext cx="0" cy="0"/>
+          <a:chOff x="0" y="0"/>
+          <a:chExt cx="0" cy="0"/>
+        </a:xfrm>
+      </p:grpSpPr>
+      <p:sp>
+        <p:nvSpPr>
+          <p:cNvPr id="2" name="Title 1">
+            <a:extLst>
+              <a:ext uri="{FF2B5EF4-FFF2-40B4-BE49-F238E27FC236}">
+                <a16:creationId xmlns:a16="http://schemas.microsoft.com/office/drawing/2014/main" id="{C23B2C87-4BE3-F68C-4EE7-7009E745ACA7}"/>
+              </a:ext>
+            </a:extLst>
+          </p:cNvPr>
+          <p:cNvSpPr>
+            <a:spLocks noGrp="1"/>
+          </p:cNvSpPr>
+          <p:nvPr>
+            <p:ph type="title"/>
+          </p:nvPr>
+        </p:nvSpPr>
+        <p:spPr/>
+        <p:txBody>
+          <a:bodyPr/>
+          <a:lstStyle/>
+          <a:p>
+            <a:r>
+              <a:rPr lang="en-US" dirty="0"/>
+              <a:t>Cluster Assignment</a:t>
+            </a:r>
+          </a:p>
+        </p:txBody>
+      </p:sp>
+      <p:sp>
+        <p:nvSpPr>
+          <p:cNvPr id="3" name="Content Placeholder 2">
+            <a:extLst>
+              <a:ext uri="{FF2B5EF4-FFF2-40B4-BE49-F238E27FC236}">
+                <a16:creationId xmlns:a16="http://schemas.microsoft.com/office/drawing/2014/main" id="{C027D62E-779C-86FC-A8CB-FC13358BCB50}"/>
+              </a:ext>
+            </a:extLst>
+          </p:cNvPr>
+          <p:cNvSpPr>
+            <a:spLocks noGrp="1"/>
+          </p:cNvSpPr>
+          <p:nvPr>
+            <p:ph idx="1"/>
+          </p:nvPr>
+        </p:nvSpPr>
+        <p:spPr>
+          <a:xfrm>
+            <a:off x="1451579" y="1853754"/>
+            <a:ext cx="9603275" cy="4199727"/>
+          </a:xfrm>
+        </p:spPr>
+        <p:txBody>
+          <a:bodyPr/>
+          <a:lstStyle/>
+          <a:p>
+            <a:r>
+              <a:rPr lang="en-US" dirty="0"/>
+              <a:t>Common issues:</a:t>
+            </a:r>
+          </a:p>
+          <a:p>
+            <a:pPr lvl="1"/>
+            <a:r>
+              <a:rPr lang="en-US" dirty="0"/>
+              <a:t>Assorted mix-ups applying labels to clusters. </a:t>
+            </a:r>
+          </a:p>
+          <a:p>
+            <a:pPr lvl="1"/>
+            <a:r>
+              <a:rPr lang="en-US" dirty="0"/>
+              <a:t>Training GMM timing/location. </a:t>
+            </a:r>
+          </a:p>
+          <a:p>
+            <a:r>
+              <a:rPr lang="en-US" dirty="0"/>
+              <a:t>Adding labeling:</a:t>
+            </a:r>
+          </a:p>
+          <a:p>
+            <a:pPr lvl="1"/>
+            <a:r>
+              <a:rPr lang="en-US" dirty="0"/>
+              <a:t>This feels weird to lots of people, but it isn’t really all that rare. (LLMs and gen models). </a:t>
+            </a:r>
+          </a:p>
+          <a:p>
+            <a:pPr lvl="1"/>
+            <a:r>
+              <a:rPr lang="en-US" dirty="0"/>
+              <a:t>The clusters are able to be ‘pure’ on their own, but we need to add the label info ourselves. </a:t>
+            </a:r>
+          </a:p>
+          <a:p>
+            <a:pPr lvl="1"/>
+            <a:r>
+              <a:rPr lang="en-US" dirty="0"/>
+              <a:t>This could be supplemented by other models – e.g. manually label enough, then use classifier.</a:t>
+            </a:r>
+          </a:p>
+        </p:txBody>
+      </p:sp>
+    </p:spTree>
+    <p:extLst>
+      <p:ext uri="{BB962C8B-B14F-4D97-AF65-F5344CB8AC3E}">
+        <p14:creationId xmlns:p14="http://schemas.microsoft.com/office/powerpoint/2010/main" val="885412947"/>
+      </p:ext>
+    </p:extLst>
+  </p:cSld>
+  <p:clrMapOvr>
+    <a:masterClrMapping/>
+  </p:clrMapOvr>
+</p:sld>
+</file>
+
+<file path=ppt/slides/slide50.xml><?xml version="1.0" encoding="utf-8"?>
+<p:sld xmlns:a="http://schemas.openxmlformats.org/drawingml/2006/main" xmlns:r="http://schemas.openxmlformats.org/officeDocument/2006/relationships" xmlns:p="http://schemas.openxmlformats.org/presentationml/2006/main" show="0">
   <p:cSld>
     <p:spTree>
       <p:nvGrpSpPr>
@@ -11440,140 +11657,8 @@
 </p:sld>
 </file>
 
-<file path=ppt/slides/slide5.xml><?xml version="1.0" encoding="utf-8"?>
+<file path=ppt/slides/slide51.xml><?xml version="1.0" encoding="utf-8"?>
 <p:sld xmlns:a="http://schemas.openxmlformats.org/drawingml/2006/main" xmlns:r="http://schemas.openxmlformats.org/officeDocument/2006/relationships" xmlns:p="http://schemas.openxmlformats.org/presentationml/2006/main" show="0">
-  <p:cSld>
-    <p:spTree>
-      <p:nvGrpSpPr>
-        <p:cNvPr id="1" name=""/>
-        <p:cNvGrpSpPr/>
-        <p:nvPr/>
-      </p:nvGrpSpPr>
-      <p:grpSpPr>
-        <a:xfrm>
-          <a:off x="0" y="0"/>
-          <a:ext cx="0" cy="0"/>
-          <a:chOff x="0" y="0"/>
-          <a:chExt cx="0" cy="0"/>
-        </a:xfrm>
-      </p:grpSpPr>
-      <p:sp>
-        <p:nvSpPr>
-          <p:cNvPr id="2" name="Title 1">
-            <a:extLst>
-              <a:ext uri="{FF2B5EF4-FFF2-40B4-BE49-F238E27FC236}">
-                <a16:creationId xmlns:a16="http://schemas.microsoft.com/office/drawing/2014/main" id="{C23B2C87-4BE3-F68C-4EE7-7009E745ACA7}"/>
-              </a:ext>
-            </a:extLst>
-          </p:cNvPr>
-          <p:cNvSpPr>
-            <a:spLocks noGrp="1"/>
-          </p:cNvSpPr>
-          <p:nvPr>
-            <p:ph type="title"/>
-          </p:nvPr>
-        </p:nvSpPr>
-        <p:spPr/>
-        <p:txBody>
-          <a:bodyPr/>
-          <a:lstStyle/>
-          <a:p>
-            <a:r>
-              <a:rPr lang="en-US" dirty="0"/>
-              <a:t>Cluster Assignment</a:t>
-            </a:r>
-          </a:p>
-        </p:txBody>
-      </p:sp>
-      <p:sp>
-        <p:nvSpPr>
-          <p:cNvPr id="3" name="Content Placeholder 2">
-            <a:extLst>
-              <a:ext uri="{FF2B5EF4-FFF2-40B4-BE49-F238E27FC236}">
-                <a16:creationId xmlns:a16="http://schemas.microsoft.com/office/drawing/2014/main" id="{C027D62E-779C-86FC-A8CB-FC13358BCB50}"/>
-              </a:ext>
-            </a:extLst>
-          </p:cNvPr>
-          <p:cNvSpPr>
-            <a:spLocks noGrp="1"/>
-          </p:cNvSpPr>
-          <p:nvPr>
-            <p:ph idx="1"/>
-          </p:nvPr>
-        </p:nvSpPr>
-        <p:spPr>
-          <a:xfrm>
-            <a:off x="1451579" y="1853754"/>
-            <a:ext cx="9603275" cy="4199727"/>
-          </a:xfrm>
-        </p:spPr>
-        <p:txBody>
-          <a:bodyPr/>
-          <a:lstStyle/>
-          <a:p>
-            <a:r>
-              <a:rPr lang="en-US" dirty="0"/>
-              <a:t>Common issues:</a:t>
-            </a:r>
-          </a:p>
-          <a:p>
-            <a:pPr lvl="1"/>
-            <a:r>
-              <a:rPr lang="en-US" dirty="0"/>
-              <a:t>Assorted mix-ups applying labels to clusters. </a:t>
-            </a:r>
-          </a:p>
-          <a:p>
-            <a:pPr lvl="1"/>
-            <a:r>
-              <a:rPr lang="en-US" dirty="0"/>
-              <a:t>Training GMM timing/location. </a:t>
-            </a:r>
-          </a:p>
-          <a:p>
-            <a:r>
-              <a:rPr lang="en-US" dirty="0"/>
-              <a:t>Adding labeling:</a:t>
-            </a:r>
-          </a:p>
-          <a:p>
-            <a:pPr lvl="1"/>
-            <a:r>
-              <a:rPr lang="en-US" dirty="0"/>
-              <a:t>This feels weird to lots of people, but it isn’t really all that rare. (LLMs and gen models). </a:t>
-            </a:r>
-          </a:p>
-          <a:p>
-            <a:pPr lvl="1"/>
-            <a:r>
-              <a:rPr lang="en-US" dirty="0"/>
-              <a:t>The clusters are able to be ‘pure’ on their own, but we need to add the label info ourselves. </a:t>
-            </a:r>
-          </a:p>
-          <a:p>
-            <a:pPr lvl="1"/>
-            <a:r>
-              <a:rPr lang="en-US" dirty="0"/>
-              <a:t>This could be supplemented by other models – e.g. manually label enough, then use classifier.</a:t>
-            </a:r>
-          </a:p>
-        </p:txBody>
-      </p:sp>
-    </p:spTree>
-    <p:extLst>
-      <p:ext uri="{BB962C8B-B14F-4D97-AF65-F5344CB8AC3E}">
-        <p14:creationId xmlns:p14="http://schemas.microsoft.com/office/powerpoint/2010/main" val="885412947"/>
-      </p:ext>
-    </p:extLst>
-  </p:cSld>
-  <p:clrMapOvr>
-    <a:masterClrMapping/>
-  </p:clrMapOvr>
-</p:sld>
-</file>
-
-<file path=ppt/slides/slide50.xml><?xml version="1.0" encoding="utf-8"?>
-<p:sld xmlns:a="http://schemas.openxmlformats.org/drawingml/2006/main" xmlns:r="http://schemas.openxmlformats.org/officeDocument/2006/relationships" xmlns:p="http://schemas.openxmlformats.org/presentationml/2006/main">
   <p:cSld>
     <p:spTree>
       <p:nvGrpSpPr>
@@ -11698,8 +11783,8 @@
 </p:sld>
 </file>
 
-<file path=ppt/slides/slide51.xml><?xml version="1.0" encoding="utf-8"?>
-<p:sld xmlns:a="http://schemas.openxmlformats.org/drawingml/2006/main" xmlns:r="http://schemas.openxmlformats.org/officeDocument/2006/relationships" xmlns:p="http://schemas.openxmlformats.org/presentationml/2006/main">
+<file path=ppt/slides/slide52.xml><?xml version="1.0" encoding="utf-8"?>
+<p:sld xmlns:a="http://schemas.openxmlformats.org/drawingml/2006/main" xmlns:r="http://schemas.openxmlformats.org/officeDocument/2006/relationships" xmlns:p="http://schemas.openxmlformats.org/presentationml/2006/main" show="0">
   <p:cSld>
     <p:spTree>
       <p:nvGrpSpPr>
@@ -11860,8 +11945,8 @@
 </p:sld>
 </file>
 
-<file path=ppt/slides/slide52.xml><?xml version="1.0" encoding="utf-8"?>
-<p:sld xmlns:a="http://schemas.openxmlformats.org/drawingml/2006/main" xmlns:r="http://schemas.openxmlformats.org/officeDocument/2006/relationships" xmlns:p="http://schemas.openxmlformats.org/presentationml/2006/main">
+<file path=ppt/slides/slide53.xml><?xml version="1.0" encoding="utf-8"?>
+<p:sld xmlns:a="http://schemas.openxmlformats.org/drawingml/2006/main" xmlns:r="http://schemas.openxmlformats.org/officeDocument/2006/relationships" xmlns:p="http://schemas.openxmlformats.org/presentationml/2006/main" show="0">
   <p:cSld>
     <p:spTree>
       <p:nvGrpSpPr>
@@ -12047,8 +12132,8 @@
 </p:sld>
 </file>
 
-<file path=ppt/slides/slide53.xml><?xml version="1.0" encoding="utf-8"?>
-<p:sld xmlns:a="http://schemas.openxmlformats.org/drawingml/2006/main" xmlns:r="http://schemas.openxmlformats.org/officeDocument/2006/relationships" xmlns:p="http://schemas.openxmlformats.org/presentationml/2006/main">
+<file path=ppt/slides/slide54.xml><?xml version="1.0" encoding="utf-8"?>
+<p:sld xmlns:a="http://schemas.openxmlformats.org/drawingml/2006/main" xmlns:r="http://schemas.openxmlformats.org/officeDocument/2006/relationships" xmlns:p="http://schemas.openxmlformats.org/presentationml/2006/main" show="0">
   <p:cSld>
     <p:spTree>
       <p:nvGrpSpPr>
@@ -12210,8 +12295,8 @@
 </p:sld>
 </file>
 
-<file path=ppt/slides/slide54.xml><?xml version="1.0" encoding="utf-8"?>
-<p:sld xmlns:a="http://schemas.openxmlformats.org/drawingml/2006/main" xmlns:r="http://schemas.openxmlformats.org/officeDocument/2006/relationships" xmlns:p="http://schemas.openxmlformats.org/presentationml/2006/main">
+<file path=ppt/slides/slide55.xml><?xml version="1.0" encoding="utf-8"?>
+<p:sld xmlns:a="http://schemas.openxmlformats.org/drawingml/2006/main" xmlns:r="http://schemas.openxmlformats.org/officeDocument/2006/relationships" xmlns:p="http://schemas.openxmlformats.org/presentationml/2006/main" show="0">
   <p:cSld>
     <p:spTree>
       <p:nvGrpSpPr>
@@ -12343,8 +12428,8 @@
 </p:sld>
 </file>
 
-<file path=ppt/slides/slide55.xml><?xml version="1.0" encoding="utf-8"?>
-<p:sld xmlns:a="http://schemas.openxmlformats.org/drawingml/2006/main" xmlns:r="http://schemas.openxmlformats.org/officeDocument/2006/relationships" xmlns:p="http://schemas.openxmlformats.org/presentationml/2006/main">
+<file path=ppt/slides/slide56.xml><?xml version="1.0" encoding="utf-8"?>
+<p:sld xmlns:a="http://schemas.openxmlformats.org/drawingml/2006/main" xmlns:r="http://schemas.openxmlformats.org/officeDocument/2006/relationships" xmlns:p="http://schemas.openxmlformats.org/presentationml/2006/main" show="0">
   <p:cSld>
     <p:spTree>
       <p:nvGrpSpPr>
@@ -12476,8 +12561,8 @@
 </p:sld>
 </file>
 
-<file path=ppt/slides/slide56.xml><?xml version="1.0" encoding="utf-8"?>
-<p:sld xmlns:a="http://schemas.openxmlformats.org/drawingml/2006/main" xmlns:r="http://schemas.openxmlformats.org/officeDocument/2006/relationships" xmlns:p="http://schemas.openxmlformats.org/presentationml/2006/main">
+<file path=ppt/slides/slide57.xml><?xml version="1.0" encoding="utf-8"?>
+<p:sld xmlns:a="http://schemas.openxmlformats.org/drawingml/2006/main" xmlns:r="http://schemas.openxmlformats.org/officeDocument/2006/relationships" xmlns:p="http://schemas.openxmlformats.org/presentationml/2006/main" show="0">
   <p:cSld>
     <p:spTree>
       <p:nvGrpSpPr>
@@ -12645,8 +12730,8 @@
 </p:sld>
 </file>
 
-<file path=ppt/slides/slide57.xml><?xml version="1.0" encoding="utf-8"?>
-<p:sld xmlns:a="http://schemas.openxmlformats.org/drawingml/2006/main" xmlns:r="http://schemas.openxmlformats.org/officeDocument/2006/relationships" xmlns:p="http://schemas.openxmlformats.org/presentationml/2006/main">
+<file path=ppt/slides/slide58.xml><?xml version="1.0" encoding="utf-8"?>
+<p:sld xmlns:a="http://schemas.openxmlformats.org/drawingml/2006/main" xmlns:r="http://schemas.openxmlformats.org/officeDocument/2006/relationships" xmlns:p="http://schemas.openxmlformats.org/presentationml/2006/main" show="0">
   <p:cSld>
     <p:spTree>
       <p:nvGrpSpPr>
@@ -12876,8 +12961,8 @@
 </p:sld>
 </file>
 
-<file path=ppt/slides/slide58.xml><?xml version="1.0" encoding="utf-8"?>
-<p:sld xmlns:a="http://schemas.openxmlformats.org/drawingml/2006/main" xmlns:r="http://schemas.openxmlformats.org/officeDocument/2006/relationships" xmlns:p="http://schemas.openxmlformats.org/presentationml/2006/main">
+<file path=ppt/slides/slide59.xml><?xml version="1.0" encoding="utf-8"?>
+<p:sld xmlns:a="http://schemas.openxmlformats.org/drawingml/2006/main" xmlns:r="http://schemas.openxmlformats.org/officeDocument/2006/relationships" xmlns:p="http://schemas.openxmlformats.org/presentationml/2006/main" show="0">
   <p:cSld>
     <p:spTree>
       <p:nvGrpSpPr>
@@ -13021,168 +13106,6 @@
     <p:extLst>
       <p:ext uri="{BB962C8B-B14F-4D97-AF65-F5344CB8AC3E}">
         <p14:creationId xmlns:p14="http://schemas.microsoft.com/office/powerpoint/2010/main" val="3767158632"/>
-      </p:ext>
-    </p:extLst>
-  </p:cSld>
-  <p:clrMapOvr>
-    <a:masterClrMapping/>
-  </p:clrMapOvr>
-</p:sld>
-</file>
-
-<file path=ppt/slides/slide59.xml><?xml version="1.0" encoding="utf-8"?>
-<p:sld xmlns:a="http://schemas.openxmlformats.org/drawingml/2006/main" xmlns:r="http://schemas.openxmlformats.org/officeDocument/2006/relationships" xmlns:p="http://schemas.openxmlformats.org/presentationml/2006/main">
-  <p:cSld>
-    <p:spTree>
-      <p:nvGrpSpPr>
-        <p:cNvPr id="1" name="">
-          <a:extLst>
-            <a:ext uri="{FF2B5EF4-FFF2-40B4-BE49-F238E27FC236}">
-              <a16:creationId xmlns:a16="http://schemas.microsoft.com/office/drawing/2014/main" id="{EAE73B53-A48E-5B18-ADEB-090C029CC73E}"/>
-            </a:ext>
-          </a:extLst>
-        </p:cNvPr>
-        <p:cNvGrpSpPr/>
-        <p:nvPr/>
-      </p:nvGrpSpPr>
-      <p:grpSpPr>
-        <a:xfrm>
-          <a:off x="0" y="0"/>
-          <a:ext cx="0" cy="0"/>
-          <a:chOff x="0" y="0"/>
-          <a:chExt cx="0" cy="0"/>
-        </a:xfrm>
-      </p:grpSpPr>
-      <p:sp>
-        <p:nvSpPr>
-          <p:cNvPr id="2" name="Title 1">
-            <a:extLst>
-              <a:ext uri="{FF2B5EF4-FFF2-40B4-BE49-F238E27FC236}">
-                <a16:creationId xmlns:a16="http://schemas.microsoft.com/office/drawing/2014/main" id="{9475BE8A-FF06-FE32-406D-64A5EF315D99}"/>
-              </a:ext>
-            </a:extLst>
-          </p:cNvPr>
-          <p:cNvSpPr>
-            <a:spLocks noGrp="1"/>
-          </p:cNvSpPr>
-          <p:nvPr>
-            <p:ph type="title"/>
-          </p:nvPr>
-        </p:nvSpPr>
-        <p:spPr/>
-        <p:txBody>
-          <a:bodyPr/>
-          <a:lstStyle/>
-          <a:p>
-            <a:r>
-              <a:rPr lang="en-US" dirty="0"/>
-              <a:t>Data</a:t>
-            </a:r>
-          </a:p>
-        </p:txBody>
-      </p:sp>
-      <p:sp>
-        <p:nvSpPr>
-          <p:cNvPr id="3" name="Content Placeholder 2">
-            <a:extLst>
-              <a:ext uri="{FF2B5EF4-FFF2-40B4-BE49-F238E27FC236}">
-                <a16:creationId xmlns:a16="http://schemas.microsoft.com/office/drawing/2014/main" id="{9845B42F-618E-C8C8-69E1-77007B4A3916}"/>
-              </a:ext>
-            </a:extLst>
-          </p:cNvPr>
-          <p:cNvSpPr>
-            <a:spLocks noGrp="1"/>
-          </p:cNvSpPr>
-          <p:nvPr>
-            <p:ph idx="1"/>
-          </p:nvPr>
-        </p:nvSpPr>
-        <p:spPr>
-          <a:xfrm>
-            <a:off x="1451579" y="1853754"/>
-            <a:ext cx="9603275" cy="4199727"/>
-          </a:xfrm>
-        </p:spPr>
-        <p:txBody>
-          <a:bodyPr/>
-          <a:lstStyle/>
-          <a:p>
-            <a:r>
-              <a:rPr lang="en-US" dirty="0"/>
-              <a:t>Improving and increasing the data size is the best possible optimization. </a:t>
-            </a:r>
-          </a:p>
-          <a:p>
-            <a:r>
-              <a:rPr lang="en-US" dirty="0"/>
-              <a:t>Scaling can often have large impacts:</a:t>
-            </a:r>
-          </a:p>
-          <a:p>
-            <a:pPr lvl="1"/>
-            <a:r>
-              <a:rPr lang="en-US" dirty="0"/>
-              <a:t>Ensure outliers are handled and data is scaled. </a:t>
-            </a:r>
-          </a:p>
-          <a:p>
-            <a:r>
-              <a:rPr lang="en-US" dirty="0"/>
-              <a:t>If practical, increase data size – real or by augmentation (later). </a:t>
-            </a:r>
-          </a:p>
-          <a:p>
-            <a:r>
-              <a:rPr lang="en-US" dirty="0"/>
-              <a:t>If we have high dimension categories, that can lead to very sparse data:</a:t>
-            </a:r>
-          </a:p>
-          <a:p>
-            <a:pPr lvl="1"/>
-            <a:r>
-              <a:rPr lang="en-US" dirty="0"/>
-              <a:t>Many high dimension categories will add lots of features to the data once encoded. </a:t>
-            </a:r>
-          </a:p>
-          <a:p>
-            <a:pPr lvl="1"/>
-            <a:r>
-              <a:rPr lang="en-US" dirty="0"/>
-              <a:t>This will make lots of sparse data – many features with nearly zero information. </a:t>
-            </a:r>
-          </a:p>
-          <a:p>
-            <a:pPr lvl="1"/>
-            <a:r>
-              <a:rPr lang="en-US" dirty="0"/>
-              <a:t>This isn’t </a:t>
-            </a:r>
-            <a:r>
-              <a:rPr lang="en-US" i="1" dirty="0"/>
-              <a:t>wrong</a:t>
-            </a:r>
-            <a:r>
-              <a:rPr lang="en-US" dirty="0"/>
-              <a:t> but may lead to poor and slow results, especially without many records. </a:t>
-            </a:r>
-          </a:p>
-          <a:p>
-            <a:pPr lvl="1"/>
-            <a:r>
-              <a:rPr lang="en-US" dirty="0"/>
-              <a:t>Consider feature engineering (‘other’ group, consolidation, selection) these first. </a:t>
-            </a:r>
-          </a:p>
-          <a:p>
-            <a:pPr lvl="1"/>
-            <a:endParaRPr lang="en-US" dirty="0"/>
-          </a:p>
-        </p:txBody>
-      </p:sp>
-    </p:spTree>
-    <p:extLst>
-      <p:ext uri="{BB962C8B-B14F-4D97-AF65-F5344CB8AC3E}">
-        <p14:creationId xmlns:p14="http://schemas.microsoft.com/office/powerpoint/2010/main" val="1255838994"/>
       </p:ext>
     </p:extLst>
   </p:cSld>
@@ -13291,7 +13214,169 @@
 </file>
 
 <file path=ppt/slides/slide60.xml><?xml version="1.0" encoding="utf-8"?>
-<p:sld xmlns:a="http://schemas.openxmlformats.org/drawingml/2006/main" xmlns:r="http://schemas.openxmlformats.org/officeDocument/2006/relationships" xmlns:p="http://schemas.openxmlformats.org/presentationml/2006/main">
+<p:sld xmlns:a="http://schemas.openxmlformats.org/drawingml/2006/main" xmlns:r="http://schemas.openxmlformats.org/officeDocument/2006/relationships" xmlns:p="http://schemas.openxmlformats.org/presentationml/2006/main" show="0">
+  <p:cSld>
+    <p:spTree>
+      <p:nvGrpSpPr>
+        <p:cNvPr id="1" name="">
+          <a:extLst>
+            <a:ext uri="{FF2B5EF4-FFF2-40B4-BE49-F238E27FC236}">
+              <a16:creationId xmlns:a16="http://schemas.microsoft.com/office/drawing/2014/main" id="{EAE73B53-A48E-5B18-ADEB-090C029CC73E}"/>
+            </a:ext>
+          </a:extLst>
+        </p:cNvPr>
+        <p:cNvGrpSpPr/>
+        <p:nvPr/>
+      </p:nvGrpSpPr>
+      <p:grpSpPr>
+        <a:xfrm>
+          <a:off x="0" y="0"/>
+          <a:ext cx="0" cy="0"/>
+          <a:chOff x="0" y="0"/>
+          <a:chExt cx="0" cy="0"/>
+        </a:xfrm>
+      </p:grpSpPr>
+      <p:sp>
+        <p:nvSpPr>
+          <p:cNvPr id="2" name="Title 1">
+            <a:extLst>
+              <a:ext uri="{FF2B5EF4-FFF2-40B4-BE49-F238E27FC236}">
+                <a16:creationId xmlns:a16="http://schemas.microsoft.com/office/drawing/2014/main" id="{9475BE8A-FF06-FE32-406D-64A5EF315D99}"/>
+              </a:ext>
+            </a:extLst>
+          </p:cNvPr>
+          <p:cNvSpPr>
+            <a:spLocks noGrp="1"/>
+          </p:cNvSpPr>
+          <p:nvPr>
+            <p:ph type="title"/>
+          </p:nvPr>
+        </p:nvSpPr>
+        <p:spPr/>
+        <p:txBody>
+          <a:bodyPr/>
+          <a:lstStyle/>
+          <a:p>
+            <a:r>
+              <a:rPr lang="en-US" dirty="0"/>
+              <a:t>Data</a:t>
+            </a:r>
+          </a:p>
+        </p:txBody>
+      </p:sp>
+      <p:sp>
+        <p:nvSpPr>
+          <p:cNvPr id="3" name="Content Placeholder 2">
+            <a:extLst>
+              <a:ext uri="{FF2B5EF4-FFF2-40B4-BE49-F238E27FC236}">
+                <a16:creationId xmlns:a16="http://schemas.microsoft.com/office/drawing/2014/main" id="{9845B42F-618E-C8C8-69E1-77007B4A3916}"/>
+              </a:ext>
+            </a:extLst>
+          </p:cNvPr>
+          <p:cNvSpPr>
+            <a:spLocks noGrp="1"/>
+          </p:cNvSpPr>
+          <p:nvPr>
+            <p:ph idx="1"/>
+          </p:nvPr>
+        </p:nvSpPr>
+        <p:spPr>
+          <a:xfrm>
+            <a:off x="1451579" y="1853754"/>
+            <a:ext cx="9603275" cy="4199727"/>
+          </a:xfrm>
+        </p:spPr>
+        <p:txBody>
+          <a:bodyPr/>
+          <a:lstStyle/>
+          <a:p>
+            <a:r>
+              <a:rPr lang="en-US" dirty="0"/>
+              <a:t>Improving and increasing the data size is the best possible optimization. </a:t>
+            </a:r>
+          </a:p>
+          <a:p>
+            <a:r>
+              <a:rPr lang="en-US" dirty="0"/>
+              <a:t>Scaling can often have large impacts:</a:t>
+            </a:r>
+          </a:p>
+          <a:p>
+            <a:pPr lvl="1"/>
+            <a:r>
+              <a:rPr lang="en-US" dirty="0"/>
+              <a:t>Ensure outliers are handled and data is scaled. </a:t>
+            </a:r>
+          </a:p>
+          <a:p>
+            <a:r>
+              <a:rPr lang="en-US" dirty="0"/>
+              <a:t>If practical, increase data size – real or by augmentation (later). </a:t>
+            </a:r>
+          </a:p>
+          <a:p>
+            <a:r>
+              <a:rPr lang="en-US" dirty="0"/>
+              <a:t>If we have high dimension categories, that can lead to very sparse data:</a:t>
+            </a:r>
+          </a:p>
+          <a:p>
+            <a:pPr lvl="1"/>
+            <a:r>
+              <a:rPr lang="en-US" dirty="0"/>
+              <a:t>Many high dimension categories will add lots of features to the data once encoded. </a:t>
+            </a:r>
+          </a:p>
+          <a:p>
+            <a:pPr lvl="1"/>
+            <a:r>
+              <a:rPr lang="en-US" dirty="0"/>
+              <a:t>This will make lots of sparse data – many features with nearly zero information. </a:t>
+            </a:r>
+          </a:p>
+          <a:p>
+            <a:pPr lvl="1"/>
+            <a:r>
+              <a:rPr lang="en-US" dirty="0"/>
+              <a:t>This isn’t </a:t>
+            </a:r>
+            <a:r>
+              <a:rPr lang="en-US" i="1" dirty="0"/>
+              <a:t>wrong</a:t>
+            </a:r>
+            <a:r>
+              <a:rPr lang="en-US" dirty="0"/>
+              <a:t> but may lead to poor and slow results, especially without many records. </a:t>
+            </a:r>
+          </a:p>
+          <a:p>
+            <a:pPr lvl="1"/>
+            <a:r>
+              <a:rPr lang="en-US" dirty="0"/>
+              <a:t>Consider feature engineering (‘other’ group, consolidation, selection) these first. </a:t>
+            </a:r>
+          </a:p>
+          <a:p>
+            <a:pPr lvl="1"/>
+            <a:endParaRPr lang="en-US" dirty="0"/>
+          </a:p>
+        </p:txBody>
+      </p:sp>
+    </p:spTree>
+    <p:extLst>
+      <p:ext uri="{BB962C8B-B14F-4D97-AF65-F5344CB8AC3E}">
+        <p14:creationId xmlns:p14="http://schemas.microsoft.com/office/powerpoint/2010/main" val="1255838994"/>
+      </p:ext>
+    </p:extLst>
+  </p:cSld>
+  <p:clrMapOvr>
+    <a:masterClrMapping/>
+  </p:clrMapOvr>
+</p:sld>
+</file>
+
+<file path=ppt/slides/slide61.xml><?xml version="1.0" encoding="utf-8"?>
+<p:sld xmlns:a="http://schemas.openxmlformats.org/drawingml/2006/main" xmlns:r="http://schemas.openxmlformats.org/officeDocument/2006/relationships" xmlns:p="http://schemas.openxmlformats.org/presentationml/2006/main" show="0">
   <p:cSld>
     <p:spTree>
       <p:nvGrpSpPr>
@@ -13484,8 +13569,8 @@
 </p:sld>
 </file>
 
-<file path=ppt/slides/slide61.xml><?xml version="1.0" encoding="utf-8"?>
-<p:sld xmlns:a="http://schemas.openxmlformats.org/drawingml/2006/main" xmlns:r="http://schemas.openxmlformats.org/officeDocument/2006/relationships" xmlns:p="http://schemas.openxmlformats.org/presentationml/2006/main">
+<file path=ppt/slides/slide62.xml><?xml version="1.0" encoding="utf-8"?>
+<p:sld xmlns:a="http://schemas.openxmlformats.org/drawingml/2006/main" xmlns:r="http://schemas.openxmlformats.org/officeDocument/2006/relationships" xmlns:p="http://schemas.openxmlformats.org/presentationml/2006/main" show="0">
   <p:cSld>
     <p:spTree>
       <p:nvGrpSpPr>
@@ -13645,8 +13730,8 @@
 </p:sld>
 </file>
 
-<file path=ppt/slides/slide62.xml><?xml version="1.0" encoding="utf-8"?>
-<p:sld xmlns:a="http://schemas.openxmlformats.org/drawingml/2006/main" xmlns:r="http://schemas.openxmlformats.org/officeDocument/2006/relationships" xmlns:p="http://schemas.openxmlformats.org/presentationml/2006/main">
+<file path=ppt/slides/slide63.xml><?xml version="1.0" encoding="utf-8"?>
+<p:sld xmlns:a="http://schemas.openxmlformats.org/drawingml/2006/main" xmlns:r="http://schemas.openxmlformats.org/officeDocument/2006/relationships" xmlns:p="http://schemas.openxmlformats.org/presentationml/2006/main" show="0">
   <p:cSld>
     <p:spTree>
       <p:nvGrpSpPr>
@@ -13781,8 +13866,8 @@
 </p:sld>
 </file>
 
-<file path=ppt/slides/slide63.xml><?xml version="1.0" encoding="utf-8"?>
-<p:sld xmlns:a="http://schemas.openxmlformats.org/drawingml/2006/main" xmlns:r="http://schemas.openxmlformats.org/officeDocument/2006/relationships" xmlns:p="http://schemas.openxmlformats.org/presentationml/2006/main">
+<file path=ppt/slides/slide64.xml><?xml version="1.0" encoding="utf-8"?>
+<p:sld xmlns:a="http://schemas.openxmlformats.org/drawingml/2006/main" xmlns:r="http://schemas.openxmlformats.org/officeDocument/2006/relationships" xmlns:p="http://schemas.openxmlformats.org/presentationml/2006/main" show="0">
   <p:cSld>
     <p:spTree>
       <p:nvGrpSpPr>
@@ -13995,8 +14080,8 @@
 </p:sld>
 </file>
 
-<file path=ppt/slides/slide64.xml><?xml version="1.0" encoding="utf-8"?>
-<p:sld xmlns:a="http://schemas.openxmlformats.org/drawingml/2006/main" xmlns:r="http://schemas.openxmlformats.org/officeDocument/2006/relationships" xmlns:p="http://schemas.openxmlformats.org/presentationml/2006/main">
+<file path=ppt/slides/slide65.xml><?xml version="1.0" encoding="utf-8"?>
+<p:sld xmlns:a="http://schemas.openxmlformats.org/drawingml/2006/main" xmlns:r="http://schemas.openxmlformats.org/officeDocument/2006/relationships" xmlns:p="http://schemas.openxmlformats.org/presentationml/2006/main" show="0">
   <p:cSld>
     <p:spTree>
       <p:nvGrpSpPr>
@@ -14294,8 +14379,8 @@
 </p:sld>
 </file>
 
-<file path=ppt/slides/slide65.xml><?xml version="1.0" encoding="utf-8"?>
-<p:sld xmlns:a="http://schemas.openxmlformats.org/drawingml/2006/main" xmlns:r="http://schemas.openxmlformats.org/officeDocument/2006/relationships" xmlns:p="http://schemas.openxmlformats.org/presentationml/2006/main">
+<file path=ppt/slides/slide66.xml><?xml version="1.0" encoding="utf-8"?>
+<p:sld xmlns:a="http://schemas.openxmlformats.org/drawingml/2006/main" xmlns:r="http://schemas.openxmlformats.org/officeDocument/2006/relationships" xmlns:p="http://schemas.openxmlformats.org/presentationml/2006/main" show="0">
   <p:cSld>
     <p:spTree>
       <p:nvGrpSpPr>
@@ -14467,8 +14552,8 @@
 </p:sld>
 </file>
 
-<file path=ppt/slides/slide66.xml><?xml version="1.0" encoding="utf-8"?>
-<p:sld xmlns:a="http://schemas.openxmlformats.org/drawingml/2006/main" xmlns:r="http://schemas.openxmlformats.org/officeDocument/2006/relationships" xmlns:p="http://schemas.openxmlformats.org/presentationml/2006/main">
+<file path=ppt/slides/slide67.xml><?xml version="1.0" encoding="utf-8"?>
+<p:sld xmlns:a="http://schemas.openxmlformats.org/drawingml/2006/main" xmlns:r="http://schemas.openxmlformats.org/officeDocument/2006/relationships" xmlns:p="http://schemas.openxmlformats.org/presentationml/2006/main" show="0">
   <p:cSld>
     <p:spTree>
       <p:nvGrpSpPr>
@@ -14594,8 +14679,8 @@
 </p:sld>
 </file>
 
-<file path=ppt/slides/slide67.xml><?xml version="1.0" encoding="utf-8"?>
-<p:sld xmlns:a="http://schemas.openxmlformats.org/drawingml/2006/main" xmlns:r="http://schemas.openxmlformats.org/officeDocument/2006/relationships" xmlns:p="http://schemas.openxmlformats.org/presentationml/2006/main">
+<file path=ppt/slides/slide68.xml><?xml version="1.0" encoding="utf-8"?>
+<p:sld xmlns:a="http://schemas.openxmlformats.org/drawingml/2006/main" xmlns:r="http://schemas.openxmlformats.org/officeDocument/2006/relationships" xmlns:p="http://schemas.openxmlformats.org/presentationml/2006/main" show="0">
   <p:cSld>
     <p:spTree>
       <p:nvGrpSpPr>
@@ -14834,8 +14919,8 @@
 </p:sld>
 </file>
 
-<file path=ppt/slides/slide68.xml><?xml version="1.0" encoding="utf-8"?>
-<p:sld xmlns:a="http://schemas.openxmlformats.org/drawingml/2006/main" xmlns:r="http://schemas.openxmlformats.org/officeDocument/2006/relationships" xmlns:p="http://schemas.openxmlformats.org/presentationml/2006/main">
+<file path=ppt/slides/slide69.xml><?xml version="1.0" encoding="utf-8"?>
+<p:sld xmlns:a="http://schemas.openxmlformats.org/drawingml/2006/main" xmlns:r="http://schemas.openxmlformats.org/officeDocument/2006/relationships" xmlns:p="http://schemas.openxmlformats.org/presentationml/2006/main" show="0">
   <p:cSld>
     <p:spTree>
       <p:nvGrpSpPr>
@@ -15064,8 +15149,169 @@
 </p:sld>
 </file>
 
-<file path=ppt/slides/slide69.xml><?xml version="1.0" encoding="utf-8"?>
+<file path=ppt/slides/slide7.xml><?xml version="1.0" encoding="utf-8"?>
 <p:sld xmlns:a="http://schemas.openxmlformats.org/drawingml/2006/main" xmlns:r="http://schemas.openxmlformats.org/officeDocument/2006/relationships" xmlns:p="http://schemas.openxmlformats.org/presentationml/2006/main">
+  <p:cSld>
+    <p:spTree>
+      <p:nvGrpSpPr>
+        <p:cNvPr id="1" name=""/>
+        <p:cNvGrpSpPr/>
+        <p:nvPr/>
+      </p:nvGrpSpPr>
+      <p:grpSpPr>
+        <a:xfrm>
+          <a:off x="0" y="0"/>
+          <a:ext cx="0" cy="0"/>
+          <a:chOff x="0" y="0"/>
+          <a:chExt cx="0" cy="0"/>
+        </a:xfrm>
+      </p:grpSpPr>
+      <p:sp>
+        <p:nvSpPr>
+          <p:cNvPr id="2" name="Title 1">
+            <a:extLst>
+              <a:ext uri="{FF2B5EF4-FFF2-40B4-BE49-F238E27FC236}">
+                <a16:creationId xmlns:a16="http://schemas.microsoft.com/office/drawing/2014/main" id="{2A2E4FFC-2F49-449F-85F4-087043D3C485}"/>
+              </a:ext>
+            </a:extLst>
+          </p:cNvPr>
+          <p:cNvSpPr>
+            <a:spLocks noGrp="1"/>
+          </p:cNvSpPr>
+          <p:nvPr>
+            <p:ph type="title"/>
+          </p:nvPr>
+        </p:nvSpPr>
+        <p:spPr/>
+        <p:txBody>
+          <a:bodyPr/>
+          <a:lstStyle/>
+          <a:p>
+            <a:r>
+              <a:rPr lang="en-CA" dirty="0"/>
+              <a:t>Neural Network Configuration</a:t>
+            </a:r>
+            <a:endParaRPr lang="LID4096" dirty="0"/>
+          </a:p>
+        </p:txBody>
+      </p:sp>
+      <p:sp>
+        <p:nvSpPr>
+          <p:cNvPr id="3" name="Content Placeholder 2">
+            <a:extLst>
+              <a:ext uri="{FF2B5EF4-FFF2-40B4-BE49-F238E27FC236}">
+                <a16:creationId xmlns:a16="http://schemas.microsoft.com/office/drawing/2014/main" id="{68DB43FE-383C-4ADB-B9D1-04FC825061A2}"/>
+              </a:ext>
+            </a:extLst>
+          </p:cNvPr>
+          <p:cNvSpPr>
+            <a:spLocks noGrp="1"/>
+          </p:cNvSpPr>
+          <p:nvPr>
+            <p:ph idx="1"/>
+          </p:nvPr>
+        </p:nvSpPr>
+        <p:spPr>
+          <a:xfrm>
+            <a:off x="1451579" y="1853754"/>
+            <a:ext cx="9603275" cy="4199727"/>
+          </a:xfrm>
+        </p:spPr>
+        <p:txBody>
+          <a:bodyPr>
+            <a:normAutofit lnSpcReduction="10000"/>
+          </a:bodyPr>
+          <a:lstStyle/>
+          <a:p>
+            <a:r>
+              <a:rPr lang="en-CA" dirty="0"/>
+              <a:t>We’ve seen that neural networks offer a large amount of flexibility in their configuration.</a:t>
+            </a:r>
+          </a:p>
+          <a:p>
+            <a:r>
+              <a:rPr lang="en-CA" dirty="0"/>
+              <a:t>How do we determine the optimal structure?</a:t>
+            </a:r>
+          </a:p>
+          <a:p>
+            <a:r>
+              <a:rPr lang="en-CA" dirty="0"/>
+              <a:t>Generally, the true answer is to grid search it. </a:t>
+            </a:r>
+          </a:p>
+          <a:p>
+            <a:pPr lvl="1"/>
+            <a:r>
+              <a:rPr lang="en-CA" dirty="0"/>
+              <a:t>Neural networks are very flexible, and can ‘learn around’ lots of changes. </a:t>
+            </a:r>
+          </a:p>
+          <a:p>
+            <a:r>
+              <a:rPr lang="en-CA" dirty="0"/>
+              <a:t>We can use some guidelines to get started in a reasonable and smart way. </a:t>
+            </a:r>
+          </a:p>
+          <a:p>
+            <a:pPr lvl="1"/>
+            <a:r>
+              <a:rPr lang="en-CA" dirty="0"/>
+              <a:t>Problem types (image class, NLP, </a:t>
+            </a:r>
+            <a:r>
+              <a:rPr lang="en-CA" dirty="0" err="1"/>
+              <a:t>etc</a:t>
+            </a:r>
+            <a:r>
+              <a:rPr lang="en-CA" dirty="0"/>
+              <a:t>…) have architectures that work well, and most things (except innovations) are based on what worked before. </a:t>
+            </a:r>
+          </a:p>
+          <a:p>
+            <a:r>
+              <a:rPr lang="en-CA" dirty="0"/>
+              <a:t>This is largely getting used to </a:t>
+            </a:r>
+            <a:r>
+              <a:rPr lang="en-CA" dirty="0" err="1"/>
+              <a:t>pytorch</a:t>
+            </a:r>
+            <a:r>
+              <a:rPr lang="en-CA" dirty="0"/>
+              <a:t> and making adjustments there. </a:t>
+            </a:r>
+          </a:p>
+          <a:p>
+            <a:pPr lvl="1"/>
+            <a:r>
+              <a:rPr lang="en-CA" dirty="0"/>
+              <a:t>Play around with some models, get used to syntax, try some different models. </a:t>
+            </a:r>
+          </a:p>
+          <a:p>
+            <a:r>
+              <a:rPr lang="en-CA" dirty="0"/>
+              <a:t>More of our focus is now on speed – the faster we converge, the more we can test. </a:t>
+            </a:r>
+          </a:p>
+        </p:txBody>
+      </p:sp>
+    </p:spTree>
+    <p:extLst>
+      <p:ext uri="{BB962C8B-B14F-4D97-AF65-F5344CB8AC3E}">
+        <p14:creationId xmlns:p14="http://schemas.microsoft.com/office/powerpoint/2010/main" val="2495634073"/>
+      </p:ext>
+    </p:extLst>
+  </p:cSld>
+  <p:clrMapOvr>
+    <a:masterClrMapping/>
+  </p:clrMapOvr>
+</p:sld>
+</file>
+
+<file path=ppt/slides/slide70.xml><?xml version="1.0" encoding="utf-8"?>
+<p:sld xmlns:a="http://schemas.openxmlformats.org/drawingml/2006/main" xmlns:r="http://schemas.openxmlformats.org/officeDocument/2006/relationships" xmlns:p="http://schemas.openxmlformats.org/presentationml/2006/main" show="0">
   <p:cSld>
     <p:spTree>
       <p:nvGrpSpPr>
@@ -15197,169 +15443,8 @@
 </p:sld>
 </file>
 
-<file path=ppt/slides/slide7.xml><?xml version="1.0" encoding="utf-8"?>
-<p:sld xmlns:a="http://schemas.openxmlformats.org/drawingml/2006/main" xmlns:r="http://schemas.openxmlformats.org/officeDocument/2006/relationships" xmlns:p="http://schemas.openxmlformats.org/presentationml/2006/main">
-  <p:cSld>
-    <p:spTree>
-      <p:nvGrpSpPr>
-        <p:cNvPr id="1" name=""/>
-        <p:cNvGrpSpPr/>
-        <p:nvPr/>
-      </p:nvGrpSpPr>
-      <p:grpSpPr>
-        <a:xfrm>
-          <a:off x="0" y="0"/>
-          <a:ext cx="0" cy="0"/>
-          <a:chOff x="0" y="0"/>
-          <a:chExt cx="0" cy="0"/>
-        </a:xfrm>
-      </p:grpSpPr>
-      <p:sp>
-        <p:nvSpPr>
-          <p:cNvPr id="2" name="Title 1">
-            <a:extLst>
-              <a:ext uri="{FF2B5EF4-FFF2-40B4-BE49-F238E27FC236}">
-                <a16:creationId xmlns:a16="http://schemas.microsoft.com/office/drawing/2014/main" id="{2A2E4FFC-2F49-449F-85F4-087043D3C485}"/>
-              </a:ext>
-            </a:extLst>
-          </p:cNvPr>
-          <p:cNvSpPr>
-            <a:spLocks noGrp="1"/>
-          </p:cNvSpPr>
-          <p:nvPr>
-            <p:ph type="title"/>
-          </p:nvPr>
-        </p:nvSpPr>
-        <p:spPr/>
-        <p:txBody>
-          <a:bodyPr/>
-          <a:lstStyle/>
-          <a:p>
-            <a:r>
-              <a:rPr lang="en-CA" dirty="0"/>
-              <a:t>Neural Network Configuration</a:t>
-            </a:r>
-            <a:endParaRPr lang="LID4096" dirty="0"/>
-          </a:p>
-        </p:txBody>
-      </p:sp>
-      <p:sp>
-        <p:nvSpPr>
-          <p:cNvPr id="3" name="Content Placeholder 2">
-            <a:extLst>
-              <a:ext uri="{FF2B5EF4-FFF2-40B4-BE49-F238E27FC236}">
-                <a16:creationId xmlns:a16="http://schemas.microsoft.com/office/drawing/2014/main" id="{68DB43FE-383C-4ADB-B9D1-04FC825061A2}"/>
-              </a:ext>
-            </a:extLst>
-          </p:cNvPr>
-          <p:cNvSpPr>
-            <a:spLocks noGrp="1"/>
-          </p:cNvSpPr>
-          <p:nvPr>
-            <p:ph idx="1"/>
-          </p:nvPr>
-        </p:nvSpPr>
-        <p:spPr>
-          <a:xfrm>
-            <a:off x="1451579" y="1853754"/>
-            <a:ext cx="9603275" cy="4199727"/>
-          </a:xfrm>
-        </p:spPr>
-        <p:txBody>
-          <a:bodyPr>
-            <a:normAutofit lnSpcReduction="10000"/>
-          </a:bodyPr>
-          <a:lstStyle/>
-          <a:p>
-            <a:r>
-              <a:rPr lang="en-CA" dirty="0"/>
-              <a:t>We’ve seen that neural networks offer a large amount of flexibility in their configuration.</a:t>
-            </a:r>
-          </a:p>
-          <a:p>
-            <a:r>
-              <a:rPr lang="en-CA" dirty="0"/>
-              <a:t>How do we determine the optimal structure?</a:t>
-            </a:r>
-          </a:p>
-          <a:p>
-            <a:r>
-              <a:rPr lang="en-CA" dirty="0"/>
-              <a:t>Generally, the true answer is to grid search it. </a:t>
-            </a:r>
-          </a:p>
-          <a:p>
-            <a:pPr lvl="1"/>
-            <a:r>
-              <a:rPr lang="en-CA" dirty="0"/>
-              <a:t>Neural networks are very flexible, and can ‘learn around’ lots of changes. </a:t>
-            </a:r>
-          </a:p>
-          <a:p>
-            <a:r>
-              <a:rPr lang="en-CA" dirty="0"/>
-              <a:t>We can use some guidelines to get started in a reasonable and smart way. </a:t>
-            </a:r>
-          </a:p>
-          <a:p>
-            <a:pPr lvl="1"/>
-            <a:r>
-              <a:rPr lang="en-CA" dirty="0"/>
-              <a:t>Problem types (image class, NLP, </a:t>
-            </a:r>
-            <a:r>
-              <a:rPr lang="en-CA" dirty="0" err="1"/>
-              <a:t>etc</a:t>
-            </a:r>
-            <a:r>
-              <a:rPr lang="en-CA" dirty="0"/>
-              <a:t>…) have architectures that work well, and most things (except innovations) are based on what worked before. </a:t>
-            </a:r>
-          </a:p>
-          <a:p>
-            <a:r>
-              <a:rPr lang="en-CA" dirty="0"/>
-              <a:t>This is largely getting used to </a:t>
-            </a:r>
-            <a:r>
-              <a:rPr lang="en-CA" dirty="0" err="1"/>
-              <a:t>pytorch</a:t>
-            </a:r>
-            <a:r>
-              <a:rPr lang="en-CA" dirty="0"/>
-              <a:t> and making adjustments there. </a:t>
-            </a:r>
-          </a:p>
-          <a:p>
-            <a:pPr lvl="1"/>
-            <a:r>
-              <a:rPr lang="en-CA" dirty="0"/>
-              <a:t>Play around with some models, get used to syntax, try some different models. </a:t>
-            </a:r>
-          </a:p>
-          <a:p>
-            <a:r>
-              <a:rPr lang="en-CA" dirty="0"/>
-              <a:t>More of our focus is now on speed – the faster we converge, the more we can test. </a:t>
-            </a:r>
-          </a:p>
-        </p:txBody>
-      </p:sp>
-    </p:spTree>
-    <p:extLst>
-      <p:ext uri="{BB962C8B-B14F-4D97-AF65-F5344CB8AC3E}">
-        <p14:creationId xmlns:p14="http://schemas.microsoft.com/office/powerpoint/2010/main" val="2495634073"/>
-      </p:ext>
-    </p:extLst>
-  </p:cSld>
-  <p:clrMapOvr>
-    <a:masterClrMapping/>
-  </p:clrMapOvr>
-</p:sld>
-</file>
-
-<file path=ppt/slides/slide70.xml><?xml version="1.0" encoding="utf-8"?>
-<p:sld xmlns:a="http://schemas.openxmlformats.org/drawingml/2006/main" xmlns:r="http://schemas.openxmlformats.org/officeDocument/2006/relationships" xmlns:p="http://schemas.openxmlformats.org/presentationml/2006/main">
+<file path=ppt/slides/slide71.xml><?xml version="1.0" encoding="utf-8"?>
+<p:sld xmlns:a="http://schemas.openxmlformats.org/drawingml/2006/main" xmlns:r="http://schemas.openxmlformats.org/officeDocument/2006/relationships" xmlns:p="http://schemas.openxmlformats.org/presentationml/2006/main" show="0">
   <p:cSld>
     <p:spTree>
       <p:nvGrpSpPr>
@@ -15528,8 +15613,8 @@
 </p:sld>
 </file>
 
-<file path=ppt/slides/slide71.xml><?xml version="1.0" encoding="utf-8"?>
-<p:sld xmlns:a="http://schemas.openxmlformats.org/drawingml/2006/main" xmlns:r="http://schemas.openxmlformats.org/officeDocument/2006/relationships" xmlns:p="http://schemas.openxmlformats.org/presentationml/2006/main">
+<file path=ppt/slides/slide72.xml><?xml version="1.0" encoding="utf-8"?>
+<p:sld xmlns:a="http://schemas.openxmlformats.org/drawingml/2006/main" xmlns:r="http://schemas.openxmlformats.org/officeDocument/2006/relationships" xmlns:p="http://schemas.openxmlformats.org/presentationml/2006/main" show="0">
   <p:cSld>
     <p:spTree>
       <p:nvGrpSpPr>
@@ -15701,8 +15786,8 @@
 </p:sld>
 </file>
 
-<file path=ppt/slides/slide72.xml><?xml version="1.0" encoding="utf-8"?>
-<p:sld xmlns:a="http://schemas.openxmlformats.org/drawingml/2006/main" xmlns:r="http://schemas.openxmlformats.org/officeDocument/2006/relationships" xmlns:p="http://schemas.openxmlformats.org/presentationml/2006/main">
+<file path=ppt/slides/slide73.xml><?xml version="1.0" encoding="utf-8"?>
+<p:sld xmlns:a="http://schemas.openxmlformats.org/drawingml/2006/main" xmlns:r="http://schemas.openxmlformats.org/officeDocument/2006/relationships" xmlns:p="http://schemas.openxmlformats.org/presentationml/2006/main" show="0">
   <p:cSld>
     <p:spTree>
       <p:nvGrpSpPr>
@@ -15836,7 +15921,7 @@
 </p:sld>
 </file>
 
-<file path=ppt/slides/slide73.xml><?xml version="1.0" encoding="utf-8"?>
+<file path=ppt/slides/slide74.xml><?xml version="1.0" encoding="utf-8"?>
 <p:sld xmlns:a="http://schemas.openxmlformats.org/drawingml/2006/main" xmlns:r="http://schemas.openxmlformats.org/officeDocument/2006/relationships" xmlns:p="http://schemas.openxmlformats.org/presentationml/2006/main" show="0">
   <p:cSld>
     <p:spTree>
@@ -15979,8 +16064,8 @@
 </p:sld>
 </file>
 
-<file path=ppt/slides/slide74.xml><?xml version="1.0" encoding="utf-8"?>
-<p:sld xmlns:a="http://schemas.openxmlformats.org/drawingml/2006/main" xmlns:r="http://schemas.openxmlformats.org/officeDocument/2006/relationships" xmlns:p="http://schemas.openxmlformats.org/presentationml/2006/main">
+<file path=ppt/slides/slide75.xml><?xml version="1.0" encoding="utf-8"?>
+<p:sld xmlns:a="http://schemas.openxmlformats.org/drawingml/2006/main" xmlns:r="http://schemas.openxmlformats.org/officeDocument/2006/relationships" xmlns:p="http://schemas.openxmlformats.org/presentationml/2006/main" show="0">
   <p:cSld>
     <p:spTree>
       <p:nvGrpSpPr>
@@ -16122,8 +16207,8 @@
 </p:sld>
 </file>
 
-<file path=ppt/slides/slide75.xml><?xml version="1.0" encoding="utf-8"?>
-<p:sld xmlns:a="http://schemas.openxmlformats.org/drawingml/2006/main" xmlns:r="http://schemas.openxmlformats.org/officeDocument/2006/relationships" xmlns:p="http://schemas.openxmlformats.org/presentationml/2006/main">
+<file path=ppt/slides/slide76.xml><?xml version="1.0" encoding="utf-8"?>
+<p:sld xmlns:a="http://schemas.openxmlformats.org/drawingml/2006/main" xmlns:r="http://schemas.openxmlformats.org/officeDocument/2006/relationships" xmlns:p="http://schemas.openxmlformats.org/presentationml/2006/main" show="0">
   <p:cSld>
     <p:spTree>
       <p:nvGrpSpPr>
@@ -16401,8 +16486,8 @@
 </p:sld>
 </file>
 
-<file path=ppt/slides/slide76.xml><?xml version="1.0" encoding="utf-8"?>
-<p:sld xmlns:a="http://schemas.openxmlformats.org/drawingml/2006/main" xmlns:r="http://schemas.openxmlformats.org/officeDocument/2006/relationships" xmlns:p="http://schemas.openxmlformats.org/presentationml/2006/main">
+<file path=ppt/slides/slide77.xml><?xml version="1.0" encoding="utf-8"?>
+<p:sld xmlns:a="http://schemas.openxmlformats.org/drawingml/2006/main" xmlns:r="http://schemas.openxmlformats.org/officeDocument/2006/relationships" xmlns:p="http://schemas.openxmlformats.org/presentationml/2006/main" show="0">
   <p:cSld>
     <p:spTree>
       <p:nvGrpSpPr>
@@ -16666,8 +16751,8 @@
 </p:sld>
 </file>
 
-<file path=ppt/slides/slide77.xml><?xml version="1.0" encoding="utf-8"?>
-<p:sld xmlns:a="http://schemas.openxmlformats.org/drawingml/2006/main" xmlns:r="http://schemas.openxmlformats.org/officeDocument/2006/relationships" xmlns:p="http://schemas.openxmlformats.org/presentationml/2006/main">
+<file path=ppt/slides/slide78.xml><?xml version="1.0" encoding="utf-8"?>
+<p:sld xmlns:a="http://schemas.openxmlformats.org/drawingml/2006/main" xmlns:r="http://schemas.openxmlformats.org/officeDocument/2006/relationships" xmlns:p="http://schemas.openxmlformats.org/presentationml/2006/main" show="0">
   <p:cSld>
     <p:spTree>
       <p:nvGrpSpPr>
@@ -16916,8 +17001,8 @@
 </p:sld>
 </file>
 
-<file path=ppt/slides/slide78.xml><?xml version="1.0" encoding="utf-8"?>
-<p:sld xmlns:a="http://schemas.openxmlformats.org/drawingml/2006/main" xmlns:r="http://schemas.openxmlformats.org/officeDocument/2006/relationships" xmlns:p="http://schemas.openxmlformats.org/presentationml/2006/main">
+<file path=ppt/slides/slide79.xml><?xml version="1.0" encoding="utf-8"?>
+<p:sld xmlns:a="http://schemas.openxmlformats.org/drawingml/2006/main" xmlns:r="http://schemas.openxmlformats.org/officeDocument/2006/relationships" xmlns:p="http://schemas.openxmlformats.org/presentationml/2006/main" show="0">
   <p:cSld>
     <p:spTree>
       <p:nvGrpSpPr>
@@ -17074,227 +17159,6 @@
     <p:extLst>
       <p:ext uri="{BB962C8B-B14F-4D97-AF65-F5344CB8AC3E}">
         <p14:creationId xmlns:p14="http://schemas.microsoft.com/office/powerpoint/2010/main" val="1535090187"/>
-      </p:ext>
-    </p:extLst>
-  </p:cSld>
-  <p:clrMapOvr>
-    <a:masterClrMapping/>
-  </p:clrMapOvr>
-</p:sld>
-</file>
-
-<file path=ppt/slides/slide79.xml><?xml version="1.0" encoding="utf-8"?>
-<p:sld xmlns:a="http://schemas.openxmlformats.org/drawingml/2006/main" xmlns:r="http://schemas.openxmlformats.org/officeDocument/2006/relationships" xmlns:p="http://schemas.openxmlformats.org/presentationml/2006/main">
-  <p:cSld>
-    <p:spTree>
-      <p:nvGrpSpPr>
-        <p:cNvPr id="1" name="">
-          <a:extLst>
-            <a:ext uri="{FF2B5EF4-FFF2-40B4-BE49-F238E27FC236}">
-              <a16:creationId xmlns:a16="http://schemas.microsoft.com/office/drawing/2014/main" id="{B9FB4B24-97CD-5F03-2D2E-FD0A39E7C61E}"/>
-            </a:ext>
-          </a:extLst>
-        </p:cNvPr>
-        <p:cNvGrpSpPr/>
-        <p:nvPr/>
-      </p:nvGrpSpPr>
-      <p:grpSpPr>
-        <a:xfrm>
-          <a:off x="0" y="0"/>
-          <a:ext cx="0" cy="0"/>
-          <a:chOff x="0" y="0"/>
-          <a:chExt cx="0" cy="0"/>
-        </a:xfrm>
-      </p:grpSpPr>
-      <p:sp>
-        <p:nvSpPr>
-          <p:cNvPr id="2" name="Title 1">
-            <a:extLst>
-              <a:ext uri="{FF2B5EF4-FFF2-40B4-BE49-F238E27FC236}">
-                <a16:creationId xmlns:a16="http://schemas.microsoft.com/office/drawing/2014/main" id="{C794B28F-B30C-CF50-4726-2B6E8AAA139D}"/>
-              </a:ext>
-            </a:extLst>
-          </p:cNvPr>
-          <p:cNvSpPr>
-            <a:spLocks noGrp="1"/>
-          </p:cNvSpPr>
-          <p:nvPr>
-            <p:ph type="title"/>
-          </p:nvPr>
-        </p:nvSpPr>
-        <p:spPr/>
-        <p:txBody>
-          <a:bodyPr/>
-          <a:lstStyle/>
-          <a:p>
-            <a:r>
-              <a:rPr lang="en-US" dirty="0"/>
-              <a:t>Example – Training is Unpredictable</a:t>
-            </a:r>
-          </a:p>
-        </p:txBody>
-      </p:sp>
-      <p:sp>
-        <p:nvSpPr>
-          <p:cNvPr id="3" name="Content Placeholder 2">
-            <a:extLst>
-              <a:ext uri="{FF2B5EF4-FFF2-40B4-BE49-F238E27FC236}">
-                <a16:creationId xmlns:a16="http://schemas.microsoft.com/office/drawing/2014/main" id="{2BC0F518-398C-71B1-266C-885802F1FE8A}"/>
-              </a:ext>
-            </a:extLst>
-          </p:cNvPr>
-          <p:cNvSpPr>
-            <a:spLocks noGrp="1"/>
-          </p:cNvSpPr>
-          <p:nvPr>
-            <p:ph idx="1"/>
-          </p:nvPr>
-        </p:nvSpPr>
-        <p:spPr>
-          <a:xfrm>
-            <a:off x="1134319" y="1853754"/>
-            <a:ext cx="5787181" cy="4199727"/>
-          </a:xfrm>
-        </p:spPr>
-        <p:txBody>
-          <a:bodyPr/>
-          <a:lstStyle/>
-          <a:p>
-            <a:r>
-              <a:rPr lang="en-US" dirty="0"/>
-              <a:t>The training of these models can be unpredictable, especially with complex ones. </a:t>
-            </a:r>
-          </a:p>
-          <a:p>
-            <a:pPr lvl="1"/>
-            <a:r>
-              <a:rPr lang="en-US" dirty="0"/>
-              <a:t>There are many variables that impact the model. </a:t>
-            </a:r>
-          </a:p>
-          <a:p>
-            <a:pPr lvl="1"/>
-            <a:r>
-              <a:rPr lang="en-US" dirty="0"/>
-              <a:t>There’s randomness. </a:t>
-            </a:r>
-          </a:p>
-          <a:p>
-            <a:r>
-              <a:rPr lang="en-US" dirty="0"/>
-              <a:t>I got one execution that looked like that. </a:t>
-            </a:r>
-          </a:p>
-          <a:p>
-            <a:pPr lvl="1"/>
-            <a:r>
-              <a:rPr lang="en-US" dirty="0"/>
-              <a:t>Validation accuracy went from 93% to 23% to 93%. </a:t>
-            </a:r>
-          </a:p>
-          <a:p>
-            <a:r>
-              <a:rPr lang="en-US" dirty="0"/>
-              <a:t>The loss curve is not convex and simple. </a:t>
-            </a:r>
-          </a:p>
-          <a:p>
-            <a:pPr lvl="1"/>
-            <a:r>
-              <a:rPr lang="en-US" dirty="0"/>
-              <a:t>Sometimes the results wander quite a lot. </a:t>
-            </a:r>
-          </a:p>
-          <a:p>
-            <a:pPr lvl="1"/>
-            <a:r>
-              <a:rPr lang="en-US" dirty="0"/>
-              <a:t>This is where having the optimizer stuff right shows.</a:t>
-            </a:r>
-          </a:p>
-        </p:txBody>
-      </p:sp>
-      <p:pic>
-        <p:nvPicPr>
-          <p:cNvPr id="4" name="Picture 3">
-            <a:extLst>
-              <a:ext uri="{FF2B5EF4-FFF2-40B4-BE49-F238E27FC236}">
-                <a16:creationId xmlns:a16="http://schemas.microsoft.com/office/drawing/2014/main" id="{7BF57AFD-A7E2-6D5B-5395-59F2D06AEE76}"/>
-              </a:ext>
-            </a:extLst>
-          </p:cNvPr>
-          <p:cNvPicPr>
-            <a:picLocks noChangeAspect="1"/>
-          </p:cNvPicPr>
-          <p:nvPr/>
-        </p:nvPicPr>
-        <p:blipFill>
-          <a:blip r:embed="rId2"/>
-          <a:stretch>
-            <a:fillRect/>
-          </a:stretch>
-        </p:blipFill>
-        <p:spPr>
-          <a:xfrm>
-            <a:off x="6921500" y="1510702"/>
-            <a:ext cx="5270500" cy="3035300"/>
-          </a:xfrm>
-          <a:prstGeom prst="rect">
-            <a:avLst/>
-          </a:prstGeom>
-        </p:spPr>
-      </p:pic>
-      <p:pic>
-        <p:nvPicPr>
-          <p:cNvPr id="13314" name="Picture 2" descr="Why is my validation loss lower than my training loss? - PyImageSearch">
-            <a:extLst>
-              <a:ext uri="{FF2B5EF4-FFF2-40B4-BE49-F238E27FC236}">
-                <a16:creationId xmlns:a16="http://schemas.microsoft.com/office/drawing/2014/main" id="{24E11F2D-5D7D-6DC3-55AE-6092D15E576E}"/>
-              </a:ext>
-            </a:extLst>
-          </p:cNvPr>
-          <p:cNvPicPr>
-            <a:picLocks noChangeAspect="1" noChangeArrowheads="1"/>
-          </p:cNvPicPr>
-          <p:nvPr/>
-        </p:nvPicPr>
-        <p:blipFill>
-          <a:blip r:embed="rId3">
-            <a:extLst>
-              <a:ext uri="{28A0092B-C50C-407E-A947-70E740481C1C}">
-                <a14:useLocalDpi xmlns:a14="http://schemas.microsoft.com/office/drawing/2010/main" val="0"/>
-              </a:ext>
-            </a:extLst>
-          </a:blip>
-          <a:srcRect/>
-          <a:stretch>
-            <a:fillRect/>
-          </a:stretch>
-        </p:blipFill>
-        <p:spPr bwMode="auto">
-          <a:xfrm>
-            <a:off x="8154881" y="4543385"/>
-            <a:ext cx="4037119" cy="2314615"/>
-          </a:xfrm>
-          <a:prstGeom prst="rect">
-            <a:avLst/>
-          </a:prstGeom>
-          <a:noFill/>
-          <a:extLst>
-            <a:ext uri="{909E8E84-426E-40DD-AFC4-6F175D3DCCD1}">
-              <a14:hiddenFill xmlns:a14="http://schemas.microsoft.com/office/drawing/2010/main">
-                <a:solidFill>
-                  <a:srgbClr val="FFFFFF"/>
-                </a:solidFill>
-              </a14:hiddenFill>
-            </a:ext>
-          </a:extLst>
-        </p:spPr>
-      </p:pic>
-    </p:spTree>
-    <p:extLst>
-      <p:ext uri="{BB962C8B-B14F-4D97-AF65-F5344CB8AC3E}">
-        <p14:creationId xmlns:p14="http://schemas.microsoft.com/office/powerpoint/2010/main" val="1911758208"/>
       </p:ext>
     </p:extLst>
   </p:cSld>
@@ -17557,6 +17421,227 @@
         <p:cNvPr id="1" name="">
           <a:extLst>
             <a:ext uri="{FF2B5EF4-FFF2-40B4-BE49-F238E27FC236}">
+              <a16:creationId xmlns:a16="http://schemas.microsoft.com/office/drawing/2014/main" id="{B9FB4B24-97CD-5F03-2D2E-FD0A39E7C61E}"/>
+            </a:ext>
+          </a:extLst>
+        </p:cNvPr>
+        <p:cNvGrpSpPr/>
+        <p:nvPr/>
+      </p:nvGrpSpPr>
+      <p:grpSpPr>
+        <a:xfrm>
+          <a:off x="0" y="0"/>
+          <a:ext cx="0" cy="0"/>
+          <a:chOff x="0" y="0"/>
+          <a:chExt cx="0" cy="0"/>
+        </a:xfrm>
+      </p:grpSpPr>
+      <p:sp>
+        <p:nvSpPr>
+          <p:cNvPr id="2" name="Title 1">
+            <a:extLst>
+              <a:ext uri="{FF2B5EF4-FFF2-40B4-BE49-F238E27FC236}">
+                <a16:creationId xmlns:a16="http://schemas.microsoft.com/office/drawing/2014/main" id="{C794B28F-B30C-CF50-4726-2B6E8AAA139D}"/>
+              </a:ext>
+            </a:extLst>
+          </p:cNvPr>
+          <p:cNvSpPr>
+            <a:spLocks noGrp="1"/>
+          </p:cNvSpPr>
+          <p:nvPr>
+            <p:ph type="title"/>
+          </p:nvPr>
+        </p:nvSpPr>
+        <p:spPr/>
+        <p:txBody>
+          <a:bodyPr/>
+          <a:lstStyle/>
+          <a:p>
+            <a:r>
+              <a:rPr lang="en-US" dirty="0"/>
+              <a:t>Example – Training is Unpredictable</a:t>
+            </a:r>
+          </a:p>
+        </p:txBody>
+      </p:sp>
+      <p:sp>
+        <p:nvSpPr>
+          <p:cNvPr id="3" name="Content Placeholder 2">
+            <a:extLst>
+              <a:ext uri="{FF2B5EF4-FFF2-40B4-BE49-F238E27FC236}">
+                <a16:creationId xmlns:a16="http://schemas.microsoft.com/office/drawing/2014/main" id="{2BC0F518-398C-71B1-266C-885802F1FE8A}"/>
+              </a:ext>
+            </a:extLst>
+          </p:cNvPr>
+          <p:cNvSpPr>
+            <a:spLocks noGrp="1"/>
+          </p:cNvSpPr>
+          <p:nvPr>
+            <p:ph idx="1"/>
+          </p:nvPr>
+        </p:nvSpPr>
+        <p:spPr>
+          <a:xfrm>
+            <a:off x="1134319" y="1853754"/>
+            <a:ext cx="5787181" cy="4199727"/>
+          </a:xfrm>
+        </p:spPr>
+        <p:txBody>
+          <a:bodyPr/>
+          <a:lstStyle/>
+          <a:p>
+            <a:r>
+              <a:rPr lang="en-US" dirty="0"/>
+              <a:t>The training of these models can be unpredictable, especially with complex ones. </a:t>
+            </a:r>
+          </a:p>
+          <a:p>
+            <a:pPr lvl="1"/>
+            <a:r>
+              <a:rPr lang="en-US" dirty="0"/>
+              <a:t>There are many variables that impact the model. </a:t>
+            </a:r>
+          </a:p>
+          <a:p>
+            <a:pPr lvl="1"/>
+            <a:r>
+              <a:rPr lang="en-US" dirty="0"/>
+              <a:t>There’s randomness. </a:t>
+            </a:r>
+          </a:p>
+          <a:p>
+            <a:r>
+              <a:rPr lang="en-US" dirty="0"/>
+              <a:t>I got one execution that looked like that. </a:t>
+            </a:r>
+          </a:p>
+          <a:p>
+            <a:pPr lvl="1"/>
+            <a:r>
+              <a:rPr lang="en-US" dirty="0"/>
+              <a:t>Validation accuracy went from 93% to 23% to 93%. </a:t>
+            </a:r>
+          </a:p>
+          <a:p>
+            <a:r>
+              <a:rPr lang="en-US" dirty="0"/>
+              <a:t>The loss curve is not convex and simple. </a:t>
+            </a:r>
+          </a:p>
+          <a:p>
+            <a:pPr lvl="1"/>
+            <a:r>
+              <a:rPr lang="en-US" dirty="0"/>
+              <a:t>Sometimes the results wander quite a lot. </a:t>
+            </a:r>
+          </a:p>
+          <a:p>
+            <a:pPr lvl="1"/>
+            <a:r>
+              <a:rPr lang="en-US" dirty="0"/>
+              <a:t>This is where having the optimizer stuff right shows.</a:t>
+            </a:r>
+          </a:p>
+        </p:txBody>
+      </p:sp>
+      <p:pic>
+        <p:nvPicPr>
+          <p:cNvPr id="4" name="Picture 3">
+            <a:extLst>
+              <a:ext uri="{FF2B5EF4-FFF2-40B4-BE49-F238E27FC236}">
+                <a16:creationId xmlns:a16="http://schemas.microsoft.com/office/drawing/2014/main" id="{7BF57AFD-A7E2-6D5B-5395-59F2D06AEE76}"/>
+              </a:ext>
+            </a:extLst>
+          </p:cNvPr>
+          <p:cNvPicPr>
+            <a:picLocks noChangeAspect="1"/>
+          </p:cNvPicPr>
+          <p:nvPr/>
+        </p:nvPicPr>
+        <p:blipFill>
+          <a:blip r:embed="rId2"/>
+          <a:stretch>
+            <a:fillRect/>
+          </a:stretch>
+        </p:blipFill>
+        <p:spPr>
+          <a:xfrm>
+            <a:off x="6921500" y="1510702"/>
+            <a:ext cx="5270500" cy="3035300"/>
+          </a:xfrm>
+          <a:prstGeom prst="rect">
+            <a:avLst/>
+          </a:prstGeom>
+        </p:spPr>
+      </p:pic>
+      <p:pic>
+        <p:nvPicPr>
+          <p:cNvPr id="13314" name="Picture 2" descr="Why is my validation loss lower than my training loss? - PyImageSearch">
+            <a:extLst>
+              <a:ext uri="{FF2B5EF4-FFF2-40B4-BE49-F238E27FC236}">
+                <a16:creationId xmlns:a16="http://schemas.microsoft.com/office/drawing/2014/main" id="{24E11F2D-5D7D-6DC3-55AE-6092D15E576E}"/>
+              </a:ext>
+            </a:extLst>
+          </p:cNvPr>
+          <p:cNvPicPr>
+            <a:picLocks noChangeAspect="1" noChangeArrowheads="1"/>
+          </p:cNvPicPr>
+          <p:nvPr/>
+        </p:nvPicPr>
+        <p:blipFill>
+          <a:blip r:embed="rId3">
+            <a:extLst>
+              <a:ext uri="{28A0092B-C50C-407E-A947-70E740481C1C}">
+                <a14:useLocalDpi xmlns:a14="http://schemas.microsoft.com/office/drawing/2010/main" val="0"/>
+              </a:ext>
+            </a:extLst>
+          </a:blip>
+          <a:srcRect/>
+          <a:stretch>
+            <a:fillRect/>
+          </a:stretch>
+        </p:blipFill>
+        <p:spPr bwMode="auto">
+          <a:xfrm>
+            <a:off x="8154881" y="4543385"/>
+            <a:ext cx="4037119" cy="2314615"/>
+          </a:xfrm>
+          <a:prstGeom prst="rect">
+            <a:avLst/>
+          </a:prstGeom>
+          <a:noFill/>
+          <a:extLst>
+            <a:ext uri="{909E8E84-426E-40DD-AFC4-6F175D3DCCD1}">
+              <a14:hiddenFill xmlns:a14="http://schemas.microsoft.com/office/drawing/2010/main">
+                <a:solidFill>
+                  <a:srgbClr val="FFFFFF"/>
+                </a:solidFill>
+              </a14:hiddenFill>
+            </a:ext>
+          </a:extLst>
+        </p:spPr>
+      </p:pic>
+    </p:spTree>
+    <p:extLst>
+      <p:ext uri="{BB962C8B-B14F-4D97-AF65-F5344CB8AC3E}">
+        <p14:creationId xmlns:p14="http://schemas.microsoft.com/office/powerpoint/2010/main" val="1911758208"/>
+      </p:ext>
+    </p:extLst>
+  </p:cSld>
+  <p:clrMapOvr>
+    <a:masterClrMapping/>
+  </p:clrMapOvr>
+</p:sld>
+</file>
+
+<file path=ppt/slides/slide81.xml><?xml version="1.0" encoding="utf-8"?>
+<p:sld xmlns:a="http://schemas.openxmlformats.org/drawingml/2006/main" xmlns:r="http://schemas.openxmlformats.org/officeDocument/2006/relationships" xmlns:p="http://schemas.openxmlformats.org/presentationml/2006/main" show="0">
+  <p:cSld>
+    <p:spTree>
+      <p:nvGrpSpPr>
+        <p:cNvPr id="1" name="">
+          <a:extLst>
+            <a:ext uri="{FF2B5EF4-FFF2-40B4-BE49-F238E27FC236}">
               <a16:creationId xmlns:a16="http://schemas.microsoft.com/office/drawing/2014/main" id="{8CE24E92-8BE8-FF5D-A1C6-7E359D556360}"/>
             </a:ext>
           </a:extLst>
@@ -17708,8 +17793,8 @@
 </p:sld>
 </file>
 
-<file path=ppt/slides/slide81.xml><?xml version="1.0" encoding="utf-8"?>
-<p:sld xmlns:a="http://schemas.openxmlformats.org/drawingml/2006/main" xmlns:r="http://schemas.openxmlformats.org/officeDocument/2006/relationships" xmlns:p="http://schemas.openxmlformats.org/presentationml/2006/main">
+<file path=ppt/slides/slide82.xml><?xml version="1.0" encoding="utf-8"?>
+<p:sld xmlns:a="http://schemas.openxmlformats.org/drawingml/2006/main" xmlns:r="http://schemas.openxmlformats.org/officeDocument/2006/relationships" xmlns:p="http://schemas.openxmlformats.org/presentationml/2006/main" show="0">
   <p:cSld>
     <p:spTree>
       <p:nvGrpSpPr>

--- a/reference_content/Slides/pytorch_optimization.pptx
+++ b/reference_content/Slides/pytorch_optimization.pptx
@@ -11,82 +11,87 @@
     <p:sldId id="278" r:id="rId5"/>
     <p:sldId id="277" r:id="rId6"/>
     <p:sldId id="256" r:id="rId7"/>
-    <p:sldId id="257" r:id="rId8"/>
-    <p:sldId id="287" r:id="rId9"/>
-    <p:sldId id="258" r:id="rId10"/>
-    <p:sldId id="259" r:id="rId11"/>
-    <p:sldId id="266" r:id="rId12"/>
-    <p:sldId id="264" r:id="rId13"/>
-    <p:sldId id="265" r:id="rId14"/>
-    <p:sldId id="279" r:id="rId15"/>
-    <p:sldId id="281" r:id="rId16"/>
-    <p:sldId id="293" r:id="rId17"/>
-    <p:sldId id="260" r:id="rId18"/>
-    <p:sldId id="289" r:id="rId19"/>
-    <p:sldId id="261" r:id="rId20"/>
-    <p:sldId id="262" r:id="rId21"/>
-    <p:sldId id="338" r:id="rId22"/>
-    <p:sldId id="282" r:id="rId23"/>
-    <p:sldId id="263" r:id="rId24"/>
-    <p:sldId id="339" r:id="rId25"/>
-    <p:sldId id="271" r:id="rId26"/>
-    <p:sldId id="274" r:id="rId27"/>
-    <p:sldId id="272" r:id="rId28"/>
-    <p:sldId id="267" r:id="rId29"/>
-    <p:sldId id="273" r:id="rId30"/>
-    <p:sldId id="275" r:id="rId31"/>
-    <p:sldId id="268" r:id="rId32"/>
-    <p:sldId id="295" r:id="rId33"/>
-    <p:sldId id="294" r:id="rId34"/>
-    <p:sldId id="276" r:id="rId35"/>
-    <p:sldId id="283" r:id="rId36"/>
-    <p:sldId id="284" r:id="rId37"/>
-    <p:sldId id="286" r:id="rId38"/>
-    <p:sldId id="285" r:id="rId39"/>
-    <p:sldId id="288" r:id="rId40"/>
-    <p:sldId id="296" r:id="rId41"/>
-    <p:sldId id="269" r:id="rId42"/>
-    <p:sldId id="270" r:id="rId43"/>
-    <p:sldId id="298" r:id="rId44"/>
-    <p:sldId id="299" r:id="rId45"/>
-    <p:sldId id="300" r:id="rId46"/>
-    <p:sldId id="301" r:id="rId47"/>
-    <p:sldId id="302" r:id="rId48"/>
-    <p:sldId id="303" r:id="rId49"/>
-    <p:sldId id="304" r:id="rId50"/>
-    <p:sldId id="305" r:id="rId51"/>
-    <p:sldId id="306" r:id="rId52"/>
-    <p:sldId id="307" r:id="rId53"/>
-    <p:sldId id="308" r:id="rId54"/>
-    <p:sldId id="309" r:id="rId55"/>
-    <p:sldId id="310" r:id="rId56"/>
-    <p:sldId id="311" r:id="rId57"/>
-    <p:sldId id="312" r:id="rId58"/>
-    <p:sldId id="313" r:id="rId59"/>
-    <p:sldId id="314" r:id="rId60"/>
-    <p:sldId id="315" r:id="rId61"/>
-    <p:sldId id="316" r:id="rId62"/>
-    <p:sldId id="317" r:id="rId63"/>
-    <p:sldId id="318" r:id="rId64"/>
-    <p:sldId id="319" r:id="rId65"/>
-    <p:sldId id="320" r:id="rId66"/>
-    <p:sldId id="321" r:id="rId67"/>
-    <p:sldId id="322" r:id="rId68"/>
-    <p:sldId id="323" r:id="rId69"/>
-    <p:sldId id="324" r:id="rId70"/>
-    <p:sldId id="325" r:id="rId71"/>
-    <p:sldId id="326" r:id="rId72"/>
-    <p:sldId id="327" r:id="rId73"/>
-    <p:sldId id="328" r:id="rId74"/>
-    <p:sldId id="329" r:id="rId75"/>
-    <p:sldId id="330" r:id="rId76"/>
-    <p:sldId id="331" r:id="rId77"/>
-    <p:sldId id="332" r:id="rId78"/>
-    <p:sldId id="333" r:id="rId79"/>
-    <p:sldId id="334" r:id="rId80"/>
-    <p:sldId id="335" r:id="rId81"/>
-    <p:sldId id="336" r:id="rId82"/>
-    <p:sldId id="337" r:id="rId83"/>
+    <p:sldId id="344" r:id="rId8"/>
+    <p:sldId id="257" r:id="rId9"/>
+    <p:sldId id="287" r:id="rId10"/>
+    <p:sldId id="343" r:id="rId11"/>
+    <p:sldId id="258" r:id="rId12"/>
+    <p:sldId id="259" r:id="rId13"/>
+    <p:sldId id="266" r:id="rId14"/>
+    <p:sldId id="264" r:id="rId15"/>
+    <p:sldId id="265" r:id="rId16"/>
+    <p:sldId id="279" r:id="rId17"/>
+    <p:sldId id="281" r:id="rId18"/>
+    <p:sldId id="293" r:id="rId19"/>
+    <p:sldId id="260" r:id="rId20"/>
+    <p:sldId id="289" r:id="rId21"/>
+    <p:sldId id="261" r:id="rId22"/>
+    <p:sldId id="262" r:id="rId23"/>
+    <p:sldId id="338" r:id="rId24"/>
+    <p:sldId id="282" r:id="rId25"/>
+    <p:sldId id="263" r:id="rId26"/>
+    <p:sldId id="339" r:id="rId27"/>
+    <p:sldId id="271" r:id="rId28"/>
+    <p:sldId id="274" r:id="rId29"/>
+    <p:sldId id="272" r:id="rId30"/>
+    <p:sldId id="267" r:id="rId31"/>
+    <p:sldId id="273" r:id="rId32"/>
+    <p:sldId id="275" r:id="rId33"/>
+    <p:sldId id="295" r:id="rId34"/>
+    <p:sldId id="268" r:id="rId35"/>
+    <p:sldId id="294" r:id="rId36"/>
+    <p:sldId id="276" r:id="rId37"/>
+    <p:sldId id="283" r:id="rId38"/>
+    <p:sldId id="284" r:id="rId39"/>
+    <p:sldId id="286" r:id="rId40"/>
+    <p:sldId id="285" r:id="rId41"/>
+    <p:sldId id="288" r:id="rId42"/>
+    <p:sldId id="296" r:id="rId43"/>
+    <p:sldId id="269" r:id="rId44"/>
+    <p:sldId id="340" r:id="rId45"/>
+    <p:sldId id="341" r:id="rId46"/>
+    <p:sldId id="342" r:id="rId47"/>
+    <p:sldId id="270" r:id="rId48"/>
+    <p:sldId id="298" r:id="rId49"/>
+    <p:sldId id="299" r:id="rId50"/>
+    <p:sldId id="300" r:id="rId51"/>
+    <p:sldId id="301" r:id="rId52"/>
+    <p:sldId id="302" r:id="rId53"/>
+    <p:sldId id="303" r:id="rId54"/>
+    <p:sldId id="304" r:id="rId55"/>
+    <p:sldId id="305" r:id="rId56"/>
+    <p:sldId id="306" r:id="rId57"/>
+    <p:sldId id="307" r:id="rId58"/>
+    <p:sldId id="308" r:id="rId59"/>
+    <p:sldId id="309" r:id="rId60"/>
+    <p:sldId id="310" r:id="rId61"/>
+    <p:sldId id="311" r:id="rId62"/>
+    <p:sldId id="312" r:id="rId63"/>
+    <p:sldId id="313" r:id="rId64"/>
+    <p:sldId id="314" r:id="rId65"/>
+    <p:sldId id="315" r:id="rId66"/>
+    <p:sldId id="316" r:id="rId67"/>
+    <p:sldId id="317" r:id="rId68"/>
+    <p:sldId id="318" r:id="rId69"/>
+    <p:sldId id="319" r:id="rId70"/>
+    <p:sldId id="320" r:id="rId71"/>
+    <p:sldId id="321" r:id="rId72"/>
+    <p:sldId id="322" r:id="rId73"/>
+    <p:sldId id="323" r:id="rId74"/>
+    <p:sldId id="324" r:id="rId75"/>
+    <p:sldId id="325" r:id="rId76"/>
+    <p:sldId id="326" r:id="rId77"/>
+    <p:sldId id="327" r:id="rId78"/>
+    <p:sldId id="328" r:id="rId79"/>
+    <p:sldId id="329" r:id="rId80"/>
+    <p:sldId id="330" r:id="rId81"/>
+    <p:sldId id="331" r:id="rId82"/>
+    <p:sldId id="332" r:id="rId83"/>
+    <p:sldId id="333" r:id="rId84"/>
+    <p:sldId id="334" r:id="rId85"/>
+    <p:sldId id="335" r:id="rId86"/>
+    <p:sldId id="336" r:id="rId87"/>
+    <p:sldId id="337" r:id="rId88"/>
   </p:sldIdLst>
   <p:sldSz cx="12192000" cy="6858000"/>
   <p:notesSz cx="6858000" cy="9144000"/>
@@ -196,8 +201,10 @@
             <p14:sldId id="278"/>
             <p14:sldId id="277"/>
             <p14:sldId id="256"/>
+            <p14:sldId id="344"/>
             <p14:sldId id="257"/>
             <p14:sldId id="287"/>
+            <p14:sldId id="343"/>
             <p14:sldId id="258"/>
             <p14:sldId id="259"/>
             <p14:sldId id="266"/>
@@ -220,8 +227,8 @@
             <p14:sldId id="267"/>
             <p14:sldId id="273"/>
             <p14:sldId id="275"/>
+            <p14:sldId id="295"/>
             <p14:sldId id="268"/>
-            <p14:sldId id="295"/>
             <p14:sldId id="294"/>
             <p14:sldId id="276"/>
             <p14:sldId id="283"/>
@@ -231,6 +238,9 @@
             <p14:sldId id="288"/>
             <p14:sldId id="296"/>
             <p14:sldId id="269"/>
+            <p14:sldId id="340"/>
+            <p14:sldId id="341"/>
+            <p14:sldId id="342"/>
             <p14:sldId id="270"/>
           </p14:sldIdLst>
         </p14:section>
@@ -3925,14 +3935,34 @@
           <a:p>
             <a:r>
               <a:rPr lang="en-US" dirty="0"/>
-              <a:t>Today (roughly chapter 4):</a:t>
-            </a:r>
-          </a:p>
-          <a:p>
-            <a:pPr lvl="1"/>
+              <a:t>Today – tuning, </a:t>
+            </a:r>
             <a:r>
               <a:rPr lang="en-US" dirty="0" err="1"/>
-              <a:t>Tensorflow</a:t>
+              <a:t>tensorboard</a:t>
+            </a:r>
+            <a:r>
+              <a:rPr lang="en-US" dirty="0"/>
+              <a:t>, </a:t>
+            </a:r>
+            <a:r>
+              <a:rPr lang="en-US" dirty="0" err="1"/>
+              <a:t>raytune</a:t>
+            </a:r>
+            <a:r>
+              <a:rPr lang="en-US" dirty="0"/>
+              <a:t>. </a:t>
+            </a:r>
+          </a:p>
+          <a:p>
+            <a:pPr lvl="1"/>
+            <a:r>
+              <a:rPr lang="en-US" dirty="0"/>
+              <a:t>First – outline of </a:t>
+            </a:r>
+            <a:r>
+              <a:rPr lang="en-US" dirty="0" err="1"/>
+              <a:t>tensorboard</a:t>
             </a:r>
             <a:r>
               <a:rPr lang="en-US" dirty="0"/>
@@ -3940,74 +3970,39 @@
             </a:r>
             <a:r>
               <a:rPr lang="en-US" dirty="0" err="1"/>
-              <a:t>keras</a:t>
-            </a:r>
-            <a:r>
-              <a:rPr lang="en-US" dirty="0"/>
-              <a:t> part 2. </a:t>
-            </a:r>
-          </a:p>
-          <a:p>
-            <a:pPr lvl="1"/>
-            <a:r>
-              <a:rPr lang="en-US" dirty="0"/>
-              <a:t>Making and basic tuning of models - callbacks, results, evaluation. </a:t>
-            </a:r>
-          </a:p>
-          <a:p>
-            <a:pPr lvl="1"/>
-            <a:r>
-              <a:rPr lang="en-US" dirty="0"/>
-              <a:t>Some things that we can change in tuning a model. </a:t>
-            </a:r>
-          </a:p>
-          <a:p>
-            <a:pPr lvl="1"/>
-            <a:r>
-              <a:rPr lang="en-US" dirty="0"/>
-              <a:t>Using a loss plot to tune the model. </a:t>
-            </a:r>
-          </a:p>
-          <a:p>
-            <a:pPr lvl="1"/>
-            <a:r>
-              <a:rPr lang="en-US" dirty="0"/>
-              <a:t>Assignment on neural network regression should be doable after this – it isn’t too complex.</a:t>
-            </a:r>
-          </a:p>
-          <a:p>
-            <a:pPr lvl="1"/>
-            <a:r>
-              <a:rPr lang="en-US" dirty="0"/>
-              <a:t>Please read </a:t>
+              <a:t>raytune</a:t>
+            </a:r>
+            <a:r>
+              <a:rPr lang="en-US" dirty="0"/>
+              <a:t> tools. </a:t>
+            </a:r>
+          </a:p>
+          <a:p>
+            <a:pPr lvl="1"/>
+            <a:r>
+              <a:rPr lang="en-US" dirty="0"/>
+              <a:t>Next – common tuning options. </a:t>
+            </a:r>
+          </a:p>
+          <a:p>
+            <a:pPr lvl="1"/>
+            <a:r>
+              <a:rPr lang="en-US" dirty="0"/>
+              <a:t>Finally – try to log some of those tuning options with </a:t>
             </a:r>
             <a:r>
               <a:rPr lang="en-US" dirty="0" err="1"/>
-              <a:t>recipe_tuning_neural_networks.pdf</a:t>
-            </a:r>
-            <a:r>
-              <a:rPr lang="en-US" dirty="0"/>
-              <a:t> in docs folder, it’s a version of this.  </a:t>
-            </a:r>
-          </a:p>
-          <a:p>
-            <a:r>
-              <a:rPr lang="en-US" dirty="0"/>
-              <a:t>Next time(s):</a:t>
-            </a:r>
-          </a:p>
-          <a:p>
-            <a:pPr lvl="1"/>
-            <a:r>
-              <a:rPr lang="en-US" dirty="0"/>
-              <a:t>Images in 2+ dimensions in neural networks – CNNs. </a:t>
-            </a:r>
-          </a:p>
-          <a:p>
-            <a:pPr lvl="1"/>
-            <a:r>
-              <a:rPr lang="en-US" dirty="0"/>
-              <a:t>Processing image data in a smart way – managing out of memory data and smarter datasets. </a:t>
+              <a:t>tensorboard</a:t>
+            </a:r>
+            <a:r>
+              <a:rPr lang="en-US" dirty="0"/>
+              <a:t> or automate with R.T.</a:t>
+            </a:r>
+          </a:p>
+          <a:p>
+            <a:r>
+              <a:rPr lang="en-US" dirty="0"/>
+              <a:t>There’s a new, simple, neural network assignment up. </a:t>
             </a:r>
           </a:p>
           <a:p>
@@ -4030,6 +4025,89 @@
 </file>
 
 <file path=ppt/slides/slide10.xml><?xml version="1.0" encoding="utf-8"?>
+<p:sld xmlns:a="http://schemas.openxmlformats.org/drawingml/2006/main" xmlns:r="http://schemas.openxmlformats.org/officeDocument/2006/relationships" xmlns:p="http://schemas.openxmlformats.org/presentationml/2006/main" show="0">
+  <p:cSld>
+    <p:spTree>
+      <p:nvGrpSpPr>
+        <p:cNvPr id="1" name=""/>
+        <p:cNvGrpSpPr/>
+        <p:nvPr/>
+      </p:nvGrpSpPr>
+      <p:grpSpPr>
+        <a:xfrm>
+          <a:off x="0" y="0"/>
+          <a:ext cx="0" cy="0"/>
+          <a:chOff x="0" y="0"/>
+          <a:chExt cx="0" cy="0"/>
+        </a:xfrm>
+      </p:grpSpPr>
+      <p:sp>
+        <p:nvSpPr>
+          <p:cNvPr id="2" name="Title 1">
+            <a:extLst>
+              <a:ext uri="{FF2B5EF4-FFF2-40B4-BE49-F238E27FC236}">
+                <a16:creationId xmlns:a16="http://schemas.microsoft.com/office/drawing/2014/main" id="{39C9DD2E-27DB-9B00-4D59-7FFF0EF55534}"/>
+              </a:ext>
+            </a:extLst>
+          </p:cNvPr>
+          <p:cNvSpPr>
+            <a:spLocks noGrp="1"/>
+          </p:cNvSpPr>
+          <p:nvPr>
+            <p:ph type="title"/>
+          </p:nvPr>
+        </p:nvSpPr>
+        <p:spPr/>
+        <p:txBody>
+          <a:bodyPr/>
+          <a:lstStyle/>
+          <a:p>
+            <a:r>
+              <a:rPr lang="en-US" dirty="0"/>
+              <a:t>Tensor</a:t>
+            </a:r>
+          </a:p>
+        </p:txBody>
+      </p:sp>
+      <p:sp>
+        <p:nvSpPr>
+          <p:cNvPr id="3" name="Content Placeholder 2">
+            <a:extLst>
+              <a:ext uri="{FF2B5EF4-FFF2-40B4-BE49-F238E27FC236}">
+                <a16:creationId xmlns:a16="http://schemas.microsoft.com/office/drawing/2014/main" id="{F53E50F1-2F18-D0EB-441C-35773AA85368}"/>
+              </a:ext>
+            </a:extLst>
+          </p:cNvPr>
+          <p:cNvSpPr>
+            <a:spLocks noGrp="1"/>
+          </p:cNvSpPr>
+          <p:nvPr>
+            <p:ph idx="1"/>
+          </p:nvPr>
+        </p:nvSpPr>
+        <p:spPr/>
+        <p:txBody>
+          <a:bodyPr/>
+          <a:lstStyle/>
+          <a:p>
+            <a:endParaRPr lang="en-US"/>
+          </a:p>
+        </p:txBody>
+      </p:sp>
+    </p:spTree>
+    <p:extLst>
+      <p:ext uri="{BB962C8B-B14F-4D97-AF65-F5344CB8AC3E}">
+        <p14:creationId xmlns:p14="http://schemas.microsoft.com/office/powerpoint/2010/main" val="136756413"/>
+      </p:ext>
+    </p:extLst>
+  </p:cSld>
+  <p:clrMapOvr>
+    <a:masterClrMapping/>
+  </p:clrMapOvr>
+</p:sld>
+</file>
+
+<file path=ppt/slides/slide11.xml><?xml version="1.0" encoding="utf-8"?>
 <p:sld xmlns:a="http://schemas.openxmlformats.org/drawingml/2006/main" xmlns:r="http://schemas.openxmlformats.org/officeDocument/2006/relationships" xmlns:p="http://schemas.openxmlformats.org/presentationml/2006/main">
   <p:cSld>
     <p:spTree>
@@ -4051,6 +4129,126 @@
           <p:cNvPr id="2" name="Title 1">
             <a:extLst>
               <a:ext uri="{FF2B5EF4-FFF2-40B4-BE49-F238E27FC236}">
+                <a16:creationId xmlns:a16="http://schemas.microsoft.com/office/drawing/2014/main" id="{E42CF152-59D1-43C2-9435-C78A5207614E}"/>
+              </a:ext>
+            </a:extLst>
+          </p:cNvPr>
+          <p:cNvSpPr>
+            <a:spLocks noGrp="1"/>
+          </p:cNvSpPr>
+          <p:nvPr>
+            <p:ph type="title"/>
+          </p:nvPr>
+        </p:nvSpPr>
+        <p:spPr/>
+        <p:txBody>
+          <a:bodyPr/>
+          <a:lstStyle/>
+          <a:p>
+            <a:r>
+              <a:rPr lang="en-CA" dirty="0"/>
+              <a:t>Network Size</a:t>
+            </a:r>
+            <a:endParaRPr lang="LID4096" dirty="0"/>
+          </a:p>
+        </p:txBody>
+      </p:sp>
+      <p:sp>
+        <p:nvSpPr>
+          <p:cNvPr id="3" name="Content Placeholder 2">
+            <a:extLst>
+              <a:ext uri="{FF2B5EF4-FFF2-40B4-BE49-F238E27FC236}">
+                <a16:creationId xmlns:a16="http://schemas.microsoft.com/office/drawing/2014/main" id="{22A90C32-B7B4-4D00-AA34-E379414D8F75}"/>
+              </a:ext>
+            </a:extLst>
+          </p:cNvPr>
+          <p:cNvSpPr>
+            <a:spLocks noGrp="1"/>
+          </p:cNvSpPr>
+          <p:nvPr>
+            <p:ph idx="1"/>
+          </p:nvPr>
+        </p:nvSpPr>
+        <p:spPr/>
+        <p:txBody>
+          <a:bodyPr/>
+          <a:lstStyle/>
+          <a:p>
+            <a:r>
+              <a:rPr lang="en-CA" dirty="0"/>
+              <a:t>The first thing to look at is the network size, or capacity.</a:t>
+            </a:r>
+          </a:p>
+          <a:p>
+            <a:r>
+              <a:rPr lang="en-CA" dirty="0"/>
+              <a:t>The more neurons a network had, the higher the capacity. </a:t>
+            </a:r>
+          </a:p>
+          <a:p>
+            <a:r>
+              <a:rPr lang="en-CA" dirty="0"/>
+              <a:t>In general, larger networks need larger amounts of data, to find more complex relationships.  </a:t>
+            </a:r>
+          </a:p>
+          <a:p>
+            <a:r>
+              <a:rPr lang="en-CA" dirty="0"/>
+              <a:t>We can examine the two metrics of size:</a:t>
+            </a:r>
+          </a:p>
+          <a:p>
+            <a:pPr lvl="1"/>
+            <a:r>
+              <a:rPr lang="en-CA" dirty="0"/>
+              <a:t>Neurons per layer (width)</a:t>
+            </a:r>
+          </a:p>
+          <a:p>
+            <a:pPr lvl="1"/>
+            <a:r>
+              <a:rPr lang="en-CA" dirty="0"/>
+              <a:t>Number of layers (depth)</a:t>
+            </a:r>
+            <a:endParaRPr lang="LID4096" dirty="0"/>
+          </a:p>
+        </p:txBody>
+      </p:sp>
+    </p:spTree>
+    <p:extLst>
+      <p:ext uri="{BB962C8B-B14F-4D97-AF65-F5344CB8AC3E}">
+        <p14:creationId xmlns:p14="http://schemas.microsoft.com/office/powerpoint/2010/main" val="2949275183"/>
+      </p:ext>
+    </p:extLst>
+  </p:cSld>
+  <p:clrMapOvr>
+    <a:masterClrMapping/>
+  </p:clrMapOvr>
+</p:sld>
+</file>
+
+<file path=ppt/slides/slide12.xml><?xml version="1.0" encoding="utf-8"?>
+<p:sld xmlns:a="http://schemas.openxmlformats.org/drawingml/2006/main" xmlns:r="http://schemas.openxmlformats.org/officeDocument/2006/relationships" xmlns:p="http://schemas.openxmlformats.org/presentationml/2006/main">
+  <p:cSld>
+    <p:spTree>
+      <p:nvGrpSpPr>
+        <p:cNvPr id="1" name=""/>
+        <p:cNvGrpSpPr/>
+        <p:nvPr/>
+      </p:nvGrpSpPr>
+      <p:grpSpPr>
+        <a:xfrm>
+          <a:off x="0" y="0"/>
+          <a:ext cx="0" cy="0"/>
+          <a:chOff x="0" y="0"/>
+          <a:chExt cx="0" cy="0"/>
+        </a:xfrm>
+      </p:grpSpPr>
+      <p:sp>
+        <p:nvSpPr>
+          <p:cNvPr id="2" name="Title 1">
+            <a:extLst>
+              <a:ext uri="{FF2B5EF4-FFF2-40B4-BE49-F238E27FC236}">
                 <a16:creationId xmlns:a16="http://schemas.microsoft.com/office/drawing/2014/main" id="{B89B01E8-D08A-4763-AF4C-320DC895D201}"/>
               </a:ext>
             </a:extLst>
@@ -4185,7 +4383,7 @@
 </p:sld>
 </file>
 
-<file path=ppt/slides/slide11.xml><?xml version="1.0" encoding="utf-8"?>
+<file path=ppt/slides/slide13.xml><?xml version="1.0" encoding="utf-8"?>
 <p:sld xmlns:a="http://schemas.openxmlformats.org/drawingml/2006/main" xmlns:r="http://schemas.openxmlformats.org/officeDocument/2006/relationships" xmlns:p="http://schemas.openxmlformats.org/presentationml/2006/main">
   <p:cSld>
     <p:bg>
@@ -4390,7 +4588,7 @@
 </p:sld>
 </file>
 
-<file path=ppt/slides/slide12.xml><?xml version="1.0" encoding="utf-8"?>
+<file path=ppt/slides/slide14.xml><?xml version="1.0" encoding="utf-8"?>
 <p:sld xmlns:a="http://schemas.openxmlformats.org/drawingml/2006/main" xmlns:r="http://schemas.openxmlformats.org/officeDocument/2006/relationships" xmlns:p="http://schemas.openxmlformats.org/presentationml/2006/main">
   <p:cSld>
     <p:spTree>
@@ -4547,7 +4745,7 @@
 </p:sld>
 </file>
 
-<file path=ppt/slides/slide13.xml><?xml version="1.0" encoding="utf-8"?>
+<file path=ppt/slides/slide15.xml><?xml version="1.0" encoding="utf-8"?>
 <p:sld xmlns:a="http://schemas.openxmlformats.org/drawingml/2006/main" xmlns:r="http://schemas.openxmlformats.org/officeDocument/2006/relationships" xmlns:p="http://schemas.openxmlformats.org/presentationml/2006/main">
   <p:cSld>
     <p:spTree>
@@ -4674,7 +4872,7 @@
 </p:sld>
 </file>
 
-<file path=ppt/slides/slide14.xml><?xml version="1.0" encoding="utf-8"?>
+<file path=ppt/slides/slide16.xml><?xml version="1.0" encoding="utf-8"?>
 <p:sld xmlns:a="http://schemas.openxmlformats.org/drawingml/2006/main" xmlns:r="http://schemas.openxmlformats.org/officeDocument/2006/relationships" xmlns:p="http://schemas.openxmlformats.org/presentationml/2006/main">
   <p:cSld>
     <p:spTree>
@@ -4801,7 +4999,7 @@
 </p:sld>
 </file>
 
-<file path=ppt/slides/slide15.xml><?xml version="1.0" encoding="utf-8"?>
+<file path=ppt/slides/slide17.xml><?xml version="1.0" encoding="utf-8"?>
 <p:sld xmlns:a="http://schemas.openxmlformats.org/drawingml/2006/main" xmlns:r="http://schemas.openxmlformats.org/officeDocument/2006/relationships" xmlns:p="http://schemas.openxmlformats.org/presentationml/2006/main">
   <p:cSld>
     <p:spTree>
@@ -4964,7 +5162,7 @@
 </p:sld>
 </file>
 
-<file path=ppt/slides/slide16.xml><?xml version="1.0" encoding="utf-8"?>
+<file path=ppt/slides/slide18.xml><?xml version="1.0" encoding="utf-8"?>
 <p:sld xmlns:a="http://schemas.openxmlformats.org/drawingml/2006/main" xmlns:r="http://schemas.openxmlformats.org/officeDocument/2006/relationships" xmlns:p="http://schemas.openxmlformats.org/presentationml/2006/main">
   <p:cSld>
     <p:spTree>
@@ -5189,310 +5387,6 @@
 </p:sld>
 </file>
 
-<file path=ppt/slides/slide17.xml><?xml version="1.0" encoding="utf-8"?>
-<p:sld xmlns:a="http://schemas.openxmlformats.org/drawingml/2006/main" xmlns:r="http://schemas.openxmlformats.org/officeDocument/2006/relationships" xmlns:p="http://schemas.openxmlformats.org/presentationml/2006/main">
-  <p:cSld>
-    <p:spTree>
-      <p:nvGrpSpPr>
-        <p:cNvPr id="1" name=""/>
-        <p:cNvGrpSpPr/>
-        <p:nvPr/>
-      </p:nvGrpSpPr>
-      <p:grpSpPr>
-        <a:xfrm>
-          <a:off x="0" y="0"/>
-          <a:ext cx="0" cy="0"/>
-          <a:chOff x="0" y="0"/>
-          <a:chExt cx="0" cy="0"/>
-        </a:xfrm>
-      </p:grpSpPr>
-      <p:sp>
-        <p:nvSpPr>
-          <p:cNvPr id="2" name="Title 1">
-            <a:extLst>
-              <a:ext uri="{FF2B5EF4-FFF2-40B4-BE49-F238E27FC236}">
-                <a16:creationId xmlns:a16="http://schemas.microsoft.com/office/drawing/2014/main" id="{3C3F4E92-B91C-4411-9AE6-F65251C2E68F}"/>
-              </a:ext>
-            </a:extLst>
-          </p:cNvPr>
-          <p:cNvSpPr>
-            <a:spLocks noGrp="1"/>
-          </p:cNvSpPr>
-          <p:nvPr>
-            <p:ph type="title"/>
-          </p:nvPr>
-        </p:nvSpPr>
-        <p:spPr/>
-        <p:txBody>
-          <a:bodyPr/>
-          <a:lstStyle/>
-          <a:p>
-            <a:r>
-              <a:rPr lang="en-CA" dirty="0"/>
-              <a:t>So how big do I make it?</a:t>
-            </a:r>
-            <a:endParaRPr lang="LID4096" dirty="0"/>
-          </a:p>
-        </p:txBody>
-      </p:sp>
-      <p:sp>
-        <p:nvSpPr>
-          <p:cNvPr id="3" name="Content Placeholder 2">
-            <a:extLst>
-              <a:ext uri="{FF2B5EF4-FFF2-40B4-BE49-F238E27FC236}">
-                <a16:creationId xmlns:a16="http://schemas.microsoft.com/office/drawing/2014/main" id="{69AF324C-0304-4D50-9E1F-5D00ACFC962D}"/>
-              </a:ext>
-            </a:extLst>
-          </p:cNvPr>
-          <p:cNvSpPr>
-            <a:spLocks noGrp="1"/>
-          </p:cNvSpPr>
-          <p:nvPr>
-            <p:ph idx="1"/>
-          </p:nvPr>
-        </p:nvSpPr>
-        <p:spPr>
-          <a:xfrm>
-            <a:off x="1451579" y="1853754"/>
-            <a:ext cx="9603275" cy="4199727"/>
-          </a:xfrm>
-        </p:spPr>
-        <p:txBody>
-          <a:bodyPr>
-            <a:normAutofit/>
-          </a:bodyPr>
-          <a:lstStyle/>
-          <a:p>
-            <a:r>
-              <a:rPr lang="en-CA" dirty="0"/>
-              <a:t>Big enough to be capable of overfitting – don’t obsess too much on details unless bored.</a:t>
-            </a:r>
-          </a:p>
-          <a:p>
-            <a:r>
-              <a:rPr lang="en-CA" dirty="0"/>
-              <a:t>See more specific guidelines in workbook. </a:t>
-            </a:r>
-          </a:p>
-          <a:p>
-            <a:pPr lvl="1"/>
-            <a:r>
-              <a:rPr lang="en-CA" dirty="0"/>
-              <a:t>Start with 1 to 3 layers the same size as the input (or ~512-768 if input is big). </a:t>
-            </a:r>
-          </a:p>
-          <a:p>
-            <a:pPr lvl="1"/>
-            <a:r>
-              <a:rPr lang="en-CA" dirty="0"/>
-              <a:t>Add layers to overfit that are about the same size. </a:t>
-            </a:r>
-          </a:p>
-          <a:p>
-            <a:pPr lvl="1"/>
-            <a:r>
-              <a:rPr lang="en-CA" dirty="0"/>
-              <a:t>Try with layer size “funneled” down layer by layer. </a:t>
-            </a:r>
-          </a:p>
-          <a:p>
-            <a:pPr lvl="1"/>
-            <a:r>
-              <a:rPr lang="en-CA" dirty="0"/>
-              <a:t>Add regularization and normalization to cut overfitting. </a:t>
-            </a:r>
-          </a:p>
-          <a:p>
-            <a:pPr lvl="1"/>
-            <a:r>
-              <a:rPr lang="en-CA" dirty="0"/>
-              <a:t>Prune network back in size, if still overfitting. </a:t>
-            </a:r>
-          </a:p>
-          <a:p>
-            <a:r>
-              <a:rPr lang="en-CA" dirty="0"/>
-              <a:t>A real answer is grid search, this should get us close enough to start with. </a:t>
-            </a:r>
-          </a:p>
-          <a:p>
-            <a:r>
-              <a:rPr lang="en-CA" dirty="0"/>
-              <a:t>If doing something big, base it off something that works and adjust as best you can. </a:t>
-            </a:r>
-            <a:endParaRPr lang="LID4096" dirty="0"/>
-          </a:p>
-        </p:txBody>
-      </p:sp>
-    </p:spTree>
-    <p:extLst>
-      <p:ext uri="{BB962C8B-B14F-4D97-AF65-F5344CB8AC3E}">
-        <p14:creationId xmlns:p14="http://schemas.microsoft.com/office/powerpoint/2010/main" val="2955667924"/>
-      </p:ext>
-    </p:extLst>
-  </p:cSld>
-  <p:clrMapOvr>
-    <a:masterClrMapping/>
-  </p:clrMapOvr>
-</p:sld>
-</file>
-
-<file path=ppt/slides/slide18.xml><?xml version="1.0" encoding="utf-8"?>
-<p:sld xmlns:a="http://schemas.openxmlformats.org/drawingml/2006/main" xmlns:r="http://schemas.openxmlformats.org/officeDocument/2006/relationships" xmlns:p="http://schemas.openxmlformats.org/presentationml/2006/main">
-  <p:cSld>
-    <p:spTree>
-      <p:nvGrpSpPr>
-        <p:cNvPr id="1" name=""/>
-        <p:cNvGrpSpPr/>
-        <p:nvPr/>
-      </p:nvGrpSpPr>
-      <p:grpSpPr>
-        <a:xfrm>
-          <a:off x="0" y="0"/>
-          <a:ext cx="0" cy="0"/>
-          <a:chOff x="0" y="0"/>
-          <a:chExt cx="0" cy="0"/>
-        </a:xfrm>
-      </p:grpSpPr>
-      <p:sp>
-        <p:nvSpPr>
-          <p:cNvPr id="2" name="Title 1">
-            <a:extLst>
-              <a:ext uri="{FF2B5EF4-FFF2-40B4-BE49-F238E27FC236}">
-                <a16:creationId xmlns:a16="http://schemas.microsoft.com/office/drawing/2014/main" id="{CD43B760-7189-15BB-AB43-4B1816F400D9}"/>
-              </a:ext>
-            </a:extLst>
-          </p:cNvPr>
-          <p:cNvSpPr>
-            <a:spLocks noGrp="1"/>
-          </p:cNvSpPr>
-          <p:nvPr>
-            <p:ph type="title"/>
-          </p:nvPr>
-        </p:nvSpPr>
-        <p:spPr/>
-        <p:txBody>
-          <a:bodyPr/>
-          <a:lstStyle/>
-          <a:p>
-            <a:r>
-              <a:rPr lang="en-US" dirty="0"/>
-              <a:t>Data</a:t>
-            </a:r>
-          </a:p>
-        </p:txBody>
-      </p:sp>
-      <p:sp>
-        <p:nvSpPr>
-          <p:cNvPr id="3" name="Content Placeholder 2">
-            <a:extLst>
-              <a:ext uri="{FF2B5EF4-FFF2-40B4-BE49-F238E27FC236}">
-                <a16:creationId xmlns:a16="http://schemas.microsoft.com/office/drawing/2014/main" id="{AADF3FBF-3046-3E73-935C-A21DD147D2C6}"/>
-              </a:ext>
-            </a:extLst>
-          </p:cNvPr>
-          <p:cNvSpPr>
-            <a:spLocks noGrp="1"/>
-          </p:cNvSpPr>
-          <p:nvPr>
-            <p:ph idx="1"/>
-          </p:nvPr>
-        </p:nvSpPr>
-        <p:spPr>
-          <a:xfrm>
-            <a:off x="1451579" y="1853754"/>
-            <a:ext cx="9603275" cy="4199727"/>
-          </a:xfrm>
-        </p:spPr>
-        <p:txBody>
-          <a:bodyPr/>
-          <a:lstStyle/>
-          <a:p>
-            <a:r>
-              <a:rPr lang="en-US" dirty="0"/>
-              <a:t>Improving and increasing the data size is the best possible optimization. </a:t>
-            </a:r>
-          </a:p>
-          <a:p>
-            <a:r>
-              <a:rPr lang="en-US" dirty="0"/>
-              <a:t>Scaling numerical data can often have large impacts:</a:t>
-            </a:r>
-          </a:p>
-          <a:p>
-            <a:pPr lvl="1"/>
-            <a:r>
-              <a:rPr lang="en-US" dirty="0"/>
-              <a:t>Ensure outliers are handled and data is scaled. </a:t>
-            </a:r>
-          </a:p>
-          <a:p>
-            <a:r>
-              <a:rPr lang="en-US" dirty="0"/>
-              <a:t>If practical, increase data size – real or by augmentation (later). </a:t>
-            </a:r>
-          </a:p>
-          <a:p>
-            <a:r>
-              <a:rPr lang="en-US" dirty="0"/>
-              <a:t>If we have high dimension categories, that can lead to very sparse data:</a:t>
-            </a:r>
-          </a:p>
-          <a:p>
-            <a:pPr lvl="1"/>
-            <a:r>
-              <a:rPr lang="en-US" dirty="0"/>
-              <a:t>Many high dimension categories will add lots of features to the data once encoded. </a:t>
-            </a:r>
-          </a:p>
-          <a:p>
-            <a:pPr lvl="1"/>
-            <a:r>
-              <a:rPr lang="en-US" dirty="0"/>
-              <a:t>This will make lots of sparse data – many features with nearly zero information. </a:t>
-            </a:r>
-          </a:p>
-          <a:p>
-            <a:pPr lvl="1"/>
-            <a:r>
-              <a:rPr lang="en-US" dirty="0"/>
-              <a:t>This isn’t </a:t>
-            </a:r>
-            <a:r>
-              <a:rPr lang="en-US" i="1" dirty="0"/>
-              <a:t>wrong</a:t>
-            </a:r>
-            <a:r>
-              <a:rPr lang="en-US" dirty="0"/>
-              <a:t> but may lead to poor and slow results, especially without many records. </a:t>
-            </a:r>
-          </a:p>
-          <a:p>
-            <a:pPr lvl="1"/>
-            <a:r>
-              <a:rPr lang="en-US" dirty="0"/>
-              <a:t>Consider feature engineering (‘other’ group, consolidation, selection) these first. </a:t>
-            </a:r>
-          </a:p>
-          <a:p>
-            <a:pPr lvl="1"/>
-            <a:endParaRPr lang="en-US" dirty="0"/>
-          </a:p>
-        </p:txBody>
-      </p:sp>
-    </p:spTree>
-    <p:extLst>
-      <p:ext uri="{BB962C8B-B14F-4D97-AF65-F5344CB8AC3E}">
-        <p14:creationId xmlns:p14="http://schemas.microsoft.com/office/powerpoint/2010/main" val="23450497"/>
-      </p:ext>
-    </p:extLst>
-  </p:cSld>
-  <p:clrMapOvr>
-    <a:masterClrMapping/>
-  </p:clrMapOvr>
-</p:sld>
-</file>
-
 <file path=ppt/slides/slide19.xml><?xml version="1.0" encoding="utf-8"?>
 <p:sld xmlns:a="http://schemas.openxmlformats.org/drawingml/2006/main" xmlns:r="http://schemas.openxmlformats.org/officeDocument/2006/relationships" xmlns:p="http://schemas.openxmlformats.org/presentationml/2006/main">
   <p:cSld>
@@ -5515,7 +5409,7 @@
           <p:cNvPr id="2" name="Title 1">
             <a:extLst>
               <a:ext uri="{FF2B5EF4-FFF2-40B4-BE49-F238E27FC236}">
-                <a16:creationId xmlns:a16="http://schemas.microsoft.com/office/drawing/2014/main" id="{9DF6D07A-F89C-4648-8C5C-62C367F69E6C}"/>
+                <a16:creationId xmlns:a16="http://schemas.microsoft.com/office/drawing/2014/main" id="{3C3F4E92-B91C-4411-9AE6-F65251C2E68F}"/>
               </a:ext>
             </a:extLst>
           </p:cNvPr>
@@ -5533,7 +5427,7 @@
           <a:p>
             <a:r>
               <a:rPr lang="en-CA" dirty="0"/>
-              <a:t>Epochs and Batches</a:t>
+              <a:t>So how big do I make it?</a:t>
             </a:r>
             <a:endParaRPr lang="LID4096" dirty="0"/>
           </a:p>
@@ -5544,7 +5438,7 @@
           <p:cNvPr id="3" name="Content Placeholder 2">
             <a:extLst>
               <a:ext uri="{FF2B5EF4-FFF2-40B4-BE49-F238E27FC236}">
-                <a16:creationId xmlns:a16="http://schemas.microsoft.com/office/drawing/2014/main" id="{90B4D315-C411-40F9-A088-3BE0DD9996F7}"/>
+                <a16:creationId xmlns:a16="http://schemas.microsoft.com/office/drawing/2014/main" id="{69AF324C-0304-4D50-9E1F-5D00ACFC962D}"/>
               </a:ext>
             </a:extLst>
           </p:cNvPr>
@@ -5557,8 +5451,8 @@
         </p:nvSpPr>
         <p:spPr>
           <a:xfrm>
-            <a:off x="1183907" y="1853753"/>
-            <a:ext cx="10222030" cy="4199727"/>
+            <a:off x="1451579" y="1853754"/>
+            <a:ext cx="9603275" cy="4199727"/>
           </a:xfrm>
         </p:spPr>
         <p:txBody>
@@ -5569,109 +5463,69 @@
           <a:p>
             <a:r>
               <a:rPr lang="en-CA" dirty="0"/>
-              <a:t>Each epoch is an execution of one </a:t>
-            </a:r>
-            <a:r>
-              <a:rPr lang="en-CA" dirty="0" err="1"/>
-              <a:t>fp</a:t>
-            </a:r>
+              <a:t>Big enough to be capable of overfitting – don’t obsess too much on details unless bored.</a:t>
+            </a:r>
+          </a:p>
+          <a:p>
             <a:r>
               <a:rPr lang="en-CA" dirty="0"/>
-              <a:t>/bp through all of the data. </a:t>
+              <a:t>See more specific guidelines in workbook. </a:t>
             </a:r>
           </a:p>
           <a:p>
             <a:pPr lvl="1"/>
             <a:r>
               <a:rPr lang="en-CA" dirty="0"/>
-              <a:t>Easiest method is to set early stopping and let the computer figure it out. </a:t>
+              <a:t>Start with 1 to 3 layers the same size as the input (or ~512-768 if input is big). </a:t>
             </a:r>
           </a:p>
           <a:p>
             <a:pPr lvl="1"/>
             <a:r>
               <a:rPr lang="en-CA" dirty="0"/>
-              <a:t>Really big models might only have one epoch through the data total. </a:t>
-            </a:r>
-          </a:p>
-          <a:p>
+              <a:t>Add layers to overfit that are about the same size. </a:t>
+            </a:r>
+          </a:p>
+          <a:p>
+            <a:pPr lvl="1"/>
             <a:r>
               <a:rPr lang="en-CA" dirty="0"/>
-              <a:t>Batches are how many records to process before updating weights. </a:t>
+              <a:t>Try with layer size “funneled” down layer by layer. </a:t>
             </a:r>
           </a:p>
           <a:p>
             <a:pPr lvl="1"/>
             <a:r>
               <a:rPr lang="en-CA" dirty="0"/>
-              <a:t>Just like regular gradient descent – higher is more stable, smaller more erratic. </a:t>
+              <a:t>Add regularization and normalization to cut overfitting. </a:t>
             </a:r>
           </a:p>
           <a:p>
             <a:pPr lvl="1"/>
             <a:r>
               <a:rPr lang="en-CA" dirty="0"/>
-              <a:t>Limited at the top end by memory capacity. </a:t>
-            </a:r>
-          </a:p>
-          <a:p>
-            <a:pPr lvl="1"/>
+              <a:t>Prune network back in size, if still overfitting. </a:t>
+            </a:r>
+          </a:p>
+          <a:p>
             <a:r>
               <a:rPr lang="en-CA" dirty="0"/>
-              <a:t>Large vs small is still a matter of debate and varies by data. </a:t>
-            </a:r>
-          </a:p>
-          <a:p>
-            <a:pPr lvl="1"/>
+              <a:t>A real answer is grid search, this should get us close enough to start with. </a:t>
+            </a:r>
+          </a:p>
+          <a:p>
             <a:r>
               <a:rPr lang="en-CA" dirty="0"/>
-              <a:t>Recently, smaller batches (as small as 2 -32) seems to offer better generalizable models. </a:t>
-            </a:r>
-          </a:p>
-          <a:p>
-            <a:pPr lvl="1"/>
-            <a:r>
-              <a:rPr lang="en-CA" dirty="0"/>
-              <a:t>Big batches may process </a:t>
-            </a:r>
-            <a:r>
-              <a:rPr lang="en-CA" i="1" dirty="0"/>
-              <a:t>far</a:t>
-            </a:r>
-            <a:r>
-              <a:rPr lang="en-CA" dirty="0"/>
-              <a:t> faster – better HW utilization and fewer weight updates. </a:t>
-            </a:r>
-          </a:p>
-          <a:p>
-            <a:pPr lvl="2"/>
-            <a:r>
-              <a:rPr lang="en-CA" dirty="0"/>
-              <a:t>Think – weight matrix per layer is </a:t>
-            </a:r>
-            <a:r>
-              <a:rPr lang="en-CA" dirty="0" err="1"/>
-              <a:t>input_size</a:t>
-            </a:r>
-            <a:r>
-              <a:rPr lang="en-CA" dirty="0"/>
-              <a:t> * </a:t>
-            </a:r>
-            <a:r>
-              <a:rPr lang="en-CA" dirty="0" err="1"/>
-              <a:t>output_size</a:t>
-            </a:r>
-            <a:r>
-              <a:rPr lang="en-CA" dirty="0"/>
-              <a:t>. 512 * 512 = ~250k updates</a:t>
-            </a:r>
+              <a:t>If doing something big, base it off something that works and adjust as best you can. </a:t>
+            </a:r>
+            <a:endParaRPr lang="LID4096" dirty="0"/>
           </a:p>
         </p:txBody>
       </p:sp>
     </p:spTree>
     <p:extLst>
       <p:ext uri="{BB962C8B-B14F-4D97-AF65-F5344CB8AC3E}">
-        <p14:creationId xmlns:p14="http://schemas.microsoft.com/office/powerpoint/2010/main" val="1589937291"/>
+        <p14:creationId xmlns:p14="http://schemas.microsoft.com/office/powerpoint/2010/main" val="2955667924"/>
       </p:ext>
     </p:extLst>
   </p:cSld>
@@ -5813,7 +5667,7 @@
           <p:cNvPr id="2" name="Title 1">
             <a:extLst>
               <a:ext uri="{FF2B5EF4-FFF2-40B4-BE49-F238E27FC236}">
-                <a16:creationId xmlns:a16="http://schemas.microsoft.com/office/drawing/2014/main" id="{34986ED5-DCBC-44E8-A70B-39E557577940}"/>
+                <a16:creationId xmlns:a16="http://schemas.microsoft.com/office/drawing/2014/main" id="{CD43B760-7189-15BB-AB43-4B1816F400D9}"/>
               </a:ext>
             </a:extLst>
           </p:cNvPr>
@@ -5830,10 +5684,9 @@
           <a:lstStyle/>
           <a:p>
             <a:r>
-              <a:rPr lang="en-CA" dirty="0"/>
-              <a:t>Optimizer</a:t>
-            </a:r>
-            <a:endParaRPr lang="LID4096" dirty="0"/>
+              <a:rPr lang="en-US" dirty="0"/>
+              <a:t>Data</a:t>
+            </a:r>
           </a:p>
         </p:txBody>
       </p:sp>
@@ -5842,7 +5695,7 @@
           <p:cNvPr id="3" name="Content Placeholder 2">
             <a:extLst>
               <a:ext uri="{FF2B5EF4-FFF2-40B4-BE49-F238E27FC236}">
-                <a16:creationId xmlns:a16="http://schemas.microsoft.com/office/drawing/2014/main" id="{4B2CD011-BB37-4394-B021-0011F0FE5371}"/>
+                <a16:creationId xmlns:a16="http://schemas.microsoft.com/office/drawing/2014/main" id="{AADF3FBF-3046-3E73-935C-A21DD147D2C6}"/>
               </a:ext>
             </a:extLst>
           </p:cNvPr>
@@ -5855,88 +5708,90 @@
         </p:nvSpPr>
         <p:spPr>
           <a:xfrm>
-            <a:off x="1064871" y="1853754"/>
-            <a:ext cx="10637134" cy="4199727"/>
+            <a:off x="1451579" y="1853754"/>
+            <a:ext cx="9603275" cy="4199727"/>
           </a:xfrm>
         </p:spPr>
         <p:txBody>
-          <a:bodyPr>
-            <a:normAutofit/>
-          </a:bodyPr>
-          <a:lstStyle/>
-          <a:p>
-            <a:r>
-              <a:rPr lang="en-CA" dirty="0"/>
-              <a:t>The optimizer is the algorithm used for gradient descent. </a:t>
-            </a:r>
-          </a:p>
-          <a:p>
-            <a:r>
-              <a:rPr lang="en-CA" dirty="0"/>
-              <a:t>The internal details aren’t super important for us, at least for now. </a:t>
-            </a:r>
-          </a:p>
-          <a:p>
-            <a:r>
-              <a:rPr lang="en-CA" dirty="0"/>
-              <a:t>Adam is the most common and is a good choice for most scenarios:</a:t>
-            </a:r>
-          </a:p>
-          <a:p>
-            <a:pPr lvl="1"/>
-            <a:r>
-              <a:rPr lang="en-CA" dirty="0"/>
-              <a:t>Converges efficiently – manages different rates for each gradient. </a:t>
-            </a:r>
-          </a:p>
-          <a:p>
-            <a:pPr lvl="1"/>
-            <a:r>
-              <a:rPr lang="en-CA" dirty="0"/>
-              <a:t>Computation and memory efficient. </a:t>
-            </a:r>
-          </a:p>
-          <a:p>
-            <a:pPr lvl="1"/>
-            <a:r>
-              <a:rPr lang="en-CA" dirty="0"/>
-              <a:t>Adapts separate learning rates for each parameter using moving averages of several moments. </a:t>
-            </a:r>
-          </a:p>
-          <a:p>
-            <a:pPr lvl="1"/>
-            <a:r>
-              <a:rPr lang="en-CA" dirty="0"/>
-              <a:t>Tends to not be too negatively impacted by parameters or different data – defaults work well. </a:t>
-            </a:r>
-          </a:p>
-          <a:p>
-            <a:r>
-              <a:rPr lang="en-CA" dirty="0"/>
-              <a:t>The actual best performer depends on model complexity, data, and the shape of the gradient curve. </a:t>
-            </a:r>
-          </a:p>
-          <a:p>
-            <a:r>
-              <a:rPr lang="en-CA" dirty="0"/>
-              <a:t>There’s several variants similar-</a:t>
-            </a:r>
-            <a:r>
-              <a:rPr lang="en-CA" dirty="0" err="1"/>
-              <a:t>ish</a:t>
-            </a:r>
-            <a:r>
-              <a:rPr lang="en-CA" dirty="0"/>
-              <a:t> to Adam, simpler SGD may perform better on ‘simple’ NN. </a:t>
-            </a:r>
-            <a:endParaRPr lang="LID4096" dirty="0"/>
+          <a:bodyPr/>
+          <a:lstStyle/>
+          <a:p>
+            <a:r>
+              <a:rPr lang="en-US" dirty="0"/>
+              <a:t>Improving and increasing the data size is the best possible optimization. </a:t>
+            </a:r>
+          </a:p>
+          <a:p>
+            <a:r>
+              <a:rPr lang="en-US" dirty="0"/>
+              <a:t>Scaling numerical data can often have large impacts:</a:t>
+            </a:r>
+          </a:p>
+          <a:p>
+            <a:pPr lvl="1"/>
+            <a:r>
+              <a:rPr lang="en-US" dirty="0"/>
+              <a:t>Ensure outliers are handled and data is scaled. </a:t>
+            </a:r>
+          </a:p>
+          <a:p>
+            <a:r>
+              <a:rPr lang="en-US" dirty="0"/>
+              <a:t>If practical, increase data size – real or by augmentation (later). </a:t>
+            </a:r>
+          </a:p>
+          <a:p>
+            <a:r>
+              <a:rPr lang="en-US" dirty="0"/>
+              <a:t>If we have high dimension categories, that can lead to very sparse data:</a:t>
+            </a:r>
+          </a:p>
+          <a:p>
+            <a:pPr lvl="1"/>
+            <a:r>
+              <a:rPr lang="en-US" dirty="0"/>
+              <a:t>Many high dimension categories will add lots of features to the data once encoded. </a:t>
+            </a:r>
+          </a:p>
+          <a:p>
+            <a:pPr lvl="1"/>
+            <a:r>
+              <a:rPr lang="en-US" dirty="0"/>
+              <a:t>This will make lots of sparse data – many features with nearly zero information. </a:t>
+            </a:r>
+          </a:p>
+          <a:p>
+            <a:pPr lvl="1"/>
+            <a:r>
+              <a:rPr lang="en-US" dirty="0"/>
+              <a:t>This isn’t </a:t>
+            </a:r>
+            <a:r>
+              <a:rPr lang="en-US" i="1" dirty="0"/>
+              <a:t>wrong</a:t>
+            </a:r>
+            <a:r>
+              <a:rPr lang="en-US" dirty="0"/>
+              <a:t> but may lead to poor and slow results, especially without many records. </a:t>
+            </a:r>
+          </a:p>
+          <a:p>
+            <a:pPr lvl="1"/>
+            <a:r>
+              <a:rPr lang="en-US" dirty="0"/>
+              <a:t>Consider feature engineering (‘other’ group, consolidation, selection) these first. </a:t>
+            </a:r>
+          </a:p>
+          <a:p>
+            <a:pPr lvl="1"/>
+            <a:endParaRPr lang="en-US" dirty="0"/>
           </a:p>
         </p:txBody>
       </p:sp>
     </p:spTree>
     <p:extLst>
       <p:ext uri="{BB962C8B-B14F-4D97-AF65-F5344CB8AC3E}">
-        <p14:creationId xmlns:p14="http://schemas.microsoft.com/office/powerpoint/2010/main" val="1375585324"/>
+        <p14:creationId xmlns:p14="http://schemas.microsoft.com/office/powerpoint/2010/main" val="23450497"/>
       </p:ext>
     </p:extLst>
   </p:cSld>
@@ -5968,6 +5823,349 @@
           <p:cNvPr id="2" name="Title 1">
             <a:extLst>
               <a:ext uri="{FF2B5EF4-FFF2-40B4-BE49-F238E27FC236}">
+                <a16:creationId xmlns:a16="http://schemas.microsoft.com/office/drawing/2014/main" id="{9DF6D07A-F89C-4648-8C5C-62C367F69E6C}"/>
+              </a:ext>
+            </a:extLst>
+          </p:cNvPr>
+          <p:cNvSpPr>
+            <a:spLocks noGrp="1"/>
+          </p:cNvSpPr>
+          <p:nvPr>
+            <p:ph type="title"/>
+          </p:nvPr>
+        </p:nvSpPr>
+        <p:spPr/>
+        <p:txBody>
+          <a:bodyPr/>
+          <a:lstStyle/>
+          <a:p>
+            <a:r>
+              <a:rPr lang="en-CA" dirty="0"/>
+              <a:t>Epochs and Batches</a:t>
+            </a:r>
+            <a:endParaRPr lang="LID4096" dirty="0"/>
+          </a:p>
+        </p:txBody>
+      </p:sp>
+      <p:sp>
+        <p:nvSpPr>
+          <p:cNvPr id="3" name="Content Placeholder 2">
+            <a:extLst>
+              <a:ext uri="{FF2B5EF4-FFF2-40B4-BE49-F238E27FC236}">
+                <a16:creationId xmlns:a16="http://schemas.microsoft.com/office/drawing/2014/main" id="{90B4D315-C411-40F9-A088-3BE0DD9996F7}"/>
+              </a:ext>
+            </a:extLst>
+          </p:cNvPr>
+          <p:cNvSpPr>
+            <a:spLocks noGrp="1"/>
+          </p:cNvSpPr>
+          <p:nvPr>
+            <p:ph idx="1"/>
+          </p:nvPr>
+        </p:nvSpPr>
+        <p:spPr>
+          <a:xfrm>
+            <a:off x="1183907" y="1853753"/>
+            <a:ext cx="10222030" cy="4199727"/>
+          </a:xfrm>
+        </p:spPr>
+        <p:txBody>
+          <a:bodyPr>
+            <a:normAutofit/>
+          </a:bodyPr>
+          <a:lstStyle/>
+          <a:p>
+            <a:r>
+              <a:rPr lang="en-CA" dirty="0"/>
+              <a:t>Each epoch is an execution of one </a:t>
+            </a:r>
+            <a:r>
+              <a:rPr lang="en-CA" dirty="0" err="1"/>
+              <a:t>fp</a:t>
+            </a:r>
+            <a:r>
+              <a:rPr lang="en-CA" dirty="0"/>
+              <a:t>/bp through all of the data. </a:t>
+            </a:r>
+          </a:p>
+          <a:p>
+            <a:pPr lvl="1"/>
+            <a:r>
+              <a:rPr lang="en-CA" dirty="0"/>
+              <a:t>Easiest method is to set early stopping and let the computer figure it out. </a:t>
+            </a:r>
+          </a:p>
+          <a:p>
+            <a:pPr lvl="1"/>
+            <a:r>
+              <a:rPr lang="en-CA" dirty="0"/>
+              <a:t>Really big models might only have one epoch through the data total. </a:t>
+            </a:r>
+          </a:p>
+          <a:p>
+            <a:r>
+              <a:rPr lang="en-CA" dirty="0"/>
+              <a:t>Batches are how many records to process before updating weights. </a:t>
+            </a:r>
+          </a:p>
+          <a:p>
+            <a:pPr lvl="1"/>
+            <a:r>
+              <a:rPr lang="en-CA" dirty="0"/>
+              <a:t>Just like regular gradient descent – higher is more stable, smaller more erratic. </a:t>
+            </a:r>
+          </a:p>
+          <a:p>
+            <a:pPr lvl="1"/>
+            <a:r>
+              <a:rPr lang="en-CA" dirty="0"/>
+              <a:t>Limited at the top end by memory capacity. </a:t>
+            </a:r>
+          </a:p>
+          <a:p>
+            <a:pPr lvl="1"/>
+            <a:r>
+              <a:rPr lang="en-CA" dirty="0"/>
+              <a:t>Large vs small is still a matter of debate and varies by data. </a:t>
+            </a:r>
+          </a:p>
+          <a:p>
+            <a:pPr lvl="1"/>
+            <a:r>
+              <a:rPr lang="en-CA" dirty="0"/>
+              <a:t>Recently, smaller batches (as small as 2 -32) seems to offer better generalizable models. </a:t>
+            </a:r>
+          </a:p>
+          <a:p>
+            <a:pPr lvl="1"/>
+            <a:r>
+              <a:rPr lang="en-CA" dirty="0"/>
+              <a:t>Big batches may process </a:t>
+            </a:r>
+            <a:r>
+              <a:rPr lang="en-CA" i="1" dirty="0"/>
+              <a:t>far</a:t>
+            </a:r>
+            <a:r>
+              <a:rPr lang="en-CA" dirty="0"/>
+              <a:t> faster – better HW utilization and fewer weight updates. </a:t>
+            </a:r>
+          </a:p>
+          <a:p>
+            <a:pPr lvl="2"/>
+            <a:r>
+              <a:rPr lang="en-CA" dirty="0"/>
+              <a:t>Think – weight matrix per layer is </a:t>
+            </a:r>
+            <a:r>
+              <a:rPr lang="en-CA" dirty="0" err="1"/>
+              <a:t>input_size</a:t>
+            </a:r>
+            <a:r>
+              <a:rPr lang="en-CA" dirty="0"/>
+              <a:t> * </a:t>
+            </a:r>
+            <a:r>
+              <a:rPr lang="en-CA" dirty="0" err="1"/>
+              <a:t>output_size</a:t>
+            </a:r>
+            <a:r>
+              <a:rPr lang="en-CA" dirty="0"/>
+              <a:t>. 512 * 512 = ~250k updates</a:t>
+            </a:r>
+          </a:p>
+        </p:txBody>
+      </p:sp>
+    </p:spTree>
+    <p:extLst>
+      <p:ext uri="{BB962C8B-B14F-4D97-AF65-F5344CB8AC3E}">
+        <p14:creationId xmlns:p14="http://schemas.microsoft.com/office/powerpoint/2010/main" val="1589937291"/>
+      </p:ext>
+    </p:extLst>
+  </p:cSld>
+  <p:clrMapOvr>
+    <a:masterClrMapping/>
+  </p:clrMapOvr>
+</p:sld>
+</file>
+
+<file path=ppt/slides/slide22.xml><?xml version="1.0" encoding="utf-8"?>
+<p:sld xmlns:a="http://schemas.openxmlformats.org/drawingml/2006/main" xmlns:r="http://schemas.openxmlformats.org/officeDocument/2006/relationships" xmlns:p="http://schemas.openxmlformats.org/presentationml/2006/main">
+  <p:cSld>
+    <p:spTree>
+      <p:nvGrpSpPr>
+        <p:cNvPr id="1" name=""/>
+        <p:cNvGrpSpPr/>
+        <p:nvPr/>
+      </p:nvGrpSpPr>
+      <p:grpSpPr>
+        <a:xfrm>
+          <a:off x="0" y="0"/>
+          <a:ext cx="0" cy="0"/>
+          <a:chOff x="0" y="0"/>
+          <a:chExt cx="0" cy="0"/>
+        </a:xfrm>
+      </p:grpSpPr>
+      <p:sp>
+        <p:nvSpPr>
+          <p:cNvPr id="2" name="Title 1">
+            <a:extLst>
+              <a:ext uri="{FF2B5EF4-FFF2-40B4-BE49-F238E27FC236}">
+                <a16:creationId xmlns:a16="http://schemas.microsoft.com/office/drawing/2014/main" id="{34986ED5-DCBC-44E8-A70B-39E557577940}"/>
+              </a:ext>
+            </a:extLst>
+          </p:cNvPr>
+          <p:cNvSpPr>
+            <a:spLocks noGrp="1"/>
+          </p:cNvSpPr>
+          <p:nvPr>
+            <p:ph type="title"/>
+          </p:nvPr>
+        </p:nvSpPr>
+        <p:spPr/>
+        <p:txBody>
+          <a:bodyPr/>
+          <a:lstStyle/>
+          <a:p>
+            <a:r>
+              <a:rPr lang="en-CA" dirty="0"/>
+              <a:t>Optimizer</a:t>
+            </a:r>
+            <a:endParaRPr lang="LID4096" dirty="0"/>
+          </a:p>
+        </p:txBody>
+      </p:sp>
+      <p:sp>
+        <p:nvSpPr>
+          <p:cNvPr id="3" name="Content Placeholder 2">
+            <a:extLst>
+              <a:ext uri="{FF2B5EF4-FFF2-40B4-BE49-F238E27FC236}">
+                <a16:creationId xmlns:a16="http://schemas.microsoft.com/office/drawing/2014/main" id="{4B2CD011-BB37-4394-B021-0011F0FE5371}"/>
+              </a:ext>
+            </a:extLst>
+          </p:cNvPr>
+          <p:cNvSpPr>
+            <a:spLocks noGrp="1"/>
+          </p:cNvSpPr>
+          <p:nvPr>
+            <p:ph idx="1"/>
+          </p:nvPr>
+        </p:nvSpPr>
+        <p:spPr>
+          <a:xfrm>
+            <a:off x="1064871" y="1853754"/>
+            <a:ext cx="10637134" cy="4199727"/>
+          </a:xfrm>
+        </p:spPr>
+        <p:txBody>
+          <a:bodyPr>
+            <a:normAutofit/>
+          </a:bodyPr>
+          <a:lstStyle/>
+          <a:p>
+            <a:r>
+              <a:rPr lang="en-CA" dirty="0"/>
+              <a:t>The optimizer is the algorithm used for gradient descent. </a:t>
+            </a:r>
+          </a:p>
+          <a:p>
+            <a:r>
+              <a:rPr lang="en-CA" dirty="0"/>
+              <a:t>The internal details aren’t super important for us, at least for now. </a:t>
+            </a:r>
+          </a:p>
+          <a:p>
+            <a:r>
+              <a:rPr lang="en-CA" dirty="0"/>
+              <a:t>Adam is the most common and is a good choice for most scenarios:</a:t>
+            </a:r>
+          </a:p>
+          <a:p>
+            <a:pPr lvl="1"/>
+            <a:r>
+              <a:rPr lang="en-CA" dirty="0"/>
+              <a:t>Converges efficiently – manages different rates for each gradient. </a:t>
+            </a:r>
+          </a:p>
+          <a:p>
+            <a:pPr lvl="1"/>
+            <a:r>
+              <a:rPr lang="en-CA" dirty="0"/>
+              <a:t>Computation and memory efficient. </a:t>
+            </a:r>
+          </a:p>
+          <a:p>
+            <a:pPr lvl="1"/>
+            <a:r>
+              <a:rPr lang="en-CA" dirty="0"/>
+              <a:t>Adapts separate learning rates for each parameter using moving averages of several moments. </a:t>
+            </a:r>
+          </a:p>
+          <a:p>
+            <a:pPr lvl="1"/>
+            <a:r>
+              <a:rPr lang="en-CA" dirty="0"/>
+              <a:t>Tends to not be too negatively impacted by parameters or different data – defaults work well. </a:t>
+            </a:r>
+          </a:p>
+          <a:p>
+            <a:r>
+              <a:rPr lang="en-CA" dirty="0"/>
+              <a:t>The actual best performer depends on model complexity, data, and the shape of the gradient curve. </a:t>
+            </a:r>
+          </a:p>
+          <a:p>
+            <a:r>
+              <a:rPr lang="en-CA" dirty="0"/>
+              <a:t>There’s several variants similar-</a:t>
+            </a:r>
+            <a:r>
+              <a:rPr lang="en-CA" dirty="0" err="1"/>
+              <a:t>ish</a:t>
+            </a:r>
+            <a:r>
+              <a:rPr lang="en-CA" dirty="0"/>
+              <a:t> to Adam, simpler SGD may perform better on ‘simple’ NN. </a:t>
+            </a:r>
+            <a:endParaRPr lang="LID4096" dirty="0"/>
+          </a:p>
+        </p:txBody>
+      </p:sp>
+    </p:spTree>
+    <p:extLst>
+      <p:ext uri="{BB962C8B-B14F-4D97-AF65-F5344CB8AC3E}">
+        <p14:creationId xmlns:p14="http://schemas.microsoft.com/office/powerpoint/2010/main" val="1375585324"/>
+      </p:ext>
+    </p:extLst>
+  </p:cSld>
+  <p:clrMapOvr>
+    <a:masterClrMapping/>
+  </p:clrMapOvr>
+</p:sld>
+</file>
+
+<file path=ppt/slides/slide23.xml><?xml version="1.0" encoding="utf-8"?>
+<p:sld xmlns:a="http://schemas.openxmlformats.org/drawingml/2006/main" xmlns:r="http://schemas.openxmlformats.org/officeDocument/2006/relationships" xmlns:p="http://schemas.openxmlformats.org/presentationml/2006/main">
+  <p:cSld>
+    <p:spTree>
+      <p:nvGrpSpPr>
+        <p:cNvPr id="1" name=""/>
+        <p:cNvGrpSpPr/>
+        <p:nvPr/>
+      </p:nvGrpSpPr>
+      <p:grpSpPr>
+        <a:xfrm>
+          <a:off x="0" y="0"/>
+          <a:ext cx="0" cy="0"/>
+          <a:chOff x="0" y="0"/>
+          <a:chExt cx="0" cy="0"/>
+        </a:xfrm>
+      </p:grpSpPr>
+      <p:sp>
+        <p:nvSpPr>
+          <p:cNvPr id="2" name="Title 1">
+            <a:extLst>
+              <a:ext uri="{FF2B5EF4-FFF2-40B4-BE49-F238E27FC236}">
                 <a16:creationId xmlns:a16="http://schemas.microsoft.com/office/drawing/2014/main" id="{44CC1114-4D16-EF61-1F14-4A567F0984D8}"/>
               </a:ext>
             </a:extLst>
@@ -6064,7 +6262,7 @@
 </p:sld>
 </file>
 
-<file path=ppt/slides/slide22.xml><?xml version="1.0" encoding="utf-8"?>
+<file path=ppt/slides/slide24.xml><?xml version="1.0" encoding="utf-8"?>
 <p:sld xmlns:a="http://schemas.openxmlformats.org/drawingml/2006/main" xmlns:r="http://schemas.openxmlformats.org/officeDocument/2006/relationships" xmlns:p="http://schemas.openxmlformats.org/presentationml/2006/main">
   <p:cSld>
     <p:spTree>
@@ -6185,307 +6383,6 @@
     <p:extLst>
       <p:ext uri="{BB962C8B-B14F-4D97-AF65-F5344CB8AC3E}">
         <p14:creationId xmlns:p14="http://schemas.microsoft.com/office/powerpoint/2010/main" val="3200437838"/>
-      </p:ext>
-    </p:extLst>
-  </p:cSld>
-  <p:clrMapOvr>
-    <a:masterClrMapping/>
-  </p:clrMapOvr>
-</p:sld>
-</file>
-
-<file path=ppt/slides/slide23.xml><?xml version="1.0" encoding="utf-8"?>
-<p:sld xmlns:a="http://schemas.openxmlformats.org/drawingml/2006/main" xmlns:r="http://schemas.openxmlformats.org/officeDocument/2006/relationships" xmlns:p="http://schemas.openxmlformats.org/presentationml/2006/main">
-  <p:cSld>
-    <p:bg>
-      <p:bgPr>
-        <a:gradFill rotWithShape="1">
-          <a:gsLst>
-            <a:gs pos="0">
-              <a:schemeClr val="bg2">
-                <a:tint val="94000"/>
-                <a:satMod val="80000"/>
-                <a:lumMod val="106000"/>
-              </a:schemeClr>
-            </a:gs>
-            <a:gs pos="100000">
-              <a:schemeClr val="bg2">
-                <a:shade val="80000"/>
-              </a:schemeClr>
-            </a:gs>
-          </a:gsLst>
-          <a:path path="circle">
-            <a:fillToRect l="43000" r="43000" b="100000"/>
-          </a:path>
-        </a:gradFill>
-        <a:effectLst/>
-      </p:bgPr>
-    </p:bg>
-    <p:spTree>
-      <p:nvGrpSpPr>
-        <p:cNvPr id="1" name=""/>
-        <p:cNvGrpSpPr/>
-        <p:nvPr/>
-      </p:nvGrpSpPr>
-      <p:grpSpPr>
-        <a:xfrm>
-          <a:off x="0" y="0"/>
-          <a:ext cx="0" cy="0"/>
-          <a:chOff x="0" y="0"/>
-          <a:chExt cx="0" cy="0"/>
-        </a:xfrm>
-      </p:grpSpPr>
-      <p:sp>
-        <p:nvSpPr>
-          <p:cNvPr id="2" name="Title 1">
-            <a:extLst>
-              <a:ext uri="{FF2B5EF4-FFF2-40B4-BE49-F238E27FC236}">
-                <a16:creationId xmlns:a16="http://schemas.microsoft.com/office/drawing/2014/main" id="{0082CAF9-B4E1-4729-88E5-0D11190C387F}"/>
-              </a:ext>
-            </a:extLst>
-          </p:cNvPr>
-          <p:cNvSpPr>
-            <a:spLocks noGrp="1"/>
-          </p:cNvSpPr>
-          <p:nvPr>
-            <p:ph type="title"/>
-          </p:nvPr>
-        </p:nvSpPr>
-        <p:spPr>
-          <a:xfrm>
-            <a:off x="1451579" y="804519"/>
-            <a:ext cx="9603275" cy="1049235"/>
-          </a:xfrm>
-        </p:spPr>
-        <p:txBody>
-          <a:bodyPr>
-            <a:normAutofit/>
-          </a:bodyPr>
-          <a:lstStyle/>
-          <a:p>
-            <a:r>
-              <a:rPr lang="en-CA" dirty="0"/>
-              <a:t>Activation Functions (Hidden Layers)</a:t>
-            </a:r>
-            <a:endParaRPr lang="LID4096" dirty="0"/>
-          </a:p>
-        </p:txBody>
-      </p:sp>
-      <p:sp>
-        <p:nvSpPr>
-          <p:cNvPr id="3" name="Content Placeholder 2">
-            <a:extLst>
-              <a:ext uri="{FF2B5EF4-FFF2-40B4-BE49-F238E27FC236}">
-                <a16:creationId xmlns:a16="http://schemas.microsoft.com/office/drawing/2014/main" id="{28019EF6-C3D4-4F7E-9535-A7B288B5931C}"/>
-              </a:ext>
-            </a:extLst>
-          </p:cNvPr>
-          <p:cNvSpPr>
-            <a:spLocks noGrp="1"/>
-          </p:cNvSpPr>
-          <p:nvPr>
-            <p:ph idx="1"/>
-          </p:nvPr>
-        </p:nvSpPr>
-        <p:spPr>
-          <a:xfrm>
-            <a:off x="266700" y="1853754"/>
-            <a:ext cx="7380663" cy="4331146"/>
-          </a:xfrm>
-        </p:spPr>
-        <p:txBody>
-          <a:bodyPr>
-            <a:normAutofit/>
-          </a:bodyPr>
-          <a:lstStyle/>
-          <a:p>
-            <a:r>
-              <a:rPr lang="en-CA" sz="2400" dirty="0"/>
-              <a:t>Activation functions “squish” the linear combination in a neuron into an output. </a:t>
-            </a:r>
-          </a:p>
-          <a:p>
-            <a:r>
-              <a:rPr lang="en-CA" sz="2400" dirty="0"/>
-              <a:t>Typically use defaults/variants per layer/model type. </a:t>
-            </a:r>
-          </a:p>
-          <a:p>
-            <a:r>
-              <a:rPr lang="en-CA" sz="2400" dirty="0"/>
-              <a:t>They provide non-linearity that neural networks need. </a:t>
-            </a:r>
-          </a:p>
-          <a:p>
-            <a:pPr lvl="1"/>
-            <a:r>
-              <a:rPr lang="en-CA" sz="2000" dirty="0"/>
-              <a:t>No activation function = giant, complex, linear regression. </a:t>
-            </a:r>
-          </a:p>
-          <a:p>
-            <a:r>
-              <a:rPr lang="en-CA" sz="2400" dirty="0" err="1"/>
-              <a:t>ReLU</a:t>
-            </a:r>
-            <a:r>
-              <a:rPr lang="en-CA" sz="2400" dirty="0"/>
-              <a:t> – Rectified Linear Unit has been our default. </a:t>
-            </a:r>
-          </a:p>
-          <a:p>
-            <a:pPr lvl="1"/>
-            <a:r>
-              <a:rPr lang="en-CA" sz="2000" dirty="0"/>
-              <a:t>Efficient computations, converges quickly in most cases.  </a:t>
-            </a:r>
-          </a:p>
-          <a:p>
-            <a:pPr lvl="1"/>
-            <a:r>
-              <a:rPr lang="en-CA" sz="2000" dirty="0"/>
-              <a:t>Acts as a trigger – suppresses negative inputs, passes positive.</a:t>
-            </a:r>
-          </a:p>
-          <a:p>
-            <a:pPr lvl="1"/>
-            <a:endParaRPr lang="LID4096" sz="2000"/>
-          </a:p>
-        </p:txBody>
-      </p:sp>
-      <p:pic>
-        <p:nvPicPr>
-          <p:cNvPr id="3074" name="Picture 2" descr="ReLU activation function | Download Scientific Diagram">
-            <a:extLst>
-              <a:ext uri="{FF2B5EF4-FFF2-40B4-BE49-F238E27FC236}">
-                <a16:creationId xmlns:a16="http://schemas.microsoft.com/office/drawing/2014/main" id="{E7C9D5E8-0E5D-8E4F-A19A-AEB80452F3B6}"/>
-              </a:ext>
-            </a:extLst>
-          </p:cNvPr>
-          <p:cNvPicPr>
-            <a:picLocks noChangeAspect="1" noChangeArrowheads="1"/>
-          </p:cNvPicPr>
-          <p:nvPr/>
-        </p:nvPicPr>
-        <p:blipFill>
-          <a:blip r:embed="rId2">
-            <a:extLst>
-              <a:ext uri="{28A0092B-C50C-407E-A947-70E740481C1C}">
-                <a14:useLocalDpi xmlns:a14="http://schemas.microsoft.com/office/drawing/2010/main" val="0"/>
-              </a:ext>
-            </a:extLst>
-          </a:blip>
-          <a:stretch>
-            <a:fillRect/>
-          </a:stretch>
-        </p:blipFill>
-        <p:spPr bwMode="auto">
-          <a:xfrm>
-            <a:off x="8128756" y="2237191"/>
-            <a:ext cx="4063244" cy="3532596"/>
-          </a:xfrm>
-          <a:prstGeom prst="rect">
-            <a:avLst/>
-          </a:prstGeom>
-          <a:noFill/>
-          <a:extLst>
-            <a:ext uri="{909E8E84-426E-40DD-AFC4-6F175D3DCCD1}">
-              <a14:hiddenFill xmlns:a14="http://schemas.microsoft.com/office/drawing/2010/main">
-                <a:solidFill>
-                  <a:srgbClr val="FFFFFF"/>
-                </a:solidFill>
-              </a14:hiddenFill>
-            </a:ext>
-          </a:extLst>
-        </p:spPr>
-      </p:pic>
-    </p:spTree>
-    <p:extLst>
-      <p:ext uri="{BB962C8B-B14F-4D97-AF65-F5344CB8AC3E}">
-        <p14:creationId xmlns:p14="http://schemas.microsoft.com/office/powerpoint/2010/main" val="1393217473"/>
-      </p:ext>
-    </p:extLst>
-  </p:cSld>
-  <p:clrMapOvr>
-    <a:masterClrMapping/>
-  </p:clrMapOvr>
-</p:sld>
-</file>
-
-<file path=ppt/slides/slide24.xml><?xml version="1.0" encoding="utf-8"?>
-<p:sld xmlns:a="http://schemas.openxmlformats.org/drawingml/2006/main" xmlns:r="http://schemas.openxmlformats.org/officeDocument/2006/relationships" xmlns:p="http://schemas.openxmlformats.org/presentationml/2006/main">
-  <p:cSld>
-    <p:spTree>
-      <p:nvGrpSpPr>
-        <p:cNvPr id="1" name=""/>
-        <p:cNvGrpSpPr/>
-        <p:nvPr/>
-      </p:nvGrpSpPr>
-      <p:grpSpPr>
-        <a:xfrm>
-          <a:off x="0" y="0"/>
-          <a:ext cx="0" cy="0"/>
-          <a:chOff x="0" y="0"/>
-          <a:chExt cx="0" cy="0"/>
-        </a:xfrm>
-      </p:grpSpPr>
-      <p:sp>
-        <p:nvSpPr>
-          <p:cNvPr id="2" name="Title 1">
-            <a:extLst>
-              <a:ext uri="{FF2B5EF4-FFF2-40B4-BE49-F238E27FC236}">
-                <a16:creationId xmlns:a16="http://schemas.microsoft.com/office/drawing/2014/main" id="{FF8A3034-5991-1529-6F29-8F3B63495EE4}"/>
-              </a:ext>
-            </a:extLst>
-          </p:cNvPr>
-          <p:cNvSpPr>
-            <a:spLocks noGrp="1"/>
-          </p:cNvSpPr>
-          <p:nvPr>
-            <p:ph type="title"/>
-          </p:nvPr>
-        </p:nvSpPr>
-        <p:spPr/>
-        <p:txBody>
-          <a:bodyPr/>
-          <a:lstStyle/>
-          <a:p>
-            <a:r>
-              <a:rPr lang="en-US" dirty="0"/>
-              <a:t>Activation Issues</a:t>
-            </a:r>
-          </a:p>
-        </p:txBody>
-      </p:sp>
-      <p:sp>
-        <p:nvSpPr>
-          <p:cNvPr id="3" name="Content Placeholder 2">
-            <a:extLst>
-              <a:ext uri="{FF2B5EF4-FFF2-40B4-BE49-F238E27FC236}">
-                <a16:creationId xmlns:a16="http://schemas.microsoft.com/office/drawing/2014/main" id="{146EEFCC-F71B-3CFB-602F-68CC82543778}"/>
-              </a:ext>
-            </a:extLst>
-          </p:cNvPr>
-          <p:cNvSpPr>
-            <a:spLocks noGrp="1"/>
-          </p:cNvSpPr>
-          <p:nvPr>
-            <p:ph idx="1"/>
-          </p:nvPr>
-        </p:nvSpPr>
-        <p:spPr/>
-        <p:txBody>
-          <a:bodyPr/>
-          <a:lstStyle/>
-          <a:p>
-            <a:endParaRPr lang="en-US"/>
-          </a:p>
-        </p:txBody>
-      </p:sp>
-    </p:spTree>
-    <p:extLst>
-      <p:ext uri="{BB962C8B-B14F-4D97-AF65-F5344CB8AC3E}">
-        <p14:creationId xmlns:p14="http://schemas.microsoft.com/office/powerpoint/2010/main" val="1901037290"/>
       </p:ext>
     </p:extLst>
   </p:cSld>
@@ -6541,7 +6438,7 @@
           <p:cNvPr id="2" name="Title 1">
             <a:extLst>
               <a:ext uri="{FF2B5EF4-FFF2-40B4-BE49-F238E27FC236}">
-                <a16:creationId xmlns:a16="http://schemas.microsoft.com/office/drawing/2014/main" id="{B84EE14E-690A-82ED-BE86-623C5E683DA4}"/>
+                <a16:creationId xmlns:a16="http://schemas.microsoft.com/office/drawing/2014/main" id="{0082CAF9-B4E1-4729-88E5-0D11190C387F}"/>
               </a:ext>
             </a:extLst>
           </p:cNvPr>
@@ -6565,9 +6462,10 @@
           <a:lstStyle/>
           <a:p>
             <a:r>
-              <a:rPr lang="en-US" dirty="0"/>
-              <a:t>Vanishing Gradients</a:t>
-            </a:r>
+              <a:rPr lang="en-CA" dirty="0"/>
+              <a:t>Activation Functions (Hidden Layers)</a:t>
+            </a:r>
+            <a:endParaRPr lang="LID4096" dirty="0"/>
           </a:p>
         </p:txBody>
       </p:sp>
@@ -6576,7 +6474,7 @@
           <p:cNvPr id="3" name="Content Placeholder 2">
             <a:extLst>
               <a:ext uri="{FF2B5EF4-FFF2-40B4-BE49-F238E27FC236}">
-                <a16:creationId xmlns:a16="http://schemas.microsoft.com/office/drawing/2014/main" id="{97B86E47-D960-F541-FC0B-79C8E24010DE}"/>
+                <a16:creationId xmlns:a16="http://schemas.microsoft.com/office/drawing/2014/main" id="{28019EF6-C3D4-4F7E-9535-A7B288B5931C}"/>
               </a:ext>
             </a:extLst>
           </p:cNvPr>
@@ -6589,175 +6487,76 @@
         </p:nvSpPr>
         <p:spPr>
           <a:xfrm>
-            <a:off x="0" y="1853752"/>
-            <a:ext cx="6792685" cy="4199729"/>
+            <a:off x="266700" y="1853754"/>
+            <a:ext cx="7380663" cy="4331146"/>
           </a:xfrm>
         </p:spPr>
         <p:txBody>
           <a:bodyPr>
-            <a:normAutofit fontScale="92500" lnSpcReduction="10000"/>
+            <a:normAutofit/>
           </a:bodyPr>
           <a:lstStyle/>
           <a:p>
-            <a:pPr>
-              <a:lnSpc>
-                <a:spcPct val="110000"/>
-              </a:lnSpc>
-            </a:pPr>
-            <a:r>
-              <a:rPr lang="en-US" dirty="0"/>
-              <a:t>Recall – gradient descent attributes error to different weights using the gradient (slope of the cost cure </a:t>
-            </a:r>
-            <a:r>
-              <a:rPr lang="en-US" dirty="0" err="1"/>
-              <a:t>w.r.t.</a:t>
-            </a:r>
-            <a:r>
-              <a:rPr lang="en-US" dirty="0"/>
-              <a:t> that weight). </a:t>
-            </a:r>
-          </a:p>
-          <a:p>
-            <a:pPr>
-              <a:lnSpc>
-                <a:spcPct val="110000"/>
-              </a:lnSpc>
-            </a:pPr>
-            <a:r>
-              <a:rPr lang="en-US" dirty="0"/>
-              <a:t>Recall some neural network training facts:</a:t>
-            </a:r>
-          </a:p>
-          <a:p>
-            <a:pPr lvl="1">
-              <a:lnSpc>
-                <a:spcPct val="110000"/>
-              </a:lnSpc>
-            </a:pPr>
-            <a:r>
-              <a:rPr lang="en-US" dirty="0"/>
-              <a:t>They have many weights. </a:t>
-            </a:r>
-          </a:p>
-          <a:p>
-            <a:pPr lvl="1">
-              <a:lnSpc>
-                <a:spcPct val="110000"/>
-              </a:lnSpc>
-            </a:pPr>
-            <a:r>
-              <a:rPr lang="en-US" dirty="0"/>
-              <a:t>Propagate loss back through all layers, and there can be many. </a:t>
-            </a:r>
-          </a:p>
-          <a:p>
-            <a:pPr lvl="1">
-              <a:lnSpc>
-                <a:spcPct val="110000"/>
-              </a:lnSpc>
-            </a:pPr>
-            <a:r>
-              <a:rPr lang="en-US" dirty="0"/>
-              <a:t>Often train over many rounds, and get very accurate. </a:t>
-            </a:r>
-          </a:p>
-          <a:p>
-            <a:pPr>
-              <a:lnSpc>
-                <a:spcPct val="110000"/>
-              </a:lnSpc>
-            </a:pPr>
-            <a:r>
-              <a:rPr lang="en-US" dirty="0"/>
-              <a:t>We can encounter a problem that small changes to small numbers from small error split many ways yields tiny values. </a:t>
-            </a:r>
-          </a:p>
-          <a:p>
-            <a:pPr lvl="1">
-              <a:lnSpc>
-                <a:spcPct val="110000"/>
-              </a:lnSpc>
-            </a:pPr>
-            <a:r>
-              <a:rPr lang="en-US" dirty="0"/>
-              <a:t>The gradient can “vanish” if it is too small for the GD to work. </a:t>
-            </a:r>
-          </a:p>
-          <a:p>
-            <a:pPr lvl="1">
-              <a:lnSpc>
-                <a:spcPct val="110000"/>
-              </a:lnSpc>
-            </a:pPr>
-            <a:r>
-              <a:rPr lang="en-US" dirty="0"/>
-              <a:t>This can lead to ‘dead’ models, that can’t keep learning. </a:t>
-            </a:r>
-          </a:p>
-          <a:p>
-            <a:pPr>
-              <a:lnSpc>
-                <a:spcPct val="110000"/>
-              </a:lnSpc>
-            </a:pPr>
-            <a:r>
-              <a:rPr lang="en-US" dirty="0"/>
-              <a:t>Exploding gradient is opposite, more common with tanh and deep networks – things grow multiplicatively. </a:t>
-            </a:r>
+            <a:r>
+              <a:rPr lang="en-CA" sz="2400" dirty="0"/>
+              <a:t>Activation functions “squish” the linear combination in a neuron into an output. </a:t>
+            </a:r>
+          </a:p>
+          <a:p>
+            <a:r>
+              <a:rPr lang="en-CA" sz="2400" dirty="0"/>
+              <a:t>Typically use defaults/variants per layer/model type. </a:t>
+            </a:r>
+          </a:p>
+          <a:p>
+            <a:r>
+              <a:rPr lang="en-CA" sz="2400" dirty="0"/>
+              <a:t>They provide non-linearity that neural networks need. </a:t>
+            </a:r>
+          </a:p>
+          <a:p>
+            <a:pPr lvl="1"/>
+            <a:r>
+              <a:rPr lang="en-CA" sz="2000" dirty="0"/>
+              <a:t>No activation function = giant, complex, linear regression. </a:t>
+            </a:r>
+          </a:p>
+          <a:p>
+            <a:r>
+              <a:rPr lang="en-CA" sz="2400" dirty="0" err="1"/>
+              <a:t>ReLU</a:t>
+            </a:r>
+            <a:r>
+              <a:rPr lang="en-CA" sz="2400" dirty="0"/>
+              <a:t> – Rectified Linear Unit has been our default. </a:t>
+            </a:r>
+          </a:p>
+          <a:p>
+            <a:pPr lvl="1"/>
+            <a:r>
+              <a:rPr lang="en-CA" sz="2000" dirty="0"/>
+              <a:t>Efficient computations, converges quickly in most cases.  </a:t>
+            </a:r>
+          </a:p>
+          <a:p>
+            <a:pPr lvl="1"/>
+            <a:r>
+              <a:rPr lang="en-CA" sz="2000" dirty="0"/>
+              <a:t>Acts as a trigger – suppresses negative inputs, passes positive.</a:t>
+            </a:r>
+          </a:p>
+          <a:p>
+            <a:pPr lvl="1"/>
+            <a:endParaRPr lang="LID4096" sz="2000"/>
           </a:p>
         </p:txBody>
       </p:sp>
       <p:pic>
         <p:nvPicPr>
-          <p:cNvPr id="1026" name="Picture 2" descr="Vanishing and Exploding Gradients in Neural Network Models: Debugging,  Monitoring, and Fixing">
-            <a:extLst>
-              <a:ext uri="{FF2B5EF4-FFF2-40B4-BE49-F238E27FC236}">
-                <a16:creationId xmlns:a16="http://schemas.microsoft.com/office/drawing/2014/main" id="{0B1C0D94-352B-B9A4-3AB7-311DD11AC998}"/>
-              </a:ext>
-            </a:extLst>
-          </p:cNvPr>
-          <p:cNvPicPr>
-            <a:picLocks noChangeAspect="1" noChangeArrowheads="1"/>
-          </p:cNvPicPr>
-          <p:nvPr/>
-        </p:nvPicPr>
-        <p:blipFill rotWithShape="1">
-          <a:blip r:embed="rId2">
-            <a:extLst>
-              <a:ext uri="{28A0092B-C50C-407E-A947-70E740481C1C}">
-                <a14:useLocalDpi xmlns:a14="http://schemas.microsoft.com/office/drawing/2010/main" val="0"/>
-              </a:ext>
-            </a:extLst>
-          </a:blip>
-          <a:srcRect l="2545" t="3291" r="5732" b="-1"/>
-          <a:stretch/>
-        </p:blipFill>
-        <p:spPr bwMode="auto">
-          <a:xfrm>
-            <a:off x="8704533" y="37570"/>
-            <a:ext cx="3487467" cy="2873462"/>
-          </a:xfrm>
-          <a:prstGeom prst="rect">
-            <a:avLst/>
-          </a:prstGeom>
-          <a:noFill/>
-          <a:extLst>
-            <a:ext uri="{909E8E84-426E-40DD-AFC4-6F175D3DCCD1}">
-              <a14:hiddenFill xmlns:a14="http://schemas.microsoft.com/office/drawing/2010/main">
-                <a:solidFill>
-                  <a:srgbClr val="FFFFFF"/>
-                </a:solidFill>
-              </a14:hiddenFill>
-            </a:ext>
-          </a:extLst>
-        </p:spPr>
-      </p:pic>
-      <p:pic>
-        <p:nvPicPr>
-          <p:cNvPr id="11266" name="Picture 2" descr="Neural Network - Exponent">
-            <a:extLst>
-              <a:ext uri="{FF2B5EF4-FFF2-40B4-BE49-F238E27FC236}">
-                <a16:creationId xmlns:a16="http://schemas.microsoft.com/office/drawing/2014/main" id="{A5279CCD-97AE-28B3-1AAA-70AFF10ABB00}"/>
+          <p:cNvPr id="3074" name="Picture 2" descr="ReLU activation function | Download Scientific Diagram">
+            <a:extLst>
+              <a:ext uri="{FF2B5EF4-FFF2-40B4-BE49-F238E27FC236}">
+                <a16:creationId xmlns:a16="http://schemas.microsoft.com/office/drawing/2014/main" id="{E7C9D5E8-0E5D-8E4F-A19A-AEB80452F3B6}"/>
               </a:ext>
             </a:extLst>
           </p:cNvPr>
@@ -6767,22 +6566,21 @@
           <p:nvPr/>
         </p:nvPicPr>
         <p:blipFill>
-          <a:blip r:embed="rId3">
+          <a:blip r:embed="rId2">
             <a:extLst>
               <a:ext uri="{28A0092B-C50C-407E-A947-70E740481C1C}">
                 <a14:useLocalDpi xmlns:a14="http://schemas.microsoft.com/office/drawing/2010/main" val="0"/>
               </a:ext>
             </a:extLst>
           </a:blip>
-          <a:srcRect/>
           <a:stretch>
             <a:fillRect/>
           </a:stretch>
         </p:blipFill>
         <p:spPr bwMode="auto">
           <a:xfrm>
-            <a:off x="6354501" y="2911032"/>
-            <a:ext cx="5837499" cy="3417535"/>
+            <a:off x="8128756" y="2237191"/>
+            <a:ext cx="4063244" cy="3532596"/>
           </a:xfrm>
           <a:prstGeom prst="rect">
             <a:avLst/>
@@ -6802,7 +6600,7 @@
     </p:spTree>
     <p:extLst>
       <p:ext uri="{BB962C8B-B14F-4D97-AF65-F5344CB8AC3E}">
-        <p14:creationId xmlns:p14="http://schemas.microsoft.com/office/powerpoint/2010/main" val="3004196100"/>
+        <p14:creationId xmlns:p14="http://schemas.microsoft.com/office/powerpoint/2010/main" val="1393217473"/>
       </p:ext>
     </p:extLst>
   </p:cSld>
@@ -6834,7 +6632,7 @@
           <p:cNvPr id="2" name="Title 1">
             <a:extLst>
               <a:ext uri="{FF2B5EF4-FFF2-40B4-BE49-F238E27FC236}">
-                <a16:creationId xmlns:a16="http://schemas.microsoft.com/office/drawing/2014/main" id="{F717414F-7377-6242-8523-2FD9689DAFAD}"/>
+                <a16:creationId xmlns:a16="http://schemas.microsoft.com/office/drawing/2014/main" id="{FF8A3034-5991-1529-6F29-8F3B63495EE4}"/>
               </a:ext>
             </a:extLst>
           </p:cNvPr>
@@ -6852,15 +6650,7 @@
           <a:p>
             <a:r>
               <a:rPr lang="en-US" dirty="0"/>
-              <a:t>Dying </a:t>
-            </a:r>
-            <a:r>
-              <a:rPr lang="en-US" dirty="0" err="1"/>
-              <a:t>relu</a:t>
-            </a:r>
-            <a:r>
-              <a:rPr lang="en-US" dirty="0"/>
-              <a:t> - Weight Updates</a:t>
+              <a:t>Activation Issues</a:t>
             </a:r>
           </a:p>
         </p:txBody>
@@ -6870,7 +6660,7 @@
           <p:cNvPr id="3" name="Content Placeholder 2">
             <a:extLst>
               <a:ext uri="{FF2B5EF4-FFF2-40B4-BE49-F238E27FC236}">
-                <a16:creationId xmlns:a16="http://schemas.microsoft.com/office/drawing/2014/main" id="{F0477A05-C767-02A8-870B-D9A48494471E}"/>
+                <a16:creationId xmlns:a16="http://schemas.microsoft.com/office/drawing/2014/main" id="{146EEFCC-F71B-3CFB-602F-68CC82543778}"/>
               </a:ext>
             </a:extLst>
           </p:cNvPr>
@@ -6881,95 +6671,19 @@
             <p:ph idx="1"/>
           </p:nvPr>
         </p:nvSpPr>
-        <p:spPr>
-          <a:xfrm>
-            <a:off x="7772400" y="2129742"/>
-            <a:ext cx="4419600" cy="3923739"/>
-          </a:xfrm>
-        </p:spPr>
-        <p:txBody>
-          <a:bodyPr>
-            <a:normAutofit/>
-          </a:bodyPr>
-          <a:lstStyle/>
-          <a:p>
-            <a:r>
-              <a:rPr lang="en-US" dirty="0" err="1"/>
-              <a:t>Relu</a:t>
-            </a:r>
-            <a:r>
-              <a:rPr lang="en-US" dirty="0"/>
-              <a:t> can suffer from ‘dying </a:t>
-            </a:r>
-            <a:r>
-              <a:rPr lang="en-US" dirty="0" err="1"/>
-              <a:t>relu</a:t>
-            </a:r>
-            <a:r>
-              <a:rPr lang="en-US" dirty="0"/>
-              <a:t>’. </a:t>
-            </a:r>
-          </a:p>
-          <a:p>
-            <a:r>
-              <a:rPr lang="en-US" dirty="0"/>
-              <a:t>It is less prone to this than others, that’s a strength. </a:t>
-            </a:r>
-          </a:p>
-          <a:p>
-            <a:r>
-              <a:rPr lang="en-US" dirty="0"/>
-              <a:t>Negative inputs yield 0 gradient</a:t>
-            </a:r>
-          </a:p>
-          <a:p>
-            <a:r>
-              <a:rPr lang="en-US" dirty="0"/>
-              <a:t>0 times anything is always 0. </a:t>
-            </a:r>
-          </a:p>
-          <a:p>
-            <a:r>
-              <a:rPr lang="en-US" dirty="0"/>
-              <a:t>If this happens for all inputs, the neuron may ‘die’, or become unable to ever ‘escape’. </a:t>
-            </a:r>
-          </a:p>
-        </p:txBody>
-      </p:sp>
-      <p:pic>
-        <p:nvPicPr>
-          <p:cNvPr id="4" name="Picture 3">
-            <a:extLst>
-              <a:ext uri="{FF2B5EF4-FFF2-40B4-BE49-F238E27FC236}">
-                <a16:creationId xmlns:a16="http://schemas.microsoft.com/office/drawing/2014/main" id="{1B5DD798-256E-60B2-E874-5AF3DAC6E4FC}"/>
-              </a:ext>
-            </a:extLst>
-          </p:cNvPr>
-          <p:cNvPicPr>
-            <a:picLocks noChangeAspect="1"/>
-          </p:cNvPicPr>
-          <p:nvPr/>
-        </p:nvPicPr>
-        <p:blipFill>
-          <a:blip r:embed="rId2"/>
-          <a:stretch>
-            <a:fillRect/>
-          </a:stretch>
-        </p:blipFill>
-        <p:spPr>
-          <a:xfrm>
-            <a:off x="0" y="2345917"/>
-            <a:ext cx="7772400" cy="3215400"/>
-          </a:xfrm>
-          <a:prstGeom prst="rect">
-            <a:avLst/>
-          </a:prstGeom>
-        </p:spPr>
-      </p:pic>
+        <p:spPr/>
+        <p:txBody>
+          <a:bodyPr/>
+          <a:lstStyle/>
+          <a:p>
+            <a:endParaRPr lang="en-US"/>
+          </a:p>
+        </p:txBody>
+      </p:sp>
     </p:spTree>
     <p:extLst>
       <p:ext uri="{BB962C8B-B14F-4D97-AF65-F5344CB8AC3E}">
-        <p14:creationId xmlns:p14="http://schemas.microsoft.com/office/powerpoint/2010/main" val="2324801087"/>
+        <p14:creationId xmlns:p14="http://schemas.microsoft.com/office/powerpoint/2010/main" val="1901037290"/>
       </p:ext>
     </p:extLst>
   </p:cSld>
@@ -6980,134 +6694,6 @@
 </file>
 
 <file path=ppt/slides/slide27.xml><?xml version="1.0" encoding="utf-8"?>
-<p:sld xmlns:a="http://schemas.openxmlformats.org/drawingml/2006/main" xmlns:r="http://schemas.openxmlformats.org/officeDocument/2006/relationships" xmlns:p="http://schemas.openxmlformats.org/presentationml/2006/main">
-  <p:cSld>
-    <p:spTree>
-      <p:nvGrpSpPr>
-        <p:cNvPr id="1" name=""/>
-        <p:cNvGrpSpPr/>
-        <p:nvPr/>
-      </p:nvGrpSpPr>
-      <p:grpSpPr>
-        <a:xfrm>
-          <a:off x="0" y="0"/>
-          <a:ext cx="0" cy="0"/>
-          <a:chOff x="0" y="0"/>
-          <a:chExt cx="0" cy="0"/>
-        </a:xfrm>
-      </p:grpSpPr>
-      <p:sp>
-        <p:nvSpPr>
-          <p:cNvPr id="2" name="Title 1">
-            <a:extLst>
-              <a:ext uri="{FF2B5EF4-FFF2-40B4-BE49-F238E27FC236}">
-                <a16:creationId xmlns:a16="http://schemas.microsoft.com/office/drawing/2014/main" id="{F08B606A-6EBE-34A0-F1C2-6B3112E64BD0}"/>
-              </a:ext>
-            </a:extLst>
-          </p:cNvPr>
-          <p:cNvSpPr>
-            <a:spLocks noGrp="1"/>
-          </p:cNvSpPr>
-          <p:nvPr>
-            <p:ph type="title"/>
-          </p:nvPr>
-        </p:nvSpPr>
-        <p:spPr/>
-        <p:txBody>
-          <a:bodyPr/>
-          <a:lstStyle/>
-          <a:p>
-            <a:r>
-              <a:rPr lang="en-US" dirty="0"/>
-              <a:t>Keeping Gradients Graded</a:t>
-            </a:r>
-          </a:p>
-        </p:txBody>
-      </p:sp>
-      <p:sp>
-        <p:nvSpPr>
-          <p:cNvPr id="3" name="Content Placeholder 2">
-            <a:extLst>
-              <a:ext uri="{FF2B5EF4-FFF2-40B4-BE49-F238E27FC236}">
-                <a16:creationId xmlns:a16="http://schemas.microsoft.com/office/drawing/2014/main" id="{8944A8BE-5490-F52E-ADC1-D81B54680EEC}"/>
-              </a:ext>
-            </a:extLst>
-          </p:cNvPr>
-          <p:cNvSpPr>
-            <a:spLocks noGrp="1"/>
-          </p:cNvSpPr>
-          <p:nvPr>
-            <p:ph idx="1"/>
-          </p:nvPr>
-        </p:nvSpPr>
-        <p:spPr/>
-        <p:txBody>
-          <a:bodyPr/>
-          <a:lstStyle/>
-          <a:p>
-            <a:r>
-              <a:rPr lang="en-US" dirty="0"/>
-              <a:t>These issues would be seen in loss as the model stopping learning. </a:t>
-            </a:r>
-          </a:p>
-          <a:p>
-            <a:pPr lvl="1"/>
-            <a:r>
-              <a:rPr lang="en-US" dirty="0"/>
-              <a:t>This definitely isn’t the only reason!</a:t>
-            </a:r>
-          </a:p>
-          <a:p>
-            <a:r>
-              <a:rPr lang="en-US" dirty="0"/>
-              <a:t>There are several things that can combat this problem. </a:t>
-            </a:r>
-          </a:p>
-          <a:p>
-            <a:pPr lvl="1"/>
-            <a:r>
-              <a:rPr lang="en-US" dirty="0"/>
-              <a:t>Activation functions – the sigmoid gradients can flatten more than others, tanh can explode, </a:t>
-            </a:r>
-            <a:r>
-              <a:rPr lang="en-US" dirty="0" err="1"/>
-              <a:t>relu</a:t>
-            </a:r>
-            <a:r>
-              <a:rPr lang="en-US" dirty="0"/>
-              <a:t> can die. </a:t>
-            </a:r>
-          </a:p>
-          <a:p>
-            <a:pPr lvl="1"/>
-            <a:r>
-              <a:rPr lang="en-US" dirty="0"/>
-              <a:t>Batch normalization. </a:t>
-            </a:r>
-          </a:p>
-          <a:p>
-            <a:pPr lvl="2"/>
-            <a:r>
-              <a:rPr lang="en-US" dirty="0"/>
-              <a:t>Recenter each batch, to prevent being stuck in saturated areas. </a:t>
-            </a:r>
-          </a:p>
-        </p:txBody>
-      </p:sp>
-    </p:spTree>
-    <p:extLst>
-      <p:ext uri="{BB962C8B-B14F-4D97-AF65-F5344CB8AC3E}">
-        <p14:creationId xmlns:p14="http://schemas.microsoft.com/office/powerpoint/2010/main" val="4024298218"/>
-      </p:ext>
-    </p:extLst>
-  </p:cSld>
-  <p:clrMapOvr>
-    <a:masterClrMapping/>
-  </p:clrMapOvr>
-</p:sld>
-</file>
-
-<file path=ppt/slides/slide28.xml><?xml version="1.0" encoding="utf-8"?>
 <p:sld xmlns:a="http://schemas.openxmlformats.org/drawingml/2006/main" xmlns:r="http://schemas.openxmlformats.org/officeDocument/2006/relationships" xmlns:p="http://schemas.openxmlformats.org/presentationml/2006/main">
   <p:cSld>
     <p:bg>
@@ -7153,7 +6739,7 @@
           <p:cNvPr id="2" name="Title 1">
             <a:extLst>
               <a:ext uri="{FF2B5EF4-FFF2-40B4-BE49-F238E27FC236}">
-                <a16:creationId xmlns:a16="http://schemas.microsoft.com/office/drawing/2014/main" id="{545C478D-17F9-E44C-A19C-72ECD4713630}"/>
+                <a16:creationId xmlns:a16="http://schemas.microsoft.com/office/drawing/2014/main" id="{B84EE14E-690A-82ED-BE86-623C5E683DA4}"/>
               </a:ext>
             </a:extLst>
           </p:cNvPr>
@@ -7178,25 +6764,153 @@
           <a:p>
             <a:r>
               <a:rPr lang="en-US" dirty="0"/>
-              <a:t>Activation Functions – </a:t>
+              <a:t>Vanishing Gradients</a:t>
+            </a:r>
+          </a:p>
+        </p:txBody>
+      </p:sp>
+      <p:sp>
+        <p:nvSpPr>
+          <p:cNvPr id="3" name="Content Placeholder 2">
+            <a:extLst>
+              <a:ext uri="{FF2B5EF4-FFF2-40B4-BE49-F238E27FC236}">
+                <a16:creationId xmlns:a16="http://schemas.microsoft.com/office/drawing/2014/main" id="{97B86E47-D960-F541-FC0B-79C8E24010DE}"/>
+              </a:ext>
+            </a:extLst>
+          </p:cNvPr>
+          <p:cNvSpPr>
+            <a:spLocks noGrp="1"/>
+          </p:cNvSpPr>
+          <p:nvPr>
+            <p:ph idx="1"/>
+          </p:nvPr>
+        </p:nvSpPr>
+        <p:spPr>
+          <a:xfrm>
+            <a:off x="0" y="1853752"/>
+            <a:ext cx="6792685" cy="4199729"/>
+          </a:xfrm>
+        </p:spPr>
+        <p:txBody>
+          <a:bodyPr>
+            <a:normAutofit fontScale="92500" lnSpcReduction="10000"/>
+          </a:bodyPr>
+          <a:lstStyle/>
+          <a:p>
+            <a:pPr>
+              <a:lnSpc>
+                <a:spcPct val="110000"/>
+              </a:lnSpc>
+            </a:pPr>
+            <a:r>
+              <a:rPr lang="en-US" dirty="0"/>
+              <a:t>Recall – gradient descent attributes error to different weights using the gradient (slope of the cost cure </a:t>
             </a:r>
             <a:r>
               <a:rPr lang="en-US" dirty="0" err="1"/>
-              <a:t>Relu</a:t>
-            </a:r>
-            <a:r>
-              <a:rPr lang="en-US" dirty="0"/>
-              <a:t> Variations</a:t>
+              <a:t>w.r.t.</a:t>
+            </a:r>
+            <a:r>
+              <a:rPr lang="en-US" dirty="0"/>
+              <a:t> that weight). </a:t>
+            </a:r>
+          </a:p>
+          <a:p>
+            <a:pPr>
+              <a:lnSpc>
+                <a:spcPct val="110000"/>
+              </a:lnSpc>
+            </a:pPr>
+            <a:r>
+              <a:rPr lang="en-US" dirty="0"/>
+              <a:t>Recall some neural network training facts:</a:t>
+            </a:r>
+          </a:p>
+          <a:p>
+            <a:pPr lvl="1">
+              <a:lnSpc>
+                <a:spcPct val="110000"/>
+              </a:lnSpc>
+            </a:pPr>
+            <a:r>
+              <a:rPr lang="en-US" dirty="0"/>
+              <a:t>They have many weights. </a:t>
+            </a:r>
+          </a:p>
+          <a:p>
+            <a:pPr lvl="1">
+              <a:lnSpc>
+                <a:spcPct val="110000"/>
+              </a:lnSpc>
+            </a:pPr>
+            <a:r>
+              <a:rPr lang="en-US" dirty="0"/>
+              <a:t>Propagate loss back through all layers, and there can be many. </a:t>
+            </a:r>
+          </a:p>
+          <a:p>
+            <a:pPr lvl="1">
+              <a:lnSpc>
+                <a:spcPct val="110000"/>
+              </a:lnSpc>
+            </a:pPr>
+            <a:r>
+              <a:rPr lang="en-US" dirty="0"/>
+              <a:t>Often train over many rounds, and get very accurate. </a:t>
+            </a:r>
+          </a:p>
+          <a:p>
+            <a:pPr>
+              <a:lnSpc>
+                <a:spcPct val="110000"/>
+              </a:lnSpc>
+            </a:pPr>
+            <a:r>
+              <a:rPr lang="en-US" dirty="0"/>
+              <a:t>We can encounter a problem that small changes to small numbers from small error split many ways yields tiny values. </a:t>
+            </a:r>
+          </a:p>
+          <a:p>
+            <a:pPr lvl="1">
+              <a:lnSpc>
+                <a:spcPct val="110000"/>
+              </a:lnSpc>
+            </a:pPr>
+            <a:r>
+              <a:rPr lang="en-US" dirty="0"/>
+              <a:t>The gradient can “vanish” if it is too small for the GD to work. </a:t>
+            </a:r>
+          </a:p>
+          <a:p>
+            <a:pPr lvl="1">
+              <a:lnSpc>
+                <a:spcPct val="110000"/>
+              </a:lnSpc>
+            </a:pPr>
+            <a:r>
+              <a:rPr lang="en-US" dirty="0"/>
+              <a:t>This can lead to ‘dead’ models, that can’t keep learning. </a:t>
+            </a:r>
+          </a:p>
+          <a:p>
+            <a:pPr>
+              <a:lnSpc>
+                <a:spcPct val="110000"/>
+              </a:lnSpc>
+            </a:pPr>
+            <a:r>
+              <a:rPr lang="en-US" dirty="0"/>
+              <a:t>Exploding gradient is opposite, more common with tanh and deep networks – things grow multiplicatively. </a:t>
             </a:r>
           </a:p>
         </p:txBody>
       </p:sp>
       <p:pic>
         <p:nvPicPr>
-          <p:cNvPr id="4098" name="Picture 2" descr="8: Illustration of output of ELU vs ReLU vs Leaky ReLU function with... |  Download Scientific Diagram">
-            <a:extLst>
-              <a:ext uri="{FF2B5EF4-FFF2-40B4-BE49-F238E27FC236}">
-                <a16:creationId xmlns:a16="http://schemas.microsoft.com/office/drawing/2014/main" id="{28167D23-766C-0F49-9CF6-84F2EA8D7EC2}"/>
+          <p:cNvPr id="1026" name="Picture 2" descr="Vanishing and Exploding Gradients in Neural Network Models: Debugging,  Monitoring, and Fixing">
+            <a:extLst>
+              <a:ext uri="{FF2B5EF4-FFF2-40B4-BE49-F238E27FC236}">
+                <a16:creationId xmlns:a16="http://schemas.microsoft.com/office/drawing/2014/main" id="{0B1C0D94-352B-B9A4-3AB7-311DD11AC998}"/>
               </a:ext>
             </a:extLst>
           </p:cNvPr>
@@ -7213,13 +6927,13 @@
               </a:ext>
             </a:extLst>
           </a:blip>
-          <a:srcRect l="11058" r="6709"/>
+          <a:srcRect l="2545" t="3291" r="5732" b="-1"/>
           <a:stretch/>
         </p:blipFill>
         <p:spPr bwMode="auto">
           <a:xfrm>
-            <a:off x="0" y="1853754"/>
-            <a:ext cx="4610638" cy="4199727"/>
+            <a:off x="8704533" y="37570"/>
+            <a:ext cx="3487467" cy="2873462"/>
           </a:xfrm>
           <a:prstGeom prst="rect">
             <a:avLst/>
@@ -7236,12 +6950,125 @@
           </a:extLst>
         </p:spPr>
       </p:pic>
+      <p:pic>
+        <p:nvPicPr>
+          <p:cNvPr id="11266" name="Picture 2" descr="Neural Network - Exponent">
+            <a:extLst>
+              <a:ext uri="{FF2B5EF4-FFF2-40B4-BE49-F238E27FC236}">
+                <a16:creationId xmlns:a16="http://schemas.microsoft.com/office/drawing/2014/main" id="{A5279CCD-97AE-28B3-1AAA-70AFF10ABB00}"/>
+              </a:ext>
+            </a:extLst>
+          </p:cNvPr>
+          <p:cNvPicPr>
+            <a:picLocks noChangeAspect="1" noChangeArrowheads="1"/>
+          </p:cNvPicPr>
+          <p:nvPr/>
+        </p:nvPicPr>
+        <p:blipFill>
+          <a:blip r:embed="rId3">
+            <a:extLst>
+              <a:ext uri="{28A0092B-C50C-407E-A947-70E740481C1C}">
+                <a14:useLocalDpi xmlns:a14="http://schemas.microsoft.com/office/drawing/2010/main" val="0"/>
+              </a:ext>
+            </a:extLst>
+          </a:blip>
+          <a:srcRect/>
+          <a:stretch>
+            <a:fillRect/>
+          </a:stretch>
+        </p:blipFill>
+        <p:spPr bwMode="auto">
+          <a:xfrm>
+            <a:off x="6354501" y="2911032"/>
+            <a:ext cx="5837499" cy="3417535"/>
+          </a:xfrm>
+          <a:prstGeom prst="rect">
+            <a:avLst/>
+          </a:prstGeom>
+          <a:noFill/>
+          <a:extLst>
+            <a:ext uri="{909E8E84-426E-40DD-AFC4-6F175D3DCCD1}">
+              <a14:hiddenFill xmlns:a14="http://schemas.microsoft.com/office/drawing/2010/main">
+                <a:solidFill>
+                  <a:srgbClr val="FFFFFF"/>
+                </a:solidFill>
+              </a14:hiddenFill>
+            </a:ext>
+          </a:extLst>
+        </p:spPr>
+      </p:pic>
+    </p:spTree>
+    <p:extLst>
+      <p:ext uri="{BB962C8B-B14F-4D97-AF65-F5344CB8AC3E}">
+        <p14:creationId xmlns:p14="http://schemas.microsoft.com/office/powerpoint/2010/main" val="3004196100"/>
+      </p:ext>
+    </p:extLst>
+  </p:cSld>
+  <p:clrMapOvr>
+    <a:masterClrMapping/>
+  </p:clrMapOvr>
+</p:sld>
+</file>
+
+<file path=ppt/slides/slide28.xml><?xml version="1.0" encoding="utf-8"?>
+<p:sld xmlns:a="http://schemas.openxmlformats.org/drawingml/2006/main" xmlns:r="http://schemas.openxmlformats.org/officeDocument/2006/relationships" xmlns:p="http://schemas.openxmlformats.org/presentationml/2006/main">
+  <p:cSld>
+    <p:spTree>
+      <p:nvGrpSpPr>
+        <p:cNvPr id="1" name=""/>
+        <p:cNvGrpSpPr/>
+        <p:nvPr/>
+      </p:nvGrpSpPr>
+      <p:grpSpPr>
+        <a:xfrm>
+          <a:off x="0" y="0"/>
+          <a:ext cx="0" cy="0"/>
+          <a:chOff x="0" y="0"/>
+          <a:chExt cx="0" cy="0"/>
+        </a:xfrm>
+      </p:grpSpPr>
+      <p:sp>
+        <p:nvSpPr>
+          <p:cNvPr id="2" name="Title 1">
+            <a:extLst>
+              <a:ext uri="{FF2B5EF4-FFF2-40B4-BE49-F238E27FC236}">
+                <a16:creationId xmlns:a16="http://schemas.microsoft.com/office/drawing/2014/main" id="{F717414F-7377-6242-8523-2FD9689DAFAD}"/>
+              </a:ext>
+            </a:extLst>
+          </p:cNvPr>
+          <p:cNvSpPr>
+            <a:spLocks noGrp="1"/>
+          </p:cNvSpPr>
+          <p:nvPr>
+            <p:ph type="title"/>
+          </p:nvPr>
+        </p:nvSpPr>
+        <p:spPr/>
+        <p:txBody>
+          <a:bodyPr/>
+          <a:lstStyle/>
+          <a:p>
+            <a:r>
+              <a:rPr lang="en-US" dirty="0"/>
+              <a:t>Dying </a:t>
+            </a:r>
+            <a:r>
+              <a:rPr lang="en-US" dirty="0" err="1"/>
+              <a:t>relu</a:t>
+            </a:r>
+            <a:r>
+              <a:rPr lang="en-US" dirty="0"/>
+              <a:t> - Weight Updates</a:t>
+            </a:r>
+          </a:p>
+        </p:txBody>
+      </p:sp>
       <p:sp>
         <p:nvSpPr>
           <p:cNvPr id="3" name="Content Placeholder 2">
             <a:extLst>
               <a:ext uri="{FF2B5EF4-FFF2-40B4-BE49-F238E27FC236}">
-                <a16:creationId xmlns:a16="http://schemas.microsoft.com/office/drawing/2014/main" id="{0E5CABA0-1113-1546-ABF6-995CA6EE2352}"/>
+                <a16:creationId xmlns:a16="http://schemas.microsoft.com/office/drawing/2014/main" id="{F0477A05-C767-02A8-870B-D9A48494471E}"/>
               </a:ext>
             </a:extLst>
           </p:cNvPr>
@@ -7254,8 +7081,8 @@
         </p:nvSpPr>
         <p:spPr>
           <a:xfrm>
-            <a:off x="4606746" y="1853754"/>
-            <a:ext cx="7585254" cy="4280828"/>
+            <a:off x="7772400" y="2129742"/>
+            <a:ext cx="4419600" cy="3923739"/>
           </a:xfrm>
         </p:spPr>
         <p:txBody>
@@ -7265,97 +7092,82 @@
           <a:lstStyle/>
           <a:p>
             <a:r>
-              <a:rPr lang="en-US" dirty="0"/>
-              <a:t>To address those issues with </a:t>
-            </a:r>
-            <a:r>
               <a:rPr lang="en-US" dirty="0" err="1"/>
-              <a:t>ReLU</a:t>
-            </a:r>
-            <a:r>
-              <a:rPr lang="en-US" dirty="0"/>
-              <a:t>, alternatives were created:</a:t>
-            </a:r>
-          </a:p>
-          <a:p>
-            <a:pPr lvl="1"/>
-            <a:r>
-              <a:rPr lang="en-US" dirty="0"/>
-              <a:t>Notably – Leaky </a:t>
+              <a:t>Relu</a:t>
+            </a:r>
+            <a:r>
+              <a:rPr lang="en-US" dirty="0"/>
+              <a:t> can suffer from ‘dying </a:t>
             </a:r>
             <a:r>
               <a:rPr lang="en-US" dirty="0" err="1"/>
-              <a:t>ReLU</a:t>
-            </a:r>
-            <a:r>
-              <a:rPr lang="en-US" dirty="0"/>
-              <a:t> and ELU (exponential linear). </a:t>
-            </a:r>
-          </a:p>
-          <a:p>
-            <a:r>
-              <a:rPr lang="en-US" dirty="0"/>
-              <a:t>Each removes that 0-value range of the derivative. </a:t>
-            </a:r>
-          </a:p>
-          <a:p>
-            <a:pPr lvl="1"/>
-            <a:r>
-              <a:rPr lang="en-US" dirty="0"/>
-              <a:t>Removes the Dying </a:t>
-            </a:r>
-            <a:r>
-              <a:rPr lang="en-US" dirty="0" err="1"/>
-              <a:t>ReLU</a:t>
-            </a:r>
-            <a:r>
-              <a:rPr lang="en-US" dirty="0"/>
-              <a:t> issue, so gradients don’t vanish as much. </a:t>
-            </a:r>
-          </a:p>
-          <a:p>
-            <a:pPr lvl="1"/>
-            <a:r>
-              <a:rPr lang="en-US" dirty="0"/>
-              <a:t>Can help speed training, or even allow convergence at all. </a:t>
-            </a:r>
-          </a:p>
-          <a:p>
-            <a:r>
-              <a:rPr lang="en-US" dirty="0" err="1"/>
-              <a:t>ReLU</a:t>
-            </a:r>
-            <a:r>
-              <a:rPr lang="en-US" dirty="0"/>
-              <a:t> or a variation on it are our defaults, and normally good. </a:t>
-            </a:r>
-          </a:p>
-          <a:p>
-            <a:r>
-              <a:rPr lang="en-US" dirty="0"/>
-              <a:t>If using </a:t>
-            </a:r>
-            <a:r>
-              <a:rPr lang="en-US" dirty="0" err="1"/>
-              <a:t>ReLU</a:t>
-            </a:r>
-            <a:r>
-              <a:rPr lang="en-US" dirty="0"/>
-              <a:t> – reducing LR can also combat the dying issue. </a:t>
-            </a:r>
-          </a:p>
-          <a:p>
-            <a:r>
-              <a:rPr lang="en-US" dirty="0"/>
-              <a:t>Note – this isn’t the most likely thing to be a massive issue, the case specific defaults tend to perform well most of the type. </a:t>
-            </a:r>
-          </a:p>
-        </p:txBody>
-      </p:sp>
+              <a:t>relu</a:t>
+            </a:r>
+            <a:r>
+              <a:rPr lang="en-US" dirty="0"/>
+              <a:t>’. </a:t>
+            </a:r>
+          </a:p>
+          <a:p>
+            <a:r>
+              <a:rPr lang="en-US" dirty="0"/>
+              <a:t>It is less prone to this than others, that’s a strength. </a:t>
+            </a:r>
+          </a:p>
+          <a:p>
+            <a:r>
+              <a:rPr lang="en-US" dirty="0"/>
+              <a:t>Negative inputs yield 0 gradient</a:t>
+            </a:r>
+          </a:p>
+          <a:p>
+            <a:r>
+              <a:rPr lang="en-US" dirty="0"/>
+              <a:t>0 times anything is always 0. </a:t>
+            </a:r>
+          </a:p>
+          <a:p>
+            <a:r>
+              <a:rPr lang="en-US" dirty="0"/>
+              <a:t>If this happens for all inputs, the neuron may ‘die’, or become unable to ever ‘escape’. </a:t>
+            </a:r>
+          </a:p>
+        </p:txBody>
+      </p:sp>
+      <p:pic>
+        <p:nvPicPr>
+          <p:cNvPr id="4" name="Picture 3">
+            <a:extLst>
+              <a:ext uri="{FF2B5EF4-FFF2-40B4-BE49-F238E27FC236}">
+                <a16:creationId xmlns:a16="http://schemas.microsoft.com/office/drawing/2014/main" id="{1B5DD798-256E-60B2-E874-5AF3DAC6E4FC}"/>
+              </a:ext>
+            </a:extLst>
+          </p:cNvPr>
+          <p:cNvPicPr>
+            <a:picLocks noChangeAspect="1"/>
+          </p:cNvPicPr>
+          <p:nvPr/>
+        </p:nvPicPr>
+        <p:blipFill>
+          <a:blip r:embed="rId2"/>
+          <a:stretch>
+            <a:fillRect/>
+          </a:stretch>
+        </p:blipFill>
+        <p:spPr>
+          <a:xfrm>
+            <a:off x="0" y="2345917"/>
+            <a:ext cx="7772400" cy="3215400"/>
+          </a:xfrm>
+          <a:prstGeom prst="rect">
+            <a:avLst/>
+          </a:prstGeom>
+        </p:spPr>
+      </p:pic>
     </p:spTree>
     <p:extLst>
       <p:ext uri="{BB962C8B-B14F-4D97-AF65-F5344CB8AC3E}">
-        <p14:creationId xmlns:p14="http://schemas.microsoft.com/office/powerpoint/2010/main" val="587557089"/>
+        <p14:creationId xmlns:p14="http://schemas.microsoft.com/office/powerpoint/2010/main" val="2324801087"/>
       </p:ext>
     </p:extLst>
   </p:cSld>
@@ -7366,6 +7178,286 @@
 </file>
 
 <file path=ppt/slides/slide29.xml><?xml version="1.0" encoding="utf-8"?>
+<p:sld xmlns:a="http://schemas.openxmlformats.org/drawingml/2006/main" xmlns:r="http://schemas.openxmlformats.org/officeDocument/2006/relationships" xmlns:p="http://schemas.openxmlformats.org/presentationml/2006/main">
+  <p:cSld>
+    <p:spTree>
+      <p:nvGrpSpPr>
+        <p:cNvPr id="1" name=""/>
+        <p:cNvGrpSpPr/>
+        <p:nvPr/>
+      </p:nvGrpSpPr>
+      <p:grpSpPr>
+        <a:xfrm>
+          <a:off x="0" y="0"/>
+          <a:ext cx="0" cy="0"/>
+          <a:chOff x="0" y="0"/>
+          <a:chExt cx="0" cy="0"/>
+        </a:xfrm>
+      </p:grpSpPr>
+      <p:sp>
+        <p:nvSpPr>
+          <p:cNvPr id="2" name="Title 1">
+            <a:extLst>
+              <a:ext uri="{FF2B5EF4-FFF2-40B4-BE49-F238E27FC236}">
+                <a16:creationId xmlns:a16="http://schemas.microsoft.com/office/drawing/2014/main" id="{F08B606A-6EBE-34A0-F1C2-6B3112E64BD0}"/>
+              </a:ext>
+            </a:extLst>
+          </p:cNvPr>
+          <p:cNvSpPr>
+            <a:spLocks noGrp="1"/>
+          </p:cNvSpPr>
+          <p:nvPr>
+            <p:ph type="title"/>
+          </p:nvPr>
+        </p:nvSpPr>
+        <p:spPr/>
+        <p:txBody>
+          <a:bodyPr/>
+          <a:lstStyle/>
+          <a:p>
+            <a:r>
+              <a:rPr lang="en-US" dirty="0"/>
+              <a:t>Keeping Gradients Graded</a:t>
+            </a:r>
+          </a:p>
+        </p:txBody>
+      </p:sp>
+      <p:sp>
+        <p:nvSpPr>
+          <p:cNvPr id="3" name="Content Placeholder 2">
+            <a:extLst>
+              <a:ext uri="{FF2B5EF4-FFF2-40B4-BE49-F238E27FC236}">
+                <a16:creationId xmlns:a16="http://schemas.microsoft.com/office/drawing/2014/main" id="{8944A8BE-5490-F52E-ADC1-D81B54680EEC}"/>
+              </a:ext>
+            </a:extLst>
+          </p:cNvPr>
+          <p:cNvSpPr>
+            <a:spLocks noGrp="1"/>
+          </p:cNvSpPr>
+          <p:nvPr>
+            <p:ph idx="1"/>
+          </p:nvPr>
+        </p:nvSpPr>
+        <p:spPr/>
+        <p:txBody>
+          <a:bodyPr/>
+          <a:lstStyle/>
+          <a:p>
+            <a:r>
+              <a:rPr lang="en-US" dirty="0"/>
+              <a:t>These issues would be seen in loss as the model stopping learning. </a:t>
+            </a:r>
+          </a:p>
+          <a:p>
+            <a:pPr lvl="1"/>
+            <a:r>
+              <a:rPr lang="en-US" dirty="0"/>
+              <a:t>This definitely isn’t the only reason!</a:t>
+            </a:r>
+          </a:p>
+          <a:p>
+            <a:r>
+              <a:rPr lang="en-US" dirty="0"/>
+              <a:t>There are several things that can combat this problem. </a:t>
+            </a:r>
+          </a:p>
+          <a:p>
+            <a:pPr lvl="1"/>
+            <a:r>
+              <a:rPr lang="en-US" dirty="0"/>
+              <a:t>Activation functions – the sigmoid gradients can flatten more than others, tanh can explode, </a:t>
+            </a:r>
+            <a:r>
+              <a:rPr lang="en-US" dirty="0" err="1"/>
+              <a:t>relu</a:t>
+            </a:r>
+            <a:r>
+              <a:rPr lang="en-US" dirty="0"/>
+              <a:t> can die. </a:t>
+            </a:r>
+          </a:p>
+          <a:p>
+            <a:pPr lvl="1"/>
+            <a:r>
+              <a:rPr lang="en-US" dirty="0"/>
+              <a:t>Batch normalization. </a:t>
+            </a:r>
+          </a:p>
+          <a:p>
+            <a:pPr lvl="2"/>
+            <a:r>
+              <a:rPr lang="en-US" dirty="0"/>
+              <a:t>Recenter each batch, to prevent being stuck in saturated areas. </a:t>
+            </a:r>
+          </a:p>
+        </p:txBody>
+      </p:sp>
+    </p:spTree>
+    <p:extLst>
+      <p:ext uri="{BB962C8B-B14F-4D97-AF65-F5344CB8AC3E}">
+        <p14:creationId xmlns:p14="http://schemas.microsoft.com/office/powerpoint/2010/main" val="4024298218"/>
+      </p:ext>
+    </p:extLst>
+  </p:cSld>
+  <p:clrMapOvr>
+    <a:masterClrMapping/>
+  </p:clrMapOvr>
+</p:sld>
+</file>
+
+<file path=ppt/slides/slide3.xml><?xml version="1.0" encoding="utf-8"?>
+<p:sld xmlns:a="http://schemas.openxmlformats.org/drawingml/2006/main" xmlns:r="http://schemas.openxmlformats.org/officeDocument/2006/relationships" xmlns:p="http://schemas.openxmlformats.org/presentationml/2006/main">
+  <p:cSld>
+    <p:spTree>
+      <p:nvGrpSpPr>
+        <p:cNvPr id="1" name=""/>
+        <p:cNvGrpSpPr/>
+        <p:nvPr/>
+      </p:nvGrpSpPr>
+      <p:grpSpPr>
+        <a:xfrm>
+          <a:off x="0" y="0"/>
+          <a:ext cx="0" cy="0"/>
+          <a:chOff x="0" y="0"/>
+          <a:chExt cx="0" cy="0"/>
+        </a:xfrm>
+      </p:grpSpPr>
+      <p:sp>
+        <p:nvSpPr>
+          <p:cNvPr id="2" name="Title 1">
+            <a:extLst>
+              <a:ext uri="{FF2B5EF4-FFF2-40B4-BE49-F238E27FC236}">
+                <a16:creationId xmlns:a16="http://schemas.microsoft.com/office/drawing/2014/main" id="{C714B66D-AFB2-A3EE-5997-4D1F0B95FC89}"/>
+              </a:ext>
+            </a:extLst>
+          </p:cNvPr>
+          <p:cNvSpPr>
+            <a:spLocks noGrp="1"/>
+          </p:cNvSpPr>
+          <p:nvPr>
+            <p:ph type="title"/>
+          </p:nvPr>
+        </p:nvSpPr>
+        <p:spPr/>
+        <p:txBody>
+          <a:bodyPr/>
+          <a:lstStyle/>
+          <a:p>
+            <a:r>
+              <a:rPr lang="en-US" dirty="0"/>
+              <a:t>Project (Other Class) Stuff</a:t>
+            </a:r>
+          </a:p>
+        </p:txBody>
+      </p:sp>
+      <p:sp>
+        <p:nvSpPr>
+          <p:cNvPr id="3" name="Content Placeholder 2">
+            <a:extLst>
+              <a:ext uri="{FF2B5EF4-FFF2-40B4-BE49-F238E27FC236}">
+                <a16:creationId xmlns:a16="http://schemas.microsoft.com/office/drawing/2014/main" id="{20141979-88C3-CEA4-3B52-F2E898F296B1}"/>
+              </a:ext>
+            </a:extLst>
+          </p:cNvPr>
+          <p:cNvSpPr>
+            <a:spLocks noGrp="1"/>
+          </p:cNvSpPr>
+          <p:nvPr>
+            <p:ph idx="1"/>
+          </p:nvPr>
+        </p:nvSpPr>
+        <p:spPr>
+          <a:xfrm>
+            <a:off x="728663" y="1853754"/>
+            <a:ext cx="11058525" cy="4199727"/>
+          </a:xfrm>
+        </p:spPr>
+        <p:txBody>
+          <a:bodyPr>
+            <a:normAutofit/>
+          </a:bodyPr>
+          <a:lstStyle/>
+          <a:p>
+            <a:r>
+              <a:rPr lang="en-US" dirty="0"/>
+              <a:t>If you are still doing real estate, think about large scale feature construction. </a:t>
+            </a:r>
+          </a:p>
+          <a:p>
+            <a:r>
+              <a:rPr lang="en-US" dirty="0"/>
+              <a:t>You can make many features from latitude and longitude that may matter. </a:t>
+            </a:r>
+          </a:p>
+          <a:p>
+            <a:pPr lvl="1"/>
+            <a:r>
+              <a:rPr lang="en-US" dirty="0"/>
+              <a:t>I’d make a lot of them, since you have a lot of data, and let the model sort it out. </a:t>
+            </a:r>
+          </a:p>
+          <a:p>
+            <a:r>
+              <a:rPr lang="en-US" dirty="0"/>
+              <a:t>Directly calculable via spatial joins and spatial files you can find online (Google mapping/spatial/</a:t>
+            </a:r>
+            <a:r>
+              <a:rPr lang="en-US" dirty="0" err="1"/>
+              <a:t>gis</a:t>
+            </a:r>
+            <a:r>
+              <a:rPr lang="en-US" dirty="0"/>
+              <a:t>):</a:t>
+            </a:r>
+          </a:p>
+          <a:p>
+            <a:pPr lvl="1"/>
+            <a:r>
+              <a:rPr lang="en-US" dirty="0"/>
+              <a:t>Distance from almost anything – roads, schools, water, commerce, neighbors, etc.</a:t>
+            </a:r>
+          </a:p>
+          <a:p>
+            <a:pPr lvl="1"/>
+            <a:r>
+              <a:rPr lang="en-US" dirty="0"/>
+              <a:t>Stats – density, comparison to neighbors, trends, crime, construction, census data (wealth, education, etc.)</a:t>
+            </a:r>
+          </a:p>
+          <a:p>
+            <a:r>
+              <a:rPr lang="en-US" dirty="0"/>
+              <a:t>Calculable with potentially free services online – time to get places, real estate stuff, sun. </a:t>
+            </a:r>
+          </a:p>
+          <a:p>
+            <a:r>
+              <a:rPr lang="en-US" dirty="0"/>
+              <a:t>Possible with large scale scraping – real estate data, all kinds of other stuff. </a:t>
+            </a:r>
+          </a:p>
+          <a:p>
+            <a:r>
+              <a:rPr lang="en-US" dirty="0"/>
+              <a:t>I’d try to cast as wide a net as possible and get almost anything I could automate as a start. </a:t>
+            </a:r>
+          </a:p>
+        </p:txBody>
+      </p:sp>
+    </p:spTree>
+    <p:extLst>
+      <p:ext uri="{BB962C8B-B14F-4D97-AF65-F5344CB8AC3E}">
+        <p14:creationId xmlns:p14="http://schemas.microsoft.com/office/powerpoint/2010/main" val="3300512849"/>
+      </p:ext>
+    </p:extLst>
+  </p:cSld>
+  <p:clrMapOvr>
+    <a:masterClrMapping/>
+  </p:clrMapOvr>
+</p:sld>
+</file>
+
+<file path=ppt/slides/slide30.xml><?xml version="1.0" encoding="utf-8"?>
 <p:sld xmlns:a="http://schemas.openxmlformats.org/drawingml/2006/main" xmlns:r="http://schemas.openxmlformats.org/officeDocument/2006/relationships" xmlns:p="http://schemas.openxmlformats.org/presentationml/2006/main">
   <p:cSld>
     <p:bg>
@@ -7411,7 +7503,7 @@
           <p:cNvPr id="2" name="Title 1">
             <a:extLst>
               <a:ext uri="{FF2B5EF4-FFF2-40B4-BE49-F238E27FC236}">
-                <a16:creationId xmlns:a16="http://schemas.microsoft.com/office/drawing/2014/main" id="{40507B04-F2DB-98A4-D942-BFC77170B7CC}"/>
+                <a16:creationId xmlns:a16="http://schemas.microsoft.com/office/drawing/2014/main" id="{545C478D-17F9-E44C-A19C-72ECD4713630}"/>
               </a:ext>
             </a:extLst>
           </p:cNvPr>
@@ -7436,17 +7528,25 @@
           <a:p>
             <a:r>
               <a:rPr lang="en-US" dirty="0"/>
-              <a:t>Batch Normalization</a:t>
+              <a:t>Activation Functions – </a:t>
+            </a:r>
+            <a:r>
+              <a:rPr lang="en-US" dirty="0" err="1"/>
+              <a:t>Relu</a:t>
+            </a:r>
+            <a:r>
+              <a:rPr lang="en-US" dirty="0"/>
+              <a:t> Variations</a:t>
             </a:r>
           </a:p>
         </p:txBody>
       </p:sp>
       <p:pic>
         <p:nvPicPr>
-          <p:cNvPr id="2050" name="Picture 2">
-            <a:extLst>
-              <a:ext uri="{FF2B5EF4-FFF2-40B4-BE49-F238E27FC236}">
-                <a16:creationId xmlns:a16="http://schemas.microsoft.com/office/drawing/2014/main" id="{DACB7CF9-B17A-78F0-88AC-6F1FA8C4D4E2}"/>
+          <p:cNvPr id="4098" name="Picture 2" descr="8: Illustration of output of ELU vs ReLU vs Leaky ReLU function with... |  Download Scientific Diagram">
+            <a:extLst>
+              <a:ext uri="{FF2B5EF4-FFF2-40B4-BE49-F238E27FC236}">
+                <a16:creationId xmlns:a16="http://schemas.microsoft.com/office/drawing/2014/main" id="{28167D23-766C-0F49-9CF6-84F2EA8D7EC2}"/>
               </a:ext>
             </a:extLst>
           </p:cNvPr>
@@ -7463,13 +7563,13 @@
               </a:ext>
             </a:extLst>
           </a:blip>
-          <a:srcRect l="15422"/>
+          <a:srcRect l="11058" r="6709"/>
           <a:stretch/>
         </p:blipFill>
         <p:spPr bwMode="auto">
           <a:xfrm>
-            <a:off x="1" y="1853754"/>
-            <a:ext cx="4902678" cy="2695444"/>
+            <a:off x="0" y="1853754"/>
+            <a:ext cx="4610638" cy="4199727"/>
           </a:xfrm>
           <a:prstGeom prst="rect">
             <a:avLst/>
@@ -7491,7 +7591,7 @@
           <p:cNvPr id="3" name="Content Placeholder 2">
             <a:extLst>
               <a:ext uri="{FF2B5EF4-FFF2-40B4-BE49-F238E27FC236}">
-                <a16:creationId xmlns:a16="http://schemas.microsoft.com/office/drawing/2014/main" id="{04C7B768-B788-7A3C-3953-7744E3C3FF4D}"/>
+                <a16:creationId xmlns:a16="http://schemas.microsoft.com/office/drawing/2014/main" id="{0E5CABA0-1113-1546-ABF6-995CA6EE2352}"/>
               </a:ext>
             </a:extLst>
           </p:cNvPr>
@@ -7504,8 +7604,8 @@
         </p:nvSpPr>
         <p:spPr>
           <a:xfrm>
-            <a:off x="5208609" y="1853754"/>
-            <a:ext cx="6983392" cy="4199727"/>
+            <a:off x="4606746" y="1853754"/>
+            <a:ext cx="7585254" cy="4280828"/>
           </a:xfrm>
         </p:spPr>
         <p:txBody>
@@ -7516,373 +7616,96 @@
           <a:p>
             <a:r>
               <a:rPr lang="en-US" dirty="0"/>
-              <a:t>Another gradient maintaining technique is batch normalization. </a:t>
-            </a:r>
-          </a:p>
-          <a:p>
-            <a:r>
-              <a:rPr lang="en-US" dirty="0"/>
-              <a:t>Batch normalization will shift the distribution back to “the middle”, where gradients exist. </a:t>
-            </a:r>
-          </a:p>
-          <a:p>
-            <a:pPr lvl="1"/>
-            <a:r>
-              <a:rPr lang="en-US" dirty="0"/>
-              <a:t>“Flat” gradients may vanish – near 0/1 with sigmoid. </a:t>
-            </a:r>
-          </a:p>
-          <a:p>
-            <a:pPr lvl="1"/>
-            <a:r>
-              <a:rPr lang="en-US" dirty="0"/>
-              <a:t>In </a:t>
+              <a:t>To address those issues with </a:t>
             </a:r>
             <a:r>
               <a:rPr lang="en-US" dirty="0" err="1"/>
-              <a:t>relu</a:t>
-            </a:r>
-            <a:r>
-              <a:rPr lang="en-US" dirty="0"/>
-              <a:t>, may die and go negative where there’s no gradient. </a:t>
-            </a:r>
-          </a:p>
-          <a:p>
-            <a:r>
-              <a:rPr lang="en-US" dirty="0"/>
-              <a:t>Usually applied after dense layer, but can vary. </a:t>
-            </a:r>
-          </a:p>
-          <a:p>
-            <a:r>
-              <a:rPr lang="en-US" dirty="0"/>
-              <a:t>Can often allow higher learning rates to work.</a:t>
-            </a:r>
-          </a:p>
-          <a:p>
-            <a:r>
-              <a:rPr lang="en-US" dirty="0"/>
-              <a:t>Note: we should normalize normally still. </a:t>
-            </a:r>
-          </a:p>
-          <a:p>
-            <a:endParaRPr lang="en-US" dirty="0"/>
-          </a:p>
-        </p:txBody>
-      </p:sp>
-      <p:pic>
-        <p:nvPicPr>
-          <p:cNvPr id="4" name="Picture 3">
-            <a:extLst>
-              <a:ext uri="{FF2B5EF4-FFF2-40B4-BE49-F238E27FC236}">
-                <a16:creationId xmlns:a16="http://schemas.microsoft.com/office/drawing/2014/main" id="{365C0691-8F19-F627-1CEB-290C78CF3C16}"/>
-              </a:ext>
-            </a:extLst>
-          </p:cNvPr>
-          <p:cNvPicPr>
-            <a:picLocks noChangeAspect="1"/>
-          </p:cNvPicPr>
-          <p:nvPr/>
-        </p:nvPicPr>
-        <p:blipFill>
-          <a:blip r:embed="rId3"/>
-          <a:stretch>
-            <a:fillRect/>
-          </a:stretch>
-        </p:blipFill>
-        <p:spPr>
-          <a:xfrm>
-            <a:off x="0" y="4549198"/>
-            <a:ext cx="4317357" cy="2308802"/>
-          </a:xfrm>
-          <a:prstGeom prst="rect">
-            <a:avLst/>
-          </a:prstGeom>
-        </p:spPr>
-      </p:pic>
+              <a:t>ReLU</a:t>
+            </a:r>
+            <a:r>
+              <a:rPr lang="en-US" dirty="0"/>
+              <a:t>, alternatives were created:</a:t>
+            </a:r>
+          </a:p>
+          <a:p>
+            <a:pPr lvl="1"/>
+            <a:r>
+              <a:rPr lang="en-US" dirty="0"/>
+              <a:t>Notably – Leaky </a:t>
+            </a:r>
+            <a:r>
+              <a:rPr lang="en-US" dirty="0" err="1"/>
+              <a:t>ReLU</a:t>
+            </a:r>
+            <a:r>
+              <a:rPr lang="en-US" dirty="0"/>
+              <a:t> and ELU (exponential linear). </a:t>
+            </a:r>
+          </a:p>
+          <a:p>
+            <a:r>
+              <a:rPr lang="en-US" dirty="0"/>
+              <a:t>Each removes that 0-value range of the derivative. </a:t>
+            </a:r>
+          </a:p>
+          <a:p>
+            <a:pPr lvl="1"/>
+            <a:r>
+              <a:rPr lang="en-US" dirty="0"/>
+              <a:t>Removes the Dying </a:t>
+            </a:r>
+            <a:r>
+              <a:rPr lang="en-US" dirty="0" err="1"/>
+              <a:t>ReLU</a:t>
+            </a:r>
+            <a:r>
+              <a:rPr lang="en-US" dirty="0"/>
+              <a:t> issue, so gradients don’t vanish as much. </a:t>
+            </a:r>
+          </a:p>
+          <a:p>
+            <a:pPr lvl="1"/>
+            <a:r>
+              <a:rPr lang="en-US" dirty="0"/>
+              <a:t>Can help speed training, or even allow convergence at all. </a:t>
+            </a:r>
+          </a:p>
+          <a:p>
+            <a:r>
+              <a:rPr lang="en-US" dirty="0" err="1"/>
+              <a:t>ReLU</a:t>
+            </a:r>
+            <a:r>
+              <a:rPr lang="en-US" dirty="0"/>
+              <a:t> or a variation on it are our defaults, and normally good. </a:t>
+            </a:r>
+          </a:p>
+          <a:p>
+            <a:r>
+              <a:rPr lang="en-US" dirty="0"/>
+              <a:t>If using </a:t>
+            </a:r>
+            <a:r>
+              <a:rPr lang="en-US" dirty="0" err="1"/>
+              <a:t>ReLU</a:t>
+            </a:r>
+            <a:r>
+              <a:rPr lang="en-US" dirty="0"/>
+              <a:t> – reducing LR can also combat the dying issue. </a:t>
+            </a:r>
+          </a:p>
+          <a:p>
+            <a:r>
+              <a:rPr lang="en-US" dirty="0"/>
+              <a:t>Note – this isn’t the most likely thing to be a massive issue, the case specific defaults tend to perform well most of the type. </a:t>
+            </a:r>
+          </a:p>
+        </p:txBody>
+      </p:sp>
     </p:spTree>
     <p:extLst>
       <p:ext uri="{BB962C8B-B14F-4D97-AF65-F5344CB8AC3E}">
-        <p14:creationId xmlns:p14="http://schemas.microsoft.com/office/powerpoint/2010/main" val="1687437132"/>
-      </p:ext>
-    </p:extLst>
-  </p:cSld>
-  <p:clrMapOvr>
-    <a:masterClrMapping/>
-  </p:clrMapOvr>
-</p:sld>
-</file>
-
-<file path=ppt/slides/slide3.xml><?xml version="1.0" encoding="utf-8"?>
-<p:sld xmlns:a="http://schemas.openxmlformats.org/drawingml/2006/main" xmlns:r="http://schemas.openxmlformats.org/officeDocument/2006/relationships" xmlns:p="http://schemas.openxmlformats.org/presentationml/2006/main">
-  <p:cSld>
-    <p:spTree>
-      <p:nvGrpSpPr>
-        <p:cNvPr id="1" name=""/>
-        <p:cNvGrpSpPr/>
-        <p:nvPr/>
-      </p:nvGrpSpPr>
-      <p:grpSpPr>
-        <a:xfrm>
-          <a:off x="0" y="0"/>
-          <a:ext cx="0" cy="0"/>
-          <a:chOff x="0" y="0"/>
-          <a:chExt cx="0" cy="0"/>
-        </a:xfrm>
-      </p:grpSpPr>
-      <p:sp>
-        <p:nvSpPr>
-          <p:cNvPr id="2" name="Title 1">
-            <a:extLst>
-              <a:ext uri="{FF2B5EF4-FFF2-40B4-BE49-F238E27FC236}">
-                <a16:creationId xmlns:a16="http://schemas.microsoft.com/office/drawing/2014/main" id="{C714B66D-AFB2-A3EE-5997-4D1F0B95FC89}"/>
-              </a:ext>
-            </a:extLst>
-          </p:cNvPr>
-          <p:cNvSpPr>
-            <a:spLocks noGrp="1"/>
-          </p:cNvSpPr>
-          <p:nvPr>
-            <p:ph type="title"/>
-          </p:nvPr>
-        </p:nvSpPr>
-        <p:spPr/>
-        <p:txBody>
-          <a:bodyPr/>
-          <a:lstStyle/>
-          <a:p>
-            <a:r>
-              <a:rPr lang="en-US" dirty="0"/>
-              <a:t>Project (Other Class) Stuff</a:t>
-            </a:r>
-          </a:p>
-        </p:txBody>
-      </p:sp>
-      <p:sp>
-        <p:nvSpPr>
-          <p:cNvPr id="3" name="Content Placeholder 2">
-            <a:extLst>
-              <a:ext uri="{FF2B5EF4-FFF2-40B4-BE49-F238E27FC236}">
-                <a16:creationId xmlns:a16="http://schemas.microsoft.com/office/drawing/2014/main" id="{20141979-88C3-CEA4-3B52-F2E898F296B1}"/>
-              </a:ext>
-            </a:extLst>
-          </p:cNvPr>
-          <p:cNvSpPr>
-            <a:spLocks noGrp="1"/>
-          </p:cNvSpPr>
-          <p:nvPr>
-            <p:ph idx="1"/>
-          </p:nvPr>
-        </p:nvSpPr>
-        <p:spPr>
-          <a:xfrm>
-            <a:off x="728663" y="1853754"/>
-            <a:ext cx="11058525" cy="4199727"/>
-          </a:xfrm>
-        </p:spPr>
-        <p:txBody>
-          <a:bodyPr>
-            <a:normAutofit/>
-          </a:bodyPr>
-          <a:lstStyle/>
-          <a:p>
-            <a:r>
-              <a:rPr lang="en-US" dirty="0"/>
-              <a:t>If you are still doing real estate, think about large scale feature construction. </a:t>
-            </a:r>
-          </a:p>
-          <a:p>
-            <a:r>
-              <a:rPr lang="en-US" dirty="0"/>
-              <a:t>You can make many features from latitude and longitude that may matter. </a:t>
-            </a:r>
-          </a:p>
-          <a:p>
-            <a:pPr lvl="1"/>
-            <a:r>
-              <a:rPr lang="en-US" dirty="0"/>
-              <a:t>I’d make a lot of them, since you have a lot of data, and let the model sort it out. </a:t>
-            </a:r>
-          </a:p>
-          <a:p>
-            <a:r>
-              <a:rPr lang="en-US" dirty="0"/>
-              <a:t>Directly calculable via spatial joins and spatial files you can find online (Google mapping/spatial/</a:t>
-            </a:r>
-            <a:r>
-              <a:rPr lang="en-US" dirty="0" err="1"/>
-              <a:t>gis</a:t>
-            </a:r>
-            <a:r>
-              <a:rPr lang="en-US" dirty="0"/>
-              <a:t>):</a:t>
-            </a:r>
-          </a:p>
-          <a:p>
-            <a:pPr lvl="1"/>
-            <a:r>
-              <a:rPr lang="en-US" dirty="0"/>
-              <a:t>Distance from almost anything – roads, schools, water, commerce, neighbors, etc.</a:t>
-            </a:r>
-          </a:p>
-          <a:p>
-            <a:pPr lvl="1"/>
-            <a:r>
-              <a:rPr lang="en-US" dirty="0"/>
-              <a:t>Stats – density, comparison to neighbors, trends, crime, construction, census data (wealth, education, etc.)</a:t>
-            </a:r>
-          </a:p>
-          <a:p>
-            <a:r>
-              <a:rPr lang="en-US" dirty="0"/>
-              <a:t>Calculable with potentially free services online – time to get places, real estate stuff, sun. </a:t>
-            </a:r>
-          </a:p>
-          <a:p>
-            <a:r>
-              <a:rPr lang="en-US" dirty="0"/>
-              <a:t>Possible with large scale scraping – real estate data, all kinds of other stuff. </a:t>
-            </a:r>
-          </a:p>
-          <a:p>
-            <a:r>
-              <a:rPr lang="en-US" dirty="0"/>
-              <a:t>I’d try to cast as wide a net as possible and get almost anything I could automate as a start. </a:t>
-            </a:r>
-          </a:p>
-        </p:txBody>
-      </p:sp>
-    </p:spTree>
-    <p:extLst>
-      <p:ext uri="{BB962C8B-B14F-4D97-AF65-F5344CB8AC3E}">
-        <p14:creationId xmlns:p14="http://schemas.microsoft.com/office/powerpoint/2010/main" val="3300512849"/>
-      </p:ext>
-    </p:extLst>
-  </p:cSld>
-  <p:clrMapOvr>
-    <a:masterClrMapping/>
-  </p:clrMapOvr>
-</p:sld>
-</file>
-
-<file path=ppt/slides/slide30.xml><?xml version="1.0" encoding="utf-8"?>
-<p:sld xmlns:a="http://schemas.openxmlformats.org/drawingml/2006/main" xmlns:r="http://schemas.openxmlformats.org/officeDocument/2006/relationships" xmlns:p="http://schemas.openxmlformats.org/presentationml/2006/main">
-  <p:cSld>
-    <p:spTree>
-      <p:nvGrpSpPr>
-        <p:cNvPr id="1" name=""/>
-        <p:cNvGrpSpPr/>
-        <p:nvPr/>
-      </p:nvGrpSpPr>
-      <p:grpSpPr>
-        <a:xfrm>
-          <a:off x="0" y="0"/>
-          <a:ext cx="0" cy="0"/>
-          <a:chOff x="0" y="0"/>
-          <a:chExt cx="0" cy="0"/>
-        </a:xfrm>
-      </p:grpSpPr>
-      <p:sp>
-        <p:nvSpPr>
-          <p:cNvPr id="2" name="Title 1">
-            <a:extLst>
-              <a:ext uri="{FF2B5EF4-FFF2-40B4-BE49-F238E27FC236}">
-                <a16:creationId xmlns:a16="http://schemas.microsoft.com/office/drawing/2014/main" id="{12EB02ED-4B2D-A4D0-9A1B-F5D886A1D4DA}"/>
-              </a:ext>
-            </a:extLst>
-          </p:cNvPr>
-          <p:cNvSpPr>
-            <a:spLocks noGrp="1"/>
-          </p:cNvSpPr>
-          <p:nvPr>
-            <p:ph type="title"/>
-          </p:nvPr>
-        </p:nvSpPr>
-        <p:spPr/>
-        <p:txBody>
-          <a:bodyPr/>
-          <a:lstStyle/>
-          <a:p>
-            <a:endParaRPr lang="en-US"/>
-          </a:p>
-        </p:txBody>
-      </p:sp>
-      <p:sp>
-        <p:nvSpPr>
-          <p:cNvPr id="3" name="Content Placeholder 2">
-            <a:extLst>
-              <a:ext uri="{FF2B5EF4-FFF2-40B4-BE49-F238E27FC236}">
-                <a16:creationId xmlns:a16="http://schemas.microsoft.com/office/drawing/2014/main" id="{79262A70-7FB5-F2DE-F3DF-7165887D447B}"/>
-              </a:ext>
-            </a:extLst>
-          </p:cNvPr>
-          <p:cNvSpPr>
-            <a:spLocks noGrp="1"/>
-          </p:cNvSpPr>
-          <p:nvPr>
-            <p:ph idx="1"/>
-          </p:nvPr>
-        </p:nvSpPr>
-        <p:spPr/>
-        <p:txBody>
-          <a:bodyPr/>
-          <a:lstStyle/>
-          <a:p>
-            <a:endParaRPr lang="en-US"/>
-          </a:p>
-        </p:txBody>
-      </p:sp>
-      <p:pic>
-        <p:nvPicPr>
-          <p:cNvPr id="4098" name="Picture 2">
-            <a:extLst>
-              <a:ext uri="{FF2B5EF4-FFF2-40B4-BE49-F238E27FC236}">
-                <a16:creationId xmlns:a16="http://schemas.microsoft.com/office/drawing/2014/main" id="{2C2DDD5C-391D-91D2-A435-8110CC33187B}"/>
-              </a:ext>
-            </a:extLst>
-          </p:cNvPr>
-          <p:cNvPicPr>
-            <a:picLocks noChangeAspect="1" noChangeArrowheads="1"/>
-          </p:cNvPicPr>
-          <p:nvPr/>
-        </p:nvPicPr>
-        <p:blipFill>
-          <a:blip r:embed="rId2">
-            <a:extLst>
-              <a:ext uri="{28A0092B-C50C-407E-A947-70E740481C1C}">
-                <a14:useLocalDpi xmlns:a14="http://schemas.microsoft.com/office/drawing/2010/main" val="0"/>
-              </a:ext>
-            </a:extLst>
-          </a:blip>
-          <a:srcRect/>
-          <a:stretch>
-            <a:fillRect/>
-          </a:stretch>
-        </p:blipFill>
-        <p:spPr bwMode="auto">
-          <a:xfrm>
-            <a:off x="0" y="1400175"/>
-            <a:ext cx="12192000" cy="4057650"/>
-          </a:xfrm>
-          <a:prstGeom prst="rect">
-            <a:avLst/>
-          </a:prstGeom>
-          <a:noFill/>
-          <a:extLst>
-            <a:ext uri="{909E8E84-426E-40DD-AFC4-6F175D3DCCD1}">
-              <a14:hiddenFill xmlns:a14="http://schemas.microsoft.com/office/drawing/2010/main">
-                <a:solidFill>
-                  <a:srgbClr val="FFFFFF"/>
-                </a:solidFill>
-              </a14:hiddenFill>
-            </a:ext>
-          </a:extLst>
-        </p:spPr>
-      </p:pic>
-    </p:spTree>
-    <p:extLst>
-      <p:ext uri="{BB962C8B-B14F-4D97-AF65-F5344CB8AC3E}">
-        <p14:creationId xmlns:p14="http://schemas.microsoft.com/office/powerpoint/2010/main" val="3011999725"/>
+        <p14:creationId xmlns:p14="http://schemas.microsoft.com/office/powerpoint/2010/main" val="587557089"/>
       </p:ext>
     </p:extLst>
   </p:cSld>
@@ -7893,740 +7716,6 @@
 </file>
 
 <file path=ppt/slides/slide31.xml><?xml version="1.0" encoding="utf-8"?>
-<p:sld xmlns:a="http://schemas.openxmlformats.org/drawingml/2006/main" xmlns:r="http://schemas.openxmlformats.org/officeDocument/2006/relationships" xmlns:p="http://schemas.openxmlformats.org/presentationml/2006/main">
-  <p:cSld>
-    <p:spTree>
-      <p:nvGrpSpPr>
-        <p:cNvPr id="1" name=""/>
-        <p:cNvGrpSpPr/>
-        <p:nvPr/>
-      </p:nvGrpSpPr>
-      <p:grpSpPr>
-        <a:xfrm>
-          <a:off x="0" y="0"/>
-          <a:ext cx="0" cy="0"/>
-          <a:chOff x="0" y="0"/>
-          <a:chExt cx="0" cy="0"/>
-        </a:xfrm>
-      </p:grpSpPr>
-      <p:sp>
-        <p:nvSpPr>
-          <p:cNvPr id="2" name="Title 1">
-            <a:extLst>
-              <a:ext uri="{FF2B5EF4-FFF2-40B4-BE49-F238E27FC236}">
-                <a16:creationId xmlns:a16="http://schemas.microsoft.com/office/drawing/2014/main" id="{8AB3D8A8-1279-C44F-AB18-28BCD74E016C}"/>
-              </a:ext>
-            </a:extLst>
-          </p:cNvPr>
-          <p:cNvSpPr>
-            <a:spLocks noGrp="1"/>
-          </p:cNvSpPr>
-          <p:nvPr>
-            <p:ph type="title"/>
-          </p:nvPr>
-        </p:nvSpPr>
-        <p:spPr/>
-        <p:txBody>
-          <a:bodyPr/>
-          <a:lstStyle/>
-          <a:p>
-            <a:r>
-              <a:rPr lang="en-US" dirty="0"/>
-              <a:t>Initialization </a:t>
-            </a:r>
-          </a:p>
-        </p:txBody>
-      </p:sp>
-      <p:sp>
-        <p:nvSpPr>
-          <p:cNvPr id="3" name="Content Placeholder 2">
-            <a:extLst>
-              <a:ext uri="{FF2B5EF4-FFF2-40B4-BE49-F238E27FC236}">
-                <a16:creationId xmlns:a16="http://schemas.microsoft.com/office/drawing/2014/main" id="{E6932690-B733-C245-A962-ECCC4BCA3B54}"/>
-              </a:ext>
-            </a:extLst>
-          </p:cNvPr>
-          <p:cNvSpPr>
-            <a:spLocks noGrp="1"/>
-          </p:cNvSpPr>
-          <p:nvPr>
-            <p:ph idx="1"/>
-          </p:nvPr>
-        </p:nvSpPr>
-        <p:spPr>
-          <a:xfrm>
-            <a:off x="1451579" y="1853754"/>
-            <a:ext cx="9603275" cy="4199727"/>
-          </a:xfrm>
-        </p:spPr>
-        <p:txBody>
-          <a:bodyPr>
-            <a:normAutofit lnSpcReduction="10000"/>
-          </a:bodyPr>
-          <a:lstStyle/>
-          <a:p>
-            <a:r>
-              <a:rPr lang="en-US" dirty="0"/>
-              <a:t>Initialization controls how the weight and bias values start. </a:t>
-            </a:r>
-          </a:p>
-          <a:p>
-            <a:r>
-              <a:rPr lang="en-US" dirty="0"/>
-              <a:t>Can be controlled via a parameter for each layer:</a:t>
-            </a:r>
-          </a:p>
-          <a:p>
-            <a:pPr lvl="1"/>
-            <a:r>
-              <a:rPr lang="en-US" dirty="0"/>
-              <a:t>Weight initialization is by default is “</a:t>
-            </a:r>
-            <a:r>
-              <a:rPr lang="en-US" dirty="0" err="1"/>
-              <a:t>glorot_uniform</a:t>
-            </a:r>
-            <a:r>
-              <a:rPr lang="en-US" dirty="0"/>
-              <a:t>” – a variety of random. </a:t>
-            </a:r>
-          </a:p>
-          <a:p>
-            <a:pPr lvl="1"/>
-            <a:r>
-              <a:rPr lang="en-US" dirty="0"/>
-              <a:t>Bias initialization defaults to 0. </a:t>
-            </a:r>
-          </a:p>
-          <a:p>
-            <a:pPr lvl="1"/>
-            <a:r>
-              <a:rPr lang="en-US" dirty="0"/>
-              <a:t>We can preset the output layer with the log of the expectation (for logit). </a:t>
-            </a:r>
-          </a:p>
-          <a:p>
-            <a:r>
-              <a:rPr lang="en-US" dirty="0"/>
-              <a:t>This can help the model train – both in speed and potential for convergence. </a:t>
-            </a:r>
-          </a:p>
-          <a:p>
-            <a:r>
-              <a:rPr lang="en-US" dirty="0"/>
-              <a:t>Imbalanced data – the data has a “bias” to start with. </a:t>
-            </a:r>
-          </a:p>
-          <a:p>
-            <a:pPr lvl="1"/>
-            <a:r>
-              <a:rPr lang="en-US" dirty="0"/>
-              <a:t>Set bias on output layer to the bias in the data. </a:t>
-            </a:r>
-          </a:p>
-          <a:p>
-            <a:pPr lvl="1"/>
-            <a:r>
-              <a:rPr lang="en-US" dirty="0"/>
-              <a:t>Network doesn’t need to learn the massive shift in bias. </a:t>
-            </a:r>
-          </a:p>
-          <a:p>
-            <a:pPr lvl="1"/>
-            <a:r>
-              <a:rPr lang="en-US" dirty="0"/>
-              <a:t>Faster convergence and more accuracy. </a:t>
-            </a:r>
-          </a:p>
-          <a:p>
-            <a:endParaRPr lang="en-US" dirty="0"/>
-          </a:p>
-        </p:txBody>
-      </p:sp>
-    </p:spTree>
-    <p:extLst>
-      <p:ext uri="{BB962C8B-B14F-4D97-AF65-F5344CB8AC3E}">
-        <p14:creationId xmlns:p14="http://schemas.microsoft.com/office/powerpoint/2010/main" val="2996444863"/>
-      </p:ext>
-    </p:extLst>
-  </p:cSld>
-  <p:clrMapOvr>
-    <a:masterClrMapping/>
-  </p:clrMapOvr>
-</p:sld>
-</file>
-
-<file path=ppt/slides/slide32.xml><?xml version="1.0" encoding="utf-8"?>
-<p:sld xmlns:a="http://schemas.openxmlformats.org/drawingml/2006/main" xmlns:r="http://schemas.openxmlformats.org/officeDocument/2006/relationships" xmlns:p="http://schemas.openxmlformats.org/presentationml/2006/main">
-  <p:cSld>
-    <p:spTree>
-      <p:nvGrpSpPr>
-        <p:cNvPr id="1" name=""/>
-        <p:cNvGrpSpPr/>
-        <p:nvPr/>
-      </p:nvGrpSpPr>
-      <p:grpSpPr>
-        <a:xfrm>
-          <a:off x="0" y="0"/>
-          <a:ext cx="0" cy="0"/>
-          <a:chOff x="0" y="0"/>
-          <a:chExt cx="0" cy="0"/>
-        </a:xfrm>
-      </p:grpSpPr>
-      <p:sp>
-        <p:nvSpPr>
-          <p:cNvPr id="2" name="Title 1">
-            <a:extLst>
-              <a:ext uri="{FF2B5EF4-FFF2-40B4-BE49-F238E27FC236}">
-                <a16:creationId xmlns:a16="http://schemas.microsoft.com/office/drawing/2014/main" id="{8E701F95-B618-A7AB-FF6B-7AF73C21932E}"/>
-              </a:ext>
-            </a:extLst>
-          </p:cNvPr>
-          <p:cNvSpPr>
-            <a:spLocks noGrp="1"/>
-          </p:cNvSpPr>
-          <p:nvPr>
-            <p:ph type="title"/>
-          </p:nvPr>
-        </p:nvSpPr>
-        <p:spPr/>
-        <p:txBody>
-          <a:bodyPr/>
-          <a:lstStyle/>
-          <a:p>
-            <a:r>
-              <a:rPr lang="en-US" dirty="0"/>
-              <a:t>Refresher - regularization</a:t>
-            </a:r>
-          </a:p>
-        </p:txBody>
-      </p:sp>
-      <p:sp>
-        <p:nvSpPr>
-          <p:cNvPr id="3" name="Content Placeholder 2">
-            <a:extLst>
-              <a:ext uri="{FF2B5EF4-FFF2-40B4-BE49-F238E27FC236}">
-                <a16:creationId xmlns:a16="http://schemas.microsoft.com/office/drawing/2014/main" id="{2E156C3E-5CAF-F8A6-E7F0-120D8C6CAFA5}"/>
-              </a:ext>
-            </a:extLst>
-          </p:cNvPr>
-          <p:cNvSpPr>
-            <a:spLocks noGrp="1"/>
-          </p:cNvSpPr>
-          <p:nvPr>
-            <p:ph idx="1"/>
-          </p:nvPr>
-        </p:nvSpPr>
-        <p:spPr>
-          <a:xfrm>
-            <a:off x="1451579" y="1853755"/>
-            <a:ext cx="9603275" cy="2265242"/>
-          </a:xfrm>
-        </p:spPr>
-        <p:txBody>
-          <a:bodyPr/>
-          <a:lstStyle/>
-          <a:p>
-            <a:r>
-              <a:rPr lang="en-US" dirty="0"/>
-              <a:t>We frequently/typically use some regularization in our models. </a:t>
-            </a:r>
-          </a:p>
-          <a:p>
-            <a:pPr lvl="1"/>
-            <a:r>
-              <a:rPr lang="en-US" dirty="0"/>
-              <a:t>Semi-standard as neural networks are large and flexible, and this constrains overfit. </a:t>
-            </a:r>
-          </a:p>
-          <a:p>
-            <a:pPr lvl="1"/>
-            <a:r>
-              <a:rPr lang="en-US" dirty="0"/>
-              <a:t>L1/L2 – works just as in regression, can be applied in layer as a hyperparameter. </a:t>
-            </a:r>
-          </a:p>
-          <a:p>
-            <a:pPr lvl="1"/>
-            <a:r>
-              <a:rPr lang="en-US" dirty="0"/>
-              <a:t>Dropout – removes some percentage of neurons randomly each batch of </a:t>
-            </a:r>
-            <a:r>
-              <a:rPr lang="en-US" b="1" dirty="0"/>
-              <a:t>training</a:t>
-            </a:r>
-            <a:r>
-              <a:rPr lang="en-US" dirty="0"/>
-              <a:t>, forcing learning to occur on the remainder. Applied as a layer, typically round 20—40% to start. </a:t>
-            </a:r>
-          </a:p>
-        </p:txBody>
-      </p:sp>
-      <p:pic>
-        <p:nvPicPr>
-          <p:cNvPr id="12290" name="Picture 2" descr="An illustration of the dropout mechanism within a multi-layer neural... |  Download Scientific Diagram">
-            <a:extLst>
-              <a:ext uri="{FF2B5EF4-FFF2-40B4-BE49-F238E27FC236}">
-                <a16:creationId xmlns:a16="http://schemas.microsoft.com/office/drawing/2014/main" id="{2AB7688B-0AD0-F5E0-0253-193C85677D34}"/>
-              </a:ext>
-            </a:extLst>
-          </p:cNvPr>
-          <p:cNvPicPr>
-            <a:picLocks noChangeAspect="1" noChangeArrowheads="1"/>
-          </p:cNvPicPr>
-          <p:nvPr/>
-        </p:nvPicPr>
-        <p:blipFill>
-          <a:blip r:embed="rId2">
-            <a:extLst>
-              <a:ext uri="{28A0092B-C50C-407E-A947-70E740481C1C}">
-                <a14:useLocalDpi xmlns:a14="http://schemas.microsoft.com/office/drawing/2010/main" val="0"/>
-              </a:ext>
-            </a:extLst>
-          </a:blip>
-          <a:srcRect/>
-          <a:stretch>
-            <a:fillRect/>
-          </a:stretch>
-        </p:blipFill>
-        <p:spPr bwMode="auto">
-          <a:xfrm>
-            <a:off x="1621461" y="3838427"/>
-            <a:ext cx="8949078" cy="2905818"/>
-          </a:xfrm>
-          <a:prstGeom prst="rect">
-            <a:avLst/>
-          </a:prstGeom>
-          <a:noFill/>
-          <a:extLst>
-            <a:ext uri="{909E8E84-426E-40DD-AFC4-6F175D3DCCD1}">
-              <a14:hiddenFill xmlns:a14="http://schemas.microsoft.com/office/drawing/2010/main">
-                <a:solidFill>
-                  <a:srgbClr val="FFFFFF"/>
-                </a:solidFill>
-              </a14:hiddenFill>
-            </a:ext>
-          </a:extLst>
-        </p:spPr>
-      </p:pic>
-    </p:spTree>
-    <p:extLst>
-      <p:ext uri="{BB962C8B-B14F-4D97-AF65-F5344CB8AC3E}">
-        <p14:creationId xmlns:p14="http://schemas.microsoft.com/office/powerpoint/2010/main" val="3865647208"/>
-      </p:ext>
-    </p:extLst>
-  </p:cSld>
-  <p:clrMapOvr>
-    <a:masterClrMapping/>
-  </p:clrMapOvr>
-</p:sld>
-</file>
-
-<file path=ppt/slides/slide33.xml><?xml version="1.0" encoding="utf-8"?>
-<p:sld xmlns:a="http://schemas.openxmlformats.org/drawingml/2006/main" xmlns:r="http://schemas.openxmlformats.org/officeDocument/2006/relationships" xmlns:p="http://schemas.openxmlformats.org/presentationml/2006/main">
-  <p:cSld>
-    <p:spTree>
-      <p:nvGrpSpPr>
-        <p:cNvPr id="1" name=""/>
-        <p:cNvGrpSpPr/>
-        <p:nvPr/>
-      </p:nvGrpSpPr>
-      <p:grpSpPr>
-        <a:xfrm>
-          <a:off x="0" y="0"/>
-          <a:ext cx="0" cy="0"/>
-          <a:chOff x="0" y="0"/>
-          <a:chExt cx="0" cy="0"/>
-        </a:xfrm>
-      </p:grpSpPr>
-      <p:sp>
-        <p:nvSpPr>
-          <p:cNvPr id="2" name="Title 1">
-            <a:extLst>
-              <a:ext uri="{FF2B5EF4-FFF2-40B4-BE49-F238E27FC236}">
-                <a16:creationId xmlns:a16="http://schemas.microsoft.com/office/drawing/2014/main" id="{998811FD-FB04-14C3-51B0-20806479A3B8}"/>
-              </a:ext>
-            </a:extLst>
-          </p:cNvPr>
-          <p:cNvSpPr>
-            <a:spLocks noGrp="1"/>
-          </p:cNvSpPr>
-          <p:nvPr>
-            <p:ph type="title"/>
-          </p:nvPr>
-        </p:nvSpPr>
-        <p:spPr/>
-        <p:txBody>
-          <a:bodyPr/>
-          <a:lstStyle/>
-          <a:p>
-            <a:r>
-              <a:rPr lang="en-US" dirty="0"/>
-              <a:t>Neural Networks are Flexible</a:t>
-            </a:r>
-          </a:p>
-        </p:txBody>
-      </p:sp>
-      <p:sp>
-        <p:nvSpPr>
-          <p:cNvPr id="3" name="Content Placeholder 2">
-            <a:extLst>
-              <a:ext uri="{FF2B5EF4-FFF2-40B4-BE49-F238E27FC236}">
-                <a16:creationId xmlns:a16="http://schemas.microsoft.com/office/drawing/2014/main" id="{F27F93CB-38CB-BCDC-EB9C-1D1A84E32F49}"/>
-              </a:ext>
-            </a:extLst>
-          </p:cNvPr>
-          <p:cNvSpPr>
-            <a:spLocks noGrp="1"/>
-          </p:cNvSpPr>
-          <p:nvPr>
-            <p:ph idx="1"/>
-          </p:nvPr>
-        </p:nvSpPr>
-        <p:spPr>
-          <a:xfrm>
-            <a:off x="1451579" y="1853754"/>
-            <a:ext cx="9603275" cy="4199727"/>
-          </a:xfrm>
-        </p:spPr>
-        <p:txBody>
-          <a:bodyPr/>
-          <a:lstStyle/>
-          <a:p>
-            <a:r>
-              <a:rPr lang="en-US" dirty="0"/>
-              <a:t>This isn’t near all of the things that we can change in a neural network. </a:t>
-            </a:r>
-          </a:p>
-          <a:p>
-            <a:r>
-              <a:rPr lang="en-US" dirty="0"/>
-              <a:t>The flexibility in their learning as they grow means that a wide range of models that are ‘good enough’ will converge on a good solution. </a:t>
-            </a:r>
-          </a:p>
-          <a:p>
-            <a:pPr lvl="1"/>
-            <a:r>
-              <a:rPr lang="en-US" dirty="0"/>
-              <a:t>E.g. the image competition has models with widely different structures fighting for fractions of a percentage of accuracy in a task. </a:t>
-            </a:r>
-          </a:p>
-          <a:p>
-            <a:r>
-              <a:rPr lang="en-US" dirty="0"/>
-              <a:t>Mirror something that is known to work, unless experimenting (which is good). </a:t>
-            </a:r>
-          </a:p>
-          <a:p>
-            <a:r>
-              <a:rPr lang="en-US" dirty="0"/>
-              <a:t>Make reasonable choices, add some excess, regularization, and early stopping, let train. </a:t>
-            </a:r>
-          </a:p>
-          <a:p>
-            <a:pPr lvl="1"/>
-            <a:r>
-              <a:rPr lang="en-US" dirty="0"/>
-              <a:t>Adjust from here based on what you see. </a:t>
-            </a:r>
-          </a:p>
-          <a:p>
-            <a:r>
-              <a:rPr lang="en-US" dirty="0"/>
-              <a:t>Finding the perfect configuration as we did with a grid becomes time impractical quickly. </a:t>
-            </a:r>
-          </a:p>
-        </p:txBody>
-      </p:sp>
-    </p:spTree>
-    <p:extLst>
-      <p:ext uri="{BB962C8B-B14F-4D97-AF65-F5344CB8AC3E}">
-        <p14:creationId xmlns:p14="http://schemas.microsoft.com/office/powerpoint/2010/main" val="2910667997"/>
-      </p:ext>
-    </p:extLst>
-  </p:cSld>
-  <p:clrMapOvr>
-    <a:masterClrMapping/>
-  </p:clrMapOvr>
-</p:sld>
-</file>
-
-<file path=ppt/slides/slide34.xml><?xml version="1.0" encoding="utf-8"?>
-<p:sld xmlns:a="http://schemas.openxmlformats.org/drawingml/2006/main" xmlns:r="http://schemas.openxmlformats.org/officeDocument/2006/relationships" xmlns:p="http://schemas.openxmlformats.org/presentationml/2006/main" show="0">
-  <p:cSld>
-    <p:spTree>
-      <p:nvGrpSpPr>
-        <p:cNvPr id="1" name=""/>
-        <p:cNvGrpSpPr/>
-        <p:nvPr/>
-      </p:nvGrpSpPr>
-      <p:grpSpPr>
-        <a:xfrm>
-          <a:off x="0" y="0"/>
-          <a:ext cx="0" cy="0"/>
-          <a:chOff x="0" y="0"/>
-          <a:chExt cx="0" cy="0"/>
-        </a:xfrm>
-      </p:grpSpPr>
-      <p:sp>
-        <p:nvSpPr>
-          <p:cNvPr id="2" name="Title 1">
-            <a:extLst>
-              <a:ext uri="{FF2B5EF4-FFF2-40B4-BE49-F238E27FC236}">
-                <a16:creationId xmlns:a16="http://schemas.microsoft.com/office/drawing/2014/main" id="{EAF056FD-E697-5353-97FE-84FF67ABB289}"/>
-              </a:ext>
-            </a:extLst>
-          </p:cNvPr>
-          <p:cNvSpPr>
-            <a:spLocks noGrp="1"/>
-          </p:cNvSpPr>
-          <p:nvPr>
-            <p:ph type="title"/>
-          </p:nvPr>
-        </p:nvSpPr>
-        <p:spPr/>
-        <p:txBody>
-          <a:bodyPr/>
-          <a:lstStyle/>
-          <a:p>
-            <a:r>
-              <a:rPr lang="en-US" dirty="0"/>
-              <a:t>Other Tuning - Optimization</a:t>
-            </a:r>
-          </a:p>
-        </p:txBody>
-      </p:sp>
-      <p:sp>
-        <p:nvSpPr>
-          <p:cNvPr id="3" name="Content Placeholder 2">
-            <a:extLst>
-              <a:ext uri="{FF2B5EF4-FFF2-40B4-BE49-F238E27FC236}">
-                <a16:creationId xmlns:a16="http://schemas.microsoft.com/office/drawing/2014/main" id="{F044C5EC-E837-8A77-86C7-0C127E9A7BD8}"/>
-              </a:ext>
-            </a:extLst>
-          </p:cNvPr>
-          <p:cNvSpPr>
-            <a:spLocks noGrp="1"/>
-          </p:cNvSpPr>
-          <p:nvPr>
-            <p:ph idx="1"/>
-          </p:nvPr>
-        </p:nvSpPr>
-        <p:spPr>
-          <a:xfrm>
-            <a:off x="1451579" y="1853754"/>
-            <a:ext cx="9603275" cy="4199727"/>
-          </a:xfrm>
-        </p:spPr>
-        <p:txBody>
-          <a:bodyPr/>
-          <a:lstStyle/>
-          <a:p>
-            <a:r>
-              <a:rPr lang="en-US" dirty="0"/>
-              <a:t>There are a huge number of things that can be changed to tune a neural network model. </a:t>
-            </a:r>
-          </a:p>
-          <a:p>
-            <a:r>
-              <a:rPr lang="en-US" dirty="0"/>
-              <a:t>We are focusing mainly on the ‘structure’ type of things. </a:t>
-            </a:r>
-          </a:p>
-          <a:p>
-            <a:pPr lvl="1"/>
-            <a:r>
-              <a:rPr lang="en-US" dirty="0"/>
-              <a:t>Network size, layers, type, hyperparameters, regularizing (and similar) layers like normalization.</a:t>
-            </a:r>
-          </a:p>
-          <a:p>
-            <a:r>
-              <a:rPr lang="en-US" dirty="0"/>
-              <a:t>We are not really focusing on the optimization part - loss/gradient descent specific things. </a:t>
-            </a:r>
-          </a:p>
-          <a:p>
-            <a:pPr lvl="1"/>
-            <a:r>
-              <a:rPr lang="en-US" dirty="0"/>
-              <a:t>Learning rates, momentum, optimizers. </a:t>
-            </a:r>
-          </a:p>
-          <a:p>
-            <a:pPr lvl="1"/>
-            <a:r>
-              <a:rPr lang="en-US" dirty="0"/>
-              <a:t>This matters, but is more theoretical in theory, and scenario dependent in practice. </a:t>
-            </a:r>
-          </a:p>
-          <a:p>
-            <a:pPr lvl="1"/>
-            <a:r>
-              <a:rPr lang="en-US" dirty="0"/>
-              <a:t>Optimization is critical as problems get larger – converging quickly, or at all, can be hard. </a:t>
-            </a:r>
-          </a:p>
-          <a:p>
-            <a:r>
-              <a:rPr lang="en-US" dirty="0"/>
-              <a:t>For our usage, we can mainly try different learning rates, if needed. </a:t>
-            </a:r>
-          </a:p>
-        </p:txBody>
-      </p:sp>
-    </p:spTree>
-    <p:extLst>
-      <p:ext uri="{BB962C8B-B14F-4D97-AF65-F5344CB8AC3E}">
-        <p14:creationId xmlns:p14="http://schemas.microsoft.com/office/powerpoint/2010/main" val="1149088017"/>
-      </p:ext>
-    </p:extLst>
-  </p:cSld>
-  <p:clrMapOvr>
-    <a:masterClrMapping/>
-  </p:clrMapOvr>
-</p:sld>
-</file>
-
-<file path=ppt/slides/slide35.xml><?xml version="1.0" encoding="utf-8"?>
-<p:sld xmlns:a="http://schemas.openxmlformats.org/drawingml/2006/main" xmlns:r="http://schemas.openxmlformats.org/officeDocument/2006/relationships" xmlns:p="http://schemas.openxmlformats.org/presentationml/2006/main">
-  <p:cSld>
-    <p:spTree>
-      <p:nvGrpSpPr>
-        <p:cNvPr id="1" name=""/>
-        <p:cNvGrpSpPr/>
-        <p:nvPr/>
-      </p:nvGrpSpPr>
-      <p:grpSpPr>
-        <a:xfrm>
-          <a:off x="0" y="0"/>
-          <a:ext cx="0" cy="0"/>
-          <a:chOff x="0" y="0"/>
-          <a:chExt cx="0" cy="0"/>
-        </a:xfrm>
-      </p:grpSpPr>
-      <p:sp>
-        <p:nvSpPr>
-          <p:cNvPr id="2" name="Title 1">
-            <a:extLst>
-              <a:ext uri="{FF2B5EF4-FFF2-40B4-BE49-F238E27FC236}">
-                <a16:creationId xmlns:a16="http://schemas.microsoft.com/office/drawing/2014/main" id="{2D76F3B6-86DB-FFF0-6350-C1AA19E15476}"/>
-              </a:ext>
-            </a:extLst>
-          </p:cNvPr>
-          <p:cNvSpPr>
-            <a:spLocks noGrp="1"/>
-          </p:cNvSpPr>
-          <p:nvPr>
-            <p:ph type="title"/>
-          </p:nvPr>
-        </p:nvSpPr>
-        <p:spPr/>
-        <p:txBody>
-          <a:bodyPr/>
-          <a:lstStyle/>
-          <a:p>
-            <a:r>
-              <a:rPr lang="en-US" dirty="0"/>
-              <a:t>Tuning From A Loss Plot</a:t>
-            </a:r>
-          </a:p>
-        </p:txBody>
-      </p:sp>
-      <p:sp>
-        <p:nvSpPr>
-          <p:cNvPr id="3" name="Content Placeholder 2">
-            <a:extLst>
-              <a:ext uri="{FF2B5EF4-FFF2-40B4-BE49-F238E27FC236}">
-                <a16:creationId xmlns:a16="http://schemas.microsoft.com/office/drawing/2014/main" id="{915E008A-9A08-A25F-5145-ECD1F6B212D2}"/>
-              </a:ext>
-            </a:extLst>
-          </p:cNvPr>
-          <p:cNvSpPr>
-            <a:spLocks noGrp="1"/>
-          </p:cNvSpPr>
-          <p:nvPr>
-            <p:ph idx="1"/>
-          </p:nvPr>
-        </p:nvSpPr>
-        <p:spPr>
-          <a:xfrm>
-            <a:off x="1451579" y="1853754"/>
-            <a:ext cx="9603275" cy="4199727"/>
-          </a:xfrm>
-        </p:spPr>
-        <p:txBody>
-          <a:bodyPr/>
-          <a:lstStyle/>
-          <a:p>
-            <a:r>
-              <a:rPr lang="en-US" dirty="0"/>
-              <a:t>The loss plot is our main, but not only, tool to help tune a model. </a:t>
-            </a:r>
-          </a:p>
-          <a:p>
-            <a:r>
-              <a:rPr lang="en-US" dirty="0"/>
-              <a:t>None of these things are definitive, but there are things that happen often that we can look at first for a possible solution. </a:t>
-            </a:r>
-          </a:p>
-          <a:p>
-            <a:r>
-              <a:rPr lang="en-US" dirty="0"/>
-              <a:t>In neural networks, we must weigh against computation time – defaults are usually fast.</a:t>
-            </a:r>
-          </a:p>
-          <a:p>
-            <a:r>
-              <a:rPr lang="en-US" dirty="0"/>
-              <a:t>Some general things:</a:t>
-            </a:r>
-          </a:p>
-          <a:p>
-            <a:pPr lvl="1"/>
-            <a:r>
-              <a:rPr lang="en-US" dirty="0"/>
-              <a:t>Make sure that data is scaled. </a:t>
-            </a:r>
-          </a:p>
-          <a:p>
-            <a:pPr lvl="1"/>
-            <a:r>
-              <a:rPr lang="en-US" dirty="0"/>
-              <a:t>More complex relationships perform better with more layers. </a:t>
-            </a:r>
-          </a:p>
-          <a:p>
-            <a:pPr lvl="1"/>
-            <a:r>
-              <a:rPr lang="en-US" dirty="0"/>
-              <a:t>The more data you have, the larger a model you’ll be able to train well. </a:t>
-            </a:r>
-          </a:p>
-          <a:p>
-            <a:pPr lvl="1"/>
-            <a:r>
-              <a:rPr lang="en-US" dirty="0"/>
-              <a:t>Unless there’s a time constraint, let things go for lots of epochs and use early stopping. </a:t>
-            </a:r>
-          </a:p>
-        </p:txBody>
-      </p:sp>
-    </p:spTree>
-    <p:extLst>
-      <p:ext uri="{BB962C8B-B14F-4D97-AF65-F5344CB8AC3E}">
-        <p14:creationId xmlns:p14="http://schemas.microsoft.com/office/powerpoint/2010/main" val="545948356"/>
-      </p:ext>
-    </p:extLst>
-  </p:cSld>
-  <p:clrMapOvr>
-    <a:masterClrMapping/>
-  </p:clrMapOvr>
-</p:sld>
-</file>
-
-<file path=ppt/slides/slide36.xml><?xml version="1.0" encoding="utf-8"?>
 <p:sld xmlns:a="http://schemas.openxmlformats.org/drawingml/2006/main" xmlns:r="http://schemas.openxmlformats.org/officeDocument/2006/relationships" xmlns:p="http://schemas.openxmlformats.org/presentationml/2006/main">
   <p:cSld>
     <p:bg>
@@ -8672,6 +7761,1115 @@
           <p:cNvPr id="2" name="Title 1">
             <a:extLst>
               <a:ext uri="{FF2B5EF4-FFF2-40B4-BE49-F238E27FC236}">
+                <a16:creationId xmlns:a16="http://schemas.microsoft.com/office/drawing/2014/main" id="{40507B04-F2DB-98A4-D942-BFC77170B7CC}"/>
+              </a:ext>
+            </a:extLst>
+          </p:cNvPr>
+          <p:cNvSpPr>
+            <a:spLocks noGrp="1"/>
+          </p:cNvSpPr>
+          <p:nvPr>
+            <p:ph type="title"/>
+          </p:nvPr>
+        </p:nvSpPr>
+        <p:spPr>
+          <a:xfrm>
+            <a:off x="1451579" y="804519"/>
+            <a:ext cx="9603275" cy="1049235"/>
+          </a:xfrm>
+        </p:spPr>
+        <p:txBody>
+          <a:bodyPr>
+            <a:normAutofit/>
+          </a:bodyPr>
+          <a:lstStyle/>
+          <a:p>
+            <a:r>
+              <a:rPr lang="en-US" dirty="0"/>
+              <a:t>Batch Normalization</a:t>
+            </a:r>
+          </a:p>
+        </p:txBody>
+      </p:sp>
+      <p:pic>
+        <p:nvPicPr>
+          <p:cNvPr id="2050" name="Picture 2">
+            <a:extLst>
+              <a:ext uri="{FF2B5EF4-FFF2-40B4-BE49-F238E27FC236}">
+                <a16:creationId xmlns:a16="http://schemas.microsoft.com/office/drawing/2014/main" id="{DACB7CF9-B17A-78F0-88AC-6F1FA8C4D4E2}"/>
+              </a:ext>
+            </a:extLst>
+          </p:cNvPr>
+          <p:cNvPicPr>
+            <a:picLocks noChangeAspect="1" noChangeArrowheads="1"/>
+          </p:cNvPicPr>
+          <p:nvPr/>
+        </p:nvPicPr>
+        <p:blipFill rotWithShape="1">
+          <a:blip r:embed="rId2">
+            <a:extLst>
+              <a:ext uri="{28A0092B-C50C-407E-A947-70E740481C1C}">
+                <a14:useLocalDpi xmlns:a14="http://schemas.microsoft.com/office/drawing/2010/main" val="0"/>
+              </a:ext>
+            </a:extLst>
+          </a:blip>
+          <a:srcRect l="15422"/>
+          <a:stretch/>
+        </p:blipFill>
+        <p:spPr bwMode="auto">
+          <a:xfrm>
+            <a:off x="1" y="1853754"/>
+            <a:ext cx="4902678" cy="2695444"/>
+          </a:xfrm>
+          <a:prstGeom prst="rect">
+            <a:avLst/>
+          </a:prstGeom>
+          <a:noFill/>
+          <a:extLst>
+            <a:ext uri="{909E8E84-426E-40DD-AFC4-6F175D3DCCD1}">
+              <a14:hiddenFill xmlns:a14="http://schemas.microsoft.com/office/drawing/2010/main">
+                <a:solidFill>
+                  <a:srgbClr val="FFFFFF"/>
+                </a:solidFill>
+              </a14:hiddenFill>
+            </a:ext>
+          </a:extLst>
+        </p:spPr>
+      </p:pic>
+      <p:sp>
+        <p:nvSpPr>
+          <p:cNvPr id="3" name="Content Placeholder 2">
+            <a:extLst>
+              <a:ext uri="{FF2B5EF4-FFF2-40B4-BE49-F238E27FC236}">
+                <a16:creationId xmlns:a16="http://schemas.microsoft.com/office/drawing/2014/main" id="{04C7B768-B788-7A3C-3953-7744E3C3FF4D}"/>
+              </a:ext>
+            </a:extLst>
+          </p:cNvPr>
+          <p:cNvSpPr>
+            <a:spLocks noGrp="1"/>
+          </p:cNvSpPr>
+          <p:nvPr>
+            <p:ph idx="1"/>
+          </p:nvPr>
+        </p:nvSpPr>
+        <p:spPr>
+          <a:xfrm>
+            <a:off x="5208609" y="1853754"/>
+            <a:ext cx="6983392" cy="4199727"/>
+          </a:xfrm>
+        </p:spPr>
+        <p:txBody>
+          <a:bodyPr>
+            <a:normAutofit/>
+          </a:bodyPr>
+          <a:lstStyle/>
+          <a:p>
+            <a:r>
+              <a:rPr lang="en-US" dirty="0"/>
+              <a:t>Another gradient maintaining technique is batch normalization. </a:t>
+            </a:r>
+          </a:p>
+          <a:p>
+            <a:r>
+              <a:rPr lang="en-US" dirty="0"/>
+              <a:t>Batch normalization will shift the distribution back to “the middle”, where gradients exist. </a:t>
+            </a:r>
+          </a:p>
+          <a:p>
+            <a:pPr lvl="1"/>
+            <a:r>
+              <a:rPr lang="en-US" dirty="0"/>
+              <a:t>“Flat” gradients may vanish – near 0/1 with sigmoid. </a:t>
+            </a:r>
+          </a:p>
+          <a:p>
+            <a:pPr lvl="1"/>
+            <a:r>
+              <a:rPr lang="en-US" dirty="0"/>
+              <a:t>In </a:t>
+            </a:r>
+            <a:r>
+              <a:rPr lang="en-US" dirty="0" err="1"/>
+              <a:t>relu</a:t>
+            </a:r>
+            <a:r>
+              <a:rPr lang="en-US" dirty="0"/>
+              <a:t>, may die and go negative where there’s no gradient. </a:t>
+            </a:r>
+          </a:p>
+          <a:p>
+            <a:r>
+              <a:rPr lang="en-US" dirty="0"/>
+              <a:t>Usually applied after dense layer, but can vary. </a:t>
+            </a:r>
+          </a:p>
+          <a:p>
+            <a:r>
+              <a:rPr lang="en-US" dirty="0"/>
+              <a:t>Can often allow higher learning rates to work.</a:t>
+            </a:r>
+          </a:p>
+          <a:p>
+            <a:r>
+              <a:rPr lang="en-US" dirty="0"/>
+              <a:t>Note: we should normalize normally still. </a:t>
+            </a:r>
+          </a:p>
+          <a:p>
+            <a:endParaRPr lang="en-US" dirty="0"/>
+          </a:p>
+        </p:txBody>
+      </p:sp>
+      <p:pic>
+        <p:nvPicPr>
+          <p:cNvPr id="4" name="Picture 3">
+            <a:extLst>
+              <a:ext uri="{FF2B5EF4-FFF2-40B4-BE49-F238E27FC236}">
+                <a16:creationId xmlns:a16="http://schemas.microsoft.com/office/drawing/2014/main" id="{365C0691-8F19-F627-1CEB-290C78CF3C16}"/>
+              </a:ext>
+            </a:extLst>
+          </p:cNvPr>
+          <p:cNvPicPr>
+            <a:picLocks noChangeAspect="1"/>
+          </p:cNvPicPr>
+          <p:nvPr/>
+        </p:nvPicPr>
+        <p:blipFill>
+          <a:blip r:embed="rId3"/>
+          <a:stretch>
+            <a:fillRect/>
+          </a:stretch>
+        </p:blipFill>
+        <p:spPr>
+          <a:xfrm>
+            <a:off x="0" y="4549198"/>
+            <a:ext cx="4317357" cy="2308802"/>
+          </a:xfrm>
+          <a:prstGeom prst="rect">
+            <a:avLst/>
+          </a:prstGeom>
+        </p:spPr>
+      </p:pic>
+    </p:spTree>
+    <p:extLst>
+      <p:ext uri="{BB962C8B-B14F-4D97-AF65-F5344CB8AC3E}">
+        <p14:creationId xmlns:p14="http://schemas.microsoft.com/office/powerpoint/2010/main" val="1687437132"/>
+      </p:ext>
+    </p:extLst>
+  </p:cSld>
+  <p:clrMapOvr>
+    <a:masterClrMapping/>
+  </p:clrMapOvr>
+</p:sld>
+</file>
+
+<file path=ppt/slides/slide32.xml><?xml version="1.0" encoding="utf-8"?>
+<p:sld xmlns:a="http://schemas.openxmlformats.org/drawingml/2006/main" xmlns:r="http://schemas.openxmlformats.org/officeDocument/2006/relationships" xmlns:p="http://schemas.openxmlformats.org/presentationml/2006/main">
+  <p:cSld>
+    <p:spTree>
+      <p:nvGrpSpPr>
+        <p:cNvPr id="1" name=""/>
+        <p:cNvGrpSpPr/>
+        <p:nvPr/>
+      </p:nvGrpSpPr>
+      <p:grpSpPr>
+        <a:xfrm>
+          <a:off x="0" y="0"/>
+          <a:ext cx="0" cy="0"/>
+          <a:chOff x="0" y="0"/>
+          <a:chExt cx="0" cy="0"/>
+        </a:xfrm>
+      </p:grpSpPr>
+      <p:sp>
+        <p:nvSpPr>
+          <p:cNvPr id="2" name="Title 1">
+            <a:extLst>
+              <a:ext uri="{FF2B5EF4-FFF2-40B4-BE49-F238E27FC236}">
+                <a16:creationId xmlns:a16="http://schemas.microsoft.com/office/drawing/2014/main" id="{12EB02ED-4B2D-A4D0-9A1B-F5D886A1D4DA}"/>
+              </a:ext>
+            </a:extLst>
+          </p:cNvPr>
+          <p:cNvSpPr>
+            <a:spLocks noGrp="1"/>
+          </p:cNvSpPr>
+          <p:nvPr>
+            <p:ph type="title"/>
+          </p:nvPr>
+        </p:nvSpPr>
+        <p:spPr/>
+        <p:txBody>
+          <a:bodyPr/>
+          <a:lstStyle/>
+          <a:p>
+            <a:endParaRPr lang="en-US"/>
+          </a:p>
+        </p:txBody>
+      </p:sp>
+      <p:sp>
+        <p:nvSpPr>
+          <p:cNvPr id="3" name="Content Placeholder 2">
+            <a:extLst>
+              <a:ext uri="{FF2B5EF4-FFF2-40B4-BE49-F238E27FC236}">
+                <a16:creationId xmlns:a16="http://schemas.microsoft.com/office/drawing/2014/main" id="{79262A70-7FB5-F2DE-F3DF-7165887D447B}"/>
+              </a:ext>
+            </a:extLst>
+          </p:cNvPr>
+          <p:cNvSpPr>
+            <a:spLocks noGrp="1"/>
+          </p:cNvSpPr>
+          <p:nvPr>
+            <p:ph idx="1"/>
+          </p:nvPr>
+        </p:nvSpPr>
+        <p:spPr/>
+        <p:txBody>
+          <a:bodyPr/>
+          <a:lstStyle/>
+          <a:p>
+            <a:endParaRPr lang="en-US"/>
+          </a:p>
+        </p:txBody>
+      </p:sp>
+      <p:pic>
+        <p:nvPicPr>
+          <p:cNvPr id="4098" name="Picture 2">
+            <a:extLst>
+              <a:ext uri="{FF2B5EF4-FFF2-40B4-BE49-F238E27FC236}">
+                <a16:creationId xmlns:a16="http://schemas.microsoft.com/office/drawing/2014/main" id="{2C2DDD5C-391D-91D2-A435-8110CC33187B}"/>
+              </a:ext>
+            </a:extLst>
+          </p:cNvPr>
+          <p:cNvPicPr>
+            <a:picLocks noChangeAspect="1" noChangeArrowheads="1"/>
+          </p:cNvPicPr>
+          <p:nvPr/>
+        </p:nvPicPr>
+        <p:blipFill>
+          <a:blip r:embed="rId2">
+            <a:extLst>
+              <a:ext uri="{28A0092B-C50C-407E-A947-70E740481C1C}">
+                <a14:useLocalDpi xmlns:a14="http://schemas.microsoft.com/office/drawing/2010/main" val="0"/>
+              </a:ext>
+            </a:extLst>
+          </a:blip>
+          <a:srcRect/>
+          <a:stretch>
+            <a:fillRect/>
+          </a:stretch>
+        </p:blipFill>
+        <p:spPr bwMode="auto">
+          <a:xfrm>
+            <a:off x="0" y="1400175"/>
+            <a:ext cx="12192000" cy="4057650"/>
+          </a:xfrm>
+          <a:prstGeom prst="rect">
+            <a:avLst/>
+          </a:prstGeom>
+          <a:noFill/>
+          <a:extLst>
+            <a:ext uri="{909E8E84-426E-40DD-AFC4-6F175D3DCCD1}">
+              <a14:hiddenFill xmlns:a14="http://schemas.microsoft.com/office/drawing/2010/main">
+                <a:solidFill>
+                  <a:srgbClr val="FFFFFF"/>
+                </a:solidFill>
+              </a14:hiddenFill>
+            </a:ext>
+          </a:extLst>
+        </p:spPr>
+      </p:pic>
+    </p:spTree>
+    <p:extLst>
+      <p:ext uri="{BB962C8B-B14F-4D97-AF65-F5344CB8AC3E}">
+        <p14:creationId xmlns:p14="http://schemas.microsoft.com/office/powerpoint/2010/main" val="3011999725"/>
+      </p:ext>
+    </p:extLst>
+  </p:cSld>
+  <p:clrMapOvr>
+    <a:masterClrMapping/>
+  </p:clrMapOvr>
+</p:sld>
+</file>
+
+<file path=ppt/slides/slide33.xml><?xml version="1.0" encoding="utf-8"?>
+<p:sld xmlns:a="http://schemas.openxmlformats.org/drawingml/2006/main" xmlns:r="http://schemas.openxmlformats.org/officeDocument/2006/relationships" xmlns:p="http://schemas.openxmlformats.org/presentationml/2006/main">
+  <p:cSld>
+    <p:spTree>
+      <p:nvGrpSpPr>
+        <p:cNvPr id="1" name=""/>
+        <p:cNvGrpSpPr/>
+        <p:nvPr/>
+      </p:nvGrpSpPr>
+      <p:grpSpPr>
+        <a:xfrm>
+          <a:off x="0" y="0"/>
+          <a:ext cx="0" cy="0"/>
+          <a:chOff x="0" y="0"/>
+          <a:chExt cx="0" cy="0"/>
+        </a:xfrm>
+      </p:grpSpPr>
+      <p:sp>
+        <p:nvSpPr>
+          <p:cNvPr id="2" name="Title 1">
+            <a:extLst>
+              <a:ext uri="{FF2B5EF4-FFF2-40B4-BE49-F238E27FC236}">
+                <a16:creationId xmlns:a16="http://schemas.microsoft.com/office/drawing/2014/main" id="{8E701F95-B618-A7AB-FF6B-7AF73C21932E}"/>
+              </a:ext>
+            </a:extLst>
+          </p:cNvPr>
+          <p:cNvSpPr>
+            <a:spLocks noGrp="1"/>
+          </p:cNvSpPr>
+          <p:nvPr>
+            <p:ph type="title"/>
+          </p:nvPr>
+        </p:nvSpPr>
+        <p:spPr/>
+        <p:txBody>
+          <a:bodyPr/>
+          <a:lstStyle/>
+          <a:p>
+            <a:r>
+              <a:rPr lang="en-US" dirty="0"/>
+              <a:t>Refresher - regularization</a:t>
+            </a:r>
+          </a:p>
+        </p:txBody>
+      </p:sp>
+      <p:sp>
+        <p:nvSpPr>
+          <p:cNvPr id="3" name="Content Placeholder 2">
+            <a:extLst>
+              <a:ext uri="{FF2B5EF4-FFF2-40B4-BE49-F238E27FC236}">
+                <a16:creationId xmlns:a16="http://schemas.microsoft.com/office/drawing/2014/main" id="{2E156C3E-5CAF-F8A6-E7F0-120D8C6CAFA5}"/>
+              </a:ext>
+            </a:extLst>
+          </p:cNvPr>
+          <p:cNvSpPr>
+            <a:spLocks noGrp="1"/>
+          </p:cNvSpPr>
+          <p:nvPr>
+            <p:ph idx="1"/>
+          </p:nvPr>
+        </p:nvSpPr>
+        <p:spPr>
+          <a:xfrm>
+            <a:off x="1451579" y="1853755"/>
+            <a:ext cx="9603275" cy="2265242"/>
+          </a:xfrm>
+        </p:spPr>
+        <p:txBody>
+          <a:bodyPr/>
+          <a:lstStyle/>
+          <a:p>
+            <a:r>
+              <a:rPr lang="en-US" dirty="0"/>
+              <a:t>We frequently/typically use some regularization in our models. </a:t>
+            </a:r>
+          </a:p>
+          <a:p>
+            <a:pPr lvl="1"/>
+            <a:r>
+              <a:rPr lang="en-US" dirty="0"/>
+              <a:t>Semi-standard as neural networks are large and flexible, and this constrains overfit. </a:t>
+            </a:r>
+          </a:p>
+          <a:p>
+            <a:pPr lvl="1"/>
+            <a:r>
+              <a:rPr lang="en-US" dirty="0"/>
+              <a:t>L1/L2 – works just as in regression, can be applied in layer as a hyperparameter. </a:t>
+            </a:r>
+          </a:p>
+          <a:p>
+            <a:pPr lvl="1"/>
+            <a:r>
+              <a:rPr lang="en-US" dirty="0"/>
+              <a:t>Dropout – removes some percentage of neurons randomly each batch of </a:t>
+            </a:r>
+            <a:r>
+              <a:rPr lang="en-US" b="1" dirty="0"/>
+              <a:t>training</a:t>
+            </a:r>
+            <a:r>
+              <a:rPr lang="en-US" dirty="0"/>
+              <a:t>, forcing learning to occur on the remainder. Applied as a layer, typically round 20—40% to start. </a:t>
+            </a:r>
+          </a:p>
+        </p:txBody>
+      </p:sp>
+      <p:pic>
+        <p:nvPicPr>
+          <p:cNvPr id="12290" name="Picture 2" descr="An illustration of the dropout mechanism within a multi-layer neural... |  Download Scientific Diagram">
+            <a:extLst>
+              <a:ext uri="{FF2B5EF4-FFF2-40B4-BE49-F238E27FC236}">
+                <a16:creationId xmlns:a16="http://schemas.microsoft.com/office/drawing/2014/main" id="{2AB7688B-0AD0-F5E0-0253-193C85677D34}"/>
+              </a:ext>
+            </a:extLst>
+          </p:cNvPr>
+          <p:cNvPicPr>
+            <a:picLocks noChangeAspect="1" noChangeArrowheads="1"/>
+          </p:cNvPicPr>
+          <p:nvPr/>
+        </p:nvPicPr>
+        <p:blipFill>
+          <a:blip r:embed="rId2">
+            <a:extLst>
+              <a:ext uri="{28A0092B-C50C-407E-A947-70E740481C1C}">
+                <a14:useLocalDpi xmlns:a14="http://schemas.microsoft.com/office/drawing/2010/main" val="0"/>
+              </a:ext>
+            </a:extLst>
+          </a:blip>
+          <a:srcRect/>
+          <a:stretch>
+            <a:fillRect/>
+          </a:stretch>
+        </p:blipFill>
+        <p:spPr bwMode="auto">
+          <a:xfrm>
+            <a:off x="1621461" y="3838427"/>
+            <a:ext cx="8949078" cy="2905818"/>
+          </a:xfrm>
+          <a:prstGeom prst="rect">
+            <a:avLst/>
+          </a:prstGeom>
+          <a:noFill/>
+          <a:extLst>
+            <a:ext uri="{909E8E84-426E-40DD-AFC4-6F175D3DCCD1}">
+              <a14:hiddenFill xmlns:a14="http://schemas.microsoft.com/office/drawing/2010/main">
+                <a:solidFill>
+                  <a:srgbClr val="FFFFFF"/>
+                </a:solidFill>
+              </a14:hiddenFill>
+            </a:ext>
+          </a:extLst>
+        </p:spPr>
+      </p:pic>
+    </p:spTree>
+    <p:extLst>
+      <p:ext uri="{BB962C8B-B14F-4D97-AF65-F5344CB8AC3E}">
+        <p14:creationId xmlns:p14="http://schemas.microsoft.com/office/powerpoint/2010/main" val="3865647208"/>
+      </p:ext>
+    </p:extLst>
+  </p:cSld>
+  <p:clrMapOvr>
+    <a:masterClrMapping/>
+  </p:clrMapOvr>
+</p:sld>
+</file>
+
+<file path=ppt/slides/slide34.xml><?xml version="1.0" encoding="utf-8"?>
+<p:sld xmlns:a="http://schemas.openxmlformats.org/drawingml/2006/main" xmlns:r="http://schemas.openxmlformats.org/officeDocument/2006/relationships" xmlns:p="http://schemas.openxmlformats.org/presentationml/2006/main">
+  <p:cSld>
+    <p:spTree>
+      <p:nvGrpSpPr>
+        <p:cNvPr id="1" name=""/>
+        <p:cNvGrpSpPr/>
+        <p:nvPr/>
+      </p:nvGrpSpPr>
+      <p:grpSpPr>
+        <a:xfrm>
+          <a:off x="0" y="0"/>
+          <a:ext cx="0" cy="0"/>
+          <a:chOff x="0" y="0"/>
+          <a:chExt cx="0" cy="0"/>
+        </a:xfrm>
+      </p:grpSpPr>
+      <p:sp>
+        <p:nvSpPr>
+          <p:cNvPr id="2" name="Title 1">
+            <a:extLst>
+              <a:ext uri="{FF2B5EF4-FFF2-40B4-BE49-F238E27FC236}">
+                <a16:creationId xmlns:a16="http://schemas.microsoft.com/office/drawing/2014/main" id="{8AB3D8A8-1279-C44F-AB18-28BCD74E016C}"/>
+              </a:ext>
+            </a:extLst>
+          </p:cNvPr>
+          <p:cNvSpPr>
+            <a:spLocks noGrp="1"/>
+          </p:cNvSpPr>
+          <p:nvPr>
+            <p:ph type="title"/>
+          </p:nvPr>
+        </p:nvSpPr>
+        <p:spPr/>
+        <p:txBody>
+          <a:bodyPr/>
+          <a:lstStyle/>
+          <a:p>
+            <a:r>
+              <a:rPr lang="en-US" dirty="0"/>
+              <a:t>Initialization </a:t>
+            </a:r>
+          </a:p>
+        </p:txBody>
+      </p:sp>
+      <p:sp>
+        <p:nvSpPr>
+          <p:cNvPr id="3" name="Content Placeholder 2">
+            <a:extLst>
+              <a:ext uri="{FF2B5EF4-FFF2-40B4-BE49-F238E27FC236}">
+                <a16:creationId xmlns:a16="http://schemas.microsoft.com/office/drawing/2014/main" id="{E6932690-B733-C245-A962-ECCC4BCA3B54}"/>
+              </a:ext>
+            </a:extLst>
+          </p:cNvPr>
+          <p:cNvSpPr>
+            <a:spLocks noGrp="1"/>
+          </p:cNvSpPr>
+          <p:nvPr>
+            <p:ph idx="1"/>
+          </p:nvPr>
+        </p:nvSpPr>
+        <p:spPr>
+          <a:xfrm>
+            <a:off x="1451579" y="1853754"/>
+            <a:ext cx="9603275" cy="4199727"/>
+          </a:xfrm>
+        </p:spPr>
+        <p:txBody>
+          <a:bodyPr>
+            <a:normAutofit lnSpcReduction="10000"/>
+          </a:bodyPr>
+          <a:lstStyle/>
+          <a:p>
+            <a:r>
+              <a:rPr lang="en-US" dirty="0"/>
+              <a:t>Initialization controls how the weight and bias values start. </a:t>
+            </a:r>
+          </a:p>
+          <a:p>
+            <a:r>
+              <a:rPr lang="en-US" dirty="0"/>
+              <a:t>Can be controlled via a parameter for each layer:</a:t>
+            </a:r>
+          </a:p>
+          <a:p>
+            <a:pPr lvl="1"/>
+            <a:r>
+              <a:rPr lang="en-US" dirty="0"/>
+              <a:t>Weight initialization is by default is “</a:t>
+            </a:r>
+            <a:r>
+              <a:rPr lang="en-US" dirty="0" err="1"/>
+              <a:t>glorot_uniform</a:t>
+            </a:r>
+            <a:r>
+              <a:rPr lang="en-US" dirty="0"/>
+              <a:t>” – a variety of random. </a:t>
+            </a:r>
+          </a:p>
+          <a:p>
+            <a:pPr lvl="1"/>
+            <a:r>
+              <a:rPr lang="en-US" dirty="0"/>
+              <a:t>Bias initialization defaults to 0. </a:t>
+            </a:r>
+          </a:p>
+          <a:p>
+            <a:pPr lvl="1"/>
+            <a:r>
+              <a:rPr lang="en-US" dirty="0"/>
+              <a:t>We can preset the output layer with the log of the expectation (for logit). </a:t>
+            </a:r>
+          </a:p>
+          <a:p>
+            <a:r>
+              <a:rPr lang="en-US" dirty="0"/>
+              <a:t>This can help the model train – both in speed and potential for convergence. </a:t>
+            </a:r>
+          </a:p>
+          <a:p>
+            <a:r>
+              <a:rPr lang="en-US" dirty="0"/>
+              <a:t>Imbalanced data – the data has a “bias” to start with. </a:t>
+            </a:r>
+          </a:p>
+          <a:p>
+            <a:pPr lvl="1"/>
+            <a:r>
+              <a:rPr lang="en-US" dirty="0"/>
+              <a:t>Set bias on output layer to the bias in the data. </a:t>
+            </a:r>
+          </a:p>
+          <a:p>
+            <a:pPr lvl="1"/>
+            <a:r>
+              <a:rPr lang="en-US" dirty="0"/>
+              <a:t>Network doesn’t need to learn the massive shift in bias. </a:t>
+            </a:r>
+          </a:p>
+          <a:p>
+            <a:pPr lvl="1"/>
+            <a:r>
+              <a:rPr lang="en-US" dirty="0"/>
+              <a:t>Faster convergence and more accuracy. </a:t>
+            </a:r>
+          </a:p>
+          <a:p>
+            <a:endParaRPr lang="en-US" dirty="0"/>
+          </a:p>
+        </p:txBody>
+      </p:sp>
+    </p:spTree>
+    <p:extLst>
+      <p:ext uri="{BB962C8B-B14F-4D97-AF65-F5344CB8AC3E}">
+        <p14:creationId xmlns:p14="http://schemas.microsoft.com/office/powerpoint/2010/main" val="2996444863"/>
+      </p:ext>
+    </p:extLst>
+  </p:cSld>
+  <p:clrMapOvr>
+    <a:masterClrMapping/>
+  </p:clrMapOvr>
+</p:sld>
+</file>
+
+<file path=ppt/slides/slide35.xml><?xml version="1.0" encoding="utf-8"?>
+<p:sld xmlns:a="http://schemas.openxmlformats.org/drawingml/2006/main" xmlns:r="http://schemas.openxmlformats.org/officeDocument/2006/relationships" xmlns:p="http://schemas.openxmlformats.org/presentationml/2006/main">
+  <p:cSld>
+    <p:spTree>
+      <p:nvGrpSpPr>
+        <p:cNvPr id="1" name=""/>
+        <p:cNvGrpSpPr/>
+        <p:nvPr/>
+      </p:nvGrpSpPr>
+      <p:grpSpPr>
+        <a:xfrm>
+          <a:off x="0" y="0"/>
+          <a:ext cx="0" cy="0"/>
+          <a:chOff x="0" y="0"/>
+          <a:chExt cx="0" cy="0"/>
+        </a:xfrm>
+      </p:grpSpPr>
+      <p:sp>
+        <p:nvSpPr>
+          <p:cNvPr id="2" name="Title 1">
+            <a:extLst>
+              <a:ext uri="{FF2B5EF4-FFF2-40B4-BE49-F238E27FC236}">
+                <a16:creationId xmlns:a16="http://schemas.microsoft.com/office/drawing/2014/main" id="{998811FD-FB04-14C3-51B0-20806479A3B8}"/>
+              </a:ext>
+            </a:extLst>
+          </p:cNvPr>
+          <p:cNvSpPr>
+            <a:spLocks noGrp="1"/>
+          </p:cNvSpPr>
+          <p:nvPr>
+            <p:ph type="title"/>
+          </p:nvPr>
+        </p:nvSpPr>
+        <p:spPr/>
+        <p:txBody>
+          <a:bodyPr/>
+          <a:lstStyle/>
+          <a:p>
+            <a:r>
+              <a:rPr lang="en-US" dirty="0"/>
+              <a:t>Neural Networks are Flexible</a:t>
+            </a:r>
+          </a:p>
+        </p:txBody>
+      </p:sp>
+      <p:sp>
+        <p:nvSpPr>
+          <p:cNvPr id="3" name="Content Placeholder 2">
+            <a:extLst>
+              <a:ext uri="{FF2B5EF4-FFF2-40B4-BE49-F238E27FC236}">
+                <a16:creationId xmlns:a16="http://schemas.microsoft.com/office/drawing/2014/main" id="{F27F93CB-38CB-BCDC-EB9C-1D1A84E32F49}"/>
+              </a:ext>
+            </a:extLst>
+          </p:cNvPr>
+          <p:cNvSpPr>
+            <a:spLocks noGrp="1"/>
+          </p:cNvSpPr>
+          <p:nvPr>
+            <p:ph idx="1"/>
+          </p:nvPr>
+        </p:nvSpPr>
+        <p:spPr>
+          <a:xfrm>
+            <a:off x="1451579" y="1853754"/>
+            <a:ext cx="9603275" cy="4199727"/>
+          </a:xfrm>
+        </p:spPr>
+        <p:txBody>
+          <a:bodyPr/>
+          <a:lstStyle/>
+          <a:p>
+            <a:r>
+              <a:rPr lang="en-US" dirty="0"/>
+              <a:t>This isn’t near all of the things that we can change in a neural network. </a:t>
+            </a:r>
+          </a:p>
+          <a:p>
+            <a:r>
+              <a:rPr lang="en-US" dirty="0"/>
+              <a:t>The flexibility in their learning as they grow means that a wide range of models that are ‘good enough’ will converge on a good solution. </a:t>
+            </a:r>
+          </a:p>
+          <a:p>
+            <a:pPr lvl="1"/>
+            <a:r>
+              <a:rPr lang="en-US" dirty="0"/>
+              <a:t>E.g. the image competition has models with widely different structures fighting for fractions of a percentage of accuracy in a task. </a:t>
+            </a:r>
+          </a:p>
+          <a:p>
+            <a:r>
+              <a:rPr lang="en-US" dirty="0"/>
+              <a:t>Mirror something that is known to work, unless experimenting (which is good). </a:t>
+            </a:r>
+          </a:p>
+          <a:p>
+            <a:r>
+              <a:rPr lang="en-US" dirty="0"/>
+              <a:t>Make reasonable choices, add some excess, regularization, and early stopping, let train. </a:t>
+            </a:r>
+          </a:p>
+          <a:p>
+            <a:pPr lvl="1"/>
+            <a:r>
+              <a:rPr lang="en-US" dirty="0"/>
+              <a:t>Adjust from here based on what you see. </a:t>
+            </a:r>
+          </a:p>
+          <a:p>
+            <a:r>
+              <a:rPr lang="en-US" dirty="0"/>
+              <a:t>Finding the perfect configuration as we did with a grid becomes time impractical quickly. </a:t>
+            </a:r>
+          </a:p>
+        </p:txBody>
+      </p:sp>
+    </p:spTree>
+    <p:extLst>
+      <p:ext uri="{BB962C8B-B14F-4D97-AF65-F5344CB8AC3E}">
+        <p14:creationId xmlns:p14="http://schemas.microsoft.com/office/powerpoint/2010/main" val="2910667997"/>
+      </p:ext>
+    </p:extLst>
+  </p:cSld>
+  <p:clrMapOvr>
+    <a:masterClrMapping/>
+  </p:clrMapOvr>
+</p:sld>
+</file>
+
+<file path=ppt/slides/slide36.xml><?xml version="1.0" encoding="utf-8"?>
+<p:sld xmlns:a="http://schemas.openxmlformats.org/drawingml/2006/main" xmlns:r="http://schemas.openxmlformats.org/officeDocument/2006/relationships" xmlns:p="http://schemas.openxmlformats.org/presentationml/2006/main" show="0">
+  <p:cSld>
+    <p:spTree>
+      <p:nvGrpSpPr>
+        <p:cNvPr id="1" name=""/>
+        <p:cNvGrpSpPr/>
+        <p:nvPr/>
+      </p:nvGrpSpPr>
+      <p:grpSpPr>
+        <a:xfrm>
+          <a:off x="0" y="0"/>
+          <a:ext cx="0" cy="0"/>
+          <a:chOff x="0" y="0"/>
+          <a:chExt cx="0" cy="0"/>
+        </a:xfrm>
+      </p:grpSpPr>
+      <p:sp>
+        <p:nvSpPr>
+          <p:cNvPr id="2" name="Title 1">
+            <a:extLst>
+              <a:ext uri="{FF2B5EF4-FFF2-40B4-BE49-F238E27FC236}">
+                <a16:creationId xmlns:a16="http://schemas.microsoft.com/office/drawing/2014/main" id="{EAF056FD-E697-5353-97FE-84FF67ABB289}"/>
+              </a:ext>
+            </a:extLst>
+          </p:cNvPr>
+          <p:cNvSpPr>
+            <a:spLocks noGrp="1"/>
+          </p:cNvSpPr>
+          <p:nvPr>
+            <p:ph type="title"/>
+          </p:nvPr>
+        </p:nvSpPr>
+        <p:spPr/>
+        <p:txBody>
+          <a:bodyPr/>
+          <a:lstStyle/>
+          <a:p>
+            <a:r>
+              <a:rPr lang="en-US" dirty="0"/>
+              <a:t>Other Tuning - Optimization</a:t>
+            </a:r>
+          </a:p>
+        </p:txBody>
+      </p:sp>
+      <p:sp>
+        <p:nvSpPr>
+          <p:cNvPr id="3" name="Content Placeholder 2">
+            <a:extLst>
+              <a:ext uri="{FF2B5EF4-FFF2-40B4-BE49-F238E27FC236}">
+                <a16:creationId xmlns:a16="http://schemas.microsoft.com/office/drawing/2014/main" id="{F044C5EC-E837-8A77-86C7-0C127E9A7BD8}"/>
+              </a:ext>
+            </a:extLst>
+          </p:cNvPr>
+          <p:cNvSpPr>
+            <a:spLocks noGrp="1"/>
+          </p:cNvSpPr>
+          <p:nvPr>
+            <p:ph idx="1"/>
+          </p:nvPr>
+        </p:nvSpPr>
+        <p:spPr>
+          <a:xfrm>
+            <a:off x="1451579" y="1853754"/>
+            <a:ext cx="9603275" cy="4199727"/>
+          </a:xfrm>
+        </p:spPr>
+        <p:txBody>
+          <a:bodyPr/>
+          <a:lstStyle/>
+          <a:p>
+            <a:r>
+              <a:rPr lang="en-US" dirty="0"/>
+              <a:t>There are a huge number of things that can be changed to tune a neural network model. </a:t>
+            </a:r>
+          </a:p>
+          <a:p>
+            <a:r>
+              <a:rPr lang="en-US" dirty="0"/>
+              <a:t>We are focusing mainly on the ‘structure’ type of things. </a:t>
+            </a:r>
+          </a:p>
+          <a:p>
+            <a:pPr lvl="1"/>
+            <a:r>
+              <a:rPr lang="en-US" dirty="0"/>
+              <a:t>Network size, layers, type, hyperparameters, regularizing (and similar) layers like normalization.</a:t>
+            </a:r>
+          </a:p>
+          <a:p>
+            <a:r>
+              <a:rPr lang="en-US" dirty="0"/>
+              <a:t>We are not really focusing on the optimization part - loss/gradient descent specific things. </a:t>
+            </a:r>
+          </a:p>
+          <a:p>
+            <a:pPr lvl="1"/>
+            <a:r>
+              <a:rPr lang="en-US" dirty="0"/>
+              <a:t>Learning rates, momentum, optimizers. </a:t>
+            </a:r>
+          </a:p>
+          <a:p>
+            <a:pPr lvl="1"/>
+            <a:r>
+              <a:rPr lang="en-US" dirty="0"/>
+              <a:t>This matters, but is more theoretical in theory, and scenario dependent in practice. </a:t>
+            </a:r>
+          </a:p>
+          <a:p>
+            <a:pPr lvl="1"/>
+            <a:r>
+              <a:rPr lang="en-US" dirty="0"/>
+              <a:t>Optimization is critical as problems get larger – converging quickly, or at all, can be hard. </a:t>
+            </a:r>
+          </a:p>
+          <a:p>
+            <a:r>
+              <a:rPr lang="en-US" dirty="0"/>
+              <a:t>For our usage, we can mainly try different learning rates, if needed. </a:t>
+            </a:r>
+          </a:p>
+        </p:txBody>
+      </p:sp>
+    </p:spTree>
+    <p:extLst>
+      <p:ext uri="{BB962C8B-B14F-4D97-AF65-F5344CB8AC3E}">
+        <p14:creationId xmlns:p14="http://schemas.microsoft.com/office/powerpoint/2010/main" val="1149088017"/>
+      </p:ext>
+    </p:extLst>
+  </p:cSld>
+  <p:clrMapOvr>
+    <a:masterClrMapping/>
+  </p:clrMapOvr>
+</p:sld>
+</file>
+
+<file path=ppt/slides/slide37.xml><?xml version="1.0" encoding="utf-8"?>
+<p:sld xmlns:a="http://schemas.openxmlformats.org/drawingml/2006/main" xmlns:r="http://schemas.openxmlformats.org/officeDocument/2006/relationships" xmlns:p="http://schemas.openxmlformats.org/presentationml/2006/main">
+  <p:cSld>
+    <p:spTree>
+      <p:nvGrpSpPr>
+        <p:cNvPr id="1" name=""/>
+        <p:cNvGrpSpPr/>
+        <p:nvPr/>
+      </p:nvGrpSpPr>
+      <p:grpSpPr>
+        <a:xfrm>
+          <a:off x="0" y="0"/>
+          <a:ext cx="0" cy="0"/>
+          <a:chOff x="0" y="0"/>
+          <a:chExt cx="0" cy="0"/>
+        </a:xfrm>
+      </p:grpSpPr>
+      <p:sp>
+        <p:nvSpPr>
+          <p:cNvPr id="2" name="Title 1">
+            <a:extLst>
+              <a:ext uri="{FF2B5EF4-FFF2-40B4-BE49-F238E27FC236}">
+                <a16:creationId xmlns:a16="http://schemas.microsoft.com/office/drawing/2014/main" id="{2D76F3B6-86DB-FFF0-6350-C1AA19E15476}"/>
+              </a:ext>
+            </a:extLst>
+          </p:cNvPr>
+          <p:cNvSpPr>
+            <a:spLocks noGrp="1"/>
+          </p:cNvSpPr>
+          <p:nvPr>
+            <p:ph type="title"/>
+          </p:nvPr>
+        </p:nvSpPr>
+        <p:spPr/>
+        <p:txBody>
+          <a:bodyPr/>
+          <a:lstStyle/>
+          <a:p>
+            <a:r>
+              <a:rPr lang="en-US" dirty="0"/>
+              <a:t>Tuning From A Loss Plot</a:t>
+            </a:r>
+          </a:p>
+        </p:txBody>
+      </p:sp>
+      <p:sp>
+        <p:nvSpPr>
+          <p:cNvPr id="3" name="Content Placeholder 2">
+            <a:extLst>
+              <a:ext uri="{FF2B5EF4-FFF2-40B4-BE49-F238E27FC236}">
+                <a16:creationId xmlns:a16="http://schemas.microsoft.com/office/drawing/2014/main" id="{915E008A-9A08-A25F-5145-ECD1F6B212D2}"/>
+              </a:ext>
+            </a:extLst>
+          </p:cNvPr>
+          <p:cNvSpPr>
+            <a:spLocks noGrp="1"/>
+          </p:cNvSpPr>
+          <p:nvPr>
+            <p:ph idx="1"/>
+          </p:nvPr>
+        </p:nvSpPr>
+        <p:spPr>
+          <a:xfrm>
+            <a:off x="1451579" y="1853754"/>
+            <a:ext cx="9603275" cy="4199727"/>
+          </a:xfrm>
+        </p:spPr>
+        <p:txBody>
+          <a:bodyPr/>
+          <a:lstStyle/>
+          <a:p>
+            <a:r>
+              <a:rPr lang="en-US" dirty="0"/>
+              <a:t>The loss plot is our main, but not only, tool to help tune a model. </a:t>
+            </a:r>
+          </a:p>
+          <a:p>
+            <a:r>
+              <a:rPr lang="en-US" dirty="0"/>
+              <a:t>None of these things are definitive, but there are things that happen often that we can look at first for a possible solution. </a:t>
+            </a:r>
+          </a:p>
+          <a:p>
+            <a:r>
+              <a:rPr lang="en-US" dirty="0"/>
+              <a:t>In neural networks, we must weigh against computation time – defaults are usually fast.</a:t>
+            </a:r>
+          </a:p>
+          <a:p>
+            <a:r>
+              <a:rPr lang="en-US" dirty="0"/>
+              <a:t>Some general things:</a:t>
+            </a:r>
+          </a:p>
+          <a:p>
+            <a:pPr lvl="1"/>
+            <a:r>
+              <a:rPr lang="en-US" dirty="0"/>
+              <a:t>Make sure that data is scaled. </a:t>
+            </a:r>
+          </a:p>
+          <a:p>
+            <a:pPr lvl="1"/>
+            <a:r>
+              <a:rPr lang="en-US" dirty="0"/>
+              <a:t>More complex relationships perform better with more layers. </a:t>
+            </a:r>
+          </a:p>
+          <a:p>
+            <a:pPr lvl="1"/>
+            <a:r>
+              <a:rPr lang="en-US" dirty="0"/>
+              <a:t>The more data you have, the larger a model you’ll be able to train well. </a:t>
+            </a:r>
+          </a:p>
+          <a:p>
+            <a:pPr lvl="1"/>
+            <a:r>
+              <a:rPr lang="en-US" dirty="0"/>
+              <a:t>Unless there’s a time constraint, let things go for lots of epochs and use early stopping. </a:t>
+            </a:r>
+          </a:p>
+        </p:txBody>
+      </p:sp>
+    </p:spTree>
+    <p:extLst>
+      <p:ext uri="{BB962C8B-B14F-4D97-AF65-F5344CB8AC3E}">
+        <p14:creationId xmlns:p14="http://schemas.microsoft.com/office/powerpoint/2010/main" val="545948356"/>
+      </p:ext>
+    </p:extLst>
+  </p:cSld>
+  <p:clrMapOvr>
+    <a:masterClrMapping/>
+  </p:clrMapOvr>
+</p:sld>
+</file>
+
+<file path=ppt/slides/slide38.xml><?xml version="1.0" encoding="utf-8"?>
+<p:sld xmlns:a="http://schemas.openxmlformats.org/drawingml/2006/main" xmlns:r="http://schemas.openxmlformats.org/officeDocument/2006/relationships" xmlns:p="http://schemas.openxmlformats.org/presentationml/2006/main">
+  <p:cSld>
+    <p:bg>
+      <p:bgPr>
+        <a:gradFill rotWithShape="1">
+          <a:gsLst>
+            <a:gs pos="0">
+              <a:schemeClr val="bg2">
+                <a:tint val="94000"/>
+                <a:satMod val="80000"/>
+                <a:lumMod val="106000"/>
+              </a:schemeClr>
+            </a:gs>
+            <a:gs pos="100000">
+              <a:schemeClr val="bg2">
+                <a:shade val="80000"/>
+              </a:schemeClr>
+            </a:gs>
+          </a:gsLst>
+          <a:path path="circle">
+            <a:fillToRect l="43000" r="43000" b="100000"/>
+          </a:path>
+        </a:gradFill>
+        <a:effectLst/>
+      </p:bgPr>
+    </p:bg>
+    <p:spTree>
+      <p:nvGrpSpPr>
+        <p:cNvPr id="1" name=""/>
+        <p:cNvGrpSpPr/>
+        <p:nvPr/>
+      </p:nvGrpSpPr>
+      <p:grpSpPr>
+        <a:xfrm>
+          <a:off x="0" y="0"/>
+          <a:ext cx="0" cy="0"/>
+          <a:chOff x="0" y="0"/>
+          <a:chExt cx="0" cy="0"/>
+        </a:xfrm>
+      </p:grpSpPr>
+      <p:sp>
+        <p:nvSpPr>
+          <p:cNvPr id="2" name="Title 1">
+            <a:extLst>
+              <a:ext uri="{FF2B5EF4-FFF2-40B4-BE49-F238E27FC236}">
                 <a16:creationId xmlns:a16="http://schemas.microsoft.com/office/drawing/2014/main" id="{3603C63F-9FB5-15B8-6A4B-1E81EE54DCA1}"/>
               </a:ext>
             </a:extLst>
@@ -8923,7 +9121,7 @@
 </p:sld>
 </file>
 
-<file path=ppt/slides/slide37.xml><?xml version="1.0" encoding="utf-8"?>
+<file path=ppt/slides/slide39.xml><?xml version="1.0" encoding="utf-8"?>
 <p:sld xmlns:a="http://schemas.openxmlformats.org/drawingml/2006/main" xmlns:r="http://schemas.openxmlformats.org/officeDocument/2006/relationships" xmlns:p="http://schemas.openxmlformats.org/presentationml/2006/main">
   <p:cSld>
     <p:spTree>
@@ -9182,7 +9380,153 @@
 </p:sld>
 </file>
 
-<file path=ppt/slides/slide38.xml><?xml version="1.0" encoding="utf-8"?>
+<file path=ppt/slides/slide4.xml><?xml version="1.0" encoding="utf-8"?>
+<p:sld xmlns:a="http://schemas.openxmlformats.org/drawingml/2006/main" xmlns:r="http://schemas.openxmlformats.org/officeDocument/2006/relationships" xmlns:p="http://schemas.openxmlformats.org/presentationml/2006/main" show="0">
+  <p:cSld>
+    <p:spTree>
+      <p:nvGrpSpPr>
+        <p:cNvPr id="1" name=""/>
+        <p:cNvGrpSpPr/>
+        <p:nvPr/>
+      </p:nvGrpSpPr>
+      <p:grpSpPr>
+        <a:xfrm>
+          <a:off x="0" y="0"/>
+          <a:ext cx="0" cy="0"/>
+          <a:chOff x="0" y="0"/>
+          <a:chExt cx="0" cy="0"/>
+        </a:xfrm>
+      </p:grpSpPr>
+      <p:sp>
+        <p:nvSpPr>
+          <p:cNvPr id="2" name="Title 1">
+            <a:extLst>
+              <a:ext uri="{FF2B5EF4-FFF2-40B4-BE49-F238E27FC236}">
+                <a16:creationId xmlns:a16="http://schemas.microsoft.com/office/drawing/2014/main" id="{22D1ADD2-D653-17DD-BCB3-0E44EAE7BF2D}"/>
+              </a:ext>
+            </a:extLst>
+          </p:cNvPr>
+          <p:cNvSpPr>
+            <a:spLocks noGrp="1"/>
+          </p:cNvSpPr>
+          <p:nvPr>
+            <p:ph type="title"/>
+          </p:nvPr>
+        </p:nvSpPr>
+        <p:spPr/>
+        <p:txBody>
+          <a:bodyPr/>
+          <a:lstStyle/>
+          <a:p>
+            <a:r>
+              <a:rPr lang="en-US" dirty="0"/>
+              <a:t>Cluster Assignment - Results</a:t>
+            </a:r>
+          </a:p>
+        </p:txBody>
+      </p:sp>
+      <p:sp>
+        <p:nvSpPr>
+          <p:cNvPr id="3" name="Content Placeholder 2">
+            <a:extLst>
+              <a:ext uri="{FF2B5EF4-FFF2-40B4-BE49-F238E27FC236}">
+                <a16:creationId xmlns:a16="http://schemas.microsoft.com/office/drawing/2014/main" id="{1FA8B9B4-BDA8-12EB-F5CF-5A987E111D33}"/>
+              </a:ext>
+            </a:extLst>
+          </p:cNvPr>
+          <p:cNvSpPr>
+            <a:spLocks noGrp="1"/>
+          </p:cNvSpPr>
+          <p:nvPr>
+            <p:ph idx="1"/>
+          </p:nvPr>
+        </p:nvSpPr>
+        <p:spPr>
+          <a:xfrm>
+            <a:off x="1451579" y="1853754"/>
+            <a:ext cx="9603275" cy="4199727"/>
+          </a:xfrm>
+        </p:spPr>
+        <p:txBody>
+          <a:bodyPr/>
+          <a:lstStyle/>
+          <a:p>
+            <a:r>
+              <a:rPr lang="en-US" dirty="0"/>
+              <a:t>The basic steps needed are:</a:t>
+            </a:r>
+          </a:p>
+          <a:p>
+            <a:pPr lvl="1"/>
+            <a:r>
+              <a:rPr lang="en-US" dirty="0"/>
+              <a:t>Cluster the original data to break the numbers into similar groups. (k-means, other…)</a:t>
+            </a:r>
+          </a:p>
+          <a:p>
+            <a:pPr lvl="1"/>
+            <a:r>
+              <a:rPr lang="en-US" dirty="0"/>
+              <a:t>Manually add a label – each group is similar, but we don’t know what it is a group of. </a:t>
+            </a:r>
+          </a:p>
+          <a:p>
+            <a:pPr lvl="1"/>
+            <a:r>
+              <a:rPr lang="en-US" dirty="0"/>
+              <a:t>Now you have labeled groups of digit images. </a:t>
+            </a:r>
+          </a:p>
+          <a:p>
+            <a:pPr lvl="1"/>
+            <a:r>
+              <a:rPr lang="en-US" dirty="0"/>
+              <a:t>Train 10 (or more) GMMs, one that ‘knows’ each number from the data used to train it. </a:t>
+            </a:r>
+          </a:p>
+          <a:p>
+            <a:pPr lvl="1"/>
+            <a:r>
+              <a:rPr lang="en-US" dirty="0"/>
+              <a:t>When asked for a printout, ask the right GMMs for a digit each, assemble. </a:t>
+            </a:r>
+          </a:p>
+          <a:p>
+            <a:r>
+              <a:rPr lang="en-US" dirty="0"/>
+              <a:t>Overall, the images tend to be OK at best, some improvements:</a:t>
+            </a:r>
+          </a:p>
+          <a:p>
+            <a:pPr lvl="1"/>
+            <a:r>
+              <a:rPr lang="en-US" dirty="0"/>
+              <a:t>Number of clusters can be &gt;10, to capture different digit variations. GMMs can as well. </a:t>
+            </a:r>
+          </a:p>
+          <a:p>
+            <a:pPr lvl="1"/>
+            <a:r>
+              <a:rPr lang="en-US" dirty="0"/>
+              <a:t>Some cleaning/processing (PCA, feature selection, etc..) may help, requires much tuning. </a:t>
+            </a:r>
+          </a:p>
+        </p:txBody>
+      </p:sp>
+    </p:spTree>
+    <p:extLst>
+      <p:ext uri="{BB962C8B-B14F-4D97-AF65-F5344CB8AC3E}">
+        <p14:creationId xmlns:p14="http://schemas.microsoft.com/office/powerpoint/2010/main" val="136210750"/>
+      </p:ext>
+    </p:extLst>
+  </p:cSld>
+  <p:clrMapOvr>
+    <a:masterClrMapping/>
+  </p:clrMapOvr>
+</p:sld>
+</file>
+
+<file path=ppt/slides/slide40.xml><?xml version="1.0" encoding="utf-8"?>
 <p:sld xmlns:a="http://schemas.openxmlformats.org/drawingml/2006/main" xmlns:r="http://schemas.openxmlformats.org/officeDocument/2006/relationships" xmlns:p="http://schemas.openxmlformats.org/presentationml/2006/main">
   <p:cSld>
     <p:spTree>
@@ -9426,7 +9770,7 @@
 </p:sld>
 </file>
 
-<file path=ppt/slides/slide39.xml><?xml version="1.0" encoding="utf-8"?>
+<file path=ppt/slides/slide41.xml><?xml version="1.0" encoding="utf-8"?>
 <p:sld xmlns:a="http://schemas.openxmlformats.org/drawingml/2006/main" xmlns:r="http://schemas.openxmlformats.org/officeDocument/2006/relationships" xmlns:p="http://schemas.openxmlformats.org/presentationml/2006/main">
   <p:cSld>
     <p:spTree>
@@ -9587,153 +9931,7 @@
 </p:sld>
 </file>
 
-<file path=ppt/slides/slide4.xml><?xml version="1.0" encoding="utf-8"?>
-<p:sld xmlns:a="http://schemas.openxmlformats.org/drawingml/2006/main" xmlns:r="http://schemas.openxmlformats.org/officeDocument/2006/relationships" xmlns:p="http://schemas.openxmlformats.org/presentationml/2006/main" show="0">
-  <p:cSld>
-    <p:spTree>
-      <p:nvGrpSpPr>
-        <p:cNvPr id="1" name=""/>
-        <p:cNvGrpSpPr/>
-        <p:nvPr/>
-      </p:nvGrpSpPr>
-      <p:grpSpPr>
-        <a:xfrm>
-          <a:off x="0" y="0"/>
-          <a:ext cx="0" cy="0"/>
-          <a:chOff x="0" y="0"/>
-          <a:chExt cx="0" cy="0"/>
-        </a:xfrm>
-      </p:grpSpPr>
-      <p:sp>
-        <p:nvSpPr>
-          <p:cNvPr id="2" name="Title 1">
-            <a:extLst>
-              <a:ext uri="{FF2B5EF4-FFF2-40B4-BE49-F238E27FC236}">
-                <a16:creationId xmlns:a16="http://schemas.microsoft.com/office/drawing/2014/main" id="{22D1ADD2-D653-17DD-BCB3-0E44EAE7BF2D}"/>
-              </a:ext>
-            </a:extLst>
-          </p:cNvPr>
-          <p:cNvSpPr>
-            <a:spLocks noGrp="1"/>
-          </p:cNvSpPr>
-          <p:nvPr>
-            <p:ph type="title"/>
-          </p:nvPr>
-        </p:nvSpPr>
-        <p:spPr/>
-        <p:txBody>
-          <a:bodyPr/>
-          <a:lstStyle/>
-          <a:p>
-            <a:r>
-              <a:rPr lang="en-US" dirty="0"/>
-              <a:t>Cluster Assignment - Results</a:t>
-            </a:r>
-          </a:p>
-        </p:txBody>
-      </p:sp>
-      <p:sp>
-        <p:nvSpPr>
-          <p:cNvPr id="3" name="Content Placeholder 2">
-            <a:extLst>
-              <a:ext uri="{FF2B5EF4-FFF2-40B4-BE49-F238E27FC236}">
-                <a16:creationId xmlns:a16="http://schemas.microsoft.com/office/drawing/2014/main" id="{1FA8B9B4-BDA8-12EB-F5CF-5A987E111D33}"/>
-              </a:ext>
-            </a:extLst>
-          </p:cNvPr>
-          <p:cNvSpPr>
-            <a:spLocks noGrp="1"/>
-          </p:cNvSpPr>
-          <p:nvPr>
-            <p:ph idx="1"/>
-          </p:nvPr>
-        </p:nvSpPr>
-        <p:spPr>
-          <a:xfrm>
-            <a:off x="1451579" y="1853754"/>
-            <a:ext cx="9603275" cy="4199727"/>
-          </a:xfrm>
-        </p:spPr>
-        <p:txBody>
-          <a:bodyPr/>
-          <a:lstStyle/>
-          <a:p>
-            <a:r>
-              <a:rPr lang="en-US" dirty="0"/>
-              <a:t>The basic steps needed are:</a:t>
-            </a:r>
-          </a:p>
-          <a:p>
-            <a:pPr lvl="1"/>
-            <a:r>
-              <a:rPr lang="en-US" dirty="0"/>
-              <a:t>Cluster the original data to break the numbers into similar groups. (k-means, other…)</a:t>
-            </a:r>
-          </a:p>
-          <a:p>
-            <a:pPr lvl="1"/>
-            <a:r>
-              <a:rPr lang="en-US" dirty="0"/>
-              <a:t>Manually add a label – each group is similar, but we don’t know what it is a group of. </a:t>
-            </a:r>
-          </a:p>
-          <a:p>
-            <a:pPr lvl="1"/>
-            <a:r>
-              <a:rPr lang="en-US" dirty="0"/>
-              <a:t>Now you have labeled groups of digit images. </a:t>
-            </a:r>
-          </a:p>
-          <a:p>
-            <a:pPr lvl="1"/>
-            <a:r>
-              <a:rPr lang="en-US" dirty="0"/>
-              <a:t>Train 10 (or more) GMMs, one that ‘knows’ each number from the data used to train it. </a:t>
-            </a:r>
-          </a:p>
-          <a:p>
-            <a:pPr lvl="1"/>
-            <a:r>
-              <a:rPr lang="en-US" dirty="0"/>
-              <a:t>When asked for a printout, ask the right GMMs for a digit each, assemble. </a:t>
-            </a:r>
-          </a:p>
-          <a:p>
-            <a:r>
-              <a:rPr lang="en-US" dirty="0"/>
-              <a:t>Overall, the images tend to be OK at best, some improvements:</a:t>
-            </a:r>
-          </a:p>
-          <a:p>
-            <a:pPr lvl="1"/>
-            <a:r>
-              <a:rPr lang="en-US" dirty="0"/>
-              <a:t>Number of clusters can be &gt;10, to capture different digit variations. GMMs can as well. </a:t>
-            </a:r>
-          </a:p>
-          <a:p>
-            <a:pPr lvl="1"/>
-            <a:r>
-              <a:rPr lang="en-US" dirty="0"/>
-              <a:t>Some cleaning/processing (PCA, feature selection, etc..) may help, requires much tuning. </a:t>
-            </a:r>
-          </a:p>
-        </p:txBody>
-      </p:sp>
-    </p:spTree>
-    <p:extLst>
-      <p:ext uri="{BB962C8B-B14F-4D97-AF65-F5344CB8AC3E}">
-        <p14:creationId xmlns:p14="http://schemas.microsoft.com/office/powerpoint/2010/main" val="136210750"/>
-      </p:ext>
-    </p:extLst>
-  </p:cSld>
-  <p:clrMapOvr>
-    <a:masterClrMapping/>
-  </p:clrMapOvr>
-</p:sld>
-</file>
-
-<file path=ppt/slides/slide40.xml><?xml version="1.0" encoding="utf-8"?>
+<file path=ppt/slides/slide42.xml><?xml version="1.0" encoding="utf-8"?>
 <p:sld xmlns:a="http://schemas.openxmlformats.org/drawingml/2006/main" xmlns:r="http://schemas.openxmlformats.org/officeDocument/2006/relationships" xmlns:p="http://schemas.openxmlformats.org/presentationml/2006/main">
   <p:cSld>
     <p:spTree>
@@ -9948,7 +10146,7 @@
 </p:sld>
 </file>
 
-<file path=ppt/slides/slide41.xml><?xml version="1.0" encoding="utf-8"?>
+<file path=ppt/slides/slide43.xml><?xml version="1.0" encoding="utf-8"?>
 <p:sld xmlns:a="http://schemas.openxmlformats.org/drawingml/2006/main" xmlns:r="http://schemas.openxmlformats.org/officeDocument/2006/relationships" xmlns:p="http://schemas.openxmlformats.org/presentationml/2006/main" show="0">
   <p:cSld>
     <p:spTree>
@@ -10101,7 +10299,7 @@
 </p:sld>
 </file>
 
-<file path=ppt/slides/slide42.xml><?xml version="1.0" encoding="utf-8"?>
+<file path=ppt/slides/slide44.xml><?xml version="1.0" encoding="utf-8"?>
 <p:sld xmlns:a="http://schemas.openxmlformats.org/drawingml/2006/main" xmlns:r="http://schemas.openxmlformats.org/officeDocument/2006/relationships" xmlns:p="http://schemas.openxmlformats.org/presentationml/2006/main">
   <p:cSld>
     <p:spTree>
@@ -10123,6 +10321,653 @@
           <p:cNvPr id="2" name="Title 1">
             <a:extLst>
               <a:ext uri="{FF2B5EF4-FFF2-40B4-BE49-F238E27FC236}">
+                <a16:creationId xmlns:a16="http://schemas.microsoft.com/office/drawing/2014/main" id="{CA6815EB-83BE-8102-1A7B-F685E86453B7}"/>
+              </a:ext>
+            </a:extLst>
+          </p:cNvPr>
+          <p:cNvSpPr>
+            <a:spLocks noGrp="1"/>
+          </p:cNvSpPr>
+          <p:nvPr>
+            <p:ph type="title"/>
+          </p:nvPr>
+        </p:nvSpPr>
+        <p:spPr/>
+        <p:txBody>
+          <a:bodyPr/>
+          <a:lstStyle/>
+          <a:p>
+            <a:r>
+              <a:rPr lang="en-US" dirty="0" err="1"/>
+              <a:t>RayTune</a:t>
+            </a:r>
+            <a:endParaRPr lang="en-US" dirty="0"/>
+          </a:p>
+        </p:txBody>
+      </p:sp>
+      <p:sp>
+        <p:nvSpPr>
+          <p:cNvPr id="3" name="Content Placeholder 2">
+            <a:extLst>
+              <a:ext uri="{FF2B5EF4-FFF2-40B4-BE49-F238E27FC236}">
+                <a16:creationId xmlns:a16="http://schemas.microsoft.com/office/drawing/2014/main" id="{03333832-984D-A311-6777-FBB08A772031}"/>
+              </a:ext>
+            </a:extLst>
+          </p:cNvPr>
+          <p:cNvSpPr>
+            <a:spLocks noGrp="1"/>
+          </p:cNvSpPr>
+          <p:nvPr>
+            <p:ph idx="1"/>
+          </p:nvPr>
+        </p:nvSpPr>
+        <p:spPr>
+          <a:xfrm>
+            <a:off x="0" y="1853754"/>
+            <a:ext cx="6791089" cy="4199727"/>
+          </a:xfrm>
+        </p:spPr>
+        <p:txBody>
+          <a:bodyPr/>
+          <a:lstStyle/>
+          <a:p>
+            <a:r>
+              <a:rPr lang="en-US" dirty="0"/>
+              <a:t>Hyperparameter tuning is more involved than a grid search. </a:t>
+            </a:r>
+          </a:p>
+          <a:p>
+            <a:pPr lvl="1"/>
+            <a:r>
+              <a:rPr lang="en-US" dirty="0"/>
+              <a:t>The concept is the same, the tools are different. </a:t>
+            </a:r>
+          </a:p>
+          <a:p>
+            <a:r>
+              <a:rPr lang="en-US" dirty="0" err="1"/>
+              <a:t>RayTune</a:t>
+            </a:r>
+            <a:r>
+              <a:rPr lang="en-US" dirty="0"/>
+              <a:t> allows us to setup </a:t>
+            </a:r>
+            <a:r>
+              <a:rPr lang="en-US" dirty="0" err="1"/>
+              <a:t>gridsearch</a:t>
+            </a:r>
+            <a:r>
+              <a:rPr lang="en-US" dirty="0"/>
+              <a:t>-y tuning. </a:t>
+            </a:r>
+          </a:p>
+          <a:p>
+            <a:pPr lvl="1"/>
+            <a:r>
+              <a:rPr lang="en-US" dirty="0"/>
+              <a:t>We can control basically anything if we want. </a:t>
+            </a:r>
+          </a:p>
+          <a:p>
+            <a:r>
+              <a:rPr lang="en-US" dirty="0" err="1"/>
+              <a:t>RayTune</a:t>
+            </a:r>
+            <a:r>
+              <a:rPr lang="en-US" dirty="0"/>
+              <a:t> also allows for distributed tuning. </a:t>
+            </a:r>
+          </a:p>
+          <a:p>
+            <a:pPr lvl="1"/>
+            <a:r>
+              <a:rPr lang="en-US" dirty="0"/>
+              <a:t>Train models on several systems. </a:t>
+            </a:r>
+          </a:p>
+          <a:p>
+            <a:pPr lvl="1"/>
+            <a:r>
+              <a:rPr lang="en-US" dirty="0"/>
+              <a:t>This adds some complexity, unfortunately. </a:t>
+            </a:r>
+          </a:p>
+          <a:p>
+            <a:r>
+              <a:rPr lang="en-US" dirty="0"/>
+              <a:t>The idea is relatively simple, implementation may not be. </a:t>
+            </a:r>
+          </a:p>
+          <a:p>
+            <a:r>
+              <a:rPr lang="en-US" dirty="0"/>
+              <a:t>Provides </a:t>
+            </a:r>
+            <a:r>
+              <a:rPr lang="en-US" dirty="0" err="1"/>
+              <a:t>tensorboard</a:t>
+            </a:r>
+            <a:r>
+              <a:rPr lang="en-US" dirty="0"/>
+              <a:t> logs by default. </a:t>
+            </a:r>
+          </a:p>
+        </p:txBody>
+      </p:sp>
+      <p:pic>
+        <p:nvPicPr>
+          <p:cNvPr id="4" name="Picture 3" descr="Ray Tune FAQ — Ray 2.54.0">
+            <a:extLst>
+              <a:ext uri="{FF2B5EF4-FFF2-40B4-BE49-F238E27FC236}">
+                <a16:creationId xmlns:a16="http://schemas.microsoft.com/office/drawing/2014/main" id="{72FAD165-79E1-D9D9-B2B7-BF3F25342562}"/>
+              </a:ext>
+            </a:extLst>
+          </p:cNvPr>
+          <p:cNvPicPr>
+            <a:picLocks noChangeAspect="1"/>
+          </p:cNvPicPr>
+          <p:nvPr/>
+        </p:nvPicPr>
+        <p:blipFill>
+          <a:blip r:embed="rId2"/>
+          <a:srcRect l="7927" r="3719"/>
+          <a:stretch>
+            <a:fillRect/>
+          </a:stretch>
+        </p:blipFill>
+        <p:spPr>
+          <a:xfrm>
+            <a:off x="6791089" y="2037345"/>
+            <a:ext cx="5386039" cy="3429000"/>
+          </a:xfrm>
+          <a:prstGeom prst="rect">
+            <a:avLst/>
+          </a:prstGeom>
+        </p:spPr>
+      </p:pic>
+    </p:spTree>
+    <p:extLst>
+      <p:ext uri="{BB962C8B-B14F-4D97-AF65-F5344CB8AC3E}">
+        <p14:creationId xmlns:p14="http://schemas.microsoft.com/office/powerpoint/2010/main" val="823925468"/>
+      </p:ext>
+    </p:extLst>
+  </p:cSld>
+  <p:clrMapOvr>
+    <a:masterClrMapping/>
+  </p:clrMapOvr>
+</p:sld>
+</file>
+
+<file path=ppt/slides/slide45.xml><?xml version="1.0" encoding="utf-8"?>
+<p:sld xmlns:a="http://schemas.openxmlformats.org/drawingml/2006/main" xmlns:r="http://schemas.openxmlformats.org/officeDocument/2006/relationships" xmlns:p="http://schemas.openxmlformats.org/presentationml/2006/main">
+  <p:cSld>
+    <p:spTree>
+      <p:nvGrpSpPr>
+        <p:cNvPr id="1" name=""/>
+        <p:cNvGrpSpPr/>
+        <p:nvPr/>
+      </p:nvGrpSpPr>
+      <p:grpSpPr>
+        <a:xfrm>
+          <a:off x="0" y="0"/>
+          <a:ext cx="0" cy="0"/>
+          <a:chOff x="0" y="0"/>
+          <a:chExt cx="0" cy="0"/>
+        </a:xfrm>
+      </p:grpSpPr>
+      <p:sp>
+        <p:nvSpPr>
+          <p:cNvPr id="2" name="Title 1">
+            <a:extLst>
+              <a:ext uri="{FF2B5EF4-FFF2-40B4-BE49-F238E27FC236}">
+                <a16:creationId xmlns:a16="http://schemas.microsoft.com/office/drawing/2014/main" id="{454AA7E2-974D-BF5B-D830-D1067C4936BA}"/>
+              </a:ext>
+            </a:extLst>
+          </p:cNvPr>
+          <p:cNvSpPr>
+            <a:spLocks noGrp="1"/>
+          </p:cNvSpPr>
+          <p:nvPr>
+            <p:ph type="title"/>
+          </p:nvPr>
+        </p:nvSpPr>
+        <p:spPr/>
+        <p:txBody>
+          <a:bodyPr/>
+          <a:lstStyle/>
+          <a:p>
+            <a:r>
+              <a:rPr lang="en-US" dirty="0" err="1"/>
+              <a:t>RayTune</a:t>
+            </a:r>
+            <a:r>
+              <a:rPr lang="en-US" dirty="0"/>
+              <a:t> Setup</a:t>
+            </a:r>
+          </a:p>
+        </p:txBody>
+      </p:sp>
+      <p:sp>
+        <p:nvSpPr>
+          <p:cNvPr id="3" name="Content Placeholder 2">
+            <a:extLst>
+              <a:ext uri="{FF2B5EF4-FFF2-40B4-BE49-F238E27FC236}">
+                <a16:creationId xmlns:a16="http://schemas.microsoft.com/office/drawing/2014/main" id="{59494532-C744-DBCF-365D-9581E52BC2CA}"/>
+              </a:ext>
+            </a:extLst>
+          </p:cNvPr>
+          <p:cNvSpPr>
+            <a:spLocks noGrp="1"/>
+          </p:cNvSpPr>
+          <p:nvPr>
+            <p:ph idx="1"/>
+          </p:nvPr>
+        </p:nvSpPr>
+        <p:spPr>
+          <a:xfrm>
+            <a:off x="5710683" y="1853754"/>
+            <a:ext cx="6481317" cy="4335173"/>
+          </a:xfrm>
+        </p:spPr>
+        <p:txBody>
+          <a:bodyPr/>
+          <a:lstStyle/>
+          <a:p>
+            <a:r>
+              <a:rPr lang="en-US" dirty="0"/>
+              <a:t>We setup a ‘tunable’, usually* a loop. </a:t>
+            </a:r>
+          </a:p>
+          <a:p>
+            <a:pPr lvl="1"/>
+            <a:r>
+              <a:rPr lang="en-US" dirty="0"/>
+              <a:t>This loop ‘does’ all the model stuff – create, </a:t>
+            </a:r>
+            <a:r>
+              <a:rPr lang="en-US" dirty="0" err="1"/>
+              <a:t>dataloaders</a:t>
+            </a:r>
+            <a:r>
+              <a:rPr lang="en-US" dirty="0"/>
+              <a:t>, optimizer, </a:t>
+            </a:r>
+            <a:r>
+              <a:rPr lang="en-US" dirty="0" err="1"/>
+              <a:t>etc</a:t>
+            </a:r>
+            <a:r>
+              <a:rPr lang="en-US" dirty="0"/>
+              <a:t>…</a:t>
+            </a:r>
+          </a:p>
+          <a:p>
+            <a:pPr lvl="1"/>
+            <a:r>
+              <a:rPr lang="en-US" dirty="0"/>
+              <a:t>The all-in-a-loop thing allows for dist. training.</a:t>
+            </a:r>
+          </a:p>
+          <a:p>
+            <a:r>
+              <a:rPr lang="en-US" dirty="0"/>
+              <a:t>We add variables and a </a:t>
+            </a:r>
+            <a:r>
+              <a:rPr lang="en-US" dirty="0" err="1"/>
+              <a:t>gridsearch</a:t>
+            </a:r>
+            <a:r>
+              <a:rPr lang="en-US" dirty="0"/>
+              <a:t>-y space. </a:t>
+            </a:r>
+          </a:p>
+          <a:p>
+            <a:pPr lvl="1"/>
+            <a:r>
+              <a:rPr lang="en-US" dirty="0"/>
+              <a:t>E.g. config - </a:t>
+            </a:r>
+            <a:r>
+              <a:rPr lang="en-US" dirty="0" err="1"/>
+              <a:t>num_filters</a:t>
+            </a:r>
+            <a:r>
+              <a:rPr lang="en-US" dirty="0"/>
+              <a:t>, </a:t>
+            </a:r>
+            <a:r>
+              <a:rPr lang="en-US" dirty="0" err="1"/>
+              <a:t>dropout_rate</a:t>
+            </a:r>
+            <a:r>
+              <a:rPr lang="en-US" dirty="0"/>
+              <a:t>, </a:t>
+            </a:r>
+            <a:r>
+              <a:rPr lang="en-US" dirty="0" err="1"/>
+              <a:t>fc_size</a:t>
+            </a:r>
+            <a:r>
+              <a:rPr lang="en-US" dirty="0"/>
+              <a:t>. </a:t>
+            </a:r>
+          </a:p>
+          <a:p>
+            <a:pPr lvl="1"/>
+            <a:r>
+              <a:rPr lang="en-US" dirty="0"/>
+              <a:t>Each run selects a value from the search space provided. </a:t>
+            </a:r>
+          </a:p>
+          <a:p>
+            <a:pPr lvl="1"/>
+            <a:r>
+              <a:rPr lang="en-US" dirty="0"/>
+              <a:t>Select from list, number within range, random, </a:t>
+            </a:r>
+            <a:r>
+              <a:rPr lang="en-US" dirty="0" err="1"/>
+              <a:t>etc</a:t>
+            </a:r>
+            <a:r>
+              <a:rPr lang="en-US" dirty="0"/>
+              <a:t>…</a:t>
+            </a:r>
+          </a:p>
+          <a:p>
+            <a:r>
+              <a:rPr lang="en-US" dirty="0"/>
+              <a:t>Can add schedulers to manage the training – e.g. cutoff bad trials early. There’s lots more, we only use a bit. </a:t>
+            </a:r>
+          </a:p>
+        </p:txBody>
+      </p:sp>
+      <p:pic>
+        <p:nvPicPr>
+          <p:cNvPr id="4" name="Picture 3">
+            <a:extLst>
+              <a:ext uri="{FF2B5EF4-FFF2-40B4-BE49-F238E27FC236}">
+                <a16:creationId xmlns:a16="http://schemas.microsoft.com/office/drawing/2014/main" id="{19468D9F-1FCF-F023-9ECE-2B2298977832}"/>
+              </a:ext>
+            </a:extLst>
+          </p:cNvPr>
+          <p:cNvPicPr>
+            <a:picLocks noChangeAspect="1"/>
+          </p:cNvPicPr>
+          <p:nvPr/>
+        </p:nvPicPr>
+        <p:blipFill>
+          <a:blip r:embed="rId2"/>
+          <a:stretch>
+            <a:fillRect/>
+          </a:stretch>
+        </p:blipFill>
+        <p:spPr>
+          <a:xfrm>
+            <a:off x="0" y="1549830"/>
+            <a:ext cx="5710684" cy="5308169"/>
+          </a:xfrm>
+          <a:prstGeom prst="rect">
+            <a:avLst/>
+          </a:prstGeom>
+        </p:spPr>
+      </p:pic>
+      <p:pic>
+        <p:nvPicPr>
+          <p:cNvPr id="5" name="Picture 4">
+            <a:extLst>
+              <a:ext uri="{FF2B5EF4-FFF2-40B4-BE49-F238E27FC236}">
+                <a16:creationId xmlns:a16="http://schemas.microsoft.com/office/drawing/2014/main" id="{8BB37C52-FF28-6620-D280-94DD179D20D7}"/>
+              </a:ext>
+            </a:extLst>
+          </p:cNvPr>
+          <p:cNvPicPr>
+            <a:picLocks noChangeAspect="1"/>
+          </p:cNvPicPr>
+          <p:nvPr/>
+        </p:nvPicPr>
+        <p:blipFill>
+          <a:blip r:embed="rId3"/>
+          <a:stretch>
+            <a:fillRect/>
+          </a:stretch>
+        </p:blipFill>
+        <p:spPr>
+          <a:xfrm>
+            <a:off x="7796401" y="0"/>
+            <a:ext cx="4395599" cy="1798582"/>
+          </a:xfrm>
+          <a:prstGeom prst="rect">
+            <a:avLst/>
+          </a:prstGeom>
+        </p:spPr>
+      </p:pic>
+    </p:spTree>
+    <p:extLst>
+      <p:ext uri="{BB962C8B-B14F-4D97-AF65-F5344CB8AC3E}">
+        <p14:creationId xmlns:p14="http://schemas.microsoft.com/office/powerpoint/2010/main" val="1516440389"/>
+      </p:ext>
+    </p:extLst>
+  </p:cSld>
+  <p:clrMapOvr>
+    <a:masterClrMapping/>
+  </p:clrMapOvr>
+</p:sld>
+</file>
+
+<file path=ppt/slides/slide46.xml><?xml version="1.0" encoding="utf-8"?>
+<p:sld xmlns:a="http://schemas.openxmlformats.org/drawingml/2006/main" xmlns:r="http://schemas.openxmlformats.org/officeDocument/2006/relationships" xmlns:p="http://schemas.openxmlformats.org/presentationml/2006/main">
+  <p:cSld>
+    <p:spTree>
+      <p:nvGrpSpPr>
+        <p:cNvPr id="1" name=""/>
+        <p:cNvGrpSpPr/>
+        <p:nvPr/>
+      </p:nvGrpSpPr>
+      <p:grpSpPr>
+        <a:xfrm>
+          <a:off x="0" y="0"/>
+          <a:ext cx="0" cy="0"/>
+          <a:chOff x="0" y="0"/>
+          <a:chExt cx="0" cy="0"/>
+        </a:xfrm>
+      </p:grpSpPr>
+      <p:sp>
+        <p:nvSpPr>
+          <p:cNvPr id="2" name="Title 1">
+            <a:extLst>
+              <a:ext uri="{FF2B5EF4-FFF2-40B4-BE49-F238E27FC236}">
+                <a16:creationId xmlns:a16="http://schemas.microsoft.com/office/drawing/2014/main" id="{057D06E3-E747-D735-F22D-0975BCAF2173}"/>
+              </a:ext>
+            </a:extLst>
+          </p:cNvPr>
+          <p:cNvSpPr>
+            <a:spLocks noGrp="1"/>
+          </p:cNvSpPr>
+          <p:nvPr>
+            <p:ph type="title"/>
+          </p:nvPr>
+        </p:nvSpPr>
+        <p:spPr/>
+        <p:txBody>
+          <a:bodyPr/>
+          <a:lstStyle/>
+          <a:p>
+            <a:r>
+              <a:rPr lang="en-US" dirty="0"/>
+              <a:t>Using </a:t>
+            </a:r>
+            <a:r>
+              <a:rPr lang="en-US" dirty="0" err="1"/>
+              <a:t>Raytune</a:t>
+            </a:r>
+            <a:endParaRPr lang="en-US" dirty="0"/>
+          </a:p>
+        </p:txBody>
+      </p:sp>
+      <p:sp>
+        <p:nvSpPr>
+          <p:cNvPr id="3" name="Content Placeholder 2">
+            <a:extLst>
+              <a:ext uri="{FF2B5EF4-FFF2-40B4-BE49-F238E27FC236}">
+                <a16:creationId xmlns:a16="http://schemas.microsoft.com/office/drawing/2014/main" id="{4FC45783-8E67-E1C8-9D34-633455F1E166}"/>
+              </a:ext>
+            </a:extLst>
+          </p:cNvPr>
+          <p:cNvSpPr>
+            <a:spLocks noGrp="1"/>
+          </p:cNvSpPr>
+          <p:nvPr>
+            <p:ph idx="1"/>
+          </p:nvPr>
+        </p:nvSpPr>
+        <p:spPr>
+          <a:xfrm>
+            <a:off x="1451579" y="1940312"/>
+            <a:ext cx="10023026" cy="4113169"/>
+          </a:xfrm>
+        </p:spPr>
+        <p:txBody>
+          <a:bodyPr>
+            <a:normAutofit fontScale="92500" lnSpcReduction="10000"/>
+          </a:bodyPr>
+          <a:lstStyle/>
+          <a:p>
+            <a:r>
+              <a:rPr lang="en-US" dirty="0"/>
+              <a:t>Using </a:t>
+            </a:r>
+            <a:r>
+              <a:rPr lang="en-US" dirty="0" err="1"/>
+              <a:t>raytune</a:t>
+            </a:r>
+            <a:r>
+              <a:rPr lang="en-US" dirty="0"/>
+              <a:t> is kind of annoying at first, the capability adds some complexity. </a:t>
+            </a:r>
+          </a:p>
+          <a:p>
+            <a:pPr lvl="1"/>
+            <a:r>
+              <a:rPr lang="en-US" dirty="0"/>
+              <a:t>Memory management and serializable errors are easy to make*. </a:t>
+            </a:r>
+          </a:p>
+          <a:p>
+            <a:pPr lvl="1"/>
+            <a:r>
+              <a:rPr lang="en-US" dirty="0"/>
+              <a:t>There’s several ways to do things. </a:t>
+            </a:r>
+          </a:p>
+          <a:p>
+            <a:pPr lvl="1"/>
+            <a:r>
+              <a:rPr lang="en-US" dirty="0"/>
+              <a:t>Need to allow everything to be split to different systems makes it more complex. </a:t>
+            </a:r>
+          </a:p>
+          <a:p>
+            <a:r>
+              <a:rPr lang="en-US" dirty="0"/>
+              <a:t>The time demands are often large, so make the search space as smart as possible. </a:t>
+            </a:r>
+          </a:p>
+          <a:p>
+            <a:pPr lvl="1"/>
+            <a:r>
+              <a:rPr lang="en-US" dirty="0"/>
+              <a:t>Ensure GPU if on </a:t>
+            </a:r>
+            <a:r>
+              <a:rPr lang="en-US" dirty="0" err="1"/>
+              <a:t>colab</a:t>
+            </a:r>
+            <a:r>
+              <a:rPr lang="en-US" dirty="0"/>
+              <a:t>, not automatically enabled. </a:t>
+            </a:r>
+          </a:p>
+          <a:p>
+            <a:r>
+              <a:rPr lang="en-US" dirty="0"/>
+              <a:t>Don’t tell anyone I said this, but the infrastructure code around </a:t>
+            </a:r>
+            <a:r>
+              <a:rPr lang="en-US" dirty="0" err="1"/>
+              <a:t>raytune</a:t>
+            </a:r>
+            <a:r>
+              <a:rPr lang="en-US" dirty="0"/>
+              <a:t> is a good LLM use. </a:t>
+            </a:r>
+          </a:p>
+          <a:p>
+            <a:pPr lvl="1"/>
+            <a:r>
+              <a:rPr lang="en-US" dirty="0"/>
+              <a:t>Along with crawling file systems, regular expressions, and UI things you rarely need. </a:t>
+            </a:r>
+          </a:p>
+          <a:p>
+            <a:pPr lvl="1"/>
+            <a:r>
+              <a:rPr lang="en-US" dirty="0"/>
+              <a:t>You still want to define the model, search space, and datasets at a minimum. </a:t>
+            </a:r>
+          </a:p>
+          <a:p>
+            <a:pPr lvl="1"/>
+            <a:r>
+              <a:rPr lang="en-US" dirty="0"/>
+              <a:t>The stuff around tuner, scheduler, etc... Isn’t insanely complex, but it is finicky. </a:t>
+            </a:r>
+          </a:p>
+          <a:p>
+            <a:pPr lvl="1"/>
+            <a:r>
+              <a:rPr lang="en-US" dirty="0"/>
+              <a:t>If you understand the concept, and can adjust code, that stuff is AI-OK™ </a:t>
+            </a:r>
+          </a:p>
+        </p:txBody>
+      </p:sp>
+    </p:spTree>
+    <p:extLst>
+      <p:ext uri="{BB962C8B-B14F-4D97-AF65-F5344CB8AC3E}">
+        <p14:creationId xmlns:p14="http://schemas.microsoft.com/office/powerpoint/2010/main" val="1830515373"/>
+      </p:ext>
+    </p:extLst>
+  </p:cSld>
+  <p:clrMapOvr>
+    <a:masterClrMapping/>
+  </p:clrMapOvr>
+</p:sld>
+</file>
+
+<file path=ppt/slides/slide47.xml><?xml version="1.0" encoding="utf-8"?>
+<p:sld xmlns:a="http://schemas.openxmlformats.org/drawingml/2006/main" xmlns:r="http://schemas.openxmlformats.org/officeDocument/2006/relationships" xmlns:p="http://schemas.openxmlformats.org/presentationml/2006/main">
+  <p:cSld>
+    <p:spTree>
+      <p:nvGrpSpPr>
+        <p:cNvPr id="1" name=""/>
+        <p:cNvGrpSpPr/>
+        <p:nvPr/>
+      </p:nvGrpSpPr>
+      <p:grpSpPr>
+        <a:xfrm>
+          <a:off x="0" y="0"/>
+          <a:ext cx="0" cy="0"/>
+          <a:chOff x="0" y="0"/>
+          <a:chExt cx="0" cy="0"/>
+        </a:xfrm>
+      </p:grpSpPr>
+      <p:sp>
+        <p:nvSpPr>
+          <p:cNvPr id="2" name="Title 1">
+            <a:extLst>
+              <a:ext uri="{FF2B5EF4-FFF2-40B4-BE49-F238E27FC236}">
                 <a16:creationId xmlns:a16="http://schemas.microsoft.com/office/drawing/2014/main" id="{00F11902-F058-D543-A654-EBFA8DD915C4}"/>
               </a:ext>
             </a:extLst>
@@ -10269,7 +11114,7 @@
 </p:sld>
 </file>
 
-<file path=ppt/slides/slide43.xml><?xml version="1.0" encoding="utf-8"?>
+<file path=ppt/slides/slide48.xml><?xml version="1.0" encoding="utf-8"?>
 <p:sld xmlns:a="http://schemas.openxmlformats.org/drawingml/2006/main" xmlns:r="http://schemas.openxmlformats.org/officeDocument/2006/relationships" xmlns:p="http://schemas.openxmlformats.org/presentationml/2006/main" show="0">
   <p:cSld>
     <p:spTree>
@@ -10454,7 +11299,7 @@
 </p:sld>
 </file>
 
-<file path=ppt/slides/slide44.xml><?xml version="1.0" encoding="utf-8"?>
+<file path=ppt/slides/slide49.xml><?xml version="1.0" encoding="utf-8"?>
 <p:sld xmlns:a="http://schemas.openxmlformats.org/drawingml/2006/main" xmlns:r="http://schemas.openxmlformats.org/officeDocument/2006/relationships" xmlns:p="http://schemas.openxmlformats.org/presentationml/2006/main" show="0">
   <p:cSld>
     <p:spTree>
@@ -10570,7 +11415,139 @@
 </p:sld>
 </file>
 
-<file path=ppt/slides/slide45.xml><?xml version="1.0" encoding="utf-8"?>
+<file path=ppt/slides/slide5.xml><?xml version="1.0" encoding="utf-8"?>
+<p:sld xmlns:a="http://schemas.openxmlformats.org/drawingml/2006/main" xmlns:r="http://schemas.openxmlformats.org/officeDocument/2006/relationships" xmlns:p="http://schemas.openxmlformats.org/presentationml/2006/main" show="0">
+  <p:cSld>
+    <p:spTree>
+      <p:nvGrpSpPr>
+        <p:cNvPr id="1" name=""/>
+        <p:cNvGrpSpPr/>
+        <p:nvPr/>
+      </p:nvGrpSpPr>
+      <p:grpSpPr>
+        <a:xfrm>
+          <a:off x="0" y="0"/>
+          <a:ext cx="0" cy="0"/>
+          <a:chOff x="0" y="0"/>
+          <a:chExt cx="0" cy="0"/>
+        </a:xfrm>
+      </p:grpSpPr>
+      <p:sp>
+        <p:nvSpPr>
+          <p:cNvPr id="2" name="Title 1">
+            <a:extLst>
+              <a:ext uri="{FF2B5EF4-FFF2-40B4-BE49-F238E27FC236}">
+                <a16:creationId xmlns:a16="http://schemas.microsoft.com/office/drawing/2014/main" id="{C23B2C87-4BE3-F68C-4EE7-7009E745ACA7}"/>
+              </a:ext>
+            </a:extLst>
+          </p:cNvPr>
+          <p:cNvSpPr>
+            <a:spLocks noGrp="1"/>
+          </p:cNvSpPr>
+          <p:nvPr>
+            <p:ph type="title"/>
+          </p:nvPr>
+        </p:nvSpPr>
+        <p:spPr/>
+        <p:txBody>
+          <a:bodyPr/>
+          <a:lstStyle/>
+          <a:p>
+            <a:r>
+              <a:rPr lang="en-US" dirty="0"/>
+              <a:t>Cluster Assignment</a:t>
+            </a:r>
+          </a:p>
+        </p:txBody>
+      </p:sp>
+      <p:sp>
+        <p:nvSpPr>
+          <p:cNvPr id="3" name="Content Placeholder 2">
+            <a:extLst>
+              <a:ext uri="{FF2B5EF4-FFF2-40B4-BE49-F238E27FC236}">
+                <a16:creationId xmlns:a16="http://schemas.microsoft.com/office/drawing/2014/main" id="{C027D62E-779C-86FC-A8CB-FC13358BCB50}"/>
+              </a:ext>
+            </a:extLst>
+          </p:cNvPr>
+          <p:cNvSpPr>
+            <a:spLocks noGrp="1"/>
+          </p:cNvSpPr>
+          <p:nvPr>
+            <p:ph idx="1"/>
+          </p:nvPr>
+        </p:nvSpPr>
+        <p:spPr>
+          <a:xfrm>
+            <a:off x="1451579" y="1853754"/>
+            <a:ext cx="9603275" cy="4199727"/>
+          </a:xfrm>
+        </p:spPr>
+        <p:txBody>
+          <a:bodyPr/>
+          <a:lstStyle/>
+          <a:p>
+            <a:r>
+              <a:rPr lang="en-US" dirty="0"/>
+              <a:t>Common issues:</a:t>
+            </a:r>
+          </a:p>
+          <a:p>
+            <a:pPr lvl="1"/>
+            <a:r>
+              <a:rPr lang="en-US" dirty="0"/>
+              <a:t>Assorted mix-ups applying labels to clusters. </a:t>
+            </a:r>
+          </a:p>
+          <a:p>
+            <a:pPr lvl="1"/>
+            <a:r>
+              <a:rPr lang="en-US" dirty="0"/>
+              <a:t>Training GMM timing/location. </a:t>
+            </a:r>
+          </a:p>
+          <a:p>
+            <a:r>
+              <a:rPr lang="en-US" dirty="0"/>
+              <a:t>Adding labeling:</a:t>
+            </a:r>
+          </a:p>
+          <a:p>
+            <a:pPr lvl="1"/>
+            <a:r>
+              <a:rPr lang="en-US" dirty="0"/>
+              <a:t>This feels weird to lots of people, but it isn’t really all that rare. (LLMs and gen models). </a:t>
+            </a:r>
+          </a:p>
+          <a:p>
+            <a:pPr lvl="1"/>
+            <a:r>
+              <a:rPr lang="en-US" dirty="0"/>
+              <a:t>The clusters are able to be ‘pure’ on their own, but we need to add the label info ourselves. </a:t>
+            </a:r>
+          </a:p>
+          <a:p>
+            <a:pPr lvl="1"/>
+            <a:r>
+              <a:rPr lang="en-US" dirty="0"/>
+              <a:t>This could be supplemented by other models – e.g. manually label enough, then use classifier.</a:t>
+            </a:r>
+          </a:p>
+        </p:txBody>
+      </p:sp>
+    </p:spTree>
+    <p:extLst>
+      <p:ext uri="{BB962C8B-B14F-4D97-AF65-F5344CB8AC3E}">
+        <p14:creationId xmlns:p14="http://schemas.microsoft.com/office/powerpoint/2010/main" val="885412947"/>
+      </p:ext>
+    </p:extLst>
+  </p:cSld>
+  <p:clrMapOvr>
+    <a:masterClrMapping/>
+  </p:clrMapOvr>
+</p:sld>
+</file>
+
+<file path=ppt/slides/slide50.xml><?xml version="1.0" encoding="utf-8"?>
 <p:sld xmlns:a="http://schemas.openxmlformats.org/drawingml/2006/main" xmlns:r="http://schemas.openxmlformats.org/officeDocument/2006/relationships" xmlns:p="http://schemas.openxmlformats.org/presentationml/2006/main" show="0">
   <p:cSld>
     <p:spTree>
@@ -10728,7 +11705,7 @@
 </p:sld>
 </file>
 
-<file path=ppt/slides/slide46.xml><?xml version="1.0" encoding="utf-8"?>
+<file path=ppt/slides/slide51.xml><?xml version="1.0" encoding="utf-8"?>
 <p:sld xmlns:a="http://schemas.openxmlformats.org/drawingml/2006/main" xmlns:r="http://schemas.openxmlformats.org/officeDocument/2006/relationships" xmlns:p="http://schemas.openxmlformats.org/presentationml/2006/main" show="0">
   <p:cSld>
     <p:spTree>
@@ -10880,7 +11857,7 @@
 </p:sld>
 </file>
 
-<file path=ppt/slides/slide47.xml><?xml version="1.0" encoding="utf-8"?>
+<file path=ppt/slides/slide52.xml><?xml version="1.0" encoding="utf-8"?>
 <p:sld xmlns:a="http://schemas.openxmlformats.org/drawingml/2006/main" xmlns:r="http://schemas.openxmlformats.org/officeDocument/2006/relationships" xmlns:p="http://schemas.openxmlformats.org/presentationml/2006/main" show="0">
   <p:cSld>
     <p:spTree>
@@ -11018,7 +11995,7 @@
 </p:sld>
 </file>
 
-<file path=ppt/slides/slide48.xml><?xml version="1.0" encoding="utf-8"?>
+<file path=ppt/slides/slide53.xml><?xml version="1.0" encoding="utf-8"?>
 <p:sld xmlns:a="http://schemas.openxmlformats.org/drawingml/2006/main" xmlns:r="http://schemas.openxmlformats.org/officeDocument/2006/relationships" xmlns:p="http://schemas.openxmlformats.org/presentationml/2006/main" show="0">
   <p:cSld>
     <p:spTree>
@@ -11122,7 +12099,7 @@
 </p:sld>
 </file>
 
-<file path=ppt/slides/slide49.xml><?xml version="1.0" encoding="utf-8"?>
+<file path=ppt/slides/slide54.xml><?xml version="1.0" encoding="utf-8"?>
 <p:sld xmlns:a="http://schemas.openxmlformats.org/drawingml/2006/main" xmlns:r="http://schemas.openxmlformats.org/officeDocument/2006/relationships" xmlns:p="http://schemas.openxmlformats.org/presentationml/2006/main" show="0">
   <p:cSld>
     <p:spTree>
@@ -11274,139 +12251,7 @@
 </p:sld>
 </file>
 
-<file path=ppt/slides/slide5.xml><?xml version="1.0" encoding="utf-8"?>
-<p:sld xmlns:a="http://schemas.openxmlformats.org/drawingml/2006/main" xmlns:r="http://schemas.openxmlformats.org/officeDocument/2006/relationships" xmlns:p="http://schemas.openxmlformats.org/presentationml/2006/main" show="0">
-  <p:cSld>
-    <p:spTree>
-      <p:nvGrpSpPr>
-        <p:cNvPr id="1" name=""/>
-        <p:cNvGrpSpPr/>
-        <p:nvPr/>
-      </p:nvGrpSpPr>
-      <p:grpSpPr>
-        <a:xfrm>
-          <a:off x="0" y="0"/>
-          <a:ext cx="0" cy="0"/>
-          <a:chOff x="0" y="0"/>
-          <a:chExt cx="0" cy="0"/>
-        </a:xfrm>
-      </p:grpSpPr>
-      <p:sp>
-        <p:nvSpPr>
-          <p:cNvPr id="2" name="Title 1">
-            <a:extLst>
-              <a:ext uri="{FF2B5EF4-FFF2-40B4-BE49-F238E27FC236}">
-                <a16:creationId xmlns:a16="http://schemas.microsoft.com/office/drawing/2014/main" id="{C23B2C87-4BE3-F68C-4EE7-7009E745ACA7}"/>
-              </a:ext>
-            </a:extLst>
-          </p:cNvPr>
-          <p:cNvSpPr>
-            <a:spLocks noGrp="1"/>
-          </p:cNvSpPr>
-          <p:nvPr>
-            <p:ph type="title"/>
-          </p:nvPr>
-        </p:nvSpPr>
-        <p:spPr/>
-        <p:txBody>
-          <a:bodyPr/>
-          <a:lstStyle/>
-          <a:p>
-            <a:r>
-              <a:rPr lang="en-US" dirty="0"/>
-              <a:t>Cluster Assignment</a:t>
-            </a:r>
-          </a:p>
-        </p:txBody>
-      </p:sp>
-      <p:sp>
-        <p:nvSpPr>
-          <p:cNvPr id="3" name="Content Placeholder 2">
-            <a:extLst>
-              <a:ext uri="{FF2B5EF4-FFF2-40B4-BE49-F238E27FC236}">
-                <a16:creationId xmlns:a16="http://schemas.microsoft.com/office/drawing/2014/main" id="{C027D62E-779C-86FC-A8CB-FC13358BCB50}"/>
-              </a:ext>
-            </a:extLst>
-          </p:cNvPr>
-          <p:cNvSpPr>
-            <a:spLocks noGrp="1"/>
-          </p:cNvSpPr>
-          <p:nvPr>
-            <p:ph idx="1"/>
-          </p:nvPr>
-        </p:nvSpPr>
-        <p:spPr>
-          <a:xfrm>
-            <a:off x="1451579" y="1853754"/>
-            <a:ext cx="9603275" cy="4199727"/>
-          </a:xfrm>
-        </p:spPr>
-        <p:txBody>
-          <a:bodyPr/>
-          <a:lstStyle/>
-          <a:p>
-            <a:r>
-              <a:rPr lang="en-US" dirty="0"/>
-              <a:t>Common issues:</a:t>
-            </a:r>
-          </a:p>
-          <a:p>
-            <a:pPr lvl="1"/>
-            <a:r>
-              <a:rPr lang="en-US" dirty="0"/>
-              <a:t>Assorted mix-ups applying labels to clusters. </a:t>
-            </a:r>
-          </a:p>
-          <a:p>
-            <a:pPr lvl="1"/>
-            <a:r>
-              <a:rPr lang="en-US" dirty="0"/>
-              <a:t>Training GMM timing/location. </a:t>
-            </a:r>
-          </a:p>
-          <a:p>
-            <a:r>
-              <a:rPr lang="en-US" dirty="0"/>
-              <a:t>Adding labeling:</a:t>
-            </a:r>
-          </a:p>
-          <a:p>
-            <a:pPr lvl="1"/>
-            <a:r>
-              <a:rPr lang="en-US" dirty="0"/>
-              <a:t>This feels weird to lots of people, but it isn’t really all that rare. (LLMs and gen models). </a:t>
-            </a:r>
-          </a:p>
-          <a:p>
-            <a:pPr lvl="1"/>
-            <a:r>
-              <a:rPr lang="en-US" dirty="0"/>
-              <a:t>The clusters are able to be ‘pure’ on their own, but we need to add the label info ourselves. </a:t>
-            </a:r>
-          </a:p>
-          <a:p>
-            <a:pPr lvl="1"/>
-            <a:r>
-              <a:rPr lang="en-US" dirty="0"/>
-              <a:t>This could be supplemented by other models – e.g. manually label enough, then use classifier.</a:t>
-            </a:r>
-          </a:p>
-        </p:txBody>
-      </p:sp>
-    </p:spTree>
-    <p:extLst>
-      <p:ext uri="{BB962C8B-B14F-4D97-AF65-F5344CB8AC3E}">
-        <p14:creationId xmlns:p14="http://schemas.microsoft.com/office/powerpoint/2010/main" val="885412947"/>
-      </p:ext>
-    </p:extLst>
-  </p:cSld>
-  <p:clrMapOvr>
-    <a:masterClrMapping/>
-  </p:clrMapOvr>
-</p:sld>
-</file>
-
-<file path=ppt/slides/slide50.xml><?xml version="1.0" encoding="utf-8"?>
+<file path=ppt/slides/slide55.xml><?xml version="1.0" encoding="utf-8"?>
 <p:sld xmlns:a="http://schemas.openxmlformats.org/drawingml/2006/main" xmlns:r="http://schemas.openxmlformats.org/officeDocument/2006/relationships" xmlns:p="http://schemas.openxmlformats.org/presentationml/2006/main" show="0">
   <p:cSld>
     <p:spTree>
@@ -11657,7 +12502,7 @@
 </p:sld>
 </file>
 
-<file path=ppt/slides/slide51.xml><?xml version="1.0" encoding="utf-8"?>
+<file path=ppt/slides/slide56.xml><?xml version="1.0" encoding="utf-8"?>
 <p:sld xmlns:a="http://schemas.openxmlformats.org/drawingml/2006/main" xmlns:r="http://schemas.openxmlformats.org/officeDocument/2006/relationships" xmlns:p="http://schemas.openxmlformats.org/presentationml/2006/main" show="0">
   <p:cSld>
     <p:spTree>
@@ -11783,7 +12628,7 @@
 </p:sld>
 </file>
 
-<file path=ppt/slides/slide52.xml><?xml version="1.0" encoding="utf-8"?>
+<file path=ppt/slides/slide57.xml><?xml version="1.0" encoding="utf-8"?>
 <p:sld xmlns:a="http://schemas.openxmlformats.org/drawingml/2006/main" xmlns:r="http://schemas.openxmlformats.org/officeDocument/2006/relationships" xmlns:p="http://schemas.openxmlformats.org/presentationml/2006/main" show="0">
   <p:cSld>
     <p:spTree>
@@ -11945,7 +12790,7 @@
 </p:sld>
 </file>
 
-<file path=ppt/slides/slide53.xml><?xml version="1.0" encoding="utf-8"?>
+<file path=ppt/slides/slide58.xml><?xml version="1.0" encoding="utf-8"?>
 <p:sld xmlns:a="http://schemas.openxmlformats.org/drawingml/2006/main" xmlns:r="http://schemas.openxmlformats.org/officeDocument/2006/relationships" xmlns:p="http://schemas.openxmlformats.org/presentationml/2006/main" show="0">
   <p:cSld>
     <p:spTree>
@@ -12132,7 +12977,7 @@
 </p:sld>
 </file>
 
-<file path=ppt/slides/slide54.xml><?xml version="1.0" encoding="utf-8"?>
+<file path=ppt/slides/slide59.xml><?xml version="1.0" encoding="utf-8"?>
 <p:sld xmlns:a="http://schemas.openxmlformats.org/drawingml/2006/main" xmlns:r="http://schemas.openxmlformats.org/officeDocument/2006/relationships" xmlns:p="http://schemas.openxmlformats.org/presentationml/2006/main" show="0">
   <p:cSld>
     <p:spTree>
@@ -12295,7 +13140,97 @@
 </p:sld>
 </file>
 
-<file path=ppt/slides/slide55.xml><?xml version="1.0" encoding="utf-8"?>
+<file path=ppt/slides/slide6.xml><?xml version="1.0" encoding="utf-8"?>
+<p:sld xmlns:a="http://schemas.openxmlformats.org/drawingml/2006/main" xmlns:r="http://schemas.openxmlformats.org/officeDocument/2006/relationships" xmlns:p="http://schemas.openxmlformats.org/presentationml/2006/main">
+  <p:cSld>
+    <p:spTree>
+      <p:nvGrpSpPr>
+        <p:cNvPr id="1" name=""/>
+        <p:cNvGrpSpPr/>
+        <p:nvPr/>
+      </p:nvGrpSpPr>
+      <p:grpSpPr>
+        <a:xfrm>
+          <a:off x="0" y="0"/>
+          <a:ext cx="0" cy="0"/>
+          <a:chOff x="0" y="0"/>
+          <a:chExt cx="0" cy="0"/>
+        </a:xfrm>
+      </p:grpSpPr>
+      <p:sp>
+        <p:nvSpPr>
+          <p:cNvPr id="2" name="Title 1">
+            <a:extLst>
+              <a:ext uri="{FF2B5EF4-FFF2-40B4-BE49-F238E27FC236}">
+                <a16:creationId xmlns:a16="http://schemas.microsoft.com/office/drawing/2014/main" id="{E68B6258-E5B7-46B2-B0C0-74D17CB32669}"/>
+              </a:ext>
+            </a:extLst>
+          </p:cNvPr>
+          <p:cNvSpPr>
+            <a:spLocks noGrp="1"/>
+          </p:cNvSpPr>
+          <p:nvPr>
+            <p:ph type="ctrTitle"/>
+          </p:nvPr>
+        </p:nvSpPr>
+        <p:spPr/>
+        <p:txBody>
+          <a:bodyPr>
+            <a:normAutofit fontScale="90000"/>
+          </a:bodyPr>
+          <a:lstStyle/>
+          <a:p>
+            <a:r>
+              <a:rPr lang="en-CA" dirty="0"/>
+              <a:t>Neural Network </a:t>
+            </a:r>
+            <a:r>
+              <a:rPr lang="en-CA"/>
+              <a:t>tuning and Optimization</a:t>
+            </a:r>
+            <a:endParaRPr lang="LID4096" dirty="0"/>
+          </a:p>
+        </p:txBody>
+      </p:sp>
+      <p:sp>
+        <p:nvSpPr>
+          <p:cNvPr id="3" name="Subtitle 2">
+            <a:extLst>
+              <a:ext uri="{FF2B5EF4-FFF2-40B4-BE49-F238E27FC236}">
+                <a16:creationId xmlns:a16="http://schemas.microsoft.com/office/drawing/2014/main" id="{ABA17104-0772-4130-BC10-20A91C36DBC3}"/>
+              </a:ext>
+            </a:extLst>
+          </p:cNvPr>
+          <p:cNvSpPr>
+            <a:spLocks noGrp="1"/>
+          </p:cNvSpPr>
+          <p:nvPr>
+            <p:ph type="subTitle" idx="1"/>
+          </p:nvPr>
+        </p:nvSpPr>
+        <p:spPr/>
+        <p:txBody>
+          <a:bodyPr/>
+          <a:lstStyle/>
+          <a:p>
+            <a:endParaRPr lang="LID4096"/>
+          </a:p>
+        </p:txBody>
+      </p:sp>
+    </p:spTree>
+    <p:extLst>
+      <p:ext uri="{BB962C8B-B14F-4D97-AF65-F5344CB8AC3E}">
+        <p14:creationId xmlns:p14="http://schemas.microsoft.com/office/powerpoint/2010/main" val="213059865"/>
+      </p:ext>
+    </p:extLst>
+  </p:cSld>
+  <p:clrMapOvr>
+    <a:masterClrMapping/>
+  </p:clrMapOvr>
+</p:sld>
+</file>
+
+<file path=ppt/slides/slide60.xml><?xml version="1.0" encoding="utf-8"?>
 <p:sld xmlns:a="http://schemas.openxmlformats.org/drawingml/2006/main" xmlns:r="http://schemas.openxmlformats.org/officeDocument/2006/relationships" xmlns:p="http://schemas.openxmlformats.org/presentationml/2006/main" show="0">
   <p:cSld>
     <p:spTree>
@@ -12428,7 +13363,7 @@
 </p:sld>
 </file>
 
-<file path=ppt/slides/slide56.xml><?xml version="1.0" encoding="utf-8"?>
+<file path=ppt/slides/slide61.xml><?xml version="1.0" encoding="utf-8"?>
 <p:sld xmlns:a="http://schemas.openxmlformats.org/drawingml/2006/main" xmlns:r="http://schemas.openxmlformats.org/officeDocument/2006/relationships" xmlns:p="http://schemas.openxmlformats.org/presentationml/2006/main" show="0">
   <p:cSld>
     <p:spTree>
@@ -12561,7 +13496,7 @@
 </p:sld>
 </file>
 
-<file path=ppt/slides/slide57.xml><?xml version="1.0" encoding="utf-8"?>
+<file path=ppt/slides/slide62.xml><?xml version="1.0" encoding="utf-8"?>
 <p:sld xmlns:a="http://schemas.openxmlformats.org/drawingml/2006/main" xmlns:r="http://schemas.openxmlformats.org/officeDocument/2006/relationships" xmlns:p="http://schemas.openxmlformats.org/presentationml/2006/main" show="0">
   <p:cSld>
     <p:spTree>
@@ -12730,7 +13665,7 @@
 </p:sld>
 </file>
 
-<file path=ppt/slides/slide58.xml><?xml version="1.0" encoding="utf-8"?>
+<file path=ppt/slides/slide63.xml><?xml version="1.0" encoding="utf-8"?>
 <p:sld xmlns:a="http://schemas.openxmlformats.org/drawingml/2006/main" xmlns:r="http://schemas.openxmlformats.org/officeDocument/2006/relationships" xmlns:p="http://schemas.openxmlformats.org/presentationml/2006/main" show="0">
   <p:cSld>
     <p:spTree>
@@ -12961,7 +13896,7 @@
 </p:sld>
 </file>
 
-<file path=ppt/slides/slide59.xml><?xml version="1.0" encoding="utf-8"?>
+<file path=ppt/slides/slide64.xml><?xml version="1.0" encoding="utf-8"?>
 <p:sld xmlns:a="http://schemas.openxmlformats.org/drawingml/2006/main" xmlns:r="http://schemas.openxmlformats.org/officeDocument/2006/relationships" xmlns:p="http://schemas.openxmlformats.org/presentationml/2006/main" show="0">
   <p:cSld>
     <p:spTree>
@@ -13115,105 +14050,7 @@
 </p:sld>
 </file>
 
-<file path=ppt/slides/slide6.xml><?xml version="1.0" encoding="utf-8"?>
-<p:sld xmlns:a="http://schemas.openxmlformats.org/drawingml/2006/main" xmlns:r="http://schemas.openxmlformats.org/officeDocument/2006/relationships" xmlns:p="http://schemas.openxmlformats.org/presentationml/2006/main">
-  <p:cSld>
-    <p:spTree>
-      <p:nvGrpSpPr>
-        <p:cNvPr id="1" name=""/>
-        <p:cNvGrpSpPr/>
-        <p:nvPr/>
-      </p:nvGrpSpPr>
-      <p:grpSpPr>
-        <a:xfrm>
-          <a:off x="0" y="0"/>
-          <a:ext cx="0" cy="0"/>
-          <a:chOff x="0" y="0"/>
-          <a:chExt cx="0" cy="0"/>
-        </a:xfrm>
-      </p:grpSpPr>
-      <p:sp>
-        <p:nvSpPr>
-          <p:cNvPr id="2" name="Title 1">
-            <a:extLst>
-              <a:ext uri="{FF2B5EF4-FFF2-40B4-BE49-F238E27FC236}">
-                <a16:creationId xmlns:a16="http://schemas.microsoft.com/office/drawing/2014/main" id="{E68B6258-E5B7-46B2-B0C0-74D17CB32669}"/>
-              </a:ext>
-            </a:extLst>
-          </p:cNvPr>
-          <p:cNvSpPr>
-            <a:spLocks noGrp="1"/>
-          </p:cNvSpPr>
-          <p:nvPr>
-            <p:ph type="ctrTitle"/>
-          </p:nvPr>
-        </p:nvSpPr>
-        <p:spPr/>
-        <p:txBody>
-          <a:bodyPr>
-            <a:normAutofit fontScale="90000"/>
-          </a:bodyPr>
-          <a:lstStyle/>
-          <a:p>
-            <a:r>
-              <a:rPr lang="en-CA" dirty="0" err="1"/>
-              <a:t>Tensorflow</a:t>
-            </a:r>
-            <a:r>
-              <a:rPr lang="en-CA" dirty="0"/>
-              <a:t> and </a:t>
-            </a:r>
-            <a:r>
-              <a:rPr lang="en-CA" dirty="0" err="1"/>
-              <a:t>Keras</a:t>
-            </a:r>
-            <a:r>
-              <a:rPr lang="en-CA" dirty="0"/>
-              <a:t> Optimizations</a:t>
-            </a:r>
-            <a:endParaRPr lang="LID4096" dirty="0"/>
-          </a:p>
-        </p:txBody>
-      </p:sp>
-      <p:sp>
-        <p:nvSpPr>
-          <p:cNvPr id="3" name="Subtitle 2">
-            <a:extLst>
-              <a:ext uri="{FF2B5EF4-FFF2-40B4-BE49-F238E27FC236}">
-                <a16:creationId xmlns:a16="http://schemas.microsoft.com/office/drawing/2014/main" id="{ABA17104-0772-4130-BC10-20A91C36DBC3}"/>
-              </a:ext>
-            </a:extLst>
-          </p:cNvPr>
-          <p:cNvSpPr>
-            <a:spLocks noGrp="1"/>
-          </p:cNvSpPr>
-          <p:nvPr>
-            <p:ph type="subTitle" idx="1"/>
-          </p:nvPr>
-        </p:nvSpPr>
-        <p:spPr/>
-        <p:txBody>
-          <a:bodyPr/>
-          <a:lstStyle/>
-          <a:p>
-            <a:endParaRPr lang="LID4096"/>
-          </a:p>
-        </p:txBody>
-      </p:sp>
-    </p:spTree>
-    <p:extLst>
-      <p:ext uri="{BB962C8B-B14F-4D97-AF65-F5344CB8AC3E}">
-        <p14:creationId xmlns:p14="http://schemas.microsoft.com/office/powerpoint/2010/main" val="213059865"/>
-      </p:ext>
-    </p:extLst>
-  </p:cSld>
-  <p:clrMapOvr>
-    <a:masterClrMapping/>
-  </p:clrMapOvr>
-</p:sld>
-</file>
-
-<file path=ppt/slides/slide60.xml><?xml version="1.0" encoding="utf-8"?>
+<file path=ppt/slides/slide65.xml><?xml version="1.0" encoding="utf-8"?>
 <p:sld xmlns:a="http://schemas.openxmlformats.org/drawingml/2006/main" xmlns:r="http://schemas.openxmlformats.org/officeDocument/2006/relationships" xmlns:p="http://schemas.openxmlformats.org/presentationml/2006/main" show="0">
   <p:cSld>
     <p:spTree>
@@ -13375,7 +14212,7 @@
 </p:sld>
 </file>
 
-<file path=ppt/slides/slide61.xml><?xml version="1.0" encoding="utf-8"?>
+<file path=ppt/slides/slide66.xml><?xml version="1.0" encoding="utf-8"?>
 <p:sld xmlns:a="http://schemas.openxmlformats.org/drawingml/2006/main" xmlns:r="http://schemas.openxmlformats.org/officeDocument/2006/relationships" xmlns:p="http://schemas.openxmlformats.org/presentationml/2006/main" show="0">
   <p:cSld>
     <p:spTree>
@@ -13569,7 +14406,7 @@
 </p:sld>
 </file>
 
-<file path=ppt/slides/slide62.xml><?xml version="1.0" encoding="utf-8"?>
+<file path=ppt/slides/slide67.xml><?xml version="1.0" encoding="utf-8"?>
 <p:sld xmlns:a="http://schemas.openxmlformats.org/drawingml/2006/main" xmlns:r="http://schemas.openxmlformats.org/officeDocument/2006/relationships" xmlns:p="http://schemas.openxmlformats.org/presentationml/2006/main" show="0">
   <p:cSld>
     <p:spTree>
@@ -13730,7 +14567,7 @@
 </p:sld>
 </file>
 
-<file path=ppt/slides/slide63.xml><?xml version="1.0" encoding="utf-8"?>
+<file path=ppt/slides/slide68.xml><?xml version="1.0" encoding="utf-8"?>
 <p:sld xmlns:a="http://schemas.openxmlformats.org/drawingml/2006/main" xmlns:r="http://schemas.openxmlformats.org/officeDocument/2006/relationships" xmlns:p="http://schemas.openxmlformats.org/presentationml/2006/main" show="0">
   <p:cSld>
     <p:spTree>
@@ -13866,7 +14703,7 @@
 </p:sld>
 </file>
 
-<file path=ppt/slides/slide64.xml><?xml version="1.0" encoding="utf-8"?>
+<file path=ppt/slides/slide69.xml><?xml version="1.0" encoding="utf-8"?>
 <p:sld xmlns:a="http://schemas.openxmlformats.org/drawingml/2006/main" xmlns:r="http://schemas.openxmlformats.org/officeDocument/2006/relationships" xmlns:p="http://schemas.openxmlformats.org/presentationml/2006/main" show="0">
   <p:cSld>
     <p:spTree>
@@ -14080,7 +14917,97 @@
 </p:sld>
 </file>
 
-<file path=ppt/slides/slide65.xml><?xml version="1.0" encoding="utf-8"?>
+<file path=ppt/slides/slide7.xml><?xml version="1.0" encoding="utf-8"?>
+<p:sld xmlns:a="http://schemas.openxmlformats.org/drawingml/2006/main" xmlns:r="http://schemas.openxmlformats.org/officeDocument/2006/relationships" xmlns:p="http://schemas.openxmlformats.org/presentationml/2006/main" show="0">
+  <p:cSld>
+    <p:spTree>
+      <p:nvGrpSpPr>
+        <p:cNvPr id="1" name=""/>
+        <p:cNvGrpSpPr/>
+        <p:nvPr/>
+      </p:nvGrpSpPr>
+      <p:grpSpPr>
+        <a:xfrm>
+          <a:off x="0" y="0"/>
+          <a:ext cx="0" cy="0"/>
+          <a:chOff x="0" y="0"/>
+          <a:chExt cx="0" cy="0"/>
+        </a:xfrm>
+      </p:grpSpPr>
+      <p:sp>
+        <p:nvSpPr>
+          <p:cNvPr id="2" name="Title 1">
+            <a:extLst>
+              <a:ext uri="{FF2B5EF4-FFF2-40B4-BE49-F238E27FC236}">
+                <a16:creationId xmlns:a16="http://schemas.microsoft.com/office/drawing/2014/main" id="{2F1DC659-6159-C0C9-F9E3-8A5A1EA88C34}"/>
+              </a:ext>
+            </a:extLst>
+          </p:cNvPr>
+          <p:cNvSpPr>
+            <a:spLocks noGrp="1"/>
+          </p:cNvSpPr>
+          <p:nvPr>
+            <p:ph type="title"/>
+          </p:nvPr>
+        </p:nvSpPr>
+        <p:spPr/>
+        <p:txBody>
+          <a:bodyPr/>
+          <a:lstStyle/>
+          <a:p>
+            <a:r>
+              <a:rPr lang="en-US" dirty="0"/>
+              <a:t>But First – Get Board</a:t>
+            </a:r>
+          </a:p>
+        </p:txBody>
+      </p:sp>
+      <p:sp>
+        <p:nvSpPr>
+          <p:cNvPr id="3" name="Content Placeholder 2">
+            <a:extLst>
+              <a:ext uri="{FF2B5EF4-FFF2-40B4-BE49-F238E27FC236}">
+                <a16:creationId xmlns:a16="http://schemas.microsoft.com/office/drawing/2014/main" id="{430B4EFE-4776-DF7E-F9DA-6D3E00372B75}"/>
+              </a:ext>
+            </a:extLst>
+          </p:cNvPr>
+          <p:cNvSpPr>
+            <a:spLocks noGrp="1"/>
+          </p:cNvSpPr>
+          <p:nvPr>
+            <p:ph idx="1"/>
+          </p:nvPr>
+        </p:nvSpPr>
+        <p:spPr/>
+        <p:txBody>
+          <a:bodyPr/>
+          <a:lstStyle/>
+          <a:p>
+            <a:r>
+              <a:rPr lang="en-US" dirty="0" err="1"/>
+              <a:t>Tensorboard</a:t>
+            </a:r>
+            <a:r>
+              <a:rPr lang="en-US" dirty="0"/>
+              <a:t> is a tool we can use to monitor training. </a:t>
+            </a:r>
+          </a:p>
+        </p:txBody>
+      </p:sp>
+    </p:spTree>
+    <p:extLst>
+      <p:ext uri="{BB962C8B-B14F-4D97-AF65-F5344CB8AC3E}">
+        <p14:creationId xmlns:p14="http://schemas.microsoft.com/office/powerpoint/2010/main" val="3862673346"/>
+      </p:ext>
+    </p:extLst>
+  </p:cSld>
+  <p:clrMapOvr>
+    <a:masterClrMapping/>
+  </p:clrMapOvr>
+</p:sld>
+</file>
+
+<file path=ppt/slides/slide70.xml><?xml version="1.0" encoding="utf-8"?>
 <p:sld xmlns:a="http://schemas.openxmlformats.org/drawingml/2006/main" xmlns:r="http://schemas.openxmlformats.org/officeDocument/2006/relationships" xmlns:p="http://schemas.openxmlformats.org/presentationml/2006/main" show="0">
   <p:cSld>
     <p:spTree>
@@ -14379,7 +15306,7 @@
 </p:sld>
 </file>
 
-<file path=ppt/slides/slide66.xml><?xml version="1.0" encoding="utf-8"?>
+<file path=ppt/slides/slide71.xml><?xml version="1.0" encoding="utf-8"?>
 <p:sld xmlns:a="http://schemas.openxmlformats.org/drawingml/2006/main" xmlns:r="http://schemas.openxmlformats.org/officeDocument/2006/relationships" xmlns:p="http://schemas.openxmlformats.org/presentationml/2006/main" show="0">
   <p:cSld>
     <p:spTree>
@@ -14552,7 +15479,7 @@
 </p:sld>
 </file>
 
-<file path=ppt/slides/slide67.xml><?xml version="1.0" encoding="utf-8"?>
+<file path=ppt/slides/slide72.xml><?xml version="1.0" encoding="utf-8"?>
 <p:sld xmlns:a="http://schemas.openxmlformats.org/drawingml/2006/main" xmlns:r="http://schemas.openxmlformats.org/officeDocument/2006/relationships" xmlns:p="http://schemas.openxmlformats.org/presentationml/2006/main" show="0">
   <p:cSld>
     <p:spTree>
@@ -14679,7 +15606,7 @@
 </p:sld>
 </file>
 
-<file path=ppt/slides/slide68.xml><?xml version="1.0" encoding="utf-8"?>
+<file path=ppt/slides/slide73.xml><?xml version="1.0" encoding="utf-8"?>
 <p:sld xmlns:a="http://schemas.openxmlformats.org/drawingml/2006/main" xmlns:r="http://schemas.openxmlformats.org/officeDocument/2006/relationships" xmlns:p="http://schemas.openxmlformats.org/presentationml/2006/main" show="0">
   <p:cSld>
     <p:spTree>
@@ -14919,7 +15846,7 @@
 </p:sld>
 </file>
 
-<file path=ppt/slides/slide69.xml><?xml version="1.0" encoding="utf-8"?>
+<file path=ppt/slides/slide74.xml><?xml version="1.0" encoding="utf-8"?>
 <p:sld xmlns:a="http://schemas.openxmlformats.org/drawingml/2006/main" xmlns:r="http://schemas.openxmlformats.org/officeDocument/2006/relationships" xmlns:p="http://schemas.openxmlformats.org/presentationml/2006/main" show="0">
   <p:cSld>
     <p:spTree>
@@ -15149,168 +16076,7 @@
 </p:sld>
 </file>
 
-<file path=ppt/slides/slide7.xml><?xml version="1.0" encoding="utf-8"?>
-<p:sld xmlns:a="http://schemas.openxmlformats.org/drawingml/2006/main" xmlns:r="http://schemas.openxmlformats.org/officeDocument/2006/relationships" xmlns:p="http://schemas.openxmlformats.org/presentationml/2006/main">
-  <p:cSld>
-    <p:spTree>
-      <p:nvGrpSpPr>
-        <p:cNvPr id="1" name=""/>
-        <p:cNvGrpSpPr/>
-        <p:nvPr/>
-      </p:nvGrpSpPr>
-      <p:grpSpPr>
-        <a:xfrm>
-          <a:off x="0" y="0"/>
-          <a:ext cx="0" cy="0"/>
-          <a:chOff x="0" y="0"/>
-          <a:chExt cx="0" cy="0"/>
-        </a:xfrm>
-      </p:grpSpPr>
-      <p:sp>
-        <p:nvSpPr>
-          <p:cNvPr id="2" name="Title 1">
-            <a:extLst>
-              <a:ext uri="{FF2B5EF4-FFF2-40B4-BE49-F238E27FC236}">
-                <a16:creationId xmlns:a16="http://schemas.microsoft.com/office/drawing/2014/main" id="{2A2E4FFC-2F49-449F-85F4-087043D3C485}"/>
-              </a:ext>
-            </a:extLst>
-          </p:cNvPr>
-          <p:cNvSpPr>
-            <a:spLocks noGrp="1"/>
-          </p:cNvSpPr>
-          <p:nvPr>
-            <p:ph type="title"/>
-          </p:nvPr>
-        </p:nvSpPr>
-        <p:spPr/>
-        <p:txBody>
-          <a:bodyPr/>
-          <a:lstStyle/>
-          <a:p>
-            <a:r>
-              <a:rPr lang="en-CA" dirty="0"/>
-              <a:t>Neural Network Configuration</a:t>
-            </a:r>
-            <a:endParaRPr lang="LID4096" dirty="0"/>
-          </a:p>
-        </p:txBody>
-      </p:sp>
-      <p:sp>
-        <p:nvSpPr>
-          <p:cNvPr id="3" name="Content Placeholder 2">
-            <a:extLst>
-              <a:ext uri="{FF2B5EF4-FFF2-40B4-BE49-F238E27FC236}">
-                <a16:creationId xmlns:a16="http://schemas.microsoft.com/office/drawing/2014/main" id="{68DB43FE-383C-4ADB-B9D1-04FC825061A2}"/>
-              </a:ext>
-            </a:extLst>
-          </p:cNvPr>
-          <p:cNvSpPr>
-            <a:spLocks noGrp="1"/>
-          </p:cNvSpPr>
-          <p:nvPr>
-            <p:ph idx="1"/>
-          </p:nvPr>
-        </p:nvSpPr>
-        <p:spPr>
-          <a:xfrm>
-            <a:off x="1451579" y="1853754"/>
-            <a:ext cx="9603275" cy="4199727"/>
-          </a:xfrm>
-        </p:spPr>
-        <p:txBody>
-          <a:bodyPr>
-            <a:normAutofit lnSpcReduction="10000"/>
-          </a:bodyPr>
-          <a:lstStyle/>
-          <a:p>
-            <a:r>
-              <a:rPr lang="en-CA" dirty="0"/>
-              <a:t>We’ve seen that neural networks offer a large amount of flexibility in their configuration.</a:t>
-            </a:r>
-          </a:p>
-          <a:p>
-            <a:r>
-              <a:rPr lang="en-CA" dirty="0"/>
-              <a:t>How do we determine the optimal structure?</a:t>
-            </a:r>
-          </a:p>
-          <a:p>
-            <a:r>
-              <a:rPr lang="en-CA" dirty="0"/>
-              <a:t>Generally, the true answer is to grid search it. </a:t>
-            </a:r>
-          </a:p>
-          <a:p>
-            <a:pPr lvl="1"/>
-            <a:r>
-              <a:rPr lang="en-CA" dirty="0"/>
-              <a:t>Neural networks are very flexible, and can ‘learn around’ lots of changes. </a:t>
-            </a:r>
-          </a:p>
-          <a:p>
-            <a:r>
-              <a:rPr lang="en-CA" dirty="0"/>
-              <a:t>We can use some guidelines to get started in a reasonable and smart way. </a:t>
-            </a:r>
-          </a:p>
-          <a:p>
-            <a:pPr lvl="1"/>
-            <a:r>
-              <a:rPr lang="en-CA" dirty="0"/>
-              <a:t>Problem types (image class, NLP, </a:t>
-            </a:r>
-            <a:r>
-              <a:rPr lang="en-CA" dirty="0" err="1"/>
-              <a:t>etc</a:t>
-            </a:r>
-            <a:r>
-              <a:rPr lang="en-CA" dirty="0"/>
-              <a:t>…) have architectures that work well, and most things (except innovations) are based on what worked before. </a:t>
-            </a:r>
-          </a:p>
-          <a:p>
-            <a:r>
-              <a:rPr lang="en-CA" dirty="0"/>
-              <a:t>This is largely getting used to </a:t>
-            </a:r>
-            <a:r>
-              <a:rPr lang="en-CA" dirty="0" err="1"/>
-              <a:t>pytorch</a:t>
-            </a:r>
-            <a:r>
-              <a:rPr lang="en-CA" dirty="0"/>
-              <a:t> and making adjustments there. </a:t>
-            </a:r>
-          </a:p>
-          <a:p>
-            <a:pPr lvl="1"/>
-            <a:r>
-              <a:rPr lang="en-CA" dirty="0"/>
-              <a:t>Play around with some models, get used to syntax, try some different models. </a:t>
-            </a:r>
-          </a:p>
-          <a:p>
-            <a:r>
-              <a:rPr lang="en-CA" dirty="0"/>
-              <a:t>More of our focus is now on speed – the faster we converge, the more we can test. </a:t>
-            </a:r>
-          </a:p>
-        </p:txBody>
-      </p:sp>
-    </p:spTree>
-    <p:extLst>
-      <p:ext uri="{BB962C8B-B14F-4D97-AF65-F5344CB8AC3E}">
-        <p14:creationId xmlns:p14="http://schemas.microsoft.com/office/powerpoint/2010/main" val="2495634073"/>
-      </p:ext>
-    </p:extLst>
-  </p:cSld>
-  <p:clrMapOvr>
-    <a:masterClrMapping/>
-  </p:clrMapOvr>
-</p:sld>
-</file>
-
-<file path=ppt/slides/slide70.xml><?xml version="1.0" encoding="utf-8"?>
+<file path=ppt/slides/slide75.xml><?xml version="1.0" encoding="utf-8"?>
 <p:sld xmlns:a="http://schemas.openxmlformats.org/drawingml/2006/main" xmlns:r="http://schemas.openxmlformats.org/officeDocument/2006/relationships" xmlns:p="http://schemas.openxmlformats.org/presentationml/2006/main" show="0">
   <p:cSld>
     <p:spTree>
@@ -15443,7 +16209,7 @@
 </p:sld>
 </file>
 
-<file path=ppt/slides/slide71.xml><?xml version="1.0" encoding="utf-8"?>
+<file path=ppt/slides/slide76.xml><?xml version="1.0" encoding="utf-8"?>
 <p:sld xmlns:a="http://schemas.openxmlformats.org/drawingml/2006/main" xmlns:r="http://schemas.openxmlformats.org/officeDocument/2006/relationships" xmlns:p="http://schemas.openxmlformats.org/presentationml/2006/main" show="0">
   <p:cSld>
     <p:spTree>
@@ -15613,7 +16379,7 @@
 </p:sld>
 </file>
 
-<file path=ppt/slides/slide72.xml><?xml version="1.0" encoding="utf-8"?>
+<file path=ppt/slides/slide77.xml><?xml version="1.0" encoding="utf-8"?>
 <p:sld xmlns:a="http://schemas.openxmlformats.org/drawingml/2006/main" xmlns:r="http://schemas.openxmlformats.org/officeDocument/2006/relationships" xmlns:p="http://schemas.openxmlformats.org/presentationml/2006/main" show="0">
   <p:cSld>
     <p:spTree>
@@ -15786,7 +16552,7 @@
 </p:sld>
 </file>
 
-<file path=ppt/slides/slide73.xml><?xml version="1.0" encoding="utf-8"?>
+<file path=ppt/slides/slide78.xml><?xml version="1.0" encoding="utf-8"?>
 <p:sld xmlns:a="http://schemas.openxmlformats.org/drawingml/2006/main" xmlns:r="http://schemas.openxmlformats.org/officeDocument/2006/relationships" xmlns:p="http://schemas.openxmlformats.org/presentationml/2006/main" show="0">
   <p:cSld>
     <p:spTree>
@@ -15921,7 +16687,7 @@
 </p:sld>
 </file>
 
-<file path=ppt/slides/slide74.xml><?xml version="1.0" encoding="utf-8"?>
+<file path=ppt/slides/slide79.xml><?xml version="1.0" encoding="utf-8"?>
 <p:sld xmlns:a="http://schemas.openxmlformats.org/drawingml/2006/main" xmlns:r="http://schemas.openxmlformats.org/officeDocument/2006/relationships" xmlns:p="http://schemas.openxmlformats.org/presentationml/2006/main" show="0">
   <p:cSld>
     <p:spTree>
@@ -16064,7 +16830,168 @@
 </p:sld>
 </file>
 
-<file path=ppt/slides/slide75.xml><?xml version="1.0" encoding="utf-8"?>
+<file path=ppt/slides/slide8.xml><?xml version="1.0" encoding="utf-8"?>
+<p:sld xmlns:a="http://schemas.openxmlformats.org/drawingml/2006/main" xmlns:r="http://schemas.openxmlformats.org/officeDocument/2006/relationships" xmlns:p="http://schemas.openxmlformats.org/presentationml/2006/main">
+  <p:cSld>
+    <p:spTree>
+      <p:nvGrpSpPr>
+        <p:cNvPr id="1" name=""/>
+        <p:cNvGrpSpPr/>
+        <p:nvPr/>
+      </p:nvGrpSpPr>
+      <p:grpSpPr>
+        <a:xfrm>
+          <a:off x="0" y="0"/>
+          <a:ext cx="0" cy="0"/>
+          <a:chOff x="0" y="0"/>
+          <a:chExt cx="0" cy="0"/>
+        </a:xfrm>
+      </p:grpSpPr>
+      <p:sp>
+        <p:nvSpPr>
+          <p:cNvPr id="2" name="Title 1">
+            <a:extLst>
+              <a:ext uri="{FF2B5EF4-FFF2-40B4-BE49-F238E27FC236}">
+                <a16:creationId xmlns:a16="http://schemas.microsoft.com/office/drawing/2014/main" id="{2A2E4FFC-2F49-449F-85F4-087043D3C485}"/>
+              </a:ext>
+            </a:extLst>
+          </p:cNvPr>
+          <p:cNvSpPr>
+            <a:spLocks noGrp="1"/>
+          </p:cNvSpPr>
+          <p:nvPr>
+            <p:ph type="title"/>
+          </p:nvPr>
+        </p:nvSpPr>
+        <p:spPr/>
+        <p:txBody>
+          <a:bodyPr/>
+          <a:lstStyle/>
+          <a:p>
+            <a:r>
+              <a:rPr lang="en-CA" dirty="0"/>
+              <a:t>Neural Network Configuration</a:t>
+            </a:r>
+            <a:endParaRPr lang="LID4096" dirty="0"/>
+          </a:p>
+        </p:txBody>
+      </p:sp>
+      <p:sp>
+        <p:nvSpPr>
+          <p:cNvPr id="3" name="Content Placeholder 2">
+            <a:extLst>
+              <a:ext uri="{FF2B5EF4-FFF2-40B4-BE49-F238E27FC236}">
+                <a16:creationId xmlns:a16="http://schemas.microsoft.com/office/drawing/2014/main" id="{68DB43FE-383C-4ADB-B9D1-04FC825061A2}"/>
+              </a:ext>
+            </a:extLst>
+          </p:cNvPr>
+          <p:cNvSpPr>
+            <a:spLocks noGrp="1"/>
+          </p:cNvSpPr>
+          <p:nvPr>
+            <p:ph idx="1"/>
+          </p:nvPr>
+        </p:nvSpPr>
+        <p:spPr>
+          <a:xfrm>
+            <a:off x="1451579" y="1853754"/>
+            <a:ext cx="9603275" cy="4199727"/>
+          </a:xfrm>
+        </p:spPr>
+        <p:txBody>
+          <a:bodyPr>
+            <a:normAutofit lnSpcReduction="10000"/>
+          </a:bodyPr>
+          <a:lstStyle/>
+          <a:p>
+            <a:r>
+              <a:rPr lang="en-CA" dirty="0"/>
+              <a:t>We’ve seen that neural networks offer a large amount of flexibility in their configuration.</a:t>
+            </a:r>
+          </a:p>
+          <a:p>
+            <a:r>
+              <a:rPr lang="en-CA" dirty="0"/>
+              <a:t>How do we determine the optimal structure?</a:t>
+            </a:r>
+          </a:p>
+          <a:p>
+            <a:r>
+              <a:rPr lang="en-CA" dirty="0"/>
+              <a:t>Generally, the true answer is to grid search it. </a:t>
+            </a:r>
+          </a:p>
+          <a:p>
+            <a:pPr lvl="1"/>
+            <a:r>
+              <a:rPr lang="en-CA" dirty="0"/>
+              <a:t>Neural networks are very flexible, and can ‘learn around’ lots of changes. </a:t>
+            </a:r>
+          </a:p>
+          <a:p>
+            <a:r>
+              <a:rPr lang="en-CA" dirty="0"/>
+              <a:t>We can use some guidelines to get started in a reasonable and smart way. </a:t>
+            </a:r>
+          </a:p>
+          <a:p>
+            <a:pPr lvl="1"/>
+            <a:r>
+              <a:rPr lang="en-CA" dirty="0"/>
+              <a:t>Problem types (image class, NLP, </a:t>
+            </a:r>
+            <a:r>
+              <a:rPr lang="en-CA" dirty="0" err="1"/>
+              <a:t>etc</a:t>
+            </a:r>
+            <a:r>
+              <a:rPr lang="en-CA" dirty="0"/>
+              <a:t>…) have architectures that work well, and most things (except innovations) are based on what worked before. </a:t>
+            </a:r>
+          </a:p>
+          <a:p>
+            <a:r>
+              <a:rPr lang="en-CA" dirty="0"/>
+              <a:t>This is largely getting used to </a:t>
+            </a:r>
+            <a:r>
+              <a:rPr lang="en-CA" dirty="0" err="1"/>
+              <a:t>pytorch</a:t>
+            </a:r>
+            <a:r>
+              <a:rPr lang="en-CA" dirty="0"/>
+              <a:t> and making adjustments there. </a:t>
+            </a:r>
+          </a:p>
+          <a:p>
+            <a:pPr lvl="1"/>
+            <a:r>
+              <a:rPr lang="en-CA" dirty="0"/>
+              <a:t>Play around with some models, get used to syntax, try some different models. </a:t>
+            </a:r>
+          </a:p>
+          <a:p>
+            <a:r>
+              <a:rPr lang="en-CA" dirty="0"/>
+              <a:t>More of our focus is now on speed – the faster we converge, the more we can test. </a:t>
+            </a:r>
+          </a:p>
+        </p:txBody>
+      </p:sp>
+    </p:spTree>
+    <p:extLst>
+      <p:ext uri="{BB962C8B-B14F-4D97-AF65-F5344CB8AC3E}">
+        <p14:creationId xmlns:p14="http://schemas.microsoft.com/office/powerpoint/2010/main" val="2495634073"/>
+      </p:ext>
+    </p:extLst>
+  </p:cSld>
+  <p:clrMapOvr>
+    <a:masterClrMapping/>
+  </p:clrMapOvr>
+</p:sld>
+</file>
+
+<file path=ppt/slides/slide80.xml><?xml version="1.0" encoding="utf-8"?>
 <p:sld xmlns:a="http://schemas.openxmlformats.org/drawingml/2006/main" xmlns:r="http://schemas.openxmlformats.org/officeDocument/2006/relationships" xmlns:p="http://schemas.openxmlformats.org/presentationml/2006/main" show="0">
   <p:cSld>
     <p:spTree>
@@ -16207,7 +17134,7 @@
 </p:sld>
 </file>
 
-<file path=ppt/slides/slide76.xml><?xml version="1.0" encoding="utf-8"?>
+<file path=ppt/slides/slide81.xml><?xml version="1.0" encoding="utf-8"?>
 <p:sld xmlns:a="http://schemas.openxmlformats.org/drawingml/2006/main" xmlns:r="http://schemas.openxmlformats.org/officeDocument/2006/relationships" xmlns:p="http://schemas.openxmlformats.org/presentationml/2006/main" show="0">
   <p:cSld>
     <p:spTree>
@@ -16486,7 +17413,7 @@
 </p:sld>
 </file>
 
-<file path=ppt/slides/slide77.xml><?xml version="1.0" encoding="utf-8"?>
+<file path=ppt/slides/slide82.xml><?xml version="1.0" encoding="utf-8"?>
 <p:sld xmlns:a="http://schemas.openxmlformats.org/drawingml/2006/main" xmlns:r="http://schemas.openxmlformats.org/officeDocument/2006/relationships" xmlns:p="http://schemas.openxmlformats.org/presentationml/2006/main" show="0">
   <p:cSld>
     <p:spTree>
@@ -16751,7 +17678,7 @@
 </p:sld>
 </file>
 
-<file path=ppt/slides/slide78.xml><?xml version="1.0" encoding="utf-8"?>
+<file path=ppt/slides/slide83.xml><?xml version="1.0" encoding="utf-8"?>
 <p:sld xmlns:a="http://schemas.openxmlformats.org/drawingml/2006/main" xmlns:r="http://schemas.openxmlformats.org/officeDocument/2006/relationships" xmlns:p="http://schemas.openxmlformats.org/presentationml/2006/main" show="0">
   <p:cSld>
     <p:spTree>
@@ -17001,7 +17928,7 @@
 </p:sld>
 </file>
 
-<file path=ppt/slides/slide79.xml><?xml version="1.0" encoding="utf-8"?>
+<file path=ppt/slides/slide84.xml><?xml version="1.0" encoding="utf-8"?>
 <p:sld xmlns:a="http://schemas.openxmlformats.org/drawingml/2006/main" xmlns:r="http://schemas.openxmlformats.org/officeDocument/2006/relationships" xmlns:p="http://schemas.openxmlformats.org/presentationml/2006/main" show="0">
   <p:cSld>
     <p:spTree>
@@ -17168,252 +18095,7 @@
 </p:sld>
 </file>
 
-<file path=ppt/slides/slide8.xml><?xml version="1.0" encoding="utf-8"?>
-<p:sld xmlns:a="http://schemas.openxmlformats.org/drawingml/2006/main" xmlns:r="http://schemas.openxmlformats.org/officeDocument/2006/relationships" xmlns:p="http://schemas.openxmlformats.org/presentationml/2006/main">
-  <p:cSld>
-    <p:spTree>
-      <p:nvGrpSpPr>
-        <p:cNvPr id="1" name=""/>
-        <p:cNvGrpSpPr/>
-        <p:nvPr/>
-      </p:nvGrpSpPr>
-      <p:grpSpPr>
-        <a:xfrm>
-          <a:off x="0" y="0"/>
-          <a:ext cx="0" cy="0"/>
-          <a:chOff x="0" y="0"/>
-          <a:chExt cx="0" cy="0"/>
-        </a:xfrm>
-      </p:grpSpPr>
-      <p:sp>
-        <p:nvSpPr>
-          <p:cNvPr id="2" name="Title 1">
-            <a:extLst>
-              <a:ext uri="{FF2B5EF4-FFF2-40B4-BE49-F238E27FC236}">
-                <a16:creationId xmlns:a16="http://schemas.microsoft.com/office/drawing/2014/main" id="{17C9DA24-AFDB-91EC-071C-BF0F9957F9D3}"/>
-              </a:ext>
-            </a:extLst>
-          </p:cNvPr>
-          <p:cNvSpPr>
-            <a:spLocks noGrp="1"/>
-          </p:cNvSpPr>
-          <p:nvPr>
-            <p:ph type="title"/>
-          </p:nvPr>
-        </p:nvSpPr>
-        <p:spPr>
-          <a:xfrm>
-            <a:off x="4498428" y="804519"/>
-            <a:ext cx="6556426" cy="1049235"/>
-          </a:xfrm>
-        </p:spPr>
-        <p:txBody>
-          <a:bodyPr/>
-          <a:lstStyle/>
-          <a:p>
-            <a:r>
-              <a:rPr lang="en-US" dirty="0"/>
-              <a:t>Converging Loss Plots</a:t>
-            </a:r>
-          </a:p>
-        </p:txBody>
-      </p:sp>
-      <p:sp>
-        <p:nvSpPr>
-          <p:cNvPr id="3" name="Content Placeholder 2">
-            <a:extLst>
-              <a:ext uri="{FF2B5EF4-FFF2-40B4-BE49-F238E27FC236}">
-                <a16:creationId xmlns:a16="http://schemas.microsoft.com/office/drawing/2014/main" id="{C623E00D-8DE0-1D03-19D1-D0D541C15FFF}"/>
-              </a:ext>
-            </a:extLst>
-          </p:cNvPr>
-          <p:cNvSpPr>
-            <a:spLocks noGrp="1"/>
-          </p:cNvSpPr>
-          <p:nvPr>
-            <p:ph idx="1"/>
-          </p:nvPr>
-        </p:nvSpPr>
-        <p:spPr>
-          <a:xfrm>
-            <a:off x="4313735" y="1853754"/>
-            <a:ext cx="7666061" cy="4199727"/>
-          </a:xfrm>
-        </p:spPr>
-        <p:txBody>
-          <a:bodyPr>
-            <a:normAutofit lnSpcReduction="10000"/>
-          </a:bodyPr>
-          <a:lstStyle/>
-          <a:p>
-            <a:r>
-              <a:rPr lang="en-US" dirty="0"/>
-              <a:t>Our main tool for monitoring training is the loss plot. </a:t>
-            </a:r>
-          </a:p>
-          <a:p>
-            <a:r>
-              <a:rPr lang="en-US" dirty="0"/>
-              <a:t>We are looking for, ideally, where the validation loss flattens, or minimizes and starts to increase again. </a:t>
-            </a:r>
-          </a:p>
-          <a:p>
-            <a:pPr lvl="1"/>
-            <a:r>
-              <a:rPr lang="en-US" dirty="0"/>
-              <a:t>The more stable, the more reliable, but it won’t always get this smooth. </a:t>
-            </a:r>
-          </a:p>
-          <a:p>
-            <a:r>
-              <a:rPr lang="en-US" dirty="0"/>
-              <a:t>These show an accurate small and large model – small is more jumpy. </a:t>
-            </a:r>
-          </a:p>
-          <a:p>
-            <a:pPr lvl="1"/>
-            <a:r>
-              <a:rPr lang="en-US" dirty="0"/>
-              <a:t>Error scale on Y are very small on both. </a:t>
-            </a:r>
-          </a:p>
-          <a:p>
-            <a:r>
-              <a:rPr lang="en-US" dirty="0"/>
-              <a:t>Training loss seems to be flattening as well – convergence. </a:t>
-            </a:r>
-          </a:p>
-          <a:p>
-            <a:pPr lvl="1"/>
-            <a:r>
-              <a:rPr lang="en-US" dirty="0"/>
-              <a:t>The ball has found the low point of the gradient curve. </a:t>
-            </a:r>
-          </a:p>
-          <a:p>
-            <a:pPr lvl="1"/>
-            <a:r>
-              <a:rPr lang="en-US" dirty="0"/>
-              <a:t>It may bump around a little, but we’ve found the bottom of loss. </a:t>
-            </a:r>
-          </a:p>
-          <a:p>
-            <a:r>
-              <a:rPr lang="en-US" dirty="0"/>
-              <a:t>The smaller the gap, the less overfitting – small and stable is ideal. </a:t>
-            </a:r>
-          </a:p>
-        </p:txBody>
-      </p:sp>
-      <p:pic>
-        <p:nvPicPr>
-          <p:cNvPr id="6146" name="Picture 2" descr="enter image description here">
-            <a:extLst>
-              <a:ext uri="{FF2B5EF4-FFF2-40B4-BE49-F238E27FC236}">
-                <a16:creationId xmlns:a16="http://schemas.microsoft.com/office/drawing/2014/main" id="{7A3E84A7-7C2E-A8AD-FF45-4094130373D0}"/>
-              </a:ext>
-            </a:extLst>
-          </p:cNvPr>
-          <p:cNvPicPr>
-            <a:picLocks noChangeAspect="1" noChangeArrowheads="1"/>
-          </p:cNvPicPr>
-          <p:nvPr/>
-        </p:nvPicPr>
-        <p:blipFill>
-          <a:blip r:embed="rId2">
-            <a:extLst>
-              <a:ext uri="{28A0092B-C50C-407E-A947-70E740481C1C}">
-                <a14:useLocalDpi xmlns:a14="http://schemas.microsoft.com/office/drawing/2010/main" val="0"/>
-              </a:ext>
-            </a:extLst>
-          </a:blip>
-          <a:srcRect/>
-          <a:stretch>
-            <a:fillRect/>
-          </a:stretch>
-        </p:blipFill>
-        <p:spPr bwMode="auto">
-          <a:xfrm>
-            <a:off x="0" y="2544264"/>
-            <a:ext cx="4313736" cy="4313736"/>
-          </a:xfrm>
-          <a:prstGeom prst="rect">
-            <a:avLst/>
-          </a:prstGeom>
-          <a:noFill/>
-          <a:extLst>
-            <a:ext uri="{909E8E84-426E-40DD-AFC4-6F175D3DCCD1}">
-              <a14:hiddenFill xmlns:a14="http://schemas.microsoft.com/office/drawing/2010/main">
-                <a:solidFill>
-                  <a:srgbClr val="FFFFFF"/>
-                </a:solidFill>
-              </a14:hiddenFill>
-            </a:ext>
-          </a:extLst>
-        </p:spPr>
-      </p:pic>
-      <p:pic>
-        <p:nvPicPr>
-          <p:cNvPr id="6151" name="Picture 7" descr="shows the convergence of loss function over training and validation data |  Download Scientific Diagram">
-            <a:hlinkClick r:id="rId3"/>
-            <a:extLst>
-              <a:ext uri="{FF2B5EF4-FFF2-40B4-BE49-F238E27FC236}">
-                <a16:creationId xmlns:a16="http://schemas.microsoft.com/office/drawing/2014/main" id="{076B6416-0FE9-90B5-7369-107524A7E6AE}"/>
-              </a:ext>
-            </a:extLst>
-          </p:cNvPr>
-          <p:cNvPicPr>
-            <a:picLocks noChangeAspect="1" noChangeArrowheads="1"/>
-          </p:cNvPicPr>
-          <p:nvPr/>
-        </p:nvPicPr>
-        <p:blipFill>
-          <a:blip r:embed="rId4">
-            <a:extLst>
-              <a:ext uri="{28A0092B-C50C-407E-A947-70E740481C1C}">
-                <a14:useLocalDpi xmlns:a14="http://schemas.microsoft.com/office/drawing/2010/main" val="0"/>
-              </a:ext>
-            </a:extLst>
-          </a:blip>
-          <a:srcRect/>
-          <a:stretch>
-            <a:fillRect/>
-          </a:stretch>
-        </p:blipFill>
-        <p:spPr bwMode="auto">
-          <a:xfrm>
-            <a:off x="0" y="0"/>
-            <a:ext cx="4313737" cy="2872441"/>
-          </a:xfrm>
-          <a:prstGeom prst="rect">
-            <a:avLst/>
-          </a:prstGeom>
-          <a:noFill/>
-          <a:extLst>
-            <a:ext uri="{909E8E84-426E-40DD-AFC4-6F175D3DCCD1}">
-              <a14:hiddenFill xmlns:a14="http://schemas.microsoft.com/office/drawing/2010/main">
-                <a:solidFill>
-                  <a:srgbClr val="FFFFFF"/>
-                </a:solidFill>
-              </a14:hiddenFill>
-            </a:ext>
-          </a:extLst>
-        </p:spPr>
-      </p:pic>
-    </p:spTree>
-    <p:extLst>
-      <p:ext uri="{BB962C8B-B14F-4D97-AF65-F5344CB8AC3E}">
-        <p14:creationId xmlns:p14="http://schemas.microsoft.com/office/powerpoint/2010/main" val="2096695825"/>
-      </p:ext>
-    </p:extLst>
-  </p:cSld>
-  <p:clrMapOvr>
-    <a:masterClrMapping/>
-  </p:clrMapOvr>
-</p:sld>
-</file>
-
-<file path=ppt/slides/slide80.xml><?xml version="1.0" encoding="utf-8"?>
+<file path=ppt/slides/slide85.xml><?xml version="1.0" encoding="utf-8"?>
 <p:sld xmlns:a="http://schemas.openxmlformats.org/drawingml/2006/main" xmlns:r="http://schemas.openxmlformats.org/officeDocument/2006/relationships" xmlns:p="http://schemas.openxmlformats.org/presentationml/2006/main" show="0">
   <p:cSld>
     <p:spTree>
@@ -17634,7 +18316,7 @@
 </p:sld>
 </file>
 
-<file path=ppt/slides/slide81.xml><?xml version="1.0" encoding="utf-8"?>
+<file path=ppt/slides/slide86.xml><?xml version="1.0" encoding="utf-8"?>
 <p:sld xmlns:a="http://schemas.openxmlformats.org/drawingml/2006/main" xmlns:r="http://schemas.openxmlformats.org/officeDocument/2006/relationships" xmlns:p="http://schemas.openxmlformats.org/presentationml/2006/main" show="0">
   <p:cSld>
     <p:spTree>
@@ -17793,7 +18475,7 @@
 </p:sld>
 </file>
 
-<file path=ppt/slides/slide82.xml><?xml version="1.0" encoding="utf-8"?>
+<file path=ppt/slides/slide87.xml><?xml version="1.0" encoding="utf-8"?>
 <p:sld xmlns:a="http://schemas.openxmlformats.org/drawingml/2006/main" xmlns:r="http://schemas.openxmlformats.org/officeDocument/2006/relationships" xmlns:p="http://schemas.openxmlformats.org/presentationml/2006/main" show="0">
   <p:cSld>
     <p:spTree>
@@ -17983,7 +18665,7 @@
           <p:cNvPr id="2" name="Title 1">
             <a:extLst>
               <a:ext uri="{FF2B5EF4-FFF2-40B4-BE49-F238E27FC236}">
-                <a16:creationId xmlns:a16="http://schemas.microsoft.com/office/drawing/2014/main" id="{E42CF152-59D1-43C2-9435-C78A5207614E}"/>
+                <a16:creationId xmlns:a16="http://schemas.microsoft.com/office/drawing/2014/main" id="{17C9DA24-AFDB-91EC-071C-BF0F9957F9D3}"/>
               </a:ext>
             </a:extLst>
           </p:cNvPr>
@@ -17994,16 +18676,20 @@
             <p:ph type="title"/>
           </p:nvPr>
         </p:nvSpPr>
-        <p:spPr/>
+        <p:spPr>
+          <a:xfrm>
+            <a:off x="4498428" y="804519"/>
+            <a:ext cx="6556426" cy="1049235"/>
+          </a:xfrm>
+        </p:spPr>
         <p:txBody>
           <a:bodyPr/>
           <a:lstStyle/>
           <a:p>
             <a:r>
-              <a:rPr lang="en-CA" dirty="0"/>
-              <a:t>Network Size</a:t>
-            </a:r>
-            <a:endParaRPr lang="LID4096" dirty="0"/>
+              <a:rPr lang="en-US" dirty="0"/>
+              <a:t>Converging Loss Plots</a:t>
+            </a:r>
           </a:p>
         </p:txBody>
       </p:sp>
@@ -18012,7 +18698,7 @@
           <p:cNvPr id="3" name="Content Placeholder 2">
             <a:extLst>
               <a:ext uri="{FF2B5EF4-FFF2-40B4-BE49-F238E27FC236}">
-                <a16:creationId xmlns:a16="http://schemas.microsoft.com/office/drawing/2014/main" id="{22A90C32-B7B4-4D00-AA34-E379414D8F75}"/>
+                <a16:creationId xmlns:a16="http://schemas.microsoft.com/office/drawing/2014/main" id="{C623E00D-8DE0-1D03-19D1-D0D541C15FFF}"/>
               </a:ext>
             </a:extLst>
           </p:cNvPr>
@@ -18023,55 +18709,176 @@
             <p:ph idx="1"/>
           </p:nvPr>
         </p:nvSpPr>
-        <p:spPr/>
-        <p:txBody>
-          <a:bodyPr/>
-          <a:lstStyle/>
-          <a:p>
-            <a:r>
-              <a:rPr lang="en-CA" dirty="0"/>
-              <a:t>The first thing to look at is the network size, or capacity.</a:t>
-            </a:r>
-          </a:p>
-          <a:p>
-            <a:r>
-              <a:rPr lang="en-CA" dirty="0"/>
-              <a:t>The more neurons a network had, the higher the capacity. </a:t>
-            </a:r>
-          </a:p>
-          <a:p>
-            <a:r>
-              <a:rPr lang="en-CA" dirty="0"/>
-              <a:t>In general, larger networks need larger amounts of data, to find more complex relationships.  </a:t>
-            </a:r>
-          </a:p>
-          <a:p>
-            <a:r>
-              <a:rPr lang="en-CA" dirty="0"/>
-              <a:t>We can examine the two metrics of size:</a:t>
-            </a:r>
-          </a:p>
-          <a:p>
-            <a:pPr lvl="1"/>
-            <a:r>
-              <a:rPr lang="en-CA" dirty="0"/>
-              <a:t>Neurons per layer (width)</a:t>
-            </a:r>
-          </a:p>
-          <a:p>
-            <a:pPr lvl="1"/>
-            <a:r>
-              <a:rPr lang="en-CA" dirty="0"/>
-              <a:t>Number of layers (depth)</a:t>
-            </a:r>
-            <a:endParaRPr lang="LID4096" dirty="0"/>
-          </a:p>
-        </p:txBody>
-      </p:sp>
+        <p:spPr>
+          <a:xfrm>
+            <a:off x="4313735" y="1853754"/>
+            <a:ext cx="7666061" cy="4199727"/>
+          </a:xfrm>
+        </p:spPr>
+        <p:txBody>
+          <a:bodyPr>
+            <a:normAutofit lnSpcReduction="10000"/>
+          </a:bodyPr>
+          <a:lstStyle/>
+          <a:p>
+            <a:r>
+              <a:rPr lang="en-US" dirty="0"/>
+              <a:t>Our main tool for monitoring training is the loss plot. </a:t>
+            </a:r>
+          </a:p>
+          <a:p>
+            <a:r>
+              <a:rPr lang="en-US" dirty="0"/>
+              <a:t>We are looking for, ideally, where the validation loss flattens, or minimizes and starts to increase again. </a:t>
+            </a:r>
+          </a:p>
+          <a:p>
+            <a:pPr lvl="1"/>
+            <a:r>
+              <a:rPr lang="en-US" dirty="0"/>
+              <a:t>The more stable, the more reliable, but it won’t always get this smooth. </a:t>
+            </a:r>
+          </a:p>
+          <a:p>
+            <a:r>
+              <a:rPr lang="en-US" dirty="0"/>
+              <a:t>These show an accurate small and large model – small is more jumpy. </a:t>
+            </a:r>
+          </a:p>
+          <a:p>
+            <a:pPr lvl="1"/>
+            <a:r>
+              <a:rPr lang="en-US" dirty="0"/>
+              <a:t>Error scale on Y are very small on both. </a:t>
+            </a:r>
+          </a:p>
+          <a:p>
+            <a:r>
+              <a:rPr lang="en-US" dirty="0"/>
+              <a:t>Training loss seems to be flattening as well – convergence. </a:t>
+            </a:r>
+          </a:p>
+          <a:p>
+            <a:pPr lvl="1"/>
+            <a:r>
+              <a:rPr lang="en-US" dirty="0"/>
+              <a:t>The ball has found the low point of the gradient curve. </a:t>
+            </a:r>
+          </a:p>
+          <a:p>
+            <a:pPr lvl="1"/>
+            <a:r>
+              <a:rPr lang="en-US" dirty="0"/>
+              <a:t>It may bump around a little, but we’ve found the bottom of loss. </a:t>
+            </a:r>
+          </a:p>
+          <a:p>
+            <a:r>
+              <a:rPr lang="en-US" dirty="0"/>
+              <a:t>The smaller the gap, the less overfitting – small and stable is ideal. </a:t>
+            </a:r>
+          </a:p>
+        </p:txBody>
+      </p:sp>
+      <p:pic>
+        <p:nvPicPr>
+          <p:cNvPr id="6146" name="Picture 2" descr="enter image description here">
+            <a:extLst>
+              <a:ext uri="{FF2B5EF4-FFF2-40B4-BE49-F238E27FC236}">
+                <a16:creationId xmlns:a16="http://schemas.microsoft.com/office/drawing/2014/main" id="{7A3E84A7-7C2E-A8AD-FF45-4094130373D0}"/>
+              </a:ext>
+            </a:extLst>
+          </p:cNvPr>
+          <p:cNvPicPr>
+            <a:picLocks noChangeAspect="1" noChangeArrowheads="1"/>
+          </p:cNvPicPr>
+          <p:nvPr/>
+        </p:nvPicPr>
+        <p:blipFill>
+          <a:blip r:embed="rId2">
+            <a:extLst>
+              <a:ext uri="{28A0092B-C50C-407E-A947-70E740481C1C}">
+                <a14:useLocalDpi xmlns:a14="http://schemas.microsoft.com/office/drawing/2010/main" val="0"/>
+              </a:ext>
+            </a:extLst>
+          </a:blip>
+          <a:srcRect/>
+          <a:stretch>
+            <a:fillRect/>
+          </a:stretch>
+        </p:blipFill>
+        <p:spPr bwMode="auto">
+          <a:xfrm>
+            <a:off x="0" y="2544264"/>
+            <a:ext cx="4313736" cy="4313736"/>
+          </a:xfrm>
+          <a:prstGeom prst="rect">
+            <a:avLst/>
+          </a:prstGeom>
+          <a:noFill/>
+          <a:extLst>
+            <a:ext uri="{909E8E84-426E-40DD-AFC4-6F175D3DCCD1}">
+              <a14:hiddenFill xmlns:a14="http://schemas.microsoft.com/office/drawing/2010/main">
+                <a:solidFill>
+                  <a:srgbClr val="FFFFFF"/>
+                </a:solidFill>
+              </a14:hiddenFill>
+            </a:ext>
+          </a:extLst>
+        </p:spPr>
+      </p:pic>
+      <p:pic>
+        <p:nvPicPr>
+          <p:cNvPr id="6151" name="Picture 7" descr="shows the convergence of loss function over training and validation data |  Download Scientific Diagram">
+            <a:hlinkClick r:id="rId3"/>
+            <a:extLst>
+              <a:ext uri="{FF2B5EF4-FFF2-40B4-BE49-F238E27FC236}">
+                <a16:creationId xmlns:a16="http://schemas.microsoft.com/office/drawing/2014/main" id="{076B6416-0FE9-90B5-7369-107524A7E6AE}"/>
+              </a:ext>
+            </a:extLst>
+          </p:cNvPr>
+          <p:cNvPicPr>
+            <a:picLocks noChangeAspect="1" noChangeArrowheads="1"/>
+          </p:cNvPicPr>
+          <p:nvPr/>
+        </p:nvPicPr>
+        <p:blipFill>
+          <a:blip r:embed="rId4">
+            <a:extLst>
+              <a:ext uri="{28A0092B-C50C-407E-A947-70E740481C1C}">
+                <a14:useLocalDpi xmlns:a14="http://schemas.microsoft.com/office/drawing/2010/main" val="0"/>
+              </a:ext>
+            </a:extLst>
+          </a:blip>
+          <a:srcRect/>
+          <a:stretch>
+            <a:fillRect/>
+          </a:stretch>
+        </p:blipFill>
+        <p:spPr bwMode="auto">
+          <a:xfrm>
+            <a:off x="0" y="0"/>
+            <a:ext cx="4313737" cy="2872441"/>
+          </a:xfrm>
+          <a:prstGeom prst="rect">
+            <a:avLst/>
+          </a:prstGeom>
+          <a:noFill/>
+          <a:extLst>
+            <a:ext uri="{909E8E84-426E-40DD-AFC4-6F175D3DCCD1}">
+              <a14:hiddenFill xmlns:a14="http://schemas.microsoft.com/office/drawing/2010/main">
+                <a:solidFill>
+                  <a:srgbClr val="FFFFFF"/>
+                </a:solidFill>
+              </a14:hiddenFill>
+            </a:ext>
+          </a:extLst>
+        </p:spPr>
+      </p:pic>
     </p:spTree>
     <p:extLst>
       <p:ext uri="{BB962C8B-B14F-4D97-AF65-F5344CB8AC3E}">
-        <p14:creationId xmlns:p14="http://schemas.microsoft.com/office/powerpoint/2010/main" val="2949275183"/>
+        <p14:creationId xmlns:p14="http://schemas.microsoft.com/office/powerpoint/2010/main" val="2096695825"/>
       </p:ext>
     </p:extLst>
   </p:cSld>

--- a/reference_content/Slides/pytorch_optimization.pptx
+++ b/reference_content/Slides/pytorch_optimization.pptx
@@ -11,87 +11,91 @@
     <p:sldId id="278" r:id="rId5"/>
     <p:sldId id="277" r:id="rId6"/>
     <p:sldId id="256" r:id="rId7"/>
-    <p:sldId id="344" r:id="rId8"/>
-    <p:sldId id="257" r:id="rId9"/>
-    <p:sldId id="287" r:id="rId10"/>
-    <p:sldId id="343" r:id="rId11"/>
-    <p:sldId id="258" r:id="rId12"/>
-    <p:sldId id="259" r:id="rId13"/>
-    <p:sldId id="266" r:id="rId14"/>
-    <p:sldId id="264" r:id="rId15"/>
-    <p:sldId id="265" r:id="rId16"/>
-    <p:sldId id="279" r:id="rId17"/>
-    <p:sldId id="281" r:id="rId18"/>
-    <p:sldId id="293" r:id="rId19"/>
-    <p:sldId id="260" r:id="rId20"/>
-    <p:sldId id="289" r:id="rId21"/>
-    <p:sldId id="261" r:id="rId22"/>
-    <p:sldId id="262" r:id="rId23"/>
-    <p:sldId id="338" r:id="rId24"/>
-    <p:sldId id="282" r:id="rId25"/>
-    <p:sldId id="263" r:id="rId26"/>
-    <p:sldId id="339" r:id="rId27"/>
-    <p:sldId id="271" r:id="rId28"/>
-    <p:sldId id="274" r:id="rId29"/>
-    <p:sldId id="272" r:id="rId30"/>
-    <p:sldId id="267" r:id="rId31"/>
-    <p:sldId id="273" r:id="rId32"/>
-    <p:sldId id="275" r:id="rId33"/>
-    <p:sldId id="295" r:id="rId34"/>
-    <p:sldId id="268" r:id="rId35"/>
-    <p:sldId id="294" r:id="rId36"/>
-    <p:sldId id="276" r:id="rId37"/>
-    <p:sldId id="283" r:id="rId38"/>
-    <p:sldId id="284" r:id="rId39"/>
-    <p:sldId id="286" r:id="rId40"/>
-    <p:sldId id="285" r:id="rId41"/>
-    <p:sldId id="288" r:id="rId42"/>
-    <p:sldId id="296" r:id="rId43"/>
-    <p:sldId id="269" r:id="rId44"/>
-    <p:sldId id="340" r:id="rId45"/>
-    <p:sldId id="341" r:id="rId46"/>
-    <p:sldId id="342" r:id="rId47"/>
-    <p:sldId id="270" r:id="rId48"/>
-    <p:sldId id="298" r:id="rId49"/>
-    <p:sldId id="299" r:id="rId50"/>
-    <p:sldId id="300" r:id="rId51"/>
-    <p:sldId id="301" r:id="rId52"/>
-    <p:sldId id="302" r:id="rId53"/>
-    <p:sldId id="303" r:id="rId54"/>
-    <p:sldId id="304" r:id="rId55"/>
-    <p:sldId id="305" r:id="rId56"/>
-    <p:sldId id="306" r:id="rId57"/>
-    <p:sldId id="307" r:id="rId58"/>
-    <p:sldId id="308" r:id="rId59"/>
-    <p:sldId id="309" r:id="rId60"/>
-    <p:sldId id="310" r:id="rId61"/>
-    <p:sldId id="311" r:id="rId62"/>
-    <p:sldId id="312" r:id="rId63"/>
-    <p:sldId id="313" r:id="rId64"/>
-    <p:sldId id="314" r:id="rId65"/>
-    <p:sldId id="315" r:id="rId66"/>
-    <p:sldId id="316" r:id="rId67"/>
-    <p:sldId id="317" r:id="rId68"/>
-    <p:sldId id="318" r:id="rId69"/>
-    <p:sldId id="319" r:id="rId70"/>
-    <p:sldId id="320" r:id="rId71"/>
-    <p:sldId id="321" r:id="rId72"/>
-    <p:sldId id="322" r:id="rId73"/>
-    <p:sldId id="323" r:id="rId74"/>
-    <p:sldId id="324" r:id="rId75"/>
-    <p:sldId id="325" r:id="rId76"/>
-    <p:sldId id="326" r:id="rId77"/>
-    <p:sldId id="327" r:id="rId78"/>
-    <p:sldId id="328" r:id="rId79"/>
-    <p:sldId id="329" r:id="rId80"/>
-    <p:sldId id="330" r:id="rId81"/>
-    <p:sldId id="331" r:id="rId82"/>
-    <p:sldId id="332" r:id="rId83"/>
-    <p:sldId id="333" r:id="rId84"/>
-    <p:sldId id="334" r:id="rId85"/>
-    <p:sldId id="335" r:id="rId86"/>
-    <p:sldId id="336" r:id="rId87"/>
-    <p:sldId id="337" r:id="rId88"/>
+    <p:sldId id="345" r:id="rId8"/>
+    <p:sldId id="346" r:id="rId9"/>
+    <p:sldId id="347" r:id="rId10"/>
+    <p:sldId id="348" r:id="rId11"/>
+    <p:sldId id="340" r:id="rId12"/>
+    <p:sldId id="341" r:id="rId13"/>
+    <p:sldId id="342" r:id="rId14"/>
+    <p:sldId id="349" r:id="rId15"/>
+    <p:sldId id="257" r:id="rId16"/>
+    <p:sldId id="287" r:id="rId17"/>
+    <p:sldId id="343" r:id="rId18"/>
+    <p:sldId id="258" r:id="rId19"/>
+    <p:sldId id="259" r:id="rId20"/>
+    <p:sldId id="266" r:id="rId21"/>
+    <p:sldId id="264" r:id="rId22"/>
+    <p:sldId id="265" r:id="rId23"/>
+    <p:sldId id="279" r:id="rId24"/>
+    <p:sldId id="281" r:id="rId25"/>
+    <p:sldId id="293" r:id="rId26"/>
+    <p:sldId id="260" r:id="rId27"/>
+    <p:sldId id="289" r:id="rId28"/>
+    <p:sldId id="261" r:id="rId29"/>
+    <p:sldId id="262" r:id="rId30"/>
+    <p:sldId id="338" r:id="rId31"/>
+    <p:sldId id="282" r:id="rId32"/>
+    <p:sldId id="263" r:id="rId33"/>
+    <p:sldId id="339" r:id="rId34"/>
+    <p:sldId id="271" r:id="rId35"/>
+    <p:sldId id="274" r:id="rId36"/>
+    <p:sldId id="272" r:id="rId37"/>
+    <p:sldId id="267" r:id="rId38"/>
+    <p:sldId id="273" r:id="rId39"/>
+    <p:sldId id="275" r:id="rId40"/>
+    <p:sldId id="295" r:id="rId41"/>
+    <p:sldId id="268" r:id="rId42"/>
+    <p:sldId id="294" r:id="rId43"/>
+    <p:sldId id="276" r:id="rId44"/>
+    <p:sldId id="283" r:id="rId45"/>
+    <p:sldId id="284" r:id="rId46"/>
+    <p:sldId id="286" r:id="rId47"/>
+    <p:sldId id="285" r:id="rId48"/>
+    <p:sldId id="288" r:id="rId49"/>
+    <p:sldId id="296" r:id="rId50"/>
+    <p:sldId id="269" r:id="rId51"/>
+    <p:sldId id="270" r:id="rId52"/>
+    <p:sldId id="298" r:id="rId53"/>
+    <p:sldId id="299" r:id="rId54"/>
+    <p:sldId id="300" r:id="rId55"/>
+    <p:sldId id="301" r:id="rId56"/>
+    <p:sldId id="302" r:id="rId57"/>
+    <p:sldId id="303" r:id="rId58"/>
+    <p:sldId id="304" r:id="rId59"/>
+    <p:sldId id="305" r:id="rId60"/>
+    <p:sldId id="306" r:id="rId61"/>
+    <p:sldId id="307" r:id="rId62"/>
+    <p:sldId id="308" r:id="rId63"/>
+    <p:sldId id="309" r:id="rId64"/>
+    <p:sldId id="310" r:id="rId65"/>
+    <p:sldId id="311" r:id="rId66"/>
+    <p:sldId id="312" r:id="rId67"/>
+    <p:sldId id="313" r:id="rId68"/>
+    <p:sldId id="314" r:id="rId69"/>
+    <p:sldId id="315" r:id="rId70"/>
+    <p:sldId id="316" r:id="rId71"/>
+    <p:sldId id="317" r:id="rId72"/>
+    <p:sldId id="318" r:id="rId73"/>
+    <p:sldId id="319" r:id="rId74"/>
+    <p:sldId id="320" r:id="rId75"/>
+    <p:sldId id="321" r:id="rId76"/>
+    <p:sldId id="322" r:id="rId77"/>
+    <p:sldId id="323" r:id="rId78"/>
+    <p:sldId id="324" r:id="rId79"/>
+    <p:sldId id="325" r:id="rId80"/>
+    <p:sldId id="326" r:id="rId81"/>
+    <p:sldId id="327" r:id="rId82"/>
+    <p:sldId id="328" r:id="rId83"/>
+    <p:sldId id="329" r:id="rId84"/>
+    <p:sldId id="330" r:id="rId85"/>
+    <p:sldId id="331" r:id="rId86"/>
+    <p:sldId id="332" r:id="rId87"/>
+    <p:sldId id="333" r:id="rId88"/>
+    <p:sldId id="334" r:id="rId89"/>
+    <p:sldId id="335" r:id="rId90"/>
+    <p:sldId id="336" r:id="rId91"/>
+    <p:sldId id="337" r:id="rId92"/>
   </p:sldIdLst>
   <p:sldSz cx="12192000" cy="6858000"/>
   <p:notesSz cx="6858000" cy="9144000"/>
@@ -201,7 +205,14 @@
             <p14:sldId id="278"/>
             <p14:sldId id="277"/>
             <p14:sldId id="256"/>
-            <p14:sldId id="344"/>
+            <p14:sldId id="345"/>
+            <p14:sldId id="346"/>
+            <p14:sldId id="347"/>
+            <p14:sldId id="348"/>
+            <p14:sldId id="340"/>
+            <p14:sldId id="341"/>
+            <p14:sldId id="342"/>
+            <p14:sldId id="349"/>
             <p14:sldId id="257"/>
             <p14:sldId id="287"/>
             <p14:sldId id="343"/>
@@ -238,9 +249,6 @@
             <p14:sldId id="288"/>
             <p14:sldId id="296"/>
             <p14:sldId id="269"/>
-            <p14:sldId id="340"/>
-            <p14:sldId id="341"/>
-            <p14:sldId id="342"/>
             <p14:sldId id="270"/>
           </p14:sldIdLst>
         </p14:section>
@@ -4002,6 +4010,12 @@
           <a:p>
             <a:r>
               <a:rPr lang="en-US" dirty="0"/>
+              <a:t>Relatively complex tools, but the ideas we’re using them for is easy. </a:t>
+            </a:r>
+          </a:p>
+          <a:p>
+            <a:r>
+              <a:rPr lang="en-US" dirty="0"/>
               <a:t>There’s a new, simple, neural network assignment up. </a:t>
             </a:r>
           </a:p>
@@ -4025,7 +4039,7 @@
 </file>
 
 <file path=ppt/slides/slide10.xml><?xml version="1.0" encoding="utf-8"?>
-<p:sld xmlns:a="http://schemas.openxmlformats.org/drawingml/2006/main" xmlns:r="http://schemas.openxmlformats.org/officeDocument/2006/relationships" xmlns:p="http://schemas.openxmlformats.org/presentationml/2006/main" show="0">
+<p:sld xmlns:a="http://schemas.openxmlformats.org/drawingml/2006/main" xmlns:r="http://schemas.openxmlformats.org/officeDocument/2006/relationships" xmlns:p="http://schemas.openxmlformats.org/presentationml/2006/main">
   <p:cSld>
     <p:spTree>
       <p:nvGrpSpPr>
@@ -4046,7 +4060,7 @@
           <p:cNvPr id="2" name="Title 1">
             <a:extLst>
               <a:ext uri="{FF2B5EF4-FFF2-40B4-BE49-F238E27FC236}">
-                <a16:creationId xmlns:a16="http://schemas.microsoft.com/office/drawing/2014/main" id="{39C9DD2E-27DB-9B00-4D59-7FFF0EF55534}"/>
+                <a16:creationId xmlns:a16="http://schemas.microsoft.com/office/drawing/2014/main" id="{36F6A5E0-E9E5-0C44-1B3E-4636960FF4A3}"/>
               </a:ext>
             </a:extLst>
           </p:cNvPr>
@@ -4064,8 +4078,13 @@
           <a:p>
             <a:r>
               <a:rPr lang="en-US" dirty="0"/>
-              <a:t>Tensor</a:t>
-            </a:r>
+              <a:t>Tuning in </a:t>
+            </a:r>
+            <a:r>
+              <a:rPr lang="en-US" dirty="0" err="1"/>
+              <a:t>Tensorboard</a:t>
+            </a:r>
+            <a:endParaRPr lang="en-US" dirty="0"/>
           </a:p>
         </p:txBody>
       </p:sp>
@@ -4074,7 +4093,7 @@
           <p:cNvPr id="3" name="Content Placeholder 2">
             <a:extLst>
               <a:ext uri="{FF2B5EF4-FFF2-40B4-BE49-F238E27FC236}">
-                <a16:creationId xmlns:a16="http://schemas.microsoft.com/office/drawing/2014/main" id="{F53E50F1-2F18-D0EB-441C-35773AA85368}"/>
+                <a16:creationId xmlns:a16="http://schemas.microsoft.com/office/drawing/2014/main" id="{6BB91C44-F54C-8F08-EBFC-731A5850658E}"/>
               </a:ext>
             </a:extLst>
           </p:cNvPr>
@@ -4085,19 +4104,117 @@
             <p:ph idx="1"/>
           </p:nvPr>
         </p:nvSpPr>
-        <p:spPr/>
+        <p:spPr>
+          <a:xfrm>
+            <a:off x="7421525" y="2015732"/>
+            <a:ext cx="4678325" cy="4037749"/>
+          </a:xfrm>
+        </p:spPr>
         <p:txBody>
           <a:bodyPr/>
           <a:lstStyle/>
           <a:p>
-            <a:endParaRPr lang="en-US"/>
-          </a:p>
-        </p:txBody>
-      </p:sp>
+            <a:r>
+              <a:rPr lang="en-US" dirty="0"/>
+              <a:t>In </a:t>
+            </a:r>
+            <a:r>
+              <a:rPr lang="en-US" dirty="0" err="1"/>
+              <a:t>Tensorboard</a:t>
+            </a:r>
+            <a:r>
+              <a:rPr lang="en-US" dirty="0"/>
+              <a:t> we can use the HPARAMS section to check performance. </a:t>
+            </a:r>
+          </a:p>
+          <a:p>
+            <a:r>
+              <a:rPr lang="en-US" dirty="0"/>
+              <a:t>Visualizes the different executions through the HP choice in that model. </a:t>
+            </a:r>
+          </a:p>
+          <a:p>
+            <a:r>
+              <a:rPr lang="en-US" dirty="0"/>
+              <a:t>WE can see that ‘</a:t>
+            </a:r>
+            <a:r>
+              <a:rPr lang="en-US" dirty="0" err="1"/>
+              <a:t>adam</a:t>
+            </a:r>
+            <a:r>
+              <a:rPr lang="en-US" dirty="0"/>
+              <a:t>’ is best here. </a:t>
+            </a:r>
+          </a:p>
+          <a:p>
+            <a:pPr lvl="1"/>
+            <a:r>
+              <a:rPr lang="en-US" dirty="0"/>
+              <a:t>Lower dropouts look better. </a:t>
+            </a:r>
+          </a:p>
+          <a:p>
+            <a:pPr lvl="1"/>
+            <a:r>
+              <a:rPr lang="en-US" dirty="0"/>
+              <a:t>Units is not really clear. </a:t>
+            </a:r>
+          </a:p>
+          <a:p>
+            <a:endParaRPr lang="en-US" dirty="0"/>
+          </a:p>
+        </p:txBody>
+      </p:sp>
+      <p:pic>
+        <p:nvPicPr>
+          <p:cNvPr id="1026" name="Picture 2">
+            <a:extLst>
+              <a:ext uri="{FF2B5EF4-FFF2-40B4-BE49-F238E27FC236}">
+                <a16:creationId xmlns:a16="http://schemas.microsoft.com/office/drawing/2014/main" id="{E4C37342-7FDE-756D-CA8D-3F3490BBAB04}"/>
+              </a:ext>
+            </a:extLst>
+          </p:cNvPr>
+          <p:cNvPicPr>
+            <a:picLocks noChangeAspect="1" noChangeArrowheads="1"/>
+          </p:cNvPicPr>
+          <p:nvPr/>
+        </p:nvPicPr>
+        <p:blipFill rotWithShape="1">
+          <a:blip r:embed="rId2">
+            <a:extLst>
+              <a:ext uri="{28A0092B-C50C-407E-A947-70E740481C1C}">
+                <a14:useLocalDpi xmlns:a14="http://schemas.microsoft.com/office/drawing/2010/main" val="0"/>
+              </a:ext>
+            </a:extLst>
+          </a:blip>
+          <a:srcRect l="20058" t="16499" r="19070" b="15633"/>
+          <a:stretch/>
+        </p:blipFill>
+        <p:spPr bwMode="auto">
+          <a:xfrm>
+            <a:off x="0" y="1757928"/>
+            <a:ext cx="7421526" cy="4295553"/>
+          </a:xfrm>
+          <a:prstGeom prst="rect">
+            <a:avLst/>
+          </a:prstGeom>
+          <a:noFill/>
+          <a:extLst>
+            <a:ext uri="{909E8E84-426E-40DD-AFC4-6F175D3DCCD1}">
+              <a14:hiddenFill xmlns:a14="http://schemas.microsoft.com/office/drawing/2010/main">
+                <a:solidFill>
+                  <a:srgbClr val="FFFFFF"/>
+                </a:solidFill>
+              </a14:hiddenFill>
+            </a:ext>
+          </a:extLst>
+        </p:spPr>
+      </p:pic>
     </p:spTree>
     <p:extLst>
       <p:ext uri="{BB962C8B-B14F-4D97-AF65-F5344CB8AC3E}">
-        <p14:creationId xmlns:p14="http://schemas.microsoft.com/office/powerpoint/2010/main" val="136756413"/>
+        <p14:creationId xmlns:p14="http://schemas.microsoft.com/office/powerpoint/2010/main" val="3922660810"/>
       </p:ext>
     </p:extLst>
   </p:cSld>
@@ -4129,7 +4246,7 @@
           <p:cNvPr id="2" name="Title 1">
             <a:extLst>
               <a:ext uri="{FF2B5EF4-FFF2-40B4-BE49-F238E27FC236}">
-                <a16:creationId xmlns:a16="http://schemas.microsoft.com/office/drawing/2014/main" id="{E42CF152-59D1-43C2-9435-C78A5207614E}"/>
+                <a16:creationId xmlns:a16="http://schemas.microsoft.com/office/drawing/2014/main" id="{CA6815EB-83BE-8102-1A7B-F685E86453B7}"/>
               </a:ext>
             </a:extLst>
           </p:cNvPr>
@@ -4146,10 +4263,10 @@
           <a:lstStyle/>
           <a:p>
             <a:r>
-              <a:rPr lang="en-CA" dirty="0"/>
-              <a:t>Network Size</a:t>
-            </a:r>
-            <a:endParaRPr lang="LID4096" dirty="0"/>
+              <a:rPr lang="en-US" dirty="0" err="1"/>
+              <a:t>RayTune</a:t>
+            </a:r>
+            <a:endParaRPr lang="en-US" dirty="0"/>
           </a:p>
         </p:txBody>
       </p:sp>
@@ -4158,7 +4275,7 @@
           <p:cNvPr id="3" name="Content Placeholder 2">
             <a:extLst>
               <a:ext uri="{FF2B5EF4-FFF2-40B4-BE49-F238E27FC236}">
-                <a16:creationId xmlns:a16="http://schemas.microsoft.com/office/drawing/2014/main" id="{22A90C32-B7B4-4D00-AA34-E379414D8F75}"/>
+                <a16:creationId xmlns:a16="http://schemas.microsoft.com/office/drawing/2014/main" id="{03333832-984D-A311-6777-FBB08A772031}"/>
               </a:ext>
             </a:extLst>
           </p:cNvPr>
@@ -4169,55 +4286,134 @@
             <p:ph idx="1"/>
           </p:nvPr>
         </p:nvSpPr>
-        <p:spPr/>
+        <p:spPr>
+          <a:xfrm>
+            <a:off x="0" y="1853754"/>
+            <a:ext cx="6791089" cy="4199727"/>
+          </a:xfrm>
+        </p:spPr>
         <p:txBody>
           <a:bodyPr/>
           <a:lstStyle/>
           <a:p>
             <a:r>
-              <a:rPr lang="en-CA" dirty="0"/>
-              <a:t>The first thing to look at is the network size, or capacity.</a:t>
-            </a:r>
-          </a:p>
-          <a:p>
-            <a:r>
-              <a:rPr lang="en-CA" dirty="0"/>
-              <a:t>The more neurons a network had, the higher the capacity. </a:t>
-            </a:r>
-          </a:p>
-          <a:p>
-            <a:r>
-              <a:rPr lang="en-CA" dirty="0"/>
-              <a:t>In general, larger networks need larger amounts of data, to find more complex relationships.  </a:t>
-            </a:r>
-          </a:p>
-          <a:p>
-            <a:r>
-              <a:rPr lang="en-CA" dirty="0"/>
-              <a:t>We can examine the two metrics of size:</a:t>
-            </a:r>
-          </a:p>
-          <a:p>
-            <a:pPr lvl="1"/>
-            <a:r>
-              <a:rPr lang="en-CA" dirty="0"/>
-              <a:t>Neurons per layer (width)</a:t>
-            </a:r>
-          </a:p>
-          <a:p>
-            <a:pPr lvl="1"/>
-            <a:r>
-              <a:rPr lang="en-CA" dirty="0"/>
-              <a:t>Number of layers (depth)</a:t>
-            </a:r>
-            <a:endParaRPr lang="LID4096" dirty="0"/>
-          </a:p>
-        </p:txBody>
-      </p:sp>
+              <a:rPr lang="en-US" dirty="0"/>
+              <a:t>Hyperparameter tuning is more involved than a grid search. </a:t>
+            </a:r>
+          </a:p>
+          <a:p>
+            <a:pPr lvl="1"/>
+            <a:r>
+              <a:rPr lang="en-US" dirty="0"/>
+              <a:t>The concept is the same, the tools are different. </a:t>
+            </a:r>
+          </a:p>
+          <a:p>
+            <a:r>
+              <a:rPr lang="en-US" dirty="0" err="1"/>
+              <a:t>RayTune</a:t>
+            </a:r>
+            <a:r>
+              <a:rPr lang="en-US" dirty="0"/>
+              <a:t> allows us to setup </a:t>
+            </a:r>
+            <a:r>
+              <a:rPr lang="en-US" dirty="0" err="1"/>
+              <a:t>gridsearch</a:t>
+            </a:r>
+            <a:r>
+              <a:rPr lang="en-US" dirty="0"/>
+              <a:t>-y tuning. </a:t>
+            </a:r>
+          </a:p>
+          <a:p>
+            <a:pPr lvl="1"/>
+            <a:r>
+              <a:rPr lang="en-US" dirty="0"/>
+              <a:t>We can control basically anything if we want. </a:t>
+            </a:r>
+          </a:p>
+          <a:p>
+            <a:r>
+              <a:rPr lang="en-US" dirty="0" err="1"/>
+              <a:t>RayTune</a:t>
+            </a:r>
+            <a:r>
+              <a:rPr lang="en-US" dirty="0"/>
+              <a:t> also allows for distributed tuning. </a:t>
+            </a:r>
+          </a:p>
+          <a:p>
+            <a:pPr lvl="1"/>
+            <a:r>
+              <a:rPr lang="en-US" dirty="0"/>
+              <a:t>Train models on several systems. </a:t>
+            </a:r>
+          </a:p>
+          <a:p>
+            <a:pPr lvl="1"/>
+            <a:r>
+              <a:rPr lang="en-US" dirty="0"/>
+              <a:t>This adds some complexity, unfortunately. </a:t>
+            </a:r>
+          </a:p>
+          <a:p>
+            <a:r>
+              <a:rPr lang="en-US" dirty="0"/>
+              <a:t>The idea is relatively simple, implementation may not be. </a:t>
+            </a:r>
+          </a:p>
+          <a:p>
+            <a:r>
+              <a:rPr lang="en-US" dirty="0"/>
+              <a:t>Provides </a:t>
+            </a:r>
+            <a:r>
+              <a:rPr lang="en-US" dirty="0" err="1"/>
+              <a:t>tensorboard</a:t>
+            </a:r>
+            <a:r>
+              <a:rPr lang="en-US" dirty="0"/>
+              <a:t> logs by default. </a:t>
+            </a:r>
+          </a:p>
+        </p:txBody>
+      </p:sp>
+      <p:pic>
+        <p:nvPicPr>
+          <p:cNvPr id="4" name="Picture 3" descr="Ray Tune FAQ — Ray 2.54.0">
+            <a:extLst>
+              <a:ext uri="{FF2B5EF4-FFF2-40B4-BE49-F238E27FC236}">
+                <a16:creationId xmlns:a16="http://schemas.microsoft.com/office/drawing/2014/main" id="{72FAD165-79E1-D9D9-B2B7-BF3F25342562}"/>
+              </a:ext>
+            </a:extLst>
+          </p:cNvPr>
+          <p:cNvPicPr>
+            <a:picLocks noChangeAspect="1"/>
+          </p:cNvPicPr>
+          <p:nvPr/>
+        </p:nvPicPr>
+        <p:blipFill>
+          <a:blip r:embed="rId2"/>
+          <a:srcRect l="7927" r="3719"/>
+          <a:stretch>
+            <a:fillRect/>
+          </a:stretch>
+        </p:blipFill>
+        <p:spPr>
+          <a:xfrm>
+            <a:off x="6791089" y="2037345"/>
+            <a:ext cx="5386039" cy="3429000"/>
+          </a:xfrm>
+          <a:prstGeom prst="rect">
+            <a:avLst/>
+          </a:prstGeom>
+        </p:spPr>
+      </p:pic>
     </p:spTree>
     <p:extLst>
       <p:ext uri="{BB962C8B-B14F-4D97-AF65-F5344CB8AC3E}">
-        <p14:creationId xmlns:p14="http://schemas.microsoft.com/office/powerpoint/2010/main" val="2949275183"/>
+        <p14:creationId xmlns:p14="http://schemas.microsoft.com/office/powerpoint/2010/main" val="2886481246"/>
       </p:ext>
     </p:extLst>
   </p:cSld>
@@ -4249,6 +4445,1146 @@
           <p:cNvPr id="2" name="Title 1">
             <a:extLst>
               <a:ext uri="{FF2B5EF4-FFF2-40B4-BE49-F238E27FC236}">
+                <a16:creationId xmlns:a16="http://schemas.microsoft.com/office/drawing/2014/main" id="{454AA7E2-974D-BF5B-D830-D1067C4936BA}"/>
+              </a:ext>
+            </a:extLst>
+          </p:cNvPr>
+          <p:cNvSpPr>
+            <a:spLocks noGrp="1"/>
+          </p:cNvSpPr>
+          <p:nvPr>
+            <p:ph type="title"/>
+          </p:nvPr>
+        </p:nvSpPr>
+        <p:spPr/>
+        <p:txBody>
+          <a:bodyPr/>
+          <a:lstStyle/>
+          <a:p>
+            <a:r>
+              <a:rPr lang="en-US" dirty="0" err="1"/>
+              <a:t>RayTune</a:t>
+            </a:r>
+            <a:r>
+              <a:rPr lang="en-US" dirty="0"/>
+              <a:t> Setup</a:t>
+            </a:r>
+          </a:p>
+        </p:txBody>
+      </p:sp>
+      <p:sp>
+        <p:nvSpPr>
+          <p:cNvPr id="3" name="Content Placeholder 2">
+            <a:extLst>
+              <a:ext uri="{FF2B5EF4-FFF2-40B4-BE49-F238E27FC236}">
+                <a16:creationId xmlns:a16="http://schemas.microsoft.com/office/drawing/2014/main" id="{59494532-C744-DBCF-365D-9581E52BC2CA}"/>
+              </a:ext>
+            </a:extLst>
+          </p:cNvPr>
+          <p:cNvSpPr>
+            <a:spLocks noGrp="1"/>
+          </p:cNvSpPr>
+          <p:nvPr>
+            <p:ph idx="1"/>
+          </p:nvPr>
+        </p:nvSpPr>
+        <p:spPr>
+          <a:xfrm>
+            <a:off x="5710683" y="1853754"/>
+            <a:ext cx="6481317" cy="4335173"/>
+          </a:xfrm>
+        </p:spPr>
+        <p:txBody>
+          <a:bodyPr/>
+          <a:lstStyle/>
+          <a:p>
+            <a:r>
+              <a:rPr lang="en-US" dirty="0"/>
+              <a:t>We setup a ‘tunable’, usually* a loop. </a:t>
+            </a:r>
+          </a:p>
+          <a:p>
+            <a:pPr lvl="1"/>
+            <a:r>
+              <a:rPr lang="en-US" dirty="0"/>
+              <a:t>This loop ‘does’ all the model stuff – create, </a:t>
+            </a:r>
+            <a:r>
+              <a:rPr lang="en-US" dirty="0" err="1"/>
+              <a:t>dataloaders</a:t>
+            </a:r>
+            <a:r>
+              <a:rPr lang="en-US" dirty="0"/>
+              <a:t>, optimizer, </a:t>
+            </a:r>
+            <a:r>
+              <a:rPr lang="en-US" dirty="0" err="1"/>
+              <a:t>etc</a:t>
+            </a:r>
+            <a:r>
+              <a:rPr lang="en-US" dirty="0"/>
+              <a:t>…</a:t>
+            </a:r>
+          </a:p>
+          <a:p>
+            <a:pPr lvl="1"/>
+            <a:r>
+              <a:rPr lang="en-US" dirty="0"/>
+              <a:t>The all-in-a-loop thing allows for dist. training.</a:t>
+            </a:r>
+          </a:p>
+          <a:p>
+            <a:r>
+              <a:rPr lang="en-US" dirty="0"/>
+              <a:t>We add variables and a </a:t>
+            </a:r>
+            <a:r>
+              <a:rPr lang="en-US" dirty="0" err="1"/>
+              <a:t>gridsearch</a:t>
+            </a:r>
+            <a:r>
+              <a:rPr lang="en-US" dirty="0"/>
+              <a:t>-y space. </a:t>
+            </a:r>
+          </a:p>
+          <a:p>
+            <a:pPr lvl="1"/>
+            <a:r>
+              <a:rPr lang="en-US" dirty="0"/>
+              <a:t>E.g. config - </a:t>
+            </a:r>
+            <a:r>
+              <a:rPr lang="en-US" dirty="0" err="1"/>
+              <a:t>num_filters</a:t>
+            </a:r>
+            <a:r>
+              <a:rPr lang="en-US" dirty="0"/>
+              <a:t>, </a:t>
+            </a:r>
+            <a:r>
+              <a:rPr lang="en-US" dirty="0" err="1"/>
+              <a:t>dropout_rate</a:t>
+            </a:r>
+            <a:r>
+              <a:rPr lang="en-US" dirty="0"/>
+              <a:t>, </a:t>
+            </a:r>
+            <a:r>
+              <a:rPr lang="en-US" dirty="0" err="1"/>
+              <a:t>fc_size</a:t>
+            </a:r>
+            <a:r>
+              <a:rPr lang="en-US" dirty="0"/>
+              <a:t>. </a:t>
+            </a:r>
+          </a:p>
+          <a:p>
+            <a:pPr lvl="1"/>
+            <a:r>
+              <a:rPr lang="en-US" dirty="0"/>
+              <a:t>Each run selects a value from the search space provided. </a:t>
+            </a:r>
+          </a:p>
+          <a:p>
+            <a:pPr lvl="1"/>
+            <a:r>
+              <a:rPr lang="en-US" dirty="0"/>
+              <a:t>Select from list, number within range, random, </a:t>
+            </a:r>
+            <a:r>
+              <a:rPr lang="en-US" dirty="0" err="1"/>
+              <a:t>etc</a:t>
+            </a:r>
+            <a:r>
+              <a:rPr lang="en-US" dirty="0"/>
+              <a:t>…</a:t>
+            </a:r>
+          </a:p>
+          <a:p>
+            <a:r>
+              <a:rPr lang="en-US" dirty="0"/>
+              <a:t>Can add schedulers to manage the training – e.g. cutoff bad trials early. There’s lots more, we only use a bit. </a:t>
+            </a:r>
+          </a:p>
+        </p:txBody>
+      </p:sp>
+      <p:pic>
+        <p:nvPicPr>
+          <p:cNvPr id="4" name="Picture 3">
+            <a:extLst>
+              <a:ext uri="{FF2B5EF4-FFF2-40B4-BE49-F238E27FC236}">
+                <a16:creationId xmlns:a16="http://schemas.microsoft.com/office/drawing/2014/main" id="{19468D9F-1FCF-F023-9ECE-2B2298977832}"/>
+              </a:ext>
+            </a:extLst>
+          </p:cNvPr>
+          <p:cNvPicPr>
+            <a:picLocks noChangeAspect="1"/>
+          </p:cNvPicPr>
+          <p:nvPr/>
+        </p:nvPicPr>
+        <p:blipFill>
+          <a:blip r:embed="rId2"/>
+          <a:stretch>
+            <a:fillRect/>
+          </a:stretch>
+        </p:blipFill>
+        <p:spPr>
+          <a:xfrm>
+            <a:off x="0" y="1549830"/>
+            <a:ext cx="5710684" cy="5308169"/>
+          </a:xfrm>
+          <a:prstGeom prst="rect">
+            <a:avLst/>
+          </a:prstGeom>
+        </p:spPr>
+      </p:pic>
+      <p:pic>
+        <p:nvPicPr>
+          <p:cNvPr id="5" name="Picture 4">
+            <a:extLst>
+              <a:ext uri="{FF2B5EF4-FFF2-40B4-BE49-F238E27FC236}">
+                <a16:creationId xmlns:a16="http://schemas.microsoft.com/office/drawing/2014/main" id="{8BB37C52-FF28-6620-D280-94DD179D20D7}"/>
+              </a:ext>
+            </a:extLst>
+          </p:cNvPr>
+          <p:cNvPicPr>
+            <a:picLocks noChangeAspect="1"/>
+          </p:cNvPicPr>
+          <p:nvPr/>
+        </p:nvPicPr>
+        <p:blipFill>
+          <a:blip r:embed="rId3"/>
+          <a:stretch>
+            <a:fillRect/>
+          </a:stretch>
+        </p:blipFill>
+        <p:spPr>
+          <a:xfrm>
+            <a:off x="7796401" y="0"/>
+            <a:ext cx="4395599" cy="1798582"/>
+          </a:xfrm>
+          <a:prstGeom prst="rect">
+            <a:avLst/>
+          </a:prstGeom>
+        </p:spPr>
+      </p:pic>
+    </p:spTree>
+    <p:extLst>
+      <p:ext uri="{BB962C8B-B14F-4D97-AF65-F5344CB8AC3E}">
+        <p14:creationId xmlns:p14="http://schemas.microsoft.com/office/powerpoint/2010/main" val="700211047"/>
+      </p:ext>
+    </p:extLst>
+  </p:cSld>
+  <p:clrMapOvr>
+    <a:masterClrMapping/>
+  </p:clrMapOvr>
+</p:sld>
+</file>
+
+<file path=ppt/slides/slide13.xml><?xml version="1.0" encoding="utf-8"?>
+<p:sld xmlns:a="http://schemas.openxmlformats.org/drawingml/2006/main" xmlns:r="http://schemas.openxmlformats.org/officeDocument/2006/relationships" xmlns:p="http://schemas.openxmlformats.org/presentationml/2006/main">
+  <p:cSld>
+    <p:spTree>
+      <p:nvGrpSpPr>
+        <p:cNvPr id="1" name=""/>
+        <p:cNvGrpSpPr/>
+        <p:nvPr/>
+      </p:nvGrpSpPr>
+      <p:grpSpPr>
+        <a:xfrm>
+          <a:off x="0" y="0"/>
+          <a:ext cx="0" cy="0"/>
+          <a:chOff x="0" y="0"/>
+          <a:chExt cx="0" cy="0"/>
+        </a:xfrm>
+      </p:grpSpPr>
+      <p:sp>
+        <p:nvSpPr>
+          <p:cNvPr id="2" name="Title 1">
+            <a:extLst>
+              <a:ext uri="{FF2B5EF4-FFF2-40B4-BE49-F238E27FC236}">
+                <a16:creationId xmlns:a16="http://schemas.microsoft.com/office/drawing/2014/main" id="{057D06E3-E747-D735-F22D-0975BCAF2173}"/>
+              </a:ext>
+            </a:extLst>
+          </p:cNvPr>
+          <p:cNvSpPr>
+            <a:spLocks noGrp="1"/>
+          </p:cNvSpPr>
+          <p:nvPr>
+            <p:ph type="title"/>
+          </p:nvPr>
+        </p:nvSpPr>
+        <p:spPr/>
+        <p:txBody>
+          <a:bodyPr/>
+          <a:lstStyle/>
+          <a:p>
+            <a:r>
+              <a:rPr lang="en-US" dirty="0"/>
+              <a:t>Using </a:t>
+            </a:r>
+            <a:r>
+              <a:rPr lang="en-US" dirty="0" err="1"/>
+              <a:t>Raytune</a:t>
+            </a:r>
+            <a:endParaRPr lang="en-US" dirty="0"/>
+          </a:p>
+        </p:txBody>
+      </p:sp>
+      <p:sp>
+        <p:nvSpPr>
+          <p:cNvPr id="3" name="Content Placeholder 2">
+            <a:extLst>
+              <a:ext uri="{FF2B5EF4-FFF2-40B4-BE49-F238E27FC236}">
+                <a16:creationId xmlns:a16="http://schemas.microsoft.com/office/drawing/2014/main" id="{4FC45783-8E67-E1C8-9D34-633455F1E166}"/>
+              </a:ext>
+            </a:extLst>
+          </p:cNvPr>
+          <p:cNvSpPr>
+            <a:spLocks noGrp="1"/>
+          </p:cNvSpPr>
+          <p:nvPr>
+            <p:ph idx="1"/>
+          </p:nvPr>
+        </p:nvSpPr>
+        <p:spPr>
+          <a:xfrm>
+            <a:off x="1451579" y="1940312"/>
+            <a:ext cx="10023026" cy="4113169"/>
+          </a:xfrm>
+        </p:spPr>
+        <p:txBody>
+          <a:bodyPr>
+            <a:normAutofit fontScale="92500" lnSpcReduction="10000"/>
+          </a:bodyPr>
+          <a:lstStyle/>
+          <a:p>
+            <a:r>
+              <a:rPr lang="en-US" dirty="0"/>
+              <a:t>Using </a:t>
+            </a:r>
+            <a:r>
+              <a:rPr lang="en-US" dirty="0" err="1"/>
+              <a:t>raytune</a:t>
+            </a:r>
+            <a:r>
+              <a:rPr lang="en-US" dirty="0"/>
+              <a:t> is kind of annoying at first, the capability adds some complexity. </a:t>
+            </a:r>
+          </a:p>
+          <a:p>
+            <a:pPr lvl="1"/>
+            <a:r>
+              <a:rPr lang="en-US" dirty="0"/>
+              <a:t>Memory management and serializable errors are easy to make*. </a:t>
+            </a:r>
+          </a:p>
+          <a:p>
+            <a:pPr lvl="1"/>
+            <a:r>
+              <a:rPr lang="en-US" dirty="0"/>
+              <a:t>There’s several ways to do things. </a:t>
+            </a:r>
+          </a:p>
+          <a:p>
+            <a:pPr lvl="1"/>
+            <a:r>
+              <a:rPr lang="en-US" dirty="0"/>
+              <a:t>Need to allow everything to be split to different systems makes it more complex. </a:t>
+            </a:r>
+          </a:p>
+          <a:p>
+            <a:r>
+              <a:rPr lang="en-US" dirty="0"/>
+              <a:t>The time demands are often large, so make the search space as smart as possible. </a:t>
+            </a:r>
+          </a:p>
+          <a:p>
+            <a:pPr lvl="1"/>
+            <a:r>
+              <a:rPr lang="en-US" dirty="0"/>
+              <a:t>Ensure GPU if on </a:t>
+            </a:r>
+            <a:r>
+              <a:rPr lang="en-US" dirty="0" err="1"/>
+              <a:t>colab</a:t>
+            </a:r>
+            <a:r>
+              <a:rPr lang="en-US" dirty="0"/>
+              <a:t>, not automatically enabled. </a:t>
+            </a:r>
+          </a:p>
+          <a:p>
+            <a:r>
+              <a:rPr lang="en-US" dirty="0"/>
+              <a:t>Don’t tell anyone I said this, but the infrastructure code around </a:t>
+            </a:r>
+            <a:r>
+              <a:rPr lang="en-US" dirty="0" err="1"/>
+              <a:t>raytune</a:t>
+            </a:r>
+            <a:r>
+              <a:rPr lang="en-US" dirty="0"/>
+              <a:t> is a good LLM use. </a:t>
+            </a:r>
+          </a:p>
+          <a:p>
+            <a:pPr lvl="1"/>
+            <a:r>
+              <a:rPr lang="en-US" dirty="0"/>
+              <a:t>Along with crawling file systems, regular expressions, and UI things you rarely need. </a:t>
+            </a:r>
+          </a:p>
+          <a:p>
+            <a:pPr lvl="1"/>
+            <a:r>
+              <a:rPr lang="en-US" dirty="0"/>
+              <a:t>You still want to define the model, search space, and datasets at a minimum. </a:t>
+            </a:r>
+          </a:p>
+          <a:p>
+            <a:pPr lvl="1"/>
+            <a:r>
+              <a:rPr lang="en-US" dirty="0"/>
+              <a:t>The stuff around tuner, scheduler, etc... Isn’t insanely complex, but it is finicky. </a:t>
+            </a:r>
+          </a:p>
+          <a:p>
+            <a:pPr lvl="1"/>
+            <a:r>
+              <a:rPr lang="en-US" dirty="0"/>
+              <a:t>If you understand the concept, and can adjust code, that stuff is AI-OK™ </a:t>
+            </a:r>
+          </a:p>
+        </p:txBody>
+      </p:sp>
+    </p:spTree>
+    <p:extLst>
+      <p:ext uri="{BB962C8B-B14F-4D97-AF65-F5344CB8AC3E}">
+        <p14:creationId xmlns:p14="http://schemas.microsoft.com/office/powerpoint/2010/main" val="1470456275"/>
+      </p:ext>
+    </p:extLst>
+  </p:cSld>
+  <p:clrMapOvr>
+    <a:masterClrMapping/>
+  </p:clrMapOvr>
+</p:sld>
+</file>
+
+<file path=ppt/slides/slide14.xml><?xml version="1.0" encoding="utf-8"?>
+<p:sld xmlns:a="http://schemas.openxmlformats.org/drawingml/2006/main" xmlns:r="http://schemas.openxmlformats.org/officeDocument/2006/relationships" xmlns:p="http://schemas.openxmlformats.org/presentationml/2006/main">
+  <p:cSld>
+    <p:spTree>
+      <p:nvGrpSpPr>
+        <p:cNvPr id="1" name=""/>
+        <p:cNvGrpSpPr/>
+        <p:nvPr/>
+      </p:nvGrpSpPr>
+      <p:grpSpPr>
+        <a:xfrm>
+          <a:off x="0" y="0"/>
+          <a:ext cx="0" cy="0"/>
+          <a:chOff x="0" y="0"/>
+          <a:chExt cx="0" cy="0"/>
+        </a:xfrm>
+      </p:grpSpPr>
+      <p:sp>
+        <p:nvSpPr>
+          <p:cNvPr id="2" name="Title 1">
+            <a:extLst>
+              <a:ext uri="{FF2B5EF4-FFF2-40B4-BE49-F238E27FC236}">
+                <a16:creationId xmlns:a16="http://schemas.microsoft.com/office/drawing/2014/main" id="{103561E1-5678-105F-E4D8-1E83397A0115}"/>
+              </a:ext>
+            </a:extLst>
+          </p:cNvPr>
+          <p:cNvSpPr>
+            <a:spLocks noGrp="1"/>
+          </p:cNvSpPr>
+          <p:nvPr>
+            <p:ph type="title"/>
+          </p:nvPr>
+        </p:nvSpPr>
+        <p:spPr/>
+        <p:txBody>
+          <a:bodyPr/>
+          <a:lstStyle/>
+          <a:p>
+            <a:r>
+              <a:rPr lang="en-US" dirty="0"/>
+              <a:t>Tuning Neural Networks</a:t>
+            </a:r>
+          </a:p>
+        </p:txBody>
+      </p:sp>
+      <p:sp>
+        <p:nvSpPr>
+          <p:cNvPr id="3" name="Content Placeholder 2">
+            <a:extLst>
+              <a:ext uri="{FF2B5EF4-FFF2-40B4-BE49-F238E27FC236}">
+                <a16:creationId xmlns:a16="http://schemas.microsoft.com/office/drawing/2014/main" id="{804EEE23-3EB2-AD4E-973A-1D63D7895054}"/>
+              </a:ext>
+            </a:extLst>
+          </p:cNvPr>
+          <p:cNvSpPr>
+            <a:spLocks noGrp="1"/>
+          </p:cNvSpPr>
+          <p:nvPr>
+            <p:ph idx="1"/>
+          </p:nvPr>
+        </p:nvSpPr>
+        <p:spPr/>
+        <p:txBody>
+          <a:bodyPr/>
+          <a:lstStyle/>
+          <a:p>
+            <a:endParaRPr lang="en-US"/>
+          </a:p>
+        </p:txBody>
+      </p:sp>
+    </p:spTree>
+    <p:extLst>
+      <p:ext uri="{BB962C8B-B14F-4D97-AF65-F5344CB8AC3E}">
+        <p14:creationId xmlns:p14="http://schemas.microsoft.com/office/powerpoint/2010/main" val="272798605"/>
+      </p:ext>
+    </p:extLst>
+  </p:cSld>
+  <p:clrMapOvr>
+    <a:masterClrMapping/>
+  </p:clrMapOvr>
+</p:sld>
+</file>
+
+<file path=ppt/slides/slide15.xml><?xml version="1.0" encoding="utf-8"?>
+<p:sld xmlns:a="http://schemas.openxmlformats.org/drawingml/2006/main" xmlns:r="http://schemas.openxmlformats.org/officeDocument/2006/relationships" xmlns:p="http://schemas.openxmlformats.org/presentationml/2006/main">
+  <p:cSld>
+    <p:spTree>
+      <p:nvGrpSpPr>
+        <p:cNvPr id="1" name=""/>
+        <p:cNvGrpSpPr/>
+        <p:nvPr/>
+      </p:nvGrpSpPr>
+      <p:grpSpPr>
+        <a:xfrm>
+          <a:off x="0" y="0"/>
+          <a:ext cx="0" cy="0"/>
+          <a:chOff x="0" y="0"/>
+          <a:chExt cx="0" cy="0"/>
+        </a:xfrm>
+      </p:grpSpPr>
+      <p:sp>
+        <p:nvSpPr>
+          <p:cNvPr id="2" name="Title 1">
+            <a:extLst>
+              <a:ext uri="{FF2B5EF4-FFF2-40B4-BE49-F238E27FC236}">
+                <a16:creationId xmlns:a16="http://schemas.microsoft.com/office/drawing/2014/main" id="{2A2E4FFC-2F49-449F-85F4-087043D3C485}"/>
+              </a:ext>
+            </a:extLst>
+          </p:cNvPr>
+          <p:cNvSpPr>
+            <a:spLocks noGrp="1"/>
+          </p:cNvSpPr>
+          <p:nvPr>
+            <p:ph type="title"/>
+          </p:nvPr>
+        </p:nvSpPr>
+        <p:spPr/>
+        <p:txBody>
+          <a:bodyPr/>
+          <a:lstStyle/>
+          <a:p>
+            <a:r>
+              <a:rPr lang="en-CA" dirty="0"/>
+              <a:t>Neural Network Configuration</a:t>
+            </a:r>
+            <a:endParaRPr lang="LID4096" dirty="0"/>
+          </a:p>
+        </p:txBody>
+      </p:sp>
+      <p:sp>
+        <p:nvSpPr>
+          <p:cNvPr id="3" name="Content Placeholder 2">
+            <a:extLst>
+              <a:ext uri="{FF2B5EF4-FFF2-40B4-BE49-F238E27FC236}">
+                <a16:creationId xmlns:a16="http://schemas.microsoft.com/office/drawing/2014/main" id="{68DB43FE-383C-4ADB-B9D1-04FC825061A2}"/>
+              </a:ext>
+            </a:extLst>
+          </p:cNvPr>
+          <p:cNvSpPr>
+            <a:spLocks noGrp="1"/>
+          </p:cNvSpPr>
+          <p:nvPr>
+            <p:ph idx="1"/>
+          </p:nvPr>
+        </p:nvSpPr>
+        <p:spPr>
+          <a:xfrm>
+            <a:off x="1451579" y="1853754"/>
+            <a:ext cx="9603275" cy="4199727"/>
+          </a:xfrm>
+        </p:spPr>
+        <p:txBody>
+          <a:bodyPr>
+            <a:normAutofit lnSpcReduction="10000"/>
+          </a:bodyPr>
+          <a:lstStyle/>
+          <a:p>
+            <a:r>
+              <a:rPr lang="en-CA" dirty="0"/>
+              <a:t>We’ve seen that neural networks offer a large amount of flexibility in their configuration.</a:t>
+            </a:r>
+          </a:p>
+          <a:p>
+            <a:r>
+              <a:rPr lang="en-CA" dirty="0"/>
+              <a:t>How do we determine the optimal structure?</a:t>
+            </a:r>
+          </a:p>
+          <a:p>
+            <a:r>
+              <a:rPr lang="en-CA" dirty="0"/>
+              <a:t>Generally, the true answer is to grid search it. </a:t>
+            </a:r>
+          </a:p>
+          <a:p>
+            <a:pPr lvl="1"/>
+            <a:r>
+              <a:rPr lang="en-CA" dirty="0"/>
+              <a:t>Neural networks are very flexible, and can ‘learn around’ lots of changes. </a:t>
+            </a:r>
+          </a:p>
+          <a:p>
+            <a:r>
+              <a:rPr lang="en-CA" dirty="0"/>
+              <a:t>We can use some guidelines to get started in a reasonable and smart way. </a:t>
+            </a:r>
+          </a:p>
+          <a:p>
+            <a:pPr lvl="1"/>
+            <a:r>
+              <a:rPr lang="en-CA" dirty="0"/>
+              <a:t>Problem types (image class, NLP, </a:t>
+            </a:r>
+            <a:r>
+              <a:rPr lang="en-CA" dirty="0" err="1"/>
+              <a:t>etc</a:t>
+            </a:r>
+            <a:r>
+              <a:rPr lang="en-CA" dirty="0"/>
+              <a:t>…) have architectures that work well, and most things (except innovations) are based on what worked before. </a:t>
+            </a:r>
+          </a:p>
+          <a:p>
+            <a:r>
+              <a:rPr lang="en-CA" dirty="0"/>
+              <a:t>This is largely getting used to </a:t>
+            </a:r>
+            <a:r>
+              <a:rPr lang="en-CA" dirty="0" err="1"/>
+              <a:t>pytorch</a:t>
+            </a:r>
+            <a:r>
+              <a:rPr lang="en-CA" dirty="0"/>
+              <a:t> and making adjustments there. </a:t>
+            </a:r>
+          </a:p>
+          <a:p>
+            <a:pPr lvl="1"/>
+            <a:r>
+              <a:rPr lang="en-CA" dirty="0"/>
+              <a:t>Play around with some models, get used to syntax, try some different models. </a:t>
+            </a:r>
+          </a:p>
+          <a:p>
+            <a:r>
+              <a:rPr lang="en-CA" dirty="0"/>
+              <a:t>More of our focus is now on speed – the faster we converge, the more we can test. </a:t>
+            </a:r>
+          </a:p>
+        </p:txBody>
+      </p:sp>
+    </p:spTree>
+    <p:extLst>
+      <p:ext uri="{BB962C8B-B14F-4D97-AF65-F5344CB8AC3E}">
+        <p14:creationId xmlns:p14="http://schemas.microsoft.com/office/powerpoint/2010/main" val="2495634073"/>
+      </p:ext>
+    </p:extLst>
+  </p:cSld>
+  <p:clrMapOvr>
+    <a:masterClrMapping/>
+  </p:clrMapOvr>
+</p:sld>
+</file>
+
+<file path=ppt/slides/slide16.xml><?xml version="1.0" encoding="utf-8"?>
+<p:sld xmlns:a="http://schemas.openxmlformats.org/drawingml/2006/main" xmlns:r="http://schemas.openxmlformats.org/officeDocument/2006/relationships" xmlns:p="http://schemas.openxmlformats.org/presentationml/2006/main">
+  <p:cSld>
+    <p:spTree>
+      <p:nvGrpSpPr>
+        <p:cNvPr id="1" name=""/>
+        <p:cNvGrpSpPr/>
+        <p:nvPr/>
+      </p:nvGrpSpPr>
+      <p:grpSpPr>
+        <a:xfrm>
+          <a:off x="0" y="0"/>
+          <a:ext cx="0" cy="0"/>
+          <a:chOff x="0" y="0"/>
+          <a:chExt cx="0" cy="0"/>
+        </a:xfrm>
+      </p:grpSpPr>
+      <p:sp>
+        <p:nvSpPr>
+          <p:cNvPr id="2" name="Title 1">
+            <a:extLst>
+              <a:ext uri="{FF2B5EF4-FFF2-40B4-BE49-F238E27FC236}">
+                <a16:creationId xmlns:a16="http://schemas.microsoft.com/office/drawing/2014/main" id="{17C9DA24-AFDB-91EC-071C-BF0F9957F9D3}"/>
+              </a:ext>
+            </a:extLst>
+          </p:cNvPr>
+          <p:cNvSpPr>
+            <a:spLocks noGrp="1"/>
+          </p:cNvSpPr>
+          <p:nvPr>
+            <p:ph type="title"/>
+          </p:nvPr>
+        </p:nvSpPr>
+        <p:spPr>
+          <a:xfrm>
+            <a:off x="4498428" y="804519"/>
+            <a:ext cx="6556426" cy="1049235"/>
+          </a:xfrm>
+        </p:spPr>
+        <p:txBody>
+          <a:bodyPr/>
+          <a:lstStyle/>
+          <a:p>
+            <a:r>
+              <a:rPr lang="en-US" dirty="0"/>
+              <a:t>Converging Loss Plots</a:t>
+            </a:r>
+          </a:p>
+        </p:txBody>
+      </p:sp>
+      <p:sp>
+        <p:nvSpPr>
+          <p:cNvPr id="3" name="Content Placeholder 2">
+            <a:extLst>
+              <a:ext uri="{FF2B5EF4-FFF2-40B4-BE49-F238E27FC236}">
+                <a16:creationId xmlns:a16="http://schemas.microsoft.com/office/drawing/2014/main" id="{C623E00D-8DE0-1D03-19D1-D0D541C15FFF}"/>
+              </a:ext>
+            </a:extLst>
+          </p:cNvPr>
+          <p:cNvSpPr>
+            <a:spLocks noGrp="1"/>
+          </p:cNvSpPr>
+          <p:nvPr>
+            <p:ph idx="1"/>
+          </p:nvPr>
+        </p:nvSpPr>
+        <p:spPr>
+          <a:xfrm>
+            <a:off x="4313735" y="1853754"/>
+            <a:ext cx="7666061" cy="4199727"/>
+          </a:xfrm>
+        </p:spPr>
+        <p:txBody>
+          <a:bodyPr>
+            <a:normAutofit lnSpcReduction="10000"/>
+          </a:bodyPr>
+          <a:lstStyle/>
+          <a:p>
+            <a:r>
+              <a:rPr lang="en-US" dirty="0"/>
+              <a:t>Our main tool for monitoring training is the loss plot. </a:t>
+            </a:r>
+          </a:p>
+          <a:p>
+            <a:r>
+              <a:rPr lang="en-US" dirty="0"/>
+              <a:t>We are looking for, ideally, where the validation loss flattens, or minimizes and starts to increase again. </a:t>
+            </a:r>
+          </a:p>
+          <a:p>
+            <a:pPr lvl="1"/>
+            <a:r>
+              <a:rPr lang="en-US" dirty="0"/>
+              <a:t>The more stable, the more reliable, but it won’t always get this smooth. </a:t>
+            </a:r>
+          </a:p>
+          <a:p>
+            <a:r>
+              <a:rPr lang="en-US" dirty="0"/>
+              <a:t>These show an accurate small and large model – small is more jumpy. </a:t>
+            </a:r>
+          </a:p>
+          <a:p>
+            <a:pPr lvl="1"/>
+            <a:r>
+              <a:rPr lang="en-US" dirty="0"/>
+              <a:t>Error scale on Y are very small on both. </a:t>
+            </a:r>
+          </a:p>
+          <a:p>
+            <a:r>
+              <a:rPr lang="en-US" dirty="0"/>
+              <a:t>Training loss seems to be flattening as well – convergence. </a:t>
+            </a:r>
+          </a:p>
+          <a:p>
+            <a:pPr lvl="1"/>
+            <a:r>
+              <a:rPr lang="en-US" dirty="0"/>
+              <a:t>The ball has found the low point of the gradient curve. </a:t>
+            </a:r>
+          </a:p>
+          <a:p>
+            <a:pPr lvl="1"/>
+            <a:r>
+              <a:rPr lang="en-US" dirty="0"/>
+              <a:t>It may bump around a little, but we’ve found the bottom of loss. </a:t>
+            </a:r>
+          </a:p>
+          <a:p>
+            <a:r>
+              <a:rPr lang="en-US" dirty="0"/>
+              <a:t>The smaller the gap, the less overfitting – small and stable is ideal. </a:t>
+            </a:r>
+          </a:p>
+        </p:txBody>
+      </p:sp>
+      <p:pic>
+        <p:nvPicPr>
+          <p:cNvPr id="6146" name="Picture 2" descr="enter image description here">
+            <a:extLst>
+              <a:ext uri="{FF2B5EF4-FFF2-40B4-BE49-F238E27FC236}">
+                <a16:creationId xmlns:a16="http://schemas.microsoft.com/office/drawing/2014/main" id="{7A3E84A7-7C2E-A8AD-FF45-4094130373D0}"/>
+              </a:ext>
+            </a:extLst>
+          </p:cNvPr>
+          <p:cNvPicPr>
+            <a:picLocks noChangeAspect="1" noChangeArrowheads="1"/>
+          </p:cNvPicPr>
+          <p:nvPr/>
+        </p:nvPicPr>
+        <p:blipFill>
+          <a:blip r:embed="rId2">
+            <a:extLst>
+              <a:ext uri="{28A0092B-C50C-407E-A947-70E740481C1C}">
+                <a14:useLocalDpi xmlns:a14="http://schemas.microsoft.com/office/drawing/2010/main" val="0"/>
+              </a:ext>
+            </a:extLst>
+          </a:blip>
+          <a:srcRect/>
+          <a:stretch>
+            <a:fillRect/>
+          </a:stretch>
+        </p:blipFill>
+        <p:spPr bwMode="auto">
+          <a:xfrm>
+            <a:off x="0" y="2544264"/>
+            <a:ext cx="4313736" cy="4313736"/>
+          </a:xfrm>
+          <a:prstGeom prst="rect">
+            <a:avLst/>
+          </a:prstGeom>
+          <a:noFill/>
+          <a:extLst>
+            <a:ext uri="{909E8E84-426E-40DD-AFC4-6F175D3DCCD1}">
+              <a14:hiddenFill xmlns:a14="http://schemas.microsoft.com/office/drawing/2010/main">
+                <a:solidFill>
+                  <a:srgbClr val="FFFFFF"/>
+                </a:solidFill>
+              </a14:hiddenFill>
+            </a:ext>
+          </a:extLst>
+        </p:spPr>
+      </p:pic>
+      <p:pic>
+        <p:nvPicPr>
+          <p:cNvPr id="6151" name="Picture 7" descr="shows the convergence of loss function over training and validation data |  Download Scientific Diagram">
+            <a:hlinkClick r:id="rId3"/>
+            <a:extLst>
+              <a:ext uri="{FF2B5EF4-FFF2-40B4-BE49-F238E27FC236}">
+                <a16:creationId xmlns:a16="http://schemas.microsoft.com/office/drawing/2014/main" id="{076B6416-0FE9-90B5-7369-107524A7E6AE}"/>
+              </a:ext>
+            </a:extLst>
+          </p:cNvPr>
+          <p:cNvPicPr>
+            <a:picLocks noChangeAspect="1" noChangeArrowheads="1"/>
+          </p:cNvPicPr>
+          <p:nvPr/>
+        </p:nvPicPr>
+        <p:blipFill>
+          <a:blip r:embed="rId4">
+            <a:extLst>
+              <a:ext uri="{28A0092B-C50C-407E-A947-70E740481C1C}">
+                <a14:useLocalDpi xmlns:a14="http://schemas.microsoft.com/office/drawing/2010/main" val="0"/>
+              </a:ext>
+            </a:extLst>
+          </a:blip>
+          <a:srcRect/>
+          <a:stretch>
+            <a:fillRect/>
+          </a:stretch>
+        </p:blipFill>
+        <p:spPr bwMode="auto">
+          <a:xfrm>
+            <a:off x="0" y="0"/>
+            <a:ext cx="4313737" cy="2872441"/>
+          </a:xfrm>
+          <a:prstGeom prst="rect">
+            <a:avLst/>
+          </a:prstGeom>
+          <a:noFill/>
+          <a:extLst>
+            <a:ext uri="{909E8E84-426E-40DD-AFC4-6F175D3DCCD1}">
+              <a14:hiddenFill xmlns:a14="http://schemas.microsoft.com/office/drawing/2010/main">
+                <a:solidFill>
+                  <a:srgbClr val="FFFFFF"/>
+                </a:solidFill>
+              </a14:hiddenFill>
+            </a:ext>
+          </a:extLst>
+        </p:spPr>
+      </p:pic>
+    </p:spTree>
+    <p:extLst>
+      <p:ext uri="{BB962C8B-B14F-4D97-AF65-F5344CB8AC3E}">
+        <p14:creationId xmlns:p14="http://schemas.microsoft.com/office/powerpoint/2010/main" val="2096695825"/>
+      </p:ext>
+    </p:extLst>
+  </p:cSld>
+  <p:clrMapOvr>
+    <a:masterClrMapping/>
+  </p:clrMapOvr>
+</p:sld>
+</file>
+
+<file path=ppt/slides/slide17.xml><?xml version="1.0" encoding="utf-8"?>
+<p:sld xmlns:a="http://schemas.openxmlformats.org/drawingml/2006/main" xmlns:r="http://schemas.openxmlformats.org/officeDocument/2006/relationships" xmlns:p="http://schemas.openxmlformats.org/presentationml/2006/main" show="0">
+  <p:cSld>
+    <p:spTree>
+      <p:nvGrpSpPr>
+        <p:cNvPr id="1" name=""/>
+        <p:cNvGrpSpPr/>
+        <p:nvPr/>
+      </p:nvGrpSpPr>
+      <p:grpSpPr>
+        <a:xfrm>
+          <a:off x="0" y="0"/>
+          <a:ext cx="0" cy="0"/>
+          <a:chOff x="0" y="0"/>
+          <a:chExt cx="0" cy="0"/>
+        </a:xfrm>
+      </p:grpSpPr>
+      <p:sp>
+        <p:nvSpPr>
+          <p:cNvPr id="2" name="Title 1">
+            <a:extLst>
+              <a:ext uri="{FF2B5EF4-FFF2-40B4-BE49-F238E27FC236}">
+                <a16:creationId xmlns:a16="http://schemas.microsoft.com/office/drawing/2014/main" id="{39C9DD2E-27DB-9B00-4D59-7FFF0EF55534}"/>
+              </a:ext>
+            </a:extLst>
+          </p:cNvPr>
+          <p:cNvSpPr>
+            <a:spLocks noGrp="1"/>
+          </p:cNvSpPr>
+          <p:nvPr>
+            <p:ph type="title"/>
+          </p:nvPr>
+        </p:nvSpPr>
+        <p:spPr/>
+        <p:txBody>
+          <a:bodyPr/>
+          <a:lstStyle/>
+          <a:p>
+            <a:r>
+              <a:rPr lang="en-US" dirty="0"/>
+              <a:t>Tensor</a:t>
+            </a:r>
+          </a:p>
+        </p:txBody>
+      </p:sp>
+      <p:sp>
+        <p:nvSpPr>
+          <p:cNvPr id="3" name="Content Placeholder 2">
+            <a:extLst>
+              <a:ext uri="{FF2B5EF4-FFF2-40B4-BE49-F238E27FC236}">
+                <a16:creationId xmlns:a16="http://schemas.microsoft.com/office/drawing/2014/main" id="{F53E50F1-2F18-D0EB-441C-35773AA85368}"/>
+              </a:ext>
+            </a:extLst>
+          </p:cNvPr>
+          <p:cNvSpPr>
+            <a:spLocks noGrp="1"/>
+          </p:cNvSpPr>
+          <p:nvPr>
+            <p:ph idx="1"/>
+          </p:nvPr>
+        </p:nvSpPr>
+        <p:spPr/>
+        <p:txBody>
+          <a:bodyPr/>
+          <a:lstStyle/>
+          <a:p>
+            <a:endParaRPr lang="en-US"/>
+          </a:p>
+        </p:txBody>
+      </p:sp>
+    </p:spTree>
+    <p:extLst>
+      <p:ext uri="{BB962C8B-B14F-4D97-AF65-F5344CB8AC3E}">
+        <p14:creationId xmlns:p14="http://schemas.microsoft.com/office/powerpoint/2010/main" val="136756413"/>
+      </p:ext>
+    </p:extLst>
+  </p:cSld>
+  <p:clrMapOvr>
+    <a:masterClrMapping/>
+  </p:clrMapOvr>
+</p:sld>
+</file>
+
+<file path=ppt/slides/slide18.xml><?xml version="1.0" encoding="utf-8"?>
+<p:sld xmlns:a="http://schemas.openxmlformats.org/drawingml/2006/main" xmlns:r="http://schemas.openxmlformats.org/officeDocument/2006/relationships" xmlns:p="http://schemas.openxmlformats.org/presentationml/2006/main">
+  <p:cSld>
+    <p:spTree>
+      <p:nvGrpSpPr>
+        <p:cNvPr id="1" name=""/>
+        <p:cNvGrpSpPr/>
+        <p:nvPr/>
+      </p:nvGrpSpPr>
+      <p:grpSpPr>
+        <a:xfrm>
+          <a:off x="0" y="0"/>
+          <a:ext cx="0" cy="0"/>
+          <a:chOff x="0" y="0"/>
+          <a:chExt cx="0" cy="0"/>
+        </a:xfrm>
+      </p:grpSpPr>
+      <p:sp>
+        <p:nvSpPr>
+          <p:cNvPr id="2" name="Title 1">
+            <a:extLst>
+              <a:ext uri="{FF2B5EF4-FFF2-40B4-BE49-F238E27FC236}">
+                <a16:creationId xmlns:a16="http://schemas.microsoft.com/office/drawing/2014/main" id="{E42CF152-59D1-43C2-9435-C78A5207614E}"/>
+              </a:ext>
+            </a:extLst>
+          </p:cNvPr>
+          <p:cNvSpPr>
+            <a:spLocks noGrp="1"/>
+          </p:cNvSpPr>
+          <p:nvPr>
+            <p:ph type="title"/>
+          </p:nvPr>
+        </p:nvSpPr>
+        <p:spPr/>
+        <p:txBody>
+          <a:bodyPr/>
+          <a:lstStyle/>
+          <a:p>
+            <a:r>
+              <a:rPr lang="en-CA" dirty="0"/>
+              <a:t>Network Size</a:t>
+            </a:r>
+            <a:endParaRPr lang="LID4096" dirty="0"/>
+          </a:p>
+        </p:txBody>
+      </p:sp>
+      <p:sp>
+        <p:nvSpPr>
+          <p:cNvPr id="3" name="Content Placeholder 2">
+            <a:extLst>
+              <a:ext uri="{FF2B5EF4-FFF2-40B4-BE49-F238E27FC236}">
+                <a16:creationId xmlns:a16="http://schemas.microsoft.com/office/drawing/2014/main" id="{22A90C32-B7B4-4D00-AA34-E379414D8F75}"/>
+              </a:ext>
+            </a:extLst>
+          </p:cNvPr>
+          <p:cNvSpPr>
+            <a:spLocks noGrp="1"/>
+          </p:cNvSpPr>
+          <p:nvPr>
+            <p:ph idx="1"/>
+          </p:nvPr>
+        </p:nvSpPr>
+        <p:spPr/>
+        <p:txBody>
+          <a:bodyPr/>
+          <a:lstStyle/>
+          <a:p>
+            <a:r>
+              <a:rPr lang="en-CA" dirty="0"/>
+              <a:t>The first thing to look at is the network size, or capacity.</a:t>
+            </a:r>
+          </a:p>
+          <a:p>
+            <a:r>
+              <a:rPr lang="en-CA" dirty="0"/>
+              <a:t>The more neurons a network had, the higher the capacity. </a:t>
+            </a:r>
+          </a:p>
+          <a:p>
+            <a:r>
+              <a:rPr lang="en-CA" dirty="0"/>
+              <a:t>In general, larger networks need larger amounts of data, to find more complex relationships.  </a:t>
+            </a:r>
+          </a:p>
+          <a:p>
+            <a:r>
+              <a:rPr lang="en-CA" dirty="0"/>
+              <a:t>We can examine the two metrics of size:</a:t>
+            </a:r>
+          </a:p>
+          <a:p>
+            <a:pPr lvl="1"/>
+            <a:r>
+              <a:rPr lang="en-CA" dirty="0"/>
+              <a:t>Neurons per layer (width)</a:t>
+            </a:r>
+          </a:p>
+          <a:p>
+            <a:pPr lvl="1"/>
+            <a:r>
+              <a:rPr lang="en-CA" dirty="0"/>
+              <a:t>Number of layers (depth)</a:t>
+            </a:r>
+            <a:endParaRPr lang="LID4096" dirty="0"/>
+          </a:p>
+        </p:txBody>
+      </p:sp>
+    </p:spTree>
+    <p:extLst>
+      <p:ext uri="{BB962C8B-B14F-4D97-AF65-F5344CB8AC3E}">
+        <p14:creationId xmlns:p14="http://schemas.microsoft.com/office/powerpoint/2010/main" val="2949275183"/>
+      </p:ext>
+    </p:extLst>
+  </p:cSld>
+  <p:clrMapOvr>
+    <a:masterClrMapping/>
+  </p:clrMapOvr>
+</p:sld>
+</file>
+
+<file path=ppt/slides/slide19.xml><?xml version="1.0" encoding="utf-8"?>
+<p:sld xmlns:a="http://schemas.openxmlformats.org/drawingml/2006/main" xmlns:r="http://schemas.openxmlformats.org/officeDocument/2006/relationships" xmlns:p="http://schemas.openxmlformats.org/presentationml/2006/main">
+  <p:cSld>
+    <p:spTree>
+      <p:nvGrpSpPr>
+        <p:cNvPr id="1" name=""/>
+        <p:cNvGrpSpPr/>
+        <p:nvPr/>
+      </p:nvGrpSpPr>
+      <p:grpSpPr>
+        <a:xfrm>
+          <a:off x="0" y="0"/>
+          <a:ext cx="0" cy="0"/>
+          <a:chOff x="0" y="0"/>
+          <a:chExt cx="0" cy="0"/>
+        </a:xfrm>
+      </p:grpSpPr>
+      <p:sp>
+        <p:nvSpPr>
+          <p:cNvPr id="2" name="Title 1">
+            <a:extLst>
+              <a:ext uri="{FF2B5EF4-FFF2-40B4-BE49-F238E27FC236}">
                 <a16:creationId xmlns:a16="http://schemas.microsoft.com/office/drawing/2014/main" id="{B89B01E8-D08A-4763-AF4C-320DC895D201}"/>
               </a:ext>
             </a:extLst>
@@ -4383,7 +5719,117 @@
 </p:sld>
 </file>
 
-<file path=ppt/slides/slide13.xml><?xml version="1.0" encoding="utf-8"?>
+<file path=ppt/slides/slide2.xml><?xml version="1.0" encoding="utf-8"?>
+<p:sld xmlns:a="http://schemas.openxmlformats.org/drawingml/2006/main" xmlns:r="http://schemas.openxmlformats.org/officeDocument/2006/relationships" xmlns:p="http://schemas.openxmlformats.org/presentationml/2006/main">
+  <p:cSld>
+    <p:spTree>
+      <p:nvGrpSpPr>
+        <p:cNvPr id="1" name=""/>
+        <p:cNvGrpSpPr/>
+        <p:nvPr/>
+      </p:nvGrpSpPr>
+      <p:grpSpPr>
+        <a:xfrm>
+          <a:off x="0" y="0"/>
+          <a:ext cx="0" cy="0"/>
+          <a:chOff x="0" y="0"/>
+          <a:chExt cx="0" cy="0"/>
+        </a:xfrm>
+      </p:grpSpPr>
+      <p:sp>
+        <p:nvSpPr>
+          <p:cNvPr id="2" name="Title 1">
+            <a:extLst>
+              <a:ext uri="{FF2B5EF4-FFF2-40B4-BE49-F238E27FC236}">
+                <a16:creationId xmlns:a16="http://schemas.microsoft.com/office/drawing/2014/main" id="{7D74FB5A-6E0D-A1AF-776E-4D2C15A551F2}"/>
+              </a:ext>
+            </a:extLst>
+          </p:cNvPr>
+          <p:cNvSpPr>
+            <a:spLocks noGrp="1"/>
+          </p:cNvSpPr>
+          <p:nvPr>
+            <p:ph type="title"/>
+          </p:nvPr>
+        </p:nvSpPr>
+        <p:spPr/>
+        <p:txBody>
+          <a:bodyPr/>
+          <a:lstStyle/>
+          <a:p>
+            <a:endParaRPr lang="en-US"/>
+          </a:p>
+        </p:txBody>
+      </p:sp>
+      <p:sp>
+        <p:nvSpPr>
+          <p:cNvPr id="3" name="Content Placeholder 2">
+            <a:extLst>
+              <a:ext uri="{FF2B5EF4-FFF2-40B4-BE49-F238E27FC236}">
+                <a16:creationId xmlns:a16="http://schemas.microsoft.com/office/drawing/2014/main" id="{0BD52AE0-822E-A3B2-AEF2-CD9580AA2E37}"/>
+              </a:ext>
+            </a:extLst>
+          </p:cNvPr>
+          <p:cNvSpPr>
+            <a:spLocks noGrp="1"/>
+          </p:cNvSpPr>
+          <p:nvPr>
+            <p:ph idx="1"/>
+          </p:nvPr>
+        </p:nvSpPr>
+        <p:spPr/>
+        <p:txBody>
+          <a:bodyPr/>
+          <a:lstStyle/>
+          <a:p>
+            <a:endParaRPr lang="en-US"/>
+          </a:p>
+        </p:txBody>
+      </p:sp>
+      <p:pic>
+        <p:nvPicPr>
+          <p:cNvPr id="4" name="Picture 3">
+            <a:extLst>
+              <a:ext uri="{FF2B5EF4-FFF2-40B4-BE49-F238E27FC236}">
+                <a16:creationId xmlns:a16="http://schemas.microsoft.com/office/drawing/2014/main" id="{4F8D3341-C9AD-F059-B8C6-00D1B0500BD2}"/>
+              </a:ext>
+            </a:extLst>
+          </p:cNvPr>
+          <p:cNvPicPr>
+            <a:picLocks noChangeAspect="1"/>
+          </p:cNvPicPr>
+          <p:nvPr/>
+        </p:nvPicPr>
+        <p:blipFill>
+          <a:blip r:embed="rId2"/>
+          <a:stretch>
+            <a:fillRect/>
+          </a:stretch>
+        </p:blipFill>
+        <p:spPr>
+          <a:xfrm>
+            <a:off x="102451" y="804519"/>
+            <a:ext cx="11987098" cy="5248962"/>
+          </a:xfrm>
+          <a:prstGeom prst="rect">
+            <a:avLst/>
+          </a:prstGeom>
+        </p:spPr>
+      </p:pic>
+    </p:spTree>
+    <p:extLst>
+      <p:ext uri="{BB962C8B-B14F-4D97-AF65-F5344CB8AC3E}">
+        <p14:creationId xmlns:p14="http://schemas.microsoft.com/office/powerpoint/2010/main" val="732332500"/>
+      </p:ext>
+    </p:extLst>
+  </p:cSld>
+  <p:clrMapOvr>
+    <a:masterClrMapping/>
+  </p:clrMapOvr>
+</p:sld>
+</file>
+
+<file path=ppt/slides/slide20.xml><?xml version="1.0" encoding="utf-8"?>
 <p:sld xmlns:a="http://schemas.openxmlformats.org/drawingml/2006/main" xmlns:r="http://schemas.openxmlformats.org/officeDocument/2006/relationships" xmlns:p="http://schemas.openxmlformats.org/presentationml/2006/main">
   <p:cSld>
     <p:bg>
@@ -4588,7 +6034,7 @@
 </p:sld>
 </file>
 
-<file path=ppt/slides/slide14.xml><?xml version="1.0" encoding="utf-8"?>
+<file path=ppt/slides/slide21.xml><?xml version="1.0" encoding="utf-8"?>
 <p:sld xmlns:a="http://schemas.openxmlformats.org/drawingml/2006/main" xmlns:r="http://schemas.openxmlformats.org/officeDocument/2006/relationships" xmlns:p="http://schemas.openxmlformats.org/presentationml/2006/main">
   <p:cSld>
     <p:spTree>
@@ -4745,7 +6191,7 @@
 </p:sld>
 </file>
 
-<file path=ppt/slides/slide15.xml><?xml version="1.0" encoding="utf-8"?>
+<file path=ppt/slides/slide22.xml><?xml version="1.0" encoding="utf-8"?>
 <p:sld xmlns:a="http://schemas.openxmlformats.org/drawingml/2006/main" xmlns:r="http://schemas.openxmlformats.org/officeDocument/2006/relationships" xmlns:p="http://schemas.openxmlformats.org/presentationml/2006/main">
   <p:cSld>
     <p:spTree>
@@ -4872,7 +6318,7 @@
 </p:sld>
 </file>
 
-<file path=ppt/slides/slide16.xml><?xml version="1.0" encoding="utf-8"?>
+<file path=ppt/slides/slide23.xml><?xml version="1.0" encoding="utf-8"?>
 <p:sld xmlns:a="http://schemas.openxmlformats.org/drawingml/2006/main" xmlns:r="http://schemas.openxmlformats.org/officeDocument/2006/relationships" xmlns:p="http://schemas.openxmlformats.org/presentationml/2006/main">
   <p:cSld>
     <p:spTree>
@@ -4999,7 +6445,7 @@
 </p:sld>
 </file>
 
-<file path=ppt/slides/slide17.xml><?xml version="1.0" encoding="utf-8"?>
+<file path=ppt/slides/slide24.xml><?xml version="1.0" encoding="utf-8"?>
 <p:sld xmlns:a="http://schemas.openxmlformats.org/drawingml/2006/main" xmlns:r="http://schemas.openxmlformats.org/officeDocument/2006/relationships" xmlns:p="http://schemas.openxmlformats.org/presentationml/2006/main">
   <p:cSld>
     <p:spTree>
@@ -5162,7 +6608,7 @@
 </p:sld>
 </file>
 
-<file path=ppt/slides/slide18.xml><?xml version="1.0" encoding="utf-8"?>
+<file path=ppt/slides/slide25.xml><?xml version="1.0" encoding="utf-8"?>
 <p:sld xmlns:a="http://schemas.openxmlformats.org/drawingml/2006/main" xmlns:r="http://schemas.openxmlformats.org/officeDocument/2006/relationships" xmlns:p="http://schemas.openxmlformats.org/presentationml/2006/main">
   <p:cSld>
     <p:spTree>
@@ -5387,7 +6833,7 @@
 </p:sld>
 </file>
 
-<file path=ppt/slides/slide19.xml><?xml version="1.0" encoding="utf-8"?>
+<file path=ppt/slides/slide26.xml><?xml version="1.0" encoding="utf-8"?>
 <p:sld xmlns:a="http://schemas.openxmlformats.org/drawingml/2006/main" xmlns:r="http://schemas.openxmlformats.org/officeDocument/2006/relationships" xmlns:p="http://schemas.openxmlformats.org/presentationml/2006/main">
   <p:cSld>
     <p:spTree>
@@ -5510,7 +6956,23 @@
           <a:p>
             <a:r>
               <a:rPr lang="en-CA" dirty="0"/>
-              <a:t>A real answer is grid search, this should get us close enough to start with. </a:t>
+              <a:t>In </a:t>
+            </a:r>
+            <a:r>
+              <a:rPr lang="en-CA" dirty="0" err="1"/>
+              <a:t>tensorboard</a:t>
+            </a:r>
+            <a:r>
+              <a:rPr lang="en-CA" dirty="0"/>
+              <a:t> the </a:t>
+            </a:r>
+            <a:r>
+              <a:rPr lang="en-CA" dirty="0" err="1"/>
+              <a:t>hparams</a:t>
+            </a:r>
+            <a:r>
+              <a:rPr lang="en-CA" dirty="0"/>
+              <a:t> screen may give us some insight. </a:t>
             </a:r>
           </a:p>
           <a:p>
@@ -5535,7 +6997,7 @@
 </p:sld>
 </file>
 
-<file path=ppt/slides/slide2.xml><?xml version="1.0" encoding="utf-8"?>
+<file path=ppt/slides/slide27.xml><?xml version="1.0" encoding="utf-8"?>
 <p:sld xmlns:a="http://schemas.openxmlformats.org/drawingml/2006/main" xmlns:r="http://schemas.openxmlformats.org/officeDocument/2006/relationships" xmlns:p="http://schemas.openxmlformats.org/presentationml/2006/main">
   <p:cSld>
     <p:spTree>
@@ -5557,7 +7019,7 @@
           <p:cNvPr id="2" name="Title 1">
             <a:extLst>
               <a:ext uri="{FF2B5EF4-FFF2-40B4-BE49-F238E27FC236}">
-                <a16:creationId xmlns:a16="http://schemas.microsoft.com/office/drawing/2014/main" id="{7D74FB5A-6E0D-A1AF-776E-4D2C15A551F2}"/>
+                <a16:creationId xmlns:a16="http://schemas.microsoft.com/office/drawing/2014/main" id="{CD43B760-7189-15BB-AB43-4B1816F400D9}"/>
               </a:ext>
             </a:extLst>
           </p:cNvPr>
@@ -5573,7 +7035,10 @@
           <a:bodyPr/>
           <a:lstStyle/>
           <a:p>
-            <a:endParaRPr lang="en-US"/>
+            <a:r>
+              <a:rPr lang="en-US" dirty="0"/>
+              <a:t>Data</a:t>
+            </a:r>
           </a:p>
         </p:txBody>
       </p:sp>
@@ -5582,7 +7047,7 @@
           <p:cNvPr id="3" name="Content Placeholder 2">
             <a:extLst>
               <a:ext uri="{FF2B5EF4-FFF2-40B4-BE49-F238E27FC236}">
-                <a16:creationId xmlns:a16="http://schemas.microsoft.com/office/drawing/2014/main" id="{0BD52AE0-822E-A3B2-AEF2-CD9580AA2E37}"/>
+                <a16:creationId xmlns:a16="http://schemas.microsoft.com/office/drawing/2014/main" id="{AADF3FBF-3046-3E73-935C-A21DD147D2C6}"/>
               </a:ext>
             </a:extLst>
           </p:cNvPr>
@@ -5593,49 +7058,92 @@
             <p:ph idx="1"/>
           </p:nvPr>
         </p:nvSpPr>
-        <p:spPr/>
-        <p:txBody>
-          <a:bodyPr/>
-          <a:lstStyle/>
-          <a:p>
-            <a:endParaRPr lang="en-US"/>
-          </a:p>
-        </p:txBody>
-      </p:sp>
-      <p:pic>
-        <p:nvPicPr>
-          <p:cNvPr id="4" name="Picture 3">
-            <a:extLst>
-              <a:ext uri="{FF2B5EF4-FFF2-40B4-BE49-F238E27FC236}">
-                <a16:creationId xmlns:a16="http://schemas.microsoft.com/office/drawing/2014/main" id="{4F8D3341-C9AD-F059-B8C6-00D1B0500BD2}"/>
-              </a:ext>
-            </a:extLst>
-          </p:cNvPr>
-          <p:cNvPicPr>
-            <a:picLocks noChangeAspect="1"/>
-          </p:cNvPicPr>
-          <p:nvPr/>
-        </p:nvPicPr>
-        <p:blipFill>
-          <a:blip r:embed="rId2"/>
-          <a:stretch>
-            <a:fillRect/>
-          </a:stretch>
-        </p:blipFill>
         <p:spPr>
           <a:xfrm>
-            <a:off x="102451" y="804519"/>
-            <a:ext cx="11987098" cy="5248962"/>
+            <a:off x="1451579" y="1853754"/>
+            <a:ext cx="9603275" cy="4199727"/>
           </a:xfrm>
-          <a:prstGeom prst="rect">
-            <a:avLst/>
-          </a:prstGeom>
         </p:spPr>
-      </p:pic>
+        <p:txBody>
+          <a:bodyPr/>
+          <a:lstStyle/>
+          <a:p>
+            <a:r>
+              <a:rPr lang="en-US" dirty="0"/>
+              <a:t>Improving and increasing the data size is the best possible optimization. </a:t>
+            </a:r>
+          </a:p>
+          <a:p>
+            <a:r>
+              <a:rPr lang="en-US" dirty="0"/>
+              <a:t>Scaling numerical data can often have large impacts:</a:t>
+            </a:r>
+          </a:p>
+          <a:p>
+            <a:pPr lvl="1"/>
+            <a:r>
+              <a:rPr lang="en-US" dirty="0"/>
+              <a:t>Ensure outliers are handled and data is scaled. </a:t>
+            </a:r>
+          </a:p>
+          <a:p>
+            <a:r>
+              <a:rPr lang="en-US" dirty="0"/>
+              <a:t>If practical, increase data size – real or by augmentation (later). </a:t>
+            </a:r>
+          </a:p>
+          <a:p>
+            <a:r>
+              <a:rPr lang="en-US" dirty="0"/>
+              <a:t>If we have high dimension categories, that can lead to very sparse data:</a:t>
+            </a:r>
+          </a:p>
+          <a:p>
+            <a:pPr lvl="1"/>
+            <a:r>
+              <a:rPr lang="en-US" dirty="0"/>
+              <a:t>Many high dimension categories will add lots of features to the data once encoded. </a:t>
+            </a:r>
+          </a:p>
+          <a:p>
+            <a:pPr lvl="1"/>
+            <a:r>
+              <a:rPr lang="en-US" dirty="0"/>
+              <a:t>This will make lots of sparse data – many features with nearly zero information. </a:t>
+            </a:r>
+          </a:p>
+          <a:p>
+            <a:pPr lvl="1"/>
+            <a:r>
+              <a:rPr lang="en-US" dirty="0"/>
+              <a:t>This isn’t </a:t>
+            </a:r>
+            <a:r>
+              <a:rPr lang="en-US" i="1" dirty="0"/>
+              <a:t>wrong</a:t>
+            </a:r>
+            <a:r>
+              <a:rPr lang="en-US" dirty="0"/>
+              <a:t> but may lead to poor and slow results, especially without many records. </a:t>
+            </a:r>
+          </a:p>
+          <a:p>
+            <a:pPr lvl="1"/>
+            <a:r>
+              <a:rPr lang="en-US" dirty="0"/>
+              <a:t>Consider feature engineering (‘other’ group, consolidation, selection) these first. </a:t>
+            </a:r>
+          </a:p>
+          <a:p>
+            <a:pPr lvl="1"/>
+            <a:endParaRPr lang="en-US" dirty="0"/>
+          </a:p>
+        </p:txBody>
+      </p:sp>
     </p:spTree>
     <p:extLst>
       <p:ext uri="{BB962C8B-B14F-4D97-AF65-F5344CB8AC3E}">
-        <p14:creationId xmlns:p14="http://schemas.microsoft.com/office/powerpoint/2010/main" val="732332500"/>
+        <p14:creationId xmlns:p14="http://schemas.microsoft.com/office/powerpoint/2010/main" val="23450497"/>
       </p:ext>
     </p:extLst>
   </p:cSld>
@@ -5645,7 +7153,7 @@
 </p:sld>
 </file>
 
-<file path=ppt/slides/slide20.xml><?xml version="1.0" encoding="utf-8"?>
+<file path=ppt/slides/slide28.xml><?xml version="1.0" encoding="utf-8"?>
 <p:sld xmlns:a="http://schemas.openxmlformats.org/drawingml/2006/main" xmlns:r="http://schemas.openxmlformats.org/officeDocument/2006/relationships" xmlns:p="http://schemas.openxmlformats.org/presentationml/2006/main">
   <p:cSld>
     <p:spTree>
@@ -5667,7 +7175,7 @@
           <p:cNvPr id="2" name="Title 1">
             <a:extLst>
               <a:ext uri="{FF2B5EF4-FFF2-40B4-BE49-F238E27FC236}">
-                <a16:creationId xmlns:a16="http://schemas.microsoft.com/office/drawing/2014/main" id="{CD43B760-7189-15BB-AB43-4B1816F400D9}"/>
+                <a16:creationId xmlns:a16="http://schemas.microsoft.com/office/drawing/2014/main" id="{9DF6D07A-F89C-4648-8C5C-62C367F69E6C}"/>
               </a:ext>
             </a:extLst>
           </p:cNvPr>
@@ -5684,9 +7192,10 @@
           <a:lstStyle/>
           <a:p>
             <a:r>
-              <a:rPr lang="en-US" dirty="0"/>
-              <a:t>Data</a:t>
-            </a:r>
+              <a:rPr lang="en-CA" dirty="0"/>
+              <a:t>Epochs and Batches</a:t>
+            </a:r>
+            <a:endParaRPr lang="LID4096" dirty="0"/>
           </a:p>
         </p:txBody>
       </p:sp>
@@ -5695,7 +7204,7 @@
           <p:cNvPr id="3" name="Content Placeholder 2">
             <a:extLst>
               <a:ext uri="{FF2B5EF4-FFF2-40B4-BE49-F238E27FC236}">
-                <a16:creationId xmlns:a16="http://schemas.microsoft.com/office/drawing/2014/main" id="{AADF3FBF-3046-3E73-935C-A21DD147D2C6}"/>
+                <a16:creationId xmlns:a16="http://schemas.microsoft.com/office/drawing/2014/main" id="{90B4D315-C411-40F9-A088-3BE0DD9996F7}"/>
               </a:ext>
             </a:extLst>
           </p:cNvPr>
@@ -5708,90 +7217,121 @@
         </p:nvSpPr>
         <p:spPr>
           <a:xfrm>
-            <a:off x="1451579" y="1853754"/>
-            <a:ext cx="9603275" cy="4199727"/>
+            <a:off x="1183907" y="1853753"/>
+            <a:ext cx="10222030" cy="4199727"/>
           </a:xfrm>
         </p:spPr>
         <p:txBody>
-          <a:bodyPr/>
-          <a:lstStyle/>
-          <a:p>
-            <a:r>
-              <a:rPr lang="en-US" dirty="0"/>
-              <a:t>Improving and increasing the data size is the best possible optimization. </a:t>
-            </a:r>
-          </a:p>
-          <a:p>
-            <a:r>
-              <a:rPr lang="en-US" dirty="0"/>
-              <a:t>Scaling numerical data can often have large impacts:</a:t>
-            </a:r>
-          </a:p>
-          <a:p>
-            <a:pPr lvl="1"/>
-            <a:r>
-              <a:rPr lang="en-US" dirty="0"/>
-              <a:t>Ensure outliers are handled and data is scaled. </a:t>
-            </a:r>
-          </a:p>
-          <a:p>
-            <a:r>
-              <a:rPr lang="en-US" dirty="0"/>
-              <a:t>If practical, increase data size – real or by augmentation (later). </a:t>
-            </a:r>
-          </a:p>
-          <a:p>
-            <a:r>
-              <a:rPr lang="en-US" dirty="0"/>
-              <a:t>If we have high dimension categories, that can lead to very sparse data:</a:t>
-            </a:r>
-          </a:p>
-          <a:p>
-            <a:pPr lvl="1"/>
-            <a:r>
-              <a:rPr lang="en-US" dirty="0"/>
-              <a:t>Many high dimension categories will add lots of features to the data once encoded. </a:t>
-            </a:r>
-          </a:p>
-          <a:p>
-            <a:pPr lvl="1"/>
-            <a:r>
-              <a:rPr lang="en-US" dirty="0"/>
-              <a:t>This will make lots of sparse data – many features with nearly zero information. </a:t>
-            </a:r>
-          </a:p>
-          <a:p>
-            <a:pPr lvl="1"/>
-            <a:r>
-              <a:rPr lang="en-US" dirty="0"/>
-              <a:t>This isn’t </a:t>
-            </a:r>
-            <a:r>
-              <a:rPr lang="en-US" i="1" dirty="0"/>
-              <a:t>wrong</a:t>
-            </a:r>
-            <a:r>
-              <a:rPr lang="en-US" dirty="0"/>
-              <a:t> but may lead to poor and slow results, especially without many records. </a:t>
-            </a:r>
-          </a:p>
-          <a:p>
-            <a:pPr lvl="1"/>
-            <a:r>
-              <a:rPr lang="en-US" dirty="0"/>
-              <a:t>Consider feature engineering (‘other’ group, consolidation, selection) these first. </a:t>
-            </a:r>
-          </a:p>
-          <a:p>
-            <a:pPr lvl="1"/>
-            <a:endParaRPr lang="en-US" dirty="0"/>
+          <a:bodyPr>
+            <a:normAutofit/>
+          </a:bodyPr>
+          <a:lstStyle/>
+          <a:p>
+            <a:r>
+              <a:rPr lang="en-CA" dirty="0"/>
+              <a:t>Each epoch is an execution of one </a:t>
+            </a:r>
+            <a:r>
+              <a:rPr lang="en-CA" dirty="0" err="1"/>
+              <a:t>fp</a:t>
+            </a:r>
+            <a:r>
+              <a:rPr lang="en-CA" dirty="0"/>
+              <a:t>/bp through all of the data. </a:t>
+            </a:r>
+          </a:p>
+          <a:p>
+            <a:pPr lvl="1"/>
+            <a:r>
+              <a:rPr lang="en-CA" dirty="0"/>
+              <a:t>Easiest method is to set early stopping and let the computer figure it out. </a:t>
+            </a:r>
+          </a:p>
+          <a:p>
+            <a:pPr lvl="1"/>
+            <a:r>
+              <a:rPr lang="en-CA" dirty="0"/>
+              <a:t>Really big models might only have one epoch through the data total. </a:t>
+            </a:r>
+          </a:p>
+          <a:p>
+            <a:r>
+              <a:rPr lang="en-CA" dirty="0"/>
+              <a:t>Batches are how many records to process before updating weights. </a:t>
+            </a:r>
+          </a:p>
+          <a:p>
+            <a:pPr lvl="1"/>
+            <a:r>
+              <a:rPr lang="en-CA" dirty="0"/>
+              <a:t>Just like regular gradient descent – higher is more stable, smaller more erratic. </a:t>
+            </a:r>
+          </a:p>
+          <a:p>
+            <a:pPr lvl="1"/>
+            <a:r>
+              <a:rPr lang="en-CA" dirty="0"/>
+              <a:t>Limited at the top end by memory capacity. </a:t>
+            </a:r>
+          </a:p>
+          <a:p>
+            <a:pPr lvl="1"/>
+            <a:r>
+              <a:rPr lang="en-CA" dirty="0"/>
+              <a:t>Large vs small is still a matter of debate and varies by data. </a:t>
+            </a:r>
+          </a:p>
+          <a:p>
+            <a:pPr lvl="1"/>
+            <a:r>
+              <a:rPr lang="en-CA" dirty="0"/>
+              <a:t>Recently, smaller batches (as small as 2 -32) seems to offer better generalizable models. </a:t>
+            </a:r>
+          </a:p>
+          <a:p>
+            <a:pPr lvl="1"/>
+            <a:r>
+              <a:rPr lang="en-CA" dirty="0"/>
+              <a:t>Big batches may process </a:t>
+            </a:r>
+            <a:r>
+              <a:rPr lang="en-CA" i="1" dirty="0"/>
+              <a:t>far</a:t>
+            </a:r>
+            <a:r>
+              <a:rPr lang="en-CA" dirty="0"/>
+              <a:t> faster – better HW utilization and fewer weight updates. </a:t>
+            </a:r>
+          </a:p>
+          <a:p>
+            <a:pPr lvl="2"/>
+            <a:r>
+              <a:rPr lang="en-CA" dirty="0"/>
+              <a:t>Think – weight matrix per layer is </a:t>
+            </a:r>
+            <a:r>
+              <a:rPr lang="en-CA" dirty="0" err="1"/>
+              <a:t>input_size</a:t>
+            </a:r>
+            <a:r>
+              <a:rPr lang="en-CA" dirty="0"/>
+              <a:t> * </a:t>
+            </a:r>
+            <a:r>
+              <a:rPr lang="en-CA" dirty="0" err="1"/>
+              <a:t>output_size</a:t>
+            </a:r>
+            <a:r>
+              <a:rPr lang="en-CA" dirty="0"/>
+              <a:t>. 512 * 512 = ~250k updates</a:t>
+            </a:r>
           </a:p>
         </p:txBody>
       </p:sp>
     </p:spTree>
     <p:extLst>
       <p:ext uri="{BB962C8B-B14F-4D97-AF65-F5344CB8AC3E}">
-        <p14:creationId xmlns:p14="http://schemas.microsoft.com/office/powerpoint/2010/main" val="23450497"/>
+        <p14:creationId xmlns:p14="http://schemas.microsoft.com/office/powerpoint/2010/main" val="1589937291"/>
       </p:ext>
     </p:extLst>
   </p:cSld>
@@ -5801,7 +7341,7 @@
 </p:sld>
 </file>
 
-<file path=ppt/slides/slide21.xml><?xml version="1.0" encoding="utf-8"?>
+<file path=ppt/slides/slide29.xml><?xml version="1.0" encoding="utf-8"?>
 <p:sld xmlns:a="http://schemas.openxmlformats.org/drawingml/2006/main" xmlns:r="http://schemas.openxmlformats.org/officeDocument/2006/relationships" xmlns:p="http://schemas.openxmlformats.org/presentationml/2006/main">
   <p:cSld>
     <p:spTree>
@@ -5823,7 +7363,7 @@
           <p:cNvPr id="2" name="Title 1">
             <a:extLst>
               <a:ext uri="{FF2B5EF4-FFF2-40B4-BE49-F238E27FC236}">
-                <a16:creationId xmlns:a16="http://schemas.microsoft.com/office/drawing/2014/main" id="{9DF6D07A-F89C-4648-8C5C-62C367F69E6C}"/>
+                <a16:creationId xmlns:a16="http://schemas.microsoft.com/office/drawing/2014/main" id="{34986ED5-DCBC-44E8-A70B-39E557577940}"/>
               </a:ext>
             </a:extLst>
           </p:cNvPr>
@@ -5841,7 +7381,7 @@
           <a:p>
             <a:r>
               <a:rPr lang="en-CA" dirty="0"/>
-              <a:t>Epochs and Batches</a:t>
+              <a:t>Optimizer</a:t>
             </a:r>
             <a:endParaRPr lang="LID4096" dirty="0"/>
           </a:p>
@@ -5852,7 +7392,7 @@
           <p:cNvPr id="3" name="Content Placeholder 2">
             <a:extLst>
               <a:ext uri="{FF2B5EF4-FFF2-40B4-BE49-F238E27FC236}">
-                <a16:creationId xmlns:a16="http://schemas.microsoft.com/office/drawing/2014/main" id="{90B4D315-C411-40F9-A088-3BE0DD9996F7}"/>
+                <a16:creationId xmlns:a16="http://schemas.microsoft.com/office/drawing/2014/main" id="{4B2CD011-BB37-4394-B021-0011F0FE5371}"/>
               </a:ext>
             </a:extLst>
           </p:cNvPr>
@@ -5865,8 +7405,8 @@
         </p:nvSpPr>
         <p:spPr>
           <a:xfrm>
-            <a:off x="1183907" y="1853753"/>
-            <a:ext cx="10222030" cy="4199727"/>
+            <a:off x="1064871" y="1853754"/>
+            <a:ext cx="10637134" cy="4199727"/>
           </a:xfrm>
         </p:spPr>
         <p:txBody>
@@ -5877,109 +7417,76 @@
           <a:p>
             <a:r>
               <a:rPr lang="en-CA" dirty="0"/>
-              <a:t>Each epoch is an execution of one </a:t>
+              <a:t>The optimizer is the algorithm used for gradient descent. </a:t>
+            </a:r>
+          </a:p>
+          <a:p>
+            <a:r>
+              <a:rPr lang="en-CA" dirty="0"/>
+              <a:t>The internal details aren’t super important for us, at least for now. </a:t>
+            </a:r>
+          </a:p>
+          <a:p>
+            <a:r>
+              <a:rPr lang="en-CA" dirty="0"/>
+              <a:t>Adam is the most common and is a good choice for most scenarios:</a:t>
+            </a:r>
+          </a:p>
+          <a:p>
+            <a:pPr lvl="1"/>
+            <a:r>
+              <a:rPr lang="en-CA" dirty="0"/>
+              <a:t>Converges efficiently – manages different rates for each gradient. </a:t>
+            </a:r>
+          </a:p>
+          <a:p>
+            <a:pPr lvl="1"/>
+            <a:r>
+              <a:rPr lang="en-CA" dirty="0"/>
+              <a:t>Computation and memory efficient. </a:t>
+            </a:r>
+          </a:p>
+          <a:p>
+            <a:pPr lvl="1"/>
+            <a:r>
+              <a:rPr lang="en-CA" dirty="0"/>
+              <a:t>Adapts separate learning rates for each parameter using moving averages of several moments. </a:t>
+            </a:r>
+          </a:p>
+          <a:p>
+            <a:pPr lvl="1"/>
+            <a:r>
+              <a:rPr lang="en-CA" dirty="0"/>
+              <a:t>Tends to not be too negatively impacted by parameters or different data – defaults work well. </a:t>
+            </a:r>
+          </a:p>
+          <a:p>
+            <a:r>
+              <a:rPr lang="en-CA" dirty="0"/>
+              <a:t>The actual best performer depends on model complexity, data, and the shape of the gradient curve. </a:t>
+            </a:r>
+          </a:p>
+          <a:p>
+            <a:r>
+              <a:rPr lang="en-CA" dirty="0"/>
+              <a:t>There’s several variants similar-</a:t>
             </a:r>
             <a:r>
               <a:rPr lang="en-CA" dirty="0" err="1"/>
-              <a:t>fp</a:t>
+              <a:t>ish</a:t>
             </a:r>
             <a:r>
               <a:rPr lang="en-CA" dirty="0"/>
-              <a:t>/bp through all of the data. </a:t>
-            </a:r>
-          </a:p>
-          <a:p>
-            <a:pPr lvl="1"/>
-            <a:r>
-              <a:rPr lang="en-CA" dirty="0"/>
-              <a:t>Easiest method is to set early stopping and let the computer figure it out. </a:t>
-            </a:r>
-          </a:p>
-          <a:p>
-            <a:pPr lvl="1"/>
-            <a:r>
-              <a:rPr lang="en-CA" dirty="0"/>
-              <a:t>Really big models might only have one epoch through the data total. </a:t>
-            </a:r>
-          </a:p>
-          <a:p>
-            <a:r>
-              <a:rPr lang="en-CA" dirty="0"/>
-              <a:t>Batches are how many records to process before updating weights. </a:t>
-            </a:r>
-          </a:p>
-          <a:p>
-            <a:pPr lvl="1"/>
-            <a:r>
-              <a:rPr lang="en-CA" dirty="0"/>
-              <a:t>Just like regular gradient descent – higher is more stable, smaller more erratic. </a:t>
-            </a:r>
-          </a:p>
-          <a:p>
-            <a:pPr lvl="1"/>
-            <a:r>
-              <a:rPr lang="en-CA" dirty="0"/>
-              <a:t>Limited at the top end by memory capacity. </a:t>
-            </a:r>
-          </a:p>
-          <a:p>
-            <a:pPr lvl="1"/>
-            <a:r>
-              <a:rPr lang="en-CA" dirty="0"/>
-              <a:t>Large vs small is still a matter of debate and varies by data. </a:t>
-            </a:r>
-          </a:p>
-          <a:p>
-            <a:pPr lvl="1"/>
-            <a:r>
-              <a:rPr lang="en-CA" dirty="0"/>
-              <a:t>Recently, smaller batches (as small as 2 -32) seems to offer better generalizable models. </a:t>
-            </a:r>
-          </a:p>
-          <a:p>
-            <a:pPr lvl="1"/>
-            <a:r>
-              <a:rPr lang="en-CA" dirty="0"/>
-              <a:t>Big batches may process </a:t>
-            </a:r>
-            <a:r>
-              <a:rPr lang="en-CA" i="1" dirty="0"/>
-              <a:t>far</a:t>
-            </a:r>
-            <a:r>
-              <a:rPr lang="en-CA" dirty="0"/>
-              <a:t> faster – better HW utilization and fewer weight updates. </a:t>
-            </a:r>
-          </a:p>
-          <a:p>
-            <a:pPr lvl="2"/>
-            <a:r>
-              <a:rPr lang="en-CA" dirty="0"/>
-              <a:t>Think – weight matrix per layer is </a:t>
-            </a:r>
-            <a:r>
-              <a:rPr lang="en-CA" dirty="0" err="1"/>
-              <a:t>input_size</a:t>
-            </a:r>
-            <a:r>
-              <a:rPr lang="en-CA" dirty="0"/>
-              <a:t> * </a:t>
-            </a:r>
-            <a:r>
-              <a:rPr lang="en-CA" dirty="0" err="1"/>
-              <a:t>output_size</a:t>
-            </a:r>
-            <a:r>
-              <a:rPr lang="en-CA" dirty="0"/>
-              <a:t>. 512 * 512 = ~250k updates</a:t>
-            </a:r>
+              <a:t> to Adam, simpler SGD may perform better on ‘simple’ NN. </a:t>
+            </a:r>
+            <a:endParaRPr lang="LID4096" dirty="0"/>
           </a:p>
         </p:txBody>
       </p:sp>
     </p:spTree>
     <p:extLst>
       <p:ext uri="{BB962C8B-B14F-4D97-AF65-F5344CB8AC3E}">
-        <p14:creationId xmlns:p14="http://schemas.microsoft.com/office/powerpoint/2010/main" val="1589937291"/>
+        <p14:creationId xmlns:p14="http://schemas.microsoft.com/office/powerpoint/2010/main" val="1375585324"/>
       </p:ext>
     </p:extLst>
   </p:cSld>
@@ -5989,7 +7496,7 @@
 </p:sld>
 </file>
 
-<file path=ppt/slides/slide22.xml><?xml version="1.0" encoding="utf-8"?>
+<file path=ppt/slides/slide3.xml><?xml version="1.0" encoding="utf-8"?>
 <p:sld xmlns:a="http://schemas.openxmlformats.org/drawingml/2006/main" xmlns:r="http://schemas.openxmlformats.org/officeDocument/2006/relationships" xmlns:p="http://schemas.openxmlformats.org/presentationml/2006/main">
   <p:cSld>
     <p:spTree>
@@ -6011,7 +7518,7 @@
           <p:cNvPr id="2" name="Title 1">
             <a:extLst>
               <a:ext uri="{FF2B5EF4-FFF2-40B4-BE49-F238E27FC236}">
-                <a16:creationId xmlns:a16="http://schemas.microsoft.com/office/drawing/2014/main" id="{34986ED5-DCBC-44E8-A70B-39E557577940}"/>
+                <a16:creationId xmlns:a16="http://schemas.microsoft.com/office/drawing/2014/main" id="{C714B66D-AFB2-A3EE-5997-4D1F0B95FC89}"/>
               </a:ext>
             </a:extLst>
           </p:cNvPr>
@@ -6028,10 +7535,9 @@
           <a:lstStyle/>
           <a:p>
             <a:r>
-              <a:rPr lang="en-CA" dirty="0"/>
-              <a:t>Optimizer</a:t>
-            </a:r>
-            <a:endParaRPr lang="LID4096" dirty="0"/>
+              <a:rPr lang="en-US" dirty="0"/>
+              <a:t>Project (Other Class) Stuff</a:t>
+            </a:r>
           </a:p>
         </p:txBody>
       </p:sp>
@@ -6040,7 +7546,7 @@
           <p:cNvPr id="3" name="Content Placeholder 2">
             <a:extLst>
               <a:ext uri="{FF2B5EF4-FFF2-40B4-BE49-F238E27FC236}">
-                <a16:creationId xmlns:a16="http://schemas.microsoft.com/office/drawing/2014/main" id="{4B2CD011-BB37-4394-B021-0011F0FE5371}"/>
+                <a16:creationId xmlns:a16="http://schemas.microsoft.com/office/drawing/2014/main" id="{20141979-88C3-CEA4-3B52-F2E898F296B1}"/>
               </a:ext>
             </a:extLst>
           </p:cNvPr>
@@ -6053,8 +7559,8 @@
         </p:nvSpPr>
         <p:spPr>
           <a:xfrm>
-            <a:off x="1064871" y="1853754"/>
-            <a:ext cx="10637134" cy="4199727"/>
+            <a:off x="728663" y="1853754"/>
+            <a:ext cx="11058525" cy="4199727"/>
           </a:xfrm>
         </p:spPr>
         <p:txBody>
@@ -6064,77 +7570,75 @@
           <a:lstStyle/>
           <a:p>
             <a:r>
-              <a:rPr lang="en-CA" dirty="0"/>
-              <a:t>The optimizer is the algorithm used for gradient descent. </a:t>
-            </a:r>
-          </a:p>
-          <a:p>
-            <a:r>
-              <a:rPr lang="en-CA" dirty="0"/>
-              <a:t>The internal details aren’t super important for us, at least for now. </a:t>
-            </a:r>
-          </a:p>
-          <a:p>
-            <a:r>
-              <a:rPr lang="en-CA" dirty="0"/>
-              <a:t>Adam is the most common and is a good choice for most scenarios:</a:t>
-            </a:r>
-          </a:p>
-          <a:p>
-            <a:pPr lvl="1"/>
-            <a:r>
-              <a:rPr lang="en-CA" dirty="0"/>
-              <a:t>Converges efficiently – manages different rates for each gradient. </a:t>
-            </a:r>
-          </a:p>
-          <a:p>
-            <a:pPr lvl="1"/>
-            <a:r>
-              <a:rPr lang="en-CA" dirty="0"/>
-              <a:t>Computation and memory efficient. </a:t>
-            </a:r>
-          </a:p>
-          <a:p>
-            <a:pPr lvl="1"/>
-            <a:r>
-              <a:rPr lang="en-CA" dirty="0"/>
-              <a:t>Adapts separate learning rates for each parameter using moving averages of several moments. </a:t>
-            </a:r>
-          </a:p>
-          <a:p>
-            <a:pPr lvl="1"/>
-            <a:r>
-              <a:rPr lang="en-CA" dirty="0"/>
-              <a:t>Tends to not be too negatively impacted by parameters or different data – defaults work well. </a:t>
-            </a:r>
-          </a:p>
-          <a:p>
-            <a:r>
-              <a:rPr lang="en-CA" dirty="0"/>
-              <a:t>The actual best performer depends on model complexity, data, and the shape of the gradient curve. </a:t>
-            </a:r>
-          </a:p>
-          <a:p>
-            <a:r>
-              <a:rPr lang="en-CA" dirty="0"/>
-              <a:t>There’s several variants similar-</a:t>
-            </a:r>
-            <a:r>
-              <a:rPr lang="en-CA" dirty="0" err="1"/>
-              <a:t>ish</a:t>
-            </a:r>
-            <a:r>
-              <a:rPr lang="en-CA" dirty="0"/>
-              <a:t> to Adam, simpler SGD may perform better on ‘simple’ NN. </a:t>
-            </a:r>
-            <a:endParaRPr lang="LID4096" dirty="0"/>
+              <a:rPr lang="en-US" dirty="0"/>
+              <a:t>If you are still doing real estate, think about large scale feature construction. </a:t>
+            </a:r>
+          </a:p>
+          <a:p>
+            <a:r>
+              <a:rPr lang="en-US" dirty="0"/>
+              <a:t>You can make many features from latitude and longitude that may matter. </a:t>
+            </a:r>
+          </a:p>
+          <a:p>
+            <a:pPr lvl="1"/>
+            <a:r>
+              <a:rPr lang="en-US" dirty="0"/>
+              <a:t>I’d make a lot of them, since you have a lot of data, and let the model sort it out. </a:t>
+            </a:r>
+          </a:p>
+          <a:p>
+            <a:r>
+              <a:rPr lang="en-US" dirty="0"/>
+              <a:t>Directly calculable via spatial joins and spatial files you can find online (Google mapping/spatial/</a:t>
+            </a:r>
+            <a:r>
+              <a:rPr lang="en-US" dirty="0" err="1"/>
+              <a:t>gis</a:t>
+            </a:r>
+            <a:r>
+              <a:rPr lang="en-US" dirty="0"/>
+              <a:t>):</a:t>
+            </a:r>
+          </a:p>
+          <a:p>
+            <a:pPr lvl="1"/>
+            <a:r>
+              <a:rPr lang="en-US" dirty="0"/>
+              <a:t>Distance from almost anything – roads, schools, water, commerce, neighbors, etc.</a:t>
+            </a:r>
+          </a:p>
+          <a:p>
+            <a:pPr lvl="1"/>
+            <a:r>
+              <a:rPr lang="en-US" dirty="0"/>
+              <a:t>Stats – density, comparison to neighbors, trends, crime, construction, census data (wealth, education, etc.)</a:t>
+            </a:r>
+          </a:p>
+          <a:p>
+            <a:r>
+              <a:rPr lang="en-US" dirty="0"/>
+              <a:t>Calculable with potentially free services online – time to get places, real estate stuff, sun. </a:t>
+            </a:r>
+          </a:p>
+          <a:p>
+            <a:r>
+              <a:rPr lang="en-US" dirty="0"/>
+              <a:t>Possible with large scale scraping – real estate data, all kinds of other stuff. </a:t>
+            </a:r>
+          </a:p>
+          <a:p>
+            <a:r>
+              <a:rPr lang="en-US" dirty="0"/>
+              <a:t>I’d try to cast as wide a net as possible and get almost anything I could automate as a start. </a:t>
+            </a:r>
           </a:p>
         </p:txBody>
       </p:sp>
     </p:spTree>
     <p:extLst>
       <p:ext uri="{BB962C8B-B14F-4D97-AF65-F5344CB8AC3E}">
-        <p14:creationId xmlns:p14="http://schemas.microsoft.com/office/powerpoint/2010/main" val="1375585324"/>
+        <p14:creationId xmlns:p14="http://schemas.microsoft.com/office/powerpoint/2010/main" val="3300512849"/>
       </p:ext>
     </p:extLst>
   </p:cSld>
@@ -6144,7 +7648,7 @@
 </p:sld>
 </file>
 
-<file path=ppt/slides/slide23.xml><?xml version="1.0" encoding="utf-8"?>
+<file path=ppt/slides/slide30.xml><?xml version="1.0" encoding="utf-8"?>
 <p:sld xmlns:a="http://schemas.openxmlformats.org/drawingml/2006/main" xmlns:r="http://schemas.openxmlformats.org/officeDocument/2006/relationships" xmlns:p="http://schemas.openxmlformats.org/presentationml/2006/main">
   <p:cSld>
     <p:spTree>
@@ -6262,7 +7766,7 @@
 </p:sld>
 </file>
 
-<file path=ppt/slides/slide24.xml><?xml version="1.0" encoding="utf-8"?>
+<file path=ppt/slides/slide31.xml><?xml version="1.0" encoding="utf-8"?>
 <p:sld xmlns:a="http://schemas.openxmlformats.org/drawingml/2006/main" xmlns:r="http://schemas.openxmlformats.org/officeDocument/2006/relationships" xmlns:p="http://schemas.openxmlformats.org/presentationml/2006/main">
   <p:cSld>
     <p:spTree>
@@ -6392,7 +7896,7 @@
 </p:sld>
 </file>
 
-<file path=ppt/slides/slide25.xml><?xml version="1.0" encoding="utf-8"?>
+<file path=ppt/slides/slide32.xml><?xml version="1.0" encoding="utf-8"?>
 <p:sld xmlns:a="http://schemas.openxmlformats.org/drawingml/2006/main" xmlns:r="http://schemas.openxmlformats.org/officeDocument/2006/relationships" xmlns:p="http://schemas.openxmlformats.org/presentationml/2006/main">
   <p:cSld>
     <p:bg>
@@ -6610,7 +8114,7 @@
 </p:sld>
 </file>
 
-<file path=ppt/slides/slide26.xml><?xml version="1.0" encoding="utf-8"?>
+<file path=ppt/slides/slide33.xml><?xml version="1.0" encoding="utf-8"?>
 <p:sld xmlns:a="http://schemas.openxmlformats.org/drawingml/2006/main" xmlns:r="http://schemas.openxmlformats.org/officeDocument/2006/relationships" xmlns:p="http://schemas.openxmlformats.org/presentationml/2006/main">
   <p:cSld>
     <p:spTree>
@@ -6693,7 +8197,7 @@
 </p:sld>
 </file>
 
-<file path=ppt/slides/slide27.xml><?xml version="1.0" encoding="utf-8"?>
+<file path=ppt/slides/slide34.xml><?xml version="1.0" encoding="utf-8"?>
 <p:sld xmlns:a="http://schemas.openxmlformats.org/drawingml/2006/main" xmlns:r="http://schemas.openxmlformats.org/officeDocument/2006/relationships" xmlns:p="http://schemas.openxmlformats.org/presentationml/2006/main">
   <p:cSld>
     <p:bg>
@@ -7010,7 +8514,7 @@
 </p:sld>
 </file>
 
-<file path=ppt/slides/slide28.xml><?xml version="1.0" encoding="utf-8"?>
+<file path=ppt/slides/slide35.xml><?xml version="1.0" encoding="utf-8"?>
 <p:sld xmlns:a="http://schemas.openxmlformats.org/drawingml/2006/main" xmlns:r="http://schemas.openxmlformats.org/officeDocument/2006/relationships" xmlns:p="http://schemas.openxmlformats.org/presentationml/2006/main">
   <p:cSld>
     <p:spTree>
@@ -7177,7 +8681,7 @@
 </p:sld>
 </file>
 
-<file path=ppt/slides/slide29.xml><?xml version="1.0" encoding="utf-8"?>
+<file path=ppt/slides/slide36.xml><?xml version="1.0" encoding="utf-8"?>
 <p:sld xmlns:a="http://schemas.openxmlformats.org/drawingml/2006/main" xmlns:r="http://schemas.openxmlformats.org/officeDocument/2006/relationships" xmlns:p="http://schemas.openxmlformats.org/presentationml/2006/main">
   <p:cSld>
     <p:spTree>
@@ -7305,159 +8809,7 @@
 </p:sld>
 </file>
 
-<file path=ppt/slides/slide3.xml><?xml version="1.0" encoding="utf-8"?>
-<p:sld xmlns:a="http://schemas.openxmlformats.org/drawingml/2006/main" xmlns:r="http://schemas.openxmlformats.org/officeDocument/2006/relationships" xmlns:p="http://schemas.openxmlformats.org/presentationml/2006/main">
-  <p:cSld>
-    <p:spTree>
-      <p:nvGrpSpPr>
-        <p:cNvPr id="1" name=""/>
-        <p:cNvGrpSpPr/>
-        <p:nvPr/>
-      </p:nvGrpSpPr>
-      <p:grpSpPr>
-        <a:xfrm>
-          <a:off x="0" y="0"/>
-          <a:ext cx="0" cy="0"/>
-          <a:chOff x="0" y="0"/>
-          <a:chExt cx="0" cy="0"/>
-        </a:xfrm>
-      </p:grpSpPr>
-      <p:sp>
-        <p:nvSpPr>
-          <p:cNvPr id="2" name="Title 1">
-            <a:extLst>
-              <a:ext uri="{FF2B5EF4-FFF2-40B4-BE49-F238E27FC236}">
-                <a16:creationId xmlns:a16="http://schemas.microsoft.com/office/drawing/2014/main" id="{C714B66D-AFB2-A3EE-5997-4D1F0B95FC89}"/>
-              </a:ext>
-            </a:extLst>
-          </p:cNvPr>
-          <p:cNvSpPr>
-            <a:spLocks noGrp="1"/>
-          </p:cNvSpPr>
-          <p:nvPr>
-            <p:ph type="title"/>
-          </p:nvPr>
-        </p:nvSpPr>
-        <p:spPr/>
-        <p:txBody>
-          <a:bodyPr/>
-          <a:lstStyle/>
-          <a:p>
-            <a:r>
-              <a:rPr lang="en-US" dirty="0"/>
-              <a:t>Project (Other Class) Stuff</a:t>
-            </a:r>
-          </a:p>
-        </p:txBody>
-      </p:sp>
-      <p:sp>
-        <p:nvSpPr>
-          <p:cNvPr id="3" name="Content Placeholder 2">
-            <a:extLst>
-              <a:ext uri="{FF2B5EF4-FFF2-40B4-BE49-F238E27FC236}">
-                <a16:creationId xmlns:a16="http://schemas.microsoft.com/office/drawing/2014/main" id="{20141979-88C3-CEA4-3B52-F2E898F296B1}"/>
-              </a:ext>
-            </a:extLst>
-          </p:cNvPr>
-          <p:cNvSpPr>
-            <a:spLocks noGrp="1"/>
-          </p:cNvSpPr>
-          <p:nvPr>
-            <p:ph idx="1"/>
-          </p:nvPr>
-        </p:nvSpPr>
-        <p:spPr>
-          <a:xfrm>
-            <a:off x="728663" y="1853754"/>
-            <a:ext cx="11058525" cy="4199727"/>
-          </a:xfrm>
-        </p:spPr>
-        <p:txBody>
-          <a:bodyPr>
-            <a:normAutofit/>
-          </a:bodyPr>
-          <a:lstStyle/>
-          <a:p>
-            <a:r>
-              <a:rPr lang="en-US" dirty="0"/>
-              <a:t>If you are still doing real estate, think about large scale feature construction. </a:t>
-            </a:r>
-          </a:p>
-          <a:p>
-            <a:r>
-              <a:rPr lang="en-US" dirty="0"/>
-              <a:t>You can make many features from latitude and longitude that may matter. </a:t>
-            </a:r>
-          </a:p>
-          <a:p>
-            <a:pPr lvl="1"/>
-            <a:r>
-              <a:rPr lang="en-US" dirty="0"/>
-              <a:t>I’d make a lot of them, since you have a lot of data, and let the model sort it out. </a:t>
-            </a:r>
-          </a:p>
-          <a:p>
-            <a:r>
-              <a:rPr lang="en-US" dirty="0"/>
-              <a:t>Directly calculable via spatial joins and spatial files you can find online (Google mapping/spatial/</a:t>
-            </a:r>
-            <a:r>
-              <a:rPr lang="en-US" dirty="0" err="1"/>
-              <a:t>gis</a:t>
-            </a:r>
-            <a:r>
-              <a:rPr lang="en-US" dirty="0"/>
-              <a:t>):</a:t>
-            </a:r>
-          </a:p>
-          <a:p>
-            <a:pPr lvl="1"/>
-            <a:r>
-              <a:rPr lang="en-US" dirty="0"/>
-              <a:t>Distance from almost anything – roads, schools, water, commerce, neighbors, etc.</a:t>
-            </a:r>
-          </a:p>
-          <a:p>
-            <a:pPr lvl="1"/>
-            <a:r>
-              <a:rPr lang="en-US" dirty="0"/>
-              <a:t>Stats – density, comparison to neighbors, trends, crime, construction, census data (wealth, education, etc.)</a:t>
-            </a:r>
-          </a:p>
-          <a:p>
-            <a:r>
-              <a:rPr lang="en-US" dirty="0"/>
-              <a:t>Calculable with potentially free services online – time to get places, real estate stuff, sun. </a:t>
-            </a:r>
-          </a:p>
-          <a:p>
-            <a:r>
-              <a:rPr lang="en-US" dirty="0"/>
-              <a:t>Possible with large scale scraping – real estate data, all kinds of other stuff. </a:t>
-            </a:r>
-          </a:p>
-          <a:p>
-            <a:r>
-              <a:rPr lang="en-US" dirty="0"/>
-              <a:t>I’d try to cast as wide a net as possible and get almost anything I could automate as a start. </a:t>
-            </a:r>
-          </a:p>
-        </p:txBody>
-      </p:sp>
-    </p:spTree>
-    <p:extLst>
-      <p:ext uri="{BB962C8B-B14F-4D97-AF65-F5344CB8AC3E}">
-        <p14:creationId xmlns:p14="http://schemas.microsoft.com/office/powerpoint/2010/main" val="3300512849"/>
-      </p:ext>
-    </p:extLst>
-  </p:cSld>
-  <p:clrMapOvr>
-    <a:masterClrMapping/>
-  </p:clrMapOvr>
-</p:sld>
-</file>
-
-<file path=ppt/slides/slide30.xml><?xml version="1.0" encoding="utf-8"?>
+<file path=ppt/slides/slide37.xml><?xml version="1.0" encoding="utf-8"?>
 <p:sld xmlns:a="http://schemas.openxmlformats.org/drawingml/2006/main" xmlns:r="http://schemas.openxmlformats.org/officeDocument/2006/relationships" xmlns:p="http://schemas.openxmlformats.org/presentationml/2006/main">
   <p:cSld>
     <p:bg>
@@ -7706,1115 +9058,6 @@
     <p:extLst>
       <p:ext uri="{BB962C8B-B14F-4D97-AF65-F5344CB8AC3E}">
         <p14:creationId xmlns:p14="http://schemas.microsoft.com/office/powerpoint/2010/main" val="587557089"/>
-      </p:ext>
-    </p:extLst>
-  </p:cSld>
-  <p:clrMapOvr>
-    <a:masterClrMapping/>
-  </p:clrMapOvr>
-</p:sld>
-</file>
-
-<file path=ppt/slides/slide31.xml><?xml version="1.0" encoding="utf-8"?>
-<p:sld xmlns:a="http://schemas.openxmlformats.org/drawingml/2006/main" xmlns:r="http://schemas.openxmlformats.org/officeDocument/2006/relationships" xmlns:p="http://schemas.openxmlformats.org/presentationml/2006/main">
-  <p:cSld>
-    <p:bg>
-      <p:bgPr>
-        <a:gradFill rotWithShape="1">
-          <a:gsLst>
-            <a:gs pos="0">
-              <a:schemeClr val="bg2">
-                <a:tint val="94000"/>
-                <a:satMod val="80000"/>
-                <a:lumMod val="106000"/>
-              </a:schemeClr>
-            </a:gs>
-            <a:gs pos="100000">
-              <a:schemeClr val="bg2">
-                <a:shade val="80000"/>
-              </a:schemeClr>
-            </a:gs>
-          </a:gsLst>
-          <a:path path="circle">
-            <a:fillToRect l="43000" r="43000" b="100000"/>
-          </a:path>
-        </a:gradFill>
-        <a:effectLst/>
-      </p:bgPr>
-    </p:bg>
-    <p:spTree>
-      <p:nvGrpSpPr>
-        <p:cNvPr id="1" name=""/>
-        <p:cNvGrpSpPr/>
-        <p:nvPr/>
-      </p:nvGrpSpPr>
-      <p:grpSpPr>
-        <a:xfrm>
-          <a:off x="0" y="0"/>
-          <a:ext cx="0" cy="0"/>
-          <a:chOff x="0" y="0"/>
-          <a:chExt cx="0" cy="0"/>
-        </a:xfrm>
-      </p:grpSpPr>
-      <p:sp>
-        <p:nvSpPr>
-          <p:cNvPr id="2" name="Title 1">
-            <a:extLst>
-              <a:ext uri="{FF2B5EF4-FFF2-40B4-BE49-F238E27FC236}">
-                <a16:creationId xmlns:a16="http://schemas.microsoft.com/office/drawing/2014/main" id="{40507B04-F2DB-98A4-D942-BFC77170B7CC}"/>
-              </a:ext>
-            </a:extLst>
-          </p:cNvPr>
-          <p:cNvSpPr>
-            <a:spLocks noGrp="1"/>
-          </p:cNvSpPr>
-          <p:nvPr>
-            <p:ph type="title"/>
-          </p:nvPr>
-        </p:nvSpPr>
-        <p:spPr>
-          <a:xfrm>
-            <a:off x="1451579" y="804519"/>
-            <a:ext cx="9603275" cy="1049235"/>
-          </a:xfrm>
-        </p:spPr>
-        <p:txBody>
-          <a:bodyPr>
-            <a:normAutofit/>
-          </a:bodyPr>
-          <a:lstStyle/>
-          <a:p>
-            <a:r>
-              <a:rPr lang="en-US" dirty="0"/>
-              <a:t>Batch Normalization</a:t>
-            </a:r>
-          </a:p>
-        </p:txBody>
-      </p:sp>
-      <p:pic>
-        <p:nvPicPr>
-          <p:cNvPr id="2050" name="Picture 2">
-            <a:extLst>
-              <a:ext uri="{FF2B5EF4-FFF2-40B4-BE49-F238E27FC236}">
-                <a16:creationId xmlns:a16="http://schemas.microsoft.com/office/drawing/2014/main" id="{DACB7CF9-B17A-78F0-88AC-6F1FA8C4D4E2}"/>
-              </a:ext>
-            </a:extLst>
-          </p:cNvPr>
-          <p:cNvPicPr>
-            <a:picLocks noChangeAspect="1" noChangeArrowheads="1"/>
-          </p:cNvPicPr>
-          <p:nvPr/>
-        </p:nvPicPr>
-        <p:blipFill rotWithShape="1">
-          <a:blip r:embed="rId2">
-            <a:extLst>
-              <a:ext uri="{28A0092B-C50C-407E-A947-70E740481C1C}">
-                <a14:useLocalDpi xmlns:a14="http://schemas.microsoft.com/office/drawing/2010/main" val="0"/>
-              </a:ext>
-            </a:extLst>
-          </a:blip>
-          <a:srcRect l="15422"/>
-          <a:stretch/>
-        </p:blipFill>
-        <p:spPr bwMode="auto">
-          <a:xfrm>
-            <a:off x="1" y="1853754"/>
-            <a:ext cx="4902678" cy="2695444"/>
-          </a:xfrm>
-          <a:prstGeom prst="rect">
-            <a:avLst/>
-          </a:prstGeom>
-          <a:noFill/>
-          <a:extLst>
-            <a:ext uri="{909E8E84-426E-40DD-AFC4-6F175D3DCCD1}">
-              <a14:hiddenFill xmlns:a14="http://schemas.microsoft.com/office/drawing/2010/main">
-                <a:solidFill>
-                  <a:srgbClr val="FFFFFF"/>
-                </a:solidFill>
-              </a14:hiddenFill>
-            </a:ext>
-          </a:extLst>
-        </p:spPr>
-      </p:pic>
-      <p:sp>
-        <p:nvSpPr>
-          <p:cNvPr id="3" name="Content Placeholder 2">
-            <a:extLst>
-              <a:ext uri="{FF2B5EF4-FFF2-40B4-BE49-F238E27FC236}">
-                <a16:creationId xmlns:a16="http://schemas.microsoft.com/office/drawing/2014/main" id="{04C7B768-B788-7A3C-3953-7744E3C3FF4D}"/>
-              </a:ext>
-            </a:extLst>
-          </p:cNvPr>
-          <p:cNvSpPr>
-            <a:spLocks noGrp="1"/>
-          </p:cNvSpPr>
-          <p:nvPr>
-            <p:ph idx="1"/>
-          </p:nvPr>
-        </p:nvSpPr>
-        <p:spPr>
-          <a:xfrm>
-            <a:off x="5208609" y="1853754"/>
-            <a:ext cx="6983392" cy="4199727"/>
-          </a:xfrm>
-        </p:spPr>
-        <p:txBody>
-          <a:bodyPr>
-            <a:normAutofit/>
-          </a:bodyPr>
-          <a:lstStyle/>
-          <a:p>
-            <a:r>
-              <a:rPr lang="en-US" dirty="0"/>
-              <a:t>Another gradient maintaining technique is batch normalization. </a:t>
-            </a:r>
-          </a:p>
-          <a:p>
-            <a:r>
-              <a:rPr lang="en-US" dirty="0"/>
-              <a:t>Batch normalization will shift the distribution back to “the middle”, where gradients exist. </a:t>
-            </a:r>
-          </a:p>
-          <a:p>
-            <a:pPr lvl="1"/>
-            <a:r>
-              <a:rPr lang="en-US" dirty="0"/>
-              <a:t>“Flat” gradients may vanish – near 0/1 with sigmoid. </a:t>
-            </a:r>
-          </a:p>
-          <a:p>
-            <a:pPr lvl="1"/>
-            <a:r>
-              <a:rPr lang="en-US" dirty="0"/>
-              <a:t>In </a:t>
-            </a:r>
-            <a:r>
-              <a:rPr lang="en-US" dirty="0" err="1"/>
-              <a:t>relu</a:t>
-            </a:r>
-            <a:r>
-              <a:rPr lang="en-US" dirty="0"/>
-              <a:t>, may die and go negative where there’s no gradient. </a:t>
-            </a:r>
-          </a:p>
-          <a:p>
-            <a:r>
-              <a:rPr lang="en-US" dirty="0"/>
-              <a:t>Usually applied after dense layer, but can vary. </a:t>
-            </a:r>
-          </a:p>
-          <a:p>
-            <a:r>
-              <a:rPr lang="en-US" dirty="0"/>
-              <a:t>Can often allow higher learning rates to work.</a:t>
-            </a:r>
-          </a:p>
-          <a:p>
-            <a:r>
-              <a:rPr lang="en-US" dirty="0"/>
-              <a:t>Note: we should normalize normally still. </a:t>
-            </a:r>
-          </a:p>
-          <a:p>
-            <a:endParaRPr lang="en-US" dirty="0"/>
-          </a:p>
-        </p:txBody>
-      </p:sp>
-      <p:pic>
-        <p:nvPicPr>
-          <p:cNvPr id="4" name="Picture 3">
-            <a:extLst>
-              <a:ext uri="{FF2B5EF4-FFF2-40B4-BE49-F238E27FC236}">
-                <a16:creationId xmlns:a16="http://schemas.microsoft.com/office/drawing/2014/main" id="{365C0691-8F19-F627-1CEB-290C78CF3C16}"/>
-              </a:ext>
-            </a:extLst>
-          </p:cNvPr>
-          <p:cNvPicPr>
-            <a:picLocks noChangeAspect="1"/>
-          </p:cNvPicPr>
-          <p:nvPr/>
-        </p:nvPicPr>
-        <p:blipFill>
-          <a:blip r:embed="rId3"/>
-          <a:stretch>
-            <a:fillRect/>
-          </a:stretch>
-        </p:blipFill>
-        <p:spPr>
-          <a:xfrm>
-            <a:off x="0" y="4549198"/>
-            <a:ext cx="4317357" cy="2308802"/>
-          </a:xfrm>
-          <a:prstGeom prst="rect">
-            <a:avLst/>
-          </a:prstGeom>
-        </p:spPr>
-      </p:pic>
-    </p:spTree>
-    <p:extLst>
-      <p:ext uri="{BB962C8B-B14F-4D97-AF65-F5344CB8AC3E}">
-        <p14:creationId xmlns:p14="http://schemas.microsoft.com/office/powerpoint/2010/main" val="1687437132"/>
-      </p:ext>
-    </p:extLst>
-  </p:cSld>
-  <p:clrMapOvr>
-    <a:masterClrMapping/>
-  </p:clrMapOvr>
-</p:sld>
-</file>
-
-<file path=ppt/slides/slide32.xml><?xml version="1.0" encoding="utf-8"?>
-<p:sld xmlns:a="http://schemas.openxmlformats.org/drawingml/2006/main" xmlns:r="http://schemas.openxmlformats.org/officeDocument/2006/relationships" xmlns:p="http://schemas.openxmlformats.org/presentationml/2006/main">
-  <p:cSld>
-    <p:spTree>
-      <p:nvGrpSpPr>
-        <p:cNvPr id="1" name=""/>
-        <p:cNvGrpSpPr/>
-        <p:nvPr/>
-      </p:nvGrpSpPr>
-      <p:grpSpPr>
-        <a:xfrm>
-          <a:off x="0" y="0"/>
-          <a:ext cx="0" cy="0"/>
-          <a:chOff x="0" y="0"/>
-          <a:chExt cx="0" cy="0"/>
-        </a:xfrm>
-      </p:grpSpPr>
-      <p:sp>
-        <p:nvSpPr>
-          <p:cNvPr id="2" name="Title 1">
-            <a:extLst>
-              <a:ext uri="{FF2B5EF4-FFF2-40B4-BE49-F238E27FC236}">
-                <a16:creationId xmlns:a16="http://schemas.microsoft.com/office/drawing/2014/main" id="{12EB02ED-4B2D-A4D0-9A1B-F5D886A1D4DA}"/>
-              </a:ext>
-            </a:extLst>
-          </p:cNvPr>
-          <p:cNvSpPr>
-            <a:spLocks noGrp="1"/>
-          </p:cNvSpPr>
-          <p:nvPr>
-            <p:ph type="title"/>
-          </p:nvPr>
-        </p:nvSpPr>
-        <p:spPr/>
-        <p:txBody>
-          <a:bodyPr/>
-          <a:lstStyle/>
-          <a:p>
-            <a:endParaRPr lang="en-US"/>
-          </a:p>
-        </p:txBody>
-      </p:sp>
-      <p:sp>
-        <p:nvSpPr>
-          <p:cNvPr id="3" name="Content Placeholder 2">
-            <a:extLst>
-              <a:ext uri="{FF2B5EF4-FFF2-40B4-BE49-F238E27FC236}">
-                <a16:creationId xmlns:a16="http://schemas.microsoft.com/office/drawing/2014/main" id="{79262A70-7FB5-F2DE-F3DF-7165887D447B}"/>
-              </a:ext>
-            </a:extLst>
-          </p:cNvPr>
-          <p:cNvSpPr>
-            <a:spLocks noGrp="1"/>
-          </p:cNvSpPr>
-          <p:nvPr>
-            <p:ph idx="1"/>
-          </p:nvPr>
-        </p:nvSpPr>
-        <p:spPr/>
-        <p:txBody>
-          <a:bodyPr/>
-          <a:lstStyle/>
-          <a:p>
-            <a:endParaRPr lang="en-US"/>
-          </a:p>
-        </p:txBody>
-      </p:sp>
-      <p:pic>
-        <p:nvPicPr>
-          <p:cNvPr id="4098" name="Picture 2">
-            <a:extLst>
-              <a:ext uri="{FF2B5EF4-FFF2-40B4-BE49-F238E27FC236}">
-                <a16:creationId xmlns:a16="http://schemas.microsoft.com/office/drawing/2014/main" id="{2C2DDD5C-391D-91D2-A435-8110CC33187B}"/>
-              </a:ext>
-            </a:extLst>
-          </p:cNvPr>
-          <p:cNvPicPr>
-            <a:picLocks noChangeAspect="1" noChangeArrowheads="1"/>
-          </p:cNvPicPr>
-          <p:nvPr/>
-        </p:nvPicPr>
-        <p:blipFill>
-          <a:blip r:embed="rId2">
-            <a:extLst>
-              <a:ext uri="{28A0092B-C50C-407E-A947-70E740481C1C}">
-                <a14:useLocalDpi xmlns:a14="http://schemas.microsoft.com/office/drawing/2010/main" val="0"/>
-              </a:ext>
-            </a:extLst>
-          </a:blip>
-          <a:srcRect/>
-          <a:stretch>
-            <a:fillRect/>
-          </a:stretch>
-        </p:blipFill>
-        <p:spPr bwMode="auto">
-          <a:xfrm>
-            <a:off x="0" y="1400175"/>
-            <a:ext cx="12192000" cy="4057650"/>
-          </a:xfrm>
-          <a:prstGeom prst="rect">
-            <a:avLst/>
-          </a:prstGeom>
-          <a:noFill/>
-          <a:extLst>
-            <a:ext uri="{909E8E84-426E-40DD-AFC4-6F175D3DCCD1}">
-              <a14:hiddenFill xmlns:a14="http://schemas.microsoft.com/office/drawing/2010/main">
-                <a:solidFill>
-                  <a:srgbClr val="FFFFFF"/>
-                </a:solidFill>
-              </a14:hiddenFill>
-            </a:ext>
-          </a:extLst>
-        </p:spPr>
-      </p:pic>
-    </p:spTree>
-    <p:extLst>
-      <p:ext uri="{BB962C8B-B14F-4D97-AF65-F5344CB8AC3E}">
-        <p14:creationId xmlns:p14="http://schemas.microsoft.com/office/powerpoint/2010/main" val="3011999725"/>
-      </p:ext>
-    </p:extLst>
-  </p:cSld>
-  <p:clrMapOvr>
-    <a:masterClrMapping/>
-  </p:clrMapOvr>
-</p:sld>
-</file>
-
-<file path=ppt/slides/slide33.xml><?xml version="1.0" encoding="utf-8"?>
-<p:sld xmlns:a="http://schemas.openxmlformats.org/drawingml/2006/main" xmlns:r="http://schemas.openxmlformats.org/officeDocument/2006/relationships" xmlns:p="http://schemas.openxmlformats.org/presentationml/2006/main">
-  <p:cSld>
-    <p:spTree>
-      <p:nvGrpSpPr>
-        <p:cNvPr id="1" name=""/>
-        <p:cNvGrpSpPr/>
-        <p:nvPr/>
-      </p:nvGrpSpPr>
-      <p:grpSpPr>
-        <a:xfrm>
-          <a:off x="0" y="0"/>
-          <a:ext cx="0" cy="0"/>
-          <a:chOff x="0" y="0"/>
-          <a:chExt cx="0" cy="0"/>
-        </a:xfrm>
-      </p:grpSpPr>
-      <p:sp>
-        <p:nvSpPr>
-          <p:cNvPr id="2" name="Title 1">
-            <a:extLst>
-              <a:ext uri="{FF2B5EF4-FFF2-40B4-BE49-F238E27FC236}">
-                <a16:creationId xmlns:a16="http://schemas.microsoft.com/office/drawing/2014/main" id="{8E701F95-B618-A7AB-FF6B-7AF73C21932E}"/>
-              </a:ext>
-            </a:extLst>
-          </p:cNvPr>
-          <p:cNvSpPr>
-            <a:spLocks noGrp="1"/>
-          </p:cNvSpPr>
-          <p:nvPr>
-            <p:ph type="title"/>
-          </p:nvPr>
-        </p:nvSpPr>
-        <p:spPr/>
-        <p:txBody>
-          <a:bodyPr/>
-          <a:lstStyle/>
-          <a:p>
-            <a:r>
-              <a:rPr lang="en-US" dirty="0"/>
-              <a:t>Refresher - regularization</a:t>
-            </a:r>
-          </a:p>
-        </p:txBody>
-      </p:sp>
-      <p:sp>
-        <p:nvSpPr>
-          <p:cNvPr id="3" name="Content Placeholder 2">
-            <a:extLst>
-              <a:ext uri="{FF2B5EF4-FFF2-40B4-BE49-F238E27FC236}">
-                <a16:creationId xmlns:a16="http://schemas.microsoft.com/office/drawing/2014/main" id="{2E156C3E-5CAF-F8A6-E7F0-120D8C6CAFA5}"/>
-              </a:ext>
-            </a:extLst>
-          </p:cNvPr>
-          <p:cNvSpPr>
-            <a:spLocks noGrp="1"/>
-          </p:cNvSpPr>
-          <p:nvPr>
-            <p:ph idx="1"/>
-          </p:nvPr>
-        </p:nvSpPr>
-        <p:spPr>
-          <a:xfrm>
-            <a:off x="1451579" y="1853755"/>
-            <a:ext cx="9603275" cy="2265242"/>
-          </a:xfrm>
-        </p:spPr>
-        <p:txBody>
-          <a:bodyPr/>
-          <a:lstStyle/>
-          <a:p>
-            <a:r>
-              <a:rPr lang="en-US" dirty="0"/>
-              <a:t>We frequently/typically use some regularization in our models. </a:t>
-            </a:r>
-          </a:p>
-          <a:p>
-            <a:pPr lvl="1"/>
-            <a:r>
-              <a:rPr lang="en-US" dirty="0"/>
-              <a:t>Semi-standard as neural networks are large and flexible, and this constrains overfit. </a:t>
-            </a:r>
-          </a:p>
-          <a:p>
-            <a:pPr lvl="1"/>
-            <a:r>
-              <a:rPr lang="en-US" dirty="0"/>
-              <a:t>L1/L2 – works just as in regression, can be applied in layer as a hyperparameter. </a:t>
-            </a:r>
-          </a:p>
-          <a:p>
-            <a:pPr lvl="1"/>
-            <a:r>
-              <a:rPr lang="en-US" dirty="0"/>
-              <a:t>Dropout – removes some percentage of neurons randomly each batch of </a:t>
-            </a:r>
-            <a:r>
-              <a:rPr lang="en-US" b="1" dirty="0"/>
-              <a:t>training</a:t>
-            </a:r>
-            <a:r>
-              <a:rPr lang="en-US" dirty="0"/>
-              <a:t>, forcing learning to occur on the remainder. Applied as a layer, typically round 20—40% to start. </a:t>
-            </a:r>
-          </a:p>
-        </p:txBody>
-      </p:sp>
-      <p:pic>
-        <p:nvPicPr>
-          <p:cNvPr id="12290" name="Picture 2" descr="An illustration of the dropout mechanism within a multi-layer neural... |  Download Scientific Diagram">
-            <a:extLst>
-              <a:ext uri="{FF2B5EF4-FFF2-40B4-BE49-F238E27FC236}">
-                <a16:creationId xmlns:a16="http://schemas.microsoft.com/office/drawing/2014/main" id="{2AB7688B-0AD0-F5E0-0253-193C85677D34}"/>
-              </a:ext>
-            </a:extLst>
-          </p:cNvPr>
-          <p:cNvPicPr>
-            <a:picLocks noChangeAspect="1" noChangeArrowheads="1"/>
-          </p:cNvPicPr>
-          <p:nvPr/>
-        </p:nvPicPr>
-        <p:blipFill>
-          <a:blip r:embed="rId2">
-            <a:extLst>
-              <a:ext uri="{28A0092B-C50C-407E-A947-70E740481C1C}">
-                <a14:useLocalDpi xmlns:a14="http://schemas.microsoft.com/office/drawing/2010/main" val="0"/>
-              </a:ext>
-            </a:extLst>
-          </a:blip>
-          <a:srcRect/>
-          <a:stretch>
-            <a:fillRect/>
-          </a:stretch>
-        </p:blipFill>
-        <p:spPr bwMode="auto">
-          <a:xfrm>
-            <a:off x="1621461" y="3838427"/>
-            <a:ext cx="8949078" cy="2905818"/>
-          </a:xfrm>
-          <a:prstGeom prst="rect">
-            <a:avLst/>
-          </a:prstGeom>
-          <a:noFill/>
-          <a:extLst>
-            <a:ext uri="{909E8E84-426E-40DD-AFC4-6F175D3DCCD1}">
-              <a14:hiddenFill xmlns:a14="http://schemas.microsoft.com/office/drawing/2010/main">
-                <a:solidFill>
-                  <a:srgbClr val="FFFFFF"/>
-                </a:solidFill>
-              </a14:hiddenFill>
-            </a:ext>
-          </a:extLst>
-        </p:spPr>
-      </p:pic>
-    </p:spTree>
-    <p:extLst>
-      <p:ext uri="{BB962C8B-B14F-4D97-AF65-F5344CB8AC3E}">
-        <p14:creationId xmlns:p14="http://schemas.microsoft.com/office/powerpoint/2010/main" val="3865647208"/>
-      </p:ext>
-    </p:extLst>
-  </p:cSld>
-  <p:clrMapOvr>
-    <a:masterClrMapping/>
-  </p:clrMapOvr>
-</p:sld>
-</file>
-
-<file path=ppt/slides/slide34.xml><?xml version="1.0" encoding="utf-8"?>
-<p:sld xmlns:a="http://schemas.openxmlformats.org/drawingml/2006/main" xmlns:r="http://schemas.openxmlformats.org/officeDocument/2006/relationships" xmlns:p="http://schemas.openxmlformats.org/presentationml/2006/main">
-  <p:cSld>
-    <p:spTree>
-      <p:nvGrpSpPr>
-        <p:cNvPr id="1" name=""/>
-        <p:cNvGrpSpPr/>
-        <p:nvPr/>
-      </p:nvGrpSpPr>
-      <p:grpSpPr>
-        <a:xfrm>
-          <a:off x="0" y="0"/>
-          <a:ext cx="0" cy="0"/>
-          <a:chOff x="0" y="0"/>
-          <a:chExt cx="0" cy="0"/>
-        </a:xfrm>
-      </p:grpSpPr>
-      <p:sp>
-        <p:nvSpPr>
-          <p:cNvPr id="2" name="Title 1">
-            <a:extLst>
-              <a:ext uri="{FF2B5EF4-FFF2-40B4-BE49-F238E27FC236}">
-                <a16:creationId xmlns:a16="http://schemas.microsoft.com/office/drawing/2014/main" id="{8AB3D8A8-1279-C44F-AB18-28BCD74E016C}"/>
-              </a:ext>
-            </a:extLst>
-          </p:cNvPr>
-          <p:cNvSpPr>
-            <a:spLocks noGrp="1"/>
-          </p:cNvSpPr>
-          <p:nvPr>
-            <p:ph type="title"/>
-          </p:nvPr>
-        </p:nvSpPr>
-        <p:spPr/>
-        <p:txBody>
-          <a:bodyPr/>
-          <a:lstStyle/>
-          <a:p>
-            <a:r>
-              <a:rPr lang="en-US" dirty="0"/>
-              <a:t>Initialization </a:t>
-            </a:r>
-          </a:p>
-        </p:txBody>
-      </p:sp>
-      <p:sp>
-        <p:nvSpPr>
-          <p:cNvPr id="3" name="Content Placeholder 2">
-            <a:extLst>
-              <a:ext uri="{FF2B5EF4-FFF2-40B4-BE49-F238E27FC236}">
-                <a16:creationId xmlns:a16="http://schemas.microsoft.com/office/drawing/2014/main" id="{E6932690-B733-C245-A962-ECCC4BCA3B54}"/>
-              </a:ext>
-            </a:extLst>
-          </p:cNvPr>
-          <p:cNvSpPr>
-            <a:spLocks noGrp="1"/>
-          </p:cNvSpPr>
-          <p:nvPr>
-            <p:ph idx="1"/>
-          </p:nvPr>
-        </p:nvSpPr>
-        <p:spPr>
-          <a:xfrm>
-            <a:off x="1451579" y="1853754"/>
-            <a:ext cx="9603275" cy="4199727"/>
-          </a:xfrm>
-        </p:spPr>
-        <p:txBody>
-          <a:bodyPr>
-            <a:normAutofit lnSpcReduction="10000"/>
-          </a:bodyPr>
-          <a:lstStyle/>
-          <a:p>
-            <a:r>
-              <a:rPr lang="en-US" dirty="0"/>
-              <a:t>Initialization controls how the weight and bias values start. </a:t>
-            </a:r>
-          </a:p>
-          <a:p>
-            <a:r>
-              <a:rPr lang="en-US" dirty="0"/>
-              <a:t>Can be controlled via a parameter for each layer:</a:t>
-            </a:r>
-          </a:p>
-          <a:p>
-            <a:pPr lvl="1"/>
-            <a:r>
-              <a:rPr lang="en-US" dirty="0"/>
-              <a:t>Weight initialization is by default is “</a:t>
-            </a:r>
-            <a:r>
-              <a:rPr lang="en-US" dirty="0" err="1"/>
-              <a:t>glorot_uniform</a:t>
-            </a:r>
-            <a:r>
-              <a:rPr lang="en-US" dirty="0"/>
-              <a:t>” – a variety of random. </a:t>
-            </a:r>
-          </a:p>
-          <a:p>
-            <a:pPr lvl="1"/>
-            <a:r>
-              <a:rPr lang="en-US" dirty="0"/>
-              <a:t>Bias initialization defaults to 0. </a:t>
-            </a:r>
-          </a:p>
-          <a:p>
-            <a:pPr lvl="1"/>
-            <a:r>
-              <a:rPr lang="en-US" dirty="0"/>
-              <a:t>We can preset the output layer with the log of the expectation (for logit). </a:t>
-            </a:r>
-          </a:p>
-          <a:p>
-            <a:r>
-              <a:rPr lang="en-US" dirty="0"/>
-              <a:t>This can help the model train – both in speed and potential for convergence. </a:t>
-            </a:r>
-          </a:p>
-          <a:p>
-            <a:r>
-              <a:rPr lang="en-US" dirty="0"/>
-              <a:t>Imbalanced data – the data has a “bias” to start with. </a:t>
-            </a:r>
-          </a:p>
-          <a:p>
-            <a:pPr lvl="1"/>
-            <a:r>
-              <a:rPr lang="en-US" dirty="0"/>
-              <a:t>Set bias on output layer to the bias in the data. </a:t>
-            </a:r>
-          </a:p>
-          <a:p>
-            <a:pPr lvl="1"/>
-            <a:r>
-              <a:rPr lang="en-US" dirty="0"/>
-              <a:t>Network doesn’t need to learn the massive shift in bias. </a:t>
-            </a:r>
-          </a:p>
-          <a:p>
-            <a:pPr lvl="1"/>
-            <a:r>
-              <a:rPr lang="en-US" dirty="0"/>
-              <a:t>Faster convergence and more accuracy. </a:t>
-            </a:r>
-          </a:p>
-          <a:p>
-            <a:endParaRPr lang="en-US" dirty="0"/>
-          </a:p>
-        </p:txBody>
-      </p:sp>
-    </p:spTree>
-    <p:extLst>
-      <p:ext uri="{BB962C8B-B14F-4D97-AF65-F5344CB8AC3E}">
-        <p14:creationId xmlns:p14="http://schemas.microsoft.com/office/powerpoint/2010/main" val="2996444863"/>
-      </p:ext>
-    </p:extLst>
-  </p:cSld>
-  <p:clrMapOvr>
-    <a:masterClrMapping/>
-  </p:clrMapOvr>
-</p:sld>
-</file>
-
-<file path=ppt/slides/slide35.xml><?xml version="1.0" encoding="utf-8"?>
-<p:sld xmlns:a="http://schemas.openxmlformats.org/drawingml/2006/main" xmlns:r="http://schemas.openxmlformats.org/officeDocument/2006/relationships" xmlns:p="http://schemas.openxmlformats.org/presentationml/2006/main">
-  <p:cSld>
-    <p:spTree>
-      <p:nvGrpSpPr>
-        <p:cNvPr id="1" name=""/>
-        <p:cNvGrpSpPr/>
-        <p:nvPr/>
-      </p:nvGrpSpPr>
-      <p:grpSpPr>
-        <a:xfrm>
-          <a:off x="0" y="0"/>
-          <a:ext cx="0" cy="0"/>
-          <a:chOff x="0" y="0"/>
-          <a:chExt cx="0" cy="0"/>
-        </a:xfrm>
-      </p:grpSpPr>
-      <p:sp>
-        <p:nvSpPr>
-          <p:cNvPr id="2" name="Title 1">
-            <a:extLst>
-              <a:ext uri="{FF2B5EF4-FFF2-40B4-BE49-F238E27FC236}">
-                <a16:creationId xmlns:a16="http://schemas.microsoft.com/office/drawing/2014/main" id="{998811FD-FB04-14C3-51B0-20806479A3B8}"/>
-              </a:ext>
-            </a:extLst>
-          </p:cNvPr>
-          <p:cNvSpPr>
-            <a:spLocks noGrp="1"/>
-          </p:cNvSpPr>
-          <p:nvPr>
-            <p:ph type="title"/>
-          </p:nvPr>
-        </p:nvSpPr>
-        <p:spPr/>
-        <p:txBody>
-          <a:bodyPr/>
-          <a:lstStyle/>
-          <a:p>
-            <a:r>
-              <a:rPr lang="en-US" dirty="0"/>
-              <a:t>Neural Networks are Flexible</a:t>
-            </a:r>
-          </a:p>
-        </p:txBody>
-      </p:sp>
-      <p:sp>
-        <p:nvSpPr>
-          <p:cNvPr id="3" name="Content Placeholder 2">
-            <a:extLst>
-              <a:ext uri="{FF2B5EF4-FFF2-40B4-BE49-F238E27FC236}">
-                <a16:creationId xmlns:a16="http://schemas.microsoft.com/office/drawing/2014/main" id="{F27F93CB-38CB-BCDC-EB9C-1D1A84E32F49}"/>
-              </a:ext>
-            </a:extLst>
-          </p:cNvPr>
-          <p:cNvSpPr>
-            <a:spLocks noGrp="1"/>
-          </p:cNvSpPr>
-          <p:nvPr>
-            <p:ph idx="1"/>
-          </p:nvPr>
-        </p:nvSpPr>
-        <p:spPr>
-          <a:xfrm>
-            <a:off x="1451579" y="1853754"/>
-            <a:ext cx="9603275" cy="4199727"/>
-          </a:xfrm>
-        </p:spPr>
-        <p:txBody>
-          <a:bodyPr/>
-          <a:lstStyle/>
-          <a:p>
-            <a:r>
-              <a:rPr lang="en-US" dirty="0"/>
-              <a:t>This isn’t near all of the things that we can change in a neural network. </a:t>
-            </a:r>
-          </a:p>
-          <a:p>
-            <a:r>
-              <a:rPr lang="en-US" dirty="0"/>
-              <a:t>The flexibility in their learning as they grow means that a wide range of models that are ‘good enough’ will converge on a good solution. </a:t>
-            </a:r>
-          </a:p>
-          <a:p>
-            <a:pPr lvl="1"/>
-            <a:r>
-              <a:rPr lang="en-US" dirty="0"/>
-              <a:t>E.g. the image competition has models with widely different structures fighting for fractions of a percentage of accuracy in a task. </a:t>
-            </a:r>
-          </a:p>
-          <a:p>
-            <a:r>
-              <a:rPr lang="en-US" dirty="0"/>
-              <a:t>Mirror something that is known to work, unless experimenting (which is good). </a:t>
-            </a:r>
-          </a:p>
-          <a:p>
-            <a:r>
-              <a:rPr lang="en-US" dirty="0"/>
-              <a:t>Make reasonable choices, add some excess, regularization, and early stopping, let train. </a:t>
-            </a:r>
-          </a:p>
-          <a:p>
-            <a:pPr lvl="1"/>
-            <a:r>
-              <a:rPr lang="en-US" dirty="0"/>
-              <a:t>Adjust from here based on what you see. </a:t>
-            </a:r>
-          </a:p>
-          <a:p>
-            <a:r>
-              <a:rPr lang="en-US" dirty="0"/>
-              <a:t>Finding the perfect configuration as we did with a grid becomes time impractical quickly. </a:t>
-            </a:r>
-          </a:p>
-        </p:txBody>
-      </p:sp>
-    </p:spTree>
-    <p:extLst>
-      <p:ext uri="{BB962C8B-B14F-4D97-AF65-F5344CB8AC3E}">
-        <p14:creationId xmlns:p14="http://schemas.microsoft.com/office/powerpoint/2010/main" val="2910667997"/>
-      </p:ext>
-    </p:extLst>
-  </p:cSld>
-  <p:clrMapOvr>
-    <a:masterClrMapping/>
-  </p:clrMapOvr>
-</p:sld>
-</file>
-
-<file path=ppt/slides/slide36.xml><?xml version="1.0" encoding="utf-8"?>
-<p:sld xmlns:a="http://schemas.openxmlformats.org/drawingml/2006/main" xmlns:r="http://schemas.openxmlformats.org/officeDocument/2006/relationships" xmlns:p="http://schemas.openxmlformats.org/presentationml/2006/main" show="0">
-  <p:cSld>
-    <p:spTree>
-      <p:nvGrpSpPr>
-        <p:cNvPr id="1" name=""/>
-        <p:cNvGrpSpPr/>
-        <p:nvPr/>
-      </p:nvGrpSpPr>
-      <p:grpSpPr>
-        <a:xfrm>
-          <a:off x="0" y="0"/>
-          <a:ext cx="0" cy="0"/>
-          <a:chOff x="0" y="0"/>
-          <a:chExt cx="0" cy="0"/>
-        </a:xfrm>
-      </p:grpSpPr>
-      <p:sp>
-        <p:nvSpPr>
-          <p:cNvPr id="2" name="Title 1">
-            <a:extLst>
-              <a:ext uri="{FF2B5EF4-FFF2-40B4-BE49-F238E27FC236}">
-                <a16:creationId xmlns:a16="http://schemas.microsoft.com/office/drawing/2014/main" id="{EAF056FD-E697-5353-97FE-84FF67ABB289}"/>
-              </a:ext>
-            </a:extLst>
-          </p:cNvPr>
-          <p:cNvSpPr>
-            <a:spLocks noGrp="1"/>
-          </p:cNvSpPr>
-          <p:nvPr>
-            <p:ph type="title"/>
-          </p:nvPr>
-        </p:nvSpPr>
-        <p:spPr/>
-        <p:txBody>
-          <a:bodyPr/>
-          <a:lstStyle/>
-          <a:p>
-            <a:r>
-              <a:rPr lang="en-US" dirty="0"/>
-              <a:t>Other Tuning - Optimization</a:t>
-            </a:r>
-          </a:p>
-        </p:txBody>
-      </p:sp>
-      <p:sp>
-        <p:nvSpPr>
-          <p:cNvPr id="3" name="Content Placeholder 2">
-            <a:extLst>
-              <a:ext uri="{FF2B5EF4-FFF2-40B4-BE49-F238E27FC236}">
-                <a16:creationId xmlns:a16="http://schemas.microsoft.com/office/drawing/2014/main" id="{F044C5EC-E837-8A77-86C7-0C127E9A7BD8}"/>
-              </a:ext>
-            </a:extLst>
-          </p:cNvPr>
-          <p:cNvSpPr>
-            <a:spLocks noGrp="1"/>
-          </p:cNvSpPr>
-          <p:nvPr>
-            <p:ph idx="1"/>
-          </p:nvPr>
-        </p:nvSpPr>
-        <p:spPr>
-          <a:xfrm>
-            <a:off x="1451579" y="1853754"/>
-            <a:ext cx="9603275" cy="4199727"/>
-          </a:xfrm>
-        </p:spPr>
-        <p:txBody>
-          <a:bodyPr/>
-          <a:lstStyle/>
-          <a:p>
-            <a:r>
-              <a:rPr lang="en-US" dirty="0"/>
-              <a:t>There are a huge number of things that can be changed to tune a neural network model. </a:t>
-            </a:r>
-          </a:p>
-          <a:p>
-            <a:r>
-              <a:rPr lang="en-US" dirty="0"/>
-              <a:t>We are focusing mainly on the ‘structure’ type of things. </a:t>
-            </a:r>
-          </a:p>
-          <a:p>
-            <a:pPr lvl="1"/>
-            <a:r>
-              <a:rPr lang="en-US" dirty="0"/>
-              <a:t>Network size, layers, type, hyperparameters, regularizing (and similar) layers like normalization.</a:t>
-            </a:r>
-          </a:p>
-          <a:p>
-            <a:r>
-              <a:rPr lang="en-US" dirty="0"/>
-              <a:t>We are not really focusing on the optimization part - loss/gradient descent specific things. </a:t>
-            </a:r>
-          </a:p>
-          <a:p>
-            <a:pPr lvl="1"/>
-            <a:r>
-              <a:rPr lang="en-US" dirty="0"/>
-              <a:t>Learning rates, momentum, optimizers. </a:t>
-            </a:r>
-          </a:p>
-          <a:p>
-            <a:pPr lvl="1"/>
-            <a:r>
-              <a:rPr lang="en-US" dirty="0"/>
-              <a:t>This matters, but is more theoretical in theory, and scenario dependent in practice. </a:t>
-            </a:r>
-          </a:p>
-          <a:p>
-            <a:pPr lvl="1"/>
-            <a:r>
-              <a:rPr lang="en-US" dirty="0"/>
-              <a:t>Optimization is critical as problems get larger – converging quickly, or at all, can be hard. </a:t>
-            </a:r>
-          </a:p>
-          <a:p>
-            <a:r>
-              <a:rPr lang="en-US" dirty="0"/>
-              <a:t>For our usage, we can mainly try different learning rates, if needed. </a:t>
-            </a:r>
-          </a:p>
-        </p:txBody>
-      </p:sp>
-    </p:spTree>
-    <p:extLst>
-      <p:ext uri="{BB962C8B-B14F-4D97-AF65-F5344CB8AC3E}">
-        <p14:creationId xmlns:p14="http://schemas.microsoft.com/office/powerpoint/2010/main" val="1149088017"/>
-      </p:ext>
-    </p:extLst>
-  </p:cSld>
-  <p:clrMapOvr>
-    <a:masterClrMapping/>
-  </p:clrMapOvr>
-</p:sld>
-</file>
-
-<file path=ppt/slides/slide37.xml><?xml version="1.0" encoding="utf-8"?>
-<p:sld xmlns:a="http://schemas.openxmlformats.org/drawingml/2006/main" xmlns:r="http://schemas.openxmlformats.org/officeDocument/2006/relationships" xmlns:p="http://schemas.openxmlformats.org/presentationml/2006/main">
-  <p:cSld>
-    <p:spTree>
-      <p:nvGrpSpPr>
-        <p:cNvPr id="1" name=""/>
-        <p:cNvGrpSpPr/>
-        <p:nvPr/>
-      </p:nvGrpSpPr>
-      <p:grpSpPr>
-        <a:xfrm>
-          <a:off x="0" y="0"/>
-          <a:ext cx="0" cy="0"/>
-          <a:chOff x="0" y="0"/>
-          <a:chExt cx="0" cy="0"/>
-        </a:xfrm>
-      </p:grpSpPr>
-      <p:sp>
-        <p:nvSpPr>
-          <p:cNvPr id="2" name="Title 1">
-            <a:extLst>
-              <a:ext uri="{FF2B5EF4-FFF2-40B4-BE49-F238E27FC236}">
-                <a16:creationId xmlns:a16="http://schemas.microsoft.com/office/drawing/2014/main" id="{2D76F3B6-86DB-FFF0-6350-C1AA19E15476}"/>
-              </a:ext>
-            </a:extLst>
-          </p:cNvPr>
-          <p:cNvSpPr>
-            <a:spLocks noGrp="1"/>
-          </p:cNvSpPr>
-          <p:nvPr>
-            <p:ph type="title"/>
-          </p:nvPr>
-        </p:nvSpPr>
-        <p:spPr/>
-        <p:txBody>
-          <a:bodyPr/>
-          <a:lstStyle/>
-          <a:p>
-            <a:r>
-              <a:rPr lang="en-US" dirty="0"/>
-              <a:t>Tuning From A Loss Plot</a:t>
-            </a:r>
-          </a:p>
-        </p:txBody>
-      </p:sp>
-      <p:sp>
-        <p:nvSpPr>
-          <p:cNvPr id="3" name="Content Placeholder 2">
-            <a:extLst>
-              <a:ext uri="{FF2B5EF4-FFF2-40B4-BE49-F238E27FC236}">
-                <a16:creationId xmlns:a16="http://schemas.microsoft.com/office/drawing/2014/main" id="{915E008A-9A08-A25F-5145-ECD1F6B212D2}"/>
-              </a:ext>
-            </a:extLst>
-          </p:cNvPr>
-          <p:cNvSpPr>
-            <a:spLocks noGrp="1"/>
-          </p:cNvSpPr>
-          <p:nvPr>
-            <p:ph idx="1"/>
-          </p:nvPr>
-        </p:nvSpPr>
-        <p:spPr>
-          <a:xfrm>
-            <a:off x="1451579" y="1853754"/>
-            <a:ext cx="9603275" cy="4199727"/>
-          </a:xfrm>
-        </p:spPr>
-        <p:txBody>
-          <a:bodyPr/>
-          <a:lstStyle/>
-          <a:p>
-            <a:r>
-              <a:rPr lang="en-US" dirty="0"/>
-              <a:t>The loss plot is our main, but not only, tool to help tune a model. </a:t>
-            </a:r>
-          </a:p>
-          <a:p>
-            <a:r>
-              <a:rPr lang="en-US" dirty="0"/>
-              <a:t>None of these things are definitive, but there are things that happen often that we can look at first for a possible solution. </a:t>
-            </a:r>
-          </a:p>
-          <a:p>
-            <a:r>
-              <a:rPr lang="en-US" dirty="0"/>
-              <a:t>In neural networks, we must weigh against computation time – defaults are usually fast.</a:t>
-            </a:r>
-          </a:p>
-          <a:p>
-            <a:r>
-              <a:rPr lang="en-US" dirty="0"/>
-              <a:t>Some general things:</a:t>
-            </a:r>
-          </a:p>
-          <a:p>
-            <a:pPr lvl="1"/>
-            <a:r>
-              <a:rPr lang="en-US" dirty="0"/>
-              <a:t>Make sure that data is scaled. </a:t>
-            </a:r>
-          </a:p>
-          <a:p>
-            <a:pPr lvl="1"/>
-            <a:r>
-              <a:rPr lang="en-US" dirty="0"/>
-              <a:t>More complex relationships perform better with more layers. </a:t>
-            </a:r>
-          </a:p>
-          <a:p>
-            <a:pPr lvl="1"/>
-            <a:r>
-              <a:rPr lang="en-US" dirty="0"/>
-              <a:t>The more data you have, the larger a model you’ll be able to train well. </a:t>
-            </a:r>
-          </a:p>
-          <a:p>
-            <a:pPr lvl="1"/>
-            <a:r>
-              <a:rPr lang="en-US" dirty="0"/>
-              <a:t>Unless there’s a time constraint, let things go for lots of epochs and use early stopping. </a:t>
-            </a:r>
-          </a:p>
-        </p:txBody>
-      </p:sp>
-    </p:spTree>
-    <p:extLst>
-      <p:ext uri="{BB962C8B-B14F-4D97-AF65-F5344CB8AC3E}">
-        <p14:creationId xmlns:p14="http://schemas.microsoft.com/office/powerpoint/2010/main" val="545948356"/>
       </p:ext>
     </p:extLst>
   </p:cSld>
@@ -8870,6 +9113,1261 @@
           <p:cNvPr id="2" name="Title 1">
             <a:extLst>
               <a:ext uri="{FF2B5EF4-FFF2-40B4-BE49-F238E27FC236}">
+                <a16:creationId xmlns:a16="http://schemas.microsoft.com/office/drawing/2014/main" id="{40507B04-F2DB-98A4-D942-BFC77170B7CC}"/>
+              </a:ext>
+            </a:extLst>
+          </p:cNvPr>
+          <p:cNvSpPr>
+            <a:spLocks noGrp="1"/>
+          </p:cNvSpPr>
+          <p:nvPr>
+            <p:ph type="title"/>
+          </p:nvPr>
+        </p:nvSpPr>
+        <p:spPr>
+          <a:xfrm>
+            <a:off x="1451579" y="804519"/>
+            <a:ext cx="9603275" cy="1049235"/>
+          </a:xfrm>
+        </p:spPr>
+        <p:txBody>
+          <a:bodyPr>
+            <a:normAutofit/>
+          </a:bodyPr>
+          <a:lstStyle/>
+          <a:p>
+            <a:r>
+              <a:rPr lang="en-US" dirty="0"/>
+              <a:t>Batch Normalization</a:t>
+            </a:r>
+          </a:p>
+        </p:txBody>
+      </p:sp>
+      <p:pic>
+        <p:nvPicPr>
+          <p:cNvPr id="2050" name="Picture 2">
+            <a:extLst>
+              <a:ext uri="{FF2B5EF4-FFF2-40B4-BE49-F238E27FC236}">
+                <a16:creationId xmlns:a16="http://schemas.microsoft.com/office/drawing/2014/main" id="{DACB7CF9-B17A-78F0-88AC-6F1FA8C4D4E2}"/>
+              </a:ext>
+            </a:extLst>
+          </p:cNvPr>
+          <p:cNvPicPr>
+            <a:picLocks noChangeAspect="1" noChangeArrowheads="1"/>
+          </p:cNvPicPr>
+          <p:nvPr/>
+        </p:nvPicPr>
+        <p:blipFill rotWithShape="1">
+          <a:blip r:embed="rId2">
+            <a:extLst>
+              <a:ext uri="{28A0092B-C50C-407E-A947-70E740481C1C}">
+                <a14:useLocalDpi xmlns:a14="http://schemas.microsoft.com/office/drawing/2010/main" val="0"/>
+              </a:ext>
+            </a:extLst>
+          </a:blip>
+          <a:srcRect l="15422"/>
+          <a:stretch/>
+        </p:blipFill>
+        <p:spPr bwMode="auto">
+          <a:xfrm>
+            <a:off x="1" y="1853754"/>
+            <a:ext cx="4902678" cy="2695444"/>
+          </a:xfrm>
+          <a:prstGeom prst="rect">
+            <a:avLst/>
+          </a:prstGeom>
+          <a:noFill/>
+          <a:extLst>
+            <a:ext uri="{909E8E84-426E-40DD-AFC4-6F175D3DCCD1}">
+              <a14:hiddenFill xmlns:a14="http://schemas.microsoft.com/office/drawing/2010/main">
+                <a:solidFill>
+                  <a:srgbClr val="FFFFFF"/>
+                </a:solidFill>
+              </a14:hiddenFill>
+            </a:ext>
+          </a:extLst>
+        </p:spPr>
+      </p:pic>
+      <p:sp>
+        <p:nvSpPr>
+          <p:cNvPr id="3" name="Content Placeholder 2">
+            <a:extLst>
+              <a:ext uri="{FF2B5EF4-FFF2-40B4-BE49-F238E27FC236}">
+                <a16:creationId xmlns:a16="http://schemas.microsoft.com/office/drawing/2014/main" id="{04C7B768-B788-7A3C-3953-7744E3C3FF4D}"/>
+              </a:ext>
+            </a:extLst>
+          </p:cNvPr>
+          <p:cNvSpPr>
+            <a:spLocks noGrp="1"/>
+          </p:cNvSpPr>
+          <p:nvPr>
+            <p:ph idx="1"/>
+          </p:nvPr>
+        </p:nvSpPr>
+        <p:spPr>
+          <a:xfrm>
+            <a:off x="5208609" y="1853754"/>
+            <a:ext cx="6983392" cy="4199727"/>
+          </a:xfrm>
+        </p:spPr>
+        <p:txBody>
+          <a:bodyPr>
+            <a:normAutofit/>
+          </a:bodyPr>
+          <a:lstStyle/>
+          <a:p>
+            <a:r>
+              <a:rPr lang="en-US" dirty="0"/>
+              <a:t>Another gradient maintaining technique is batch normalization. </a:t>
+            </a:r>
+          </a:p>
+          <a:p>
+            <a:r>
+              <a:rPr lang="en-US" dirty="0"/>
+              <a:t>Batch normalization will shift the distribution back to “the middle”, where gradients exist. </a:t>
+            </a:r>
+          </a:p>
+          <a:p>
+            <a:pPr lvl="1"/>
+            <a:r>
+              <a:rPr lang="en-US" dirty="0"/>
+              <a:t>“Flat” gradients may vanish – near 0/1 with sigmoid. </a:t>
+            </a:r>
+          </a:p>
+          <a:p>
+            <a:pPr lvl="1"/>
+            <a:r>
+              <a:rPr lang="en-US" dirty="0"/>
+              <a:t>In </a:t>
+            </a:r>
+            <a:r>
+              <a:rPr lang="en-US" dirty="0" err="1"/>
+              <a:t>relu</a:t>
+            </a:r>
+            <a:r>
+              <a:rPr lang="en-US" dirty="0"/>
+              <a:t>, may die and go negative where there’s no gradient. </a:t>
+            </a:r>
+          </a:p>
+          <a:p>
+            <a:r>
+              <a:rPr lang="en-US" dirty="0"/>
+              <a:t>Usually applied after dense layer, but can vary. </a:t>
+            </a:r>
+          </a:p>
+          <a:p>
+            <a:r>
+              <a:rPr lang="en-US" dirty="0"/>
+              <a:t>Can often allow higher learning rates to work.</a:t>
+            </a:r>
+          </a:p>
+          <a:p>
+            <a:r>
+              <a:rPr lang="en-US" dirty="0"/>
+              <a:t>Note: we should normalize normally still. </a:t>
+            </a:r>
+          </a:p>
+          <a:p>
+            <a:endParaRPr lang="en-US" dirty="0"/>
+          </a:p>
+        </p:txBody>
+      </p:sp>
+      <p:pic>
+        <p:nvPicPr>
+          <p:cNvPr id="4" name="Picture 3">
+            <a:extLst>
+              <a:ext uri="{FF2B5EF4-FFF2-40B4-BE49-F238E27FC236}">
+                <a16:creationId xmlns:a16="http://schemas.microsoft.com/office/drawing/2014/main" id="{365C0691-8F19-F627-1CEB-290C78CF3C16}"/>
+              </a:ext>
+            </a:extLst>
+          </p:cNvPr>
+          <p:cNvPicPr>
+            <a:picLocks noChangeAspect="1"/>
+          </p:cNvPicPr>
+          <p:nvPr/>
+        </p:nvPicPr>
+        <p:blipFill>
+          <a:blip r:embed="rId3"/>
+          <a:stretch>
+            <a:fillRect/>
+          </a:stretch>
+        </p:blipFill>
+        <p:spPr>
+          <a:xfrm>
+            <a:off x="0" y="4549198"/>
+            <a:ext cx="4317357" cy="2308802"/>
+          </a:xfrm>
+          <a:prstGeom prst="rect">
+            <a:avLst/>
+          </a:prstGeom>
+        </p:spPr>
+      </p:pic>
+    </p:spTree>
+    <p:extLst>
+      <p:ext uri="{BB962C8B-B14F-4D97-AF65-F5344CB8AC3E}">
+        <p14:creationId xmlns:p14="http://schemas.microsoft.com/office/powerpoint/2010/main" val="1687437132"/>
+      </p:ext>
+    </p:extLst>
+  </p:cSld>
+  <p:clrMapOvr>
+    <a:masterClrMapping/>
+  </p:clrMapOvr>
+</p:sld>
+</file>
+
+<file path=ppt/slides/slide39.xml><?xml version="1.0" encoding="utf-8"?>
+<p:sld xmlns:a="http://schemas.openxmlformats.org/drawingml/2006/main" xmlns:r="http://schemas.openxmlformats.org/officeDocument/2006/relationships" xmlns:p="http://schemas.openxmlformats.org/presentationml/2006/main">
+  <p:cSld>
+    <p:spTree>
+      <p:nvGrpSpPr>
+        <p:cNvPr id="1" name=""/>
+        <p:cNvGrpSpPr/>
+        <p:nvPr/>
+      </p:nvGrpSpPr>
+      <p:grpSpPr>
+        <a:xfrm>
+          <a:off x="0" y="0"/>
+          <a:ext cx="0" cy="0"/>
+          <a:chOff x="0" y="0"/>
+          <a:chExt cx="0" cy="0"/>
+        </a:xfrm>
+      </p:grpSpPr>
+      <p:sp>
+        <p:nvSpPr>
+          <p:cNvPr id="2" name="Title 1">
+            <a:extLst>
+              <a:ext uri="{FF2B5EF4-FFF2-40B4-BE49-F238E27FC236}">
+                <a16:creationId xmlns:a16="http://schemas.microsoft.com/office/drawing/2014/main" id="{12EB02ED-4B2D-A4D0-9A1B-F5D886A1D4DA}"/>
+              </a:ext>
+            </a:extLst>
+          </p:cNvPr>
+          <p:cNvSpPr>
+            <a:spLocks noGrp="1"/>
+          </p:cNvSpPr>
+          <p:nvPr>
+            <p:ph type="title"/>
+          </p:nvPr>
+        </p:nvSpPr>
+        <p:spPr/>
+        <p:txBody>
+          <a:bodyPr/>
+          <a:lstStyle/>
+          <a:p>
+            <a:endParaRPr lang="en-US"/>
+          </a:p>
+        </p:txBody>
+      </p:sp>
+      <p:sp>
+        <p:nvSpPr>
+          <p:cNvPr id="3" name="Content Placeholder 2">
+            <a:extLst>
+              <a:ext uri="{FF2B5EF4-FFF2-40B4-BE49-F238E27FC236}">
+                <a16:creationId xmlns:a16="http://schemas.microsoft.com/office/drawing/2014/main" id="{79262A70-7FB5-F2DE-F3DF-7165887D447B}"/>
+              </a:ext>
+            </a:extLst>
+          </p:cNvPr>
+          <p:cNvSpPr>
+            <a:spLocks noGrp="1"/>
+          </p:cNvSpPr>
+          <p:nvPr>
+            <p:ph idx="1"/>
+          </p:nvPr>
+        </p:nvSpPr>
+        <p:spPr/>
+        <p:txBody>
+          <a:bodyPr/>
+          <a:lstStyle/>
+          <a:p>
+            <a:endParaRPr lang="en-US"/>
+          </a:p>
+        </p:txBody>
+      </p:sp>
+      <p:pic>
+        <p:nvPicPr>
+          <p:cNvPr id="4098" name="Picture 2">
+            <a:extLst>
+              <a:ext uri="{FF2B5EF4-FFF2-40B4-BE49-F238E27FC236}">
+                <a16:creationId xmlns:a16="http://schemas.microsoft.com/office/drawing/2014/main" id="{2C2DDD5C-391D-91D2-A435-8110CC33187B}"/>
+              </a:ext>
+            </a:extLst>
+          </p:cNvPr>
+          <p:cNvPicPr>
+            <a:picLocks noChangeAspect="1" noChangeArrowheads="1"/>
+          </p:cNvPicPr>
+          <p:nvPr/>
+        </p:nvPicPr>
+        <p:blipFill>
+          <a:blip r:embed="rId2">
+            <a:extLst>
+              <a:ext uri="{28A0092B-C50C-407E-A947-70E740481C1C}">
+                <a14:useLocalDpi xmlns:a14="http://schemas.microsoft.com/office/drawing/2010/main" val="0"/>
+              </a:ext>
+            </a:extLst>
+          </a:blip>
+          <a:srcRect/>
+          <a:stretch>
+            <a:fillRect/>
+          </a:stretch>
+        </p:blipFill>
+        <p:spPr bwMode="auto">
+          <a:xfrm>
+            <a:off x="0" y="1400175"/>
+            <a:ext cx="12192000" cy="4057650"/>
+          </a:xfrm>
+          <a:prstGeom prst="rect">
+            <a:avLst/>
+          </a:prstGeom>
+          <a:noFill/>
+          <a:extLst>
+            <a:ext uri="{909E8E84-426E-40DD-AFC4-6F175D3DCCD1}">
+              <a14:hiddenFill xmlns:a14="http://schemas.microsoft.com/office/drawing/2010/main">
+                <a:solidFill>
+                  <a:srgbClr val="FFFFFF"/>
+                </a:solidFill>
+              </a14:hiddenFill>
+            </a:ext>
+          </a:extLst>
+        </p:spPr>
+      </p:pic>
+    </p:spTree>
+    <p:extLst>
+      <p:ext uri="{BB962C8B-B14F-4D97-AF65-F5344CB8AC3E}">
+        <p14:creationId xmlns:p14="http://schemas.microsoft.com/office/powerpoint/2010/main" val="3011999725"/>
+      </p:ext>
+    </p:extLst>
+  </p:cSld>
+  <p:clrMapOvr>
+    <a:masterClrMapping/>
+  </p:clrMapOvr>
+</p:sld>
+</file>
+
+<file path=ppt/slides/slide4.xml><?xml version="1.0" encoding="utf-8"?>
+<p:sld xmlns:a="http://schemas.openxmlformats.org/drawingml/2006/main" xmlns:r="http://schemas.openxmlformats.org/officeDocument/2006/relationships" xmlns:p="http://schemas.openxmlformats.org/presentationml/2006/main" show="0">
+  <p:cSld>
+    <p:spTree>
+      <p:nvGrpSpPr>
+        <p:cNvPr id="1" name=""/>
+        <p:cNvGrpSpPr/>
+        <p:nvPr/>
+      </p:nvGrpSpPr>
+      <p:grpSpPr>
+        <a:xfrm>
+          <a:off x="0" y="0"/>
+          <a:ext cx="0" cy="0"/>
+          <a:chOff x="0" y="0"/>
+          <a:chExt cx="0" cy="0"/>
+        </a:xfrm>
+      </p:grpSpPr>
+      <p:sp>
+        <p:nvSpPr>
+          <p:cNvPr id="2" name="Title 1">
+            <a:extLst>
+              <a:ext uri="{FF2B5EF4-FFF2-40B4-BE49-F238E27FC236}">
+                <a16:creationId xmlns:a16="http://schemas.microsoft.com/office/drawing/2014/main" id="{22D1ADD2-D653-17DD-BCB3-0E44EAE7BF2D}"/>
+              </a:ext>
+            </a:extLst>
+          </p:cNvPr>
+          <p:cNvSpPr>
+            <a:spLocks noGrp="1"/>
+          </p:cNvSpPr>
+          <p:nvPr>
+            <p:ph type="title"/>
+          </p:nvPr>
+        </p:nvSpPr>
+        <p:spPr/>
+        <p:txBody>
+          <a:bodyPr/>
+          <a:lstStyle/>
+          <a:p>
+            <a:r>
+              <a:rPr lang="en-US" dirty="0"/>
+              <a:t>Cluster Assignment - Results</a:t>
+            </a:r>
+          </a:p>
+        </p:txBody>
+      </p:sp>
+      <p:sp>
+        <p:nvSpPr>
+          <p:cNvPr id="3" name="Content Placeholder 2">
+            <a:extLst>
+              <a:ext uri="{FF2B5EF4-FFF2-40B4-BE49-F238E27FC236}">
+                <a16:creationId xmlns:a16="http://schemas.microsoft.com/office/drawing/2014/main" id="{1FA8B9B4-BDA8-12EB-F5CF-5A987E111D33}"/>
+              </a:ext>
+            </a:extLst>
+          </p:cNvPr>
+          <p:cNvSpPr>
+            <a:spLocks noGrp="1"/>
+          </p:cNvSpPr>
+          <p:nvPr>
+            <p:ph idx="1"/>
+          </p:nvPr>
+        </p:nvSpPr>
+        <p:spPr>
+          <a:xfrm>
+            <a:off x="1451579" y="1853754"/>
+            <a:ext cx="9603275" cy="4199727"/>
+          </a:xfrm>
+        </p:spPr>
+        <p:txBody>
+          <a:bodyPr/>
+          <a:lstStyle/>
+          <a:p>
+            <a:r>
+              <a:rPr lang="en-US" dirty="0"/>
+              <a:t>The basic steps needed are:</a:t>
+            </a:r>
+          </a:p>
+          <a:p>
+            <a:pPr lvl="1"/>
+            <a:r>
+              <a:rPr lang="en-US" dirty="0"/>
+              <a:t>Cluster the original data to break the numbers into similar groups. (k-means, other…)</a:t>
+            </a:r>
+          </a:p>
+          <a:p>
+            <a:pPr lvl="1"/>
+            <a:r>
+              <a:rPr lang="en-US" dirty="0"/>
+              <a:t>Manually add a label – each group is similar, but we don’t know what it is a group of. </a:t>
+            </a:r>
+          </a:p>
+          <a:p>
+            <a:pPr lvl="1"/>
+            <a:r>
+              <a:rPr lang="en-US" dirty="0"/>
+              <a:t>Now you have labeled groups of digit images. </a:t>
+            </a:r>
+          </a:p>
+          <a:p>
+            <a:pPr lvl="1"/>
+            <a:r>
+              <a:rPr lang="en-US" dirty="0"/>
+              <a:t>Train 10 (or more) GMMs, one that ‘knows’ each number from the data used to train it. </a:t>
+            </a:r>
+          </a:p>
+          <a:p>
+            <a:pPr lvl="1"/>
+            <a:r>
+              <a:rPr lang="en-US" dirty="0"/>
+              <a:t>When asked for a printout, ask the right GMMs for a digit each, assemble. </a:t>
+            </a:r>
+          </a:p>
+          <a:p>
+            <a:r>
+              <a:rPr lang="en-US" dirty="0"/>
+              <a:t>Overall, the images tend to be OK at best, some improvements:</a:t>
+            </a:r>
+          </a:p>
+          <a:p>
+            <a:pPr lvl="1"/>
+            <a:r>
+              <a:rPr lang="en-US" dirty="0"/>
+              <a:t>Number of clusters can be &gt;10, to capture different digit variations. GMMs can as well. </a:t>
+            </a:r>
+          </a:p>
+          <a:p>
+            <a:pPr lvl="1"/>
+            <a:r>
+              <a:rPr lang="en-US" dirty="0"/>
+              <a:t>Some cleaning/processing (PCA, feature selection, etc..) may help, requires much tuning. </a:t>
+            </a:r>
+          </a:p>
+        </p:txBody>
+      </p:sp>
+    </p:spTree>
+    <p:extLst>
+      <p:ext uri="{BB962C8B-B14F-4D97-AF65-F5344CB8AC3E}">
+        <p14:creationId xmlns:p14="http://schemas.microsoft.com/office/powerpoint/2010/main" val="136210750"/>
+      </p:ext>
+    </p:extLst>
+  </p:cSld>
+  <p:clrMapOvr>
+    <a:masterClrMapping/>
+  </p:clrMapOvr>
+</p:sld>
+</file>
+
+<file path=ppt/slides/slide40.xml><?xml version="1.0" encoding="utf-8"?>
+<p:sld xmlns:a="http://schemas.openxmlformats.org/drawingml/2006/main" xmlns:r="http://schemas.openxmlformats.org/officeDocument/2006/relationships" xmlns:p="http://schemas.openxmlformats.org/presentationml/2006/main">
+  <p:cSld>
+    <p:spTree>
+      <p:nvGrpSpPr>
+        <p:cNvPr id="1" name=""/>
+        <p:cNvGrpSpPr/>
+        <p:nvPr/>
+      </p:nvGrpSpPr>
+      <p:grpSpPr>
+        <a:xfrm>
+          <a:off x="0" y="0"/>
+          <a:ext cx="0" cy="0"/>
+          <a:chOff x="0" y="0"/>
+          <a:chExt cx="0" cy="0"/>
+        </a:xfrm>
+      </p:grpSpPr>
+      <p:sp>
+        <p:nvSpPr>
+          <p:cNvPr id="2" name="Title 1">
+            <a:extLst>
+              <a:ext uri="{FF2B5EF4-FFF2-40B4-BE49-F238E27FC236}">
+                <a16:creationId xmlns:a16="http://schemas.microsoft.com/office/drawing/2014/main" id="{8E701F95-B618-A7AB-FF6B-7AF73C21932E}"/>
+              </a:ext>
+            </a:extLst>
+          </p:cNvPr>
+          <p:cNvSpPr>
+            <a:spLocks noGrp="1"/>
+          </p:cNvSpPr>
+          <p:nvPr>
+            <p:ph type="title"/>
+          </p:nvPr>
+        </p:nvSpPr>
+        <p:spPr/>
+        <p:txBody>
+          <a:bodyPr/>
+          <a:lstStyle/>
+          <a:p>
+            <a:r>
+              <a:rPr lang="en-US" dirty="0"/>
+              <a:t>Refresher - regularization</a:t>
+            </a:r>
+          </a:p>
+        </p:txBody>
+      </p:sp>
+      <p:sp>
+        <p:nvSpPr>
+          <p:cNvPr id="3" name="Content Placeholder 2">
+            <a:extLst>
+              <a:ext uri="{FF2B5EF4-FFF2-40B4-BE49-F238E27FC236}">
+                <a16:creationId xmlns:a16="http://schemas.microsoft.com/office/drawing/2014/main" id="{2E156C3E-5CAF-F8A6-E7F0-120D8C6CAFA5}"/>
+              </a:ext>
+            </a:extLst>
+          </p:cNvPr>
+          <p:cNvSpPr>
+            <a:spLocks noGrp="1"/>
+          </p:cNvSpPr>
+          <p:nvPr>
+            <p:ph idx="1"/>
+          </p:nvPr>
+        </p:nvSpPr>
+        <p:spPr>
+          <a:xfrm>
+            <a:off x="1451579" y="1853755"/>
+            <a:ext cx="9603275" cy="2265242"/>
+          </a:xfrm>
+        </p:spPr>
+        <p:txBody>
+          <a:bodyPr/>
+          <a:lstStyle/>
+          <a:p>
+            <a:r>
+              <a:rPr lang="en-US" dirty="0"/>
+              <a:t>We frequently/typically use some regularization in our models. </a:t>
+            </a:r>
+          </a:p>
+          <a:p>
+            <a:pPr lvl="1"/>
+            <a:r>
+              <a:rPr lang="en-US" dirty="0"/>
+              <a:t>Semi-standard as neural networks are large and flexible, and this constrains overfit. </a:t>
+            </a:r>
+          </a:p>
+          <a:p>
+            <a:pPr lvl="1"/>
+            <a:r>
+              <a:rPr lang="en-US" dirty="0"/>
+              <a:t>L1/L2 – works just as in regression, can be applied in layer as a hyperparameter. </a:t>
+            </a:r>
+          </a:p>
+          <a:p>
+            <a:pPr lvl="1"/>
+            <a:r>
+              <a:rPr lang="en-US" dirty="0"/>
+              <a:t>Dropout – removes some percentage of neurons randomly each batch of </a:t>
+            </a:r>
+            <a:r>
+              <a:rPr lang="en-US" b="1" dirty="0"/>
+              <a:t>training</a:t>
+            </a:r>
+            <a:r>
+              <a:rPr lang="en-US" dirty="0"/>
+              <a:t>, forcing learning to occur on the remainder. Applied as a layer, typically round 20—40% to start. </a:t>
+            </a:r>
+          </a:p>
+        </p:txBody>
+      </p:sp>
+      <p:pic>
+        <p:nvPicPr>
+          <p:cNvPr id="12290" name="Picture 2" descr="An illustration of the dropout mechanism within a multi-layer neural... |  Download Scientific Diagram">
+            <a:extLst>
+              <a:ext uri="{FF2B5EF4-FFF2-40B4-BE49-F238E27FC236}">
+                <a16:creationId xmlns:a16="http://schemas.microsoft.com/office/drawing/2014/main" id="{2AB7688B-0AD0-F5E0-0253-193C85677D34}"/>
+              </a:ext>
+            </a:extLst>
+          </p:cNvPr>
+          <p:cNvPicPr>
+            <a:picLocks noChangeAspect="1" noChangeArrowheads="1"/>
+          </p:cNvPicPr>
+          <p:nvPr/>
+        </p:nvPicPr>
+        <p:blipFill>
+          <a:blip r:embed="rId2">
+            <a:extLst>
+              <a:ext uri="{28A0092B-C50C-407E-A947-70E740481C1C}">
+                <a14:useLocalDpi xmlns:a14="http://schemas.microsoft.com/office/drawing/2010/main" val="0"/>
+              </a:ext>
+            </a:extLst>
+          </a:blip>
+          <a:srcRect/>
+          <a:stretch>
+            <a:fillRect/>
+          </a:stretch>
+        </p:blipFill>
+        <p:spPr bwMode="auto">
+          <a:xfrm>
+            <a:off x="1621461" y="3838427"/>
+            <a:ext cx="8949078" cy="2905818"/>
+          </a:xfrm>
+          <a:prstGeom prst="rect">
+            <a:avLst/>
+          </a:prstGeom>
+          <a:noFill/>
+          <a:extLst>
+            <a:ext uri="{909E8E84-426E-40DD-AFC4-6F175D3DCCD1}">
+              <a14:hiddenFill xmlns:a14="http://schemas.microsoft.com/office/drawing/2010/main">
+                <a:solidFill>
+                  <a:srgbClr val="FFFFFF"/>
+                </a:solidFill>
+              </a14:hiddenFill>
+            </a:ext>
+          </a:extLst>
+        </p:spPr>
+      </p:pic>
+    </p:spTree>
+    <p:extLst>
+      <p:ext uri="{BB962C8B-B14F-4D97-AF65-F5344CB8AC3E}">
+        <p14:creationId xmlns:p14="http://schemas.microsoft.com/office/powerpoint/2010/main" val="3865647208"/>
+      </p:ext>
+    </p:extLst>
+  </p:cSld>
+  <p:clrMapOvr>
+    <a:masterClrMapping/>
+  </p:clrMapOvr>
+</p:sld>
+</file>
+
+<file path=ppt/slides/slide41.xml><?xml version="1.0" encoding="utf-8"?>
+<p:sld xmlns:a="http://schemas.openxmlformats.org/drawingml/2006/main" xmlns:r="http://schemas.openxmlformats.org/officeDocument/2006/relationships" xmlns:p="http://schemas.openxmlformats.org/presentationml/2006/main">
+  <p:cSld>
+    <p:spTree>
+      <p:nvGrpSpPr>
+        <p:cNvPr id="1" name=""/>
+        <p:cNvGrpSpPr/>
+        <p:nvPr/>
+      </p:nvGrpSpPr>
+      <p:grpSpPr>
+        <a:xfrm>
+          <a:off x="0" y="0"/>
+          <a:ext cx="0" cy="0"/>
+          <a:chOff x="0" y="0"/>
+          <a:chExt cx="0" cy="0"/>
+        </a:xfrm>
+      </p:grpSpPr>
+      <p:sp>
+        <p:nvSpPr>
+          <p:cNvPr id="2" name="Title 1">
+            <a:extLst>
+              <a:ext uri="{FF2B5EF4-FFF2-40B4-BE49-F238E27FC236}">
+                <a16:creationId xmlns:a16="http://schemas.microsoft.com/office/drawing/2014/main" id="{8AB3D8A8-1279-C44F-AB18-28BCD74E016C}"/>
+              </a:ext>
+            </a:extLst>
+          </p:cNvPr>
+          <p:cNvSpPr>
+            <a:spLocks noGrp="1"/>
+          </p:cNvSpPr>
+          <p:nvPr>
+            <p:ph type="title"/>
+          </p:nvPr>
+        </p:nvSpPr>
+        <p:spPr/>
+        <p:txBody>
+          <a:bodyPr/>
+          <a:lstStyle/>
+          <a:p>
+            <a:r>
+              <a:rPr lang="en-US" dirty="0"/>
+              <a:t>Initialization </a:t>
+            </a:r>
+          </a:p>
+        </p:txBody>
+      </p:sp>
+      <p:sp>
+        <p:nvSpPr>
+          <p:cNvPr id="3" name="Content Placeholder 2">
+            <a:extLst>
+              <a:ext uri="{FF2B5EF4-FFF2-40B4-BE49-F238E27FC236}">
+                <a16:creationId xmlns:a16="http://schemas.microsoft.com/office/drawing/2014/main" id="{E6932690-B733-C245-A962-ECCC4BCA3B54}"/>
+              </a:ext>
+            </a:extLst>
+          </p:cNvPr>
+          <p:cNvSpPr>
+            <a:spLocks noGrp="1"/>
+          </p:cNvSpPr>
+          <p:nvPr>
+            <p:ph idx="1"/>
+          </p:nvPr>
+        </p:nvSpPr>
+        <p:spPr>
+          <a:xfrm>
+            <a:off x="1451579" y="1853754"/>
+            <a:ext cx="9603275" cy="4199727"/>
+          </a:xfrm>
+        </p:spPr>
+        <p:txBody>
+          <a:bodyPr>
+            <a:normAutofit lnSpcReduction="10000"/>
+          </a:bodyPr>
+          <a:lstStyle/>
+          <a:p>
+            <a:r>
+              <a:rPr lang="en-US" dirty="0"/>
+              <a:t>Initialization controls how the weight and bias values start. </a:t>
+            </a:r>
+          </a:p>
+          <a:p>
+            <a:r>
+              <a:rPr lang="en-US" dirty="0"/>
+              <a:t>Can be controlled via a parameter for each layer:</a:t>
+            </a:r>
+          </a:p>
+          <a:p>
+            <a:pPr lvl="1"/>
+            <a:r>
+              <a:rPr lang="en-US" dirty="0"/>
+              <a:t>Weight initialization is by default is “</a:t>
+            </a:r>
+            <a:r>
+              <a:rPr lang="en-US" dirty="0" err="1"/>
+              <a:t>glorot_uniform</a:t>
+            </a:r>
+            <a:r>
+              <a:rPr lang="en-US" dirty="0"/>
+              <a:t>” – a variety of random. </a:t>
+            </a:r>
+          </a:p>
+          <a:p>
+            <a:pPr lvl="1"/>
+            <a:r>
+              <a:rPr lang="en-US" dirty="0"/>
+              <a:t>Bias initialization defaults to 0. </a:t>
+            </a:r>
+          </a:p>
+          <a:p>
+            <a:pPr lvl="1"/>
+            <a:r>
+              <a:rPr lang="en-US" dirty="0"/>
+              <a:t>We can preset the output layer with the log of the expectation (for logit). </a:t>
+            </a:r>
+          </a:p>
+          <a:p>
+            <a:r>
+              <a:rPr lang="en-US" dirty="0"/>
+              <a:t>This can help the model train – both in speed and potential for convergence. </a:t>
+            </a:r>
+          </a:p>
+          <a:p>
+            <a:r>
+              <a:rPr lang="en-US" dirty="0"/>
+              <a:t>Imbalanced data – the data has a “bias” to start with. </a:t>
+            </a:r>
+          </a:p>
+          <a:p>
+            <a:pPr lvl="1"/>
+            <a:r>
+              <a:rPr lang="en-US" dirty="0"/>
+              <a:t>Set bias on output layer to the bias in the data. </a:t>
+            </a:r>
+          </a:p>
+          <a:p>
+            <a:pPr lvl="1"/>
+            <a:r>
+              <a:rPr lang="en-US" dirty="0"/>
+              <a:t>Network doesn’t need to learn the massive shift in bias. </a:t>
+            </a:r>
+          </a:p>
+          <a:p>
+            <a:pPr lvl="1"/>
+            <a:r>
+              <a:rPr lang="en-US" dirty="0"/>
+              <a:t>Faster convergence and more accuracy. </a:t>
+            </a:r>
+          </a:p>
+          <a:p>
+            <a:endParaRPr lang="en-US" dirty="0"/>
+          </a:p>
+        </p:txBody>
+      </p:sp>
+    </p:spTree>
+    <p:extLst>
+      <p:ext uri="{BB962C8B-B14F-4D97-AF65-F5344CB8AC3E}">
+        <p14:creationId xmlns:p14="http://schemas.microsoft.com/office/powerpoint/2010/main" val="2996444863"/>
+      </p:ext>
+    </p:extLst>
+  </p:cSld>
+  <p:clrMapOvr>
+    <a:masterClrMapping/>
+  </p:clrMapOvr>
+</p:sld>
+</file>
+
+<file path=ppt/slides/slide42.xml><?xml version="1.0" encoding="utf-8"?>
+<p:sld xmlns:a="http://schemas.openxmlformats.org/drawingml/2006/main" xmlns:r="http://schemas.openxmlformats.org/officeDocument/2006/relationships" xmlns:p="http://schemas.openxmlformats.org/presentationml/2006/main">
+  <p:cSld>
+    <p:spTree>
+      <p:nvGrpSpPr>
+        <p:cNvPr id="1" name=""/>
+        <p:cNvGrpSpPr/>
+        <p:nvPr/>
+      </p:nvGrpSpPr>
+      <p:grpSpPr>
+        <a:xfrm>
+          <a:off x="0" y="0"/>
+          <a:ext cx="0" cy="0"/>
+          <a:chOff x="0" y="0"/>
+          <a:chExt cx="0" cy="0"/>
+        </a:xfrm>
+      </p:grpSpPr>
+      <p:sp>
+        <p:nvSpPr>
+          <p:cNvPr id="2" name="Title 1">
+            <a:extLst>
+              <a:ext uri="{FF2B5EF4-FFF2-40B4-BE49-F238E27FC236}">
+                <a16:creationId xmlns:a16="http://schemas.microsoft.com/office/drawing/2014/main" id="{998811FD-FB04-14C3-51B0-20806479A3B8}"/>
+              </a:ext>
+            </a:extLst>
+          </p:cNvPr>
+          <p:cNvSpPr>
+            <a:spLocks noGrp="1"/>
+          </p:cNvSpPr>
+          <p:nvPr>
+            <p:ph type="title"/>
+          </p:nvPr>
+        </p:nvSpPr>
+        <p:spPr/>
+        <p:txBody>
+          <a:bodyPr/>
+          <a:lstStyle/>
+          <a:p>
+            <a:r>
+              <a:rPr lang="en-US" dirty="0"/>
+              <a:t>Neural Networks are Flexible</a:t>
+            </a:r>
+          </a:p>
+        </p:txBody>
+      </p:sp>
+      <p:sp>
+        <p:nvSpPr>
+          <p:cNvPr id="3" name="Content Placeholder 2">
+            <a:extLst>
+              <a:ext uri="{FF2B5EF4-FFF2-40B4-BE49-F238E27FC236}">
+                <a16:creationId xmlns:a16="http://schemas.microsoft.com/office/drawing/2014/main" id="{F27F93CB-38CB-BCDC-EB9C-1D1A84E32F49}"/>
+              </a:ext>
+            </a:extLst>
+          </p:cNvPr>
+          <p:cNvSpPr>
+            <a:spLocks noGrp="1"/>
+          </p:cNvSpPr>
+          <p:nvPr>
+            <p:ph idx="1"/>
+          </p:nvPr>
+        </p:nvSpPr>
+        <p:spPr>
+          <a:xfrm>
+            <a:off x="1451579" y="1853754"/>
+            <a:ext cx="9603275" cy="4199727"/>
+          </a:xfrm>
+        </p:spPr>
+        <p:txBody>
+          <a:bodyPr/>
+          <a:lstStyle/>
+          <a:p>
+            <a:r>
+              <a:rPr lang="en-US" dirty="0"/>
+              <a:t>This isn’t near all of the things that we can change in a neural network. </a:t>
+            </a:r>
+          </a:p>
+          <a:p>
+            <a:r>
+              <a:rPr lang="en-US" dirty="0"/>
+              <a:t>The flexibility in their learning as they grow means that a wide range of models that are ‘good enough’ will converge on a good solution. </a:t>
+            </a:r>
+          </a:p>
+          <a:p>
+            <a:pPr lvl="1"/>
+            <a:r>
+              <a:rPr lang="en-US" dirty="0"/>
+              <a:t>E.g. the image competition has models with widely different structures fighting for fractions of a percentage of accuracy in a task. </a:t>
+            </a:r>
+          </a:p>
+          <a:p>
+            <a:r>
+              <a:rPr lang="en-US" dirty="0"/>
+              <a:t>Mirror something that is known to work, unless experimenting (which is good). </a:t>
+            </a:r>
+          </a:p>
+          <a:p>
+            <a:r>
+              <a:rPr lang="en-US" dirty="0"/>
+              <a:t>Make reasonable choices, add some excess, regularization, and early stopping, let train. </a:t>
+            </a:r>
+          </a:p>
+          <a:p>
+            <a:pPr lvl="1"/>
+            <a:r>
+              <a:rPr lang="en-US" dirty="0"/>
+              <a:t>Adjust from here based on what you see. </a:t>
+            </a:r>
+          </a:p>
+          <a:p>
+            <a:r>
+              <a:rPr lang="en-US" dirty="0"/>
+              <a:t>Finding the perfect configuration as we did with a grid becomes time impractical quickly. </a:t>
+            </a:r>
+          </a:p>
+        </p:txBody>
+      </p:sp>
+    </p:spTree>
+    <p:extLst>
+      <p:ext uri="{BB962C8B-B14F-4D97-AF65-F5344CB8AC3E}">
+        <p14:creationId xmlns:p14="http://schemas.microsoft.com/office/powerpoint/2010/main" val="2910667997"/>
+      </p:ext>
+    </p:extLst>
+  </p:cSld>
+  <p:clrMapOvr>
+    <a:masterClrMapping/>
+  </p:clrMapOvr>
+</p:sld>
+</file>
+
+<file path=ppt/slides/slide43.xml><?xml version="1.0" encoding="utf-8"?>
+<p:sld xmlns:a="http://schemas.openxmlformats.org/drawingml/2006/main" xmlns:r="http://schemas.openxmlformats.org/officeDocument/2006/relationships" xmlns:p="http://schemas.openxmlformats.org/presentationml/2006/main" show="0">
+  <p:cSld>
+    <p:spTree>
+      <p:nvGrpSpPr>
+        <p:cNvPr id="1" name=""/>
+        <p:cNvGrpSpPr/>
+        <p:nvPr/>
+      </p:nvGrpSpPr>
+      <p:grpSpPr>
+        <a:xfrm>
+          <a:off x="0" y="0"/>
+          <a:ext cx="0" cy="0"/>
+          <a:chOff x="0" y="0"/>
+          <a:chExt cx="0" cy="0"/>
+        </a:xfrm>
+      </p:grpSpPr>
+      <p:sp>
+        <p:nvSpPr>
+          <p:cNvPr id="2" name="Title 1">
+            <a:extLst>
+              <a:ext uri="{FF2B5EF4-FFF2-40B4-BE49-F238E27FC236}">
+                <a16:creationId xmlns:a16="http://schemas.microsoft.com/office/drawing/2014/main" id="{EAF056FD-E697-5353-97FE-84FF67ABB289}"/>
+              </a:ext>
+            </a:extLst>
+          </p:cNvPr>
+          <p:cNvSpPr>
+            <a:spLocks noGrp="1"/>
+          </p:cNvSpPr>
+          <p:nvPr>
+            <p:ph type="title"/>
+          </p:nvPr>
+        </p:nvSpPr>
+        <p:spPr/>
+        <p:txBody>
+          <a:bodyPr/>
+          <a:lstStyle/>
+          <a:p>
+            <a:r>
+              <a:rPr lang="en-US" dirty="0"/>
+              <a:t>Other Tuning - Optimization</a:t>
+            </a:r>
+          </a:p>
+        </p:txBody>
+      </p:sp>
+      <p:sp>
+        <p:nvSpPr>
+          <p:cNvPr id="3" name="Content Placeholder 2">
+            <a:extLst>
+              <a:ext uri="{FF2B5EF4-FFF2-40B4-BE49-F238E27FC236}">
+                <a16:creationId xmlns:a16="http://schemas.microsoft.com/office/drawing/2014/main" id="{F044C5EC-E837-8A77-86C7-0C127E9A7BD8}"/>
+              </a:ext>
+            </a:extLst>
+          </p:cNvPr>
+          <p:cNvSpPr>
+            <a:spLocks noGrp="1"/>
+          </p:cNvSpPr>
+          <p:nvPr>
+            <p:ph idx="1"/>
+          </p:nvPr>
+        </p:nvSpPr>
+        <p:spPr>
+          <a:xfrm>
+            <a:off x="1451579" y="1853754"/>
+            <a:ext cx="9603275" cy="4199727"/>
+          </a:xfrm>
+        </p:spPr>
+        <p:txBody>
+          <a:bodyPr/>
+          <a:lstStyle/>
+          <a:p>
+            <a:r>
+              <a:rPr lang="en-US" dirty="0"/>
+              <a:t>There are a huge number of things that can be changed to tune a neural network model. </a:t>
+            </a:r>
+          </a:p>
+          <a:p>
+            <a:r>
+              <a:rPr lang="en-US" dirty="0"/>
+              <a:t>We are focusing mainly on the ‘structure’ type of things. </a:t>
+            </a:r>
+          </a:p>
+          <a:p>
+            <a:pPr lvl="1"/>
+            <a:r>
+              <a:rPr lang="en-US" dirty="0"/>
+              <a:t>Network size, layers, type, hyperparameters, regularizing (and similar) layers like normalization.</a:t>
+            </a:r>
+          </a:p>
+          <a:p>
+            <a:r>
+              <a:rPr lang="en-US" dirty="0"/>
+              <a:t>We are not really focusing on the optimization part - loss/gradient descent specific things. </a:t>
+            </a:r>
+          </a:p>
+          <a:p>
+            <a:pPr lvl="1"/>
+            <a:r>
+              <a:rPr lang="en-US" dirty="0"/>
+              <a:t>Learning rates, momentum, optimizers. </a:t>
+            </a:r>
+          </a:p>
+          <a:p>
+            <a:pPr lvl="1"/>
+            <a:r>
+              <a:rPr lang="en-US" dirty="0"/>
+              <a:t>This matters, but is more theoretical in theory, and scenario dependent in practice. </a:t>
+            </a:r>
+          </a:p>
+          <a:p>
+            <a:pPr lvl="1"/>
+            <a:r>
+              <a:rPr lang="en-US" dirty="0"/>
+              <a:t>Optimization is critical as problems get larger – converging quickly, or at all, can be hard. </a:t>
+            </a:r>
+          </a:p>
+          <a:p>
+            <a:r>
+              <a:rPr lang="en-US" dirty="0"/>
+              <a:t>For our usage, we can mainly try different learning rates, if needed. </a:t>
+            </a:r>
+          </a:p>
+        </p:txBody>
+      </p:sp>
+    </p:spTree>
+    <p:extLst>
+      <p:ext uri="{BB962C8B-B14F-4D97-AF65-F5344CB8AC3E}">
+        <p14:creationId xmlns:p14="http://schemas.microsoft.com/office/powerpoint/2010/main" val="1149088017"/>
+      </p:ext>
+    </p:extLst>
+  </p:cSld>
+  <p:clrMapOvr>
+    <a:masterClrMapping/>
+  </p:clrMapOvr>
+</p:sld>
+</file>
+
+<file path=ppt/slides/slide44.xml><?xml version="1.0" encoding="utf-8"?>
+<p:sld xmlns:a="http://schemas.openxmlformats.org/drawingml/2006/main" xmlns:r="http://schemas.openxmlformats.org/officeDocument/2006/relationships" xmlns:p="http://schemas.openxmlformats.org/presentationml/2006/main">
+  <p:cSld>
+    <p:spTree>
+      <p:nvGrpSpPr>
+        <p:cNvPr id="1" name=""/>
+        <p:cNvGrpSpPr/>
+        <p:nvPr/>
+      </p:nvGrpSpPr>
+      <p:grpSpPr>
+        <a:xfrm>
+          <a:off x="0" y="0"/>
+          <a:ext cx="0" cy="0"/>
+          <a:chOff x="0" y="0"/>
+          <a:chExt cx="0" cy="0"/>
+        </a:xfrm>
+      </p:grpSpPr>
+      <p:sp>
+        <p:nvSpPr>
+          <p:cNvPr id="2" name="Title 1">
+            <a:extLst>
+              <a:ext uri="{FF2B5EF4-FFF2-40B4-BE49-F238E27FC236}">
+                <a16:creationId xmlns:a16="http://schemas.microsoft.com/office/drawing/2014/main" id="{2D76F3B6-86DB-FFF0-6350-C1AA19E15476}"/>
+              </a:ext>
+            </a:extLst>
+          </p:cNvPr>
+          <p:cNvSpPr>
+            <a:spLocks noGrp="1"/>
+          </p:cNvSpPr>
+          <p:nvPr>
+            <p:ph type="title"/>
+          </p:nvPr>
+        </p:nvSpPr>
+        <p:spPr/>
+        <p:txBody>
+          <a:bodyPr/>
+          <a:lstStyle/>
+          <a:p>
+            <a:r>
+              <a:rPr lang="en-US" dirty="0"/>
+              <a:t>Tuning From A Loss Plot</a:t>
+            </a:r>
+          </a:p>
+        </p:txBody>
+      </p:sp>
+      <p:sp>
+        <p:nvSpPr>
+          <p:cNvPr id="3" name="Content Placeholder 2">
+            <a:extLst>
+              <a:ext uri="{FF2B5EF4-FFF2-40B4-BE49-F238E27FC236}">
+                <a16:creationId xmlns:a16="http://schemas.microsoft.com/office/drawing/2014/main" id="{915E008A-9A08-A25F-5145-ECD1F6B212D2}"/>
+              </a:ext>
+            </a:extLst>
+          </p:cNvPr>
+          <p:cNvSpPr>
+            <a:spLocks noGrp="1"/>
+          </p:cNvSpPr>
+          <p:nvPr>
+            <p:ph idx="1"/>
+          </p:nvPr>
+        </p:nvSpPr>
+        <p:spPr>
+          <a:xfrm>
+            <a:off x="1451579" y="1853754"/>
+            <a:ext cx="9603275" cy="4199727"/>
+          </a:xfrm>
+        </p:spPr>
+        <p:txBody>
+          <a:bodyPr/>
+          <a:lstStyle/>
+          <a:p>
+            <a:r>
+              <a:rPr lang="en-US" dirty="0"/>
+              <a:t>The loss plot is our main, but not only, tool to help tune a model. </a:t>
+            </a:r>
+          </a:p>
+          <a:p>
+            <a:r>
+              <a:rPr lang="en-US" dirty="0"/>
+              <a:t>None of these things are definitive, but there are things that happen often that we can look at first for a possible solution. </a:t>
+            </a:r>
+          </a:p>
+          <a:p>
+            <a:r>
+              <a:rPr lang="en-US" dirty="0"/>
+              <a:t>In neural networks, we must weigh against computation time – defaults are usually fast.</a:t>
+            </a:r>
+          </a:p>
+          <a:p>
+            <a:r>
+              <a:rPr lang="en-US" dirty="0"/>
+              <a:t>Some general things:</a:t>
+            </a:r>
+          </a:p>
+          <a:p>
+            <a:pPr lvl="1"/>
+            <a:r>
+              <a:rPr lang="en-US" dirty="0"/>
+              <a:t>Make sure that data is scaled. </a:t>
+            </a:r>
+          </a:p>
+          <a:p>
+            <a:pPr lvl="1"/>
+            <a:r>
+              <a:rPr lang="en-US" dirty="0"/>
+              <a:t>More complex relationships perform better with more layers. </a:t>
+            </a:r>
+          </a:p>
+          <a:p>
+            <a:pPr lvl="1"/>
+            <a:r>
+              <a:rPr lang="en-US" dirty="0"/>
+              <a:t>The more data you have, the larger a model you’ll be able to train well. </a:t>
+            </a:r>
+          </a:p>
+          <a:p>
+            <a:pPr lvl="1"/>
+            <a:r>
+              <a:rPr lang="en-US" dirty="0"/>
+              <a:t>Unless there’s a time constraint, let things go for lots of epochs and use early stopping. </a:t>
+            </a:r>
+          </a:p>
+        </p:txBody>
+      </p:sp>
+    </p:spTree>
+    <p:extLst>
+      <p:ext uri="{BB962C8B-B14F-4D97-AF65-F5344CB8AC3E}">
+        <p14:creationId xmlns:p14="http://schemas.microsoft.com/office/powerpoint/2010/main" val="545948356"/>
+      </p:ext>
+    </p:extLst>
+  </p:cSld>
+  <p:clrMapOvr>
+    <a:masterClrMapping/>
+  </p:clrMapOvr>
+</p:sld>
+</file>
+
+<file path=ppt/slides/slide45.xml><?xml version="1.0" encoding="utf-8"?>
+<p:sld xmlns:a="http://schemas.openxmlformats.org/drawingml/2006/main" xmlns:r="http://schemas.openxmlformats.org/officeDocument/2006/relationships" xmlns:p="http://schemas.openxmlformats.org/presentationml/2006/main">
+  <p:cSld>
+    <p:bg>
+      <p:bgPr>
+        <a:gradFill rotWithShape="1">
+          <a:gsLst>
+            <a:gs pos="0">
+              <a:schemeClr val="bg2">
+                <a:tint val="94000"/>
+                <a:satMod val="80000"/>
+                <a:lumMod val="106000"/>
+              </a:schemeClr>
+            </a:gs>
+            <a:gs pos="100000">
+              <a:schemeClr val="bg2">
+                <a:shade val="80000"/>
+              </a:schemeClr>
+            </a:gs>
+          </a:gsLst>
+          <a:path path="circle">
+            <a:fillToRect l="43000" r="43000" b="100000"/>
+          </a:path>
+        </a:gradFill>
+        <a:effectLst/>
+      </p:bgPr>
+    </p:bg>
+    <p:spTree>
+      <p:nvGrpSpPr>
+        <p:cNvPr id="1" name=""/>
+        <p:cNvGrpSpPr/>
+        <p:nvPr/>
+      </p:nvGrpSpPr>
+      <p:grpSpPr>
+        <a:xfrm>
+          <a:off x="0" y="0"/>
+          <a:ext cx="0" cy="0"/>
+          <a:chOff x="0" y="0"/>
+          <a:chExt cx="0" cy="0"/>
+        </a:xfrm>
+      </p:grpSpPr>
+      <p:sp>
+        <p:nvSpPr>
+          <p:cNvPr id="2" name="Title 1">
+            <a:extLst>
+              <a:ext uri="{FF2B5EF4-FFF2-40B4-BE49-F238E27FC236}">
                 <a16:creationId xmlns:a16="http://schemas.microsoft.com/office/drawing/2014/main" id="{3603C63F-9FB5-15B8-6A4B-1E81EE54DCA1}"/>
               </a:ext>
             </a:extLst>
@@ -9121,7 +10619,7 @@
 </p:sld>
 </file>
 
-<file path=ppt/slides/slide39.xml><?xml version="1.0" encoding="utf-8"?>
+<file path=ppt/slides/slide46.xml><?xml version="1.0" encoding="utf-8"?>
 <p:sld xmlns:a="http://schemas.openxmlformats.org/drawingml/2006/main" xmlns:r="http://schemas.openxmlformats.org/officeDocument/2006/relationships" xmlns:p="http://schemas.openxmlformats.org/presentationml/2006/main">
   <p:cSld>
     <p:spTree>
@@ -9380,153 +10878,7 @@
 </p:sld>
 </file>
 
-<file path=ppt/slides/slide4.xml><?xml version="1.0" encoding="utf-8"?>
-<p:sld xmlns:a="http://schemas.openxmlformats.org/drawingml/2006/main" xmlns:r="http://schemas.openxmlformats.org/officeDocument/2006/relationships" xmlns:p="http://schemas.openxmlformats.org/presentationml/2006/main" show="0">
-  <p:cSld>
-    <p:spTree>
-      <p:nvGrpSpPr>
-        <p:cNvPr id="1" name=""/>
-        <p:cNvGrpSpPr/>
-        <p:nvPr/>
-      </p:nvGrpSpPr>
-      <p:grpSpPr>
-        <a:xfrm>
-          <a:off x="0" y="0"/>
-          <a:ext cx="0" cy="0"/>
-          <a:chOff x="0" y="0"/>
-          <a:chExt cx="0" cy="0"/>
-        </a:xfrm>
-      </p:grpSpPr>
-      <p:sp>
-        <p:nvSpPr>
-          <p:cNvPr id="2" name="Title 1">
-            <a:extLst>
-              <a:ext uri="{FF2B5EF4-FFF2-40B4-BE49-F238E27FC236}">
-                <a16:creationId xmlns:a16="http://schemas.microsoft.com/office/drawing/2014/main" id="{22D1ADD2-D653-17DD-BCB3-0E44EAE7BF2D}"/>
-              </a:ext>
-            </a:extLst>
-          </p:cNvPr>
-          <p:cNvSpPr>
-            <a:spLocks noGrp="1"/>
-          </p:cNvSpPr>
-          <p:nvPr>
-            <p:ph type="title"/>
-          </p:nvPr>
-        </p:nvSpPr>
-        <p:spPr/>
-        <p:txBody>
-          <a:bodyPr/>
-          <a:lstStyle/>
-          <a:p>
-            <a:r>
-              <a:rPr lang="en-US" dirty="0"/>
-              <a:t>Cluster Assignment - Results</a:t>
-            </a:r>
-          </a:p>
-        </p:txBody>
-      </p:sp>
-      <p:sp>
-        <p:nvSpPr>
-          <p:cNvPr id="3" name="Content Placeholder 2">
-            <a:extLst>
-              <a:ext uri="{FF2B5EF4-FFF2-40B4-BE49-F238E27FC236}">
-                <a16:creationId xmlns:a16="http://schemas.microsoft.com/office/drawing/2014/main" id="{1FA8B9B4-BDA8-12EB-F5CF-5A987E111D33}"/>
-              </a:ext>
-            </a:extLst>
-          </p:cNvPr>
-          <p:cNvSpPr>
-            <a:spLocks noGrp="1"/>
-          </p:cNvSpPr>
-          <p:nvPr>
-            <p:ph idx="1"/>
-          </p:nvPr>
-        </p:nvSpPr>
-        <p:spPr>
-          <a:xfrm>
-            <a:off x="1451579" y="1853754"/>
-            <a:ext cx="9603275" cy="4199727"/>
-          </a:xfrm>
-        </p:spPr>
-        <p:txBody>
-          <a:bodyPr/>
-          <a:lstStyle/>
-          <a:p>
-            <a:r>
-              <a:rPr lang="en-US" dirty="0"/>
-              <a:t>The basic steps needed are:</a:t>
-            </a:r>
-          </a:p>
-          <a:p>
-            <a:pPr lvl="1"/>
-            <a:r>
-              <a:rPr lang="en-US" dirty="0"/>
-              <a:t>Cluster the original data to break the numbers into similar groups. (k-means, other…)</a:t>
-            </a:r>
-          </a:p>
-          <a:p>
-            <a:pPr lvl="1"/>
-            <a:r>
-              <a:rPr lang="en-US" dirty="0"/>
-              <a:t>Manually add a label – each group is similar, but we don’t know what it is a group of. </a:t>
-            </a:r>
-          </a:p>
-          <a:p>
-            <a:pPr lvl="1"/>
-            <a:r>
-              <a:rPr lang="en-US" dirty="0"/>
-              <a:t>Now you have labeled groups of digit images. </a:t>
-            </a:r>
-          </a:p>
-          <a:p>
-            <a:pPr lvl="1"/>
-            <a:r>
-              <a:rPr lang="en-US" dirty="0"/>
-              <a:t>Train 10 (or more) GMMs, one that ‘knows’ each number from the data used to train it. </a:t>
-            </a:r>
-          </a:p>
-          <a:p>
-            <a:pPr lvl="1"/>
-            <a:r>
-              <a:rPr lang="en-US" dirty="0"/>
-              <a:t>When asked for a printout, ask the right GMMs for a digit each, assemble. </a:t>
-            </a:r>
-          </a:p>
-          <a:p>
-            <a:r>
-              <a:rPr lang="en-US" dirty="0"/>
-              <a:t>Overall, the images tend to be OK at best, some improvements:</a:t>
-            </a:r>
-          </a:p>
-          <a:p>
-            <a:pPr lvl="1"/>
-            <a:r>
-              <a:rPr lang="en-US" dirty="0"/>
-              <a:t>Number of clusters can be &gt;10, to capture different digit variations. GMMs can as well. </a:t>
-            </a:r>
-          </a:p>
-          <a:p>
-            <a:pPr lvl="1"/>
-            <a:r>
-              <a:rPr lang="en-US" dirty="0"/>
-              <a:t>Some cleaning/processing (PCA, feature selection, etc..) may help, requires much tuning. </a:t>
-            </a:r>
-          </a:p>
-        </p:txBody>
-      </p:sp>
-    </p:spTree>
-    <p:extLst>
-      <p:ext uri="{BB962C8B-B14F-4D97-AF65-F5344CB8AC3E}">
-        <p14:creationId xmlns:p14="http://schemas.microsoft.com/office/powerpoint/2010/main" val="136210750"/>
-      </p:ext>
-    </p:extLst>
-  </p:cSld>
-  <p:clrMapOvr>
-    <a:masterClrMapping/>
-  </p:clrMapOvr>
-</p:sld>
-</file>
-
-<file path=ppt/slides/slide40.xml><?xml version="1.0" encoding="utf-8"?>
+<file path=ppt/slides/slide47.xml><?xml version="1.0" encoding="utf-8"?>
 <p:sld xmlns:a="http://schemas.openxmlformats.org/drawingml/2006/main" xmlns:r="http://schemas.openxmlformats.org/officeDocument/2006/relationships" xmlns:p="http://schemas.openxmlformats.org/presentationml/2006/main">
   <p:cSld>
     <p:spTree>
@@ -9770,7 +11122,7 @@
 </p:sld>
 </file>
 
-<file path=ppt/slides/slide41.xml><?xml version="1.0" encoding="utf-8"?>
+<file path=ppt/slides/slide48.xml><?xml version="1.0" encoding="utf-8"?>
 <p:sld xmlns:a="http://schemas.openxmlformats.org/drawingml/2006/main" xmlns:r="http://schemas.openxmlformats.org/officeDocument/2006/relationships" xmlns:p="http://schemas.openxmlformats.org/presentationml/2006/main">
   <p:cSld>
     <p:spTree>
@@ -9931,7 +11283,7 @@
 </p:sld>
 </file>
 
-<file path=ppt/slides/slide42.xml><?xml version="1.0" encoding="utf-8"?>
+<file path=ppt/slides/slide49.xml><?xml version="1.0" encoding="utf-8"?>
 <p:sld xmlns:a="http://schemas.openxmlformats.org/drawingml/2006/main" xmlns:r="http://schemas.openxmlformats.org/officeDocument/2006/relationships" xmlns:p="http://schemas.openxmlformats.org/presentationml/2006/main">
   <p:cSld>
     <p:spTree>
@@ -10146,7 +11498,7 @@
 </p:sld>
 </file>
 
-<file path=ppt/slides/slide43.xml><?xml version="1.0" encoding="utf-8"?>
+<file path=ppt/slides/slide5.xml><?xml version="1.0" encoding="utf-8"?>
 <p:sld xmlns:a="http://schemas.openxmlformats.org/drawingml/2006/main" xmlns:r="http://schemas.openxmlformats.org/officeDocument/2006/relationships" xmlns:p="http://schemas.openxmlformats.org/presentationml/2006/main" show="0">
   <p:cSld>
     <p:spTree>
@@ -10168,6 +11520,138 @@
           <p:cNvPr id="2" name="Title 1">
             <a:extLst>
               <a:ext uri="{FF2B5EF4-FFF2-40B4-BE49-F238E27FC236}">
+                <a16:creationId xmlns:a16="http://schemas.microsoft.com/office/drawing/2014/main" id="{C23B2C87-4BE3-F68C-4EE7-7009E745ACA7}"/>
+              </a:ext>
+            </a:extLst>
+          </p:cNvPr>
+          <p:cNvSpPr>
+            <a:spLocks noGrp="1"/>
+          </p:cNvSpPr>
+          <p:nvPr>
+            <p:ph type="title"/>
+          </p:nvPr>
+        </p:nvSpPr>
+        <p:spPr/>
+        <p:txBody>
+          <a:bodyPr/>
+          <a:lstStyle/>
+          <a:p>
+            <a:r>
+              <a:rPr lang="en-US" dirty="0"/>
+              <a:t>Cluster Assignment</a:t>
+            </a:r>
+          </a:p>
+        </p:txBody>
+      </p:sp>
+      <p:sp>
+        <p:nvSpPr>
+          <p:cNvPr id="3" name="Content Placeholder 2">
+            <a:extLst>
+              <a:ext uri="{FF2B5EF4-FFF2-40B4-BE49-F238E27FC236}">
+                <a16:creationId xmlns:a16="http://schemas.microsoft.com/office/drawing/2014/main" id="{C027D62E-779C-86FC-A8CB-FC13358BCB50}"/>
+              </a:ext>
+            </a:extLst>
+          </p:cNvPr>
+          <p:cNvSpPr>
+            <a:spLocks noGrp="1"/>
+          </p:cNvSpPr>
+          <p:nvPr>
+            <p:ph idx="1"/>
+          </p:nvPr>
+        </p:nvSpPr>
+        <p:spPr>
+          <a:xfrm>
+            <a:off x="1451579" y="1853754"/>
+            <a:ext cx="9603275" cy="4199727"/>
+          </a:xfrm>
+        </p:spPr>
+        <p:txBody>
+          <a:bodyPr/>
+          <a:lstStyle/>
+          <a:p>
+            <a:r>
+              <a:rPr lang="en-US" dirty="0"/>
+              <a:t>Common issues:</a:t>
+            </a:r>
+          </a:p>
+          <a:p>
+            <a:pPr lvl="1"/>
+            <a:r>
+              <a:rPr lang="en-US" dirty="0"/>
+              <a:t>Assorted mix-ups applying labels to clusters. </a:t>
+            </a:r>
+          </a:p>
+          <a:p>
+            <a:pPr lvl="1"/>
+            <a:r>
+              <a:rPr lang="en-US" dirty="0"/>
+              <a:t>Training GMM timing/location. </a:t>
+            </a:r>
+          </a:p>
+          <a:p>
+            <a:r>
+              <a:rPr lang="en-US" dirty="0"/>
+              <a:t>Adding labeling:</a:t>
+            </a:r>
+          </a:p>
+          <a:p>
+            <a:pPr lvl="1"/>
+            <a:r>
+              <a:rPr lang="en-US" dirty="0"/>
+              <a:t>This feels weird to lots of people, but it isn’t really all that rare. (LLMs and gen models). </a:t>
+            </a:r>
+          </a:p>
+          <a:p>
+            <a:pPr lvl="1"/>
+            <a:r>
+              <a:rPr lang="en-US" dirty="0"/>
+              <a:t>The clusters are able to be ‘pure’ on their own, but we need to add the label info ourselves. </a:t>
+            </a:r>
+          </a:p>
+          <a:p>
+            <a:pPr lvl="1"/>
+            <a:r>
+              <a:rPr lang="en-US" dirty="0"/>
+              <a:t>This could be supplemented by other models – e.g. manually label enough, then use classifier.</a:t>
+            </a:r>
+          </a:p>
+        </p:txBody>
+      </p:sp>
+    </p:spTree>
+    <p:extLst>
+      <p:ext uri="{BB962C8B-B14F-4D97-AF65-F5344CB8AC3E}">
+        <p14:creationId xmlns:p14="http://schemas.microsoft.com/office/powerpoint/2010/main" val="885412947"/>
+      </p:ext>
+    </p:extLst>
+  </p:cSld>
+  <p:clrMapOvr>
+    <a:masterClrMapping/>
+  </p:clrMapOvr>
+</p:sld>
+</file>
+
+<file path=ppt/slides/slide50.xml><?xml version="1.0" encoding="utf-8"?>
+<p:sld xmlns:a="http://schemas.openxmlformats.org/drawingml/2006/main" xmlns:r="http://schemas.openxmlformats.org/officeDocument/2006/relationships" xmlns:p="http://schemas.openxmlformats.org/presentationml/2006/main" show="0">
+  <p:cSld>
+    <p:spTree>
+      <p:nvGrpSpPr>
+        <p:cNvPr id="1" name=""/>
+        <p:cNvGrpSpPr/>
+        <p:nvPr/>
+      </p:nvGrpSpPr>
+      <p:grpSpPr>
+        <a:xfrm>
+          <a:off x="0" y="0"/>
+          <a:ext cx="0" cy="0"/>
+          <a:chOff x="0" y="0"/>
+          <a:chExt cx="0" cy="0"/>
+        </a:xfrm>
+      </p:grpSpPr>
+      <p:sp>
+        <p:nvSpPr>
+          <p:cNvPr id="2" name="Title 1">
+            <a:extLst>
+              <a:ext uri="{FF2B5EF4-FFF2-40B4-BE49-F238E27FC236}">
                 <a16:creationId xmlns:a16="http://schemas.microsoft.com/office/drawing/2014/main" id="{CBCB9964-3340-F14A-ACF7-EC8ED9BC8A5E}"/>
               </a:ext>
             </a:extLst>
@@ -10299,7 +11783,7 @@
 </p:sld>
 </file>
 
-<file path=ppt/slides/slide44.xml><?xml version="1.0" encoding="utf-8"?>
+<file path=ppt/slides/slide51.xml><?xml version="1.0" encoding="utf-8"?>
 <p:sld xmlns:a="http://schemas.openxmlformats.org/drawingml/2006/main" xmlns:r="http://schemas.openxmlformats.org/officeDocument/2006/relationships" xmlns:p="http://schemas.openxmlformats.org/presentationml/2006/main">
   <p:cSld>
     <p:spTree>
@@ -10321,653 +11805,6 @@
           <p:cNvPr id="2" name="Title 1">
             <a:extLst>
               <a:ext uri="{FF2B5EF4-FFF2-40B4-BE49-F238E27FC236}">
-                <a16:creationId xmlns:a16="http://schemas.microsoft.com/office/drawing/2014/main" id="{CA6815EB-83BE-8102-1A7B-F685E86453B7}"/>
-              </a:ext>
-            </a:extLst>
-          </p:cNvPr>
-          <p:cNvSpPr>
-            <a:spLocks noGrp="1"/>
-          </p:cNvSpPr>
-          <p:nvPr>
-            <p:ph type="title"/>
-          </p:nvPr>
-        </p:nvSpPr>
-        <p:spPr/>
-        <p:txBody>
-          <a:bodyPr/>
-          <a:lstStyle/>
-          <a:p>
-            <a:r>
-              <a:rPr lang="en-US" dirty="0" err="1"/>
-              <a:t>RayTune</a:t>
-            </a:r>
-            <a:endParaRPr lang="en-US" dirty="0"/>
-          </a:p>
-        </p:txBody>
-      </p:sp>
-      <p:sp>
-        <p:nvSpPr>
-          <p:cNvPr id="3" name="Content Placeholder 2">
-            <a:extLst>
-              <a:ext uri="{FF2B5EF4-FFF2-40B4-BE49-F238E27FC236}">
-                <a16:creationId xmlns:a16="http://schemas.microsoft.com/office/drawing/2014/main" id="{03333832-984D-A311-6777-FBB08A772031}"/>
-              </a:ext>
-            </a:extLst>
-          </p:cNvPr>
-          <p:cNvSpPr>
-            <a:spLocks noGrp="1"/>
-          </p:cNvSpPr>
-          <p:nvPr>
-            <p:ph idx="1"/>
-          </p:nvPr>
-        </p:nvSpPr>
-        <p:spPr>
-          <a:xfrm>
-            <a:off x="0" y="1853754"/>
-            <a:ext cx="6791089" cy="4199727"/>
-          </a:xfrm>
-        </p:spPr>
-        <p:txBody>
-          <a:bodyPr/>
-          <a:lstStyle/>
-          <a:p>
-            <a:r>
-              <a:rPr lang="en-US" dirty="0"/>
-              <a:t>Hyperparameter tuning is more involved than a grid search. </a:t>
-            </a:r>
-          </a:p>
-          <a:p>
-            <a:pPr lvl="1"/>
-            <a:r>
-              <a:rPr lang="en-US" dirty="0"/>
-              <a:t>The concept is the same, the tools are different. </a:t>
-            </a:r>
-          </a:p>
-          <a:p>
-            <a:r>
-              <a:rPr lang="en-US" dirty="0" err="1"/>
-              <a:t>RayTune</a:t>
-            </a:r>
-            <a:r>
-              <a:rPr lang="en-US" dirty="0"/>
-              <a:t> allows us to setup </a:t>
-            </a:r>
-            <a:r>
-              <a:rPr lang="en-US" dirty="0" err="1"/>
-              <a:t>gridsearch</a:t>
-            </a:r>
-            <a:r>
-              <a:rPr lang="en-US" dirty="0"/>
-              <a:t>-y tuning. </a:t>
-            </a:r>
-          </a:p>
-          <a:p>
-            <a:pPr lvl="1"/>
-            <a:r>
-              <a:rPr lang="en-US" dirty="0"/>
-              <a:t>We can control basically anything if we want. </a:t>
-            </a:r>
-          </a:p>
-          <a:p>
-            <a:r>
-              <a:rPr lang="en-US" dirty="0" err="1"/>
-              <a:t>RayTune</a:t>
-            </a:r>
-            <a:r>
-              <a:rPr lang="en-US" dirty="0"/>
-              <a:t> also allows for distributed tuning. </a:t>
-            </a:r>
-          </a:p>
-          <a:p>
-            <a:pPr lvl="1"/>
-            <a:r>
-              <a:rPr lang="en-US" dirty="0"/>
-              <a:t>Train models on several systems. </a:t>
-            </a:r>
-          </a:p>
-          <a:p>
-            <a:pPr lvl="1"/>
-            <a:r>
-              <a:rPr lang="en-US" dirty="0"/>
-              <a:t>This adds some complexity, unfortunately. </a:t>
-            </a:r>
-          </a:p>
-          <a:p>
-            <a:r>
-              <a:rPr lang="en-US" dirty="0"/>
-              <a:t>The idea is relatively simple, implementation may not be. </a:t>
-            </a:r>
-          </a:p>
-          <a:p>
-            <a:r>
-              <a:rPr lang="en-US" dirty="0"/>
-              <a:t>Provides </a:t>
-            </a:r>
-            <a:r>
-              <a:rPr lang="en-US" dirty="0" err="1"/>
-              <a:t>tensorboard</a:t>
-            </a:r>
-            <a:r>
-              <a:rPr lang="en-US" dirty="0"/>
-              <a:t> logs by default. </a:t>
-            </a:r>
-          </a:p>
-        </p:txBody>
-      </p:sp>
-      <p:pic>
-        <p:nvPicPr>
-          <p:cNvPr id="4" name="Picture 3" descr="Ray Tune FAQ — Ray 2.54.0">
-            <a:extLst>
-              <a:ext uri="{FF2B5EF4-FFF2-40B4-BE49-F238E27FC236}">
-                <a16:creationId xmlns:a16="http://schemas.microsoft.com/office/drawing/2014/main" id="{72FAD165-79E1-D9D9-B2B7-BF3F25342562}"/>
-              </a:ext>
-            </a:extLst>
-          </p:cNvPr>
-          <p:cNvPicPr>
-            <a:picLocks noChangeAspect="1"/>
-          </p:cNvPicPr>
-          <p:nvPr/>
-        </p:nvPicPr>
-        <p:blipFill>
-          <a:blip r:embed="rId2"/>
-          <a:srcRect l="7927" r="3719"/>
-          <a:stretch>
-            <a:fillRect/>
-          </a:stretch>
-        </p:blipFill>
-        <p:spPr>
-          <a:xfrm>
-            <a:off x="6791089" y="2037345"/>
-            <a:ext cx="5386039" cy="3429000"/>
-          </a:xfrm>
-          <a:prstGeom prst="rect">
-            <a:avLst/>
-          </a:prstGeom>
-        </p:spPr>
-      </p:pic>
-    </p:spTree>
-    <p:extLst>
-      <p:ext uri="{BB962C8B-B14F-4D97-AF65-F5344CB8AC3E}">
-        <p14:creationId xmlns:p14="http://schemas.microsoft.com/office/powerpoint/2010/main" val="823925468"/>
-      </p:ext>
-    </p:extLst>
-  </p:cSld>
-  <p:clrMapOvr>
-    <a:masterClrMapping/>
-  </p:clrMapOvr>
-</p:sld>
-</file>
-
-<file path=ppt/slides/slide45.xml><?xml version="1.0" encoding="utf-8"?>
-<p:sld xmlns:a="http://schemas.openxmlformats.org/drawingml/2006/main" xmlns:r="http://schemas.openxmlformats.org/officeDocument/2006/relationships" xmlns:p="http://schemas.openxmlformats.org/presentationml/2006/main">
-  <p:cSld>
-    <p:spTree>
-      <p:nvGrpSpPr>
-        <p:cNvPr id="1" name=""/>
-        <p:cNvGrpSpPr/>
-        <p:nvPr/>
-      </p:nvGrpSpPr>
-      <p:grpSpPr>
-        <a:xfrm>
-          <a:off x="0" y="0"/>
-          <a:ext cx="0" cy="0"/>
-          <a:chOff x="0" y="0"/>
-          <a:chExt cx="0" cy="0"/>
-        </a:xfrm>
-      </p:grpSpPr>
-      <p:sp>
-        <p:nvSpPr>
-          <p:cNvPr id="2" name="Title 1">
-            <a:extLst>
-              <a:ext uri="{FF2B5EF4-FFF2-40B4-BE49-F238E27FC236}">
-                <a16:creationId xmlns:a16="http://schemas.microsoft.com/office/drawing/2014/main" id="{454AA7E2-974D-BF5B-D830-D1067C4936BA}"/>
-              </a:ext>
-            </a:extLst>
-          </p:cNvPr>
-          <p:cNvSpPr>
-            <a:spLocks noGrp="1"/>
-          </p:cNvSpPr>
-          <p:nvPr>
-            <p:ph type="title"/>
-          </p:nvPr>
-        </p:nvSpPr>
-        <p:spPr/>
-        <p:txBody>
-          <a:bodyPr/>
-          <a:lstStyle/>
-          <a:p>
-            <a:r>
-              <a:rPr lang="en-US" dirty="0" err="1"/>
-              <a:t>RayTune</a:t>
-            </a:r>
-            <a:r>
-              <a:rPr lang="en-US" dirty="0"/>
-              <a:t> Setup</a:t>
-            </a:r>
-          </a:p>
-        </p:txBody>
-      </p:sp>
-      <p:sp>
-        <p:nvSpPr>
-          <p:cNvPr id="3" name="Content Placeholder 2">
-            <a:extLst>
-              <a:ext uri="{FF2B5EF4-FFF2-40B4-BE49-F238E27FC236}">
-                <a16:creationId xmlns:a16="http://schemas.microsoft.com/office/drawing/2014/main" id="{59494532-C744-DBCF-365D-9581E52BC2CA}"/>
-              </a:ext>
-            </a:extLst>
-          </p:cNvPr>
-          <p:cNvSpPr>
-            <a:spLocks noGrp="1"/>
-          </p:cNvSpPr>
-          <p:nvPr>
-            <p:ph idx="1"/>
-          </p:nvPr>
-        </p:nvSpPr>
-        <p:spPr>
-          <a:xfrm>
-            <a:off x="5710683" y="1853754"/>
-            <a:ext cx="6481317" cy="4335173"/>
-          </a:xfrm>
-        </p:spPr>
-        <p:txBody>
-          <a:bodyPr/>
-          <a:lstStyle/>
-          <a:p>
-            <a:r>
-              <a:rPr lang="en-US" dirty="0"/>
-              <a:t>We setup a ‘tunable’, usually* a loop. </a:t>
-            </a:r>
-          </a:p>
-          <a:p>
-            <a:pPr lvl="1"/>
-            <a:r>
-              <a:rPr lang="en-US" dirty="0"/>
-              <a:t>This loop ‘does’ all the model stuff – create, </a:t>
-            </a:r>
-            <a:r>
-              <a:rPr lang="en-US" dirty="0" err="1"/>
-              <a:t>dataloaders</a:t>
-            </a:r>
-            <a:r>
-              <a:rPr lang="en-US" dirty="0"/>
-              <a:t>, optimizer, </a:t>
-            </a:r>
-            <a:r>
-              <a:rPr lang="en-US" dirty="0" err="1"/>
-              <a:t>etc</a:t>
-            </a:r>
-            <a:r>
-              <a:rPr lang="en-US" dirty="0"/>
-              <a:t>…</a:t>
-            </a:r>
-          </a:p>
-          <a:p>
-            <a:pPr lvl="1"/>
-            <a:r>
-              <a:rPr lang="en-US" dirty="0"/>
-              <a:t>The all-in-a-loop thing allows for dist. training.</a:t>
-            </a:r>
-          </a:p>
-          <a:p>
-            <a:r>
-              <a:rPr lang="en-US" dirty="0"/>
-              <a:t>We add variables and a </a:t>
-            </a:r>
-            <a:r>
-              <a:rPr lang="en-US" dirty="0" err="1"/>
-              <a:t>gridsearch</a:t>
-            </a:r>
-            <a:r>
-              <a:rPr lang="en-US" dirty="0"/>
-              <a:t>-y space. </a:t>
-            </a:r>
-          </a:p>
-          <a:p>
-            <a:pPr lvl="1"/>
-            <a:r>
-              <a:rPr lang="en-US" dirty="0"/>
-              <a:t>E.g. config - </a:t>
-            </a:r>
-            <a:r>
-              <a:rPr lang="en-US" dirty="0" err="1"/>
-              <a:t>num_filters</a:t>
-            </a:r>
-            <a:r>
-              <a:rPr lang="en-US" dirty="0"/>
-              <a:t>, </a:t>
-            </a:r>
-            <a:r>
-              <a:rPr lang="en-US" dirty="0" err="1"/>
-              <a:t>dropout_rate</a:t>
-            </a:r>
-            <a:r>
-              <a:rPr lang="en-US" dirty="0"/>
-              <a:t>, </a:t>
-            </a:r>
-            <a:r>
-              <a:rPr lang="en-US" dirty="0" err="1"/>
-              <a:t>fc_size</a:t>
-            </a:r>
-            <a:r>
-              <a:rPr lang="en-US" dirty="0"/>
-              <a:t>. </a:t>
-            </a:r>
-          </a:p>
-          <a:p>
-            <a:pPr lvl="1"/>
-            <a:r>
-              <a:rPr lang="en-US" dirty="0"/>
-              <a:t>Each run selects a value from the search space provided. </a:t>
-            </a:r>
-          </a:p>
-          <a:p>
-            <a:pPr lvl="1"/>
-            <a:r>
-              <a:rPr lang="en-US" dirty="0"/>
-              <a:t>Select from list, number within range, random, </a:t>
-            </a:r>
-            <a:r>
-              <a:rPr lang="en-US" dirty="0" err="1"/>
-              <a:t>etc</a:t>
-            </a:r>
-            <a:r>
-              <a:rPr lang="en-US" dirty="0"/>
-              <a:t>…</a:t>
-            </a:r>
-          </a:p>
-          <a:p>
-            <a:r>
-              <a:rPr lang="en-US" dirty="0"/>
-              <a:t>Can add schedulers to manage the training – e.g. cutoff bad trials early. There’s lots more, we only use a bit. </a:t>
-            </a:r>
-          </a:p>
-        </p:txBody>
-      </p:sp>
-      <p:pic>
-        <p:nvPicPr>
-          <p:cNvPr id="4" name="Picture 3">
-            <a:extLst>
-              <a:ext uri="{FF2B5EF4-FFF2-40B4-BE49-F238E27FC236}">
-                <a16:creationId xmlns:a16="http://schemas.microsoft.com/office/drawing/2014/main" id="{19468D9F-1FCF-F023-9ECE-2B2298977832}"/>
-              </a:ext>
-            </a:extLst>
-          </p:cNvPr>
-          <p:cNvPicPr>
-            <a:picLocks noChangeAspect="1"/>
-          </p:cNvPicPr>
-          <p:nvPr/>
-        </p:nvPicPr>
-        <p:blipFill>
-          <a:blip r:embed="rId2"/>
-          <a:stretch>
-            <a:fillRect/>
-          </a:stretch>
-        </p:blipFill>
-        <p:spPr>
-          <a:xfrm>
-            <a:off x="0" y="1549830"/>
-            <a:ext cx="5710684" cy="5308169"/>
-          </a:xfrm>
-          <a:prstGeom prst="rect">
-            <a:avLst/>
-          </a:prstGeom>
-        </p:spPr>
-      </p:pic>
-      <p:pic>
-        <p:nvPicPr>
-          <p:cNvPr id="5" name="Picture 4">
-            <a:extLst>
-              <a:ext uri="{FF2B5EF4-FFF2-40B4-BE49-F238E27FC236}">
-                <a16:creationId xmlns:a16="http://schemas.microsoft.com/office/drawing/2014/main" id="{8BB37C52-FF28-6620-D280-94DD179D20D7}"/>
-              </a:ext>
-            </a:extLst>
-          </p:cNvPr>
-          <p:cNvPicPr>
-            <a:picLocks noChangeAspect="1"/>
-          </p:cNvPicPr>
-          <p:nvPr/>
-        </p:nvPicPr>
-        <p:blipFill>
-          <a:blip r:embed="rId3"/>
-          <a:stretch>
-            <a:fillRect/>
-          </a:stretch>
-        </p:blipFill>
-        <p:spPr>
-          <a:xfrm>
-            <a:off x="7796401" y="0"/>
-            <a:ext cx="4395599" cy="1798582"/>
-          </a:xfrm>
-          <a:prstGeom prst="rect">
-            <a:avLst/>
-          </a:prstGeom>
-        </p:spPr>
-      </p:pic>
-    </p:spTree>
-    <p:extLst>
-      <p:ext uri="{BB962C8B-B14F-4D97-AF65-F5344CB8AC3E}">
-        <p14:creationId xmlns:p14="http://schemas.microsoft.com/office/powerpoint/2010/main" val="1516440389"/>
-      </p:ext>
-    </p:extLst>
-  </p:cSld>
-  <p:clrMapOvr>
-    <a:masterClrMapping/>
-  </p:clrMapOvr>
-</p:sld>
-</file>
-
-<file path=ppt/slides/slide46.xml><?xml version="1.0" encoding="utf-8"?>
-<p:sld xmlns:a="http://schemas.openxmlformats.org/drawingml/2006/main" xmlns:r="http://schemas.openxmlformats.org/officeDocument/2006/relationships" xmlns:p="http://schemas.openxmlformats.org/presentationml/2006/main">
-  <p:cSld>
-    <p:spTree>
-      <p:nvGrpSpPr>
-        <p:cNvPr id="1" name=""/>
-        <p:cNvGrpSpPr/>
-        <p:nvPr/>
-      </p:nvGrpSpPr>
-      <p:grpSpPr>
-        <a:xfrm>
-          <a:off x="0" y="0"/>
-          <a:ext cx="0" cy="0"/>
-          <a:chOff x="0" y="0"/>
-          <a:chExt cx="0" cy="0"/>
-        </a:xfrm>
-      </p:grpSpPr>
-      <p:sp>
-        <p:nvSpPr>
-          <p:cNvPr id="2" name="Title 1">
-            <a:extLst>
-              <a:ext uri="{FF2B5EF4-FFF2-40B4-BE49-F238E27FC236}">
-                <a16:creationId xmlns:a16="http://schemas.microsoft.com/office/drawing/2014/main" id="{057D06E3-E747-D735-F22D-0975BCAF2173}"/>
-              </a:ext>
-            </a:extLst>
-          </p:cNvPr>
-          <p:cNvSpPr>
-            <a:spLocks noGrp="1"/>
-          </p:cNvSpPr>
-          <p:nvPr>
-            <p:ph type="title"/>
-          </p:nvPr>
-        </p:nvSpPr>
-        <p:spPr/>
-        <p:txBody>
-          <a:bodyPr/>
-          <a:lstStyle/>
-          <a:p>
-            <a:r>
-              <a:rPr lang="en-US" dirty="0"/>
-              <a:t>Using </a:t>
-            </a:r>
-            <a:r>
-              <a:rPr lang="en-US" dirty="0" err="1"/>
-              <a:t>Raytune</a:t>
-            </a:r>
-            <a:endParaRPr lang="en-US" dirty="0"/>
-          </a:p>
-        </p:txBody>
-      </p:sp>
-      <p:sp>
-        <p:nvSpPr>
-          <p:cNvPr id="3" name="Content Placeholder 2">
-            <a:extLst>
-              <a:ext uri="{FF2B5EF4-FFF2-40B4-BE49-F238E27FC236}">
-                <a16:creationId xmlns:a16="http://schemas.microsoft.com/office/drawing/2014/main" id="{4FC45783-8E67-E1C8-9D34-633455F1E166}"/>
-              </a:ext>
-            </a:extLst>
-          </p:cNvPr>
-          <p:cNvSpPr>
-            <a:spLocks noGrp="1"/>
-          </p:cNvSpPr>
-          <p:nvPr>
-            <p:ph idx="1"/>
-          </p:nvPr>
-        </p:nvSpPr>
-        <p:spPr>
-          <a:xfrm>
-            <a:off x="1451579" y="1940312"/>
-            <a:ext cx="10023026" cy="4113169"/>
-          </a:xfrm>
-        </p:spPr>
-        <p:txBody>
-          <a:bodyPr>
-            <a:normAutofit fontScale="92500" lnSpcReduction="10000"/>
-          </a:bodyPr>
-          <a:lstStyle/>
-          <a:p>
-            <a:r>
-              <a:rPr lang="en-US" dirty="0"/>
-              <a:t>Using </a:t>
-            </a:r>
-            <a:r>
-              <a:rPr lang="en-US" dirty="0" err="1"/>
-              <a:t>raytune</a:t>
-            </a:r>
-            <a:r>
-              <a:rPr lang="en-US" dirty="0"/>
-              <a:t> is kind of annoying at first, the capability adds some complexity. </a:t>
-            </a:r>
-          </a:p>
-          <a:p>
-            <a:pPr lvl="1"/>
-            <a:r>
-              <a:rPr lang="en-US" dirty="0"/>
-              <a:t>Memory management and serializable errors are easy to make*. </a:t>
-            </a:r>
-          </a:p>
-          <a:p>
-            <a:pPr lvl="1"/>
-            <a:r>
-              <a:rPr lang="en-US" dirty="0"/>
-              <a:t>There’s several ways to do things. </a:t>
-            </a:r>
-          </a:p>
-          <a:p>
-            <a:pPr lvl="1"/>
-            <a:r>
-              <a:rPr lang="en-US" dirty="0"/>
-              <a:t>Need to allow everything to be split to different systems makes it more complex. </a:t>
-            </a:r>
-          </a:p>
-          <a:p>
-            <a:r>
-              <a:rPr lang="en-US" dirty="0"/>
-              <a:t>The time demands are often large, so make the search space as smart as possible. </a:t>
-            </a:r>
-          </a:p>
-          <a:p>
-            <a:pPr lvl="1"/>
-            <a:r>
-              <a:rPr lang="en-US" dirty="0"/>
-              <a:t>Ensure GPU if on </a:t>
-            </a:r>
-            <a:r>
-              <a:rPr lang="en-US" dirty="0" err="1"/>
-              <a:t>colab</a:t>
-            </a:r>
-            <a:r>
-              <a:rPr lang="en-US" dirty="0"/>
-              <a:t>, not automatically enabled. </a:t>
-            </a:r>
-          </a:p>
-          <a:p>
-            <a:r>
-              <a:rPr lang="en-US" dirty="0"/>
-              <a:t>Don’t tell anyone I said this, but the infrastructure code around </a:t>
-            </a:r>
-            <a:r>
-              <a:rPr lang="en-US" dirty="0" err="1"/>
-              <a:t>raytune</a:t>
-            </a:r>
-            <a:r>
-              <a:rPr lang="en-US" dirty="0"/>
-              <a:t> is a good LLM use. </a:t>
-            </a:r>
-          </a:p>
-          <a:p>
-            <a:pPr lvl="1"/>
-            <a:r>
-              <a:rPr lang="en-US" dirty="0"/>
-              <a:t>Along with crawling file systems, regular expressions, and UI things you rarely need. </a:t>
-            </a:r>
-          </a:p>
-          <a:p>
-            <a:pPr lvl="1"/>
-            <a:r>
-              <a:rPr lang="en-US" dirty="0"/>
-              <a:t>You still want to define the model, search space, and datasets at a minimum. </a:t>
-            </a:r>
-          </a:p>
-          <a:p>
-            <a:pPr lvl="1"/>
-            <a:r>
-              <a:rPr lang="en-US" dirty="0"/>
-              <a:t>The stuff around tuner, scheduler, etc... Isn’t insanely complex, but it is finicky. </a:t>
-            </a:r>
-          </a:p>
-          <a:p>
-            <a:pPr lvl="1"/>
-            <a:r>
-              <a:rPr lang="en-US" dirty="0"/>
-              <a:t>If you understand the concept, and can adjust code, that stuff is AI-OK™ </a:t>
-            </a:r>
-          </a:p>
-        </p:txBody>
-      </p:sp>
-    </p:spTree>
-    <p:extLst>
-      <p:ext uri="{BB962C8B-B14F-4D97-AF65-F5344CB8AC3E}">
-        <p14:creationId xmlns:p14="http://schemas.microsoft.com/office/powerpoint/2010/main" val="1830515373"/>
-      </p:ext>
-    </p:extLst>
-  </p:cSld>
-  <p:clrMapOvr>
-    <a:masterClrMapping/>
-  </p:clrMapOvr>
-</p:sld>
-</file>
-
-<file path=ppt/slides/slide47.xml><?xml version="1.0" encoding="utf-8"?>
-<p:sld xmlns:a="http://schemas.openxmlformats.org/drawingml/2006/main" xmlns:r="http://schemas.openxmlformats.org/officeDocument/2006/relationships" xmlns:p="http://schemas.openxmlformats.org/presentationml/2006/main">
-  <p:cSld>
-    <p:spTree>
-      <p:nvGrpSpPr>
-        <p:cNvPr id="1" name=""/>
-        <p:cNvGrpSpPr/>
-        <p:nvPr/>
-      </p:nvGrpSpPr>
-      <p:grpSpPr>
-        <a:xfrm>
-          <a:off x="0" y="0"/>
-          <a:ext cx="0" cy="0"/>
-          <a:chOff x="0" y="0"/>
-          <a:chExt cx="0" cy="0"/>
-        </a:xfrm>
-      </p:grpSpPr>
-      <p:sp>
-        <p:nvSpPr>
-          <p:cNvPr id="2" name="Title 1">
-            <a:extLst>
-              <a:ext uri="{FF2B5EF4-FFF2-40B4-BE49-F238E27FC236}">
                 <a16:creationId xmlns:a16="http://schemas.microsoft.com/office/drawing/2014/main" id="{00F11902-F058-D543-A654-EBFA8DD915C4}"/>
               </a:ext>
             </a:extLst>
@@ -11114,7 +11951,7 @@
 </p:sld>
 </file>
 
-<file path=ppt/slides/slide48.xml><?xml version="1.0" encoding="utf-8"?>
+<file path=ppt/slides/slide52.xml><?xml version="1.0" encoding="utf-8"?>
 <p:sld xmlns:a="http://schemas.openxmlformats.org/drawingml/2006/main" xmlns:r="http://schemas.openxmlformats.org/officeDocument/2006/relationships" xmlns:p="http://schemas.openxmlformats.org/presentationml/2006/main" show="0">
   <p:cSld>
     <p:spTree>
@@ -11299,7 +12136,7 @@
 </p:sld>
 </file>
 
-<file path=ppt/slides/slide49.xml><?xml version="1.0" encoding="utf-8"?>
+<file path=ppt/slides/slide53.xml><?xml version="1.0" encoding="utf-8"?>
 <p:sld xmlns:a="http://schemas.openxmlformats.org/drawingml/2006/main" xmlns:r="http://schemas.openxmlformats.org/officeDocument/2006/relationships" xmlns:p="http://schemas.openxmlformats.org/presentationml/2006/main" show="0">
   <p:cSld>
     <p:spTree>
@@ -11415,139 +12252,7 @@
 </p:sld>
 </file>
 
-<file path=ppt/slides/slide5.xml><?xml version="1.0" encoding="utf-8"?>
-<p:sld xmlns:a="http://schemas.openxmlformats.org/drawingml/2006/main" xmlns:r="http://schemas.openxmlformats.org/officeDocument/2006/relationships" xmlns:p="http://schemas.openxmlformats.org/presentationml/2006/main" show="0">
-  <p:cSld>
-    <p:spTree>
-      <p:nvGrpSpPr>
-        <p:cNvPr id="1" name=""/>
-        <p:cNvGrpSpPr/>
-        <p:nvPr/>
-      </p:nvGrpSpPr>
-      <p:grpSpPr>
-        <a:xfrm>
-          <a:off x="0" y="0"/>
-          <a:ext cx="0" cy="0"/>
-          <a:chOff x="0" y="0"/>
-          <a:chExt cx="0" cy="0"/>
-        </a:xfrm>
-      </p:grpSpPr>
-      <p:sp>
-        <p:nvSpPr>
-          <p:cNvPr id="2" name="Title 1">
-            <a:extLst>
-              <a:ext uri="{FF2B5EF4-FFF2-40B4-BE49-F238E27FC236}">
-                <a16:creationId xmlns:a16="http://schemas.microsoft.com/office/drawing/2014/main" id="{C23B2C87-4BE3-F68C-4EE7-7009E745ACA7}"/>
-              </a:ext>
-            </a:extLst>
-          </p:cNvPr>
-          <p:cNvSpPr>
-            <a:spLocks noGrp="1"/>
-          </p:cNvSpPr>
-          <p:nvPr>
-            <p:ph type="title"/>
-          </p:nvPr>
-        </p:nvSpPr>
-        <p:spPr/>
-        <p:txBody>
-          <a:bodyPr/>
-          <a:lstStyle/>
-          <a:p>
-            <a:r>
-              <a:rPr lang="en-US" dirty="0"/>
-              <a:t>Cluster Assignment</a:t>
-            </a:r>
-          </a:p>
-        </p:txBody>
-      </p:sp>
-      <p:sp>
-        <p:nvSpPr>
-          <p:cNvPr id="3" name="Content Placeholder 2">
-            <a:extLst>
-              <a:ext uri="{FF2B5EF4-FFF2-40B4-BE49-F238E27FC236}">
-                <a16:creationId xmlns:a16="http://schemas.microsoft.com/office/drawing/2014/main" id="{C027D62E-779C-86FC-A8CB-FC13358BCB50}"/>
-              </a:ext>
-            </a:extLst>
-          </p:cNvPr>
-          <p:cNvSpPr>
-            <a:spLocks noGrp="1"/>
-          </p:cNvSpPr>
-          <p:nvPr>
-            <p:ph idx="1"/>
-          </p:nvPr>
-        </p:nvSpPr>
-        <p:spPr>
-          <a:xfrm>
-            <a:off x="1451579" y="1853754"/>
-            <a:ext cx="9603275" cy="4199727"/>
-          </a:xfrm>
-        </p:spPr>
-        <p:txBody>
-          <a:bodyPr/>
-          <a:lstStyle/>
-          <a:p>
-            <a:r>
-              <a:rPr lang="en-US" dirty="0"/>
-              <a:t>Common issues:</a:t>
-            </a:r>
-          </a:p>
-          <a:p>
-            <a:pPr lvl="1"/>
-            <a:r>
-              <a:rPr lang="en-US" dirty="0"/>
-              <a:t>Assorted mix-ups applying labels to clusters. </a:t>
-            </a:r>
-          </a:p>
-          <a:p>
-            <a:pPr lvl="1"/>
-            <a:r>
-              <a:rPr lang="en-US" dirty="0"/>
-              <a:t>Training GMM timing/location. </a:t>
-            </a:r>
-          </a:p>
-          <a:p>
-            <a:r>
-              <a:rPr lang="en-US" dirty="0"/>
-              <a:t>Adding labeling:</a:t>
-            </a:r>
-          </a:p>
-          <a:p>
-            <a:pPr lvl="1"/>
-            <a:r>
-              <a:rPr lang="en-US" dirty="0"/>
-              <a:t>This feels weird to lots of people, but it isn’t really all that rare. (LLMs and gen models). </a:t>
-            </a:r>
-          </a:p>
-          <a:p>
-            <a:pPr lvl="1"/>
-            <a:r>
-              <a:rPr lang="en-US" dirty="0"/>
-              <a:t>The clusters are able to be ‘pure’ on their own, but we need to add the label info ourselves. </a:t>
-            </a:r>
-          </a:p>
-          <a:p>
-            <a:pPr lvl="1"/>
-            <a:r>
-              <a:rPr lang="en-US" dirty="0"/>
-              <a:t>This could be supplemented by other models – e.g. manually label enough, then use classifier.</a:t>
-            </a:r>
-          </a:p>
-        </p:txBody>
-      </p:sp>
-    </p:spTree>
-    <p:extLst>
-      <p:ext uri="{BB962C8B-B14F-4D97-AF65-F5344CB8AC3E}">
-        <p14:creationId xmlns:p14="http://schemas.microsoft.com/office/powerpoint/2010/main" val="885412947"/>
-      </p:ext>
-    </p:extLst>
-  </p:cSld>
-  <p:clrMapOvr>
-    <a:masterClrMapping/>
-  </p:clrMapOvr>
-</p:sld>
-</file>
-
-<file path=ppt/slides/slide50.xml><?xml version="1.0" encoding="utf-8"?>
+<file path=ppt/slides/slide54.xml><?xml version="1.0" encoding="utf-8"?>
 <p:sld xmlns:a="http://schemas.openxmlformats.org/drawingml/2006/main" xmlns:r="http://schemas.openxmlformats.org/officeDocument/2006/relationships" xmlns:p="http://schemas.openxmlformats.org/presentationml/2006/main" show="0">
   <p:cSld>
     <p:spTree>
@@ -11705,7 +12410,7 @@
 </p:sld>
 </file>
 
-<file path=ppt/slides/slide51.xml><?xml version="1.0" encoding="utf-8"?>
+<file path=ppt/slides/slide55.xml><?xml version="1.0" encoding="utf-8"?>
 <p:sld xmlns:a="http://schemas.openxmlformats.org/drawingml/2006/main" xmlns:r="http://schemas.openxmlformats.org/officeDocument/2006/relationships" xmlns:p="http://schemas.openxmlformats.org/presentationml/2006/main" show="0">
   <p:cSld>
     <p:spTree>
@@ -11857,7 +12562,7 @@
 </p:sld>
 </file>
 
-<file path=ppt/slides/slide52.xml><?xml version="1.0" encoding="utf-8"?>
+<file path=ppt/slides/slide56.xml><?xml version="1.0" encoding="utf-8"?>
 <p:sld xmlns:a="http://schemas.openxmlformats.org/drawingml/2006/main" xmlns:r="http://schemas.openxmlformats.org/officeDocument/2006/relationships" xmlns:p="http://schemas.openxmlformats.org/presentationml/2006/main" show="0">
   <p:cSld>
     <p:spTree>
@@ -11995,7 +12700,7 @@
 </p:sld>
 </file>
 
-<file path=ppt/slides/slide53.xml><?xml version="1.0" encoding="utf-8"?>
+<file path=ppt/slides/slide57.xml><?xml version="1.0" encoding="utf-8"?>
 <p:sld xmlns:a="http://schemas.openxmlformats.org/drawingml/2006/main" xmlns:r="http://schemas.openxmlformats.org/officeDocument/2006/relationships" xmlns:p="http://schemas.openxmlformats.org/presentationml/2006/main" show="0">
   <p:cSld>
     <p:spTree>
@@ -12099,7 +12804,7 @@
 </p:sld>
 </file>
 
-<file path=ppt/slides/slide54.xml><?xml version="1.0" encoding="utf-8"?>
+<file path=ppt/slides/slide58.xml><?xml version="1.0" encoding="utf-8"?>
 <p:sld xmlns:a="http://schemas.openxmlformats.org/drawingml/2006/main" xmlns:r="http://schemas.openxmlformats.org/officeDocument/2006/relationships" xmlns:p="http://schemas.openxmlformats.org/presentationml/2006/main" show="0">
   <p:cSld>
     <p:spTree>
@@ -12251,7 +12956,7 @@
 </p:sld>
 </file>
 
-<file path=ppt/slides/slide55.xml><?xml version="1.0" encoding="utf-8"?>
+<file path=ppt/slides/slide59.xml><?xml version="1.0" encoding="utf-8"?>
 <p:sld xmlns:a="http://schemas.openxmlformats.org/drawingml/2006/main" xmlns:r="http://schemas.openxmlformats.org/officeDocument/2006/relationships" xmlns:p="http://schemas.openxmlformats.org/presentationml/2006/main" show="0">
   <p:cSld>
     <p:spTree>
@@ -12502,7 +13207,93 @@
 </p:sld>
 </file>
 
-<file path=ppt/slides/slide56.xml><?xml version="1.0" encoding="utf-8"?>
+<file path=ppt/slides/slide6.xml><?xml version="1.0" encoding="utf-8"?>
+<p:sld xmlns:a="http://schemas.openxmlformats.org/drawingml/2006/main" xmlns:r="http://schemas.openxmlformats.org/officeDocument/2006/relationships" xmlns:p="http://schemas.openxmlformats.org/presentationml/2006/main">
+  <p:cSld>
+    <p:spTree>
+      <p:nvGrpSpPr>
+        <p:cNvPr id="1" name=""/>
+        <p:cNvGrpSpPr/>
+        <p:nvPr/>
+      </p:nvGrpSpPr>
+      <p:grpSpPr>
+        <a:xfrm>
+          <a:off x="0" y="0"/>
+          <a:ext cx="0" cy="0"/>
+          <a:chOff x="0" y="0"/>
+          <a:chExt cx="0" cy="0"/>
+        </a:xfrm>
+      </p:grpSpPr>
+      <p:sp>
+        <p:nvSpPr>
+          <p:cNvPr id="2" name="Title 1">
+            <a:extLst>
+              <a:ext uri="{FF2B5EF4-FFF2-40B4-BE49-F238E27FC236}">
+                <a16:creationId xmlns:a16="http://schemas.microsoft.com/office/drawing/2014/main" id="{E68B6258-E5B7-46B2-B0C0-74D17CB32669}"/>
+              </a:ext>
+            </a:extLst>
+          </p:cNvPr>
+          <p:cNvSpPr>
+            <a:spLocks noGrp="1"/>
+          </p:cNvSpPr>
+          <p:nvPr>
+            <p:ph type="ctrTitle"/>
+          </p:nvPr>
+        </p:nvSpPr>
+        <p:spPr/>
+        <p:txBody>
+          <a:bodyPr>
+            <a:normAutofit fontScale="90000"/>
+          </a:bodyPr>
+          <a:lstStyle/>
+          <a:p>
+            <a:r>
+              <a:rPr lang="en-CA" dirty="0"/>
+              <a:t>Neural Network tuning and Optimization</a:t>
+            </a:r>
+            <a:endParaRPr lang="LID4096" dirty="0"/>
+          </a:p>
+        </p:txBody>
+      </p:sp>
+      <p:sp>
+        <p:nvSpPr>
+          <p:cNvPr id="3" name="Subtitle 2">
+            <a:extLst>
+              <a:ext uri="{FF2B5EF4-FFF2-40B4-BE49-F238E27FC236}">
+                <a16:creationId xmlns:a16="http://schemas.microsoft.com/office/drawing/2014/main" id="{ABA17104-0772-4130-BC10-20A91C36DBC3}"/>
+              </a:ext>
+            </a:extLst>
+          </p:cNvPr>
+          <p:cNvSpPr>
+            <a:spLocks noGrp="1"/>
+          </p:cNvSpPr>
+          <p:nvPr>
+            <p:ph type="subTitle" idx="1"/>
+          </p:nvPr>
+        </p:nvSpPr>
+        <p:spPr/>
+        <p:txBody>
+          <a:bodyPr/>
+          <a:lstStyle/>
+          <a:p>
+            <a:endParaRPr lang="LID4096"/>
+          </a:p>
+        </p:txBody>
+      </p:sp>
+    </p:spTree>
+    <p:extLst>
+      <p:ext uri="{BB962C8B-B14F-4D97-AF65-F5344CB8AC3E}">
+        <p14:creationId xmlns:p14="http://schemas.microsoft.com/office/powerpoint/2010/main" val="213059865"/>
+      </p:ext>
+    </p:extLst>
+  </p:cSld>
+  <p:clrMapOvr>
+    <a:masterClrMapping/>
+  </p:clrMapOvr>
+</p:sld>
+</file>
+
+<file path=ppt/slides/slide60.xml><?xml version="1.0" encoding="utf-8"?>
 <p:sld xmlns:a="http://schemas.openxmlformats.org/drawingml/2006/main" xmlns:r="http://schemas.openxmlformats.org/officeDocument/2006/relationships" xmlns:p="http://schemas.openxmlformats.org/presentationml/2006/main" show="0">
   <p:cSld>
     <p:spTree>
@@ -12628,7 +13419,7 @@
 </p:sld>
 </file>
 
-<file path=ppt/slides/slide57.xml><?xml version="1.0" encoding="utf-8"?>
+<file path=ppt/slides/slide61.xml><?xml version="1.0" encoding="utf-8"?>
 <p:sld xmlns:a="http://schemas.openxmlformats.org/drawingml/2006/main" xmlns:r="http://schemas.openxmlformats.org/officeDocument/2006/relationships" xmlns:p="http://schemas.openxmlformats.org/presentationml/2006/main" show="0">
   <p:cSld>
     <p:spTree>
@@ -12790,7 +13581,7 @@
 </p:sld>
 </file>
 
-<file path=ppt/slides/slide58.xml><?xml version="1.0" encoding="utf-8"?>
+<file path=ppt/slides/slide62.xml><?xml version="1.0" encoding="utf-8"?>
 <p:sld xmlns:a="http://schemas.openxmlformats.org/drawingml/2006/main" xmlns:r="http://schemas.openxmlformats.org/officeDocument/2006/relationships" xmlns:p="http://schemas.openxmlformats.org/presentationml/2006/main" show="0">
   <p:cSld>
     <p:spTree>
@@ -12977,7 +13768,7 @@
 </p:sld>
 </file>
 
-<file path=ppt/slides/slide59.xml><?xml version="1.0" encoding="utf-8"?>
+<file path=ppt/slides/slide63.xml><?xml version="1.0" encoding="utf-8"?>
 <p:sld xmlns:a="http://schemas.openxmlformats.org/drawingml/2006/main" xmlns:r="http://schemas.openxmlformats.org/officeDocument/2006/relationships" xmlns:p="http://schemas.openxmlformats.org/presentationml/2006/main" show="0">
   <p:cSld>
     <p:spTree>
@@ -13140,97 +13931,7 @@
 </p:sld>
 </file>
 
-<file path=ppt/slides/slide6.xml><?xml version="1.0" encoding="utf-8"?>
-<p:sld xmlns:a="http://schemas.openxmlformats.org/drawingml/2006/main" xmlns:r="http://schemas.openxmlformats.org/officeDocument/2006/relationships" xmlns:p="http://schemas.openxmlformats.org/presentationml/2006/main">
-  <p:cSld>
-    <p:spTree>
-      <p:nvGrpSpPr>
-        <p:cNvPr id="1" name=""/>
-        <p:cNvGrpSpPr/>
-        <p:nvPr/>
-      </p:nvGrpSpPr>
-      <p:grpSpPr>
-        <a:xfrm>
-          <a:off x="0" y="0"/>
-          <a:ext cx="0" cy="0"/>
-          <a:chOff x="0" y="0"/>
-          <a:chExt cx="0" cy="0"/>
-        </a:xfrm>
-      </p:grpSpPr>
-      <p:sp>
-        <p:nvSpPr>
-          <p:cNvPr id="2" name="Title 1">
-            <a:extLst>
-              <a:ext uri="{FF2B5EF4-FFF2-40B4-BE49-F238E27FC236}">
-                <a16:creationId xmlns:a16="http://schemas.microsoft.com/office/drawing/2014/main" id="{E68B6258-E5B7-46B2-B0C0-74D17CB32669}"/>
-              </a:ext>
-            </a:extLst>
-          </p:cNvPr>
-          <p:cNvSpPr>
-            <a:spLocks noGrp="1"/>
-          </p:cNvSpPr>
-          <p:nvPr>
-            <p:ph type="ctrTitle"/>
-          </p:nvPr>
-        </p:nvSpPr>
-        <p:spPr/>
-        <p:txBody>
-          <a:bodyPr>
-            <a:normAutofit fontScale="90000"/>
-          </a:bodyPr>
-          <a:lstStyle/>
-          <a:p>
-            <a:r>
-              <a:rPr lang="en-CA" dirty="0"/>
-              <a:t>Neural Network </a:t>
-            </a:r>
-            <a:r>
-              <a:rPr lang="en-CA"/>
-              <a:t>tuning and Optimization</a:t>
-            </a:r>
-            <a:endParaRPr lang="LID4096" dirty="0"/>
-          </a:p>
-        </p:txBody>
-      </p:sp>
-      <p:sp>
-        <p:nvSpPr>
-          <p:cNvPr id="3" name="Subtitle 2">
-            <a:extLst>
-              <a:ext uri="{FF2B5EF4-FFF2-40B4-BE49-F238E27FC236}">
-                <a16:creationId xmlns:a16="http://schemas.microsoft.com/office/drawing/2014/main" id="{ABA17104-0772-4130-BC10-20A91C36DBC3}"/>
-              </a:ext>
-            </a:extLst>
-          </p:cNvPr>
-          <p:cNvSpPr>
-            <a:spLocks noGrp="1"/>
-          </p:cNvSpPr>
-          <p:nvPr>
-            <p:ph type="subTitle" idx="1"/>
-          </p:nvPr>
-        </p:nvSpPr>
-        <p:spPr/>
-        <p:txBody>
-          <a:bodyPr/>
-          <a:lstStyle/>
-          <a:p>
-            <a:endParaRPr lang="LID4096"/>
-          </a:p>
-        </p:txBody>
-      </p:sp>
-    </p:spTree>
-    <p:extLst>
-      <p:ext uri="{BB962C8B-B14F-4D97-AF65-F5344CB8AC3E}">
-        <p14:creationId xmlns:p14="http://schemas.microsoft.com/office/powerpoint/2010/main" val="213059865"/>
-      </p:ext>
-    </p:extLst>
-  </p:cSld>
-  <p:clrMapOvr>
-    <a:masterClrMapping/>
-  </p:clrMapOvr>
-</p:sld>
-</file>
-
-<file path=ppt/slides/slide60.xml><?xml version="1.0" encoding="utf-8"?>
+<file path=ppt/slides/slide64.xml><?xml version="1.0" encoding="utf-8"?>
 <p:sld xmlns:a="http://schemas.openxmlformats.org/drawingml/2006/main" xmlns:r="http://schemas.openxmlformats.org/officeDocument/2006/relationships" xmlns:p="http://schemas.openxmlformats.org/presentationml/2006/main" show="0">
   <p:cSld>
     <p:spTree>
@@ -13363,7 +14064,7 @@
 </p:sld>
 </file>
 
-<file path=ppt/slides/slide61.xml><?xml version="1.0" encoding="utf-8"?>
+<file path=ppt/slides/slide65.xml><?xml version="1.0" encoding="utf-8"?>
 <p:sld xmlns:a="http://schemas.openxmlformats.org/drawingml/2006/main" xmlns:r="http://schemas.openxmlformats.org/officeDocument/2006/relationships" xmlns:p="http://schemas.openxmlformats.org/presentationml/2006/main" show="0">
   <p:cSld>
     <p:spTree>
@@ -13496,7 +14197,7 @@
 </p:sld>
 </file>
 
-<file path=ppt/slides/slide62.xml><?xml version="1.0" encoding="utf-8"?>
+<file path=ppt/slides/slide66.xml><?xml version="1.0" encoding="utf-8"?>
 <p:sld xmlns:a="http://schemas.openxmlformats.org/drawingml/2006/main" xmlns:r="http://schemas.openxmlformats.org/officeDocument/2006/relationships" xmlns:p="http://schemas.openxmlformats.org/presentationml/2006/main" show="0">
   <p:cSld>
     <p:spTree>
@@ -13665,7 +14366,7 @@
 </p:sld>
 </file>
 
-<file path=ppt/slides/slide63.xml><?xml version="1.0" encoding="utf-8"?>
+<file path=ppt/slides/slide67.xml><?xml version="1.0" encoding="utf-8"?>
 <p:sld xmlns:a="http://schemas.openxmlformats.org/drawingml/2006/main" xmlns:r="http://schemas.openxmlformats.org/officeDocument/2006/relationships" xmlns:p="http://schemas.openxmlformats.org/presentationml/2006/main" show="0">
   <p:cSld>
     <p:spTree>
@@ -13896,7 +14597,7 @@
 </p:sld>
 </file>
 
-<file path=ppt/slides/slide64.xml><?xml version="1.0" encoding="utf-8"?>
+<file path=ppt/slides/slide68.xml><?xml version="1.0" encoding="utf-8"?>
 <p:sld xmlns:a="http://schemas.openxmlformats.org/drawingml/2006/main" xmlns:r="http://schemas.openxmlformats.org/officeDocument/2006/relationships" xmlns:p="http://schemas.openxmlformats.org/presentationml/2006/main" show="0">
   <p:cSld>
     <p:spTree>
@@ -14050,7 +14751,7 @@
 </p:sld>
 </file>
 
-<file path=ppt/slides/slide65.xml><?xml version="1.0" encoding="utf-8"?>
+<file path=ppt/slides/slide69.xml><?xml version="1.0" encoding="utf-8"?>
 <p:sld xmlns:a="http://schemas.openxmlformats.org/drawingml/2006/main" xmlns:r="http://schemas.openxmlformats.org/officeDocument/2006/relationships" xmlns:p="http://schemas.openxmlformats.org/presentationml/2006/main" show="0">
   <p:cSld>
     <p:spTree>
@@ -14212,7 +14913,223 @@
 </p:sld>
 </file>
 
-<file path=ppt/slides/slide66.xml><?xml version="1.0" encoding="utf-8"?>
+<file path=ppt/slides/slide7.xml><?xml version="1.0" encoding="utf-8"?>
+<p:sld xmlns:a="http://schemas.openxmlformats.org/drawingml/2006/main" xmlns:r="http://schemas.openxmlformats.org/officeDocument/2006/relationships" xmlns:p="http://schemas.openxmlformats.org/presentationml/2006/main">
+  <p:cSld>
+    <p:spTree>
+      <p:nvGrpSpPr>
+        <p:cNvPr id="1" name=""/>
+        <p:cNvGrpSpPr/>
+        <p:nvPr/>
+      </p:nvGrpSpPr>
+      <p:grpSpPr>
+        <a:xfrm>
+          <a:off x="0" y="0"/>
+          <a:ext cx="0" cy="0"/>
+          <a:chOff x="0" y="0"/>
+          <a:chExt cx="0" cy="0"/>
+        </a:xfrm>
+      </p:grpSpPr>
+      <p:sp>
+        <p:nvSpPr>
+          <p:cNvPr id="2" name="Title 1">
+            <a:extLst>
+              <a:ext uri="{FF2B5EF4-FFF2-40B4-BE49-F238E27FC236}">
+                <a16:creationId xmlns:a16="http://schemas.microsoft.com/office/drawing/2014/main" id="{3FBCD252-8C73-3B4A-9A76-CDDC6DF80B03}"/>
+              </a:ext>
+            </a:extLst>
+          </p:cNvPr>
+          <p:cNvSpPr>
+            <a:spLocks noGrp="1"/>
+          </p:cNvSpPr>
+          <p:nvPr>
+            <p:ph type="title"/>
+          </p:nvPr>
+        </p:nvSpPr>
+        <p:spPr>
+          <a:xfrm>
+            <a:off x="1451579" y="804519"/>
+            <a:ext cx="9603275" cy="1049235"/>
+          </a:xfrm>
+        </p:spPr>
+        <p:txBody>
+          <a:bodyPr>
+            <a:normAutofit/>
+          </a:bodyPr>
+          <a:lstStyle/>
+          <a:p>
+            <a:r>
+              <a:rPr lang="en-US" dirty="0" err="1"/>
+              <a:t>Tensorboard</a:t>
+            </a:r>
+            <a:r>
+              <a:rPr lang="en-US" dirty="0"/>
+              <a:t> Monitoring</a:t>
+            </a:r>
+          </a:p>
+        </p:txBody>
+      </p:sp>
+      <p:sp>
+        <p:nvSpPr>
+          <p:cNvPr id="3" name="Content Placeholder 2">
+            <a:extLst>
+              <a:ext uri="{FF2B5EF4-FFF2-40B4-BE49-F238E27FC236}">
+                <a16:creationId xmlns:a16="http://schemas.microsoft.com/office/drawing/2014/main" id="{8E2043A0-5013-9747-9156-5B2BFAA7A796}"/>
+              </a:ext>
+            </a:extLst>
+          </p:cNvPr>
+          <p:cNvSpPr>
+            <a:spLocks noGrp="1"/>
+          </p:cNvSpPr>
+          <p:nvPr>
+            <p:ph idx="1"/>
+          </p:nvPr>
+        </p:nvSpPr>
+        <p:spPr>
+          <a:xfrm>
+            <a:off x="0" y="2015734"/>
+            <a:ext cx="6943725" cy="4037747"/>
+          </a:xfrm>
+        </p:spPr>
+        <p:txBody>
+          <a:bodyPr>
+            <a:normAutofit/>
+          </a:bodyPr>
+          <a:lstStyle/>
+          <a:p>
+            <a:r>
+              <a:rPr lang="en-US" dirty="0"/>
+              <a:t>We are used to using several tools to monitor network results. </a:t>
+            </a:r>
+          </a:p>
+          <a:p>
+            <a:pPr lvl="1"/>
+            <a:r>
+              <a:rPr lang="en-US" dirty="0"/>
+              <a:t>Epoch by epoch text printouts. </a:t>
+            </a:r>
+          </a:p>
+          <a:p>
+            <a:pPr lvl="1"/>
+            <a:r>
+              <a:rPr lang="en-US" dirty="0"/>
+              <a:t>Plotting of loss from history. </a:t>
+            </a:r>
+          </a:p>
+          <a:p>
+            <a:r>
+              <a:rPr lang="en-US" dirty="0" err="1"/>
+              <a:t>Tensorboard</a:t>
+            </a:r>
+            <a:r>
+              <a:rPr lang="en-US" dirty="0"/>
+              <a:t> is a tool from </a:t>
+            </a:r>
+            <a:r>
+              <a:rPr lang="en-US" dirty="0" err="1"/>
+              <a:t>Keras</a:t>
+            </a:r>
+            <a:r>
+              <a:rPr lang="en-US" dirty="0"/>
+              <a:t> that makes this process nicer. </a:t>
+            </a:r>
+          </a:p>
+          <a:p>
+            <a:r>
+              <a:rPr lang="en-US" dirty="0"/>
+              <a:t>We can use </a:t>
+            </a:r>
+            <a:r>
+              <a:rPr lang="en-US" dirty="0" err="1"/>
+              <a:t>Tensorboard</a:t>
+            </a:r>
+            <a:r>
+              <a:rPr lang="en-US" dirty="0"/>
+              <a:t> to get a “modern” dashboard to monitor training results. </a:t>
+            </a:r>
+          </a:p>
+          <a:p>
+            <a:r>
+              <a:rPr lang="en-US" dirty="0"/>
+              <a:t>In ‘real’ applications, we’d run </a:t>
+            </a:r>
+            <a:r>
+              <a:rPr lang="en-US" dirty="0" err="1"/>
+              <a:t>tensorboard</a:t>
+            </a:r>
+            <a:r>
+              <a:rPr lang="en-US" dirty="0"/>
+              <a:t> on the server, and connect to it via the web from anywhere. </a:t>
+            </a:r>
+          </a:p>
+          <a:p>
+            <a:pPr lvl="1"/>
+            <a:r>
+              <a:rPr lang="en-US" dirty="0"/>
+              <a:t>You can try locally, it will tell you port when starting. </a:t>
+            </a:r>
+          </a:p>
+        </p:txBody>
+      </p:sp>
+      <p:pic>
+        <p:nvPicPr>
+          <p:cNvPr id="1026" name="Picture 2" descr="Tensorboard with PyTorch | NaadiSpeaks">
+            <a:extLst>
+              <a:ext uri="{FF2B5EF4-FFF2-40B4-BE49-F238E27FC236}">
+                <a16:creationId xmlns:a16="http://schemas.microsoft.com/office/drawing/2014/main" id="{AE6341D0-139B-FC43-913F-EBF14DDABFD6}"/>
+              </a:ext>
+            </a:extLst>
+          </p:cNvPr>
+          <p:cNvPicPr>
+            <a:picLocks noChangeAspect="1" noChangeArrowheads="1"/>
+          </p:cNvPicPr>
+          <p:nvPr/>
+        </p:nvPicPr>
+        <p:blipFill rotWithShape="1">
+          <a:blip r:embed="rId2">
+            <a:extLst>
+              <a:ext uri="{28A0092B-C50C-407E-A947-70E740481C1C}">
+                <a14:useLocalDpi xmlns:a14="http://schemas.microsoft.com/office/drawing/2010/main" val="0"/>
+              </a:ext>
+            </a:extLst>
+          </a:blip>
+          <a:srcRect r="18996" b="5603"/>
+          <a:stretch/>
+        </p:blipFill>
+        <p:spPr bwMode="auto">
+          <a:xfrm>
+            <a:off x="6943725" y="1414833"/>
+            <a:ext cx="5248275" cy="5443167"/>
+          </a:xfrm>
+          <a:prstGeom prst="rect">
+            <a:avLst/>
+          </a:prstGeom>
+          <a:noFill/>
+          <a:extLst>
+            <a:ext uri="{909E8E84-426E-40DD-AFC4-6F175D3DCCD1}">
+              <a14:hiddenFill xmlns:a14="http://schemas.microsoft.com/office/drawing/2010/main">
+                <a:solidFill>
+                  <a:srgbClr val="FFFFFF"/>
+                </a:solidFill>
+              </a14:hiddenFill>
+            </a:ext>
+          </a:extLst>
+        </p:spPr>
+      </p:pic>
+    </p:spTree>
+    <p:extLst>
+      <p:ext uri="{BB962C8B-B14F-4D97-AF65-F5344CB8AC3E}">
+        <p14:creationId xmlns:p14="http://schemas.microsoft.com/office/powerpoint/2010/main" val="1951310974"/>
+      </p:ext>
+    </p:extLst>
+  </p:cSld>
+  <p:clrMapOvr>
+    <a:masterClrMapping/>
+  </p:clrMapOvr>
+</p:sld>
+</file>
+
+<file path=ppt/slides/slide70.xml><?xml version="1.0" encoding="utf-8"?>
 <p:sld xmlns:a="http://schemas.openxmlformats.org/drawingml/2006/main" xmlns:r="http://schemas.openxmlformats.org/officeDocument/2006/relationships" xmlns:p="http://schemas.openxmlformats.org/presentationml/2006/main" show="0">
   <p:cSld>
     <p:spTree>
@@ -14406,7 +15323,7 @@
 </p:sld>
 </file>
 
-<file path=ppt/slides/slide67.xml><?xml version="1.0" encoding="utf-8"?>
+<file path=ppt/slides/slide71.xml><?xml version="1.0" encoding="utf-8"?>
 <p:sld xmlns:a="http://schemas.openxmlformats.org/drawingml/2006/main" xmlns:r="http://schemas.openxmlformats.org/officeDocument/2006/relationships" xmlns:p="http://schemas.openxmlformats.org/presentationml/2006/main" show="0">
   <p:cSld>
     <p:spTree>
@@ -14567,7 +15484,7 @@
 </p:sld>
 </file>
 
-<file path=ppt/slides/slide68.xml><?xml version="1.0" encoding="utf-8"?>
+<file path=ppt/slides/slide72.xml><?xml version="1.0" encoding="utf-8"?>
 <p:sld xmlns:a="http://schemas.openxmlformats.org/drawingml/2006/main" xmlns:r="http://schemas.openxmlformats.org/officeDocument/2006/relationships" xmlns:p="http://schemas.openxmlformats.org/presentationml/2006/main" show="0">
   <p:cSld>
     <p:spTree>
@@ -14703,7 +15620,7 @@
 </p:sld>
 </file>
 
-<file path=ppt/slides/slide69.xml><?xml version="1.0" encoding="utf-8"?>
+<file path=ppt/slides/slide73.xml><?xml version="1.0" encoding="utf-8"?>
 <p:sld xmlns:a="http://schemas.openxmlformats.org/drawingml/2006/main" xmlns:r="http://schemas.openxmlformats.org/officeDocument/2006/relationships" xmlns:p="http://schemas.openxmlformats.org/presentationml/2006/main" show="0">
   <p:cSld>
     <p:spTree>
@@ -14917,97 +15834,7 @@
 </p:sld>
 </file>
 
-<file path=ppt/slides/slide7.xml><?xml version="1.0" encoding="utf-8"?>
-<p:sld xmlns:a="http://schemas.openxmlformats.org/drawingml/2006/main" xmlns:r="http://schemas.openxmlformats.org/officeDocument/2006/relationships" xmlns:p="http://schemas.openxmlformats.org/presentationml/2006/main" show="0">
-  <p:cSld>
-    <p:spTree>
-      <p:nvGrpSpPr>
-        <p:cNvPr id="1" name=""/>
-        <p:cNvGrpSpPr/>
-        <p:nvPr/>
-      </p:nvGrpSpPr>
-      <p:grpSpPr>
-        <a:xfrm>
-          <a:off x="0" y="0"/>
-          <a:ext cx="0" cy="0"/>
-          <a:chOff x="0" y="0"/>
-          <a:chExt cx="0" cy="0"/>
-        </a:xfrm>
-      </p:grpSpPr>
-      <p:sp>
-        <p:nvSpPr>
-          <p:cNvPr id="2" name="Title 1">
-            <a:extLst>
-              <a:ext uri="{FF2B5EF4-FFF2-40B4-BE49-F238E27FC236}">
-                <a16:creationId xmlns:a16="http://schemas.microsoft.com/office/drawing/2014/main" id="{2F1DC659-6159-C0C9-F9E3-8A5A1EA88C34}"/>
-              </a:ext>
-            </a:extLst>
-          </p:cNvPr>
-          <p:cNvSpPr>
-            <a:spLocks noGrp="1"/>
-          </p:cNvSpPr>
-          <p:nvPr>
-            <p:ph type="title"/>
-          </p:nvPr>
-        </p:nvSpPr>
-        <p:spPr/>
-        <p:txBody>
-          <a:bodyPr/>
-          <a:lstStyle/>
-          <a:p>
-            <a:r>
-              <a:rPr lang="en-US" dirty="0"/>
-              <a:t>But First – Get Board</a:t>
-            </a:r>
-          </a:p>
-        </p:txBody>
-      </p:sp>
-      <p:sp>
-        <p:nvSpPr>
-          <p:cNvPr id="3" name="Content Placeholder 2">
-            <a:extLst>
-              <a:ext uri="{FF2B5EF4-FFF2-40B4-BE49-F238E27FC236}">
-                <a16:creationId xmlns:a16="http://schemas.microsoft.com/office/drawing/2014/main" id="{430B4EFE-4776-DF7E-F9DA-6D3E00372B75}"/>
-              </a:ext>
-            </a:extLst>
-          </p:cNvPr>
-          <p:cNvSpPr>
-            <a:spLocks noGrp="1"/>
-          </p:cNvSpPr>
-          <p:nvPr>
-            <p:ph idx="1"/>
-          </p:nvPr>
-        </p:nvSpPr>
-        <p:spPr/>
-        <p:txBody>
-          <a:bodyPr/>
-          <a:lstStyle/>
-          <a:p>
-            <a:r>
-              <a:rPr lang="en-US" dirty="0" err="1"/>
-              <a:t>Tensorboard</a:t>
-            </a:r>
-            <a:r>
-              <a:rPr lang="en-US" dirty="0"/>
-              <a:t> is a tool we can use to monitor training. </a:t>
-            </a:r>
-          </a:p>
-        </p:txBody>
-      </p:sp>
-    </p:spTree>
-    <p:extLst>
-      <p:ext uri="{BB962C8B-B14F-4D97-AF65-F5344CB8AC3E}">
-        <p14:creationId xmlns:p14="http://schemas.microsoft.com/office/powerpoint/2010/main" val="3862673346"/>
-      </p:ext>
-    </p:extLst>
-  </p:cSld>
-  <p:clrMapOvr>
-    <a:masterClrMapping/>
-  </p:clrMapOvr>
-</p:sld>
-</file>
-
-<file path=ppt/slides/slide70.xml><?xml version="1.0" encoding="utf-8"?>
+<file path=ppt/slides/slide74.xml><?xml version="1.0" encoding="utf-8"?>
 <p:sld xmlns:a="http://schemas.openxmlformats.org/drawingml/2006/main" xmlns:r="http://schemas.openxmlformats.org/officeDocument/2006/relationships" xmlns:p="http://schemas.openxmlformats.org/presentationml/2006/main" show="0">
   <p:cSld>
     <p:spTree>
@@ -15306,7 +16133,7 @@
 </p:sld>
 </file>
 
-<file path=ppt/slides/slide71.xml><?xml version="1.0" encoding="utf-8"?>
+<file path=ppt/slides/slide75.xml><?xml version="1.0" encoding="utf-8"?>
 <p:sld xmlns:a="http://schemas.openxmlformats.org/drawingml/2006/main" xmlns:r="http://schemas.openxmlformats.org/officeDocument/2006/relationships" xmlns:p="http://schemas.openxmlformats.org/presentationml/2006/main" show="0">
   <p:cSld>
     <p:spTree>
@@ -15479,7 +16306,7 @@
 </p:sld>
 </file>
 
-<file path=ppt/slides/slide72.xml><?xml version="1.0" encoding="utf-8"?>
+<file path=ppt/slides/slide76.xml><?xml version="1.0" encoding="utf-8"?>
 <p:sld xmlns:a="http://schemas.openxmlformats.org/drawingml/2006/main" xmlns:r="http://schemas.openxmlformats.org/officeDocument/2006/relationships" xmlns:p="http://schemas.openxmlformats.org/presentationml/2006/main" show="0">
   <p:cSld>
     <p:spTree>
@@ -15606,7 +16433,7 @@
 </p:sld>
 </file>
 
-<file path=ppt/slides/slide73.xml><?xml version="1.0" encoding="utf-8"?>
+<file path=ppt/slides/slide77.xml><?xml version="1.0" encoding="utf-8"?>
 <p:sld xmlns:a="http://schemas.openxmlformats.org/drawingml/2006/main" xmlns:r="http://schemas.openxmlformats.org/officeDocument/2006/relationships" xmlns:p="http://schemas.openxmlformats.org/presentationml/2006/main" show="0">
   <p:cSld>
     <p:spTree>
@@ -15846,7 +16673,7 @@
 </p:sld>
 </file>
 
-<file path=ppt/slides/slide74.xml><?xml version="1.0" encoding="utf-8"?>
+<file path=ppt/slides/slide78.xml><?xml version="1.0" encoding="utf-8"?>
 <p:sld xmlns:a="http://schemas.openxmlformats.org/drawingml/2006/main" xmlns:r="http://schemas.openxmlformats.org/officeDocument/2006/relationships" xmlns:p="http://schemas.openxmlformats.org/presentationml/2006/main" show="0">
   <p:cSld>
     <p:spTree>
@@ -16076,7 +16903,7 @@
 </p:sld>
 </file>
 
-<file path=ppt/slides/slide75.xml><?xml version="1.0" encoding="utf-8"?>
+<file path=ppt/slides/slide79.xml><?xml version="1.0" encoding="utf-8"?>
 <p:sld xmlns:a="http://schemas.openxmlformats.org/drawingml/2006/main" xmlns:r="http://schemas.openxmlformats.org/officeDocument/2006/relationships" xmlns:p="http://schemas.openxmlformats.org/presentationml/2006/main" show="0">
   <p:cSld>
     <p:spTree>
@@ -16209,7 +17036,164 @@
 </p:sld>
 </file>
 
-<file path=ppt/slides/slide76.xml><?xml version="1.0" encoding="utf-8"?>
+<file path=ppt/slides/slide8.xml><?xml version="1.0" encoding="utf-8"?>
+<p:sld xmlns:a="http://schemas.openxmlformats.org/drawingml/2006/main" xmlns:r="http://schemas.openxmlformats.org/officeDocument/2006/relationships" xmlns:p="http://schemas.openxmlformats.org/presentationml/2006/main">
+  <p:cSld>
+    <p:spTree>
+      <p:nvGrpSpPr>
+        <p:cNvPr id="1" name=""/>
+        <p:cNvGrpSpPr/>
+        <p:nvPr/>
+      </p:nvGrpSpPr>
+      <p:grpSpPr>
+        <a:xfrm>
+          <a:off x="0" y="0"/>
+          <a:ext cx="0" cy="0"/>
+          <a:chOff x="0" y="0"/>
+          <a:chExt cx="0" cy="0"/>
+        </a:xfrm>
+      </p:grpSpPr>
+      <p:sp>
+        <p:nvSpPr>
+          <p:cNvPr id="2" name="Title 1">
+            <a:extLst>
+              <a:ext uri="{FF2B5EF4-FFF2-40B4-BE49-F238E27FC236}">
+                <a16:creationId xmlns:a16="http://schemas.microsoft.com/office/drawing/2014/main" id="{773997A9-EBE8-16CD-615F-6474212A3217}"/>
+              </a:ext>
+            </a:extLst>
+          </p:cNvPr>
+          <p:cNvSpPr>
+            <a:spLocks noGrp="1"/>
+          </p:cNvSpPr>
+          <p:nvPr>
+            <p:ph type="title"/>
+          </p:nvPr>
+        </p:nvSpPr>
+        <p:spPr/>
+        <p:txBody>
+          <a:bodyPr/>
+          <a:lstStyle/>
+          <a:p>
+            <a:r>
+              <a:rPr lang="en-US" dirty="0" err="1"/>
+              <a:t>Tensorboard</a:t>
+            </a:r>
+            <a:endParaRPr lang="en-US" dirty="0"/>
+          </a:p>
+        </p:txBody>
+      </p:sp>
+      <p:sp>
+        <p:nvSpPr>
+          <p:cNvPr id="3" name="Content Placeholder 2">
+            <a:extLst>
+              <a:ext uri="{FF2B5EF4-FFF2-40B4-BE49-F238E27FC236}">
+                <a16:creationId xmlns:a16="http://schemas.microsoft.com/office/drawing/2014/main" id="{46618571-5092-5208-F239-781041E284A1}"/>
+              </a:ext>
+            </a:extLst>
+          </p:cNvPr>
+          <p:cNvSpPr>
+            <a:spLocks noGrp="1"/>
+          </p:cNvSpPr>
+          <p:nvPr>
+            <p:ph idx="1"/>
+          </p:nvPr>
+        </p:nvSpPr>
+        <p:spPr>
+          <a:xfrm>
+            <a:off x="1451579" y="1853754"/>
+            <a:ext cx="9603275" cy="4199727"/>
+          </a:xfrm>
+        </p:spPr>
+        <p:txBody>
+          <a:bodyPr/>
+          <a:lstStyle/>
+          <a:p>
+            <a:r>
+              <a:rPr lang="en-US" dirty="0" err="1"/>
+              <a:t>Tensorboard</a:t>
+            </a:r>
+            <a:r>
+              <a:rPr lang="en-US" dirty="0"/>
+              <a:t> can show lots of stuff and is largely customizable. </a:t>
+            </a:r>
+          </a:p>
+          <a:p>
+            <a:pPr lvl="1"/>
+            <a:r>
+              <a:rPr lang="en-US" dirty="0"/>
+              <a:t>There are lots of examples of how to put things into it online. </a:t>
+            </a:r>
+          </a:p>
+          <a:p>
+            <a:r>
+              <a:rPr lang="en-US" dirty="0"/>
+              <a:t>We’ll use it for the basic monitoring mostly. </a:t>
+            </a:r>
+          </a:p>
+          <a:p>
+            <a:r>
+              <a:rPr lang="en-US" dirty="0"/>
+              <a:t>Key usage:</a:t>
+            </a:r>
+          </a:p>
+          <a:p>
+            <a:pPr lvl="1"/>
+            <a:r>
+              <a:rPr lang="en-US" dirty="0"/>
+              <a:t>Start training on the server you’re using. </a:t>
+            </a:r>
+          </a:p>
+          <a:p>
+            <a:pPr lvl="1"/>
+            <a:r>
+              <a:rPr lang="en-US" dirty="0"/>
+              <a:t>Launch </a:t>
+            </a:r>
+            <a:r>
+              <a:rPr lang="en-US" dirty="0" err="1"/>
+              <a:t>tensorboard</a:t>
+            </a:r>
+            <a:r>
+              <a:rPr lang="en-US" dirty="0"/>
+              <a:t> to monitor it. </a:t>
+            </a:r>
+          </a:p>
+          <a:p>
+            <a:pPr lvl="1"/>
+            <a:r>
+              <a:rPr lang="en-US" dirty="0"/>
+              <a:t>Connect to the web page remotely while the server works. </a:t>
+            </a:r>
+          </a:p>
+          <a:p>
+            <a:r>
+              <a:rPr lang="en-US" dirty="0"/>
+              <a:t>Works mainly by monitoring log files. </a:t>
+            </a:r>
+          </a:p>
+          <a:p>
+            <a:pPr lvl="1"/>
+            <a:r>
+              <a:rPr lang="en-US" dirty="0"/>
+              <a:t>We set a log file directory to monitor, and write logs there via callbacks. </a:t>
+            </a:r>
+          </a:p>
+        </p:txBody>
+      </p:sp>
+    </p:spTree>
+    <p:extLst>
+      <p:ext uri="{BB962C8B-B14F-4D97-AF65-F5344CB8AC3E}">
+        <p14:creationId xmlns:p14="http://schemas.microsoft.com/office/powerpoint/2010/main" val="1969605170"/>
+      </p:ext>
+    </p:extLst>
+  </p:cSld>
+  <p:clrMapOvr>
+    <a:masterClrMapping/>
+  </p:clrMapOvr>
+</p:sld>
+</file>
+
+<file path=ppt/slides/slide80.xml><?xml version="1.0" encoding="utf-8"?>
 <p:sld xmlns:a="http://schemas.openxmlformats.org/drawingml/2006/main" xmlns:r="http://schemas.openxmlformats.org/officeDocument/2006/relationships" xmlns:p="http://schemas.openxmlformats.org/presentationml/2006/main" show="0">
   <p:cSld>
     <p:spTree>
@@ -16379,7 +17363,7 @@
 </p:sld>
 </file>
 
-<file path=ppt/slides/slide77.xml><?xml version="1.0" encoding="utf-8"?>
+<file path=ppt/slides/slide81.xml><?xml version="1.0" encoding="utf-8"?>
 <p:sld xmlns:a="http://schemas.openxmlformats.org/drawingml/2006/main" xmlns:r="http://schemas.openxmlformats.org/officeDocument/2006/relationships" xmlns:p="http://schemas.openxmlformats.org/presentationml/2006/main" show="0">
   <p:cSld>
     <p:spTree>
@@ -16552,7 +17536,7 @@
 </p:sld>
 </file>
 
-<file path=ppt/slides/slide78.xml><?xml version="1.0" encoding="utf-8"?>
+<file path=ppt/slides/slide82.xml><?xml version="1.0" encoding="utf-8"?>
 <p:sld xmlns:a="http://schemas.openxmlformats.org/drawingml/2006/main" xmlns:r="http://schemas.openxmlformats.org/officeDocument/2006/relationships" xmlns:p="http://schemas.openxmlformats.org/presentationml/2006/main" show="0">
   <p:cSld>
     <p:spTree>
@@ -16687,7 +17671,7 @@
 </p:sld>
 </file>
 
-<file path=ppt/slides/slide79.xml><?xml version="1.0" encoding="utf-8"?>
+<file path=ppt/slides/slide83.xml><?xml version="1.0" encoding="utf-8"?>
 <p:sld xmlns:a="http://schemas.openxmlformats.org/drawingml/2006/main" xmlns:r="http://schemas.openxmlformats.org/officeDocument/2006/relationships" xmlns:p="http://schemas.openxmlformats.org/presentationml/2006/main" show="0">
   <p:cSld>
     <p:spTree>
@@ -16830,168 +17814,7 @@
 </p:sld>
 </file>
 
-<file path=ppt/slides/slide8.xml><?xml version="1.0" encoding="utf-8"?>
-<p:sld xmlns:a="http://schemas.openxmlformats.org/drawingml/2006/main" xmlns:r="http://schemas.openxmlformats.org/officeDocument/2006/relationships" xmlns:p="http://schemas.openxmlformats.org/presentationml/2006/main">
-  <p:cSld>
-    <p:spTree>
-      <p:nvGrpSpPr>
-        <p:cNvPr id="1" name=""/>
-        <p:cNvGrpSpPr/>
-        <p:nvPr/>
-      </p:nvGrpSpPr>
-      <p:grpSpPr>
-        <a:xfrm>
-          <a:off x="0" y="0"/>
-          <a:ext cx="0" cy="0"/>
-          <a:chOff x="0" y="0"/>
-          <a:chExt cx="0" cy="0"/>
-        </a:xfrm>
-      </p:grpSpPr>
-      <p:sp>
-        <p:nvSpPr>
-          <p:cNvPr id="2" name="Title 1">
-            <a:extLst>
-              <a:ext uri="{FF2B5EF4-FFF2-40B4-BE49-F238E27FC236}">
-                <a16:creationId xmlns:a16="http://schemas.microsoft.com/office/drawing/2014/main" id="{2A2E4FFC-2F49-449F-85F4-087043D3C485}"/>
-              </a:ext>
-            </a:extLst>
-          </p:cNvPr>
-          <p:cNvSpPr>
-            <a:spLocks noGrp="1"/>
-          </p:cNvSpPr>
-          <p:nvPr>
-            <p:ph type="title"/>
-          </p:nvPr>
-        </p:nvSpPr>
-        <p:spPr/>
-        <p:txBody>
-          <a:bodyPr/>
-          <a:lstStyle/>
-          <a:p>
-            <a:r>
-              <a:rPr lang="en-CA" dirty="0"/>
-              <a:t>Neural Network Configuration</a:t>
-            </a:r>
-            <a:endParaRPr lang="LID4096" dirty="0"/>
-          </a:p>
-        </p:txBody>
-      </p:sp>
-      <p:sp>
-        <p:nvSpPr>
-          <p:cNvPr id="3" name="Content Placeholder 2">
-            <a:extLst>
-              <a:ext uri="{FF2B5EF4-FFF2-40B4-BE49-F238E27FC236}">
-                <a16:creationId xmlns:a16="http://schemas.microsoft.com/office/drawing/2014/main" id="{68DB43FE-383C-4ADB-B9D1-04FC825061A2}"/>
-              </a:ext>
-            </a:extLst>
-          </p:cNvPr>
-          <p:cNvSpPr>
-            <a:spLocks noGrp="1"/>
-          </p:cNvSpPr>
-          <p:nvPr>
-            <p:ph idx="1"/>
-          </p:nvPr>
-        </p:nvSpPr>
-        <p:spPr>
-          <a:xfrm>
-            <a:off x="1451579" y="1853754"/>
-            <a:ext cx="9603275" cy="4199727"/>
-          </a:xfrm>
-        </p:spPr>
-        <p:txBody>
-          <a:bodyPr>
-            <a:normAutofit lnSpcReduction="10000"/>
-          </a:bodyPr>
-          <a:lstStyle/>
-          <a:p>
-            <a:r>
-              <a:rPr lang="en-CA" dirty="0"/>
-              <a:t>We’ve seen that neural networks offer a large amount of flexibility in their configuration.</a:t>
-            </a:r>
-          </a:p>
-          <a:p>
-            <a:r>
-              <a:rPr lang="en-CA" dirty="0"/>
-              <a:t>How do we determine the optimal structure?</a:t>
-            </a:r>
-          </a:p>
-          <a:p>
-            <a:r>
-              <a:rPr lang="en-CA" dirty="0"/>
-              <a:t>Generally, the true answer is to grid search it. </a:t>
-            </a:r>
-          </a:p>
-          <a:p>
-            <a:pPr lvl="1"/>
-            <a:r>
-              <a:rPr lang="en-CA" dirty="0"/>
-              <a:t>Neural networks are very flexible, and can ‘learn around’ lots of changes. </a:t>
-            </a:r>
-          </a:p>
-          <a:p>
-            <a:r>
-              <a:rPr lang="en-CA" dirty="0"/>
-              <a:t>We can use some guidelines to get started in a reasonable and smart way. </a:t>
-            </a:r>
-          </a:p>
-          <a:p>
-            <a:pPr lvl="1"/>
-            <a:r>
-              <a:rPr lang="en-CA" dirty="0"/>
-              <a:t>Problem types (image class, NLP, </a:t>
-            </a:r>
-            <a:r>
-              <a:rPr lang="en-CA" dirty="0" err="1"/>
-              <a:t>etc</a:t>
-            </a:r>
-            <a:r>
-              <a:rPr lang="en-CA" dirty="0"/>
-              <a:t>…) have architectures that work well, and most things (except innovations) are based on what worked before. </a:t>
-            </a:r>
-          </a:p>
-          <a:p>
-            <a:r>
-              <a:rPr lang="en-CA" dirty="0"/>
-              <a:t>This is largely getting used to </a:t>
-            </a:r>
-            <a:r>
-              <a:rPr lang="en-CA" dirty="0" err="1"/>
-              <a:t>pytorch</a:t>
-            </a:r>
-            <a:r>
-              <a:rPr lang="en-CA" dirty="0"/>
-              <a:t> and making adjustments there. </a:t>
-            </a:r>
-          </a:p>
-          <a:p>
-            <a:pPr lvl="1"/>
-            <a:r>
-              <a:rPr lang="en-CA" dirty="0"/>
-              <a:t>Play around with some models, get used to syntax, try some different models. </a:t>
-            </a:r>
-          </a:p>
-          <a:p>
-            <a:r>
-              <a:rPr lang="en-CA" dirty="0"/>
-              <a:t>More of our focus is now on speed – the faster we converge, the more we can test. </a:t>
-            </a:r>
-          </a:p>
-        </p:txBody>
-      </p:sp>
-    </p:spTree>
-    <p:extLst>
-      <p:ext uri="{BB962C8B-B14F-4D97-AF65-F5344CB8AC3E}">
-        <p14:creationId xmlns:p14="http://schemas.microsoft.com/office/powerpoint/2010/main" val="2495634073"/>
-      </p:ext>
-    </p:extLst>
-  </p:cSld>
-  <p:clrMapOvr>
-    <a:masterClrMapping/>
-  </p:clrMapOvr>
-</p:sld>
-</file>
-
-<file path=ppt/slides/slide80.xml><?xml version="1.0" encoding="utf-8"?>
+<file path=ppt/slides/slide84.xml><?xml version="1.0" encoding="utf-8"?>
 <p:sld xmlns:a="http://schemas.openxmlformats.org/drawingml/2006/main" xmlns:r="http://schemas.openxmlformats.org/officeDocument/2006/relationships" xmlns:p="http://schemas.openxmlformats.org/presentationml/2006/main" show="0">
   <p:cSld>
     <p:spTree>
@@ -17134,7 +17957,7 @@
 </p:sld>
 </file>
 
-<file path=ppt/slides/slide81.xml><?xml version="1.0" encoding="utf-8"?>
+<file path=ppt/slides/slide85.xml><?xml version="1.0" encoding="utf-8"?>
 <p:sld xmlns:a="http://schemas.openxmlformats.org/drawingml/2006/main" xmlns:r="http://schemas.openxmlformats.org/officeDocument/2006/relationships" xmlns:p="http://schemas.openxmlformats.org/presentationml/2006/main" show="0">
   <p:cSld>
     <p:spTree>
@@ -17413,7 +18236,7 @@
 </p:sld>
 </file>
 
-<file path=ppt/slides/slide82.xml><?xml version="1.0" encoding="utf-8"?>
+<file path=ppt/slides/slide86.xml><?xml version="1.0" encoding="utf-8"?>
 <p:sld xmlns:a="http://schemas.openxmlformats.org/drawingml/2006/main" xmlns:r="http://schemas.openxmlformats.org/officeDocument/2006/relationships" xmlns:p="http://schemas.openxmlformats.org/presentationml/2006/main" show="0">
   <p:cSld>
     <p:spTree>
@@ -17678,7 +18501,7 @@
 </p:sld>
 </file>
 
-<file path=ppt/slides/slide83.xml><?xml version="1.0" encoding="utf-8"?>
+<file path=ppt/slides/slide87.xml><?xml version="1.0" encoding="utf-8"?>
 <p:sld xmlns:a="http://schemas.openxmlformats.org/drawingml/2006/main" xmlns:r="http://schemas.openxmlformats.org/officeDocument/2006/relationships" xmlns:p="http://schemas.openxmlformats.org/presentationml/2006/main" show="0">
   <p:cSld>
     <p:spTree>
@@ -17928,7 +18751,7 @@
 </p:sld>
 </file>
 
-<file path=ppt/slides/slide84.xml><?xml version="1.0" encoding="utf-8"?>
+<file path=ppt/slides/slide88.xml><?xml version="1.0" encoding="utf-8"?>
 <p:sld xmlns:a="http://schemas.openxmlformats.org/drawingml/2006/main" xmlns:r="http://schemas.openxmlformats.org/officeDocument/2006/relationships" xmlns:p="http://schemas.openxmlformats.org/presentationml/2006/main" show="0">
   <p:cSld>
     <p:spTree>
@@ -18095,7 +18918,7 @@
 </p:sld>
 </file>
 
-<file path=ppt/slides/slide85.xml><?xml version="1.0" encoding="utf-8"?>
+<file path=ppt/slides/slide89.xml><?xml version="1.0" encoding="utf-8"?>
 <p:sld xmlns:a="http://schemas.openxmlformats.org/drawingml/2006/main" xmlns:r="http://schemas.openxmlformats.org/officeDocument/2006/relationships" xmlns:p="http://schemas.openxmlformats.org/presentationml/2006/main" show="0">
   <p:cSld>
     <p:spTree>
@@ -18316,7 +19139,158 @@
 </p:sld>
 </file>
 
-<file path=ppt/slides/slide86.xml><?xml version="1.0" encoding="utf-8"?>
+<file path=ppt/slides/slide9.xml><?xml version="1.0" encoding="utf-8"?>
+<p:sld xmlns:a="http://schemas.openxmlformats.org/drawingml/2006/main" xmlns:r="http://schemas.openxmlformats.org/officeDocument/2006/relationships" xmlns:p="http://schemas.openxmlformats.org/presentationml/2006/main">
+  <p:cSld>
+    <p:spTree>
+      <p:nvGrpSpPr>
+        <p:cNvPr id="1" name=""/>
+        <p:cNvGrpSpPr/>
+        <p:nvPr/>
+      </p:nvGrpSpPr>
+      <p:grpSpPr>
+        <a:xfrm>
+          <a:off x="0" y="0"/>
+          <a:ext cx="0" cy="0"/>
+          <a:chOff x="0" y="0"/>
+          <a:chExt cx="0" cy="0"/>
+        </a:xfrm>
+      </p:grpSpPr>
+      <p:sp>
+        <p:nvSpPr>
+          <p:cNvPr id="2" name="Title 1">
+            <a:extLst>
+              <a:ext uri="{FF2B5EF4-FFF2-40B4-BE49-F238E27FC236}">
+                <a16:creationId xmlns:a16="http://schemas.microsoft.com/office/drawing/2014/main" id="{C2B3041B-70F8-3020-38D5-6EACDB24C7F6}"/>
+              </a:ext>
+            </a:extLst>
+          </p:cNvPr>
+          <p:cNvSpPr>
+            <a:spLocks noGrp="1"/>
+          </p:cNvSpPr>
+          <p:nvPr>
+            <p:ph type="title"/>
+          </p:nvPr>
+        </p:nvSpPr>
+        <p:spPr/>
+        <p:txBody>
+          <a:bodyPr/>
+          <a:lstStyle/>
+          <a:p>
+            <a:r>
+              <a:rPr lang="en-US" dirty="0"/>
+              <a:t>Using </a:t>
+            </a:r>
+            <a:r>
+              <a:rPr lang="en-US" dirty="0" err="1"/>
+              <a:t>Tensorboard</a:t>
+            </a:r>
+            <a:endParaRPr lang="en-US" dirty="0"/>
+          </a:p>
+        </p:txBody>
+      </p:sp>
+      <p:sp>
+        <p:nvSpPr>
+          <p:cNvPr id="3" name="Content Placeholder 2">
+            <a:extLst>
+              <a:ext uri="{FF2B5EF4-FFF2-40B4-BE49-F238E27FC236}">
+                <a16:creationId xmlns:a16="http://schemas.microsoft.com/office/drawing/2014/main" id="{D09E8C52-771D-8638-0D73-8253C050A362}"/>
+              </a:ext>
+            </a:extLst>
+          </p:cNvPr>
+          <p:cNvSpPr>
+            <a:spLocks noGrp="1"/>
+          </p:cNvSpPr>
+          <p:nvPr>
+            <p:ph idx="1"/>
+          </p:nvPr>
+        </p:nvSpPr>
+        <p:spPr/>
+        <p:txBody>
+          <a:bodyPr/>
+          <a:lstStyle/>
+          <a:p>
+            <a:r>
+              <a:rPr lang="en-US" dirty="0" err="1"/>
+              <a:t>Tensorboard</a:t>
+            </a:r>
+            <a:r>
+              <a:rPr lang="en-US" dirty="0"/>
+              <a:t> can do a lot of things and is very flexible. </a:t>
+            </a:r>
+          </a:p>
+          <a:p>
+            <a:r>
+              <a:rPr lang="en-US" dirty="0"/>
+              <a:t>Almost anything that you can write to a log can be sent to TB. </a:t>
+            </a:r>
+          </a:p>
+          <a:p>
+            <a:r>
+              <a:rPr lang="en-US" dirty="0"/>
+              <a:t>Some useful things are:</a:t>
+            </a:r>
+          </a:p>
+          <a:p>
+            <a:pPr lvl="1"/>
+            <a:r>
+              <a:rPr lang="en-US" dirty="0"/>
+              <a:t>Charts of scalars – loss, accuracy, </a:t>
+            </a:r>
+            <a:r>
+              <a:rPr lang="en-US" dirty="0" err="1"/>
+              <a:t>etc</a:t>
+            </a:r>
+            <a:r>
+              <a:rPr lang="en-US" dirty="0"/>
+              <a:t>…</a:t>
+            </a:r>
+          </a:p>
+          <a:p>
+            <a:pPr lvl="1"/>
+            <a:r>
+              <a:rPr lang="en-US" dirty="0"/>
+              <a:t>Printing examples – images, salience, NLP generation, kernels. </a:t>
+            </a:r>
+          </a:p>
+          <a:p>
+            <a:pPr lvl="1"/>
+            <a:r>
+              <a:rPr lang="en-US" dirty="0"/>
+              <a:t>Histograms – show progress of training. </a:t>
+            </a:r>
+          </a:p>
+          <a:p>
+            <a:pPr lvl="1"/>
+            <a:r>
+              <a:rPr lang="en-US" dirty="0" err="1"/>
+              <a:t>Hparams</a:t>
+            </a:r>
+            <a:r>
+              <a:rPr lang="en-US" dirty="0"/>
+              <a:t> – can be used to tune hyperparameters. </a:t>
+            </a:r>
+          </a:p>
+          <a:p>
+            <a:pPr lvl="1"/>
+            <a:endParaRPr lang="en-US" dirty="0"/>
+          </a:p>
+        </p:txBody>
+      </p:sp>
+    </p:spTree>
+    <p:extLst>
+      <p:ext uri="{BB962C8B-B14F-4D97-AF65-F5344CB8AC3E}">
+        <p14:creationId xmlns:p14="http://schemas.microsoft.com/office/powerpoint/2010/main" val="1507163619"/>
+      </p:ext>
+    </p:extLst>
+  </p:cSld>
+  <p:clrMapOvr>
+    <a:masterClrMapping/>
+  </p:clrMapOvr>
+</p:sld>
+</file>
+
+<file path=ppt/slides/slide90.xml><?xml version="1.0" encoding="utf-8"?>
 <p:sld xmlns:a="http://schemas.openxmlformats.org/drawingml/2006/main" xmlns:r="http://schemas.openxmlformats.org/officeDocument/2006/relationships" xmlns:p="http://schemas.openxmlformats.org/presentationml/2006/main" show="0">
   <p:cSld>
     <p:spTree>
@@ -18475,7 +19449,7 @@
 </p:sld>
 </file>
 
-<file path=ppt/slides/slide87.xml><?xml version="1.0" encoding="utf-8"?>
+<file path=ppt/slides/slide91.xml><?xml version="1.0" encoding="utf-8"?>
 <p:sld xmlns:a="http://schemas.openxmlformats.org/drawingml/2006/main" xmlns:r="http://schemas.openxmlformats.org/officeDocument/2006/relationships" xmlns:p="http://schemas.openxmlformats.org/presentationml/2006/main" show="0">
   <p:cSld>
     <p:spTree>
@@ -18634,251 +19608,6 @@
     <p:extLst>
       <p:ext uri="{BB962C8B-B14F-4D97-AF65-F5344CB8AC3E}">
         <p14:creationId xmlns:p14="http://schemas.microsoft.com/office/powerpoint/2010/main" val="1506513405"/>
-      </p:ext>
-    </p:extLst>
-  </p:cSld>
-  <p:clrMapOvr>
-    <a:masterClrMapping/>
-  </p:clrMapOvr>
-</p:sld>
-</file>
-
-<file path=ppt/slides/slide9.xml><?xml version="1.0" encoding="utf-8"?>
-<p:sld xmlns:a="http://schemas.openxmlformats.org/drawingml/2006/main" xmlns:r="http://schemas.openxmlformats.org/officeDocument/2006/relationships" xmlns:p="http://schemas.openxmlformats.org/presentationml/2006/main">
-  <p:cSld>
-    <p:spTree>
-      <p:nvGrpSpPr>
-        <p:cNvPr id="1" name=""/>
-        <p:cNvGrpSpPr/>
-        <p:nvPr/>
-      </p:nvGrpSpPr>
-      <p:grpSpPr>
-        <a:xfrm>
-          <a:off x="0" y="0"/>
-          <a:ext cx="0" cy="0"/>
-          <a:chOff x="0" y="0"/>
-          <a:chExt cx="0" cy="0"/>
-        </a:xfrm>
-      </p:grpSpPr>
-      <p:sp>
-        <p:nvSpPr>
-          <p:cNvPr id="2" name="Title 1">
-            <a:extLst>
-              <a:ext uri="{FF2B5EF4-FFF2-40B4-BE49-F238E27FC236}">
-                <a16:creationId xmlns:a16="http://schemas.microsoft.com/office/drawing/2014/main" id="{17C9DA24-AFDB-91EC-071C-BF0F9957F9D3}"/>
-              </a:ext>
-            </a:extLst>
-          </p:cNvPr>
-          <p:cNvSpPr>
-            <a:spLocks noGrp="1"/>
-          </p:cNvSpPr>
-          <p:nvPr>
-            <p:ph type="title"/>
-          </p:nvPr>
-        </p:nvSpPr>
-        <p:spPr>
-          <a:xfrm>
-            <a:off x="4498428" y="804519"/>
-            <a:ext cx="6556426" cy="1049235"/>
-          </a:xfrm>
-        </p:spPr>
-        <p:txBody>
-          <a:bodyPr/>
-          <a:lstStyle/>
-          <a:p>
-            <a:r>
-              <a:rPr lang="en-US" dirty="0"/>
-              <a:t>Converging Loss Plots</a:t>
-            </a:r>
-          </a:p>
-        </p:txBody>
-      </p:sp>
-      <p:sp>
-        <p:nvSpPr>
-          <p:cNvPr id="3" name="Content Placeholder 2">
-            <a:extLst>
-              <a:ext uri="{FF2B5EF4-FFF2-40B4-BE49-F238E27FC236}">
-                <a16:creationId xmlns:a16="http://schemas.microsoft.com/office/drawing/2014/main" id="{C623E00D-8DE0-1D03-19D1-D0D541C15FFF}"/>
-              </a:ext>
-            </a:extLst>
-          </p:cNvPr>
-          <p:cNvSpPr>
-            <a:spLocks noGrp="1"/>
-          </p:cNvSpPr>
-          <p:nvPr>
-            <p:ph idx="1"/>
-          </p:nvPr>
-        </p:nvSpPr>
-        <p:spPr>
-          <a:xfrm>
-            <a:off x="4313735" y="1853754"/>
-            <a:ext cx="7666061" cy="4199727"/>
-          </a:xfrm>
-        </p:spPr>
-        <p:txBody>
-          <a:bodyPr>
-            <a:normAutofit lnSpcReduction="10000"/>
-          </a:bodyPr>
-          <a:lstStyle/>
-          <a:p>
-            <a:r>
-              <a:rPr lang="en-US" dirty="0"/>
-              <a:t>Our main tool for monitoring training is the loss plot. </a:t>
-            </a:r>
-          </a:p>
-          <a:p>
-            <a:r>
-              <a:rPr lang="en-US" dirty="0"/>
-              <a:t>We are looking for, ideally, where the validation loss flattens, or minimizes and starts to increase again. </a:t>
-            </a:r>
-          </a:p>
-          <a:p>
-            <a:pPr lvl="1"/>
-            <a:r>
-              <a:rPr lang="en-US" dirty="0"/>
-              <a:t>The more stable, the more reliable, but it won’t always get this smooth. </a:t>
-            </a:r>
-          </a:p>
-          <a:p>
-            <a:r>
-              <a:rPr lang="en-US" dirty="0"/>
-              <a:t>These show an accurate small and large model – small is more jumpy. </a:t>
-            </a:r>
-          </a:p>
-          <a:p>
-            <a:pPr lvl="1"/>
-            <a:r>
-              <a:rPr lang="en-US" dirty="0"/>
-              <a:t>Error scale on Y are very small on both. </a:t>
-            </a:r>
-          </a:p>
-          <a:p>
-            <a:r>
-              <a:rPr lang="en-US" dirty="0"/>
-              <a:t>Training loss seems to be flattening as well – convergence. </a:t>
-            </a:r>
-          </a:p>
-          <a:p>
-            <a:pPr lvl="1"/>
-            <a:r>
-              <a:rPr lang="en-US" dirty="0"/>
-              <a:t>The ball has found the low point of the gradient curve. </a:t>
-            </a:r>
-          </a:p>
-          <a:p>
-            <a:pPr lvl="1"/>
-            <a:r>
-              <a:rPr lang="en-US" dirty="0"/>
-              <a:t>It may bump around a little, but we’ve found the bottom of loss. </a:t>
-            </a:r>
-          </a:p>
-          <a:p>
-            <a:r>
-              <a:rPr lang="en-US" dirty="0"/>
-              <a:t>The smaller the gap, the less overfitting – small and stable is ideal. </a:t>
-            </a:r>
-          </a:p>
-        </p:txBody>
-      </p:sp>
-      <p:pic>
-        <p:nvPicPr>
-          <p:cNvPr id="6146" name="Picture 2" descr="enter image description here">
-            <a:extLst>
-              <a:ext uri="{FF2B5EF4-FFF2-40B4-BE49-F238E27FC236}">
-                <a16:creationId xmlns:a16="http://schemas.microsoft.com/office/drawing/2014/main" id="{7A3E84A7-7C2E-A8AD-FF45-4094130373D0}"/>
-              </a:ext>
-            </a:extLst>
-          </p:cNvPr>
-          <p:cNvPicPr>
-            <a:picLocks noChangeAspect="1" noChangeArrowheads="1"/>
-          </p:cNvPicPr>
-          <p:nvPr/>
-        </p:nvPicPr>
-        <p:blipFill>
-          <a:blip r:embed="rId2">
-            <a:extLst>
-              <a:ext uri="{28A0092B-C50C-407E-A947-70E740481C1C}">
-                <a14:useLocalDpi xmlns:a14="http://schemas.microsoft.com/office/drawing/2010/main" val="0"/>
-              </a:ext>
-            </a:extLst>
-          </a:blip>
-          <a:srcRect/>
-          <a:stretch>
-            <a:fillRect/>
-          </a:stretch>
-        </p:blipFill>
-        <p:spPr bwMode="auto">
-          <a:xfrm>
-            <a:off x="0" y="2544264"/>
-            <a:ext cx="4313736" cy="4313736"/>
-          </a:xfrm>
-          <a:prstGeom prst="rect">
-            <a:avLst/>
-          </a:prstGeom>
-          <a:noFill/>
-          <a:extLst>
-            <a:ext uri="{909E8E84-426E-40DD-AFC4-6F175D3DCCD1}">
-              <a14:hiddenFill xmlns:a14="http://schemas.microsoft.com/office/drawing/2010/main">
-                <a:solidFill>
-                  <a:srgbClr val="FFFFFF"/>
-                </a:solidFill>
-              </a14:hiddenFill>
-            </a:ext>
-          </a:extLst>
-        </p:spPr>
-      </p:pic>
-      <p:pic>
-        <p:nvPicPr>
-          <p:cNvPr id="6151" name="Picture 7" descr="shows the convergence of loss function over training and validation data |  Download Scientific Diagram">
-            <a:hlinkClick r:id="rId3"/>
-            <a:extLst>
-              <a:ext uri="{FF2B5EF4-FFF2-40B4-BE49-F238E27FC236}">
-                <a16:creationId xmlns:a16="http://schemas.microsoft.com/office/drawing/2014/main" id="{076B6416-0FE9-90B5-7369-107524A7E6AE}"/>
-              </a:ext>
-            </a:extLst>
-          </p:cNvPr>
-          <p:cNvPicPr>
-            <a:picLocks noChangeAspect="1" noChangeArrowheads="1"/>
-          </p:cNvPicPr>
-          <p:nvPr/>
-        </p:nvPicPr>
-        <p:blipFill>
-          <a:blip r:embed="rId4">
-            <a:extLst>
-              <a:ext uri="{28A0092B-C50C-407E-A947-70E740481C1C}">
-                <a14:useLocalDpi xmlns:a14="http://schemas.microsoft.com/office/drawing/2010/main" val="0"/>
-              </a:ext>
-            </a:extLst>
-          </a:blip>
-          <a:srcRect/>
-          <a:stretch>
-            <a:fillRect/>
-          </a:stretch>
-        </p:blipFill>
-        <p:spPr bwMode="auto">
-          <a:xfrm>
-            <a:off x="0" y="0"/>
-            <a:ext cx="4313737" cy="2872441"/>
-          </a:xfrm>
-          <a:prstGeom prst="rect">
-            <a:avLst/>
-          </a:prstGeom>
-          <a:noFill/>
-          <a:extLst>
-            <a:ext uri="{909E8E84-426E-40DD-AFC4-6F175D3DCCD1}">
-              <a14:hiddenFill xmlns:a14="http://schemas.microsoft.com/office/drawing/2010/main">
-                <a:solidFill>
-                  <a:srgbClr val="FFFFFF"/>
-                </a:solidFill>
-              </a14:hiddenFill>
-            </a:ext>
-          </a:extLst>
-        </p:spPr>
-      </p:pic>
-    </p:spTree>
-    <p:extLst>
-      <p:ext uri="{BB962C8B-B14F-4D97-AF65-F5344CB8AC3E}">
-        <p14:creationId xmlns:p14="http://schemas.microsoft.com/office/powerpoint/2010/main" val="2096695825"/>
       </p:ext>
     </p:extLst>
   </p:cSld>

--- a/reference_content/Slides/pytorch_optimization.pptx
+++ b/reference_content/Slides/pytorch_optimization.pptx
@@ -3943,7 +3943,14 @@
           <a:p>
             <a:r>
               <a:rPr lang="en-US" dirty="0"/>
-              <a:t>Today – tuning, </a:t>
+              <a:t>Today – tuning neural networks (pull some updates). </a:t>
+            </a:r>
+          </a:p>
+          <a:p>
+            <a:pPr lvl="1"/>
+            <a:r>
+              <a:rPr lang="en-US" dirty="0"/>
+              <a:t>Tools: </a:t>
             </a:r>
             <a:r>
               <a:rPr lang="en-US" dirty="0" err="1"/>
@@ -4006,6 +4013,34 @@
               <a:rPr lang="en-US" dirty="0"/>
               <a:t> or automate with R.T.</a:t>
             </a:r>
+          </a:p>
+          <a:p>
+            <a:pPr lvl="1"/>
+            <a:r>
+              <a:rPr lang="en-US" dirty="0"/>
+              <a:t>I’m going to run this all in </a:t>
+            </a:r>
+            <a:r>
+              <a:rPr lang="en-US" dirty="0" err="1"/>
+              <a:t>colab</a:t>
+            </a:r>
+            <a:r>
+              <a:rPr lang="en-US" dirty="0"/>
+              <a:t>, if </a:t>
+            </a:r>
+            <a:r>
+              <a:rPr lang="en-US"/>
+              <a:t>you’re running local </a:t>
+            </a:r>
+            <a:r>
+              <a:rPr lang="en-US" dirty="0"/>
+              <a:t>you’ll have to install </a:t>
+            </a:r>
+            <a:r>
+              <a:rPr lang="en-US"/>
+              <a:t>some stuff*. </a:t>
+            </a:r>
+            <a:endParaRPr lang="en-US" dirty="0"/>
           </a:p>
           <a:p>
             <a:r>
